--- a/Project/slides/CMSC-4200-Group1-Project.pptx
+++ b/Project/slides/CMSC-4200-Group1-Project.pptx
@@ -2,10 +2,20 @@
 <file path=ppt/presentation.xml><?xml version="1.0" encoding="utf-8"?>
 <p:presentation xmlns:a="http://schemas.openxmlformats.org/drawingml/2006/main" xmlns:r="http://schemas.openxmlformats.org/officeDocument/2006/relationships" xmlns:p="http://schemas.openxmlformats.org/presentationml/2006/main" saveSubsetFonts="1">
   <p:sldMasterIdLst>
-    <p:sldMasterId id="2147483814" r:id="rId1"/>
+    <p:sldMasterId id="2147483815" r:id="rId1"/>
   </p:sldMasterIdLst>
   <p:sldIdLst>
-    <p:sldId id="257" r:id="rId2"/>
+    <p:sldId id="270" r:id="rId2"/>
+    <p:sldId id="258" r:id="rId3"/>
+    <p:sldId id="260" r:id="rId4"/>
+    <p:sldId id="261" r:id="rId5"/>
+    <p:sldId id="262" r:id="rId6"/>
+    <p:sldId id="263" r:id="rId7"/>
+    <p:sldId id="264" r:id="rId8"/>
+    <p:sldId id="265" r:id="rId9"/>
+    <p:sldId id="266" r:id="rId10"/>
+    <p:sldId id="267" r:id="rId11"/>
+    <p:sldId id="268" r:id="rId12"/>
   </p:sldIdLst>
   <p:sldSz cx="12192000" cy="6858000"/>
   <p:notesSz cx="6858000" cy="9144000"/>
@@ -115,7 +125,7 @@
 <file path=ppt/revisionInfo.xml><?xml version="1.0" encoding="utf-8"?>
 <p1510:revInfo xmlns:a="http://schemas.openxmlformats.org/drawingml/2006/main" xmlns:r="http://schemas.openxmlformats.org/officeDocument/2006/relationships" xmlns:p1510="http://schemas.microsoft.com/office/powerpoint/2015/10/main">
   <p1510:revLst>
-    <p1510:client id="{CC643A21-DF86-4903-A0E1-16499DD88D78}" v="24" dt="2026-03-08T14:44:29.427"/>
+    <p1510:client id="{CC643A21-DF86-4903-A0E1-16499DD88D78}" v="36" dt="2026-03-14T15:56:43.874"/>
   </p1510:revLst>
 </p1510:revInfo>
 </file>
@@ -125,369 +135,18 @@
   <pc:docChgLst>
     <pc:chgData name="Margo Bonal" userId="18c9fa0f-b53d-478b-9dc0-6ad88786c19f" providerId="ADAL" clId="{93D479E5-F67F-4B8A-A78F-A0B574A116B6}"/>
     <pc:docChg chg="undo redo custSel addSld delSld modSld addMainMaster delMainMaster">
-      <pc:chgData name="Margo Bonal" userId="18c9fa0f-b53d-478b-9dc0-6ad88786c19f" providerId="ADAL" clId="{93D479E5-F67F-4B8A-A78F-A0B574A116B6}" dt="2026-03-08T14:45:59.631" v="238" actId="12788"/>
+      <pc:chgData name="Margo Bonal" userId="18c9fa0f-b53d-478b-9dc0-6ad88786c19f" providerId="ADAL" clId="{93D479E5-F67F-4B8A-A78F-A0B574A116B6}" dt="2026-03-14T15:55:32.485" v="491" actId="20577"/>
       <pc:docMkLst>
         <pc:docMk/>
       </pc:docMkLst>
-      <pc:sldChg chg="addSp delSp modSp new del mod modMedia setBg modClrScheme delAnim setClrOvrMap delDesignElem chgLayout">
-        <pc:chgData name="Margo Bonal" userId="18c9fa0f-b53d-478b-9dc0-6ad88786c19f" providerId="ADAL" clId="{93D479E5-F67F-4B8A-A78F-A0B574A116B6}" dt="2026-03-08T14:43:01.559" v="214" actId="2696"/>
-        <pc:sldMkLst>
-          <pc:docMk/>
-          <pc:sldMk cId="1916661910" sldId="256"/>
-        </pc:sldMkLst>
-        <pc:spChg chg="mod">
-          <ac:chgData name="Margo Bonal" userId="18c9fa0f-b53d-478b-9dc0-6ad88786c19f" providerId="ADAL" clId="{93D479E5-F67F-4B8A-A78F-A0B574A116B6}" dt="2026-03-08T14:40:51.459" v="182"/>
-          <ac:spMkLst>
-            <pc:docMk/>
-            <pc:sldMk cId="1916661910" sldId="256"/>
-            <ac:spMk id="2" creationId="{66E93FAF-DA57-DC63-996E-E250A1ADF8C5}"/>
-          </ac:spMkLst>
-        </pc:spChg>
-        <pc:spChg chg="mod">
-          <ac:chgData name="Margo Bonal" userId="18c9fa0f-b53d-478b-9dc0-6ad88786c19f" providerId="ADAL" clId="{93D479E5-F67F-4B8A-A78F-A0B574A116B6}" dt="2026-03-08T14:40:51.459" v="182"/>
-          <ac:spMkLst>
-            <pc:docMk/>
-            <pc:sldMk cId="1916661910" sldId="256"/>
-            <ac:spMk id="3" creationId="{5FEB9712-F7F8-1B9F-8CD0-763DD90F0ADD}"/>
-          </ac:spMkLst>
-        </pc:spChg>
-        <pc:spChg chg="add del">
-          <ac:chgData name="Margo Bonal" userId="18c9fa0f-b53d-478b-9dc0-6ad88786c19f" providerId="ADAL" clId="{93D479E5-F67F-4B8A-A78F-A0B574A116B6}" dt="2026-03-08T14:30:23.243" v="23" actId="26606"/>
-          <ac:spMkLst>
-            <pc:docMk/>
-            <pc:sldMk cId="1916661910" sldId="256"/>
-            <ac:spMk id="5" creationId="{8BEC44CD-E290-4D60-A056-5BA05B182AC3}"/>
-          </ac:spMkLst>
-        </pc:spChg>
-        <pc:spChg chg="add del">
-          <ac:chgData name="Margo Bonal" userId="18c9fa0f-b53d-478b-9dc0-6ad88786c19f" providerId="ADAL" clId="{93D479E5-F67F-4B8A-A78F-A0B574A116B6}" dt="2026-03-08T14:30:23.243" v="23" actId="26606"/>
-          <ac:spMkLst>
-            <pc:docMk/>
-            <pc:sldMk cId="1916661910" sldId="256"/>
-            <ac:spMk id="7" creationId="{B2C335F7-F61C-4EB4-80F2-4B1438FE66BB}"/>
-          </ac:spMkLst>
-        </pc:spChg>
-        <pc:spChg chg="add del">
-          <ac:chgData name="Margo Bonal" userId="18c9fa0f-b53d-478b-9dc0-6ad88786c19f" providerId="ADAL" clId="{93D479E5-F67F-4B8A-A78F-A0B574A116B6}" dt="2026-03-08T14:30:23.243" v="23" actId="26606"/>
-          <ac:spMkLst>
-            <pc:docMk/>
-            <pc:sldMk cId="1916661910" sldId="256"/>
-            <ac:spMk id="8" creationId="{F1189494-2B67-46D2-93D6-A122A09BF6B2}"/>
-          </ac:spMkLst>
-        </pc:spChg>
-        <pc:spChg chg="add del">
-          <ac:chgData name="Margo Bonal" userId="18c9fa0f-b53d-478b-9dc0-6ad88786c19f" providerId="ADAL" clId="{93D479E5-F67F-4B8A-A78F-A0B574A116B6}" dt="2026-03-08T14:29:22.790" v="6" actId="26606"/>
-          <ac:spMkLst>
-            <pc:docMk/>
-            <pc:sldMk cId="1916661910" sldId="256"/>
-            <ac:spMk id="9" creationId="{D3F794D0-2982-490E-88DA-93D48975085F}"/>
-          </ac:spMkLst>
-        </pc:spChg>
-        <pc:spChg chg="add del">
-          <ac:chgData name="Margo Bonal" userId="18c9fa0f-b53d-478b-9dc0-6ad88786c19f" providerId="ADAL" clId="{93D479E5-F67F-4B8A-A78F-A0B574A116B6}" dt="2026-03-08T14:30:25.094" v="27" actId="26606"/>
-          <ac:spMkLst>
-            <pc:docMk/>
-            <pc:sldMk cId="1916661910" sldId="256"/>
-            <ac:spMk id="10" creationId="{BBE8E1BA-1863-0F95-E1A3-14697014C39B}"/>
-          </ac:spMkLst>
-        </pc:spChg>
-        <pc:spChg chg="add del">
-          <ac:chgData name="Margo Bonal" userId="18c9fa0f-b53d-478b-9dc0-6ad88786c19f" providerId="ADAL" clId="{93D479E5-F67F-4B8A-A78F-A0B574A116B6}" dt="2026-03-08T14:29:22.790" v="6" actId="26606"/>
-          <ac:spMkLst>
-            <pc:docMk/>
-            <pc:sldMk cId="1916661910" sldId="256"/>
-            <ac:spMk id="11" creationId="{AFD24A3D-F07A-44A9-BE55-5576292E152D}"/>
-          </ac:spMkLst>
-        </pc:spChg>
-        <pc:spChg chg="add del">
-          <ac:chgData name="Margo Bonal" userId="18c9fa0f-b53d-478b-9dc0-6ad88786c19f" providerId="ADAL" clId="{93D479E5-F67F-4B8A-A78F-A0B574A116B6}" dt="2026-03-08T14:29:22.790" v="6" actId="26606"/>
-          <ac:spMkLst>
-            <pc:docMk/>
-            <pc:sldMk cId="1916661910" sldId="256"/>
-            <ac:spMk id="13" creationId="{204441C9-FD2D-4031-B5C5-67478196CCCF}"/>
-          </ac:spMkLst>
-        </pc:spChg>
-        <pc:spChg chg="add del">
-          <ac:chgData name="Margo Bonal" userId="18c9fa0f-b53d-478b-9dc0-6ad88786c19f" providerId="ADAL" clId="{93D479E5-F67F-4B8A-A78F-A0B574A116B6}" dt="2026-03-08T14:30:25.094" v="27" actId="26606"/>
-          <ac:spMkLst>
-            <pc:docMk/>
-            <pc:sldMk cId="1916661910" sldId="256"/>
-            <ac:spMk id="14" creationId="{A9CCD9CD-49AE-3D3E-923B-81ECD3FBF75F}"/>
-          </ac:spMkLst>
-        </pc:spChg>
-        <pc:spChg chg="add del">
-          <ac:chgData name="Margo Bonal" userId="18c9fa0f-b53d-478b-9dc0-6ad88786c19f" providerId="ADAL" clId="{93D479E5-F67F-4B8A-A78F-A0B574A116B6}" dt="2026-03-08T14:29:22.790" v="6" actId="26606"/>
-          <ac:spMkLst>
-            <pc:docMk/>
-            <pc:sldMk cId="1916661910" sldId="256"/>
-            <ac:spMk id="15" creationId="{EBF09AEC-6E6E-418F-9974-8730F1B2B6EF}"/>
-          </ac:spMkLst>
-        </pc:spChg>
-        <pc:spChg chg="add del">
-          <ac:chgData name="Margo Bonal" userId="18c9fa0f-b53d-478b-9dc0-6ad88786c19f" providerId="ADAL" clId="{93D479E5-F67F-4B8A-A78F-A0B574A116B6}" dt="2026-03-08T14:31:47.121" v="54" actId="26606"/>
-          <ac:spMkLst>
-            <pc:docMk/>
-            <pc:sldMk cId="1916661910" sldId="256"/>
-            <ac:spMk id="16" creationId="{8BEC44CD-E290-4D60-A056-5BA05B182AC3}"/>
-          </ac:spMkLst>
-        </pc:spChg>
-        <pc:spChg chg="add del">
-          <ac:chgData name="Margo Bonal" userId="18c9fa0f-b53d-478b-9dc0-6ad88786c19f" providerId="ADAL" clId="{93D479E5-F67F-4B8A-A78F-A0B574A116B6}" dt="2026-03-08T14:29:22.790" v="6" actId="26606"/>
-          <ac:spMkLst>
-            <pc:docMk/>
-            <pc:sldMk cId="1916661910" sldId="256"/>
-            <ac:spMk id="17" creationId="{3D9D3989-3E00-4727-914E-959DFE8FACE9}"/>
-          </ac:spMkLst>
-        </pc:spChg>
-        <pc:spChg chg="add del">
-          <ac:chgData name="Margo Bonal" userId="18c9fa0f-b53d-478b-9dc0-6ad88786c19f" providerId="ADAL" clId="{93D479E5-F67F-4B8A-A78F-A0B574A116B6}" dt="2026-03-08T14:31:47.121" v="54" actId="26606"/>
-          <ac:spMkLst>
-            <pc:docMk/>
-            <pc:sldMk cId="1916661910" sldId="256"/>
-            <ac:spMk id="19" creationId="{B2C335F7-F61C-4EB4-80F2-4B1438FE66BB}"/>
-          </ac:spMkLst>
-        </pc:spChg>
-        <pc:spChg chg="add del">
-          <ac:chgData name="Margo Bonal" userId="18c9fa0f-b53d-478b-9dc0-6ad88786c19f" providerId="ADAL" clId="{93D479E5-F67F-4B8A-A78F-A0B574A116B6}" dt="2026-03-08T14:31:47.121" v="54" actId="26606"/>
-          <ac:spMkLst>
-            <pc:docMk/>
-            <pc:sldMk cId="1916661910" sldId="256"/>
-            <ac:spMk id="20" creationId="{F1189494-2B67-46D2-93D6-A122A09BF6B2}"/>
-          </ac:spMkLst>
-        </pc:spChg>
-        <pc:spChg chg="add mod">
-          <ac:chgData name="Margo Bonal" userId="18c9fa0f-b53d-478b-9dc0-6ad88786c19f" providerId="ADAL" clId="{93D479E5-F67F-4B8A-A78F-A0B574A116B6}" dt="2026-03-08T14:37:18.355" v="142" actId="14100"/>
-          <ac:spMkLst>
-            <pc:docMk/>
-            <pc:sldMk cId="1916661910" sldId="256"/>
-            <ac:spMk id="21" creationId="{FB8638CA-50E0-64AB-0860-81FE131D8007}"/>
-          </ac:spMkLst>
-        </pc:spChg>
-        <pc:spChg chg="add del">
-          <ac:chgData name="Margo Bonal" userId="18c9fa0f-b53d-478b-9dc0-6ad88786c19f" providerId="ADAL" clId="{93D479E5-F67F-4B8A-A78F-A0B574A116B6}" dt="2026-03-08T14:32:49.060" v="64" actId="26606"/>
-          <ac:spMkLst>
-            <pc:docMk/>
-            <pc:sldMk cId="1916661910" sldId="256"/>
-            <ac:spMk id="22" creationId="{A88F843D-1C1B-C740-AC27-E3238D0F5F47}"/>
-          </ac:spMkLst>
-        </pc:spChg>
-        <pc:spChg chg="add del">
-          <ac:chgData name="Margo Bonal" userId="18c9fa0f-b53d-478b-9dc0-6ad88786c19f" providerId="ADAL" clId="{93D479E5-F67F-4B8A-A78F-A0B574A116B6}" dt="2026-03-08T14:32:49.060" v="64" actId="26606"/>
-          <ac:spMkLst>
-            <pc:docMk/>
-            <pc:sldMk cId="1916661910" sldId="256"/>
-            <ac:spMk id="24" creationId="{9F0EA5A9-0D12-3644-BBEC-6D9D192EBEF4}"/>
-          </ac:spMkLst>
-        </pc:spChg>
-        <pc:spChg chg="add del">
-          <ac:chgData name="Margo Bonal" userId="18c9fa0f-b53d-478b-9dc0-6ad88786c19f" providerId="ADAL" clId="{93D479E5-F67F-4B8A-A78F-A0B574A116B6}" dt="2026-03-08T14:32:49.060" v="64" actId="26606"/>
-          <ac:spMkLst>
-            <pc:docMk/>
-            <pc:sldMk cId="1916661910" sldId="256"/>
-            <ac:spMk id="26" creationId="{A21C8291-E3D5-4240-8FF4-E5213CBCC453}"/>
-          </ac:spMkLst>
-        </pc:spChg>
-        <pc:spChg chg="add del">
-          <ac:chgData name="Margo Bonal" userId="18c9fa0f-b53d-478b-9dc0-6ad88786c19f" providerId="ADAL" clId="{93D479E5-F67F-4B8A-A78F-A0B574A116B6}" dt="2026-03-08T14:32:49.060" v="64" actId="26606"/>
-          <ac:spMkLst>
-            <pc:docMk/>
-            <pc:sldMk cId="1916661910" sldId="256"/>
-            <ac:spMk id="28" creationId="{08B44AFE-C181-7047-8CC9-CA00BD385EEA}"/>
-          </ac:spMkLst>
-        </pc:spChg>
-        <pc:spChg chg="add del">
-          <ac:chgData name="Margo Bonal" userId="18c9fa0f-b53d-478b-9dc0-6ad88786c19f" providerId="ADAL" clId="{93D479E5-F67F-4B8A-A78F-A0B574A116B6}" dt="2026-03-08T14:31:20.791" v="51" actId="26606"/>
-          <ac:spMkLst>
-            <pc:docMk/>
-            <pc:sldMk cId="1916661910" sldId="256"/>
-            <ac:spMk id="29" creationId="{E49D7415-2F11-44C2-B6AA-13A25B6814B9}"/>
-          </ac:spMkLst>
-        </pc:spChg>
-        <pc:spChg chg="add del">
-          <ac:chgData name="Margo Bonal" userId="18c9fa0f-b53d-478b-9dc0-6ad88786c19f" providerId="ADAL" clId="{93D479E5-F67F-4B8A-A78F-A0B574A116B6}" dt="2026-03-08T14:36:52.675" v="127" actId="26606"/>
-          <ac:spMkLst>
-            <pc:docMk/>
-            <pc:sldMk cId="1916661910" sldId="256"/>
-            <ac:spMk id="30" creationId="{B7E2F724-2FB3-4D1D-A730-739B8654C030}"/>
-          </ac:spMkLst>
-        </pc:spChg>
-        <pc:spChg chg="add del">
-          <ac:chgData name="Margo Bonal" userId="18c9fa0f-b53d-478b-9dc0-6ad88786c19f" providerId="ADAL" clId="{93D479E5-F67F-4B8A-A78F-A0B574A116B6}" dt="2026-03-08T14:36:52.675" v="127" actId="26606"/>
-          <ac:spMkLst>
-            <pc:docMk/>
-            <pc:sldMk cId="1916661910" sldId="256"/>
-            <ac:spMk id="35" creationId="{B2C335F7-F61C-4EB4-80F2-4B1438FE66BB}"/>
-          </ac:spMkLst>
-        </pc:spChg>
-        <pc:spChg chg="add del">
-          <ac:chgData name="Margo Bonal" userId="18c9fa0f-b53d-478b-9dc0-6ad88786c19f" providerId="ADAL" clId="{93D479E5-F67F-4B8A-A78F-A0B574A116B6}" dt="2026-03-08T14:35:24.191" v="83" actId="26606"/>
-          <ac:spMkLst>
-            <pc:docMk/>
-            <pc:sldMk cId="1916661910" sldId="256"/>
-            <ac:spMk id="44" creationId="{37011A86-DB53-41C7-94D9-9B8BF9DF1F8E}"/>
-          </ac:spMkLst>
-        </pc:spChg>
-        <pc:spChg chg="add del">
-          <ac:chgData name="Margo Bonal" userId="18c9fa0f-b53d-478b-9dc0-6ad88786c19f" providerId="ADAL" clId="{93D479E5-F67F-4B8A-A78F-A0B574A116B6}" dt="2026-03-08T14:35:24.191" v="83" actId="26606"/>
-          <ac:spMkLst>
-            <pc:docMk/>
-            <pc:sldMk cId="1916661910" sldId="256"/>
-            <ac:spMk id="46" creationId="{C5258B9E-C015-412F-9B81-E40D361E9D99}"/>
-          </ac:spMkLst>
-        </pc:spChg>
-        <pc:spChg chg="add del">
-          <ac:chgData name="Margo Bonal" userId="18c9fa0f-b53d-478b-9dc0-6ad88786c19f" providerId="ADAL" clId="{93D479E5-F67F-4B8A-A78F-A0B574A116B6}" dt="2026-03-08T14:40:51.459" v="182"/>
-          <ac:spMkLst>
-            <pc:docMk/>
-            <pc:sldMk cId="1916661910" sldId="256"/>
-            <ac:spMk id="52" creationId="{91C2F78B-DEE8-4195-A196-DFC51BDADFF9}"/>
-          </ac:spMkLst>
-        </pc:spChg>
-        <pc:spChg chg="add del">
-          <ac:chgData name="Margo Bonal" userId="18c9fa0f-b53d-478b-9dc0-6ad88786c19f" providerId="ADAL" clId="{93D479E5-F67F-4B8A-A78F-A0B574A116B6}" dt="2026-03-08T14:40:51.459" v="182"/>
-          <ac:spMkLst>
-            <pc:docMk/>
-            <pc:sldMk cId="1916661910" sldId="256"/>
-            <ac:spMk id="53" creationId="{A1D79D08-4BE8-4799-BE09-5078DFEE2256}"/>
-          </ac:spMkLst>
-        </pc:spChg>
-        <pc:spChg chg="add del">
-          <ac:chgData name="Margo Bonal" userId="18c9fa0f-b53d-478b-9dc0-6ad88786c19f" providerId="ADAL" clId="{93D479E5-F67F-4B8A-A78F-A0B574A116B6}" dt="2026-03-08T14:40:51.459" v="182"/>
-          <ac:spMkLst>
-            <pc:docMk/>
-            <pc:sldMk cId="1916661910" sldId="256"/>
-            <ac:spMk id="55" creationId="{685B57F6-59DE-4274-A37C-F47FE4E42EEF}"/>
-          </ac:spMkLst>
-        </pc:spChg>
-        <pc:picChg chg="add del">
-          <ac:chgData name="Margo Bonal" userId="18c9fa0f-b53d-478b-9dc0-6ad88786c19f" providerId="ADAL" clId="{93D479E5-F67F-4B8A-A78F-A0B574A116B6}" dt="2026-03-08T14:29:22.790" v="6" actId="26606"/>
-          <ac:picMkLst>
-            <pc:docMk/>
-            <pc:sldMk cId="1916661910" sldId="256"/>
-            <ac:picMk id="4" creationId="{9099D780-40F1-E4DC-346A-37ACB5C77608}"/>
-          </ac:picMkLst>
-        </pc:picChg>
-        <pc:picChg chg="add del">
-          <ac:chgData name="Margo Bonal" userId="18c9fa0f-b53d-478b-9dc0-6ad88786c19f" providerId="ADAL" clId="{93D479E5-F67F-4B8A-A78F-A0B574A116B6}" dt="2026-03-08T14:30:23.243" v="23" actId="26606"/>
-          <ac:picMkLst>
-            <pc:docMk/>
-            <pc:sldMk cId="1916661910" sldId="256"/>
-            <ac:picMk id="6" creationId="{94988845-56BB-1FA7-F202-4695A399A736}"/>
-          </ac:picMkLst>
-        </pc:picChg>
-        <pc:picChg chg="add del mod">
-          <ac:chgData name="Margo Bonal" userId="18c9fa0f-b53d-478b-9dc0-6ad88786c19f" providerId="ADAL" clId="{93D479E5-F67F-4B8A-A78F-A0B574A116B6}" dt="2026-03-08T14:30:25.094" v="27" actId="26606"/>
-          <ac:picMkLst>
-            <pc:docMk/>
-            <pc:sldMk cId="1916661910" sldId="256"/>
-            <ac:picMk id="12" creationId="{4CDF7230-D252-5F65-9D92-C744941F755E}"/>
-          </ac:picMkLst>
-        </pc:picChg>
-        <pc:picChg chg="add del mod ord">
-          <ac:chgData name="Margo Bonal" userId="18c9fa0f-b53d-478b-9dc0-6ad88786c19f" providerId="ADAL" clId="{93D479E5-F67F-4B8A-A78F-A0B574A116B6}" dt="2026-03-08T14:31:25.571" v="53" actId="478"/>
-          <ac:picMkLst>
-            <pc:docMk/>
-            <pc:sldMk cId="1916661910" sldId="256"/>
-            <ac:picMk id="18" creationId="{94988845-56BB-1FA7-F202-4695A399A736}"/>
-          </ac:picMkLst>
-        </pc:picChg>
-        <pc:picChg chg="add del mod">
-          <ac:chgData name="Margo Bonal" userId="18c9fa0f-b53d-478b-9dc0-6ad88786c19f" providerId="ADAL" clId="{93D479E5-F67F-4B8A-A78F-A0B574A116B6}" dt="2026-03-08T14:32:11.757" v="59" actId="478"/>
-          <ac:picMkLst>
-            <pc:docMk/>
-            <pc:sldMk cId="1916661910" sldId="256"/>
-            <ac:picMk id="23" creationId="{E06D9698-064E-285E-BC23-01B89AEAF2DC}"/>
-          </ac:picMkLst>
-        </pc:picChg>
-        <pc:picChg chg="add del mod">
-          <ac:chgData name="Margo Bonal" userId="18c9fa0f-b53d-478b-9dc0-6ad88786c19f" providerId="ADAL" clId="{93D479E5-F67F-4B8A-A78F-A0B574A116B6}" dt="2026-03-08T14:36:52.406" v="126" actId="478"/>
-          <ac:picMkLst>
-            <pc:docMk/>
-            <pc:sldMk cId="1916661910" sldId="256"/>
-            <ac:picMk id="32" creationId="{0F4A3B43-4407-646E-6BCD-E36288A9ADCF}"/>
-          </ac:picMkLst>
-        </pc:picChg>
-        <pc:picChg chg="add del">
-          <ac:chgData name="Margo Bonal" userId="18c9fa0f-b53d-478b-9dc0-6ad88786c19f" providerId="ADAL" clId="{93D479E5-F67F-4B8A-A78F-A0B574A116B6}" dt="2026-03-08T14:35:24.191" v="83" actId="26606"/>
-          <ac:picMkLst>
-            <pc:docMk/>
-            <pc:sldMk cId="1916661910" sldId="256"/>
-            <ac:picMk id="37" creationId="{2F9DB29F-5442-EBB3-E53A-97351E306FA6}"/>
-          </ac:picMkLst>
-        </pc:picChg>
-        <pc:picChg chg="add del mod">
-          <ac:chgData name="Margo Bonal" userId="18c9fa0f-b53d-478b-9dc0-6ad88786c19f" providerId="ADAL" clId="{93D479E5-F67F-4B8A-A78F-A0B574A116B6}" dt="2026-03-08T14:36:58.752" v="136" actId="1076"/>
-          <ac:picMkLst>
-            <pc:docMk/>
-            <pc:sldMk cId="1916661910" sldId="256"/>
-            <ac:picMk id="56" creationId="{8288B875-AA35-417A-4088-BFACCF23748D}"/>
-          </ac:picMkLst>
-        </pc:picChg>
-        <pc:cxnChg chg="add del">
-          <ac:chgData name="Margo Bonal" userId="18c9fa0f-b53d-478b-9dc0-6ad88786c19f" providerId="ADAL" clId="{93D479E5-F67F-4B8A-A78F-A0B574A116B6}" dt="2026-03-08T14:31:20.791" v="51" actId="26606"/>
-          <ac:cxnSpMkLst>
-            <pc:docMk/>
-            <pc:sldMk cId="1916661910" sldId="256"/>
-            <ac:cxnSpMk id="25" creationId="{F64F9B95-9045-48D2-B9F3-2927E98F54AA}"/>
-          </ac:cxnSpMkLst>
-        </pc:cxnChg>
-        <pc:cxnChg chg="add del">
-          <ac:chgData name="Margo Bonal" userId="18c9fa0f-b53d-478b-9dc0-6ad88786c19f" providerId="ADAL" clId="{93D479E5-F67F-4B8A-A78F-A0B574A116B6}" dt="2026-03-08T14:31:20.791" v="51" actId="26606"/>
-          <ac:cxnSpMkLst>
-            <pc:docMk/>
-            <pc:sldMk cId="1916661910" sldId="256"/>
-            <ac:cxnSpMk id="27" creationId="{085AA86F-6A4D-4BCB-A045-D992CDC2959B}"/>
-          </ac:cxnSpMkLst>
-        </pc:cxnChg>
-        <pc:cxnChg chg="add del">
-          <ac:chgData name="Margo Bonal" userId="18c9fa0f-b53d-478b-9dc0-6ad88786c19f" providerId="ADAL" clId="{93D479E5-F67F-4B8A-A78F-A0B574A116B6}" dt="2026-03-08T14:31:20.791" v="51" actId="26606"/>
-          <ac:cxnSpMkLst>
-            <pc:docMk/>
-            <pc:sldMk cId="1916661910" sldId="256"/>
-            <ac:cxnSpMk id="33" creationId="{B810270D-76A7-44B3-9746-7EDF5788602E}"/>
-          </ac:cxnSpMkLst>
-        </pc:cxnChg>
-        <pc:cxnChg chg="add del">
-          <ac:chgData name="Margo Bonal" userId="18c9fa0f-b53d-478b-9dc0-6ad88786c19f" providerId="ADAL" clId="{93D479E5-F67F-4B8A-A78F-A0B574A116B6}" dt="2026-03-08T14:35:24.191" v="83" actId="26606"/>
-          <ac:cxnSpMkLst>
-            <pc:docMk/>
-            <pc:sldMk cId="1916661910" sldId="256"/>
-            <ac:cxnSpMk id="40" creationId="{462919E4-C488-4107-9EF1-66152F848008}"/>
-          </ac:cxnSpMkLst>
-        </pc:cxnChg>
-        <pc:cxnChg chg="add del">
-          <ac:chgData name="Margo Bonal" userId="18c9fa0f-b53d-478b-9dc0-6ad88786c19f" providerId="ADAL" clId="{93D479E5-F67F-4B8A-A78F-A0B574A116B6}" dt="2026-03-08T14:35:24.191" v="83" actId="26606"/>
-          <ac:cxnSpMkLst>
-            <pc:docMk/>
-            <pc:sldMk cId="1916661910" sldId="256"/>
-            <ac:cxnSpMk id="42" creationId="{0BF79732-4088-424C-A653-4534E4389443}"/>
-          </ac:cxnSpMkLst>
-        </pc:cxnChg>
-        <pc:cxnChg chg="add del">
-          <ac:chgData name="Margo Bonal" userId="18c9fa0f-b53d-478b-9dc0-6ad88786c19f" providerId="ADAL" clId="{93D479E5-F67F-4B8A-A78F-A0B574A116B6}" dt="2026-03-08T14:40:51.459" v="182"/>
-          <ac:cxnSpMkLst>
-            <pc:docMk/>
-            <pc:sldMk cId="1916661910" sldId="256"/>
-            <ac:cxnSpMk id="54" creationId="{C95D65A1-16CB-407F-993F-2A6D59BCC0C8}"/>
-          </ac:cxnSpMkLst>
-        </pc:cxnChg>
-        <pc:cxnChg chg="add del">
-          <ac:chgData name="Margo Bonal" userId="18c9fa0f-b53d-478b-9dc0-6ad88786c19f" providerId="ADAL" clId="{93D479E5-F67F-4B8A-A78F-A0B574A116B6}" dt="2026-03-08T14:40:51.459" v="182"/>
-          <ac:cxnSpMkLst>
-            <pc:docMk/>
-            <pc:sldMk cId="1916661910" sldId="256"/>
-            <ac:cxnSpMk id="57" creationId="{2AD042BA-B482-486E-9E0C-75374069BBBD}"/>
-          </ac:cxnSpMkLst>
-        </pc:cxnChg>
-      </pc:sldChg>
-      <pc:sldChg chg="addSp delSp modSp new mod setBg modClrScheme addAnim delAnim setClrOvrMap chgLayout">
-        <pc:chgData name="Margo Bonal" userId="18c9fa0f-b53d-478b-9dc0-6ad88786c19f" providerId="ADAL" clId="{93D479E5-F67F-4B8A-A78F-A0B574A116B6}" dt="2026-03-08T14:45:59.631" v="238" actId="12788"/>
+      <pc:sldChg chg="addSp delSp modSp new del mod setBg modClrScheme addAnim delAnim setClrOvrMap chgLayout">
+        <pc:chgData name="Margo Bonal" userId="18c9fa0f-b53d-478b-9dc0-6ad88786c19f" providerId="ADAL" clId="{93D479E5-F67F-4B8A-A78F-A0B574A116B6}" dt="2026-03-14T15:52:10.150" v="479" actId="2696"/>
         <pc:sldMkLst>
           <pc:docMk/>
           <pc:sldMk cId="798257210" sldId="257"/>
         </pc:sldMkLst>
         <pc:spChg chg="mod">
-          <ac:chgData name="Margo Bonal" userId="18c9fa0f-b53d-478b-9dc0-6ad88786c19f" providerId="ADAL" clId="{93D479E5-F67F-4B8A-A78F-A0B574A116B6}" dt="2026-03-08T14:45:30.135" v="235" actId="12788"/>
+          <ac:chgData name="Margo Bonal" userId="18c9fa0f-b53d-478b-9dc0-6ad88786c19f" providerId="ADAL" clId="{93D479E5-F67F-4B8A-A78F-A0B574A116B6}" dt="2026-03-14T15:45:47.954" v="249" actId="1076"/>
           <ac:spMkLst>
             <pc:docMk/>
             <pc:sldMk cId="798257210" sldId="257"/>
@@ -495,1419 +154,384 @@
           </ac:spMkLst>
         </pc:spChg>
         <pc:spChg chg="mod">
-          <ac:chgData name="Margo Bonal" userId="18c9fa0f-b53d-478b-9dc0-6ad88786c19f" providerId="ADAL" clId="{93D479E5-F67F-4B8A-A78F-A0B574A116B6}" dt="2026-03-08T14:45:30.135" v="235" actId="12788"/>
+          <ac:chgData name="Margo Bonal" userId="18c9fa0f-b53d-478b-9dc0-6ad88786c19f" providerId="ADAL" clId="{93D479E5-F67F-4B8A-A78F-A0B574A116B6}" dt="2026-03-14T15:45:18.440" v="242" actId="207"/>
           <ac:spMkLst>
             <pc:docMk/>
             <pc:sldMk cId="798257210" sldId="257"/>
             <ac:spMk id="3" creationId="{72C7D5B6-BC99-9EE0-AEF1-1411FD8A43B9}"/>
           </ac:spMkLst>
         </pc:spChg>
-        <pc:spChg chg="add mod">
-          <ac:chgData name="Margo Bonal" userId="18c9fa0f-b53d-478b-9dc0-6ad88786c19f" providerId="ADAL" clId="{93D479E5-F67F-4B8A-A78F-A0B574A116B6}" dt="2026-03-08T14:45:30.135" v="235" actId="12788"/>
+      </pc:sldChg>
+      <pc:sldChg chg="addSp modSp new mod setBg">
+        <pc:chgData name="Margo Bonal" userId="18c9fa0f-b53d-478b-9dc0-6ad88786c19f" providerId="ADAL" clId="{93D479E5-F67F-4B8A-A78F-A0B574A116B6}" dt="2026-03-14T15:55:32.485" v="491" actId="20577"/>
+        <pc:sldMkLst>
+          <pc:docMk/>
+          <pc:sldMk cId="2004418569" sldId="258"/>
+        </pc:sldMkLst>
+        <pc:spChg chg="mod">
+          <ac:chgData name="Margo Bonal" userId="18c9fa0f-b53d-478b-9dc0-6ad88786c19f" providerId="ADAL" clId="{93D479E5-F67F-4B8A-A78F-A0B574A116B6}" dt="2026-03-14T15:52:16.078" v="480" actId="26606"/>
           <ac:spMkLst>
             <pc:docMk/>
-            <pc:sldMk cId="798257210" sldId="257"/>
-            <ac:spMk id="4" creationId="{FA37160E-D768-0363-F78A-E96D16D8D2AC}"/>
+            <pc:sldMk cId="2004418569" sldId="258"/>
+            <ac:spMk id="2" creationId="{00EA85E8-01FB-8E12-4E0B-4BEF5FD40E7E}"/>
           </ac:spMkLst>
         </pc:spChg>
-        <pc:spChg chg="add mod">
-          <ac:chgData name="Margo Bonal" userId="18c9fa0f-b53d-478b-9dc0-6ad88786c19f" providerId="ADAL" clId="{93D479E5-F67F-4B8A-A78F-A0B574A116B6}" dt="2026-03-08T14:45:59.631" v="238" actId="12788"/>
+        <pc:spChg chg="mod">
+          <ac:chgData name="Margo Bonal" userId="18c9fa0f-b53d-478b-9dc0-6ad88786c19f" providerId="ADAL" clId="{93D479E5-F67F-4B8A-A78F-A0B574A116B6}" dt="2026-03-14T15:55:32.485" v="491" actId="20577"/>
           <ac:spMkLst>
             <pc:docMk/>
-            <pc:sldMk cId="798257210" sldId="257"/>
-            <ac:spMk id="5" creationId="{8BF439D6-F7CF-A350-5DF6-75966FE53A03}"/>
+            <pc:sldMk cId="2004418569" sldId="258"/>
+            <ac:spMk id="3" creationId="{E2B4C7DE-8123-211E-1B65-93CCDA8F9A46}"/>
           </ac:spMkLst>
         </pc:spChg>
-        <pc:spChg chg="add del">
-          <ac:chgData name="Margo Bonal" userId="18c9fa0f-b53d-478b-9dc0-6ad88786c19f" providerId="ADAL" clId="{93D479E5-F67F-4B8A-A78F-A0B574A116B6}" dt="2026-03-08T14:44:03.785" v="222" actId="26606"/>
+        <pc:spChg chg="add">
+          <ac:chgData name="Margo Bonal" userId="18c9fa0f-b53d-478b-9dc0-6ad88786c19f" providerId="ADAL" clId="{93D479E5-F67F-4B8A-A78F-A0B574A116B6}" dt="2026-03-14T15:52:16.078" v="480" actId="26606"/>
           <ac:spMkLst>
             <pc:docMk/>
-            <pc:sldMk cId="798257210" sldId="257"/>
-            <ac:spMk id="11" creationId="{85CB65D0-496F-4797-A015-C85839E35D1A}"/>
+            <pc:sldMk cId="2004418569" sldId="258"/>
+            <ac:spMk id="8" creationId="{DBF61EA3-B236-439E-9C0B-340980D56BEE}"/>
           </ac:spMkLst>
         </pc:spChg>
-        <pc:spChg chg="add del">
-          <ac:chgData name="Margo Bonal" userId="18c9fa0f-b53d-478b-9dc0-6ad88786c19f" providerId="ADAL" clId="{93D479E5-F67F-4B8A-A78F-A0B574A116B6}" dt="2026-03-08T14:44:03.785" v="222" actId="26606"/>
+        <pc:spChg chg="add">
+          <ac:chgData name="Margo Bonal" userId="18c9fa0f-b53d-478b-9dc0-6ad88786c19f" providerId="ADAL" clId="{93D479E5-F67F-4B8A-A78F-A0B574A116B6}" dt="2026-03-14T15:52:16.078" v="480" actId="26606"/>
           <ac:spMkLst>
             <pc:docMk/>
-            <pc:sldMk cId="798257210" sldId="257"/>
-            <ac:spMk id="13" creationId="{95D2C779-8883-4E5F-A170-0F464918C1B7}"/>
+            <pc:sldMk cId="2004418569" sldId="258"/>
+            <ac:spMk id="14" creationId="{E659831F-0D9A-4C63-9EBB-8435B85A440F}"/>
           </ac:spMkLst>
         </pc:spChg>
-        <pc:spChg chg="add del">
-          <ac:chgData name="Margo Bonal" userId="18c9fa0f-b53d-478b-9dc0-6ad88786c19f" providerId="ADAL" clId="{93D479E5-F67F-4B8A-A78F-A0B574A116B6}" dt="2026-03-08T14:44:07.150" v="224" actId="26606"/>
+        <pc:grpChg chg="add">
+          <ac:chgData name="Margo Bonal" userId="18c9fa0f-b53d-478b-9dc0-6ad88786c19f" providerId="ADAL" clId="{93D479E5-F67F-4B8A-A78F-A0B574A116B6}" dt="2026-03-14T15:52:16.078" v="480" actId="26606"/>
+          <ac:grpSpMkLst>
+            <pc:docMk/>
+            <pc:sldMk cId="2004418569" sldId="258"/>
+            <ac:grpSpMk id="10" creationId="{28FAF094-D087-493F-8DF9-A486C2D6BBAA}"/>
+          </ac:grpSpMkLst>
+        </pc:grpChg>
+      </pc:sldChg>
+      <pc:sldChg chg="modSp new del mod">
+        <pc:chgData name="Margo Bonal" userId="18c9fa0f-b53d-478b-9dc0-6ad88786c19f" providerId="ADAL" clId="{93D479E5-F67F-4B8A-A78F-A0B574A116B6}" dt="2026-03-14T15:48:15.118" v="346" actId="2696"/>
+        <pc:sldMkLst>
+          <pc:docMk/>
+          <pc:sldMk cId="968229840" sldId="259"/>
+        </pc:sldMkLst>
+        <pc:spChg chg="mod">
+          <ac:chgData name="Margo Bonal" userId="18c9fa0f-b53d-478b-9dc0-6ad88786c19f" providerId="ADAL" clId="{93D479E5-F67F-4B8A-A78F-A0B574A116B6}" dt="2026-03-14T15:46:48.756" v="283" actId="20577"/>
           <ac:spMkLst>
             <pc:docMk/>
-            <pc:sldMk cId="798257210" sldId="257"/>
-            <ac:spMk id="17" creationId="{33E93247-6229-44AB-A550-739E971E690B}"/>
+            <pc:sldMk cId="968229840" sldId="259"/>
+            <ac:spMk id="2" creationId="{0701DB8F-0574-8B3D-259E-B662532976C6}"/>
           </ac:spMkLst>
         </pc:spChg>
-        <pc:spChg chg="add del">
-          <ac:chgData name="Margo Bonal" userId="18c9fa0f-b53d-478b-9dc0-6ad88786c19f" providerId="ADAL" clId="{93D479E5-F67F-4B8A-A78F-A0B574A116B6}" dt="2026-03-08T14:44:07.150" v="224" actId="26606"/>
+      </pc:sldChg>
+      <pc:sldChg chg="addSp modSp new mod setBg">
+        <pc:chgData name="Margo Bonal" userId="18c9fa0f-b53d-478b-9dc0-6ad88786c19f" providerId="ADAL" clId="{93D479E5-F67F-4B8A-A78F-A0B574A116B6}" dt="2026-03-14T15:52:24.143" v="481" actId="26606"/>
+        <pc:sldMkLst>
+          <pc:docMk/>
+          <pc:sldMk cId="149795576" sldId="260"/>
+        </pc:sldMkLst>
+        <pc:spChg chg="mod">
+          <ac:chgData name="Margo Bonal" userId="18c9fa0f-b53d-478b-9dc0-6ad88786c19f" providerId="ADAL" clId="{93D479E5-F67F-4B8A-A78F-A0B574A116B6}" dt="2026-03-14T15:52:24.143" v="481" actId="26606"/>
           <ac:spMkLst>
             <pc:docMk/>
-            <pc:sldMk cId="798257210" sldId="257"/>
-            <ac:spMk id="19" creationId="{912025B4-7337-735E-4DC9-E634D2011984}"/>
+            <pc:sldMk cId="149795576" sldId="260"/>
+            <ac:spMk id="2" creationId="{3A852955-2551-12FF-6416-32BAB737FFD9}"/>
           </ac:spMkLst>
         </pc:spChg>
-        <pc:spChg chg="add del">
-          <ac:chgData name="Margo Bonal" userId="18c9fa0f-b53d-478b-9dc0-6ad88786c19f" providerId="ADAL" clId="{93D479E5-F67F-4B8A-A78F-A0B574A116B6}" dt="2026-03-08T14:44:07.150" v="224" actId="26606"/>
+        <pc:spChg chg="mod">
+          <ac:chgData name="Margo Bonal" userId="18c9fa0f-b53d-478b-9dc0-6ad88786c19f" providerId="ADAL" clId="{93D479E5-F67F-4B8A-A78F-A0B574A116B6}" dt="2026-03-14T15:52:24.143" v="481" actId="26606"/>
           <ac:spMkLst>
             <pc:docMk/>
-            <pc:sldMk cId="798257210" sldId="257"/>
-            <ac:spMk id="20" creationId="{150CDACD-D191-E642-F686-FCB54B7E5F67}"/>
+            <pc:sldMk cId="149795576" sldId="260"/>
+            <ac:spMk id="3" creationId="{5BC4AAB4-32DD-0202-4047-F9245BE2A8CD}"/>
           </ac:spMkLst>
         </pc:spChg>
-        <pc:spChg chg="add del">
-          <ac:chgData name="Margo Bonal" userId="18c9fa0f-b53d-478b-9dc0-6ad88786c19f" providerId="ADAL" clId="{93D479E5-F67F-4B8A-A78F-A0B574A116B6}" dt="2026-03-08T14:44:27.889" v="226" actId="26606"/>
+        <pc:spChg chg="add">
+          <ac:chgData name="Margo Bonal" userId="18c9fa0f-b53d-478b-9dc0-6ad88786c19f" providerId="ADAL" clId="{93D479E5-F67F-4B8A-A78F-A0B574A116B6}" dt="2026-03-14T15:52:24.143" v="481" actId="26606"/>
           <ac:spMkLst>
             <pc:docMk/>
-            <pc:sldMk cId="798257210" sldId="257"/>
-            <ac:spMk id="22" creationId="{0AF4F2BA-3C03-4E2C-8ABC-0949B61B3C5E}"/>
+            <pc:sldMk cId="149795576" sldId="260"/>
+            <ac:spMk id="8" creationId="{B6CDA21F-E7AF-4C75-8395-33F58D5B0E45}"/>
           </ac:spMkLst>
         </pc:spChg>
-        <pc:spChg chg="add del">
-          <ac:chgData name="Margo Bonal" userId="18c9fa0f-b53d-478b-9dc0-6ad88786c19f" providerId="ADAL" clId="{93D479E5-F67F-4B8A-A78F-A0B574A116B6}" dt="2026-03-08T14:44:27.889" v="226" actId="26606"/>
+        <pc:spChg chg="add">
+          <ac:chgData name="Margo Bonal" userId="18c9fa0f-b53d-478b-9dc0-6ad88786c19f" providerId="ADAL" clId="{93D479E5-F67F-4B8A-A78F-A0B574A116B6}" dt="2026-03-14T15:52:24.143" v="481" actId="26606"/>
           <ac:spMkLst>
             <pc:docMk/>
-            <pc:sldMk cId="798257210" sldId="257"/>
-            <ac:spMk id="25" creationId="{B40A8CA7-7D5A-43B0-A1A0-B558ECA9EED1}"/>
+            <pc:sldMk cId="149795576" sldId="260"/>
+            <ac:spMk id="15" creationId="{D5B0017B-2ECA-49AF-B397-DC140825DF8D}"/>
           </ac:spMkLst>
         </pc:spChg>
-        <pc:picChg chg="add del">
-          <ac:chgData name="Margo Bonal" userId="18c9fa0f-b53d-478b-9dc0-6ad88786c19f" providerId="ADAL" clId="{93D479E5-F67F-4B8A-A78F-A0B574A116B6}" dt="2026-03-08T14:44:03.785" v="222" actId="26606"/>
-          <ac:picMkLst>
+        <pc:grpChg chg="add">
+          <ac:chgData name="Margo Bonal" userId="18c9fa0f-b53d-478b-9dc0-6ad88786c19f" providerId="ADAL" clId="{93D479E5-F67F-4B8A-A78F-A0B574A116B6}" dt="2026-03-14T15:52:24.143" v="481" actId="26606"/>
+          <ac:grpSpMkLst>
             <pc:docMk/>
-            <pc:sldMk cId="798257210" sldId="257"/>
-            <ac:picMk id="6" creationId="{2CC7ECC9-2BC0-E78C-EC08-6323617543CB}"/>
-          </ac:picMkLst>
-        </pc:picChg>
-        <pc:picChg chg="add del">
-          <ac:chgData name="Margo Bonal" userId="18c9fa0f-b53d-478b-9dc0-6ad88786c19f" providerId="ADAL" clId="{93D479E5-F67F-4B8A-A78F-A0B574A116B6}" dt="2026-03-08T14:44:07.150" v="224" actId="26606"/>
-          <ac:picMkLst>
-            <pc:docMk/>
-            <pc:sldMk cId="798257210" sldId="257"/>
-            <ac:picMk id="18" creationId="{04CE8918-76BE-FBA8-C6AC-60EF18E1535B}"/>
-          </ac:picMkLst>
-        </pc:picChg>
-        <pc:picChg chg="add del">
-          <ac:chgData name="Margo Bonal" userId="18c9fa0f-b53d-478b-9dc0-6ad88786c19f" providerId="ADAL" clId="{93D479E5-F67F-4B8A-A78F-A0B574A116B6}" dt="2026-03-08T14:44:27.889" v="226" actId="26606"/>
-          <ac:picMkLst>
-            <pc:docMk/>
-            <pc:sldMk cId="798257210" sldId="257"/>
-            <ac:picMk id="23" creationId="{CBF8CCA6-6035-B096-C0FC-5B2DD9B61DDE}"/>
-          </ac:picMkLst>
-        </pc:picChg>
-        <pc:cxnChg chg="add del">
-          <ac:chgData name="Margo Bonal" userId="18c9fa0f-b53d-478b-9dc0-6ad88786c19f" providerId="ADAL" clId="{93D479E5-F67F-4B8A-A78F-A0B574A116B6}" dt="2026-03-08T14:44:03.785" v="222" actId="26606"/>
+            <pc:sldMk cId="149795576" sldId="260"/>
+            <ac:grpSpMk id="10" creationId="{AE1C45F0-260A-458C-96ED-C1F6D2151219}"/>
+          </ac:grpSpMkLst>
+        </pc:grpChg>
+        <pc:cxnChg chg="add">
+          <ac:chgData name="Margo Bonal" userId="18c9fa0f-b53d-478b-9dc0-6ad88786c19f" providerId="ADAL" clId="{93D479E5-F67F-4B8A-A78F-A0B574A116B6}" dt="2026-03-14T15:52:24.143" v="481" actId="26606"/>
           <ac:cxnSpMkLst>
             <pc:docMk/>
-            <pc:sldMk cId="798257210" sldId="257"/>
-            <ac:cxnSpMk id="15" creationId="{BD96A694-258D-4418-A83C-B9BA72FD44B8}"/>
-          </ac:cxnSpMkLst>
-        </pc:cxnChg>
-        <pc:cxnChg chg="add del">
-          <ac:chgData name="Margo Bonal" userId="18c9fa0f-b53d-478b-9dc0-6ad88786c19f" providerId="ADAL" clId="{93D479E5-F67F-4B8A-A78F-A0B574A116B6}" dt="2026-03-08T14:44:27.889" v="226" actId="26606"/>
-          <ac:cxnSpMkLst>
-            <pc:docMk/>
-            <pc:sldMk cId="798257210" sldId="257"/>
-            <ac:cxnSpMk id="24" creationId="{A07787ED-5EDC-4C54-AD87-55B60D0FE397}"/>
+            <pc:sldMk cId="149795576" sldId="260"/>
+            <ac:cxnSpMk id="17" creationId="{6CF1BAF6-AD41-4082-B212-8A1F9A2E8779}"/>
           </ac:cxnSpMkLst>
         </pc:cxnChg>
       </pc:sldChg>
-      <pc:sldChg chg="modSp new add del mod">
-        <pc:chgData name="Margo Bonal" userId="18c9fa0f-b53d-478b-9dc0-6ad88786c19f" providerId="ADAL" clId="{93D479E5-F67F-4B8A-A78F-A0B574A116B6}" dt="2026-03-08T14:36:51.797" v="124" actId="2696"/>
+      <pc:sldChg chg="addSp modSp new mod setBg">
+        <pc:chgData name="Margo Bonal" userId="18c9fa0f-b53d-478b-9dc0-6ad88786c19f" providerId="ADAL" clId="{93D479E5-F67F-4B8A-A78F-A0B574A116B6}" dt="2026-03-14T15:52:28.401" v="482" actId="26606"/>
         <pc:sldMkLst>
           <pc:docMk/>
-          <pc:sldMk cId="2479028366" sldId="257"/>
+          <pc:sldMk cId="2155978422" sldId="261"/>
         </pc:sldMkLst>
         <pc:spChg chg="mod">
-          <ac:chgData name="Margo Bonal" userId="18c9fa0f-b53d-478b-9dc0-6ad88786c19f" providerId="ADAL" clId="{93D479E5-F67F-4B8A-A78F-A0B574A116B6}" dt="2026-03-08T14:36:51.579" v="123" actId="14100"/>
+          <ac:chgData name="Margo Bonal" userId="18c9fa0f-b53d-478b-9dc0-6ad88786c19f" providerId="ADAL" clId="{93D479E5-F67F-4B8A-A78F-A0B574A116B6}" dt="2026-03-14T15:52:28.401" v="482" actId="26606"/>
           <ac:spMkLst>
             <pc:docMk/>
-            <pc:sldMk cId="2479028366" sldId="257"/>
-            <ac:spMk id="2" creationId="{EEA0F545-A38F-7469-BC65-7401556AFC82}"/>
+            <pc:sldMk cId="2155978422" sldId="261"/>
+            <ac:spMk id="2" creationId="{F97CB9DD-52FB-113D-526B-B6459D63DDA8}"/>
+          </ac:spMkLst>
+        </pc:spChg>
+        <pc:spChg chg="mod">
+          <ac:chgData name="Margo Bonal" userId="18c9fa0f-b53d-478b-9dc0-6ad88786c19f" providerId="ADAL" clId="{93D479E5-F67F-4B8A-A78F-A0B574A116B6}" dt="2026-03-14T15:52:28.401" v="482" actId="26606"/>
+          <ac:spMkLst>
+            <pc:docMk/>
+            <pc:sldMk cId="2155978422" sldId="261"/>
+            <ac:spMk id="3" creationId="{C6A5AC6E-1FD2-A32F-E33D-B1050BE416BB}"/>
+          </ac:spMkLst>
+        </pc:spChg>
+        <pc:spChg chg="add">
+          <ac:chgData name="Margo Bonal" userId="18c9fa0f-b53d-478b-9dc0-6ad88786c19f" providerId="ADAL" clId="{93D479E5-F67F-4B8A-A78F-A0B574A116B6}" dt="2026-03-14T15:52:28.401" v="482" actId="26606"/>
+          <ac:spMkLst>
+            <pc:docMk/>
+            <pc:sldMk cId="2155978422" sldId="261"/>
+            <ac:spMk id="8" creationId="{4DA718D0-4865-4629-8134-44F68D41D574}"/>
+          </ac:spMkLst>
+        </pc:spChg>
+        <pc:spChg chg="add">
+          <ac:chgData name="Margo Bonal" userId="18c9fa0f-b53d-478b-9dc0-6ad88786c19f" providerId="ADAL" clId="{93D479E5-F67F-4B8A-A78F-A0B574A116B6}" dt="2026-03-14T15:52:28.401" v="482" actId="26606"/>
+          <ac:spMkLst>
+            <pc:docMk/>
+            <pc:sldMk cId="2155978422" sldId="261"/>
+            <ac:spMk id="14" creationId="{CBC4F608-B4B8-48C3-9572-C0F061B1CD99}"/>
+          </ac:spMkLst>
+        </pc:spChg>
+        <pc:grpChg chg="add">
+          <ac:chgData name="Margo Bonal" userId="18c9fa0f-b53d-478b-9dc0-6ad88786c19f" providerId="ADAL" clId="{93D479E5-F67F-4B8A-A78F-A0B574A116B6}" dt="2026-03-14T15:52:28.401" v="482" actId="26606"/>
+          <ac:grpSpMkLst>
+            <pc:docMk/>
+            <pc:sldMk cId="2155978422" sldId="261"/>
+            <ac:grpSpMk id="10" creationId="{65167ED7-6315-43AB-B1B6-C326D5FD8F84}"/>
+          </ac:grpSpMkLst>
+        </pc:grpChg>
+      </pc:sldChg>
+      <pc:sldChg chg="modSp new mod">
+        <pc:chgData name="Margo Bonal" userId="18c9fa0f-b53d-478b-9dc0-6ad88786c19f" providerId="ADAL" clId="{93D479E5-F67F-4B8A-A78F-A0B574A116B6}" dt="2026-03-14T15:52:54.856" v="484" actId="20577"/>
+        <pc:sldMkLst>
+          <pc:docMk/>
+          <pc:sldMk cId="1674025237" sldId="262"/>
+        </pc:sldMkLst>
+        <pc:spChg chg="mod">
+          <ac:chgData name="Margo Bonal" userId="18c9fa0f-b53d-478b-9dc0-6ad88786c19f" providerId="ADAL" clId="{93D479E5-F67F-4B8A-A78F-A0B574A116B6}" dt="2026-03-14T15:52:54.856" v="484" actId="20577"/>
+          <ac:spMkLst>
+            <pc:docMk/>
+            <pc:sldMk cId="1674025237" sldId="262"/>
+            <ac:spMk id="2" creationId="{E6F83656-AE5C-749F-AE82-3A991804C9DE}"/>
+          </ac:spMkLst>
+        </pc:spChg>
+      </pc:sldChg>
+      <pc:sldChg chg="modSp new mod">
+        <pc:chgData name="Margo Bonal" userId="18c9fa0f-b53d-478b-9dc0-6ad88786c19f" providerId="ADAL" clId="{93D479E5-F67F-4B8A-A78F-A0B574A116B6}" dt="2026-03-14T15:47:18.457" v="326" actId="20577"/>
+        <pc:sldMkLst>
+          <pc:docMk/>
+          <pc:sldMk cId="1605171173" sldId="263"/>
+        </pc:sldMkLst>
+        <pc:spChg chg="mod">
+          <ac:chgData name="Margo Bonal" userId="18c9fa0f-b53d-478b-9dc0-6ad88786c19f" providerId="ADAL" clId="{93D479E5-F67F-4B8A-A78F-A0B574A116B6}" dt="2026-03-14T15:47:18.457" v="326" actId="20577"/>
+          <ac:spMkLst>
+            <pc:docMk/>
+            <pc:sldMk cId="1605171173" sldId="263"/>
+            <ac:spMk id="2" creationId="{817E5507-7BEB-1D01-5229-134196AE5F70}"/>
+          </ac:spMkLst>
+        </pc:spChg>
+      </pc:sldChg>
+      <pc:sldChg chg="modSp new mod">
+        <pc:chgData name="Margo Bonal" userId="18c9fa0f-b53d-478b-9dc0-6ad88786c19f" providerId="ADAL" clId="{93D479E5-F67F-4B8A-A78F-A0B574A116B6}" dt="2026-03-14T15:47:24.874" v="335" actId="20577"/>
+        <pc:sldMkLst>
+          <pc:docMk/>
+          <pc:sldMk cId="1117246204" sldId="264"/>
+        </pc:sldMkLst>
+        <pc:spChg chg="mod">
+          <ac:chgData name="Margo Bonal" userId="18c9fa0f-b53d-478b-9dc0-6ad88786c19f" providerId="ADAL" clId="{93D479E5-F67F-4B8A-A78F-A0B574A116B6}" dt="2026-03-14T15:47:24.874" v="335" actId="20577"/>
+          <ac:spMkLst>
+            <pc:docMk/>
+            <pc:sldMk cId="1117246204" sldId="264"/>
+            <ac:spMk id="2" creationId="{6F17A8E0-F0A6-5E5A-3E17-D07C1F19C5B3}"/>
+          </ac:spMkLst>
+        </pc:spChg>
+      </pc:sldChg>
+      <pc:sldChg chg="modSp new mod">
+        <pc:chgData name="Margo Bonal" userId="18c9fa0f-b53d-478b-9dc0-6ad88786c19f" providerId="ADAL" clId="{93D479E5-F67F-4B8A-A78F-A0B574A116B6}" dt="2026-03-14T15:47:30.346" v="345" actId="20577"/>
+        <pc:sldMkLst>
+          <pc:docMk/>
+          <pc:sldMk cId="3330183413" sldId="265"/>
+        </pc:sldMkLst>
+        <pc:spChg chg="mod">
+          <ac:chgData name="Margo Bonal" userId="18c9fa0f-b53d-478b-9dc0-6ad88786c19f" providerId="ADAL" clId="{93D479E5-F67F-4B8A-A78F-A0B574A116B6}" dt="2026-03-14T15:47:30.346" v="345" actId="20577"/>
+          <ac:spMkLst>
+            <pc:docMk/>
+            <pc:sldMk cId="3330183413" sldId="265"/>
+            <ac:spMk id="2" creationId="{0E9721CE-7FDB-6F1E-862D-17EEEB49DF9B}"/>
+          </ac:spMkLst>
+        </pc:spChg>
+      </pc:sldChg>
+      <pc:sldChg chg="modSp new mod">
+        <pc:chgData name="Margo Bonal" userId="18c9fa0f-b53d-478b-9dc0-6ad88786c19f" providerId="ADAL" clId="{93D479E5-F67F-4B8A-A78F-A0B574A116B6}" dt="2026-03-14T15:49:20.845" v="408" actId="20577"/>
+        <pc:sldMkLst>
+          <pc:docMk/>
+          <pc:sldMk cId="3814308155" sldId="266"/>
+        </pc:sldMkLst>
+        <pc:spChg chg="mod">
+          <ac:chgData name="Margo Bonal" userId="18c9fa0f-b53d-478b-9dc0-6ad88786c19f" providerId="ADAL" clId="{93D479E5-F67F-4B8A-A78F-A0B574A116B6}" dt="2026-03-14T15:48:29.502" v="359" actId="20577"/>
+          <ac:spMkLst>
+            <pc:docMk/>
+            <pc:sldMk cId="3814308155" sldId="266"/>
+            <ac:spMk id="2" creationId="{8C0E0BBA-7667-2FF9-EF48-9DA6C79DDF2B}"/>
+          </ac:spMkLst>
+        </pc:spChg>
+        <pc:spChg chg="mod">
+          <ac:chgData name="Margo Bonal" userId="18c9fa0f-b53d-478b-9dc0-6ad88786c19f" providerId="ADAL" clId="{93D479E5-F67F-4B8A-A78F-A0B574A116B6}" dt="2026-03-14T15:49:20.845" v="408" actId="20577"/>
+          <ac:spMkLst>
+            <pc:docMk/>
+            <pc:sldMk cId="3814308155" sldId="266"/>
+            <ac:spMk id="3" creationId="{115E4EA9-D4C9-C153-9C80-F53A74AACE51}"/>
+          </ac:spMkLst>
+        </pc:spChg>
+      </pc:sldChg>
+      <pc:sldChg chg="modSp new mod">
+        <pc:chgData name="Margo Bonal" userId="18c9fa0f-b53d-478b-9dc0-6ad88786c19f" providerId="ADAL" clId="{93D479E5-F67F-4B8A-A78F-A0B574A116B6}" dt="2026-03-14T15:49:35.627" v="428" actId="20577"/>
+        <pc:sldMkLst>
+          <pc:docMk/>
+          <pc:sldMk cId="4119443303" sldId="267"/>
+        </pc:sldMkLst>
+        <pc:spChg chg="mod">
+          <ac:chgData name="Margo Bonal" userId="18c9fa0f-b53d-478b-9dc0-6ad88786c19f" providerId="ADAL" clId="{93D479E5-F67F-4B8A-A78F-A0B574A116B6}" dt="2026-03-14T15:49:35.627" v="428" actId="20577"/>
+          <ac:spMkLst>
+            <pc:docMk/>
+            <pc:sldMk cId="4119443303" sldId="267"/>
+            <ac:spMk id="2" creationId="{45E01E8D-68C8-D6F0-81C8-63C5F69745F8}"/>
+          </ac:spMkLst>
+        </pc:spChg>
+      </pc:sldChg>
+      <pc:sldChg chg="modSp new mod">
+        <pc:chgData name="Margo Bonal" userId="18c9fa0f-b53d-478b-9dc0-6ad88786c19f" providerId="ADAL" clId="{93D479E5-F67F-4B8A-A78F-A0B574A116B6}" dt="2026-03-14T15:49:44.066" v="441" actId="20577"/>
+        <pc:sldMkLst>
+          <pc:docMk/>
+          <pc:sldMk cId="472922610" sldId="268"/>
+        </pc:sldMkLst>
+        <pc:spChg chg="mod">
+          <ac:chgData name="Margo Bonal" userId="18c9fa0f-b53d-478b-9dc0-6ad88786c19f" providerId="ADAL" clId="{93D479E5-F67F-4B8A-A78F-A0B574A116B6}" dt="2026-03-14T15:49:44.066" v="441" actId="20577"/>
+          <ac:spMkLst>
+            <pc:docMk/>
+            <pc:sldMk cId="472922610" sldId="268"/>
+            <ac:spMk id="2" creationId="{8F6BC2BD-D5AB-40B6-2E42-FE395BB94CFD}"/>
           </ac:spMkLst>
         </pc:spChg>
       </pc:sldChg>
       <pc:sldChg chg="new del">
-        <pc:chgData name="Margo Bonal" userId="18c9fa0f-b53d-478b-9dc0-6ad88786c19f" providerId="ADAL" clId="{93D479E5-F67F-4B8A-A78F-A0B574A116B6}" dt="2026-03-08T14:43:14.308" v="216" actId="2696"/>
+        <pc:chgData name="Margo Bonal" userId="18c9fa0f-b53d-478b-9dc0-6ad88786c19f" providerId="ADAL" clId="{93D479E5-F67F-4B8A-A78F-A0B574A116B6}" dt="2026-03-14T15:50:33.583" v="444" actId="2696"/>
         <pc:sldMkLst>
           <pc:docMk/>
-          <pc:sldMk cId="222870439" sldId="258"/>
+          <pc:sldMk cId="1946254539" sldId="269"/>
         </pc:sldMkLst>
       </pc:sldChg>
-      <pc:sldChg chg="modSp new del">
-        <pc:chgData name="Margo Bonal" userId="18c9fa0f-b53d-478b-9dc0-6ad88786c19f" providerId="ADAL" clId="{93D479E5-F67F-4B8A-A78F-A0B574A116B6}" dt="2026-03-08T14:40:52.018" v="183" actId="680"/>
+      <pc:sldChg chg="addSp delSp modSp new mod setBg">
+        <pc:chgData name="Margo Bonal" userId="18c9fa0f-b53d-478b-9dc0-6ad88786c19f" providerId="ADAL" clId="{93D479E5-F67F-4B8A-A78F-A0B574A116B6}" dt="2026-03-14T15:52:01.987" v="478" actId="20577"/>
         <pc:sldMkLst>
           <pc:docMk/>
-          <pc:sldMk cId="1264548011" sldId="258"/>
+          <pc:sldMk cId="2144603681" sldId="270"/>
         </pc:sldMkLst>
         <pc:spChg chg="mod">
-          <ac:chgData name="Margo Bonal" userId="18c9fa0f-b53d-478b-9dc0-6ad88786c19f" providerId="ADAL" clId="{93D479E5-F67F-4B8A-A78F-A0B574A116B6}" dt="2026-03-08T14:40:51.459" v="182"/>
+          <ac:chgData name="Margo Bonal" userId="18c9fa0f-b53d-478b-9dc0-6ad88786c19f" providerId="ADAL" clId="{93D479E5-F67F-4B8A-A78F-A0B574A116B6}" dt="2026-03-14T15:51:23.108" v="450" actId="1076"/>
           <ac:spMkLst>
             <pc:docMk/>
-            <pc:sldMk cId="1264548011" sldId="258"/>
-            <ac:spMk id="2" creationId="{46F38821-A39E-680D-16AF-1782DC3CD293}"/>
+            <pc:sldMk cId="2144603681" sldId="270"/>
+            <ac:spMk id="2" creationId="{EB058003-92CA-9A65-D93A-4A59BF937390}"/>
           </ac:spMkLst>
         </pc:spChg>
+        <pc:spChg chg="del mod">
+          <ac:chgData name="Margo Bonal" userId="18c9fa0f-b53d-478b-9dc0-6ad88786c19f" providerId="ADAL" clId="{93D479E5-F67F-4B8A-A78F-A0B574A116B6}" dt="2026-03-14T15:51:47.416" v="455"/>
+          <ac:spMkLst>
+            <pc:docMk/>
+            <pc:sldMk cId="2144603681" sldId="270"/>
+            <ac:spMk id="3" creationId="{F3C33B5F-468F-DC68-3C04-DCD3523049B4}"/>
+          </ac:spMkLst>
+        </pc:spChg>
+        <pc:spChg chg="add mod">
+          <ac:chgData name="Margo Bonal" userId="18c9fa0f-b53d-478b-9dc0-6ad88786c19f" providerId="ADAL" clId="{93D479E5-F67F-4B8A-A78F-A0B574A116B6}" dt="2026-03-14T15:51:26.388" v="451" actId="1076"/>
+          <ac:spMkLst>
+            <pc:docMk/>
+            <pc:sldMk cId="2144603681" sldId="270"/>
+            <ac:spMk id="4" creationId="{EC4085F2-62A1-F12C-96F1-D60030578151}"/>
+          </ac:spMkLst>
+        </pc:spChg>
+        <pc:spChg chg="add mod">
+          <ac:chgData name="Margo Bonal" userId="18c9fa0f-b53d-478b-9dc0-6ad88786c19f" providerId="ADAL" clId="{93D479E5-F67F-4B8A-A78F-A0B574A116B6}" dt="2026-03-14T15:51:38.717" v="454" actId="1076"/>
+          <ac:spMkLst>
+            <pc:docMk/>
+            <pc:sldMk cId="2144603681" sldId="270"/>
+            <ac:spMk id="5" creationId="{156952BD-893C-199E-232A-50EA1C89FCC0}"/>
+          </ac:spMkLst>
+        </pc:spChg>
+        <pc:spChg chg="add mod">
+          <ac:chgData name="Margo Bonal" userId="18c9fa0f-b53d-478b-9dc0-6ad88786c19f" providerId="ADAL" clId="{93D479E5-F67F-4B8A-A78F-A0B574A116B6}" dt="2026-03-14T15:52:01.987" v="478" actId="20577"/>
+          <ac:spMkLst>
+            <pc:docMk/>
+            <pc:sldMk cId="2144603681" sldId="270"/>
+            <ac:spMk id="6" creationId="{F1DF5240-130E-D309-6941-B5CD12887932}"/>
+          </ac:spMkLst>
+        </pc:spChg>
+        <pc:spChg chg="add">
+          <ac:chgData name="Margo Bonal" userId="18c9fa0f-b53d-478b-9dc0-6ad88786c19f" providerId="ADAL" clId="{93D479E5-F67F-4B8A-A78F-A0B574A116B6}" dt="2026-03-14T15:51:07.252" v="446" actId="26606"/>
+          <ac:spMkLst>
+            <pc:docMk/>
+            <pc:sldMk cId="2144603681" sldId="270"/>
+            <ac:spMk id="8" creationId="{4522B21E-B2B9-4C72-9A71-C87EFD137480}"/>
+          </ac:spMkLst>
+        </pc:spChg>
+        <pc:spChg chg="add">
+          <ac:chgData name="Margo Bonal" userId="18c9fa0f-b53d-478b-9dc0-6ad88786c19f" providerId="ADAL" clId="{93D479E5-F67F-4B8A-A78F-A0B574A116B6}" dt="2026-03-14T15:51:07.252" v="446" actId="26606"/>
+          <ac:spMkLst>
+            <pc:docMk/>
+            <pc:sldMk cId="2144603681" sldId="270"/>
+            <ac:spMk id="10" creationId="{5EB7D2A2-F448-44D4-938C-DC84CBCB3B1E}"/>
+          </ac:spMkLst>
+        </pc:spChg>
+        <pc:spChg chg="add">
+          <ac:chgData name="Margo Bonal" userId="18c9fa0f-b53d-478b-9dc0-6ad88786c19f" providerId="ADAL" clId="{93D479E5-F67F-4B8A-A78F-A0B574A116B6}" dt="2026-03-14T15:51:07.252" v="446" actId="26606"/>
+          <ac:spMkLst>
+            <pc:docMk/>
+            <pc:sldMk cId="2144603681" sldId="270"/>
+            <ac:spMk id="12" creationId="{871AEA07-1E14-44B4-8E55-64EF049CD66F}"/>
+          </ac:spMkLst>
+        </pc:spChg>
+        <pc:cxnChg chg="add">
+          <ac:chgData name="Margo Bonal" userId="18c9fa0f-b53d-478b-9dc0-6ad88786c19f" providerId="ADAL" clId="{93D479E5-F67F-4B8A-A78F-A0B574A116B6}" dt="2026-03-14T15:51:07.252" v="446" actId="26606"/>
+          <ac:cxnSpMkLst>
+            <pc:docMk/>
+            <pc:sldMk cId="2144603681" sldId="270"/>
+            <ac:cxnSpMk id="14" creationId="{F7C8EA93-3210-4C62-99E9-153C275E3A87}"/>
+          </ac:cxnSpMkLst>
+        </pc:cxnChg>
       </pc:sldChg>
-      <pc:sldChg chg="new del">
-        <pc:chgData name="Margo Bonal" userId="18c9fa0f-b53d-478b-9dc0-6ad88786c19f" providerId="ADAL" clId="{93D479E5-F67F-4B8A-A78F-A0B574A116B6}" dt="2026-03-08T14:39:02.690" v="171" actId="2696"/>
-        <pc:sldMkLst>
-          <pc:docMk/>
-          <pc:sldMk cId="2050369065" sldId="258"/>
-        </pc:sldMkLst>
-      </pc:sldChg>
-      <pc:sldChg chg="new del">
-        <pc:chgData name="Margo Bonal" userId="18c9fa0f-b53d-478b-9dc0-6ad88786c19f" providerId="ADAL" clId="{93D479E5-F67F-4B8A-A78F-A0B574A116B6}" dt="2026-03-08T14:39:14.069" v="173" actId="47"/>
-        <pc:sldMkLst>
-          <pc:docMk/>
-          <pc:sldMk cId="3307009912" sldId="258"/>
-        </pc:sldMkLst>
-      </pc:sldChg>
-      <pc:sldMasterChg chg="add del addSldLayout delSldLayout">
-        <pc:chgData name="Margo Bonal" userId="18c9fa0f-b53d-478b-9dc0-6ad88786c19f" providerId="ADAL" clId="{93D479E5-F67F-4B8A-A78F-A0B574A116B6}" dt="2026-03-08T14:30:25.181" v="28" actId="26606"/>
-        <pc:sldMasterMkLst>
-          <pc:docMk/>
-          <pc:sldMasterMk cId="3284252474" sldId="2147483648"/>
-        </pc:sldMasterMkLst>
-        <pc:sldLayoutChg chg="add del">
-          <pc:chgData name="Margo Bonal" userId="18c9fa0f-b53d-478b-9dc0-6ad88786c19f" providerId="ADAL" clId="{93D479E5-F67F-4B8A-A78F-A0B574A116B6}" dt="2026-03-08T14:30:25.181" v="28" actId="26606"/>
-          <pc:sldLayoutMkLst>
-            <pc:docMk/>
-            <pc:sldMasterMk cId="3284252474" sldId="2147483648"/>
-            <pc:sldLayoutMk cId="2033282664" sldId="2147483649"/>
-          </pc:sldLayoutMkLst>
-        </pc:sldLayoutChg>
-        <pc:sldLayoutChg chg="add del">
-          <pc:chgData name="Margo Bonal" userId="18c9fa0f-b53d-478b-9dc0-6ad88786c19f" providerId="ADAL" clId="{93D479E5-F67F-4B8A-A78F-A0B574A116B6}" dt="2026-03-08T14:30:25.181" v="28" actId="26606"/>
-          <pc:sldLayoutMkLst>
-            <pc:docMk/>
-            <pc:sldMasterMk cId="3284252474" sldId="2147483648"/>
-            <pc:sldLayoutMk cId="2118707975" sldId="2147483650"/>
-          </pc:sldLayoutMkLst>
-        </pc:sldLayoutChg>
-        <pc:sldLayoutChg chg="add del">
-          <pc:chgData name="Margo Bonal" userId="18c9fa0f-b53d-478b-9dc0-6ad88786c19f" providerId="ADAL" clId="{93D479E5-F67F-4B8A-A78F-A0B574A116B6}" dt="2026-03-08T14:30:25.181" v="28" actId="26606"/>
-          <pc:sldLayoutMkLst>
-            <pc:docMk/>
-            <pc:sldMasterMk cId="3284252474" sldId="2147483648"/>
-            <pc:sldLayoutMk cId="3237138570" sldId="2147483651"/>
-          </pc:sldLayoutMkLst>
-        </pc:sldLayoutChg>
-        <pc:sldLayoutChg chg="add del">
-          <pc:chgData name="Margo Bonal" userId="18c9fa0f-b53d-478b-9dc0-6ad88786c19f" providerId="ADAL" clId="{93D479E5-F67F-4B8A-A78F-A0B574A116B6}" dt="2026-03-08T14:30:25.181" v="28" actId="26606"/>
-          <pc:sldLayoutMkLst>
-            <pc:docMk/>
-            <pc:sldMasterMk cId="3284252474" sldId="2147483648"/>
-            <pc:sldLayoutMk cId="2304171858" sldId="2147483652"/>
-          </pc:sldLayoutMkLst>
-        </pc:sldLayoutChg>
-        <pc:sldLayoutChg chg="add del">
-          <pc:chgData name="Margo Bonal" userId="18c9fa0f-b53d-478b-9dc0-6ad88786c19f" providerId="ADAL" clId="{93D479E5-F67F-4B8A-A78F-A0B574A116B6}" dt="2026-03-08T14:30:25.181" v="28" actId="26606"/>
-          <pc:sldLayoutMkLst>
-            <pc:docMk/>
-            <pc:sldMasterMk cId="3284252474" sldId="2147483648"/>
-            <pc:sldLayoutMk cId="212164939" sldId="2147483653"/>
-          </pc:sldLayoutMkLst>
-        </pc:sldLayoutChg>
-        <pc:sldLayoutChg chg="add del">
-          <pc:chgData name="Margo Bonal" userId="18c9fa0f-b53d-478b-9dc0-6ad88786c19f" providerId="ADAL" clId="{93D479E5-F67F-4B8A-A78F-A0B574A116B6}" dt="2026-03-08T14:30:25.181" v="28" actId="26606"/>
-          <pc:sldLayoutMkLst>
-            <pc:docMk/>
-            <pc:sldMasterMk cId="3284252474" sldId="2147483648"/>
-            <pc:sldLayoutMk cId="2815901192" sldId="2147483654"/>
-          </pc:sldLayoutMkLst>
-        </pc:sldLayoutChg>
-        <pc:sldLayoutChg chg="add del">
-          <pc:chgData name="Margo Bonal" userId="18c9fa0f-b53d-478b-9dc0-6ad88786c19f" providerId="ADAL" clId="{93D479E5-F67F-4B8A-A78F-A0B574A116B6}" dt="2026-03-08T14:30:25.181" v="28" actId="26606"/>
-          <pc:sldLayoutMkLst>
-            <pc:docMk/>
-            <pc:sldMasterMk cId="3284252474" sldId="2147483648"/>
-            <pc:sldLayoutMk cId="3072766651" sldId="2147483655"/>
-          </pc:sldLayoutMkLst>
-        </pc:sldLayoutChg>
-        <pc:sldLayoutChg chg="add del">
-          <pc:chgData name="Margo Bonal" userId="18c9fa0f-b53d-478b-9dc0-6ad88786c19f" providerId="ADAL" clId="{93D479E5-F67F-4B8A-A78F-A0B574A116B6}" dt="2026-03-08T14:30:25.181" v="28" actId="26606"/>
-          <pc:sldLayoutMkLst>
-            <pc:docMk/>
-            <pc:sldMasterMk cId="3284252474" sldId="2147483648"/>
-            <pc:sldLayoutMk cId="3512455508" sldId="2147483656"/>
-          </pc:sldLayoutMkLst>
-        </pc:sldLayoutChg>
-        <pc:sldLayoutChg chg="add del">
-          <pc:chgData name="Margo Bonal" userId="18c9fa0f-b53d-478b-9dc0-6ad88786c19f" providerId="ADAL" clId="{93D479E5-F67F-4B8A-A78F-A0B574A116B6}" dt="2026-03-08T14:30:25.181" v="28" actId="26606"/>
-          <pc:sldLayoutMkLst>
-            <pc:docMk/>
-            <pc:sldMasterMk cId="3284252474" sldId="2147483648"/>
-            <pc:sldLayoutMk cId="2226821697" sldId="2147483657"/>
-          </pc:sldLayoutMkLst>
-        </pc:sldLayoutChg>
-        <pc:sldLayoutChg chg="add del">
-          <pc:chgData name="Margo Bonal" userId="18c9fa0f-b53d-478b-9dc0-6ad88786c19f" providerId="ADAL" clId="{93D479E5-F67F-4B8A-A78F-A0B574A116B6}" dt="2026-03-08T14:30:25.181" v="28" actId="26606"/>
-          <pc:sldLayoutMkLst>
-            <pc:docMk/>
-            <pc:sldMasterMk cId="3284252474" sldId="2147483648"/>
-            <pc:sldLayoutMk cId="2452893957" sldId="2147483658"/>
-          </pc:sldLayoutMkLst>
-        </pc:sldLayoutChg>
-        <pc:sldLayoutChg chg="add del">
-          <pc:chgData name="Margo Bonal" userId="18c9fa0f-b53d-478b-9dc0-6ad88786c19f" providerId="ADAL" clId="{93D479E5-F67F-4B8A-A78F-A0B574A116B6}" dt="2026-03-08T14:30:25.181" v="28" actId="26606"/>
-          <pc:sldLayoutMkLst>
-            <pc:docMk/>
-            <pc:sldMasterMk cId="3284252474" sldId="2147483648"/>
-            <pc:sldLayoutMk cId="1068890290" sldId="2147483659"/>
-          </pc:sldLayoutMkLst>
-        </pc:sldLayoutChg>
-      </pc:sldMasterChg>
-      <pc:sldMasterChg chg="add del replId addSldLayout delSldLayout">
-        <pc:chgData name="Margo Bonal" userId="18c9fa0f-b53d-478b-9dc0-6ad88786c19f" providerId="ADAL" clId="{93D479E5-F67F-4B8A-A78F-A0B574A116B6}" dt="2026-03-08T14:30:25.094" v="27" actId="26606"/>
-        <pc:sldMasterMkLst>
-          <pc:docMk/>
-          <pc:sldMasterMk cId="290023269" sldId="2147483660"/>
-        </pc:sldMasterMkLst>
-        <pc:sldLayoutChg chg="add del">
-          <pc:chgData name="Margo Bonal" userId="18c9fa0f-b53d-478b-9dc0-6ad88786c19f" providerId="ADAL" clId="{93D479E5-F67F-4B8A-A78F-A0B574A116B6}" dt="2026-03-08T14:30:25.094" v="27" actId="26606"/>
-          <pc:sldLayoutMkLst>
-            <pc:docMk/>
-            <pc:sldMasterMk cId="290023269" sldId="2147483660"/>
-            <pc:sldLayoutMk cId="3371612756" sldId="2147483661"/>
-          </pc:sldLayoutMkLst>
-        </pc:sldLayoutChg>
-        <pc:sldLayoutChg chg="add del replId">
-          <pc:chgData name="Margo Bonal" userId="18c9fa0f-b53d-478b-9dc0-6ad88786c19f" providerId="ADAL" clId="{93D479E5-F67F-4B8A-A78F-A0B574A116B6}" dt="2026-03-08T14:30:25.094" v="27" actId="26606"/>
-          <pc:sldLayoutMkLst>
-            <pc:docMk/>
-            <pc:sldMasterMk cId="290023269" sldId="2147483660"/>
-            <pc:sldLayoutMk cId="67634244" sldId="2147483662"/>
-          </pc:sldLayoutMkLst>
-        </pc:sldLayoutChg>
-        <pc:sldLayoutChg chg="add del replId">
-          <pc:chgData name="Margo Bonal" userId="18c9fa0f-b53d-478b-9dc0-6ad88786c19f" providerId="ADAL" clId="{93D479E5-F67F-4B8A-A78F-A0B574A116B6}" dt="2026-03-08T14:30:25.094" v="27" actId="26606"/>
-          <pc:sldLayoutMkLst>
-            <pc:docMk/>
-            <pc:sldMasterMk cId="290023269" sldId="2147483660"/>
-            <pc:sldLayoutMk cId="356952047" sldId="2147483663"/>
-          </pc:sldLayoutMkLst>
-        </pc:sldLayoutChg>
-        <pc:sldLayoutChg chg="add del replId">
-          <pc:chgData name="Margo Bonal" userId="18c9fa0f-b53d-478b-9dc0-6ad88786c19f" providerId="ADAL" clId="{93D479E5-F67F-4B8A-A78F-A0B574A116B6}" dt="2026-03-08T14:30:25.094" v="27" actId="26606"/>
-          <pc:sldLayoutMkLst>
-            <pc:docMk/>
-            <pc:sldMasterMk cId="290023269" sldId="2147483660"/>
-            <pc:sldLayoutMk cId="4141973201" sldId="2147483664"/>
-          </pc:sldLayoutMkLst>
-        </pc:sldLayoutChg>
-        <pc:sldLayoutChg chg="add del replId">
-          <pc:chgData name="Margo Bonal" userId="18c9fa0f-b53d-478b-9dc0-6ad88786c19f" providerId="ADAL" clId="{93D479E5-F67F-4B8A-A78F-A0B574A116B6}" dt="2026-03-08T14:30:25.094" v="27" actId="26606"/>
-          <pc:sldLayoutMkLst>
-            <pc:docMk/>
-            <pc:sldMasterMk cId="290023269" sldId="2147483660"/>
-            <pc:sldLayoutMk cId="4120190744" sldId="2147483665"/>
-          </pc:sldLayoutMkLst>
-        </pc:sldLayoutChg>
-        <pc:sldLayoutChg chg="add del replId">
-          <pc:chgData name="Margo Bonal" userId="18c9fa0f-b53d-478b-9dc0-6ad88786c19f" providerId="ADAL" clId="{93D479E5-F67F-4B8A-A78F-A0B574A116B6}" dt="2026-03-08T14:30:25.094" v="27" actId="26606"/>
-          <pc:sldLayoutMkLst>
-            <pc:docMk/>
-            <pc:sldMasterMk cId="290023269" sldId="2147483660"/>
-            <pc:sldLayoutMk cId="660146796" sldId="2147483666"/>
-          </pc:sldLayoutMkLst>
-        </pc:sldLayoutChg>
-        <pc:sldLayoutChg chg="add del replId">
-          <pc:chgData name="Margo Bonal" userId="18c9fa0f-b53d-478b-9dc0-6ad88786c19f" providerId="ADAL" clId="{93D479E5-F67F-4B8A-A78F-A0B574A116B6}" dt="2026-03-08T14:30:25.094" v="27" actId="26606"/>
-          <pc:sldLayoutMkLst>
-            <pc:docMk/>
-            <pc:sldMasterMk cId="290023269" sldId="2147483660"/>
-            <pc:sldLayoutMk cId="2091514853" sldId="2147483667"/>
-          </pc:sldLayoutMkLst>
-        </pc:sldLayoutChg>
-        <pc:sldLayoutChg chg="add del replId">
-          <pc:chgData name="Margo Bonal" userId="18c9fa0f-b53d-478b-9dc0-6ad88786c19f" providerId="ADAL" clId="{93D479E5-F67F-4B8A-A78F-A0B574A116B6}" dt="2026-03-08T14:30:25.094" v="27" actId="26606"/>
-          <pc:sldLayoutMkLst>
-            <pc:docMk/>
-            <pc:sldMasterMk cId="290023269" sldId="2147483660"/>
-            <pc:sldLayoutMk cId="3133553903" sldId="2147483668"/>
-          </pc:sldLayoutMkLst>
-        </pc:sldLayoutChg>
-        <pc:sldLayoutChg chg="add del replId">
-          <pc:chgData name="Margo Bonal" userId="18c9fa0f-b53d-478b-9dc0-6ad88786c19f" providerId="ADAL" clId="{93D479E5-F67F-4B8A-A78F-A0B574A116B6}" dt="2026-03-08T14:30:25.094" v="27" actId="26606"/>
-          <pc:sldLayoutMkLst>
-            <pc:docMk/>
-            <pc:sldMasterMk cId="290023269" sldId="2147483660"/>
-            <pc:sldLayoutMk cId="147608732" sldId="2147483669"/>
-          </pc:sldLayoutMkLst>
-        </pc:sldLayoutChg>
-        <pc:sldLayoutChg chg="add del replId">
-          <pc:chgData name="Margo Bonal" userId="18c9fa0f-b53d-478b-9dc0-6ad88786c19f" providerId="ADAL" clId="{93D479E5-F67F-4B8A-A78F-A0B574A116B6}" dt="2026-03-08T14:30:25.094" v="27" actId="26606"/>
-          <pc:sldLayoutMkLst>
-            <pc:docMk/>
-            <pc:sldMasterMk cId="290023269" sldId="2147483660"/>
-            <pc:sldLayoutMk cId="1743906841" sldId="2147483670"/>
-          </pc:sldLayoutMkLst>
-        </pc:sldLayoutChg>
-        <pc:sldLayoutChg chg="add del replId">
-          <pc:chgData name="Margo Bonal" userId="18c9fa0f-b53d-478b-9dc0-6ad88786c19f" providerId="ADAL" clId="{93D479E5-F67F-4B8A-A78F-A0B574A116B6}" dt="2026-03-08T14:30:25.094" v="27" actId="26606"/>
-          <pc:sldLayoutMkLst>
-            <pc:docMk/>
-            <pc:sldMasterMk cId="290023269" sldId="2147483660"/>
-            <pc:sldLayoutMk cId="3367265478" sldId="2147483671"/>
-          </pc:sldLayoutMkLst>
-        </pc:sldLayoutChg>
-      </pc:sldMasterChg>
-      <pc:sldMasterChg chg="add del addSldLayout delSldLayout">
-        <pc:chgData name="Margo Bonal" userId="18c9fa0f-b53d-478b-9dc0-6ad88786c19f" providerId="ADAL" clId="{93D479E5-F67F-4B8A-A78F-A0B574A116B6}" dt="2026-03-08T14:31:47.121" v="54" actId="26606"/>
-        <pc:sldMasterMkLst>
-          <pc:docMk/>
-          <pc:sldMasterMk cId="2486703237" sldId="2147483673"/>
-        </pc:sldMasterMkLst>
-        <pc:sldLayoutChg chg="add del">
-          <pc:chgData name="Margo Bonal" userId="18c9fa0f-b53d-478b-9dc0-6ad88786c19f" providerId="ADAL" clId="{93D479E5-F67F-4B8A-A78F-A0B574A116B6}" dt="2026-03-08T14:31:47.121" v="54" actId="26606"/>
-          <pc:sldLayoutMkLst>
-            <pc:docMk/>
-            <pc:sldMasterMk cId="2486703237" sldId="2147483673"/>
-            <pc:sldLayoutMk cId="696344618" sldId="2147483662"/>
-          </pc:sldLayoutMkLst>
-        </pc:sldLayoutChg>
-        <pc:sldLayoutChg chg="add del">
-          <pc:chgData name="Margo Bonal" userId="18c9fa0f-b53d-478b-9dc0-6ad88786c19f" providerId="ADAL" clId="{93D479E5-F67F-4B8A-A78F-A0B574A116B6}" dt="2026-03-08T14:31:47.121" v="54" actId="26606"/>
-          <pc:sldLayoutMkLst>
-            <pc:docMk/>
-            <pc:sldMasterMk cId="2486703237" sldId="2147483673"/>
-            <pc:sldLayoutMk cId="3604117935" sldId="2147483663"/>
-          </pc:sldLayoutMkLst>
-        </pc:sldLayoutChg>
-        <pc:sldLayoutChg chg="add del">
-          <pc:chgData name="Margo Bonal" userId="18c9fa0f-b53d-478b-9dc0-6ad88786c19f" providerId="ADAL" clId="{93D479E5-F67F-4B8A-A78F-A0B574A116B6}" dt="2026-03-08T14:31:47.121" v="54" actId="26606"/>
-          <pc:sldLayoutMkLst>
-            <pc:docMk/>
-            <pc:sldMasterMk cId="2486703237" sldId="2147483673"/>
-            <pc:sldLayoutMk cId="459957622" sldId="2147483664"/>
-          </pc:sldLayoutMkLst>
-        </pc:sldLayoutChg>
-        <pc:sldLayoutChg chg="add del">
-          <pc:chgData name="Margo Bonal" userId="18c9fa0f-b53d-478b-9dc0-6ad88786c19f" providerId="ADAL" clId="{93D479E5-F67F-4B8A-A78F-A0B574A116B6}" dt="2026-03-08T14:31:47.121" v="54" actId="26606"/>
-          <pc:sldLayoutMkLst>
-            <pc:docMk/>
-            <pc:sldMasterMk cId="2486703237" sldId="2147483673"/>
-            <pc:sldLayoutMk cId="3398159033" sldId="2147483665"/>
-          </pc:sldLayoutMkLst>
-        </pc:sldLayoutChg>
-        <pc:sldLayoutChg chg="add del">
-          <pc:chgData name="Margo Bonal" userId="18c9fa0f-b53d-478b-9dc0-6ad88786c19f" providerId="ADAL" clId="{93D479E5-F67F-4B8A-A78F-A0B574A116B6}" dt="2026-03-08T14:31:47.121" v="54" actId="26606"/>
-          <pc:sldLayoutMkLst>
-            <pc:docMk/>
-            <pc:sldMasterMk cId="2486703237" sldId="2147483673"/>
-            <pc:sldLayoutMk cId="3199839217" sldId="2147483666"/>
-          </pc:sldLayoutMkLst>
-        </pc:sldLayoutChg>
-        <pc:sldLayoutChg chg="add del">
-          <pc:chgData name="Margo Bonal" userId="18c9fa0f-b53d-478b-9dc0-6ad88786c19f" providerId="ADAL" clId="{93D479E5-F67F-4B8A-A78F-A0B574A116B6}" dt="2026-03-08T14:31:47.121" v="54" actId="26606"/>
-          <pc:sldLayoutMkLst>
-            <pc:docMk/>
-            <pc:sldMasterMk cId="2486703237" sldId="2147483673"/>
-            <pc:sldLayoutMk cId="3507528767" sldId="2147483667"/>
-          </pc:sldLayoutMkLst>
-        </pc:sldLayoutChg>
-        <pc:sldLayoutChg chg="add del">
-          <pc:chgData name="Margo Bonal" userId="18c9fa0f-b53d-478b-9dc0-6ad88786c19f" providerId="ADAL" clId="{93D479E5-F67F-4B8A-A78F-A0B574A116B6}" dt="2026-03-08T14:31:47.121" v="54" actId="26606"/>
-          <pc:sldLayoutMkLst>
-            <pc:docMk/>
-            <pc:sldMasterMk cId="2486703237" sldId="2147483673"/>
-            <pc:sldLayoutMk cId="3924403092" sldId="2147483668"/>
-          </pc:sldLayoutMkLst>
-        </pc:sldLayoutChg>
-        <pc:sldLayoutChg chg="add del">
-          <pc:chgData name="Margo Bonal" userId="18c9fa0f-b53d-478b-9dc0-6ad88786c19f" providerId="ADAL" clId="{93D479E5-F67F-4B8A-A78F-A0B574A116B6}" dt="2026-03-08T14:31:47.121" v="54" actId="26606"/>
-          <pc:sldLayoutMkLst>
-            <pc:docMk/>
-            <pc:sldMasterMk cId="2486703237" sldId="2147483673"/>
-            <pc:sldLayoutMk cId="1223552546" sldId="2147483669"/>
-          </pc:sldLayoutMkLst>
-        </pc:sldLayoutChg>
-        <pc:sldLayoutChg chg="add del">
-          <pc:chgData name="Margo Bonal" userId="18c9fa0f-b53d-478b-9dc0-6ad88786c19f" providerId="ADAL" clId="{93D479E5-F67F-4B8A-A78F-A0B574A116B6}" dt="2026-03-08T14:31:47.121" v="54" actId="26606"/>
-          <pc:sldLayoutMkLst>
-            <pc:docMk/>
-            <pc:sldMasterMk cId="2486703237" sldId="2147483673"/>
-            <pc:sldLayoutMk cId="132458949" sldId="2147483670"/>
-          </pc:sldLayoutMkLst>
-        </pc:sldLayoutChg>
-        <pc:sldLayoutChg chg="add del">
-          <pc:chgData name="Margo Bonal" userId="18c9fa0f-b53d-478b-9dc0-6ad88786c19f" providerId="ADAL" clId="{93D479E5-F67F-4B8A-A78F-A0B574A116B6}" dt="2026-03-08T14:31:47.121" v="54" actId="26606"/>
-          <pc:sldLayoutMkLst>
-            <pc:docMk/>
-            <pc:sldMasterMk cId="2486703237" sldId="2147483673"/>
-            <pc:sldLayoutMk cId="3608840387" sldId="2147483671"/>
-          </pc:sldLayoutMkLst>
-        </pc:sldLayoutChg>
-        <pc:sldLayoutChg chg="add del">
-          <pc:chgData name="Margo Bonal" userId="18c9fa0f-b53d-478b-9dc0-6ad88786c19f" providerId="ADAL" clId="{93D479E5-F67F-4B8A-A78F-A0B574A116B6}" dt="2026-03-08T14:31:47.121" v="54" actId="26606"/>
-          <pc:sldLayoutMkLst>
-            <pc:docMk/>
-            <pc:sldMasterMk cId="2486703237" sldId="2147483673"/>
-            <pc:sldLayoutMk cId="1315967585" sldId="2147483672"/>
-          </pc:sldLayoutMkLst>
-        </pc:sldLayoutChg>
-      </pc:sldMasterChg>
-      <pc:sldMasterChg chg="add del addSldLayout delSldLayout">
-        <pc:chgData name="Margo Bonal" userId="18c9fa0f-b53d-478b-9dc0-6ad88786c19f" providerId="ADAL" clId="{93D479E5-F67F-4B8A-A78F-A0B574A116B6}" dt="2026-03-08T14:31:20.791" v="51" actId="26606"/>
-        <pc:sldMasterMkLst>
-          <pc:docMk/>
-          <pc:sldMasterMk cId="2057100312" sldId="2147483698"/>
-        </pc:sldMasterMkLst>
-        <pc:sldLayoutChg chg="add del">
-          <pc:chgData name="Margo Bonal" userId="18c9fa0f-b53d-478b-9dc0-6ad88786c19f" providerId="ADAL" clId="{93D479E5-F67F-4B8A-A78F-A0B574A116B6}" dt="2026-03-08T14:31:20.791" v="51" actId="26606"/>
-          <pc:sldLayoutMkLst>
-            <pc:docMk/>
-            <pc:sldMasterMk cId="2057100312" sldId="2147483698"/>
-            <pc:sldLayoutMk cId="2834268732" sldId="2147483687"/>
-          </pc:sldLayoutMkLst>
-        </pc:sldLayoutChg>
-        <pc:sldLayoutChg chg="add del">
-          <pc:chgData name="Margo Bonal" userId="18c9fa0f-b53d-478b-9dc0-6ad88786c19f" providerId="ADAL" clId="{93D479E5-F67F-4B8A-A78F-A0B574A116B6}" dt="2026-03-08T14:31:20.791" v="51" actId="26606"/>
-          <pc:sldLayoutMkLst>
-            <pc:docMk/>
-            <pc:sldMasterMk cId="2057100312" sldId="2147483698"/>
-            <pc:sldLayoutMk cId="2001340881" sldId="2147483688"/>
-          </pc:sldLayoutMkLst>
-        </pc:sldLayoutChg>
-        <pc:sldLayoutChg chg="add del">
-          <pc:chgData name="Margo Bonal" userId="18c9fa0f-b53d-478b-9dc0-6ad88786c19f" providerId="ADAL" clId="{93D479E5-F67F-4B8A-A78F-A0B574A116B6}" dt="2026-03-08T14:31:20.791" v="51" actId="26606"/>
-          <pc:sldLayoutMkLst>
-            <pc:docMk/>
-            <pc:sldMasterMk cId="2057100312" sldId="2147483698"/>
-            <pc:sldLayoutMk cId="1505111466" sldId="2147483689"/>
-          </pc:sldLayoutMkLst>
-        </pc:sldLayoutChg>
-        <pc:sldLayoutChg chg="add del">
-          <pc:chgData name="Margo Bonal" userId="18c9fa0f-b53d-478b-9dc0-6ad88786c19f" providerId="ADAL" clId="{93D479E5-F67F-4B8A-A78F-A0B574A116B6}" dt="2026-03-08T14:31:20.791" v="51" actId="26606"/>
-          <pc:sldLayoutMkLst>
-            <pc:docMk/>
-            <pc:sldMasterMk cId="2057100312" sldId="2147483698"/>
-            <pc:sldLayoutMk cId="2438606661" sldId="2147483690"/>
-          </pc:sldLayoutMkLst>
-        </pc:sldLayoutChg>
-        <pc:sldLayoutChg chg="add del">
-          <pc:chgData name="Margo Bonal" userId="18c9fa0f-b53d-478b-9dc0-6ad88786c19f" providerId="ADAL" clId="{93D479E5-F67F-4B8A-A78F-A0B574A116B6}" dt="2026-03-08T14:31:20.791" v="51" actId="26606"/>
-          <pc:sldLayoutMkLst>
-            <pc:docMk/>
-            <pc:sldMasterMk cId="2057100312" sldId="2147483698"/>
-            <pc:sldLayoutMk cId="1895772608" sldId="2147483691"/>
-          </pc:sldLayoutMkLst>
-        </pc:sldLayoutChg>
-        <pc:sldLayoutChg chg="add del">
-          <pc:chgData name="Margo Bonal" userId="18c9fa0f-b53d-478b-9dc0-6ad88786c19f" providerId="ADAL" clId="{93D479E5-F67F-4B8A-A78F-A0B574A116B6}" dt="2026-03-08T14:31:20.791" v="51" actId="26606"/>
-          <pc:sldLayoutMkLst>
-            <pc:docMk/>
-            <pc:sldMasterMk cId="2057100312" sldId="2147483698"/>
-            <pc:sldLayoutMk cId="919258172" sldId="2147483692"/>
-          </pc:sldLayoutMkLst>
-        </pc:sldLayoutChg>
-        <pc:sldLayoutChg chg="add del">
-          <pc:chgData name="Margo Bonal" userId="18c9fa0f-b53d-478b-9dc0-6ad88786c19f" providerId="ADAL" clId="{93D479E5-F67F-4B8A-A78F-A0B574A116B6}" dt="2026-03-08T14:31:20.791" v="51" actId="26606"/>
-          <pc:sldLayoutMkLst>
-            <pc:docMk/>
-            <pc:sldMasterMk cId="2057100312" sldId="2147483698"/>
-            <pc:sldLayoutMk cId="1304930977" sldId="2147483693"/>
-          </pc:sldLayoutMkLst>
-        </pc:sldLayoutChg>
-        <pc:sldLayoutChg chg="add del">
-          <pc:chgData name="Margo Bonal" userId="18c9fa0f-b53d-478b-9dc0-6ad88786c19f" providerId="ADAL" clId="{93D479E5-F67F-4B8A-A78F-A0B574A116B6}" dt="2026-03-08T14:31:20.791" v="51" actId="26606"/>
-          <pc:sldLayoutMkLst>
-            <pc:docMk/>
-            <pc:sldMasterMk cId="2057100312" sldId="2147483698"/>
-            <pc:sldLayoutMk cId="1754423770" sldId="2147483694"/>
-          </pc:sldLayoutMkLst>
-        </pc:sldLayoutChg>
-        <pc:sldLayoutChg chg="add del">
-          <pc:chgData name="Margo Bonal" userId="18c9fa0f-b53d-478b-9dc0-6ad88786c19f" providerId="ADAL" clId="{93D479E5-F67F-4B8A-A78F-A0B574A116B6}" dt="2026-03-08T14:31:20.791" v="51" actId="26606"/>
-          <pc:sldLayoutMkLst>
-            <pc:docMk/>
-            <pc:sldMasterMk cId="2057100312" sldId="2147483698"/>
-            <pc:sldLayoutMk cId="2008673592" sldId="2147483695"/>
-          </pc:sldLayoutMkLst>
-        </pc:sldLayoutChg>
-        <pc:sldLayoutChg chg="add del">
-          <pc:chgData name="Margo Bonal" userId="18c9fa0f-b53d-478b-9dc0-6ad88786c19f" providerId="ADAL" clId="{93D479E5-F67F-4B8A-A78F-A0B574A116B6}" dt="2026-03-08T14:31:20.791" v="51" actId="26606"/>
-          <pc:sldLayoutMkLst>
-            <pc:docMk/>
-            <pc:sldMasterMk cId="2057100312" sldId="2147483698"/>
-            <pc:sldLayoutMk cId="1034073367" sldId="2147483696"/>
-          </pc:sldLayoutMkLst>
-        </pc:sldLayoutChg>
-        <pc:sldLayoutChg chg="add del">
-          <pc:chgData name="Margo Bonal" userId="18c9fa0f-b53d-478b-9dc0-6ad88786c19f" providerId="ADAL" clId="{93D479E5-F67F-4B8A-A78F-A0B574A116B6}" dt="2026-03-08T14:31:20.791" v="51" actId="26606"/>
-          <pc:sldLayoutMkLst>
-            <pc:docMk/>
-            <pc:sldMasterMk cId="2057100312" sldId="2147483698"/>
-            <pc:sldLayoutMk cId="225648956" sldId="2147483697"/>
-          </pc:sldLayoutMkLst>
-        </pc:sldLayoutChg>
-      </pc:sldMasterChg>
-      <pc:sldMasterChg chg="add del addSldLayout delSldLayout">
-        <pc:chgData name="Margo Bonal" userId="18c9fa0f-b53d-478b-9dc0-6ad88786c19f" providerId="ADAL" clId="{93D479E5-F67F-4B8A-A78F-A0B574A116B6}" dt="2026-03-08T14:32:49.060" v="64" actId="26606"/>
-        <pc:sldMasterMkLst>
-          <pc:docMk/>
-          <pc:sldMasterMk cId="1947775101" sldId="2147483726"/>
-        </pc:sldMasterMkLst>
-        <pc:sldLayoutChg chg="add del">
-          <pc:chgData name="Margo Bonal" userId="18c9fa0f-b53d-478b-9dc0-6ad88786c19f" providerId="ADAL" clId="{93D479E5-F67F-4B8A-A78F-A0B574A116B6}" dt="2026-03-08T14:32:49.060" v="64" actId="26606"/>
-          <pc:sldLayoutMkLst>
-            <pc:docMk/>
-            <pc:sldMasterMk cId="1947775101" sldId="2147483726"/>
-            <pc:sldLayoutMk cId="419163171" sldId="2147483715"/>
-          </pc:sldLayoutMkLst>
-        </pc:sldLayoutChg>
-        <pc:sldLayoutChg chg="add del">
-          <pc:chgData name="Margo Bonal" userId="18c9fa0f-b53d-478b-9dc0-6ad88786c19f" providerId="ADAL" clId="{93D479E5-F67F-4B8A-A78F-A0B574A116B6}" dt="2026-03-08T14:32:49.060" v="64" actId="26606"/>
-          <pc:sldLayoutMkLst>
-            <pc:docMk/>
-            <pc:sldMasterMk cId="1947775101" sldId="2147483726"/>
-            <pc:sldLayoutMk cId="2374273341" sldId="2147483716"/>
-          </pc:sldLayoutMkLst>
-        </pc:sldLayoutChg>
-        <pc:sldLayoutChg chg="add del">
-          <pc:chgData name="Margo Bonal" userId="18c9fa0f-b53d-478b-9dc0-6ad88786c19f" providerId="ADAL" clId="{93D479E5-F67F-4B8A-A78F-A0B574A116B6}" dt="2026-03-08T14:32:49.060" v="64" actId="26606"/>
-          <pc:sldLayoutMkLst>
-            <pc:docMk/>
-            <pc:sldMasterMk cId="1947775101" sldId="2147483726"/>
-            <pc:sldLayoutMk cId="2534878236" sldId="2147483717"/>
-          </pc:sldLayoutMkLst>
-        </pc:sldLayoutChg>
-        <pc:sldLayoutChg chg="add del">
-          <pc:chgData name="Margo Bonal" userId="18c9fa0f-b53d-478b-9dc0-6ad88786c19f" providerId="ADAL" clId="{93D479E5-F67F-4B8A-A78F-A0B574A116B6}" dt="2026-03-08T14:32:49.060" v="64" actId="26606"/>
-          <pc:sldLayoutMkLst>
-            <pc:docMk/>
-            <pc:sldMasterMk cId="1947775101" sldId="2147483726"/>
-            <pc:sldLayoutMk cId="2813816717" sldId="2147483718"/>
-          </pc:sldLayoutMkLst>
-        </pc:sldLayoutChg>
-        <pc:sldLayoutChg chg="add del">
-          <pc:chgData name="Margo Bonal" userId="18c9fa0f-b53d-478b-9dc0-6ad88786c19f" providerId="ADAL" clId="{93D479E5-F67F-4B8A-A78F-A0B574A116B6}" dt="2026-03-08T14:32:49.060" v="64" actId="26606"/>
-          <pc:sldLayoutMkLst>
-            <pc:docMk/>
-            <pc:sldMasterMk cId="1947775101" sldId="2147483726"/>
-            <pc:sldLayoutMk cId="2579431350" sldId="2147483719"/>
-          </pc:sldLayoutMkLst>
-        </pc:sldLayoutChg>
-        <pc:sldLayoutChg chg="add del">
-          <pc:chgData name="Margo Bonal" userId="18c9fa0f-b53d-478b-9dc0-6ad88786c19f" providerId="ADAL" clId="{93D479E5-F67F-4B8A-A78F-A0B574A116B6}" dt="2026-03-08T14:32:49.060" v="64" actId="26606"/>
-          <pc:sldLayoutMkLst>
-            <pc:docMk/>
-            <pc:sldMasterMk cId="1947775101" sldId="2147483726"/>
-            <pc:sldLayoutMk cId="2773902019" sldId="2147483720"/>
-          </pc:sldLayoutMkLst>
-        </pc:sldLayoutChg>
-        <pc:sldLayoutChg chg="add del">
-          <pc:chgData name="Margo Bonal" userId="18c9fa0f-b53d-478b-9dc0-6ad88786c19f" providerId="ADAL" clId="{93D479E5-F67F-4B8A-A78F-A0B574A116B6}" dt="2026-03-08T14:32:49.060" v="64" actId="26606"/>
-          <pc:sldLayoutMkLst>
-            <pc:docMk/>
-            <pc:sldMasterMk cId="1947775101" sldId="2147483726"/>
-            <pc:sldLayoutMk cId="2808765370" sldId="2147483721"/>
-          </pc:sldLayoutMkLst>
-        </pc:sldLayoutChg>
-        <pc:sldLayoutChg chg="add del">
-          <pc:chgData name="Margo Bonal" userId="18c9fa0f-b53d-478b-9dc0-6ad88786c19f" providerId="ADAL" clId="{93D479E5-F67F-4B8A-A78F-A0B574A116B6}" dt="2026-03-08T14:32:49.060" v="64" actId="26606"/>
-          <pc:sldLayoutMkLst>
-            <pc:docMk/>
-            <pc:sldMasterMk cId="1947775101" sldId="2147483726"/>
-            <pc:sldLayoutMk cId="3651758353" sldId="2147483722"/>
-          </pc:sldLayoutMkLst>
-        </pc:sldLayoutChg>
-        <pc:sldLayoutChg chg="add del">
-          <pc:chgData name="Margo Bonal" userId="18c9fa0f-b53d-478b-9dc0-6ad88786c19f" providerId="ADAL" clId="{93D479E5-F67F-4B8A-A78F-A0B574A116B6}" dt="2026-03-08T14:32:49.060" v="64" actId="26606"/>
-          <pc:sldLayoutMkLst>
-            <pc:docMk/>
-            <pc:sldMasterMk cId="1947775101" sldId="2147483726"/>
-            <pc:sldLayoutMk cId="778839595" sldId="2147483723"/>
-          </pc:sldLayoutMkLst>
-        </pc:sldLayoutChg>
-        <pc:sldLayoutChg chg="add del">
-          <pc:chgData name="Margo Bonal" userId="18c9fa0f-b53d-478b-9dc0-6ad88786c19f" providerId="ADAL" clId="{93D479E5-F67F-4B8A-A78F-A0B574A116B6}" dt="2026-03-08T14:32:49.060" v="64" actId="26606"/>
-          <pc:sldLayoutMkLst>
-            <pc:docMk/>
-            <pc:sldMasterMk cId="1947775101" sldId="2147483726"/>
-            <pc:sldLayoutMk cId="1579141180" sldId="2147483724"/>
-          </pc:sldLayoutMkLst>
-        </pc:sldLayoutChg>
-        <pc:sldLayoutChg chg="add del">
-          <pc:chgData name="Margo Bonal" userId="18c9fa0f-b53d-478b-9dc0-6ad88786c19f" providerId="ADAL" clId="{93D479E5-F67F-4B8A-A78F-A0B574A116B6}" dt="2026-03-08T14:32:49.060" v="64" actId="26606"/>
-          <pc:sldLayoutMkLst>
-            <pc:docMk/>
-            <pc:sldMasterMk cId="1947775101" sldId="2147483726"/>
-            <pc:sldLayoutMk cId="725880516" sldId="2147483725"/>
-          </pc:sldLayoutMkLst>
-        </pc:sldLayoutChg>
-      </pc:sldMasterChg>
-      <pc:sldMasterChg chg="add del addSldLayout delSldLayout">
-        <pc:chgData name="Margo Bonal" userId="18c9fa0f-b53d-478b-9dc0-6ad88786c19f" providerId="ADAL" clId="{93D479E5-F67F-4B8A-A78F-A0B574A116B6}" dt="2026-03-08T14:29:22.790" v="6" actId="26606"/>
-        <pc:sldMasterMkLst>
-          <pc:docMk/>
-          <pc:sldMasterMk cId="939456377" sldId="2147483738"/>
-        </pc:sldMasterMkLst>
-        <pc:sldLayoutChg chg="add del">
-          <pc:chgData name="Margo Bonal" userId="18c9fa0f-b53d-478b-9dc0-6ad88786c19f" providerId="ADAL" clId="{93D479E5-F67F-4B8A-A78F-A0B574A116B6}" dt="2026-03-08T14:29:22.790" v="6" actId="26606"/>
-          <pc:sldLayoutMkLst>
-            <pc:docMk/>
-            <pc:sldMasterMk cId="939456377" sldId="2147483738"/>
-            <pc:sldLayoutMk cId="2964668950" sldId="2147483727"/>
-          </pc:sldLayoutMkLst>
-        </pc:sldLayoutChg>
-        <pc:sldLayoutChg chg="add del">
-          <pc:chgData name="Margo Bonal" userId="18c9fa0f-b53d-478b-9dc0-6ad88786c19f" providerId="ADAL" clId="{93D479E5-F67F-4B8A-A78F-A0B574A116B6}" dt="2026-03-08T14:29:22.790" v="6" actId="26606"/>
-          <pc:sldLayoutMkLst>
-            <pc:docMk/>
-            <pc:sldMasterMk cId="939456377" sldId="2147483738"/>
-            <pc:sldLayoutMk cId="3825726748" sldId="2147483728"/>
-          </pc:sldLayoutMkLst>
-        </pc:sldLayoutChg>
-        <pc:sldLayoutChg chg="add del">
-          <pc:chgData name="Margo Bonal" userId="18c9fa0f-b53d-478b-9dc0-6ad88786c19f" providerId="ADAL" clId="{93D479E5-F67F-4B8A-A78F-A0B574A116B6}" dt="2026-03-08T14:29:22.790" v="6" actId="26606"/>
-          <pc:sldLayoutMkLst>
-            <pc:docMk/>
-            <pc:sldMasterMk cId="939456377" sldId="2147483738"/>
-            <pc:sldLayoutMk cId="2281457719" sldId="2147483729"/>
-          </pc:sldLayoutMkLst>
-        </pc:sldLayoutChg>
-        <pc:sldLayoutChg chg="add del">
-          <pc:chgData name="Margo Bonal" userId="18c9fa0f-b53d-478b-9dc0-6ad88786c19f" providerId="ADAL" clId="{93D479E5-F67F-4B8A-A78F-A0B574A116B6}" dt="2026-03-08T14:29:22.790" v="6" actId="26606"/>
-          <pc:sldLayoutMkLst>
-            <pc:docMk/>
-            <pc:sldMasterMk cId="939456377" sldId="2147483738"/>
-            <pc:sldLayoutMk cId="1549037478" sldId="2147483730"/>
-          </pc:sldLayoutMkLst>
-        </pc:sldLayoutChg>
-        <pc:sldLayoutChg chg="add del">
-          <pc:chgData name="Margo Bonal" userId="18c9fa0f-b53d-478b-9dc0-6ad88786c19f" providerId="ADAL" clId="{93D479E5-F67F-4B8A-A78F-A0B574A116B6}" dt="2026-03-08T14:29:22.790" v="6" actId="26606"/>
-          <pc:sldLayoutMkLst>
-            <pc:docMk/>
-            <pc:sldMasterMk cId="939456377" sldId="2147483738"/>
-            <pc:sldLayoutMk cId="1499164151" sldId="2147483731"/>
-          </pc:sldLayoutMkLst>
-        </pc:sldLayoutChg>
-        <pc:sldLayoutChg chg="add del">
-          <pc:chgData name="Margo Bonal" userId="18c9fa0f-b53d-478b-9dc0-6ad88786c19f" providerId="ADAL" clId="{93D479E5-F67F-4B8A-A78F-A0B574A116B6}" dt="2026-03-08T14:29:22.790" v="6" actId="26606"/>
-          <pc:sldLayoutMkLst>
-            <pc:docMk/>
-            <pc:sldMasterMk cId="939456377" sldId="2147483738"/>
-            <pc:sldLayoutMk cId="3831639391" sldId="2147483732"/>
-          </pc:sldLayoutMkLst>
-        </pc:sldLayoutChg>
-        <pc:sldLayoutChg chg="add del">
-          <pc:chgData name="Margo Bonal" userId="18c9fa0f-b53d-478b-9dc0-6ad88786c19f" providerId="ADAL" clId="{93D479E5-F67F-4B8A-A78F-A0B574A116B6}" dt="2026-03-08T14:29:22.790" v="6" actId="26606"/>
-          <pc:sldLayoutMkLst>
-            <pc:docMk/>
-            <pc:sldMasterMk cId="939456377" sldId="2147483738"/>
-            <pc:sldLayoutMk cId="2908275760" sldId="2147483733"/>
-          </pc:sldLayoutMkLst>
-        </pc:sldLayoutChg>
-        <pc:sldLayoutChg chg="add del">
-          <pc:chgData name="Margo Bonal" userId="18c9fa0f-b53d-478b-9dc0-6ad88786c19f" providerId="ADAL" clId="{93D479E5-F67F-4B8A-A78F-A0B574A116B6}" dt="2026-03-08T14:29:22.790" v="6" actId="26606"/>
-          <pc:sldLayoutMkLst>
-            <pc:docMk/>
-            <pc:sldMasterMk cId="939456377" sldId="2147483738"/>
-            <pc:sldLayoutMk cId="2926414760" sldId="2147483734"/>
-          </pc:sldLayoutMkLst>
-        </pc:sldLayoutChg>
-        <pc:sldLayoutChg chg="add del">
-          <pc:chgData name="Margo Bonal" userId="18c9fa0f-b53d-478b-9dc0-6ad88786c19f" providerId="ADAL" clId="{93D479E5-F67F-4B8A-A78F-A0B574A116B6}" dt="2026-03-08T14:29:22.790" v="6" actId="26606"/>
-          <pc:sldLayoutMkLst>
-            <pc:docMk/>
-            <pc:sldMasterMk cId="939456377" sldId="2147483738"/>
-            <pc:sldLayoutMk cId="1204032117" sldId="2147483735"/>
-          </pc:sldLayoutMkLst>
-        </pc:sldLayoutChg>
-        <pc:sldLayoutChg chg="add del">
-          <pc:chgData name="Margo Bonal" userId="18c9fa0f-b53d-478b-9dc0-6ad88786c19f" providerId="ADAL" clId="{93D479E5-F67F-4B8A-A78F-A0B574A116B6}" dt="2026-03-08T14:29:22.790" v="6" actId="26606"/>
-          <pc:sldLayoutMkLst>
-            <pc:docMk/>
-            <pc:sldMasterMk cId="939456377" sldId="2147483738"/>
-            <pc:sldLayoutMk cId="3238790704" sldId="2147483736"/>
-          </pc:sldLayoutMkLst>
-        </pc:sldLayoutChg>
-        <pc:sldLayoutChg chg="add del">
-          <pc:chgData name="Margo Bonal" userId="18c9fa0f-b53d-478b-9dc0-6ad88786c19f" providerId="ADAL" clId="{93D479E5-F67F-4B8A-A78F-A0B574A116B6}" dt="2026-03-08T14:29:22.790" v="6" actId="26606"/>
-          <pc:sldLayoutMkLst>
-            <pc:docMk/>
-            <pc:sldMasterMk cId="939456377" sldId="2147483738"/>
-            <pc:sldLayoutMk cId="136777702" sldId="2147483737"/>
-          </pc:sldLayoutMkLst>
-        </pc:sldLayoutChg>
-      </pc:sldMasterChg>
-      <pc:sldMasterChg chg="add del addSldLayout delSldLayout">
-        <pc:chgData name="Margo Bonal" userId="18c9fa0f-b53d-478b-9dc0-6ad88786c19f" providerId="ADAL" clId="{93D479E5-F67F-4B8A-A78F-A0B574A116B6}" dt="2026-03-08T14:36:52.675" v="127" actId="26606"/>
-        <pc:sldMasterMkLst>
-          <pc:docMk/>
-          <pc:sldMasterMk cId="1910141282" sldId="2147483763"/>
-        </pc:sldMasterMkLst>
-        <pc:sldLayoutChg chg="add del">
-          <pc:chgData name="Margo Bonal" userId="18c9fa0f-b53d-478b-9dc0-6ad88786c19f" providerId="ADAL" clId="{93D479E5-F67F-4B8A-A78F-A0B574A116B6}" dt="2026-03-08T14:36:52.675" v="127" actId="26606"/>
-          <pc:sldLayoutMkLst>
-            <pc:docMk/>
-            <pc:sldMasterMk cId="1910141282" sldId="2147483763"/>
-            <pc:sldLayoutMk cId="2740459542" sldId="2147483752"/>
-          </pc:sldLayoutMkLst>
-        </pc:sldLayoutChg>
-        <pc:sldLayoutChg chg="add del">
-          <pc:chgData name="Margo Bonal" userId="18c9fa0f-b53d-478b-9dc0-6ad88786c19f" providerId="ADAL" clId="{93D479E5-F67F-4B8A-A78F-A0B574A116B6}" dt="2026-03-08T14:36:52.675" v="127" actId="26606"/>
-          <pc:sldLayoutMkLst>
-            <pc:docMk/>
-            <pc:sldMasterMk cId="1910141282" sldId="2147483763"/>
-            <pc:sldLayoutMk cId="2040815420" sldId="2147483753"/>
-          </pc:sldLayoutMkLst>
-        </pc:sldLayoutChg>
-        <pc:sldLayoutChg chg="add del">
-          <pc:chgData name="Margo Bonal" userId="18c9fa0f-b53d-478b-9dc0-6ad88786c19f" providerId="ADAL" clId="{93D479E5-F67F-4B8A-A78F-A0B574A116B6}" dt="2026-03-08T14:36:52.675" v="127" actId="26606"/>
-          <pc:sldLayoutMkLst>
-            <pc:docMk/>
-            <pc:sldMasterMk cId="1910141282" sldId="2147483763"/>
-            <pc:sldLayoutMk cId="1679322755" sldId="2147483754"/>
-          </pc:sldLayoutMkLst>
-        </pc:sldLayoutChg>
-        <pc:sldLayoutChg chg="add del">
-          <pc:chgData name="Margo Bonal" userId="18c9fa0f-b53d-478b-9dc0-6ad88786c19f" providerId="ADAL" clId="{93D479E5-F67F-4B8A-A78F-A0B574A116B6}" dt="2026-03-08T14:36:52.675" v="127" actId="26606"/>
-          <pc:sldLayoutMkLst>
-            <pc:docMk/>
-            <pc:sldMasterMk cId="1910141282" sldId="2147483763"/>
-            <pc:sldLayoutMk cId="2560185782" sldId="2147483755"/>
-          </pc:sldLayoutMkLst>
-        </pc:sldLayoutChg>
-        <pc:sldLayoutChg chg="add del">
-          <pc:chgData name="Margo Bonal" userId="18c9fa0f-b53d-478b-9dc0-6ad88786c19f" providerId="ADAL" clId="{93D479E5-F67F-4B8A-A78F-A0B574A116B6}" dt="2026-03-08T14:36:52.675" v="127" actId="26606"/>
-          <pc:sldLayoutMkLst>
-            <pc:docMk/>
-            <pc:sldMasterMk cId="1910141282" sldId="2147483763"/>
-            <pc:sldLayoutMk cId="3523744172" sldId="2147483756"/>
-          </pc:sldLayoutMkLst>
-        </pc:sldLayoutChg>
-        <pc:sldLayoutChg chg="add del">
-          <pc:chgData name="Margo Bonal" userId="18c9fa0f-b53d-478b-9dc0-6ad88786c19f" providerId="ADAL" clId="{93D479E5-F67F-4B8A-A78F-A0B574A116B6}" dt="2026-03-08T14:36:52.675" v="127" actId="26606"/>
-          <pc:sldLayoutMkLst>
-            <pc:docMk/>
-            <pc:sldMasterMk cId="1910141282" sldId="2147483763"/>
-            <pc:sldLayoutMk cId="3216836895" sldId="2147483757"/>
-          </pc:sldLayoutMkLst>
-        </pc:sldLayoutChg>
-        <pc:sldLayoutChg chg="add del">
-          <pc:chgData name="Margo Bonal" userId="18c9fa0f-b53d-478b-9dc0-6ad88786c19f" providerId="ADAL" clId="{93D479E5-F67F-4B8A-A78F-A0B574A116B6}" dt="2026-03-08T14:36:52.675" v="127" actId="26606"/>
-          <pc:sldLayoutMkLst>
-            <pc:docMk/>
-            <pc:sldMasterMk cId="1910141282" sldId="2147483763"/>
-            <pc:sldLayoutMk cId="1138438944" sldId="2147483758"/>
-          </pc:sldLayoutMkLst>
-        </pc:sldLayoutChg>
-        <pc:sldLayoutChg chg="add del">
-          <pc:chgData name="Margo Bonal" userId="18c9fa0f-b53d-478b-9dc0-6ad88786c19f" providerId="ADAL" clId="{93D479E5-F67F-4B8A-A78F-A0B574A116B6}" dt="2026-03-08T14:36:52.675" v="127" actId="26606"/>
-          <pc:sldLayoutMkLst>
-            <pc:docMk/>
-            <pc:sldMasterMk cId="1910141282" sldId="2147483763"/>
-            <pc:sldLayoutMk cId="3052393861" sldId="2147483759"/>
-          </pc:sldLayoutMkLst>
-        </pc:sldLayoutChg>
-        <pc:sldLayoutChg chg="add del">
-          <pc:chgData name="Margo Bonal" userId="18c9fa0f-b53d-478b-9dc0-6ad88786c19f" providerId="ADAL" clId="{93D479E5-F67F-4B8A-A78F-A0B574A116B6}" dt="2026-03-08T14:36:52.675" v="127" actId="26606"/>
-          <pc:sldLayoutMkLst>
-            <pc:docMk/>
-            <pc:sldMasterMk cId="1910141282" sldId="2147483763"/>
-            <pc:sldLayoutMk cId="3820544423" sldId="2147483760"/>
-          </pc:sldLayoutMkLst>
-        </pc:sldLayoutChg>
-        <pc:sldLayoutChg chg="add del">
-          <pc:chgData name="Margo Bonal" userId="18c9fa0f-b53d-478b-9dc0-6ad88786c19f" providerId="ADAL" clId="{93D479E5-F67F-4B8A-A78F-A0B574A116B6}" dt="2026-03-08T14:36:52.675" v="127" actId="26606"/>
-          <pc:sldLayoutMkLst>
-            <pc:docMk/>
-            <pc:sldMasterMk cId="1910141282" sldId="2147483763"/>
-            <pc:sldLayoutMk cId="1527608814" sldId="2147483761"/>
-          </pc:sldLayoutMkLst>
-        </pc:sldLayoutChg>
-        <pc:sldLayoutChg chg="add del">
-          <pc:chgData name="Margo Bonal" userId="18c9fa0f-b53d-478b-9dc0-6ad88786c19f" providerId="ADAL" clId="{93D479E5-F67F-4B8A-A78F-A0B574A116B6}" dt="2026-03-08T14:36:52.675" v="127" actId="26606"/>
-          <pc:sldLayoutMkLst>
-            <pc:docMk/>
-            <pc:sldMasterMk cId="1910141282" sldId="2147483763"/>
-            <pc:sldLayoutMk cId="129511148" sldId="2147483762"/>
-          </pc:sldLayoutMkLst>
-        </pc:sldLayoutChg>
-      </pc:sldMasterChg>
-      <pc:sldMasterChg chg="add del addSldLayout delSldLayout">
-        <pc:chgData name="Margo Bonal" userId="18c9fa0f-b53d-478b-9dc0-6ad88786c19f" providerId="ADAL" clId="{93D479E5-F67F-4B8A-A78F-A0B574A116B6}" dt="2026-03-08T14:36:52.675" v="127" actId="26606"/>
-        <pc:sldMasterMkLst>
-          <pc:docMk/>
-          <pc:sldMasterMk cId="4256807758" sldId="2147483814"/>
-        </pc:sldMasterMkLst>
-        <pc:sldLayoutChg chg="add del">
-          <pc:chgData name="Margo Bonal" userId="18c9fa0f-b53d-478b-9dc0-6ad88786c19f" providerId="ADAL" clId="{93D479E5-F67F-4B8A-A78F-A0B574A116B6}" dt="2026-03-08T14:36:52.675" v="127" actId="26606"/>
-          <pc:sldLayoutMkLst>
-            <pc:docMk/>
-            <pc:sldMasterMk cId="4256807758" sldId="2147483814"/>
-            <pc:sldLayoutMk cId="3413380300" sldId="2147483803"/>
-          </pc:sldLayoutMkLst>
-        </pc:sldLayoutChg>
-        <pc:sldLayoutChg chg="add del">
-          <pc:chgData name="Margo Bonal" userId="18c9fa0f-b53d-478b-9dc0-6ad88786c19f" providerId="ADAL" clId="{93D479E5-F67F-4B8A-A78F-A0B574A116B6}" dt="2026-03-08T14:36:52.675" v="127" actId="26606"/>
-          <pc:sldLayoutMkLst>
-            <pc:docMk/>
-            <pc:sldMasterMk cId="4256807758" sldId="2147483814"/>
-            <pc:sldLayoutMk cId="612036350" sldId="2147483804"/>
-          </pc:sldLayoutMkLst>
-        </pc:sldLayoutChg>
-        <pc:sldLayoutChg chg="add del">
-          <pc:chgData name="Margo Bonal" userId="18c9fa0f-b53d-478b-9dc0-6ad88786c19f" providerId="ADAL" clId="{93D479E5-F67F-4B8A-A78F-A0B574A116B6}" dt="2026-03-08T14:36:52.675" v="127" actId="26606"/>
-          <pc:sldLayoutMkLst>
-            <pc:docMk/>
-            <pc:sldMasterMk cId="4256807758" sldId="2147483814"/>
-            <pc:sldLayoutMk cId="2040199540" sldId="2147483805"/>
-          </pc:sldLayoutMkLst>
-        </pc:sldLayoutChg>
-        <pc:sldLayoutChg chg="add del">
-          <pc:chgData name="Margo Bonal" userId="18c9fa0f-b53d-478b-9dc0-6ad88786c19f" providerId="ADAL" clId="{93D479E5-F67F-4B8A-A78F-A0B574A116B6}" dt="2026-03-08T14:36:52.675" v="127" actId="26606"/>
-          <pc:sldLayoutMkLst>
-            <pc:docMk/>
-            <pc:sldMasterMk cId="4256807758" sldId="2147483814"/>
-            <pc:sldLayoutMk cId="3904193171" sldId="2147483806"/>
-          </pc:sldLayoutMkLst>
-        </pc:sldLayoutChg>
-        <pc:sldLayoutChg chg="add del">
-          <pc:chgData name="Margo Bonal" userId="18c9fa0f-b53d-478b-9dc0-6ad88786c19f" providerId="ADAL" clId="{93D479E5-F67F-4B8A-A78F-A0B574A116B6}" dt="2026-03-08T14:36:52.675" v="127" actId="26606"/>
-          <pc:sldLayoutMkLst>
-            <pc:docMk/>
-            <pc:sldMasterMk cId="4256807758" sldId="2147483814"/>
-            <pc:sldLayoutMk cId="3569294715" sldId="2147483807"/>
-          </pc:sldLayoutMkLst>
-        </pc:sldLayoutChg>
-        <pc:sldLayoutChg chg="add del">
-          <pc:chgData name="Margo Bonal" userId="18c9fa0f-b53d-478b-9dc0-6ad88786c19f" providerId="ADAL" clId="{93D479E5-F67F-4B8A-A78F-A0B574A116B6}" dt="2026-03-08T14:36:52.675" v="127" actId="26606"/>
-          <pc:sldLayoutMkLst>
-            <pc:docMk/>
-            <pc:sldMasterMk cId="4256807758" sldId="2147483814"/>
-            <pc:sldLayoutMk cId="1935855827" sldId="2147483808"/>
-          </pc:sldLayoutMkLst>
-        </pc:sldLayoutChg>
-        <pc:sldLayoutChg chg="add del">
-          <pc:chgData name="Margo Bonal" userId="18c9fa0f-b53d-478b-9dc0-6ad88786c19f" providerId="ADAL" clId="{93D479E5-F67F-4B8A-A78F-A0B574A116B6}" dt="2026-03-08T14:36:52.675" v="127" actId="26606"/>
-          <pc:sldLayoutMkLst>
-            <pc:docMk/>
-            <pc:sldMasterMk cId="4256807758" sldId="2147483814"/>
-            <pc:sldLayoutMk cId="2938465500" sldId="2147483809"/>
-          </pc:sldLayoutMkLst>
-        </pc:sldLayoutChg>
-        <pc:sldLayoutChg chg="add del">
-          <pc:chgData name="Margo Bonal" userId="18c9fa0f-b53d-478b-9dc0-6ad88786c19f" providerId="ADAL" clId="{93D479E5-F67F-4B8A-A78F-A0B574A116B6}" dt="2026-03-08T14:36:52.675" v="127" actId="26606"/>
-          <pc:sldLayoutMkLst>
-            <pc:docMk/>
-            <pc:sldMasterMk cId="4256807758" sldId="2147483814"/>
-            <pc:sldLayoutMk cId="1725902291" sldId="2147483810"/>
-          </pc:sldLayoutMkLst>
-        </pc:sldLayoutChg>
-        <pc:sldLayoutChg chg="add del">
-          <pc:chgData name="Margo Bonal" userId="18c9fa0f-b53d-478b-9dc0-6ad88786c19f" providerId="ADAL" clId="{93D479E5-F67F-4B8A-A78F-A0B574A116B6}" dt="2026-03-08T14:36:52.675" v="127" actId="26606"/>
-          <pc:sldLayoutMkLst>
-            <pc:docMk/>
-            <pc:sldMasterMk cId="4256807758" sldId="2147483814"/>
-            <pc:sldLayoutMk cId="1013014445" sldId="2147483811"/>
-          </pc:sldLayoutMkLst>
-        </pc:sldLayoutChg>
-        <pc:sldLayoutChg chg="add del">
-          <pc:chgData name="Margo Bonal" userId="18c9fa0f-b53d-478b-9dc0-6ad88786c19f" providerId="ADAL" clId="{93D479E5-F67F-4B8A-A78F-A0B574A116B6}" dt="2026-03-08T14:36:52.675" v="127" actId="26606"/>
-          <pc:sldLayoutMkLst>
-            <pc:docMk/>
-            <pc:sldMasterMk cId="4256807758" sldId="2147483814"/>
-            <pc:sldLayoutMk cId="3692425600" sldId="2147483812"/>
-          </pc:sldLayoutMkLst>
-        </pc:sldLayoutChg>
-        <pc:sldLayoutChg chg="add del">
-          <pc:chgData name="Margo Bonal" userId="18c9fa0f-b53d-478b-9dc0-6ad88786c19f" providerId="ADAL" clId="{93D479E5-F67F-4B8A-A78F-A0B574A116B6}" dt="2026-03-08T14:36:52.675" v="127" actId="26606"/>
-          <pc:sldLayoutMkLst>
-            <pc:docMk/>
-            <pc:sldMasterMk cId="4256807758" sldId="2147483814"/>
-            <pc:sldLayoutMk cId="3124733289" sldId="2147483813"/>
-          </pc:sldLayoutMkLst>
-        </pc:sldLayoutChg>
-      </pc:sldMasterChg>
-      <pc:sldMasterChg chg="add del addSldLayout delSldLayout">
-        <pc:chgData name="Margo Bonal" userId="18c9fa0f-b53d-478b-9dc0-6ad88786c19f" providerId="ADAL" clId="{93D479E5-F67F-4B8A-A78F-A0B574A116B6}" dt="2026-03-08T14:44:27.889" v="226" actId="26606"/>
-        <pc:sldMasterMkLst>
-          <pc:docMk/>
-          <pc:sldMasterMk cId="2829427804" sldId="2147483815"/>
-        </pc:sldMasterMkLst>
-        <pc:sldLayoutChg chg="add del">
-          <pc:chgData name="Margo Bonal" userId="18c9fa0f-b53d-478b-9dc0-6ad88786c19f" providerId="ADAL" clId="{93D479E5-F67F-4B8A-A78F-A0B574A116B6}" dt="2026-03-08T14:44:27.889" v="226" actId="26606"/>
-          <pc:sldLayoutMkLst>
-            <pc:docMk/>
-            <pc:sldMasterMk cId="2829427804" sldId="2147483815"/>
-            <pc:sldLayoutMk cId="1727665872" sldId="2147483816"/>
-          </pc:sldLayoutMkLst>
-        </pc:sldLayoutChg>
-        <pc:sldLayoutChg chg="add del">
-          <pc:chgData name="Margo Bonal" userId="18c9fa0f-b53d-478b-9dc0-6ad88786c19f" providerId="ADAL" clId="{93D479E5-F67F-4B8A-A78F-A0B574A116B6}" dt="2026-03-08T14:44:27.889" v="226" actId="26606"/>
-          <pc:sldLayoutMkLst>
-            <pc:docMk/>
-            <pc:sldMasterMk cId="2829427804" sldId="2147483815"/>
-            <pc:sldLayoutMk cId="2748346463" sldId="2147483817"/>
-          </pc:sldLayoutMkLst>
-        </pc:sldLayoutChg>
-        <pc:sldLayoutChg chg="add del">
-          <pc:chgData name="Margo Bonal" userId="18c9fa0f-b53d-478b-9dc0-6ad88786c19f" providerId="ADAL" clId="{93D479E5-F67F-4B8A-A78F-A0B574A116B6}" dt="2026-03-08T14:44:27.889" v="226" actId="26606"/>
-          <pc:sldLayoutMkLst>
-            <pc:docMk/>
-            <pc:sldMasterMk cId="2829427804" sldId="2147483815"/>
-            <pc:sldLayoutMk cId="2059065934" sldId="2147483818"/>
-          </pc:sldLayoutMkLst>
-        </pc:sldLayoutChg>
-        <pc:sldLayoutChg chg="add del">
-          <pc:chgData name="Margo Bonal" userId="18c9fa0f-b53d-478b-9dc0-6ad88786c19f" providerId="ADAL" clId="{93D479E5-F67F-4B8A-A78F-A0B574A116B6}" dt="2026-03-08T14:44:27.889" v="226" actId="26606"/>
-          <pc:sldLayoutMkLst>
-            <pc:docMk/>
-            <pc:sldMasterMk cId="2829427804" sldId="2147483815"/>
-            <pc:sldLayoutMk cId="2909360954" sldId="2147483819"/>
-          </pc:sldLayoutMkLst>
-        </pc:sldLayoutChg>
-        <pc:sldLayoutChg chg="add del">
-          <pc:chgData name="Margo Bonal" userId="18c9fa0f-b53d-478b-9dc0-6ad88786c19f" providerId="ADAL" clId="{93D479E5-F67F-4B8A-A78F-A0B574A116B6}" dt="2026-03-08T14:44:27.889" v="226" actId="26606"/>
-          <pc:sldLayoutMkLst>
-            <pc:docMk/>
-            <pc:sldMasterMk cId="2829427804" sldId="2147483815"/>
-            <pc:sldLayoutMk cId="4048549359" sldId="2147483820"/>
-          </pc:sldLayoutMkLst>
-        </pc:sldLayoutChg>
-        <pc:sldLayoutChg chg="add del">
-          <pc:chgData name="Margo Bonal" userId="18c9fa0f-b53d-478b-9dc0-6ad88786c19f" providerId="ADAL" clId="{93D479E5-F67F-4B8A-A78F-A0B574A116B6}" dt="2026-03-08T14:44:27.889" v="226" actId="26606"/>
-          <pc:sldLayoutMkLst>
-            <pc:docMk/>
-            <pc:sldMasterMk cId="2829427804" sldId="2147483815"/>
-            <pc:sldLayoutMk cId="1646656590" sldId="2147483821"/>
-          </pc:sldLayoutMkLst>
-        </pc:sldLayoutChg>
-        <pc:sldLayoutChg chg="add del">
-          <pc:chgData name="Margo Bonal" userId="18c9fa0f-b53d-478b-9dc0-6ad88786c19f" providerId="ADAL" clId="{93D479E5-F67F-4B8A-A78F-A0B574A116B6}" dt="2026-03-08T14:44:27.889" v="226" actId="26606"/>
-          <pc:sldLayoutMkLst>
-            <pc:docMk/>
-            <pc:sldMasterMk cId="2829427804" sldId="2147483815"/>
-            <pc:sldLayoutMk cId="2628931118" sldId="2147483822"/>
-          </pc:sldLayoutMkLst>
-        </pc:sldLayoutChg>
-        <pc:sldLayoutChg chg="add del">
-          <pc:chgData name="Margo Bonal" userId="18c9fa0f-b53d-478b-9dc0-6ad88786c19f" providerId="ADAL" clId="{93D479E5-F67F-4B8A-A78F-A0B574A116B6}" dt="2026-03-08T14:44:27.889" v="226" actId="26606"/>
-          <pc:sldLayoutMkLst>
-            <pc:docMk/>
-            <pc:sldMasterMk cId="2829427804" sldId="2147483815"/>
-            <pc:sldLayoutMk cId="3522838735" sldId="2147483823"/>
-          </pc:sldLayoutMkLst>
-        </pc:sldLayoutChg>
-        <pc:sldLayoutChg chg="add del">
-          <pc:chgData name="Margo Bonal" userId="18c9fa0f-b53d-478b-9dc0-6ad88786c19f" providerId="ADAL" clId="{93D479E5-F67F-4B8A-A78F-A0B574A116B6}" dt="2026-03-08T14:44:27.889" v="226" actId="26606"/>
-          <pc:sldLayoutMkLst>
-            <pc:docMk/>
-            <pc:sldMasterMk cId="2829427804" sldId="2147483815"/>
-            <pc:sldLayoutMk cId="1891914925" sldId="2147483824"/>
-          </pc:sldLayoutMkLst>
-        </pc:sldLayoutChg>
-        <pc:sldLayoutChg chg="add del">
-          <pc:chgData name="Margo Bonal" userId="18c9fa0f-b53d-478b-9dc0-6ad88786c19f" providerId="ADAL" clId="{93D479E5-F67F-4B8A-A78F-A0B574A116B6}" dt="2026-03-08T14:44:27.889" v="226" actId="26606"/>
-          <pc:sldLayoutMkLst>
-            <pc:docMk/>
-            <pc:sldMasterMk cId="2829427804" sldId="2147483815"/>
-            <pc:sldLayoutMk cId="660136369" sldId="2147483825"/>
-          </pc:sldLayoutMkLst>
-        </pc:sldLayoutChg>
-        <pc:sldLayoutChg chg="add del">
-          <pc:chgData name="Margo Bonal" userId="18c9fa0f-b53d-478b-9dc0-6ad88786c19f" providerId="ADAL" clId="{93D479E5-F67F-4B8A-A78F-A0B574A116B6}" dt="2026-03-08T14:44:27.889" v="226" actId="26606"/>
-          <pc:sldLayoutMkLst>
-            <pc:docMk/>
-            <pc:sldMasterMk cId="2829427804" sldId="2147483815"/>
-            <pc:sldLayoutMk cId="457643745" sldId="2147483826"/>
-          </pc:sldLayoutMkLst>
-        </pc:sldLayoutChg>
-      </pc:sldMasterChg>
-      <pc:sldMasterChg chg="add del replId addSldLayout delSldLayout">
-        <pc:chgData name="Margo Bonal" userId="18c9fa0f-b53d-478b-9dc0-6ad88786c19f" providerId="ADAL" clId="{93D479E5-F67F-4B8A-A78F-A0B574A116B6}" dt="2026-03-08T14:44:03.785" v="222" actId="26606"/>
-        <pc:sldMasterMkLst>
-          <pc:docMk/>
-          <pc:sldMasterMk cId="1934719468" sldId="2147483827"/>
-        </pc:sldMasterMkLst>
-        <pc:sldLayoutChg chg="add del">
-          <pc:chgData name="Margo Bonal" userId="18c9fa0f-b53d-478b-9dc0-6ad88786c19f" providerId="ADAL" clId="{93D479E5-F67F-4B8A-A78F-A0B574A116B6}" dt="2026-03-08T14:44:03.785" v="222" actId="26606"/>
-          <pc:sldLayoutMkLst>
-            <pc:docMk/>
-            <pc:sldMasterMk cId="1934719468" sldId="2147483827"/>
-            <pc:sldLayoutMk cId="1358613271" sldId="2147483828"/>
-          </pc:sldLayoutMkLst>
-        </pc:sldLayoutChg>
-        <pc:sldLayoutChg chg="add del replId">
-          <pc:chgData name="Margo Bonal" userId="18c9fa0f-b53d-478b-9dc0-6ad88786c19f" providerId="ADAL" clId="{93D479E5-F67F-4B8A-A78F-A0B574A116B6}" dt="2026-03-08T14:44:03.785" v="222" actId="26606"/>
-          <pc:sldLayoutMkLst>
-            <pc:docMk/>
-            <pc:sldMasterMk cId="1934719468" sldId="2147483827"/>
-            <pc:sldLayoutMk cId="2775718097" sldId="2147483829"/>
-          </pc:sldLayoutMkLst>
-        </pc:sldLayoutChg>
-        <pc:sldLayoutChg chg="add del replId">
-          <pc:chgData name="Margo Bonal" userId="18c9fa0f-b53d-478b-9dc0-6ad88786c19f" providerId="ADAL" clId="{93D479E5-F67F-4B8A-A78F-A0B574A116B6}" dt="2026-03-08T14:44:03.785" v="222" actId="26606"/>
-          <pc:sldLayoutMkLst>
-            <pc:docMk/>
-            <pc:sldMasterMk cId="1934719468" sldId="2147483827"/>
-            <pc:sldLayoutMk cId="912902918" sldId="2147483830"/>
-          </pc:sldLayoutMkLst>
-        </pc:sldLayoutChg>
-        <pc:sldLayoutChg chg="add del replId">
-          <pc:chgData name="Margo Bonal" userId="18c9fa0f-b53d-478b-9dc0-6ad88786c19f" providerId="ADAL" clId="{93D479E5-F67F-4B8A-A78F-A0B574A116B6}" dt="2026-03-08T14:44:03.785" v="222" actId="26606"/>
-          <pc:sldLayoutMkLst>
-            <pc:docMk/>
-            <pc:sldMasterMk cId="1934719468" sldId="2147483827"/>
-            <pc:sldLayoutMk cId="2286651358" sldId="2147483831"/>
-          </pc:sldLayoutMkLst>
-        </pc:sldLayoutChg>
-        <pc:sldLayoutChg chg="add del replId">
-          <pc:chgData name="Margo Bonal" userId="18c9fa0f-b53d-478b-9dc0-6ad88786c19f" providerId="ADAL" clId="{93D479E5-F67F-4B8A-A78F-A0B574A116B6}" dt="2026-03-08T14:44:03.785" v="222" actId="26606"/>
-          <pc:sldLayoutMkLst>
-            <pc:docMk/>
-            <pc:sldMasterMk cId="1934719468" sldId="2147483827"/>
-            <pc:sldLayoutMk cId="2824741395" sldId="2147483832"/>
-          </pc:sldLayoutMkLst>
-        </pc:sldLayoutChg>
-        <pc:sldLayoutChg chg="add del replId">
-          <pc:chgData name="Margo Bonal" userId="18c9fa0f-b53d-478b-9dc0-6ad88786c19f" providerId="ADAL" clId="{93D479E5-F67F-4B8A-A78F-A0B574A116B6}" dt="2026-03-08T14:44:03.785" v="222" actId="26606"/>
-          <pc:sldLayoutMkLst>
-            <pc:docMk/>
-            <pc:sldMasterMk cId="1934719468" sldId="2147483827"/>
-            <pc:sldLayoutMk cId="587392646" sldId="2147483833"/>
-          </pc:sldLayoutMkLst>
-        </pc:sldLayoutChg>
-        <pc:sldLayoutChg chg="add del replId">
-          <pc:chgData name="Margo Bonal" userId="18c9fa0f-b53d-478b-9dc0-6ad88786c19f" providerId="ADAL" clId="{93D479E5-F67F-4B8A-A78F-A0B574A116B6}" dt="2026-03-08T14:44:03.785" v="222" actId="26606"/>
-          <pc:sldLayoutMkLst>
-            <pc:docMk/>
-            <pc:sldMasterMk cId="1934719468" sldId="2147483827"/>
-            <pc:sldLayoutMk cId="2210096265" sldId="2147483834"/>
-          </pc:sldLayoutMkLst>
-        </pc:sldLayoutChg>
-        <pc:sldLayoutChg chg="add del replId">
-          <pc:chgData name="Margo Bonal" userId="18c9fa0f-b53d-478b-9dc0-6ad88786c19f" providerId="ADAL" clId="{93D479E5-F67F-4B8A-A78F-A0B574A116B6}" dt="2026-03-08T14:44:03.785" v="222" actId="26606"/>
-          <pc:sldLayoutMkLst>
-            <pc:docMk/>
-            <pc:sldMasterMk cId="1934719468" sldId="2147483827"/>
-            <pc:sldLayoutMk cId="3160339363" sldId="2147483835"/>
-          </pc:sldLayoutMkLst>
-        </pc:sldLayoutChg>
-        <pc:sldLayoutChg chg="add del replId">
-          <pc:chgData name="Margo Bonal" userId="18c9fa0f-b53d-478b-9dc0-6ad88786c19f" providerId="ADAL" clId="{93D479E5-F67F-4B8A-A78F-A0B574A116B6}" dt="2026-03-08T14:44:03.785" v="222" actId="26606"/>
-          <pc:sldLayoutMkLst>
-            <pc:docMk/>
-            <pc:sldMasterMk cId="1934719468" sldId="2147483827"/>
-            <pc:sldLayoutMk cId="228058685" sldId="2147483836"/>
-          </pc:sldLayoutMkLst>
-        </pc:sldLayoutChg>
-        <pc:sldLayoutChg chg="add del replId">
-          <pc:chgData name="Margo Bonal" userId="18c9fa0f-b53d-478b-9dc0-6ad88786c19f" providerId="ADAL" clId="{93D479E5-F67F-4B8A-A78F-A0B574A116B6}" dt="2026-03-08T14:44:03.785" v="222" actId="26606"/>
-          <pc:sldLayoutMkLst>
-            <pc:docMk/>
-            <pc:sldMasterMk cId="1934719468" sldId="2147483827"/>
-            <pc:sldLayoutMk cId="2711606969" sldId="2147483837"/>
-          </pc:sldLayoutMkLst>
-        </pc:sldLayoutChg>
-        <pc:sldLayoutChg chg="add del replId">
-          <pc:chgData name="Margo Bonal" userId="18c9fa0f-b53d-478b-9dc0-6ad88786c19f" providerId="ADAL" clId="{93D479E5-F67F-4B8A-A78F-A0B574A116B6}" dt="2026-03-08T14:44:03.785" v="222" actId="26606"/>
-          <pc:sldLayoutMkLst>
-            <pc:docMk/>
-            <pc:sldMasterMk cId="1934719468" sldId="2147483827"/>
-            <pc:sldLayoutMk cId="1266552193" sldId="2147483838"/>
-          </pc:sldLayoutMkLst>
-        </pc:sldLayoutChg>
-      </pc:sldMasterChg>
-      <pc:sldMasterChg chg="add del addSldLayout delSldLayout">
-        <pc:chgData name="Margo Bonal" userId="18c9fa0f-b53d-478b-9dc0-6ad88786c19f" providerId="ADAL" clId="{93D479E5-F67F-4B8A-A78F-A0B574A116B6}" dt="2026-03-08T14:44:07.150" v="224" actId="26606"/>
-        <pc:sldMasterMkLst>
-          <pc:docMk/>
-          <pc:sldMasterMk cId="1045581127" sldId="2147483853"/>
-        </pc:sldMasterMkLst>
-        <pc:sldLayoutChg chg="add del">
-          <pc:chgData name="Margo Bonal" userId="18c9fa0f-b53d-478b-9dc0-6ad88786c19f" providerId="ADAL" clId="{93D479E5-F67F-4B8A-A78F-A0B574A116B6}" dt="2026-03-08T14:44:07.150" v="224" actId="26606"/>
-          <pc:sldLayoutMkLst>
-            <pc:docMk/>
-            <pc:sldMasterMk cId="1045581127" sldId="2147483853"/>
-            <pc:sldLayoutMk cId="2451192022" sldId="2147483842"/>
-          </pc:sldLayoutMkLst>
-        </pc:sldLayoutChg>
-        <pc:sldLayoutChg chg="add del">
-          <pc:chgData name="Margo Bonal" userId="18c9fa0f-b53d-478b-9dc0-6ad88786c19f" providerId="ADAL" clId="{93D479E5-F67F-4B8A-A78F-A0B574A116B6}" dt="2026-03-08T14:44:07.150" v="224" actId="26606"/>
-          <pc:sldLayoutMkLst>
-            <pc:docMk/>
-            <pc:sldMasterMk cId="1045581127" sldId="2147483853"/>
-            <pc:sldLayoutMk cId="1367663674" sldId="2147483843"/>
-          </pc:sldLayoutMkLst>
-        </pc:sldLayoutChg>
-        <pc:sldLayoutChg chg="add del">
-          <pc:chgData name="Margo Bonal" userId="18c9fa0f-b53d-478b-9dc0-6ad88786c19f" providerId="ADAL" clId="{93D479E5-F67F-4B8A-A78F-A0B574A116B6}" dt="2026-03-08T14:44:07.150" v="224" actId="26606"/>
-          <pc:sldLayoutMkLst>
-            <pc:docMk/>
-            <pc:sldMasterMk cId="1045581127" sldId="2147483853"/>
-            <pc:sldLayoutMk cId="2100223927" sldId="2147483844"/>
-          </pc:sldLayoutMkLst>
-        </pc:sldLayoutChg>
-        <pc:sldLayoutChg chg="add del">
-          <pc:chgData name="Margo Bonal" userId="18c9fa0f-b53d-478b-9dc0-6ad88786c19f" providerId="ADAL" clId="{93D479E5-F67F-4B8A-A78F-A0B574A116B6}" dt="2026-03-08T14:44:07.150" v="224" actId="26606"/>
-          <pc:sldLayoutMkLst>
-            <pc:docMk/>
-            <pc:sldMasterMk cId="1045581127" sldId="2147483853"/>
-            <pc:sldLayoutMk cId="4195881735" sldId="2147483845"/>
-          </pc:sldLayoutMkLst>
-        </pc:sldLayoutChg>
-        <pc:sldLayoutChg chg="add del">
-          <pc:chgData name="Margo Bonal" userId="18c9fa0f-b53d-478b-9dc0-6ad88786c19f" providerId="ADAL" clId="{93D479E5-F67F-4B8A-A78F-A0B574A116B6}" dt="2026-03-08T14:44:07.150" v="224" actId="26606"/>
-          <pc:sldLayoutMkLst>
-            <pc:docMk/>
-            <pc:sldMasterMk cId="1045581127" sldId="2147483853"/>
-            <pc:sldLayoutMk cId="318523192" sldId="2147483846"/>
-          </pc:sldLayoutMkLst>
-        </pc:sldLayoutChg>
-        <pc:sldLayoutChg chg="add del">
-          <pc:chgData name="Margo Bonal" userId="18c9fa0f-b53d-478b-9dc0-6ad88786c19f" providerId="ADAL" clId="{93D479E5-F67F-4B8A-A78F-A0B574A116B6}" dt="2026-03-08T14:44:07.150" v="224" actId="26606"/>
-          <pc:sldLayoutMkLst>
-            <pc:docMk/>
-            <pc:sldMasterMk cId="1045581127" sldId="2147483853"/>
-            <pc:sldLayoutMk cId="1588178109" sldId="2147483847"/>
-          </pc:sldLayoutMkLst>
-        </pc:sldLayoutChg>
-        <pc:sldLayoutChg chg="add del">
-          <pc:chgData name="Margo Bonal" userId="18c9fa0f-b53d-478b-9dc0-6ad88786c19f" providerId="ADAL" clId="{93D479E5-F67F-4B8A-A78F-A0B574A116B6}" dt="2026-03-08T14:44:07.150" v="224" actId="26606"/>
-          <pc:sldLayoutMkLst>
-            <pc:docMk/>
-            <pc:sldMasterMk cId="1045581127" sldId="2147483853"/>
-            <pc:sldLayoutMk cId="4230433855" sldId="2147483848"/>
-          </pc:sldLayoutMkLst>
-        </pc:sldLayoutChg>
-        <pc:sldLayoutChg chg="add del">
-          <pc:chgData name="Margo Bonal" userId="18c9fa0f-b53d-478b-9dc0-6ad88786c19f" providerId="ADAL" clId="{93D479E5-F67F-4B8A-A78F-A0B574A116B6}" dt="2026-03-08T14:44:07.150" v="224" actId="26606"/>
-          <pc:sldLayoutMkLst>
-            <pc:docMk/>
-            <pc:sldMasterMk cId="1045581127" sldId="2147483853"/>
-            <pc:sldLayoutMk cId="126096331" sldId="2147483849"/>
-          </pc:sldLayoutMkLst>
-        </pc:sldLayoutChg>
-        <pc:sldLayoutChg chg="add del">
-          <pc:chgData name="Margo Bonal" userId="18c9fa0f-b53d-478b-9dc0-6ad88786c19f" providerId="ADAL" clId="{93D479E5-F67F-4B8A-A78F-A0B574A116B6}" dt="2026-03-08T14:44:07.150" v="224" actId="26606"/>
-          <pc:sldLayoutMkLst>
-            <pc:docMk/>
-            <pc:sldMasterMk cId="1045581127" sldId="2147483853"/>
-            <pc:sldLayoutMk cId="161003357" sldId="2147483850"/>
-          </pc:sldLayoutMkLst>
-        </pc:sldLayoutChg>
-        <pc:sldLayoutChg chg="add del">
-          <pc:chgData name="Margo Bonal" userId="18c9fa0f-b53d-478b-9dc0-6ad88786c19f" providerId="ADAL" clId="{93D479E5-F67F-4B8A-A78F-A0B574A116B6}" dt="2026-03-08T14:44:07.150" v="224" actId="26606"/>
-          <pc:sldLayoutMkLst>
-            <pc:docMk/>
-            <pc:sldMasterMk cId="1045581127" sldId="2147483853"/>
-            <pc:sldLayoutMk cId="3812023952" sldId="2147483851"/>
-          </pc:sldLayoutMkLst>
-        </pc:sldLayoutChg>
-        <pc:sldLayoutChg chg="add del">
-          <pc:chgData name="Margo Bonal" userId="18c9fa0f-b53d-478b-9dc0-6ad88786c19f" providerId="ADAL" clId="{93D479E5-F67F-4B8A-A78F-A0B574A116B6}" dt="2026-03-08T14:44:07.150" v="224" actId="26606"/>
-          <pc:sldLayoutMkLst>
-            <pc:docMk/>
-            <pc:sldMasterMk cId="1045581127" sldId="2147483853"/>
-            <pc:sldLayoutMk cId="271010891" sldId="2147483852"/>
-          </pc:sldLayoutMkLst>
-        </pc:sldLayoutChg>
-      </pc:sldMasterChg>
-      <pc:sldMasterChg chg="add del addSldLayout delSldLayout">
-        <pc:chgData name="Margo Bonal" userId="18c9fa0f-b53d-478b-9dc0-6ad88786c19f" providerId="ADAL" clId="{93D479E5-F67F-4B8A-A78F-A0B574A116B6}" dt="2026-03-08T14:35:24.191" v="83" actId="26606"/>
-        <pc:sldMasterMkLst>
-          <pc:docMk/>
-          <pc:sldMasterMk cId="1742305576" sldId="2147483855"/>
-        </pc:sldMasterMkLst>
-        <pc:sldLayoutChg chg="add del">
-          <pc:chgData name="Margo Bonal" userId="18c9fa0f-b53d-478b-9dc0-6ad88786c19f" providerId="ADAL" clId="{93D479E5-F67F-4B8A-A78F-A0B574A116B6}" dt="2026-03-08T14:35:24.191" v="83" actId="26606"/>
-          <pc:sldLayoutMkLst>
-            <pc:docMk/>
-            <pc:sldMasterMk cId="1742305576" sldId="2147483855"/>
-            <pc:sldLayoutMk cId="1974122960" sldId="2147483844"/>
-          </pc:sldLayoutMkLst>
-        </pc:sldLayoutChg>
-        <pc:sldLayoutChg chg="add del">
-          <pc:chgData name="Margo Bonal" userId="18c9fa0f-b53d-478b-9dc0-6ad88786c19f" providerId="ADAL" clId="{93D479E5-F67F-4B8A-A78F-A0B574A116B6}" dt="2026-03-08T14:35:24.191" v="83" actId="26606"/>
-          <pc:sldLayoutMkLst>
-            <pc:docMk/>
-            <pc:sldMasterMk cId="1742305576" sldId="2147483855"/>
-            <pc:sldLayoutMk cId="4132047666" sldId="2147483845"/>
-          </pc:sldLayoutMkLst>
-        </pc:sldLayoutChg>
-        <pc:sldLayoutChg chg="add del">
-          <pc:chgData name="Margo Bonal" userId="18c9fa0f-b53d-478b-9dc0-6ad88786c19f" providerId="ADAL" clId="{93D479E5-F67F-4B8A-A78F-A0B574A116B6}" dt="2026-03-08T14:35:24.191" v="83" actId="26606"/>
-          <pc:sldLayoutMkLst>
-            <pc:docMk/>
-            <pc:sldMasterMk cId="1742305576" sldId="2147483855"/>
-            <pc:sldLayoutMk cId="3790538883" sldId="2147483846"/>
-          </pc:sldLayoutMkLst>
-        </pc:sldLayoutChg>
-        <pc:sldLayoutChg chg="add del">
-          <pc:chgData name="Margo Bonal" userId="18c9fa0f-b53d-478b-9dc0-6ad88786c19f" providerId="ADAL" clId="{93D479E5-F67F-4B8A-A78F-A0B574A116B6}" dt="2026-03-08T14:35:24.191" v="83" actId="26606"/>
-          <pc:sldLayoutMkLst>
-            <pc:docMk/>
-            <pc:sldMasterMk cId="1742305576" sldId="2147483855"/>
-            <pc:sldLayoutMk cId="1558737318" sldId="2147483847"/>
-          </pc:sldLayoutMkLst>
-        </pc:sldLayoutChg>
-        <pc:sldLayoutChg chg="add del">
-          <pc:chgData name="Margo Bonal" userId="18c9fa0f-b53d-478b-9dc0-6ad88786c19f" providerId="ADAL" clId="{93D479E5-F67F-4B8A-A78F-A0B574A116B6}" dt="2026-03-08T14:35:24.191" v="83" actId="26606"/>
-          <pc:sldLayoutMkLst>
-            <pc:docMk/>
-            <pc:sldMasterMk cId="1742305576" sldId="2147483855"/>
-            <pc:sldLayoutMk cId="1052903379" sldId="2147483848"/>
-          </pc:sldLayoutMkLst>
-        </pc:sldLayoutChg>
-        <pc:sldLayoutChg chg="add del">
-          <pc:chgData name="Margo Bonal" userId="18c9fa0f-b53d-478b-9dc0-6ad88786c19f" providerId="ADAL" clId="{93D479E5-F67F-4B8A-A78F-A0B574A116B6}" dt="2026-03-08T14:35:24.191" v="83" actId="26606"/>
-          <pc:sldLayoutMkLst>
-            <pc:docMk/>
-            <pc:sldMasterMk cId="1742305576" sldId="2147483855"/>
-            <pc:sldLayoutMk cId="3795206907" sldId="2147483849"/>
-          </pc:sldLayoutMkLst>
-        </pc:sldLayoutChg>
-        <pc:sldLayoutChg chg="add del">
-          <pc:chgData name="Margo Bonal" userId="18c9fa0f-b53d-478b-9dc0-6ad88786c19f" providerId="ADAL" clId="{93D479E5-F67F-4B8A-A78F-A0B574A116B6}" dt="2026-03-08T14:35:24.191" v="83" actId="26606"/>
-          <pc:sldLayoutMkLst>
-            <pc:docMk/>
-            <pc:sldMasterMk cId="1742305576" sldId="2147483855"/>
-            <pc:sldLayoutMk cId="3361619846" sldId="2147483850"/>
-          </pc:sldLayoutMkLst>
-        </pc:sldLayoutChg>
-        <pc:sldLayoutChg chg="add del">
-          <pc:chgData name="Margo Bonal" userId="18c9fa0f-b53d-478b-9dc0-6ad88786c19f" providerId="ADAL" clId="{93D479E5-F67F-4B8A-A78F-A0B574A116B6}" dt="2026-03-08T14:35:24.191" v="83" actId="26606"/>
-          <pc:sldLayoutMkLst>
-            <pc:docMk/>
-            <pc:sldMasterMk cId="1742305576" sldId="2147483855"/>
-            <pc:sldLayoutMk cId="650973119" sldId="2147483851"/>
-          </pc:sldLayoutMkLst>
-        </pc:sldLayoutChg>
-        <pc:sldLayoutChg chg="add del">
-          <pc:chgData name="Margo Bonal" userId="18c9fa0f-b53d-478b-9dc0-6ad88786c19f" providerId="ADAL" clId="{93D479E5-F67F-4B8A-A78F-A0B574A116B6}" dt="2026-03-08T14:35:24.191" v="83" actId="26606"/>
-          <pc:sldLayoutMkLst>
-            <pc:docMk/>
-            <pc:sldMasterMk cId="1742305576" sldId="2147483855"/>
-            <pc:sldLayoutMk cId="2468341985" sldId="2147483852"/>
-          </pc:sldLayoutMkLst>
-        </pc:sldLayoutChg>
-        <pc:sldLayoutChg chg="add del">
-          <pc:chgData name="Margo Bonal" userId="18c9fa0f-b53d-478b-9dc0-6ad88786c19f" providerId="ADAL" clId="{93D479E5-F67F-4B8A-A78F-A0B574A116B6}" dt="2026-03-08T14:35:24.191" v="83" actId="26606"/>
-          <pc:sldLayoutMkLst>
-            <pc:docMk/>
-            <pc:sldMasterMk cId="1742305576" sldId="2147483855"/>
-            <pc:sldLayoutMk cId="267038196" sldId="2147483853"/>
-          </pc:sldLayoutMkLst>
-        </pc:sldLayoutChg>
-        <pc:sldLayoutChg chg="add del">
-          <pc:chgData name="Margo Bonal" userId="18c9fa0f-b53d-478b-9dc0-6ad88786c19f" providerId="ADAL" clId="{93D479E5-F67F-4B8A-A78F-A0B574A116B6}" dt="2026-03-08T14:35:24.191" v="83" actId="26606"/>
-          <pc:sldLayoutMkLst>
-            <pc:docMk/>
-            <pc:sldMasterMk cId="1742305576" sldId="2147483855"/>
-            <pc:sldLayoutMk cId="1275657757" sldId="2147483854"/>
-          </pc:sldLayoutMkLst>
-        </pc:sldLayoutChg>
-      </pc:sldMasterChg>
-      <pc:sldMasterChg chg="add del addSldLayout delSldLayout">
-        <pc:chgData name="Margo Bonal" userId="18c9fa0f-b53d-478b-9dc0-6ad88786c19f" providerId="ADAL" clId="{93D479E5-F67F-4B8A-A78F-A0B574A116B6}" dt="2026-03-08T14:44:27.889" v="226" actId="26606"/>
-        <pc:sldMasterMkLst>
-          <pc:docMk/>
-          <pc:sldMasterMk cId="3947380193" sldId="2147483879"/>
-        </pc:sldMasterMkLst>
-        <pc:sldLayoutChg chg="add del">
-          <pc:chgData name="Margo Bonal" userId="18c9fa0f-b53d-478b-9dc0-6ad88786c19f" providerId="ADAL" clId="{93D479E5-F67F-4B8A-A78F-A0B574A116B6}" dt="2026-03-08T14:44:27.889" v="226" actId="26606"/>
-          <pc:sldLayoutMkLst>
-            <pc:docMk/>
-            <pc:sldMasterMk cId="3947380193" sldId="2147483879"/>
-            <pc:sldLayoutMk cId="1509990803" sldId="2147483868"/>
-          </pc:sldLayoutMkLst>
-        </pc:sldLayoutChg>
-        <pc:sldLayoutChg chg="add del">
-          <pc:chgData name="Margo Bonal" userId="18c9fa0f-b53d-478b-9dc0-6ad88786c19f" providerId="ADAL" clId="{93D479E5-F67F-4B8A-A78F-A0B574A116B6}" dt="2026-03-08T14:44:27.889" v="226" actId="26606"/>
-          <pc:sldLayoutMkLst>
-            <pc:docMk/>
-            <pc:sldMasterMk cId="3947380193" sldId="2147483879"/>
-            <pc:sldLayoutMk cId="2384066999" sldId="2147483869"/>
-          </pc:sldLayoutMkLst>
-        </pc:sldLayoutChg>
-        <pc:sldLayoutChg chg="add del">
-          <pc:chgData name="Margo Bonal" userId="18c9fa0f-b53d-478b-9dc0-6ad88786c19f" providerId="ADAL" clId="{93D479E5-F67F-4B8A-A78F-A0B574A116B6}" dt="2026-03-08T14:44:27.889" v="226" actId="26606"/>
-          <pc:sldLayoutMkLst>
-            <pc:docMk/>
-            <pc:sldMasterMk cId="3947380193" sldId="2147483879"/>
-            <pc:sldLayoutMk cId="719695783" sldId="2147483870"/>
-          </pc:sldLayoutMkLst>
-        </pc:sldLayoutChg>
-        <pc:sldLayoutChg chg="add del">
-          <pc:chgData name="Margo Bonal" userId="18c9fa0f-b53d-478b-9dc0-6ad88786c19f" providerId="ADAL" clId="{93D479E5-F67F-4B8A-A78F-A0B574A116B6}" dt="2026-03-08T14:44:27.889" v="226" actId="26606"/>
-          <pc:sldLayoutMkLst>
-            <pc:docMk/>
-            <pc:sldMasterMk cId="3947380193" sldId="2147483879"/>
-            <pc:sldLayoutMk cId="921918551" sldId="2147483871"/>
-          </pc:sldLayoutMkLst>
-        </pc:sldLayoutChg>
-        <pc:sldLayoutChg chg="add del">
-          <pc:chgData name="Margo Bonal" userId="18c9fa0f-b53d-478b-9dc0-6ad88786c19f" providerId="ADAL" clId="{93D479E5-F67F-4B8A-A78F-A0B574A116B6}" dt="2026-03-08T14:44:27.889" v="226" actId="26606"/>
-          <pc:sldLayoutMkLst>
-            <pc:docMk/>
-            <pc:sldMasterMk cId="3947380193" sldId="2147483879"/>
-            <pc:sldLayoutMk cId="3529824205" sldId="2147483872"/>
-          </pc:sldLayoutMkLst>
-        </pc:sldLayoutChg>
-        <pc:sldLayoutChg chg="add del">
-          <pc:chgData name="Margo Bonal" userId="18c9fa0f-b53d-478b-9dc0-6ad88786c19f" providerId="ADAL" clId="{93D479E5-F67F-4B8A-A78F-A0B574A116B6}" dt="2026-03-08T14:44:27.889" v="226" actId="26606"/>
-          <pc:sldLayoutMkLst>
-            <pc:docMk/>
-            <pc:sldMasterMk cId="3947380193" sldId="2147483879"/>
-            <pc:sldLayoutMk cId="3961367251" sldId="2147483873"/>
-          </pc:sldLayoutMkLst>
-        </pc:sldLayoutChg>
-        <pc:sldLayoutChg chg="add del">
-          <pc:chgData name="Margo Bonal" userId="18c9fa0f-b53d-478b-9dc0-6ad88786c19f" providerId="ADAL" clId="{93D479E5-F67F-4B8A-A78F-A0B574A116B6}" dt="2026-03-08T14:44:27.889" v="226" actId="26606"/>
-          <pc:sldLayoutMkLst>
-            <pc:docMk/>
-            <pc:sldMasterMk cId="3947380193" sldId="2147483879"/>
-            <pc:sldLayoutMk cId="1914521893" sldId="2147483874"/>
-          </pc:sldLayoutMkLst>
-        </pc:sldLayoutChg>
-        <pc:sldLayoutChg chg="add del">
-          <pc:chgData name="Margo Bonal" userId="18c9fa0f-b53d-478b-9dc0-6ad88786c19f" providerId="ADAL" clId="{93D479E5-F67F-4B8A-A78F-A0B574A116B6}" dt="2026-03-08T14:44:27.889" v="226" actId="26606"/>
-          <pc:sldLayoutMkLst>
-            <pc:docMk/>
-            <pc:sldMasterMk cId="3947380193" sldId="2147483879"/>
-            <pc:sldLayoutMk cId="333924322" sldId="2147483875"/>
-          </pc:sldLayoutMkLst>
-        </pc:sldLayoutChg>
-        <pc:sldLayoutChg chg="add del">
-          <pc:chgData name="Margo Bonal" userId="18c9fa0f-b53d-478b-9dc0-6ad88786c19f" providerId="ADAL" clId="{93D479E5-F67F-4B8A-A78F-A0B574A116B6}" dt="2026-03-08T14:44:27.889" v="226" actId="26606"/>
-          <pc:sldLayoutMkLst>
-            <pc:docMk/>
-            <pc:sldMasterMk cId="3947380193" sldId="2147483879"/>
-            <pc:sldLayoutMk cId="2903760334" sldId="2147483876"/>
-          </pc:sldLayoutMkLst>
-        </pc:sldLayoutChg>
-        <pc:sldLayoutChg chg="add del">
-          <pc:chgData name="Margo Bonal" userId="18c9fa0f-b53d-478b-9dc0-6ad88786c19f" providerId="ADAL" clId="{93D479E5-F67F-4B8A-A78F-A0B574A116B6}" dt="2026-03-08T14:44:27.889" v="226" actId="26606"/>
-          <pc:sldLayoutMkLst>
-            <pc:docMk/>
-            <pc:sldMasterMk cId="3947380193" sldId="2147483879"/>
-            <pc:sldLayoutMk cId="3401222541" sldId="2147483877"/>
-          </pc:sldLayoutMkLst>
-        </pc:sldLayoutChg>
-        <pc:sldLayoutChg chg="add del">
-          <pc:chgData name="Margo Bonal" userId="18c9fa0f-b53d-478b-9dc0-6ad88786c19f" providerId="ADAL" clId="{93D479E5-F67F-4B8A-A78F-A0B574A116B6}" dt="2026-03-08T14:44:27.889" v="226" actId="26606"/>
-          <pc:sldLayoutMkLst>
-            <pc:docMk/>
-            <pc:sldMasterMk cId="3947380193" sldId="2147483879"/>
-            <pc:sldLayoutMk cId="2928945079" sldId="2147483878"/>
-          </pc:sldLayoutMkLst>
-        </pc:sldLayoutChg>
-      </pc:sldMasterChg>
     </pc:docChg>
   </pc:docChgLst>
 </pc:chgInfo>
 </file>
 
 <file path=ppt/slideLayouts/slideLayout1.xml><?xml version="1.0" encoding="utf-8"?>
-<p:sldLayout xmlns:a="http://schemas.openxmlformats.org/drawingml/2006/main" xmlns:r="http://schemas.openxmlformats.org/officeDocument/2006/relationships" xmlns:p="http://schemas.openxmlformats.org/presentationml/2006/main" showMasterSp="0" type="title" preserve="1">
+<p:sldLayout xmlns:a="http://schemas.openxmlformats.org/drawingml/2006/main" xmlns:r="http://schemas.openxmlformats.org/officeDocument/2006/relationships" xmlns:p="http://schemas.openxmlformats.org/presentationml/2006/main" type="title" preserve="1">
   <p:cSld name="Title Slide">
     <p:spTree>
       <p:nvGrpSpPr>
@@ -1925,270 +549,69 @@
       </p:grpSpPr>
       <p:sp>
         <p:nvSpPr>
-          <p:cNvPr id="18" name="Freeform: Shape 17">
-            <a:extLst>
-              <a:ext uri="{FF2B5EF4-FFF2-40B4-BE49-F238E27FC236}">
-                <a16:creationId xmlns:a16="http://schemas.microsoft.com/office/drawing/2014/main" id="{5CD60141-EEBD-4EC1-8E34-0344C16A18A2}"/>
-              </a:ext>
-              <a:ext uri="{C183D7F6-B498-43B3-948B-1728B52AA6E4}">
-                <adec:decorative xmlns:adec="http://schemas.microsoft.com/office/drawing/2017/decorative" val="1"/>
-              </a:ext>
-            </a:extLst>
-          </p:cNvPr>
-          <p:cNvSpPr/>
-          <p:nvPr/>
+          <p:cNvPr id="2" name="Title 1">
+            <a:extLst>
+              <a:ext uri="{FF2B5EF4-FFF2-40B4-BE49-F238E27FC236}">
+                <a16:creationId xmlns:a16="http://schemas.microsoft.com/office/drawing/2014/main" id="{02A6C47A-ABB1-A378-D073-51C206F31139}"/>
+              </a:ext>
+            </a:extLst>
+          </p:cNvPr>
+          <p:cNvSpPr>
+            <a:spLocks noGrp="1"/>
+          </p:cNvSpPr>
+          <p:nvPr>
+            <p:ph type="ctrTitle"/>
+          </p:nvPr>
         </p:nvSpPr>
         <p:spPr>
           <a:xfrm>
-            <a:off x="5318308" y="0"/>
-            <a:ext cx="6873692" cy="6858000"/>
+            <a:off x="1524000" y="1122363"/>
+            <a:ext cx="9144000" cy="2387600"/>
           </a:xfrm>
-          <a:custGeom>
-            <a:avLst/>
-            <a:gdLst>
-              <a:gd name="connsiteX0" fmla="*/ 11328900 w 12192000"/>
-              <a:gd name="connsiteY0" fmla="*/ 0 h 6858000"/>
-              <a:gd name="connsiteX1" fmla="*/ 12192000 w 12192000"/>
-              <a:gd name="connsiteY1" fmla="*/ 0 h 6858000"/>
-              <a:gd name="connsiteX2" fmla="*/ 12192000 w 12192000"/>
-              <a:gd name="connsiteY2" fmla="*/ 6858000 h 6858000"/>
-              <a:gd name="connsiteX3" fmla="*/ 5318308 w 12192000"/>
-              <a:gd name="connsiteY3" fmla="*/ 6858000 h 6858000"/>
-              <a:gd name="connsiteX4" fmla="*/ 11328897 w 12192000"/>
-              <a:gd name="connsiteY4" fmla="*/ 4 h 6858000"/>
-              <a:gd name="connsiteX5" fmla="*/ 11328898 w 12192000"/>
-              <a:gd name="connsiteY5" fmla="*/ 2 h 6858000"/>
-              <a:gd name="connsiteX6" fmla="*/ 0 w 12192000"/>
-              <a:gd name="connsiteY6" fmla="*/ 0 h 6858000"/>
-              <a:gd name="connsiteX7" fmla="*/ 6700 w 12192000"/>
-              <a:gd name="connsiteY7" fmla="*/ 0 h 6858000"/>
-              <a:gd name="connsiteX8" fmla="*/ 6700 w 12192000"/>
-              <a:gd name="connsiteY8" fmla="*/ 6858000 h 6858000"/>
-              <a:gd name="connsiteX9" fmla="*/ 0 w 12192000"/>
-              <a:gd name="connsiteY9" fmla="*/ 6858000 h 6858000"/>
-              <a:gd name="connsiteX0" fmla="*/ 11328900 w 12192000"/>
-              <a:gd name="connsiteY0" fmla="*/ 0 h 6858000"/>
-              <a:gd name="connsiteX1" fmla="*/ 12192000 w 12192000"/>
-              <a:gd name="connsiteY1" fmla="*/ 0 h 6858000"/>
-              <a:gd name="connsiteX2" fmla="*/ 12192000 w 12192000"/>
-              <a:gd name="connsiteY2" fmla="*/ 6858000 h 6858000"/>
-              <a:gd name="connsiteX3" fmla="*/ 5318308 w 12192000"/>
-              <a:gd name="connsiteY3" fmla="*/ 6858000 h 6858000"/>
-              <a:gd name="connsiteX4" fmla="*/ 11328897 w 12192000"/>
-              <a:gd name="connsiteY4" fmla="*/ 4 h 6858000"/>
-              <a:gd name="connsiteX5" fmla="*/ 11328898 w 12192000"/>
-              <a:gd name="connsiteY5" fmla="*/ 2 h 6858000"/>
-              <a:gd name="connsiteX6" fmla="*/ 11328900 w 12192000"/>
-              <a:gd name="connsiteY6" fmla="*/ 0 h 6858000"/>
-              <a:gd name="connsiteX7" fmla="*/ 0 w 12192000"/>
-              <a:gd name="connsiteY7" fmla="*/ 6858000 h 6858000"/>
-              <a:gd name="connsiteX8" fmla="*/ 6700 w 12192000"/>
-              <a:gd name="connsiteY8" fmla="*/ 0 h 6858000"/>
-              <a:gd name="connsiteX9" fmla="*/ 6700 w 12192000"/>
-              <a:gd name="connsiteY9" fmla="*/ 6858000 h 6858000"/>
-              <a:gd name="connsiteX10" fmla="*/ 0 w 12192000"/>
-              <a:gd name="connsiteY10" fmla="*/ 6858000 h 6858000"/>
-              <a:gd name="connsiteX0" fmla="*/ 11322200 w 12185300"/>
-              <a:gd name="connsiteY0" fmla="*/ 0 h 6858000"/>
-              <a:gd name="connsiteX1" fmla="*/ 12185300 w 12185300"/>
-              <a:gd name="connsiteY1" fmla="*/ 0 h 6858000"/>
-              <a:gd name="connsiteX2" fmla="*/ 12185300 w 12185300"/>
-              <a:gd name="connsiteY2" fmla="*/ 6858000 h 6858000"/>
-              <a:gd name="connsiteX3" fmla="*/ 5311608 w 12185300"/>
-              <a:gd name="connsiteY3" fmla="*/ 6858000 h 6858000"/>
-              <a:gd name="connsiteX4" fmla="*/ 11322197 w 12185300"/>
-              <a:gd name="connsiteY4" fmla="*/ 4 h 6858000"/>
-              <a:gd name="connsiteX5" fmla="*/ 11322198 w 12185300"/>
-              <a:gd name="connsiteY5" fmla="*/ 2 h 6858000"/>
-              <a:gd name="connsiteX6" fmla="*/ 11322200 w 12185300"/>
-              <a:gd name="connsiteY6" fmla="*/ 0 h 6858000"/>
-              <a:gd name="connsiteX7" fmla="*/ 0 w 12185300"/>
-              <a:gd name="connsiteY7" fmla="*/ 6858000 h 6858000"/>
-              <a:gd name="connsiteX8" fmla="*/ 0 w 12185300"/>
-              <a:gd name="connsiteY8" fmla="*/ 0 h 6858000"/>
-              <a:gd name="connsiteX9" fmla="*/ 0 w 12185300"/>
-              <a:gd name="connsiteY9" fmla="*/ 6858000 h 6858000"/>
-              <a:gd name="connsiteX0" fmla="*/ 6010592 w 6873692"/>
-              <a:gd name="connsiteY0" fmla="*/ 0 h 6858000"/>
-              <a:gd name="connsiteX1" fmla="*/ 6873692 w 6873692"/>
-              <a:gd name="connsiteY1" fmla="*/ 0 h 6858000"/>
-              <a:gd name="connsiteX2" fmla="*/ 6873692 w 6873692"/>
-              <a:gd name="connsiteY2" fmla="*/ 6858000 h 6858000"/>
-              <a:gd name="connsiteX3" fmla="*/ 0 w 6873692"/>
-              <a:gd name="connsiteY3" fmla="*/ 6858000 h 6858000"/>
-              <a:gd name="connsiteX4" fmla="*/ 6010589 w 6873692"/>
-              <a:gd name="connsiteY4" fmla="*/ 4 h 6858000"/>
-              <a:gd name="connsiteX5" fmla="*/ 6010590 w 6873692"/>
-              <a:gd name="connsiteY5" fmla="*/ 2 h 6858000"/>
-              <a:gd name="connsiteX6" fmla="*/ 6010592 w 6873692"/>
-              <a:gd name="connsiteY6" fmla="*/ 0 h 6858000"/>
-            </a:gdLst>
-            <a:ahLst/>
-            <a:cxnLst>
-              <a:cxn ang="0">
-                <a:pos x="connsiteX0" y="connsiteY0"/>
-              </a:cxn>
-              <a:cxn ang="0">
-                <a:pos x="connsiteX1" y="connsiteY1"/>
-              </a:cxn>
-              <a:cxn ang="0">
-                <a:pos x="connsiteX2" y="connsiteY2"/>
-              </a:cxn>
-              <a:cxn ang="0">
-                <a:pos x="connsiteX3" y="connsiteY3"/>
-              </a:cxn>
-              <a:cxn ang="0">
-                <a:pos x="connsiteX4" y="connsiteY4"/>
-              </a:cxn>
-              <a:cxn ang="0">
-                <a:pos x="connsiteX5" y="connsiteY5"/>
-              </a:cxn>
-              <a:cxn ang="0">
-                <a:pos x="connsiteX6" y="connsiteY6"/>
-              </a:cxn>
-            </a:cxnLst>
-            <a:rect l="l" t="t" r="r" b="b"/>
-            <a:pathLst>
-              <a:path w="6873692" h="6858000">
-                <a:moveTo>
-                  <a:pt x="6010592" y="0"/>
-                </a:moveTo>
-                <a:lnTo>
-                  <a:pt x="6873692" y="0"/>
-                </a:lnTo>
-                <a:lnTo>
-                  <a:pt x="6873692" y="6858000"/>
-                </a:lnTo>
-                <a:lnTo>
-                  <a:pt x="0" y="6858000"/>
-                </a:lnTo>
-                <a:lnTo>
-                  <a:pt x="6010589" y="4"/>
-                </a:lnTo>
-                <a:cubicBezTo>
-                  <a:pt x="6010589" y="3"/>
-                  <a:pt x="6010590" y="3"/>
-                  <a:pt x="6010590" y="2"/>
-                </a:cubicBezTo>
-                <a:lnTo>
-                  <a:pt x="6010592" y="0"/>
-                </a:lnTo>
-                <a:close/>
-              </a:path>
-            </a:pathLst>
-          </a:custGeom>
-          <a:solidFill>
-            <a:schemeClr val="bg2"/>
-          </a:solidFill>
-          <a:ln w="12700" cap="flat" cmpd="sng" algn="ctr">
-            <a:noFill/>
-            <a:prstDash val="solid"/>
-            <a:miter lim="800000"/>
-          </a:ln>
-          <a:effectLst/>
         </p:spPr>
-        <p:style>
-          <a:lnRef idx="2">
-            <a:schemeClr val="accent1">
-              <a:shade val="50000"/>
-            </a:schemeClr>
-          </a:lnRef>
-          <a:fillRef idx="1">
-            <a:schemeClr val="accent1"/>
-          </a:fillRef>
-          <a:effectRef idx="0">
-            <a:schemeClr val="accent1"/>
-          </a:effectRef>
-          <a:fontRef idx="minor">
-            <a:schemeClr val="lt1"/>
-          </a:fontRef>
-        </p:style>
-        <p:txBody>
-          <a:bodyPr wrap="square" rtlCol="0" anchor="ctr">
-            <a:noAutofit/>
-          </a:bodyPr>
-          <a:lstStyle/>
-          <a:p>
-            <a:pPr algn="ctr"/>
-            <a:endParaRPr lang="en-US"/>
-          </a:p>
-        </p:txBody>
-      </p:sp>
-      <p:sp>
-        <p:nvSpPr>
-          <p:cNvPr id="2" name="Title 1">
-            <a:extLst>
-              <a:ext uri="{FF2B5EF4-FFF2-40B4-BE49-F238E27FC236}">
-                <a16:creationId xmlns:a16="http://schemas.microsoft.com/office/drawing/2014/main" id="{A65FCBBA-905A-4FD1-BFBA-F3EE6DA264E0}"/>
-              </a:ext>
-            </a:extLst>
-          </p:cNvPr>
-          <p:cNvSpPr>
-            <a:spLocks noGrp="1"/>
-          </p:cNvSpPr>
-          <p:nvPr>
-            <p:ph type="ctrTitle"/>
+        <p:txBody>
+          <a:bodyPr anchor="b"/>
+          <a:lstStyle>
+            <a:lvl1pPr algn="ctr">
+              <a:defRPr sz="6000"/>
+            </a:lvl1pPr>
+          </a:lstStyle>
+          <a:p>
+            <a:r>
+              <a:rPr lang="en-US"/>
+              <a:t>Click to edit Master title style</a:t>
+            </a:r>
+          </a:p>
+        </p:txBody>
+      </p:sp>
+      <p:sp>
+        <p:nvSpPr>
+          <p:cNvPr id="3" name="Subtitle 2">
+            <a:extLst>
+              <a:ext uri="{FF2B5EF4-FFF2-40B4-BE49-F238E27FC236}">
+                <a16:creationId xmlns:a16="http://schemas.microsoft.com/office/drawing/2014/main" id="{122DD953-FBD1-196A-A134-4D1574089C1E}"/>
+              </a:ext>
+            </a:extLst>
+          </p:cNvPr>
+          <p:cNvSpPr>
+            <a:spLocks noGrp="1"/>
+          </p:cNvSpPr>
+          <p:nvPr>
+            <p:ph type="subTitle" idx="1"/>
           </p:nvPr>
         </p:nvSpPr>
         <p:spPr>
           <a:xfrm>
-            <a:off x="1143000" y="1181098"/>
-            <a:ext cx="8986580" cy="2832404"/>
+            <a:off x="1524000" y="3602038"/>
+            <a:ext cx="9144000" cy="1655762"/>
           </a:xfrm>
         </p:spPr>
         <p:txBody>
-          <a:bodyPr anchor="t">
-            <a:normAutofit/>
-          </a:bodyPr>
+          <a:bodyPr/>
           <a:lstStyle>
-            <a:lvl1pPr algn="l">
-              <a:lnSpc>
-                <a:spcPct val="100000"/>
-              </a:lnSpc>
-              <a:defRPr sz="4800" cap="all" spc="300" baseline="0"/>
-            </a:lvl1pPr>
-          </a:lstStyle>
-          <a:p>
-            <a:r>
-              <a:rPr lang="en-US" dirty="0"/>
-              <a:t>Click to edit Master title style</a:t>
-            </a:r>
-          </a:p>
-        </p:txBody>
-      </p:sp>
-      <p:sp>
-        <p:nvSpPr>
-          <p:cNvPr id="3" name="Subtitle 2">
-            <a:extLst>
-              <a:ext uri="{FF2B5EF4-FFF2-40B4-BE49-F238E27FC236}">
-                <a16:creationId xmlns:a16="http://schemas.microsoft.com/office/drawing/2014/main" id="{13DD287E-F1C8-463F-8429-D1B5B1582520}"/>
-              </a:ext>
-            </a:extLst>
-          </p:cNvPr>
-          <p:cNvSpPr>
-            <a:spLocks noGrp="1"/>
-          </p:cNvSpPr>
-          <p:nvPr>
-            <p:ph type="subTitle" idx="1"/>
-          </p:nvPr>
-        </p:nvSpPr>
-        <p:spPr>
-          <a:xfrm>
-            <a:off x="1143000" y="5463522"/>
-            <a:ext cx="8986580" cy="650311"/>
-          </a:xfrm>
-        </p:spPr>
-        <p:txBody>
-          <a:bodyPr>
-            <a:normAutofit/>
-          </a:bodyPr>
-          <a:lstStyle>
-            <a:lvl1pPr marL="0" indent="0" algn="l">
-              <a:lnSpc>
-                <a:spcPct val="100000"/>
-              </a:lnSpc>
-              <a:buNone/>
-              <a:defRPr sz="1800"/>
+            <a:lvl1pPr marL="0" indent="0" algn="ctr">
+              <a:buNone/>
+              <a:defRPr sz="2400"/>
             </a:lvl1pPr>
             <a:lvl2pPr marL="457200" indent="0" algn="ctr">
               <a:buNone/>
@@ -2225,7 +648,7 @@
           </a:lstStyle>
           <a:p>
             <a:r>
-              <a:rPr lang="en-US" dirty="0"/>
+              <a:rPr lang="en-US"/>
               <a:t>Click to edit Master subtitle style</a:t>
             </a:r>
           </a:p>
@@ -2236,7 +659,7 @@
           <p:cNvPr id="4" name="Date Placeholder 3">
             <a:extLst>
               <a:ext uri="{FF2B5EF4-FFF2-40B4-BE49-F238E27FC236}">
-                <a16:creationId xmlns:a16="http://schemas.microsoft.com/office/drawing/2014/main" id="{A81F44ED-7973-4A99-B2CA-A8962BCE0D5D}"/>
+                <a16:creationId xmlns:a16="http://schemas.microsoft.com/office/drawing/2014/main" id="{CCF3A3CC-6641-01D2-684C-A446DDBA3132}"/>
               </a:ext>
             </a:extLst>
           </p:cNvPr>
@@ -2254,7 +677,7 @@
           <a:p>
             <a:fld id="{3CADBD16-5BFB-4D9F-9646-C75D1B53BBB6}" type="datetimeFigureOut">
               <a:rPr lang="en-US" smtClean="0"/>
-              <a:t>3/8/2026</a:t>
+              <a:t>3/14/2026</a:t>
             </a:fld>
             <a:endParaRPr lang="en-US"/>
           </a:p>
@@ -2265,7 +688,7 @@
           <p:cNvPr id="5" name="Footer Placeholder 4">
             <a:extLst>
               <a:ext uri="{FF2B5EF4-FFF2-40B4-BE49-F238E27FC236}">
-                <a16:creationId xmlns:a16="http://schemas.microsoft.com/office/drawing/2014/main" id="{08DF96F2-D6BE-49AC-A605-5AE87C3F2F10}"/>
+                <a16:creationId xmlns:a16="http://schemas.microsoft.com/office/drawing/2014/main" id="{E1363E9F-E6CE-2745-2B63-B560E592E1A3}"/>
               </a:ext>
             </a:extLst>
           </p:cNvPr>
@@ -2290,7 +713,7 @@
           <p:cNvPr id="6" name="Slide Number Placeholder 5">
             <a:extLst>
               <a:ext uri="{FF2B5EF4-FFF2-40B4-BE49-F238E27FC236}">
-                <a16:creationId xmlns:a16="http://schemas.microsoft.com/office/drawing/2014/main" id="{1817FC50-B13C-4B63-AE64-F71A6EDE63B6}"/>
+                <a16:creationId xmlns:a16="http://schemas.microsoft.com/office/drawing/2014/main" id="{E4798959-D4CD-FCF9-40BB-F003B0319E6D}"/>
               </a:ext>
             </a:extLst>
           </p:cNvPr>
@@ -2314,53 +737,10 @@
           </a:p>
         </p:txBody>
       </p:sp>
-      <p:cxnSp>
-        <p:nvCxnSpPr>
-          <p:cNvPr id="12" name="Straight Connector 11">
-            <a:extLst>
-              <a:ext uri="{FF2B5EF4-FFF2-40B4-BE49-F238E27FC236}">
-                <a16:creationId xmlns:a16="http://schemas.microsoft.com/office/drawing/2014/main" id="{4C75A547-BCD1-42BE-966E-53CA0AB93165}"/>
-              </a:ext>
-            </a:extLst>
-          </p:cNvPr>
-          <p:cNvCxnSpPr>
-            <a:cxnSpLocks/>
-          </p:cNvCxnSpPr>
-          <p:nvPr/>
-        </p:nvCxnSpPr>
-        <p:spPr>
-          <a:xfrm>
-            <a:off x="1188357" y="5151666"/>
-            <a:ext cx="9822543" cy="0"/>
-          </a:xfrm>
-          <a:prstGeom prst="line">
-            <a:avLst/>
-          </a:prstGeom>
-          <a:ln w="12700">
-            <a:solidFill>
-              <a:schemeClr val="tx1"/>
-            </a:solidFill>
-          </a:ln>
-        </p:spPr>
-        <p:style>
-          <a:lnRef idx="1">
-            <a:schemeClr val="accent1"/>
-          </a:lnRef>
-          <a:fillRef idx="0">
-            <a:schemeClr val="accent1"/>
-          </a:fillRef>
-          <a:effectRef idx="0">
-            <a:schemeClr val="accent1"/>
-          </a:effectRef>
-          <a:fontRef idx="minor">
-            <a:schemeClr val="tx1"/>
-          </a:fontRef>
-        </p:style>
-      </p:cxnSp>
     </p:spTree>
     <p:extLst>
       <p:ext uri="{BB962C8B-B14F-4D97-AF65-F5344CB8AC3E}">
-        <p14:creationId xmlns:p14="http://schemas.microsoft.com/office/powerpoint/2010/main" val="2938465500"/>
+        <p14:creationId xmlns:p14="http://schemas.microsoft.com/office/powerpoint/2010/main" val="2059758405"/>
       </p:ext>
     </p:extLst>
   </p:cSld>
@@ -2392,7 +772,7 @@
           <p:cNvPr id="2" name="Title 1">
             <a:extLst>
               <a:ext uri="{FF2B5EF4-FFF2-40B4-BE49-F238E27FC236}">
-                <a16:creationId xmlns:a16="http://schemas.microsoft.com/office/drawing/2014/main" id="{8A5A3BF2-BCE9-47D7-B1C0-1F0E4936B6B3}"/>
+                <a16:creationId xmlns:a16="http://schemas.microsoft.com/office/drawing/2014/main" id="{040DA648-CF44-FC15-097A-37FEEC076DEA}"/>
               </a:ext>
             </a:extLst>
           </p:cNvPr>
@@ -2420,7 +800,7 @@
           <p:cNvPr id="3" name="Vertical Text Placeholder 2">
             <a:extLst>
               <a:ext uri="{FF2B5EF4-FFF2-40B4-BE49-F238E27FC236}">
-                <a16:creationId xmlns:a16="http://schemas.microsoft.com/office/drawing/2014/main" id="{692722E9-C3E4-48AF-996A-495AE659FA6E}"/>
+                <a16:creationId xmlns:a16="http://schemas.microsoft.com/office/drawing/2014/main" id="{2999A9DA-3D49-6C20-5476-F00927BACF21}"/>
               </a:ext>
             </a:extLst>
           </p:cNvPr>
@@ -2477,7 +857,7 @@
           <p:cNvPr id="4" name="Date Placeholder 3">
             <a:extLst>
               <a:ext uri="{FF2B5EF4-FFF2-40B4-BE49-F238E27FC236}">
-                <a16:creationId xmlns:a16="http://schemas.microsoft.com/office/drawing/2014/main" id="{19C9E516-382B-4845-93BF-20C16EE0DB05}"/>
+                <a16:creationId xmlns:a16="http://schemas.microsoft.com/office/drawing/2014/main" id="{4E78AECB-CB26-613F-6D95-D10ABE9D7517}"/>
               </a:ext>
             </a:extLst>
           </p:cNvPr>
@@ -2495,7 +875,7 @@
           <a:p>
             <a:fld id="{3CADBD16-5BFB-4D9F-9646-C75D1B53BBB6}" type="datetimeFigureOut">
               <a:rPr lang="en-US" smtClean="0"/>
-              <a:t>3/8/2026</a:t>
+              <a:t>3/14/2026</a:t>
             </a:fld>
             <a:endParaRPr lang="en-US"/>
           </a:p>
@@ -2506,7 +886,7 @@
           <p:cNvPr id="5" name="Footer Placeholder 4">
             <a:extLst>
               <a:ext uri="{FF2B5EF4-FFF2-40B4-BE49-F238E27FC236}">
-                <a16:creationId xmlns:a16="http://schemas.microsoft.com/office/drawing/2014/main" id="{EAB96E16-F168-442A-843C-5D490D54B06A}"/>
+                <a16:creationId xmlns:a16="http://schemas.microsoft.com/office/drawing/2014/main" id="{E6C28BC7-84C5-9762-7036-E28AA9846909}"/>
               </a:ext>
             </a:extLst>
           </p:cNvPr>
@@ -2531,7 +911,7 @@
           <p:cNvPr id="6" name="Slide Number Placeholder 5">
             <a:extLst>
               <a:ext uri="{FF2B5EF4-FFF2-40B4-BE49-F238E27FC236}">
-                <a16:creationId xmlns:a16="http://schemas.microsoft.com/office/drawing/2014/main" id="{A9A61BEA-A969-437A-BD8B-CB1B709AD430}"/>
+                <a16:creationId xmlns:a16="http://schemas.microsoft.com/office/drawing/2014/main" id="{65511214-7083-C512-4E5B-4F002A098F9C}"/>
               </a:ext>
             </a:extLst>
           </p:cNvPr>
@@ -2558,7 +938,7 @@
     </p:spTree>
     <p:extLst>
       <p:ext uri="{BB962C8B-B14F-4D97-AF65-F5344CB8AC3E}">
-        <p14:creationId xmlns:p14="http://schemas.microsoft.com/office/powerpoint/2010/main" val="3904193171"/>
+        <p14:creationId xmlns:p14="http://schemas.microsoft.com/office/powerpoint/2010/main" val="1572393314"/>
       </p:ext>
     </p:extLst>
   </p:cSld>
@@ -2590,7 +970,7 @@
           <p:cNvPr id="2" name="Vertical Title 1">
             <a:extLst>
               <a:ext uri="{FF2B5EF4-FFF2-40B4-BE49-F238E27FC236}">
-                <a16:creationId xmlns:a16="http://schemas.microsoft.com/office/drawing/2014/main" id="{66528449-3E11-45FF-BF3A-651867603E75}"/>
+                <a16:creationId xmlns:a16="http://schemas.microsoft.com/office/drawing/2014/main" id="{95EBD4DB-830D-97F2-1A7C-7CCAD3329979}"/>
               </a:ext>
             </a:extLst>
           </p:cNvPr>
@@ -2603,8 +983,8 @@
         </p:nvSpPr>
         <p:spPr>
           <a:xfrm>
-            <a:off x="8572500" y="870625"/>
-            <a:ext cx="2476499" cy="5029201"/>
+            <a:off x="8724900" y="365125"/>
+            <a:ext cx="2628900" cy="5811838"/>
           </a:xfrm>
         </p:spPr>
         <p:txBody>
@@ -2612,7 +992,7 @@
           <a:lstStyle/>
           <a:p>
             <a:r>
-              <a:rPr lang="en-US" dirty="0"/>
+              <a:rPr lang="en-US"/>
               <a:t>Click to edit Master title style</a:t>
             </a:r>
           </a:p>
@@ -2623,7 +1003,7 @@
           <p:cNvPr id="3" name="Vertical Text Placeholder 2">
             <a:extLst>
               <a:ext uri="{FF2B5EF4-FFF2-40B4-BE49-F238E27FC236}">
-                <a16:creationId xmlns:a16="http://schemas.microsoft.com/office/drawing/2014/main" id="{AFC0EAB0-2DFA-4CBA-86B1-1826EF523D4D}"/>
+                <a16:creationId xmlns:a16="http://schemas.microsoft.com/office/drawing/2014/main" id="{D02F0892-3706-4775-7BCD-FABAA7AA7DE7}"/>
               </a:ext>
             </a:extLst>
           </p:cNvPr>
@@ -2636,8 +1016,8 @@
         </p:nvSpPr>
         <p:spPr>
           <a:xfrm>
-            <a:off x="1143000" y="870625"/>
-            <a:ext cx="7324928" cy="5029201"/>
+            <a:off x="838200" y="365125"/>
+            <a:ext cx="7734300" cy="5811838"/>
           </a:xfrm>
         </p:spPr>
         <p:txBody>
@@ -2646,35 +1026,35 @@
           <a:p>
             <a:pPr lvl="0"/>
             <a:r>
-              <a:rPr lang="en-US" dirty="0"/>
+              <a:rPr lang="en-US"/>
               <a:t>Click to edit Master text styles</a:t>
             </a:r>
           </a:p>
           <a:p>
             <a:pPr lvl="1"/>
             <a:r>
-              <a:rPr lang="en-US" dirty="0"/>
+              <a:rPr lang="en-US"/>
               <a:t>Second level</a:t>
             </a:r>
           </a:p>
           <a:p>
             <a:pPr lvl="2"/>
             <a:r>
-              <a:rPr lang="en-US" dirty="0"/>
+              <a:rPr lang="en-US"/>
               <a:t>Third level</a:t>
             </a:r>
           </a:p>
           <a:p>
             <a:pPr lvl="3"/>
             <a:r>
-              <a:rPr lang="en-US" dirty="0"/>
+              <a:rPr lang="en-US"/>
               <a:t>Fourth level</a:t>
             </a:r>
           </a:p>
           <a:p>
             <a:pPr lvl="4"/>
             <a:r>
-              <a:rPr lang="en-US" dirty="0"/>
+              <a:rPr lang="en-US"/>
               <a:t>Fifth level</a:t>
             </a:r>
           </a:p>
@@ -2685,7 +1065,7 @@
           <p:cNvPr id="4" name="Date Placeholder 3">
             <a:extLst>
               <a:ext uri="{FF2B5EF4-FFF2-40B4-BE49-F238E27FC236}">
-                <a16:creationId xmlns:a16="http://schemas.microsoft.com/office/drawing/2014/main" id="{DFA22F89-E1F5-45D7-945A-8A2886C4BA59}"/>
+                <a16:creationId xmlns:a16="http://schemas.microsoft.com/office/drawing/2014/main" id="{7150BBDB-64D2-9C52-A826-EE7DFB48D9F2}"/>
               </a:ext>
             </a:extLst>
           </p:cNvPr>
@@ -2703,7 +1083,7 @@
           <a:p>
             <a:fld id="{3CADBD16-5BFB-4D9F-9646-C75D1B53BBB6}" type="datetimeFigureOut">
               <a:rPr lang="en-US" smtClean="0"/>
-              <a:t>3/8/2026</a:t>
+              <a:t>3/14/2026</a:t>
             </a:fld>
             <a:endParaRPr lang="en-US"/>
           </a:p>
@@ -2714,7 +1094,7 @@
           <p:cNvPr id="5" name="Footer Placeholder 4">
             <a:extLst>
               <a:ext uri="{FF2B5EF4-FFF2-40B4-BE49-F238E27FC236}">
-                <a16:creationId xmlns:a16="http://schemas.microsoft.com/office/drawing/2014/main" id="{637E7E82-5FB8-4289-AD0C-0BA788E14794}"/>
+                <a16:creationId xmlns:a16="http://schemas.microsoft.com/office/drawing/2014/main" id="{2AA51C5B-B868-CEDC-7232-8358B68C1828}"/>
               </a:ext>
             </a:extLst>
           </p:cNvPr>
@@ -2739,7 +1119,7 @@
           <p:cNvPr id="6" name="Slide Number Placeholder 5">
             <a:extLst>
               <a:ext uri="{FF2B5EF4-FFF2-40B4-BE49-F238E27FC236}">
-                <a16:creationId xmlns:a16="http://schemas.microsoft.com/office/drawing/2014/main" id="{245A4046-1A2C-41F5-A177-1C3919C20569}"/>
+                <a16:creationId xmlns:a16="http://schemas.microsoft.com/office/drawing/2014/main" id="{4FA0D4E5-F174-4D1C-283B-529430933520}"/>
               </a:ext>
             </a:extLst>
           </p:cNvPr>
@@ -2766,7 +1146,7 @@
     </p:spTree>
     <p:extLst>
       <p:ext uri="{BB962C8B-B14F-4D97-AF65-F5344CB8AC3E}">
-        <p14:creationId xmlns:p14="http://schemas.microsoft.com/office/powerpoint/2010/main" val="1935855827"/>
+        <p14:creationId xmlns:p14="http://schemas.microsoft.com/office/powerpoint/2010/main" val="266541577"/>
       </p:ext>
     </p:extLst>
   </p:cSld>
@@ -2798,7 +1178,7 @@
           <p:cNvPr id="2" name="Title 1">
             <a:extLst>
               <a:ext uri="{FF2B5EF4-FFF2-40B4-BE49-F238E27FC236}">
-                <a16:creationId xmlns:a16="http://schemas.microsoft.com/office/drawing/2014/main" id="{03ECD6F3-88F1-4195-8395-57AA096BB3B2}"/>
+                <a16:creationId xmlns:a16="http://schemas.microsoft.com/office/drawing/2014/main" id="{91F4E2C3-3E86-ABDA-375D-465BC87313C0}"/>
               </a:ext>
             </a:extLst>
           </p:cNvPr>
@@ -2826,7 +1206,7 @@
           <p:cNvPr id="3" name="Content Placeholder 2">
             <a:extLst>
               <a:ext uri="{FF2B5EF4-FFF2-40B4-BE49-F238E27FC236}">
-                <a16:creationId xmlns:a16="http://schemas.microsoft.com/office/drawing/2014/main" id="{CED8D06C-EB08-40B3-AFB3-A62F4411221C}"/>
+                <a16:creationId xmlns:a16="http://schemas.microsoft.com/office/drawing/2014/main" id="{D04FA04C-9E0A-3DA7-5581-023BAC0437DD}"/>
               </a:ext>
             </a:extLst>
           </p:cNvPr>
@@ -2883,7 +1263,7 @@
           <p:cNvPr id="4" name="Date Placeholder 3">
             <a:extLst>
               <a:ext uri="{FF2B5EF4-FFF2-40B4-BE49-F238E27FC236}">
-                <a16:creationId xmlns:a16="http://schemas.microsoft.com/office/drawing/2014/main" id="{6103962F-B413-4C4C-A490-724DDB9E7DB9}"/>
+                <a16:creationId xmlns:a16="http://schemas.microsoft.com/office/drawing/2014/main" id="{A4D7993E-1D95-1C66-52A8-456E2AA19BC6}"/>
               </a:ext>
             </a:extLst>
           </p:cNvPr>
@@ -2901,7 +1281,7 @@
           <a:p>
             <a:fld id="{3CADBD16-5BFB-4D9F-9646-C75D1B53BBB6}" type="datetimeFigureOut">
               <a:rPr lang="en-US" smtClean="0"/>
-              <a:t>3/8/2026</a:t>
+              <a:t>3/14/2026</a:t>
             </a:fld>
             <a:endParaRPr lang="en-US"/>
           </a:p>
@@ -2912,7 +1292,7 @@
           <p:cNvPr id="5" name="Footer Placeholder 4">
             <a:extLst>
               <a:ext uri="{FF2B5EF4-FFF2-40B4-BE49-F238E27FC236}">
-                <a16:creationId xmlns:a16="http://schemas.microsoft.com/office/drawing/2014/main" id="{02871813-4E87-4C04-835D-76246010B069}"/>
+                <a16:creationId xmlns:a16="http://schemas.microsoft.com/office/drawing/2014/main" id="{0EFD1244-3FE1-1FB2-4F20-C994DED43A2C}"/>
               </a:ext>
             </a:extLst>
           </p:cNvPr>
@@ -2937,7 +1317,7 @@
           <p:cNvPr id="6" name="Slide Number Placeholder 5">
             <a:extLst>
               <a:ext uri="{FF2B5EF4-FFF2-40B4-BE49-F238E27FC236}">
-                <a16:creationId xmlns:a16="http://schemas.microsoft.com/office/drawing/2014/main" id="{3A922BA3-033C-491E-A045-F0052AC19A8C}"/>
+                <a16:creationId xmlns:a16="http://schemas.microsoft.com/office/drawing/2014/main" id="{E42989EB-6723-0208-2336-D16A8BBDD67E}"/>
               </a:ext>
             </a:extLst>
           </p:cNvPr>
@@ -2964,7 +1344,7 @@
     </p:spTree>
     <p:extLst>
       <p:ext uri="{BB962C8B-B14F-4D97-AF65-F5344CB8AC3E}">
-        <p14:creationId xmlns:p14="http://schemas.microsoft.com/office/powerpoint/2010/main" val="1725902291"/>
+        <p14:creationId xmlns:p14="http://schemas.microsoft.com/office/powerpoint/2010/main" val="179214903"/>
       </p:ext>
     </p:extLst>
   </p:cSld>
@@ -2996,7 +1376,7 @@
           <p:cNvPr id="2" name="Title 1">
             <a:extLst>
               <a:ext uri="{FF2B5EF4-FFF2-40B4-BE49-F238E27FC236}">
-                <a16:creationId xmlns:a16="http://schemas.microsoft.com/office/drawing/2014/main" id="{A8FE19AD-2EDD-4B4F-9F9E-46A4441847A6}"/>
+                <a16:creationId xmlns:a16="http://schemas.microsoft.com/office/drawing/2014/main" id="{952F12C6-4D58-9A70-6F02-CC59C2B32B29}"/>
               </a:ext>
             </a:extLst>
           </p:cNvPr>
@@ -3009,22 +1389,20 @@
         </p:nvSpPr>
         <p:spPr>
           <a:xfrm>
-            <a:off x="1143000" y="1709738"/>
-            <a:ext cx="8520952" cy="2852737"/>
+            <a:off x="831850" y="1709738"/>
+            <a:ext cx="10515600" cy="2852737"/>
           </a:xfrm>
         </p:spPr>
         <p:txBody>
-          <a:bodyPr anchor="b">
-            <a:normAutofit/>
-          </a:bodyPr>
+          <a:bodyPr anchor="b"/>
           <a:lstStyle>
             <a:lvl1pPr>
-              <a:defRPr sz="4800"/>
+              <a:defRPr sz="6000"/>
             </a:lvl1pPr>
           </a:lstStyle>
           <a:p>
             <a:r>
-              <a:rPr lang="en-US" dirty="0"/>
+              <a:rPr lang="en-US"/>
               <a:t>Click to edit Master title style</a:t>
             </a:r>
           </a:p>
@@ -3035,7 +1413,7 @@
           <p:cNvPr id="3" name="Text Placeholder 2">
             <a:extLst>
               <a:ext uri="{FF2B5EF4-FFF2-40B4-BE49-F238E27FC236}">
-                <a16:creationId xmlns:a16="http://schemas.microsoft.com/office/drawing/2014/main" id="{00EE5927-21D5-4EBA-A112-CAD1BD38BCB1}"/>
+                <a16:creationId xmlns:a16="http://schemas.microsoft.com/office/drawing/2014/main" id="{5965DBAE-D857-6C7D-403B-B1A8F03304FD}"/>
               </a:ext>
             </a:extLst>
           </p:cNvPr>
@@ -3048,20 +1426,20 @@
         </p:nvSpPr>
         <p:spPr>
           <a:xfrm>
-            <a:off x="1143000" y="4589466"/>
-            <a:ext cx="8520952" cy="813266"/>
+            <a:off x="831850" y="4589463"/>
+            <a:ext cx="10515600" cy="1500187"/>
           </a:xfrm>
         </p:spPr>
         <p:txBody>
-          <a:bodyPr>
-            <a:normAutofit/>
-          </a:bodyPr>
+          <a:bodyPr/>
           <a:lstStyle>
             <a:lvl1pPr marL="0" indent="0">
               <a:buNone/>
-              <a:defRPr sz="1800">
+              <a:defRPr sz="2400">
                 <a:solidFill>
-                  <a:schemeClr val="tx1"/>
+                  <a:schemeClr val="tx1">
+                    <a:tint val="82000"/>
+                  </a:schemeClr>
                 </a:solidFill>
               </a:defRPr>
             </a:lvl1pPr>
@@ -3070,7 +1448,7 @@
               <a:defRPr sz="2000">
                 <a:solidFill>
                   <a:schemeClr val="tx1">
-                    <a:tint val="75000"/>
+                    <a:tint val="82000"/>
                   </a:schemeClr>
                 </a:solidFill>
               </a:defRPr>
@@ -3080,7 +1458,7 @@
               <a:defRPr sz="1800">
                 <a:solidFill>
                   <a:schemeClr val="tx1">
-                    <a:tint val="75000"/>
+                    <a:tint val="82000"/>
                   </a:schemeClr>
                 </a:solidFill>
               </a:defRPr>
@@ -3090,7 +1468,7 @@
               <a:defRPr sz="1600">
                 <a:solidFill>
                   <a:schemeClr val="tx1">
-                    <a:tint val="75000"/>
+                    <a:tint val="82000"/>
                   </a:schemeClr>
                 </a:solidFill>
               </a:defRPr>
@@ -3100,7 +1478,7 @@
               <a:defRPr sz="1600">
                 <a:solidFill>
                   <a:schemeClr val="tx1">
-                    <a:tint val="75000"/>
+                    <a:tint val="82000"/>
                   </a:schemeClr>
                 </a:solidFill>
               </a:defRPr>
@@ -3110,7 +1488,7 @@
               <a:defRPr sz="1600">
                 <a:solidFill>
                   <a:schemeClr val="tx1">
-                    <a:tint val="75000"/>
+                    <a:tint val="82000"/>
                   </a:schemeClr>
                 </a:solidFill>
               </a:defRPr>
@@ -3120,7 +1498,7 @@
               <a:defRPr sz="1600">
                 <a:solidFill>
                   <a:schemeClr val="tx1">
-                    <a:tint val="75000"/>
+                    <a:tint val="82000"/>
                   </a:schemeClr>
                 </a:solidFill>
               </a:defRPr>
@@ -3130,7 +1508,7 @@
               <a:defRPr sz="1600">
                 <a:solidFill>
                   <a:schemeClr val="tx1">
-                    <a:tint val="75000"/>
+                    <a:tint val="82000"/>
                   </a:schemeClr>
                 </a:solidFill>
               </a:defRPr>
@@ -3140,7 +1518,7 @@
               <a:defRPr sz="1600">
                 <a:solidFill>
                   <a:schemeClr val="tx1">
-                    <a:tint val="75000"/>
+                    <a:tint val="82000"/>
                   </a:schemeClr>
                 </a:solidFill>
               </a:defRPr>
@@ -3149,7 +1527,7 @@
           <a:p>
             <a:pPr lvl="0"/>
             <a:r>
-              <a:rPr lang="en-US" dirty="0"/>
+              <a:rPr lang="en-US"/>
               <a:t>Click to edit Master text styles</a:t>
             </a:r>
           </a:p>
@@ -3160,7 +1538,7 @@
           <p:cNvPr id="4" name="Date Placeholder 3">
             <a:extLst>
               <a:ext uri="{FF2B5EF4-FFF2-40B4-BE49-F238E27FC236}">
-                <a16:creationId xmlns:a16="http://schemas.microsoft.com/office/drawing/2014/main" id="{4CEF0D16-9D87-4D76-A5A5-534E24B7DD25}"/>
+                <a16:creationId xmlns:a16="http://schemas.microsoft.com/office/drawing/2014/main" id="{40E19568-CD80-399D-4CAD-20728DA1B313}"/>
               </a:ext>
             </a:extLst>
           </p:cNvPr>
@@ -3178,7 +1556,7 @@
           <a:p>
             <a:fld id="{3CADBD16-5BFB-4D9F-9646-C75D1B53BBB6}" type="datetimeFigureOut">
               <a:rPr lang="en-US" smtClean="0"/>
-              <a:t>3/8/2026</a:t>
+              <a:t>3/14/2026</a:t>
             </a:fld>
             <a:endParaRPr lang="en-US"/>
           </a:p>
@@ -3189,7 +1567,7 @@
           <p:cNvPr id="5" name="Footer Placeholder 4">
             <a:extLst>
               <a:ext uri="{FF2B5EF4-FFF2-40B4-BE49-F238E27FC236}">
-                <a16:creationId xmlns:a16="http://schemas.microsoft.com/office/drawing/2014/main" id="{5965F387-5AAC-45D0-ABCE-B1CF4BC7E0AC}"/>
+                <a16:creationId xmlns:a16="http://schemas.microsoft.com/office/drawing/2014/main" id="{C2A5F696-4C8E-6B70-4600-2ED3E66AA190}"/>
               </a:ext>
             </a:extLst>
           </p:cNvPr>
@@ -3214,7 +1592,7 @@
           <p:cNvPr id="6" name="Slide Number Placeholder 5">
             <a:extLst>
               <a:ext uri="{FF2B5EF4-FFF2-40B4-BE49-F238E27FC236}">
-                <a16:creationId xmlns:a16="http://schemas.microsoft.com/office/drawing/2014/main" id="{798AF6FE-0006-4F40-A7FB-E0FDBADF7548}"/>
+                <a16:creationId xmlns:a16="http://schemas.microsoft.com/office/drawing/2014/main" id="{60CA1557-BF39-E569-CE78-CBE2F1AFE5A3}"/>
               </a:ext>
             </a:extLst>
           </p:cNvPr>
@@ -3241,7 +1619,7 @@
     </p:spTree>
     <p:extLst>
       <p:ext uri="{BB962C8B-B14F-4D97-AF65-F5344CB8AC3E}">
-        <p14:creationId xmlns:p14="http://schemas.microsoft.com/office/powerpoint/2010/main" val="1013014445"/>
+        <p14:creationId xmlns:p14="http://schemas.microsoft.com/office/powerpoint/2010/main" val="542946616"/>
       </p:ext>
     </p:extLst>
   </p:cSld>
@@ -3273,7 +1651,7 @@
           <p:cNvPr id="2" name="Title 1">
             <a:extLst>
               <a:ext uri="{FF2B5EF4-FFF2-40B4-BE49-F238E27FC236}">
-                <a16:creationId xmlns:a16="http://schemas.microsoft.com/office/drawing/2014/main" id="{B5E8AADE-587E-4574-B21B-7ABDE5A2364B}"/>
+                <a16:creationId xmlns:a16="http://schemas.microsoft.com/office/drawing/2014/main" id="{9D8240BB-5FBA-5206-E2F8-0A256E90DD2E}"/>
               </a:ext>
             </a:extLst>
           </p:cNvPr>
@@ -3301,7 +1679,7 @@
           <p:cNvPr id="3" name="Content Placeholder 2">
             <a:extLst>
               <a:ext uri="{FF2B5EF4-FFF2-40B4-BE49-F238E27FC236}">
-                <a16:creationId xmlns:a16="http://schemas.microsoft.com/office/drawing/2014/main" id="{AE2F9DA5-4DFB-4211-A58A-FFD842C27A65}"/>
+                <a16:creationId xmlns:a16="http://schemas.microsoft.com/office/drawing/2014/main" id="{07353874-913D-D32F-60BC-F956381540D0}"/>
               </a:ext>
             </a:extLst>
           </p:cNvPr>
@@ -3314,8 +1692,8 @@
         </p:nvSpPr>
         <p:spPr>
           <a:xfrm>
-            <a:off x="1143000" y="2339501"/>
-            <a:ext cx="4798979" cy="3550597"/>
+            <a:off x="838200" y="1825625"/>
+            <a:ext cx="5181600" cy="4351338"/>
           </a:xfrm>
         </p:spPr>
         <p:txBody>
@@ -3363,7 +1741,7 @@
           <p:cNvPr id="4" name="Content Placeholder 3">
             <a:extLst>
               <a:ext uri="{FF2B5EF4-FFF2-40B4-BE49-F238E27FC236}">
-                <a16:creationId xmlns:a16="http://schemas.microsoft.com/office/drawing/2014/main" id="{1AA99F26-66AF-4614-91CE-C93A24BAC23A}"/>
+                <a16:creationId xmlns:a16="http://schemas.microsoft.com/office/drawing/2014/main" id="{6B6F7CB1-CB6B-4C44-DF94-D21CFD3932C4}"/>
               </a:ext>
             </a:extLst>
           </p:cNvPr>
@@ -3376,8 +1754,8 @@
         </p:nvSpPr>
         <p:spPr>
           <a:xfrm>
-            <a:off x="6250020" y="2339501"/>
-            <a:ext cx="4798980" cy="3550597"/>
+            <a:off x="6172200" y="1825625"/>
+            <a:ext cx="5181600" cy="4351338"/>
           </a:xfrm>
         </p:spPr>
         <p:txBody>
@@ -3386,35 +1764,35 @@
           <a:p>
             <a:pPr lvl="0"/>
             <a:r>
-              <a:rPr lang="en-US" dirty="0"/>
+              <a:rPr lang="en-US"/>
               <a:t>Click to edit Master text styles</a:t>
             </a:r>
           </a:p>
           <a:p>
             <a:pPr lvl="1"/>
             <a:r>
-              <a:rPr lang="en-US" dirty="0"/>
+              <a:rPr lang="en-US"/>
               <a:t>Second level</a:t>
             </a:r>
           </a:p>
           <a:p>
             <a:pPr lvl="2"/>
             <a:r>
-              <a:rPr lang="en-US" dirty="0"/>
+              <a:rPr lang="en-US"/>
               <a:t>Third level</a:t>
             </a:r>
           </a:p>
           <a:p>
             <a:pPr lvl="3"/>
             <a:r>
-              <a:rPr lang="en-US" dirty="0"/>
+              <a:rPr lang="en-US"/>
               <a:t>Fourth level</a:t>
             </a:r>
           </a:p>
           <a:p>
             <a:pPr lvl="4"/>
             <a:r>
-              <a:rPr lang="en-US" dirty="0"/>
+              <a:rPr lang="en-US"/>
               <a:t>Fifth level</a:t>
             </a:r>
           </a:p>
@@ -3425,7 +1803,7 @@
           <p:cNvPr id="5" name="Date Placeholder 4">
             <a:extLst>
               <a:ext uri="{FF2B5EF4-FFF2-40B4-BE49-F238E27FC236}">
-                <a16:creationId xmlns:a16="http://schemas.microsoft.com/office/drawing/2014/main" id="{7F8F678E-59B5-4DF9-ABCB-506B9CB701CC}"/>
+                <a16:creationId xmlns:a16="http://schemas.microsoft.com/office/drawing/2014/main" id="{27D02086-0A79-593B-3691-8F19CA680BFC}"/>
               </a:ext>
             </a:extLst>
           </p:cNvPr>
@@ -3443,7 +1821,7 @@
           <a:p>
             <a:fld id="{3CADBD16-5BFB-4D9F-9646-C75D1B53BBB6}" type="datetimeFigureOut">
               <a:rPr lang="en-US" smtClean="0"/>
-              <a:t>3/8/2026</a:t>
+              <a:t>3/14/2026</a:t>
             </a:fld>
             <a:endParaRPr lang="en-US"/>
           </a:p>
@@ -3454,7 +1832,7 @@
           <p:cNvPr id="6" name="Footer Placeholder 5">
             <a:extLst>
               <a:ext uri="{FF2B5EF4-FFF2-40B4-BE49-F238E27FC236}">
-                <a16:creationId xmlns:a16="http://schemas.microsoft.com/office/drawing/2014/main" id="{18B50A53-317B-444A-9BA2-F69CDBF5DA64}"/>
+                <a16:creationId xmlns:a16="http://schemas.microsoft.com/office/drawing/2014/main" id="{A8F6012E-A992-04F8-FA0A-A75DC6BE7747}"/>
               </a:ext>
             </a:extLst>
           </p:cNvPr>
@@ -3479,7 +1857,7 @@
           <p:cNvPr id="7" name="Slide Number Placeholder 6">
             <a:extLst>
               <a:ext uri="{FF2B5EF4-FFF2-40B4-BE49-F238E27FC236}">
-                <a16:creationId xmlns:a16="http://schemas.microsoft.com/office/drawing/2014/main" id="{D0B269A1-B0FB-4C8F-B6AA-0718C92D3D22}"/>
+                <a16:creationId xmlns:a16="http://schemas.microsoft.com/office/drawing/2014/main" id="{DD0C6ECF-520F-FBA3-C3E5-44B6E4D8D81A}"/>
               </a:ext>
             </a:extLst>
           </p:cNvPr>
@@ -3506,7 +1884,7 @@
     </p:spTree>
     <p:extLst>
       <p:ext uri="{BB962C8B-B14F-4D97-AF65-F5344CB8AC3E}">
-        <p14:creationId xmlns:p14="http://schemas.microsoft.com/office/powerpoint/2010/main" val="3692425600"/>
+        <p14:creationId xmlns:p14="http://schemas.microsoft.com/office/powerpoint/2010/main" val="2029320478"/>
       </p:ext>
     </p:extLst>
   </p:cSld>
@@ -3538,7 +1916,7 @@
           <p:cNvPr id="2" name="Title 1">
             <a:extLst>
               <a:ext uri="{FF2B5EF4-FFF2-40B4-BE49-F238E27FC236}">
-                <a16:creationId xmlns:a16="http://schemas.microsoft.com/office/drawing/2014/main" id="{B112BBBF-42B2-4A5D-B145-46983A530170}"/>
+                <a16:creationId xmlns:a16="http://schemas.microsoft.com/office/drawing/2014/main" id="{F026D357-CF96-8136-89B3-620E6C7B697A}"/>
               </a:ext>
             </a:extLst>
           </p:cNvPr>
@@ -3551,8 +1929,8 @@
         </p:nvSpPr>
         <p:spPr>
           <a:xfrm>
-            <a:off x="1143000" y="1133272"/>
-            <a:ext cx="9905999" cy="846307"/>
+            <a:off x="839788" y="365125"/>
+            <a:ext cx="10515600" cy="1325563"/>
           </a:xfrm>
         </p:spPr>
         <p:txBody>
@@ -3560,7 +1938,7 @@
           <a:lstStyle/>
           <a:p>
             <a:r>
-              <a:rPr lang="en-US" dirty="0"/>
+              <a:rPr lang="en-US"/>
               <a:t>Click to edit Master title style</a:t>
             </a:r>
           </a:p>
@@ -3571,7 +1949,7 @@
           <p:cNvPr id="3" name="Text Placeholder 2">
             <a:extLst>
               <a:ext uri="{FF2B5EF4-FFF2-40B4-BE49-F238E27FC236}">
-                <a16:creationId xmlns:a16="http://schemas.microsoft.com/office/drawing/2014/main" id="{E804BE44-5271-4B5D-B649-35E3AF20B48F}"/>
+                <a16:creationId xmlns:a16="http://schemas.microsoft.com/office/drawing/2014/main" id="{ABF633B8-B7A3-8611-A464-36167DBB5A5F}"/>
               </a:ext>
             </a:extLst>
           </p:cNvPr>
@@ -3584,18 +1962,16 @@
         </p:nvSpPr>
         <p:spPr>
           <a:xfrm>
-            <a:off x="1142999" y="2067127"/>
-            <a:ext cx="4798980" cy="710119"/>
+            <a:off x="839788" y="1681163"/>
+            <a:ext cx="5157787" cy="823912"/>
           </a:xfrm>
         </p:spPr>
         <p:txBody>
-          <a:bodyPr anchor="b">
-            <a:normAutofit/>
-          </a:bodyPr>
+          <a:bodyPr anchor="b"/>
           <a:lstStyle>
             <a:lvl1pPr marL="0" indent="0">
               <a:buNone/>
-              <a:defRPr sz="2000" b="0" cap="all" spc="300" baseline="0"/>
+              <a:defRPr sz="2400" b="1"/>
             </a:lvl1pPr>
             <a:lvl2pPr marL="457200" indent="0">
               <a:buNone/>
@@ -3633,7 +2009,7 @@
           <a:p>
             <a:pPr lvl="0"/>
             <a:r>
-              <a:rPr lang="en-US" dirty="0"/>
+              <a:rPr lang="en-US"/>
               <a:t>Click to edit Master text styles</a:t>
             </a:r>
           </a:p>
@@ -3644,7 +2020,7 @@
           <p:cNvPr id="4" name="Content Placeholder 3">
             <a:extLst>
               <a:ext uri="{FF2B5EF4-FFF2-40B4-BE49-F238E27FC236}">
-                <a16:creationId xmlns:a16="http://schemas.microsoft.com/office/drawing/2014/main" id="{24D7891E-0C0A-4688-97DD-C0715E322194}"/>
+                <a16:creationId xmlns:a16="http://schemas.microsoft.com/office/drawing/2014/main" id="{6328BFA2-CC89-9360-AC9D-E9FCC7486AF1}"/>
               </a:ext>
             </a:extLst>
           </p:cNvPr>
@@ -3657,8 +2033,8 @@
         </p:nvSpPr>
         <p:spPr>
           <a:xfrm>
-            <a:off x="1143001" y="2864795"/>
-            <a:ext cx="4798978" cy="3025304"/>
+            <a:off x="839788" y="2505075"/>
+            <a:ext cx="5157787" cy="3684588"/>
           </a:xfrm>
         </p:spPr>
         <p:txBody>
@@ -3667,35 +2043,35 @@
           <a:p>
             <a:pPr lvl="0"/>
             <a:r>
-              <a:rPr lang="en-US" dirty="0"/>
+              <a:rPr lang="en-US"/>
               <a:t>Click to edit Master text styles</a:t>
             </a:r>
           </a:p>
           <a:p>
             <a:pPr lvl="1"/>
             <a:r>
-              <a:rPr lang="en-US" dirty="0"/>
+              <a:rPr lang="en-US"/>
               <a:t>Second level</a:t>
             </a:r>
           </a:p>
           <a:p>
             <a:pPr lvl="2"/>
             <a:r>
-              <a:rPr lang="en-US" dirty="0"/>
+              <a:rPr lang="en-US"/>
               <a:t>Third level</a:t>
             </a:r>
           </a:p>
           <a:p>
             <a:pPr lvl="3"/>
             <a:r>
-              <a:rPr lang="en-US" dirty="0"/>
+              <a:rPr lang="en-US"/>
               <a:t>Fourth level</a:t>
             </a:r>
           </a:p>
           <a:p>
             <a:pPr lvl="4"/>
             <a:r>
-              <a:rPr lang="en-US" dirty="0"/>
+              <a:rPr lang="en-US"/>
               <a:t>Fifth level</a:t>
             </a:r>
           </a:p>
@@ -3706,7 +2082,7 @@
           <p:cNvPr id="5" name="Text Placeholder 4">
             <a:extLst>
               <a:ext uri="{FF2B5EF4-FFF2-40B4-BE49-F238E27FC236}">
-                <a16:creationId xmlns:a16="http://schemas.microsoft.com/office/drawing/2014/main" id="{875EAF30-3412-49B0-93D1-596CC2695B26}"/>
+                <a16:creationId xmlns:a16="http://schemas.microsoft.com/office/drawing/2014/main" id="{08EF7447-6CF6-6B72-28F5-43CE366566F4}"/>
               </a:ext>
             </a:extLst>
           </p:cNvPr>
@@ -3719,18 +2095,16 @@
         </p:nvSpPr>
         <p:spPr>
           <a:xfrm>
-            <a:off x="6250018" y="2067127"/>
-            <a:ext cx="4798981" cy="710119"/>
+            <a:off x="6172200" y="1681163"/>
+            <a:ext cx="5183188" cy="823912"/>
           </a:xfrm>
         </p:spPr>
         <p:txBody>
-          <a:bodyPr anchor="b">
-            <a:normAutofit/>
-          </a:bodyPr>
+          <a:bodyPr anchor="b"/>
           <a:lstStyle>
             <a:lvl1pPr marL="0" indent="0">
               <a:buNone/>
-              <a:defRPr sz="2000" b="0" cap="all" spc="300" baseline="0"/>
+              <a:defRPr sz="2400" b="1"/>
             </a:lvl1pPr>
             <a:lvl2pPr marL="457200" indent="0">
               <a:buNone/>
@@ -3768,7 +2142,7 @@
           <a:p>
             <a:pPr lvl="0"/>
             <a:r>
-              <a:rPr lang="en-US" dirty="0"/>
+              <a:rPr lang="en-US"/>
               <a:t>Click to edit Master text styles</a:t>
             </a:r>
           </a:p>
@@ -3779,7 +2153,7 @@
           <p:cNvPr id="6" name="Content Placeholder 5">
             <a:extLst>
               <a:ext uri="{FF2B5EF4-FFF2-40B4-BE49-F238E27FC236}">
-                <a16:creationId xmlns:a16="http://schemas.microsoft.com/office/drawing/2014/main" id="{F707B9B7-F41C-4314-9F0C-BB84547FB8CA}"/>
+                <a16:creationId xmlns:a16="http://schemas.microsoft.com/office/drawing/2014/main" id="{17FE6B71-C50C-A937-595F-8A5552A1B980}"/>
               </a:ext>
             </a:extLst>
           </p:cNvPr>
@@ -3792,8 +2166,8 @@
         </p:nvSpPr>
         <p:spPr>
           <a:xfrm>
-            <a:off x="6250019" y="2864795"/>
-            <a:ext cx="4798982" cy="3025304"/>
+            <a:off x="6172200" y="2505075"/>
+            <a:ext cx="5183188" cy="3684588"/>
           </a:xfrm>
         </p:spPr>
         <p:txBody>
@@ -3802,35 +2176,35 @@
           <a:p>
             <a:pPr lvl="0"/>
             <a:r>
-              <a:rPr lang="en-US" dirty="0"/>
+              <a:rPr lang="en-US"/>
               <a:t>Click to edit Master text styles</a:t>
             </a:r>
           </a:p>
           <a:p>
             <a:pPr lvl="1"/>
             <a:r>
-              <a:rPr lang="en-US" dirty="0"/>
+              <a:rPr lang="en-US"/>
               <a:t>Second level</a:t>
             </a:r>
           </a:p>
           <a:p>
             <a:pPr lvl="2"/>
             <a:r>
-              <a:rPr lang="en-US" dirty="0"/>
+              <a:rPr lang="en-US"/>
               <a:t>Third level</a:t>
             </a:r>
           </a:p>
           <a:p>
             <a:pPr lvl="3"/>
             <a:r>
-              <a:rPr lang="en-US" dirty="0"/>
+              <a:rPr lang="en-US"/>
               <a:t>Fourth level</a:t>
             </a:r>
           </a:p>
           <a:p>
             <a:pPr lvl="4"/>
             <a:r>
-              <a:rPr lang="en-US" dirty="0"/>
+              <a:rPr lang="en-US"/>
               <a:t>Fifth level</a:t>
             </a:r>
           </a:p>
@@ -3841,7 +2215,7 @@
           <p:cNvPr id="7" name="Date Placeholder 6">
             <a:extLst>
               <a:ext uri="{FF2B5EF4-FFF2-40B4-BE49-F238E27FC236}">
-                <a16:creationId xmlns:a16="http://schemas.microsoft.com/office/drawing/2014/main" id="{8421587F-6AFC-4906-86EB-6B0A86EEF300}"/>
+                <a16:creationId xmlns:a16="http://schemas.microsoft.com/office/drawing/2014/main" id="{5AF5ACB8-2015-4EFA-88D8-6A94656145F3}"/>
               </a:ext>
             </a:extLst>
           </p:cNvPr>
@@ -3859,7 +2233,7 @@
           <a:p>
             <a:fld id="{3CADBD16-5BFB-4D9F-9646-C75D1B53BBB6}" type="datetimeFigureOut">
               <a:rPr lang="en-US" smtClean="0"/>
-              <a:t>3/8/2026</a:t>
+              <a:t>3/14/2026</a:t>
             </a:fld>
             <a:endParaRPr lang="en-US"/>
           </a:p>
@@ -3870,7 +2244,7 @@
           <p:cNvPr id="8" name="Footer Placeholder 7">
             <a:extLst>
               <a:ext uri="{FF2B5EF4-FFF2-40B4-BE49-F238E27FC236}">
-                <a16:creationId xmlns:a16="http://schemas.microsoft.com/office/drawing/2014/main" id="{354BE2C5-583B-49BC-9864-B01EEF798742}"/>
+                <a16:creationId xmlns:a16="http://schemas.microsoft.com/office/drawing/2014/main" id="{E42BC09E-F235-094E-BE8D-C96ED27531E2}"/>
               </a:ext>
             </a:extLst>
           </p:cNvPr>
@@ -3895,7 +2269,7 @@
           <p:cNvPr id="9" name="Slide Number Placeholder 8">
             <a:extLst>
               <a:ext uri="{FF2B5EF4-FFF2-40B4-BE49-F238E27FC236}">
-                <a16:creationId xmlns:a16="http://schemas.microsoft.com/office/drawing/2014/main" id="{5B39B236-45F5-4CC6-8D53-A6903A1CC8B3}"/>
+                <a16:creationId xmlns:a16="http://schemas.microsoft.com/office/drawing/2014/main" id="{A0F7E733-0638-F4B3-50DC-5C3149A32DAE}"/>
               </a:ext>
             </a:extLst>
           </p:cNvPr>
@@ -3922,7 +2296,7 @@
     </p:spTree>
     <p:extLst>
       <p:ext uri="{BB962C8B-B14F-4D97-AF65-F5344CB8AC3E}">
-        <p14:creationId xmlns:p14="http://schemas.microsoft.com/office/powerpoint/2010/main" val="3124733289"/>
+        <p14:creationId xmlns:p14="http://schemas.microsoft.com/office/powerpoint/2010/main" val="4141088066"/>
       </p:ext>
     </p:extLst>
   </p:cSld>
@@ -3954,7 +2328,7 @@
           <p:cNvPr id="2" name="Title 1">
             <a:extLst>
               <a:ext uri="{FF2B5EF4-FFF2-40B4-BE49-F238E27FC236}">
-                <a16:creationId xmlns:a16="http://schemas.microsoft.com/office/drawing/2014/main" id="{CC36B206-0678-4577-B79F-760526A5FD76}"/>
+                <a16:creationId xmlns:a16="http://schemas.microsoft.com/office/drawing/2014/main" id="{75F83BDF-2990-85BF-1691-B74AA1E88C87}"/>
               </a:ext>
             </a:extLst>
           </p:cNvPr>
@@ -3965,22 +2339,13 @@
             <p:ph type="title"/>
           </p:nvPr>
         </p:nvSpPr>
-        <p:spPr>
-          <a:xfrm>
-            <a:off x="2019300" y="1322615"/>
-            <a:ext cx="8175171" cy="4212771"/>
-          </a:xfrm>
-        </p:spPr>
+        <p:spPr/>
         <p:txBody>
           <a:bodyPr/>
-          <a:lstStyle>
-            <a:lvl1pPr algn="ctr">
-              <a:defRPr/>
-            </a:lvl1pPr>
-          </a:lstStyle>
-          <a:p>
-            <a:r>
-              <a:rPr lang="en-US" dirty="0"/>
+          <a:lstStyle/>
+          <a:p>
+            <a:r>
+              <a:rPr lang="en-US"/>
               <a:t>Click to edit Master title style</a:t>
             </a:r>
           </a:p>
@@ -3991,7 +2356,7 @@
           <p:cNvPr id="3" name="Date Placeholder 2">
             <a:extLst>
               <a:ext uri="{FF2B5EF4-FFF2-40B4-BE49-F238E27FC236}">
-                <a16:creationId xmlns:a16="http://schemas.microsoft.com/office/drawing/2014/main" id="{E6D5FCB8-AFD3-4801-BBD6-9548F4CF7C86}"/>
+                <a16:creationId xmlns:a16="http://schemas.microsoft.com/office/drawing/2014/main" id="{113ED331-1C26-C3D9-B53D-CD7504C1E2B6}"/>
               </a:ext>
             </a:extLst>
           </p:cNvPr>
@@ -4009,7 +2374,7 @@
           <a:p>
             <a:fld id="{3CADBD16-5BFB-4D9F-9646-C75D1B53BBB6}" type="datetimeFigureOut">
               <a:rPr lang="en-US" smtClean="0"/>
-              <a:t>3/8/2026</a:t>
+              <a:t>3/14/2026</a:t>
             </a:fld>
             <a:endParaRPr lang="en-US"/>
           </a:p>
@@ -4020,7 +2385,7 @@
           <p:cNvPr id="4" name="Footer Placeholder 3">
             <a:extLst>
               <a:ext uri="{FF2B5EF4-FFF2-40B4-BE49-F238E27FC236}">
-                <a16:creationId xmlns:a16="http://schemas.microsoft.com/office/drawing/2014/main" id="{0F6DACF8-CBC0-416B-B28E-EE18C42383B4}"/>
+                <a16:creationId xmlns:a16="http://schemas.microsoft.com/office/drawing/2014/main" id="{391DE445-5971-F07A-2276-C05FAB7BBFED}"/>
               </a:ext>
             </a:extLst>
           </p:cNvPr>
@@ -4045,7 +2410,7 @@
           <p:cNvPr id="5" name="Slide Number Placeholder 4">
             <a:extLst>
               <a:ext uri="{FF2B5EF4-FFF2-40B4-BE49-F238E27FC236}">
-                <a16:creationId xmlns:a16="http://schemas.microsoft.com/office/drawing/2014/main" id="{770C7421-FF49-4CE9-87D0-2B4FFE0E3DC4}"/>
+                <a16:creationId xmlns:a16="http://schemas.microsoft.com/office/drawing/2014/main" id="{48C1EC96-96F0-68C0-9599-F8CB48C90B40}"/>
               </a:ext>
             </a:extLst>
           </p:cNvPr>
@@ -4072,7 +2437,7 @@
     </p:spTree>
     <p:extLst>
       <p:ext uri="{BB962C8B-B14F-4D97-AF65-F5344CB8AC3E}">
-        <p14:creationId xmlns:p14="http://schemas.microsoft.com/office/powerpoint/2010/main" val="3569294715"/>
+        <p14:creationId xmlns:p14="http://schemas.microsoft.com/office/powerpoint/2010/main" val="217676459"/>
       </p:ext>
     </p:extLst>
   </p:cSld>
@@ -4083,7 +2448,7 @@
 </file>
 
 <file path=ppt/slideLayouts/slideLayout7.xml><?xml version="1.0" encoding="utf-8"?>
-<p:sldLayout xmlns:a="http://schemas.openxmlformats.org/drawingml/2006/main" xmlns:r="http://schemas.openxmlformats.org/officeDocument/2006/relationships" xmlns:p="http://schemas.openxmlformats.org/presentationml/2006/main" showMasterSp="0" type="blank" preserve="1">
+<p:sldLayout xmlns:a="http://schemas.openxmlformats.org/drawingml/2006/main" xmlns:r="http://schemas.openxmlformats.org/officeDocument/2006/relationships" xmlns:p="http://schemas.openxmlformats.org/presentationml/2006/main" type="blank" preserve="1">
   <p:cSld name="Blank">
     <p:spTree>
       <p:nvGrpSpPr>
@@ -4104,7 +2469,7 @@
           <p:cNvPr id="2" name="Date Placeholder 1">
             <a:extLst>
               <a:ext uri="{FF2B5EF4-FFF2-40B4-BE49-F238E27FC236}">
-                <a16:creationId xmlns:a16="http://schemas.microsoft.com/office/drawing/2014/main" id="{3D19CBFE-15AA-4447-9F9C-D8B0BEB242DA}"/>
+                <a16:creationId xmlns:a16="http://schemas.microsoft.com/office/drawing/2014/main" id="{5DA32848-6182-16BD-819E-9519066DC5D1}"/>
               </a:ext>
             </a:extLst>
           </p:cNvPr>
@@ -4122,7 +2487,7 @@
           <a:p>
             <a:fld id="{3CADBD16-5BFB-4D9F-9646-C75D1B53BBB6}" type="datetimeFigureOut">
               <a:rPr lang="en-US" smtClean="0"/>
-              <a:t>3/8/2026</a:t>
+              <a:t>3/14/2026</a:t>
             </a:fld>
             <a:endParaRPr lang="en-US"/>
           </a:p>
@@ -4133,7 +2498,7 @@
           <p:cNvPr id="3" name="Footer Placeholder 2">
             <a:extLst>
               <a:ext uri="{FF2B5EF4-FFF2-40B4-BE49-F238E27FC236}">
-                <a16:creationId xmlns:a16="http://schemas.microsoft.com/office/drawing/2014/main" id="{C6B48227-EC1E-4063-9682-891A2DB1A845}"/>
+                <a16:creationId xmlns:a16="http://schemas.microsoft.com/office/drawing/2014/main" id="{DF2ED5D8-F999-C7DF-83C0-3E4D02BC7F27}"/>
               </a:ext>
             </a:extLst>
           </p:cNvPr>
@@ -4158,7 +2523,7 @@
           <p:cNvPr id="4" name="Slide Number Placeholder 3">
             <a:extLst>
               <a:ext uri="{FF2B5EF4-FFF2-40B4-BE49-F238E27FC236}">
-                <a16:creationId xmlns:a16="http://schemas.microsoft.com/office/drawing/2014/main" id="{D22C6A63-C3F4-4563-A542-9A41AC946C32}"/>
+                <a16:creationId xmlns:a16="http://schemas.microsoft.com/office/drawing/2014/main" id="{ADA0F99E-345C-CD2B-B60A-980D0DF79B4A}"/>
               </a:ext>
             </a:extLst>
           </p:cNvPr>
@@ -4185,7 +2550,7 @@
     </p:spTree>
     <p:extLst>
       <p:ext uri="{BB962C8B-B14F-4D97-AF65-F5344CB8AC3E}">
-        <p14:creationId xmlns:p14="http://schemas.microsoft.com/office/powerpoint/2010/main" val="3413380300"/>
+        <p14:creationId xmlns:p14="http://schemas.microsoft.com/office/powerpoint/2010/main" val="845473115"/>
       </p:ext>
     </p:extLst>
   </p:cSld>
@@ -4196,7 +2561,7 @@
 </file>
 
 <file path=ppt/slideLayouts/slideLayout8.xml><?xml version="1.0" encoding="utf-8"?>
-<p:sldLayout xmlns:a="http://schemas.openxmlformats.org/drawingml/2006/main" xmlns:r="http://schemas.openxmlformats.org/officeDocument/2006/relationships" xmlns:p="http://schemas.openxmlformats.org/presentationml/2006/main" showMasterSp="0" type="objTx" preserve="1">
+<p:sldLayout xmlns:a="http://schemas.openxmlformats.org/drawingml/2006/main" xmlns:r="http://schemas.openxmlformats.org/officeDocument/2006/relationships" xmlns:p="http://schemas.openxmlformats.org/presentationml/2006/main" type="objTx" preserve="1">
   <p:cSld name="Content with Caption">
     <p:spTree>
       <p:nvGrpSpPr>
@@ -4217,7 +2582,7 @@
           <p:cNvPr id="2" name="Title 1">
             <a:extLst>
               <a:ext uri="{FF2B5EF4-FFF2-40B4-BE49-F238E27FC236}">
-                <a16:creationId xmlns:a16="http://schemas.microsoft.com/office/drawing/2014/main" id="{186900C1-FE18-461C-801C-8626C7759861}"/>
+                <a16:creationId xmlns:a16="http://schemas.microsoft.com/office/drawing/2014/main" id="{B889FA3D-165F-2868-E1AC-7EE78BC79082}"/>
               </a:ext>
             </a:extLst>
           </p:cNvPr>
@@ -4230,25 +2595,20 @@
         </p:nvSpPr>
         <p:spPr>
           <a:xfrm>
-            <a:off x="1143000" y="1600200"/>
-            <a:ext cx="3932237" cy="1964986"/>
+            <a:off x="839788" y="457200"/>
+            <a:ext cx="3932237" cy="1600200"/>
           </a:xfrm>
         </p:spPr>
         <p:txBody>
-          <a:bodyPr anchor="b">
-            <a:normAutofit/>
-          </a:bodyPr>
+          <a:bodyPr anchor="b"/>
           <a:lstStyle>
             <a:lvl1pPr>
-              <a:lnSpc>
-                <a:spcPct val="110000"/>
-              </a:lnSpc>
-              <a:defRPr sz="2400" cap="all" spc="300" baseline="0"/>
+              <a:defRPr sz="3200"/>
             </a:lvl1pPr>
           </a:lstStyle>
           <a:p>
             <a:r>
-              <a:rPr lang="en-US" dirty="0"/>
+              <a:rPr lang="en-US"/>
               <a:t>Click to edit Master title style</a:t>
             </a:r>
           </a:p>
@@ -4259,7 +2619,7 @@
           <p:cNvPr id="3" name="Content Placeholder 2">
             <a:extLst>
               <a:ext uri="{FF2B5EF4-FFF2-40B4-BE49-F238E27FC236}">
-                <a16:creationId xmlns:a16="http://schemas.microsoft.com/office/drawing/2014/main" id="{AB14CFF3-3406-49E3-9D5A-1BE90FFA508E}"/>
+                <a16:creationId xmlns:a16="http://schemas.microsoft.com/office/drawing/2014/main" id="{D346DA95-16CA-B91D-1F80-4AB768D89BC6}"/>
               </a:ext>
             </a:extLst>
           </p:cNvPr>
@@ -4272,8 +2632,8 @@
         </p:nvSpPr>
         <p:spPr>
           <a:xfrm>
-            <a:off x="5627451" y="987425"/>
-            <a:ext cx="5421548" cy="4873625"/>
+            <a:off x="5183188" y="987425"/>
+            <a:ext cx="6172200" cy="4873625"/>
           </a:xfrm>
         </p:spPr>
         <p:txBody>
@@ -4310,35 +2670,35 @@
           <a:p>
             <a:pPr lvl="0"/>
             <a:r>
-              <a:rPr lang="en-US" dirty="0"/>
+              <a:rPr lang="en-US"/>
               <a:t>Click to edit Master text styles</a:t>
             </a:r>
           </a:p>
           <a:p>
             <a:pPr lvl="1"/>
             <a:r>
-              <a:rPr lang="en-US" dirty="0"/>
+              <a:rPr lang="en-US"/>
               <a:t>Second level</a:t>
             </a:r>
           </a:p>
           <a:p>
             <a:pPr lvl="2"/>
             <a:r>
-              <a:rPr lang="en-US" dirty="0"/>
+              <a:rPr lang="en-US"/>
               <a:t>Third level</a:t>
             </a:r>
           </a:p>
           <a:p>
             <a:pPr lvl="3"/>
             <a:r>
-              <a:rPr lang="en-US" dirty="0"/>
+              <a:rPr lang="en-US"/>
               <a:t>Fourth level</a:t>
             </a:r>
           </a:p>
           <a:p>
             <a:pPr lvl="4"/>
             <a:r>
-              <a:rPr lang="en-US" dirty="0"/>
+              <a:rPr lang="en-US"/>
               <a:t>Fifth level</a:t>
             </a:r>
           </a:p>
@@ -4349,7 +2709,7 @@
           <p:cNvPr id="4" name="Text Placeholder 3">
             <a:extLst>
               <a:ext uri="{FF2B5EF4-FFF2-40B4-BE49-F238E27FC236}">
-                <a16:creationId xmlns:a16="http://schemas.microsoft.com/office/drawing/2014/main" id="{033D14FF-9082-4BBA-BC7A-F4C5B78599C5}"/>
+                <a16:creationId xmlns:a16="http://schemas.microsoft.com/office/drawing/2014/main" id="{9881ED8D-C4AF-F864-F70E-9874D1311A3E}"/>
               </a:ext>
             </a:extLst>
           </p:cNvPr>
@@ -4362,8 +2722,8 @@
         </p:nvSpPr>
         <p:spPr>
           <a:xfrm>
-            <a:off x="1143000" y="3662464"/>
-            <a:ext cx="3932237" cy="2206523"/>
+            <a:off x="839788" y="2057400"/>
+            <a:ext cx="3932237" cy="3811588"/>
           </a:xfrm>
         </p:spPr>
         <p:txBody>
@@ -4371,7 +2731,7 @@
           <a:lstStyle>
             <a:lvl1pPr marL="0" indent="0">
               <a:buNone/>
-              <a:defRPr sz="1600" i="1"/>
+              <a:defRPr sz="1600"/>
             </a:lvl1pPr>
             <a:lvl2pPr marL="457200" indent="0">
               <a:buNone/>
@@ -4409,7 +2769,7 @@
           <a:p>
             <a:pPr lvl="0"/>
             <a:r>
-              <a:rPr lang="en-US" dirty="0"/>
+              <a:rPr lang="en-US"/>
               <a:t>Click to edit Master text styles</a:t>
             </a:r>
           </a:p>
@@ -4420,7 +2780,7 @@
           <p:cNvPr id="5" name="Date Placeholder 4">
             <a:extLst>
               <a:ext uri="{FF2B5EF4-FFF2-40B4-BE49-F238E27FC236}">
-                <a16:creationId xmlns:a16="http://schemas.microsoft.com/office/drawing/2014/main" id="{0D5A2726-EB8E-4DF7-9A1B-F03BD8C7179E}"/>
+                <a16:creationId xmlns:a16="http://schemas.microsoft.com/office/drawing/2014/main" id="{4A90335E-BF28-2CAD-64EE-34F65F052AEE}"/>
               </a:ext>
             </a:extLst>
           </p:cNvPr>
@@ -4438,7 +2798,7 @@
           <a:p>
             <a:fld id="{3CADBD16-5BFB-4D9F-9646-C75D1B53BBB6}" type="datetimeFigureOut">
               <a:rPr lang="en-US" smtClean="0"/>
-              <a:t>3/8/2026</a:t>
+              <a:t>3/14/2026</a:t>
             </a:fld>
             <a:endParaRPr lang="en-US"/>
           </a:p>
@@ -4449,7 +2809,7 @@
           <p:cNvPr id="6" name="Footer Placeholder 5">
             <a:extLst>
               <a:ext uri="{FF2B5EF4-FFF2-40B4-BE49-F238E27FC236}">
-                <a16:creationId xmlns:a16="http://schemas.microsoft.com/office/drawing/2014/main" id="{8D9929BE-611C-4FE6-B0A5-E0FF9DF969EE}"/>
+                <a16:creationId xmlns:a16="http://schemas.microsoft.com/office/drawing/2014/main" id="{8E8A96D2-5C0C-875E-85AC-E92D6CCBCAE7}"/>
               </a:ext>
             </a:extLst>
           </p:cNvPr>
@@ -4474,7 +2834,7 @@
           <p:cNvPr id="7" name="Slide Number Placeholder 6">
             <a:extLst>
               <a:ext uri="{FF2B5EF4-FFF2-40B4-BE49-F238E27FC236}">
-                <a16:creationId xmlns:a16="http://schemas.microsoft.com/office/drawing/2014/main" id="{17B90B32-1D0E-4BCD-8850-59EA235F7EB4}"/>
+                <a16:creationId xmlns:a16="http://schemas.microsoft.com/office/drawing/2014/main" id="{8CAFD5F7-7985-41D2-D0B7-5305D8FF183C}"/>
               </a:ext>
             </a:extLst>
           </p:cNvPr>
@@ -4501,7 +2861,7 @@
     </p:spTree>
     <p:extLst>
       <p:ext uri="{BB962C8B-B14F-4D97-AF65-F5344CB8AC3E}">
-        <p14:creationId xmlns:p14="http://schemas.microsoft.com/office/powerpoint/2010/main" val="612036350"/>
+        <p14:creationId xmlns:p14="http://schemas.microsoft.com/office/powerpoint/2010/main" val="1759716867"/>
       </p:ext>
     </p:extLst>
   </p:cSld>
@@ -4512,7 +2872,7 @@
 </file>
 
 <file path=ppt/slideLayouts/slideLayout9.xml><?xml version="1.0" encoding="utf-8"?>
-<p:sldLayout xmlns:a="http://schemas.openxmlformats.org/drawingml/2006/main" xmlns:r="http://schemas.openxmlformats.org/officeDocument/2006/relationships" xmlns:p="http://schemas.openxmlformats.org/presentationml/2006/main" showMasterSp="0" type="picTx" preserve="1">
+<p:sldLayout xmlns:a="http://schemas.openxmlformats.org/drawingml/2006/main" xmlns:r="http://schemas.openxmlformats.org/officeDocument/2006/relationships" xmlns:p="http://schemas.openxmlformats.org/presentationml/2006/main" type="picTx" preserve="1">
   <p:cSld name="Picture with Caption">
     <p:spTree>
       <p:nvGrpSpPr>
@@ -4530,24 +2890,61 @@
       </p:grpSpPr>
       <p:sp>
         <p:nvSpPr>
-          <p:cNvPr id="3" name="Picture Placeholder 2">
-            <a:extLst>
-              <a:ext uri="{FF2B5EF4-FFF2-40B4-BE49-F238E27FC236}">
-                <a16:creationId xmlns:a16="http://schemas.microsoft.com/office/drawing/2014/main" id="{1CA1460E-1069-4FCA-B04E-28F77C861046}"/>
-              </a:ext>
-            </a:extLst>
-          </p:cNvPr>
-          <p:cNvSpPr>
-            <a:spLocks noGrp="1"/>
-          </p:cNvSpPr>
-          <p:nvPr>
-            <p:ph type="pic" idx="1"/>
+          <p:cNvPr id="2" name="Title 1">
+            <a:extLst>
+              <a:ext uri="{FF2B5EF4-FFF2-40B4-BE49-F238E27FC236}">
+                <a16:creationId xmlns:a16="http://schemas.microsoft.com/office/drawing/2014/main" id="{91A65852-4C47-5CDE-BF32-F6858D73EED6}"/>
+              </a:ext>
+            </a:extLst>
+          </p:cNvPr>
+          <p:cNvSpPr>
+            <a:spLocks noGrp="1"/>
+          </p:cNvSpPr>
+          <p:nvPr>
+            <p:ph type="title"/>
           </p:nvPr>
         </p:nvSpPr>
         <p:spPr>
           <a:xfrm>
-            <a:off x="5513614" y="987425"/>
-            <a:ext cx="5535386" cy="4873625"/>
+            <a:off x="839788" y="457200"/>
+            <a:ext cx="3932237" cy="1600200"/>
+          </a:xfrm>
+        </p:spPr>
+        <p:txBody>
+          <a:bodyPr anchor="b"/>
+          <a:lstStyle>
+            <a:lvl1pPr>
+              <a:defRPr sz="3200"/>
+            </a:lvl1pPr>
+          </a:lstStyle>
+          <a:p>
+            <a:r>
+              <a:rPr lang="en-US"/>
+              <a:t>Click to edit Master title style</a:t>
+            </a:r>
+          </a:p>
+        </p:txBody>
+      </p:sp>
+      <p:sp>
+        <p:nvSpPr>
+          <p:cNvPr id="3" name="Picture Placeholder 2">
+            <a:extLst>
+              <a:ext uri="{FF2B5EF4-FFF2-40B4-BE49-F238E27FC236}">
+                <a16:creationId xmlns:a16="http://schemas.microsoft.com/office/drawing/2014/main" id="{F5107535-ADBF-AED3-9CD4-D02AB415DD9E}"/>
+              </a:ext>
+            </a:extLst>
+          </p:cNvPr>
+          <p:cNvSpPr>
+            <a:spLocks noGrp="1"/>
+          </p:cNvSpPr>
+          <p:nvPr>
+            <p:ph type="pic" idx="1"/>
+          </p:nvPr>
+        </p:nvSpPr>
+        <p:spPr>
+          <a:xfrm>
+            <a:off x="5183188" y="987425"/>
+            <a:ext cx="6172200" cy="4873625"/>
           </a:xfrm>
         </p:spPr>
         <p:txBody>
@@ -4591,7 +2988,7 @@
             </a:lvl9pPr>
           </a:lstStyle>
           <a:p>
-            <a:endParaRPr lang="en-US" dirty="0"/>
+            <a:endParaRPr lang="en-US"/>
           </a:p>
         </p:txBody>
       </p:sp>
@@ -4600,7 +2997,7 @@
           <p:cNvPr id="4" name="Text Placeholder 3">
             <a:extLst>
               <a:ext uri="{FF2B5EF4-FFF2-40B4-BE49-F238E27FC236}">
-                <a16:creationId xmlns:a16="http://schemas.microsoft.com/office/drawing/2014/main" id="{66138C1E-867B-4FE9-8783-9B1246AEB797}"/>
+                <a16:creationId xmlns:a16="http://schemas.microsoft.com/office/drawing/2014/main" id="{BF7FA807-00DE-DB42-FC67-3BDB487A9CFC}"/>
               </a:ext>
             </a:extLst>
           </p:cNvPr>
@@ -4613,8 +3010,8 @@
         </p:nvSpPr>
         <p:spPr>
           <a:xfrm>
-            <a:off x="1143000" y="3657601"/>
-            <a:ext cx="3932236" cy="2211388"/>
+            <a:off x="839788" y="2057400"/>
+            <a:ext cx="3932237" cy="3811588"/>
           </a:xfrm>
         </p:spPr>
         <p:txBody>
@@ -4622,7 +3019,7 @@
           <a:lstStyle>
             <a:lvl1pPr marL="0" indent="0">
               <a:buNone/>
-              <a:defRPr sz="1600" i="1"/>
+              <a:defRPr sz="1600"/>
             </a:lvl1pPr>
             <a:lvl2pPr marL="457200" indent="0">
               <a:buNone/>
@@ -4660,7 +3057,7 @@
           <a:p>
             <a:pPr lvl="0"/>
             <a:r>
-              <a:rPr lang="en-US" dirty="0"/>
+              <a:rPr lang="en-US"/>
               <a:t>Click to edit Master text styles</a:t>
             </a:r>
           </a:p>
@@ -4671,7 +3068,7 @@
           <p:cNvPr id="5" name="Date Placeholder 4">
             <a:extLst>
               <a:ext uri="{FF2B5EF4-FFF2-40B4-BE49-F238E27FC236}">
-                <a16:creationId xmlns:a16="http://schemas.microsoft.com/office/drawing/2014/main" id="{00721568-4870-46F2-9F7E-F410702012D9}"/>
+                <a16:creationId xmlns:a16="http://schemas.microsoft.com/office/drawing/2014/main" id="{FDFA42D2-85A6-BA01-05B2-B7C0393C5C18}"/>
               </a:ext>
             </a:extLst>
           </p:cNvPr>
@@ -4689,7 +3086,7 @@
           <a:p>
             <a:fld id="{3CADBD16-5BFB-4D9F-9646-C75D1B53BBB6}" type="datetimeFigureOut">
               <a:rPr lang="en-US" smtClean="0"/>
-              <a:t>3/8/2026</a:t>
+              <a:t>3/14/2026</a:t>
             </a:fld>
             <a:endParaRPr lang="en-US"/>
           </a:p>
@@ -4700,7 +3097,7 @@
           <p:cNvPr id="6" name="Footer Placeholder 5">
             <a:extLst>
               <a:ext uri="{FF2B5EF4-FFF2-40B4-BE49-F238E27FC236}">
-                <a16:creationId xmlns:a16="http://schemas.microsoft.com/office/drawing/2014/main" id="{0BB3CC65-0E73-45A1-9D4F-3F4559B3B659}"/>
+                <a16:creationId xmlns:a16="http://schemas.microsoft.com/office/drawing/2014/main" id="{CCABB7F5-6367-EF26-72EC-BC2436AE6C39}"/>
               </a:ext>
             </a:extLst>
           </p:cNvPr>
@@ -4725,7 +3122,7 @@
           <p:cNvPr id="7" name="Slide Number Placeholder 6">
             <a:extLst>
               <a:ext uri="{FF2B5EF4-FFF2-40B4-BE49-F238E27FC236}">
-                <a16:creationId xmlns:a16="http://schemas.microsoft.com/office/drawing/2014/main" id="{B58C58CD-9BC3-431E-A7B4-D596A7F06C5E}"/>
+                <a16:creationId xmlns:a16="http://schemas.microsoft.com/office/drawing/2014/main" id="{4653835C-F1A0-E8A7-1F2A-274A0D74D723}"/>
               </a:ext>
             </a:extLst>
           </p:cNvPr>
@@ -4749,52 +3146,10 @@
           </a:p>
         </p:txBody>
       </p:sp>
-      <p:sp>
-        <p:nvSpPr>
-          <p:cNvPr id="2" name="Title 1">
-            <a:extLst>
-              <a:ext uri="{FF2B5EF4-FFF2-40B4-BE49-F238E27FC236}">
-                <a16:creationId xmlns:a16="http://schemas.microsoft.com/office/drawing/2014/main" id="{2368F756-D171-474C-8B1A-C818032F6F78}"/>
-              </a:ext>
-            </a:extLst>
-          </p:cNvPr>
-          <p:cNvSpPr>
-            <a:spLocks noGrp="1"/>
-          </p:cNvSpPr>
-          <p:nvPr>
-            <p:ph type="title"/>
-          </p:nvPr>
-        </p:nvSpPr>
-        <p:spPr>
-          <a:xfrm>
-            <a:off x="1143000" y="1600201"/>
-            <a:ext cx="3932236" cy="1959428"/>
-          </a:xfrm>
-        </p:spPr>
-        <p:txBody>
-          <a:bodyPr anchor="b">
-            <a:normAutofit/>
-          </a:bodyPr>
-          <a:lstStyle>
-            <a:lvl1pPr>
-              <a:lnSpc>
-                <a:spcPct val="110000"/>
-              </a:lnSpc>
-              <a:defRPr sz="2400" cap="all" spc="300" baseline="0"/>
-            </a:lvl1pPr>
-          </a:lstStyle>
-          <a:p>
-            <a:r>
-              <a:rPr lang="en-US" dirty="0"/>
-              <a:t>Click to edit Master title style</a:t>
-            </a:r>
-          </a:p>
-        </p:txBody>
-      </p:sp>
     </p:spTree>
     <p:extLst>
       <p:ext uri="{BB962C8B-B14F-4D97-AF65-F5344CB8AC3E}">
-        <p14:creationId xmlns:p14="http://schemas.microsoft.com/office/powerpoint/2010/main" val="2040199540"/>
+        <p14:creationId xmlns:p14="http://schemas.microsoft.com/office/powerpoint/2010/main" val="3972982179"/>
       </p:ext>
     </p:extLst>
   </p:cSld>
@@ -4828,251 +3183,24 @@
       </p:grpSpPr>
       <p:sp>
         <p:nvSpPr>
-          <p:cNvPr id="8" name="Freeform: Shape 7">
-            <a:extLst>
-              <a:ext uri="{FF2B5EF4-FFF2-40B4-BE49-F238E27FC236}">
-                <a16:creationId xmlns:a16="http://schemas.microsoft.com/office/drawing/2014/main" id="{91C2F78B-DEE8-4195-A196-DFC51BDADFF9}"/>
-              </a:ext>
-            </a:extLst>
-          </p:cNvPr>
-          <p:cNvSpPr/>
-          <p:nvPr/>
+          <p:cNvPr id="2" name="Title Placeholder 1">
+            <a:extLst>
+              <a:ext uri="{FF2B5EF4-FFF2-40B4-BE49-F238E27FC236}">
+                <a16:creationId xmlns:a16="http://schemas.microsoft.com/office/drawing/2014/main" id="{B4B44F91-5D98-0B2E-9A29-7D8A13F6FBF3}"/>
+              </a:ext>
+            </a:extLst>
+          </p:cNvPr>
+          <p:cNvSpPr>
+            <a:spLocks noGrp="1"/>
+          </p:cNvSpPr>
+          <p:nvPr>
+            <p:ph type="title"/>
+          </p:nvPr>
         </p:nvSpPr>
         <p:spPr>
           <a:xfrm>
-            <a:off x="9749268" y="4070878"/>
-            <a:ext cx="2442733" cy="2787123"/>
-          </a:xfrm>
-          <a:custGeom>
-            <a:avLst/>
-            <a:gdLst>
-              <a:gd name="connsiteX0" fmla="*/ 2442733 w 2442733"/>
-              <a:gd name="connsiteY0" fmla="*/ 0 h 2787123"/>
-              <a:gd name="connsiteX1" fmla="*/ 2442733 w 2442733"/>
-              <a:gd name="connsiteY1" fmla="*/ 2787123 h 2787123"/>
-              <a:gd name="connsiteX2" fmla="*/ 0 w 2442733"/>
-              <a:gd name="connsiteY2" fmla="*/ 2787123 h 2787123"/>
-            </a:gdLst>
-            <a:ahLst/>
-            <a:cxnLst>
-              <a:cxn ang="0">
-                <a:pos x="connsiteX0" y="connsiteY0"/>
-              </a:cxn>
-              <a:cxn ang="0">
-                <a:pos x="connsiteX1" y="connsiteY1"/>
-              </a:cxn>
-              <a:cxn ang="0">
-                <a:pos x="connsiteX2" y="connsiteY2"/>
-              </a:cxn>
-            </a:cxnLst>
-            <a:rect l="l" t="t" r="r" b="b"/>
-            <a:pathLst>
-              <a:path w="2442733" h="2787123">
-                <a:moveTo>
-                  <a:pt x="2442733" y="0"/>
-                </a:moveTo>
-                <a:lnTo>
-                  <a:pt x="2442733" y="2787123"/>
-                </a:lnTo>
-                <a:lnTo>
-                  <a:pt x="0" y="2787123"/>
-                </a:lnTo>
-                <a:close/>
-              </a:path>
-            </a:pathLst>
-          </a:custGeom>
-          <a:solidFill>
-            <a:schemeClr val="bg2"/>
-          </a:solidFill>
-          <a:ln w="12700" cap="flat" cmpd="sng" algn="ctr">
-            <a:noFill/>
-            <a:prstDash val="solid"/>
-            <a:miter lim="800000"/>
-          </a:ln>
-          <a:effectLst/>
-        </p:spPr>
-        <p:style>
-          <a:lnRef idx="2">
-            <a:schemeClr val="accent1">
-              <a:shade val="50000"/>
-            </a:schemeClr>
-          </a:lnRef>
-          <a:fillRef idx="1">
-            <a:schemeClr val="accent1"/>
-          </a:fillRef>
-          <a:effectRef idx="0">
-            <a:schemeClr val="accent1"/>
-          </a:effectRef>
-          <a:fontRef idx="minor">
-            <a:schemeClr val="lt1"/>
-          </a:fontRef>
-        </p:style>
-        <p:txBody>
-          <a:bodyPr wrap="square" rtlCol="0" anchor="ctr">
-            <a:noAutofit/>
-          </a:bodyPr>
-          <a:lstStyle/>
-          <a:p>
-            <a:pPr algn="ctr"/>
-            <a:endParaRPr lang="en-US"/>
-          </a:p>
-        </p:txBody>
-      </p:sp>
-      <p:sp>
-        <p:nvSpPr>
-          <p:cNvPr id="10" name="Freeform: Shape 9">
-            <a:extLst>
-              <a:ext uri="{FF2B5EF4-FFF2-40B4-BE49-F238E27FC236}">
-                <a16:creationId xmlns:a16="http://schemas.microsoft.com/office/drawing/2014/main" id="{A1D79D08-4BE8-4799-BE09-5078DFEE2256}"/>
-              </a:ext>
-            </a:extLst>
-          </p:cNvPr>
-          <p:cNvSpPr/>
-          <p:nvPr/>
-        </p:nvSpPr>
-        <p:spPr>
-          <a:xfrm rot="10800000">
-            <a:off x="0" y="0"/>
-            <a:ext cx="2442733" cy="2787123"/>
-          </a:xfrm>
-          <a:custGeom>
-            <a:avLst/>
-            <a:gdLst>
-              <a:gd name="connsiteX0" fmla="*/ 2442733 w 2442733"/>
-              <a:gd name="connsiteY0" fmla="*/ 0 h 2787123"/>
-              <a:gd name="connsiteX1" fmla="*/ 2442733 w 2442733"/>
-              <a:gd name="connsiteY1" fmla="*/ 2787123 h 2787123"/>
-              <a:gd name="connsiteX2" fmla="*/ 0 w 2442733"/>
-              <a:gd name="connsiteY2" fmla="*/ 2787123 h 2787123"/>
-            </a:gdLst>
-            <a:ahLst/>
-            <a:cxnLst>
-              <a:cxn ang="0">
-                <a:pos x="connsiteX0" y="connsiteY0"/>
-              </a:cxn>
-              <a:cxn ang="0">
-                <a:pos x="connsiteX1" y="connsiteY1"/>
-              </a:cxn>
-              <a:cxn ang="0">
-                <a:pos x="connsiteX2" y="connsiteY2"/>
-              </a:cxn>
-            </a:cxnLst>
-            <a:rect l="l" t="t" r="r" b="b"/>
-            <a:pathLst>
-              <a:path w="2442733" h="2787123">
-                <a:moveTo>
-                  <a:pt x="2442733" y="0"/>
-                </a:moveTo>
-                <a:lnTo>
-                  <a:pt x="2442733" y="2787123"/>
-                </a:lnTo>
-                <a:lnTo>
-                  <a:pt x="0" y="2787123"/>
-                </a:lnTo>
-                <a:close/>
-              </a:path>
-            </a:pathLst>
-          </a:custGeom>
-          <a:solidFill>
-            <a:schemeClr val="bg2"/>
-          </a:solidFill>
-          <a:ln w="12700" cap="flat" cmpd="sng" algn="ctr">
-            <a:noFill/>
-            <a:prstDash val="solid"/>
-            <a:miter lim="800000"/>
-          </a:ln>
-          <a:effectLst/>
-        </p:spPr>
-        <p:style>
-          <a:lnRef idx="2">
-            <a:schemeClr val="accent1">
-              <a:shade val="50000"/>
-            </a:schemeClr>
-          </a:lnRef>
-          <a:fillRef idx="1">
-            <a:schemeClr val="accent1"/>
-          </a:fillRef>
-          <a:effectRef idx="0">
-            <a:schemeClr val="accent1"/>
-          </a:effectRef>
-          <a:fontRef idx="minor">
-            <a:schemeClr val="lt1"/>
-          </a:fontRef>
-        </p:style>
-        <p:txBody>
-          <a:bodyPr wrap="square" rtlCol="0" anchor="ctr">
-            <a:noAutofit/>
-          </a:bodyPr>
-          <a:lstStyle/>
-          <a:p>
-            <a:pPr algn="ctr"/>
-            <a:endParaRPr lang="en-US"/>
-          </a:p>
-        </p:txBody>
-      </p:sp>
-      <p:cxnSp>
-        <p:nvCxnSpPr>
-          <p:cNvPr id="12" name="Straight Connector 11">
-            <a:extLst>
-              <a:ext uri="{FF2B5EF4-FFF2-40B4-BE49-F238E27FC236}">
-                <a16:creationId xmlns:a16="http://schemas.microsoft.com/office/drawing/2014/main" id="{C95D65A1-16CB-407F-993F-2A6D59BCC0C8}"/>
-              </a:ext>
-            </a:extLst>
-          </p:cNvPr>
-          <p:cNvCxnSpPr>
-            <a:cxnSpLocks/>
-          </p:cNvCxnSpPr>
-          <p:nvPr/>
-        </p:nvCxnSpPr>
-        <p:spPr>
-          <a:xfrm>
-            <a:off x="1233837" y="6172200"/>
-            <a:ext cx="9760638" cy="0"/>
-          </a:xfrm>
-          <a:prstGeom prst="line">
-            <a:avLst/>
-          </a:prstGeom>
-          <a:ln w="12700">
-            <a:solidFill>
-              <a:schemeClr val="tx1"/>
-            </a:solidFill>
-          </a:ln>
-        </p:spPr>
-        <p:style>
-          <a:lnRef idx="1">
-            <a:schemeClr val="accent1"/>
-          </a:lnRef>
-          <a:fillRef idx="0">
-            <a:schemeClr val="accent1"/>
-          </a:fillRef>
-          <a:effectRef idx="0">
-            <a:schemeClr val="accent1"/>
-          </a:effectRef>
-          <a:fontRef idx="minor">
-            <a:schemeClr val="tx1"/>
-          </a:fontRef>
-        </p:style>
-      </p:cxnSp>
-      <p:sp>
-        <p:nvSpPr>
-          <p:cNvPr id="2" name="Title Placeholder 1">
-            <a:extLst>
-              <a:ext uri="{FF2B5EF4-FFF2-40B4-BE49-F238E27FC236}">
-                <a16:creationId xmlns:a16="http://schemas.microsoft.com/office/drawing/2014/main" id="{0BA018A2-815D-41B0-A189-FDF7A5E88891}"/>
-              </a:ext>
-            </a:extLst>
-          </p:cNvPr>
-          <p:cNvSpPr>
-            <a:spLocks noGrp="1"/>
-          </p:cNvSpPr>
-          <p:nvPr>
-            <p:ph type="title"/>
-          </p:nvPr>
-        </p:nvSpPr>
-        <p:spPr>
-          <a:xfrm>
-            <a:off x="1143000" y="872935"/>
-            <a:ext cx="9905999" cy="1360898"/>
+            <a:off x="838200" y="365125"/>
+            <a:ext cx="10515600" cy="1325563"/>
           </a:xfrm>
           <a:prstGeom prst="rect">
             <a:avLst/>
@@ -5085,7 +3213,7 @@
           <a:lstStyle/>
           <a:p>
             <a:r>
-              <a:rPr lang="en-US" dirty="0"/>
+              <a:rPr lang="en-US"/>
               <a:t>Click to edit Master title style</a:t>
             </a:r>
           </a:p>
@@ -5096,7 +3224,7 @@
           <p:cNvPr id="3" name="Text Placeholder 2">
             <a:extLst>
               <a:ext uri="{FF2B5EF4-FFF2-40B4-BE49-F238E27FC236}">
-                <a16:creationId xmlns:a16="http://schemas.microsoft.com/office/drawing/2014/main" id="{36DFAE63-1276-4C7C-BFF5-F5DF1CDB23E5}"/>
+                <a16:creationId xmlns:a16="http://schemas.microsoft.com/office/drawing/2014/main" id="{08024D61-D414-BB2A-E972-A5FC4F35EC7F}"/>
               </a:ext>
             </a:extLst>
           </p:cNvPr>
@@ -5109,8 +3237,8 @@
         </p:nvSpPr>
         <p:spPr>
           <a:xfrm>
-            <a:off x="1143000" y="2332026"/>
-            <a:ext cx="9905999" cy="3567118"/>
+            <a:off x="838200" y="1825625"/>
+            <a:ext cx="10515600" cy="4351338"/>
           </a:xfrm>
           <a:prstGeom prst="rect">
             <a:avLst/>
@@ -5124,35 +3252,35 @@
           <a:p>
             <a:pPr lvl="0"/>
             <a:r>
-              <a:rPr lang="en-US" dirty="0"/>
+              <a:rPr lang="en-US"/>
               <a:t>Click to edit Master text styles</a:t>
             </a:r>
           </a:p>
           <a:p>
             <a:pPr lvl="1"/>
             <a:r>
-              <a:rPr lang="en-US" dirty="0"/>
+              <a:rPr lang="en-US"/>
               <a:t>Second level</a:t>
             </a:r>
           </a:p>
           <a:p>
             <a:pPr lvl="2"/>
             <a:r>
-              <a:rPr lang="en-US" dirty="0"/>
+              <a:rPr lang="en-US"/>
               <a:t>Third level</a:t>
             </a:r>
           </a:p>
           <a:p>
             <a:pPr lvl="3"/>
             <a:r>
-              <a:rPr lang="en-US" dirty="0"/>
+              <a:rPr lang="en-US"/>
               <a:t>Fourth level</a:t>
             </a:r>
           </a:p>
           <a:p>
             <a:pPr lvl="4"/>
             <a:r>
-              <a:rPr lang="en-US" dirty="0"/>
+              <a:rPr lang="en-US"/>
               <a:t>Fifth level</a:t>
             </a:r>
           </a:p>
@@ -5163,7 +3291,7 @@
           <p:cNvPr id="4" name="Date Placeholder 3">
             <a:extLst>
               <a:ext uri="{FF2B5EF4-FFF2-40B4-BE49-F238E27FC236}">
-                <a16:creationId xmlns:a16="http://schemas.microsoft.com/office/drawing/2014/main" id="{55380268-2D73-487C-843B-51648AE18194}"/>
+                <a16:creationId xmlns:a16="http://schemas.microsoft.com/office/drawing/2014/main" id="{DA2FA431-3118-A447-CAB1-0DA1550508E4}"/>
               </a:ext>
             </a:extLst>
           </p:cNvPr>
@@ -5176,8 +3304,8 @@
         </p:nvSpPr>
         <p:spPr>
           <a:xfrm>
-            <a:off x="7388157" y="6356350"/>
-            <a:ext cx="3093395" cy="365125"/>
+            <a:off x="838200" y="6356350"/>
+            <a:ext cx="2743200" cy="365125"/>
           </a:xfrm>
           <a:prstGeom prst="rect">
             <a:avLst/>
@@ -5186,10 +3314,12 @@
         <p:txBody>
           <a:bodyPr vert="horz" lIns="91440" tIns="45720" rIns="91440" bIns="45720" rtlCol="0" anchor="ctr"/>
           <a:lstStyle>
-            <a:lvl1pPr algn="r">
-              <a:defRPr sz="1050">
+            <a:lvl1pPr algn="l">
+              <a:defRPr sz="1200">
                 <a:solidFill>
-                  <a:schemeClr val="tx1"/>
+                  <a:schemeClr val="tx1">
+                    <a:tint val="82000"/>
+                  </a:schemeClr>
                 </a:solidFill>
               </a:defRPr>
             </a:lvl1pPr>
@@ -5198,7 +3328,7 @@
             <a:fld id="{3CADBD16-5BFB-4D9F-9646-C75D1B53BBB6}" type="datetimeFigureOut">
               <a:rPr lang="en-US" smtClean="0"/>
               <a:pPr/>
-              <a:t>3/8/2026</a:t>
+              <a:t>3/14/2026</a:t>
             </a:fld>
             <a:endParaRPr lang="en-US" dirty="0"/>
           </a:p>
@@ -5209,7 +3339,7 @@
           <p:cNvPr id="5" name="Footer Placeholder 4">
             <a:extLst>
               <a:ext uri="{FF2B5EF4-FFF2-40B4-BE49-F238E27FC236}">
-                <a16:creationId xmlns:a16="http://schemas.microsoft.com/office/drawing/2014/main" id="{99F61E6D-D51F-4BD7-B59D-19AF179177B8}"/>
+                <a16:creationId xmlns:a16="http://schemas.microsoft.com/office/drawing/2014/main" id="{38D5A991-A60B-A737-8972-4F59E4252F30}"/>
               </a:ext>
             </a:extLst>
           </p:cNvPr>
@@ -5222,8 +3352,8 @@
         </p:nvSpPr>
         <p:spPr>
           <a:xfrm>
-            <a:off x="1143000" y="6356350"/>
-            <a:ext cx="3959157" cy="365125"/>
+            <a:off x="4038600" y="6356350"/>
+            <a:ext cx="4114800" cy="365125"/>
           </a:xfrm>
           <a:prstGeom prst="rect">
             <a:avLst/>
@@ -5232,10 +3362,12 @@
         <p:txBody>
           <a:bodyPr vert="horz" lIns="91440" tIns="45720" rIns="91440" bIns="45720" rtlCol="0" anchor="ctr"/>
           <a:lstStyle>
-            <a:lvl1pPr algn="l">
-              <a:defRPr sz="1050">
+            <a:lvl1pPr algn="ctr">
+              <a:defRPr sz="1200">
                 <a:solidFill>
-                  <a:schemeClr val="tx1"/>
+                  <a:schemeClr val="tx1">
+                    <a:tint val="82000"/>
+                  </a:schemeClr>
                 </a:solidFill>
               </a:defRPr>
             </a:lvl1pPr>
@@ -5250,7 +3382,7 @@
           <p:cNvPr id="6" name="Slide Number Placeholder 5">
             <a:extLst>
               <a:ext uri="{FF2B5EF4-FFF2-40B4-BE49-F238E27FC236}">
-                <a16:creationId xmlns:a16="http://schemas.microsoft.com/office/drawing/2014/main" id="{127701B1-1C93-41C2-AEE1-815DEA51B962}"/>
+                <a16:creationId xmlns:a16="http://schemas.microsoft.com/office/drawing/2014/main" id="{A28CBC51-6FEB-58BF-C592-6626A4EB294A}"/>
               </a:ext>
             </a:extLst>
           </p:cNvPr>
@@ -5263,8 +3395,8 @@
         </p:nvSpPr>
         <p:spPr>
           <a:xfrm>
-            <a:off x="10423186" y="6356350"/>
-            <a:ext cx="625813" cy="365125"/>
+            <a:off x="8610600" y="6356350"/>
+            <a:ext cx="2743200" cy="365125"/>
           </a:xfrm>
           <a:prstGeom prst="rect">
             <a:avLst/>
@@ -5274,9 +3406,11 @@
           <a:bodyPr vert="horz" lIns="91440" tIns="45720" rIns="91440" bIns="45720" rtlCol="0" anchor="ctr"/>
           <a:lstStyle>
             <a:lvl1pPr algn="r">
-              <a:defRPr sz="1050">
+              <a:defRPr sz="1200">
                 <a:solidFill>
-                  <a:schemeClr val="tx1"/>
+                  <a:schemeClr val="tx1">
+                    <a:tint val="82000"/>
+                  </a:schemeClr>
                 </a:solidFill>
               </a:defRPr>
             </a:lvl1pPr>
@@ -5294,35 +3428,35 @@
     </p:spTree>
     <p:extLst>
       <p:ext uri="{BB962C8B-B14F-4D97-AF65-F5344CB8AC3E}">
-        <p14:creationId xmlns:p14="http://schemas.microsoft.com/office/powerpoint/2010/main" val="4256807758"/>
+        <p14:creationId xmlns:p14="http://schemas.microsoft.com/office/powerpoint/2010/main" val="445640901"/>
       </p:ext>
     </p:extLst>
   </p:cSld>
-  <p:clrMap bg1="dk1" tx1="lt1" bg2="dk2" tx2="lt2" accent1="accent1" accent2="accent2" accent3="accent3" accent4="accent4" accent5="accent5" accent6="accent6" hlink="hlink" folHlink="folHlink"/>
+  <p:clrMap bg1="lt1" tx1="dk1" bg2="lt2" tx2="dk2" accent1="accent1" accent2="accent2" accent3="accent3" accent4="accent4" accent5="accent5" accent6="accent6" hlink="hlink" folHlink="folHlink"/>
   <p:sldLayoutIdLst>
-    <p:sldLayoutId id="2147483809" r:id="rId1"/>
-    <p:sldLayoutId id="2147483810" r:id="rId2"/>
-    <p:sldLayoutId id="2147483811" r:id="rId3"/>
-    <p:sldLayoutId id="2147483812" r:id="rId4"/>
-    <p:sldLayoutId id="2147483813" r:id="rId5"/>
-    <p:sldLayoutId id="2147483807" r:id="rId6"/>
-    <p:sldLayoutId id="2147483803" r:id="rId7"/>
-    <p:sldLayoutId id="2147483804" r:id="rId8"/>
-    <p:sldLayoutId id="2147483805" r:id="rId9"/>
-    <p:sldLayoutId id="2147483806" r:id="rId10"/>
-    <p:sldLayoutId id="2147483808" r:id="rId11"/>
+    <p:sldLayoutId id="2147483816" r:id="rId1"/>
+    <p:sldLayoutId id="2147483817" r:id="rId2"/>
+    <p:sldLayoutId id="2147483818" r:id="rId3"/>
+    <p:sldLayoutId id="2147483819" r:id="rId4"/>
+    <p:sldLayoutId id="2147483820" r:id="rId5"/>
+    <p:sldLayoutId id="2147483821" r:id="rId6"/>
+    <p:sldLayoutId id="2147483822" r:id="rId7"/>
+    <p:sldLayoutId id="2147483823" r:id="rId8"/>
+    <p:sldLayoutId id="2147483824" r:id="rId9"/>
+    <p:sldLayoutId id="2147483825" r:id="rId10"/>
+    <p:sldLayoutId id="2147483826" r:id="rId11"/>
   </p:sldLayoutIdLst>
   <p:txStyles>
     <p:titleStyle>
       <a:lvl1pPr algn="l" defTabSz="914400" rtl="0" eaLnBrk="1" latinLnBrk="0" hangingPunct="1">
         <a:lnSpc>
-          <a:spcPct val="100000"/>
+          <a:spcPct val="90000"/>
         </a:lnSpc>
         <a:spcBef>
           <a:spcPct val="0"/>
         </a:spcBef>
         <a:buNone/>
-        <a:defRPr sz="4000" kern="1200">
+        <a:defRPr sz="4400" kern="1200">
           <a:solidFill>
             <a:schemeClr val="tx1"/>
           </a:solidFill>
@@ -5335,10 +3469,46 @@
     <p:bodyStyle>
       <a:lvl1pPr marL="228600" indent="-228600" algn="l" defTabSz="914400" rtl="0" eaLnBrk="1" latinLnBrk="0" hangingPunct="1">
         <a:lnSpc>
-          <a:spcPct val="120000"/>
+          <a:spcPct val="90000"/>
         </a:lnSpc>
         <a:spcBef>
           <a:spcPts val="1000"/>
+        </a:spcBef>
+        <a:buFont typeface="Arial" panose="020B0604020202020204" pitchFamily="34" charset="0"/>
+        <a:buChar char="•"/>
+        <a:defRPr sz="2800" kern="1200">
+          <a:solidFill>
+            <a:schemeClr val="tx1"/>
+          </a:solidFill>
+          <a:latin typeface="+mn-lt"/>
+          <a:ea typeface="+mn-ea"/>
+          <a:cs typeface="+mn-cs"/>
+        </a:defRPr>
+      </a:lvl1pPr>
+      <a:lvl2pPr marL="685800" indent="-228600" algn="l" defTabSz="914400" rtl="0" eaLnBrk="1" latinLnBrk="0" hangingPunct="1">
+        <a:lnSpc>
+          <a:spcPct val="90000"/>
+        </a:lnSpc>
+        <a:spcBef>
+          <a:spcPts val="500"/>
+        </a:spcBef>
+        <a:buFont typeface="Arial" panose="020B0604020202020204" pitchFamily="34" charset="0"/>
+        <a:buChar char="•"/>
+        <a:defRPr sz="2400" kern="1200">
+          <a:solidFill>
+            <a:schemeClr val="tx1"/>
+          </a:solidFill>
+          <a:latin typeface="+mn-lt"/>
+          <a:ea typeface="+mn-ea"/>
+          <a:cs typeface="+mn-cs"/>
+        </a:defRPr>
+      </a:lvl2pPr>
+      <a:lvl3pPr marL="1143000" indent="-228600" algn="l" defTabSz="914400" rtl="0" eaLnBrk="1" latinLnBrk="0" hangingPunct="1">
+        <a:lnSpc>
+          <a:spcPct val="90000"/>
+        </a:lnSpc>
+        <a:spcBef>
+          <a:spcPts val="500"/>
         </a:spcBef>
         <a:buFont typeface="Arial" panose="020B0604020202020204" pitchFamily="34" charset="0"/>
         <a:buChar char="•"/>
@@ -5350,53 +3520,17 @@
           <a:ea typeface="+mn-ea"/>
           <a:cs typeface="+mn-cs"/>
         </a:defRPr>
-      </a:lvl1pPr>
-      <a:lvl2pPr marL="228600" indent="0" algn="l" defTabSz="914400" rtl="0" eaLnBrk="1" latinLnBrk="0" hangingPunct="1">
+      </a:lvl3pPr>
+      <a:lvl4pPr marL="1600200" indent="-228600" algn="l" defTabSz="914400" rtl="0" eaLnBrk="1" latinLnBrk="0" hangingPunct="1">
         <a:lnSpc>
-          <a:spcPct val="120000"/>
-        </a:lnSpc>
-        <a:spcBef>
-          <a:spcPts val="500"/>
-        </a:spcBef>
-        <a:buFontTx/>
-        <a:buNone/>
-        <a:defRPr sz="1800" i="1" kern="1200">
-          <a:solidFill>
-            <a:schemeClr val="tx1"/>
-          </a:solidFill>
-          <a:latin typeface="+mn-lt"/>
-          <a:ea typeface="+mn-ea"/>
-          <a:cs typeface="+mn-cs"/>
-        </a:defRPr>
-      </a:lvl2pPr>
-      <a:lvl3pPr marL="457200" indent="-228600" algn="l" defTabSz="914400" rtl="0" eaLnBrk="1" latinLnBrk="0" hangingPunct="1">
-        <a:lnSpc>
-          <a:spcPct val="120000"/>
+          <a:spcPct val="90000"/>
         </a:lnSpc>
         <a:spcBef>
           <a:spcPts val="500"/>
         </a:spcBef>
         <a:buFont typeface="Arial" panose="020B0604020202020204" pitchFamily="34" charset="0"/>
         <a:buChar char="•"/>
-        <a:defRPr sz="1600" kern="1200">
-          <a:solidFill>
-            <a:schemeClr val="tx1"/>
-          </a:solidFill>
-          <a:latin typeface="+mn-lt"/>
-          <a:ea typeface="+mn-ea"/>
-          <a:cs typeface="+mn-cs"/>
-        </a:defRPr>
-      </a:lvl3pPr>
-      <a:lvl4pPr marL="502920" indent="0" algn="l" defTabSz="914400" rtl="0" eaLnBrk="1" latinLnBrk="0" hangingPunct="1">
-        <a:lnSpc>
-          <a:spcPct val="120000"/>
-        </a:lnSpc>
-        <a:spcBef>
-          <a:spcPts val="500"/>
-        </a:spcBef>
-        <a:buFontTx/>
-        <a:buNone/>
-        <a:defRPr sz="1400" i="1" kern="1200">
+        <a:defRPr sz="1800" kern="1200">
           <a:solidFill>
             <a:schemeClr val="tx1"/>
           </a:solidFill>
@@ -5405,16 +3539,16 @@
           <a:cs typeface="+mn-cs"/>
         </a:defRPr>
       </a:lvl4pPr>
-      <a:lvl5pPr marL="731520" indent="-228600" algn="l" defTabSz="914400" rtl="0" eaLnBrk="1" latinLnBrk="0" hangingPunct="1">
+      <a:lvl5pPr marL="2057400" indent="-228600" algn="l" defTabSz="914400" rtl="0" eaLnBrk="1" latinLnBrk="0" hangingPunct="1">
         <a:lnSpc>
-          <a:spcPct val="120000"/>
+          <a:spcPct val="90000"/>
         </a:lnSpc>
         <a:spcBef>
           <a:spcPts val="500"/>
         </a:spcBef>
         <a:buFont typeface="Arial" panose="020B0604020202020204" pitchFamily="34" charset="0"/>
         <a:buChar char="•"/>
-        <a:defRPr sz="1400" kern="1200">
+        <a:defRPr sz="1800" kern="1200">
           <a:solidFill>
             <a:schemeClr val="tx1"/>
           </a:solidFill>
@@ -5598,6 +3732,14 @@
 <file path=ppt/slides/slide1.xml><?xml version="1.0" encoding="utf-8"?>
 <p:sld xmlns:a="http://schemas.openxmlformats.org/drawingml/2006/main" xmlns:r="http://schemas.openxmlformats.org/officeDocument/2006/relationships" xmlns:p="http://schemas.openxmlformats.org/presentationml/2006/main">
   <p:cSld>
+    <p:bg>
+      <p:bgPr>
+        <a:solidFill>
+          <a:schemeClr val="bg1"/>
+        </a:solidFill>
+        <a:effectLst/>
+      </p:bgPr>
+    </p:bg>
     <p:spTree>
       <p:nvGrpSpPr>
         <p:cNvPr id="1" name=""/>
@@ -5612,104 +3754,329 @@
           <a:chExt cx="0" cy="0"/>
         </a:xfrm>
       </p:grpSpPr>
-      <p:sp>
-        <p:nvSpPr>
-          <p:cNvPr id="2" name="Title 1">
-            <a:extLst>
-              <a:ext uri="{FF2B5EF4-FFF2-40B4-BE49-F238E27FC236}">
-                <a16:creationId xmlns:a16="http://schemas.microsoft.com/office/drawing/2014/main" id="{6C54540B-39E7-E433-3F31-0631A8AB4919}"/>
-              </a:ext>
-            </a:extLst>
-          </p:cNvPr>
-          <p:cNvSpPr>
-            <a:spLocks noGrp="1"/>
-          </p:cNvSpPr>
-          <p:nvPr>
-            <p:ph type="ctrTitle"/>
+      <p:sp useBgFill="1">
+        <p:nvSpPr>
+          <p:cNvPr id="8" name="Rectangle 7">
+            <a:extLst>
+              <a:ext uri="{FF2B5EF4-FFF2-40B4-BE49-F238E27FC236}">
+                <a16:creationId xmlns:a16="http://schemas.microsoft.com/office/drawing/2014/main" id="{4522B21E-B2B9-4C72-9A71-C87EFD137480}"/>
+              </a:ext>
+              <a:ext uri="{C183D7F6-B498-43B3-948B-1728B52AA6E4}">
+                <adec:decorative xmlns:adec="http://schemas.microsoft.com/office/drawing/2017/decorative" val="1"/>
+              </a:ext>
+            </a:extLst>
+          </p:cNvPr>
+          <p:cNvSpPr>
+            <a:spLocks noGrp="1" noRot="1" noChangeAspect="1" noMove="1" noResize="1" noEditPoints="1" noAdjustHandles="1" noChangeArrowheads="1" noChangeShapeType="1" noTextEdit="1"/>
+          </p:cNvSpPr>
+          <p:nvPr>
+            <p:extLst>
+              <p:ext uri="{386F3935-93C4-4BCD-93E2-E3B085C9AB24}">
+                <p16:designElem xmlns:p16="http://schemas.microsoft.com/office/powerpoint/2015/main" val="1"/>
+              </p:ext>
+            </p:extLst>
           </p:nvPr>
         </p:nvSpPr>
         <p:spPr>
           <a:xfrm>
-            <a:off x="2334438" y="635165"/>
-            <a:ext cx="7066933" cy="1060364"/>
+            <a:off x="0" y="0"/>
+            <a:ext cx="12191999" cy="6857365"/>
+          </a:xfrm>
+          <a:prstGeom prst="rect">
+            <a:avLst/>
+          </a:prstGeom>
+          <a:ln>
+            <a:noFill/>
+          </a:ln>
+        </p:spPr>
+        <p:style>
+          <a:lnRef idx="2">
+            <a:schemeClr val="accent1">
+              <a:shade val="50000"/>
+            </a:schemeClr>
+          </a:lnRef>
+          <a:fillRef idx="1">
+            <a:schemeClr val="accent1"/>
+          </a:fillRef>
+          <a:effectRef idx="0">
+            <a:schemeClr val="accent1"/>
+          </a:effectRef>
+          <a:fontRef idx="minor">
+            <a:schemeClr val="lt1"/>
+          </a:fontRef>
+        </p:style>
+        <p:txBody>
+          <a:bodyPr rtlCol="0" anchor="ctr"/>
+          <a:lstStyle/>
+          <a:p>
+            <a:pPr algn="ctr"/>
+            <a:endParaRPr lang="en-US"/>
+          </a:p>
+        </p:txBody>
+      </p:sp>
+      <p:sp>
+        <p:nvSpPr>
+          <p:cNvPr id="10" name="Rectangle 9">
+            <a:extLst>
+              <a:ext uri="{FF2B5EF4-FFF2-40B4-BE49-F238E27FC236}">
+                <a16:creationId xmlns:a16="http://schemas.microsoft.com/office/drawing/2014/main" id="{5EB7D2A2-F448-44D4-938C-DC84CBCB3B1E}"/>
+              </a:ext>
+              <a:ext uri="{C183D7F6-B498-43B3-948B-1728B52AA6E4}">
+                <adec:decorative xmlns:adec="http://schemas.microsoft.com/office/drawing/2017/decorative" val="1"/>
+              </a:ext>
+            </a:extLst>
+          </p:cNvPr>
+          <p:cNvSpPr>
+            <a:spLocks noGrp="1" noRot="1" noChangeAspect="1" noMove="1" noResize="1" noEditPoints="1" noAdjustHandles="1" noChangeArrowheads="1" noChangeShapeType="1" noTextEdit="1"/>
+          </p:cNvSpPr>
+          <p:nvPr>
+            <p:extLst>
+              <p:ext uri="{386F3935-93C4-4BCD-93E2-E3B085C9AB24}">
+                <p16:designElem xmlns:p16="http://schemas.microsoft.com/office/powerpoint/2015/main" val="1"/>
+              </p:ext>
+            </p:extLst>
+          </p:nvPr>
+        </p:nvSpPr>
+        <p:spPr>
+          <a:xfrm>
+            <a:off x="0" y="2"/>
+            <a:ext cx="12192000" cy="4412583"/>
+          </a:xfrm>
+          <a:prstGeom prst="rect">
+            <a:avLst/>
+          </a:prstGeom>
+          <a:solidFill>
+            <a:schemeClr val="accent4"/>
+          </a:solidFill>
+          <a:ln>
+            <a:noFill/>
+          </a:ln>
+        </p:spPr>
+        <p:style>
+          <a:lnRef idx="2">
+            <a:schemeClr val="accent1">
+              <a:shade val="50000"/>
+            </a:schemeClr>
+          </a:lnRef>
+          <a:fillRef idx="1">
+            <a:schemeClr val="accent1"/>
+          </a:fillRef>
+          <a:effectRef idx="0">
+            <a:schemeClr val="accent1"/>
+          </a:effectRef>
+          <a:fontRef idx="minor">
+            <a:schemeClr val="lt1"/>
+          </a:fontRef>
+        </p:style>
+        <p:txBody>
+          <a:bodyPr rtlCol="0" anchor="ctr"/>
+          <a:lstStyle/>
+          <a:p>
+            <a:pPr algn="ctr"/>
+            <a:endParaRPr lang="en-US" dirty="0"/>
+          </a:p>
+        </p:txBody>
+      </p:sp>
+      <p:sp>
+        <p:nvSpPr>
+          <p:cNvPr id="12" name="Rectangle 11">
+            <a:extLst>
+              <a:ext uri="{FF2B5EF4-FFF2-40B4-BE49-F238E27FC236}">
+                <a16:creationId xmlns:a16="http://schemas.microsoft.com/office/drawing/2014/main" id="{871AEA07-1E14-44B4-8E55-64EF049CD66F}"/>
+              </a:ext>
+              <a:ext uri="{C183D7F6-B498-43B3-948B-1728B52AA6E4}">
+                <adec:decorative xmlns:adec="http://schemas.microsoft.com/office/drawing/2017/decorative" val="1"/>
+              </a:ext>
+            </a:extLst>
+          </p:cNvPr>
+          <p:cNvSpPr>
+            <a:spLocks noGrp="1" noRot="1" noChangeAspect="1" noMove="1" noResize="1" noEditPoints="1" noAdjustHandles="1" noChangeArrowheads="1" noChangeShapeType="1" noTextEdit="1"/>
+          </p:cNvSpPr>
+          <p:nvPr>
+            <p:extLst>
+              <p:ext uri="{386F3935-93C4-4BCD-93E2-E3B085C9AB24}">
+                <p16:designElem xmlns:p16="http://schemas.microsoft.com/office/powerpoint/2015/main" val="1"/>
+              </p:ext>
+            </p:extLst>
+          </p:nvPr>
+        </p:nvSpPr>
+        <p:spPr>
+          <a:xfrm>
+            <a:off x="596464" y="551962"/>
+            <a:ext cx="10999072" cy="4618549"/>
+          </a:xfrm>
+          <a:prstGeom prst="rect">
+            <a:avLst/>
+          </a:prstGeom>
+          <a:solidFill>
+            <a:schemeClr val="bg1"/>
+          </a:solidFill>
+          <a:ln>
+            <a:noFill/>
+          </a:ln>
+          <a:effectLst>
+            <a:outerShdw blurRad="139700" dist="127000" dir="5400000" algn="t" rotWithShape="0">
+              <a:prstClr val="black">
+                <a:alpha val="15000"/>
+              </a:prstClr>
+            </a:outerShdw>
+          </a:effectLst>
+        </p:spPr>
+        <p:style>
+          <a:lnRef idx="2">
+            <a:schemeClr val="accent1">
+              <a:shade val="50000"/>
+            </a:schemeClr>
+          </a:lnRef>
+          <a:fillRef idx="1">
+            <a:schemeClr val="accent1"/>
+          </a:fillRef>
+          <a:effectRef idx="0">
+            <a:schemeClr val="accent1"/>
+          </a:effectRef>
+          <a:fontRef idx="minor">
+            <a:schemeClr val="lt1"/>
+          </a:fontRef>
+        </p:style>
+        <p:txBody>
+          <a:bodyPr rtlCol="0" anchor="ctr"/>
+          <a:lstStyle/>
+          <a:p>
+            <a:pPr algn="ctr"/>
+            <a:endParaRPr lang="en-US"/>
+          </a:p>
+        </p:txBody>
+      </p:sp>
+      <p:sp>
+        <p:nvSpPr>
+          <p:cNvPr id="2" name="Title 1">
+            <a:extLst>
+              <a:ext uri="{FF2B5EF4-FFF2-40B4-BE49-F238E27FC236}">
+                <a16:creationId xmlns:a16="http://schemas.microsoft.com/office/drawing/2014/main" id="{EB058003-92CA-9A65-D93A-4A59BF937390}"/>
+              </a:ext>
+            </a:extLst>
+          </p:cNvPr>
+          <p:cNvSpPr>
+            <a:spLocks noGrp="1"/>
+          </p:cNvSpPr>
+          <p:nvPr>
+            <p:ph type="ctrTitle"/>
+          </p:nvPr>
+        </p:nvSpPr>
+        <p:spPr>
+          <a:xfrm>
+            <a:off x="1524000" y="1086092"/>
+            <a:ext cx="9144000" cy="1202794"/>
           </a:xfrm>
         </p:spPr>
         <p:txBody>
-          <a:bodyPr>
-            <a:normAutofit fontScale="90000"/>
+          <a:bodyPr anchor="ctr">
+            <a:normAutofit/>
           </a:bodyPr>
           <a:lstStyle/>
           <a:p>
-            <a:pPr algn="ctr"/>
-            <a:r>
-              <a:rPr lang="en-US" dirty="0"/>
+            <a:r>
+              <a:rPr lang="en-US" sz="7200" dirty="0"/>
               <a:t>Security vs. Speed: </a:t>
             </a:r>
-            <a:br>
-              <a:rPr lang="en-US" dirty="0"/>
-            </a:br>
-            <a:endParaRPr lang="en-US" dirty="0"/>
-          </a:p>
-        </p:txBody>
-      </p:sp>
-      <p:sp>
-        <p:nvSpPr>
-          <p:cNvPr id="3" name="Subtitle 2">
-            <a:extLst>
-              <a:ext uri="{FF2B5EF4-FFF2-40B4-BE49-F238E27FC236}">
-                <a16:creationId xmlns:a16="http://schemas.microsoft.com/office/drawing/2014/main" id="{72C7D5B6-BC99-9EE0-AEF1-1411FD8A43B9}"/>
-              </a:ext>
-            </a:extLst>
-          </p:cNvPr>
-          <p:cNvSpPr>
-            <a:spLocks noGrp="1"/>
-          </p:cNvSpPr>
-          <p:nvPr>
-            <p:ph type="subTitle" idx="1"/>
-          </p:nvPr>
+          </a:p>
+        </p:txBody>
+      </p:sp>
+      <p:cxnSp>
+        <p:nvCxnSpPr>
+          <p:cNvPr id="14" name="Straight Connector 13">
+            <a:extLst>
+              <a:ext uri="{FF2B5EF4-FFF2-40B4-BE49-F238E27FC236}">
+                <a16:creationId xmlns:a16="http://schemas.microsoft.com/office/drawing/2014/main" id="{F7C8EA93-3210-4C62-99E9-153C275E3A87}"/>
+              </a:ext>
+              <a:ext uri="{C183D7F6-B498-43B3-948B-1728B52AA6E4}">
+                <adec:decorative xmlns:adec="http://schemas.microsoft.com/office/drawing/2017/decorative" val="1"/>
+              </a:ext>
+            </a:extLst>
+          </p:cNvPr>
+          <p:cNvCxnSpPr>
+            <a:cxnSpLocks noGrp="1" noRot="1" noChangeAspect="1" noMove="1" noResize="1" noEditPoints="1" noAdjustHandles="1" noChangeArrowheads="1" noChangeShapeType="1"/>
+          </p:cNvCxnSpPr>
+          <p:nvPr>
+            <p:extLst>
+              <p:ext uri="{386F3935-93C4-4BCD-93E2-E3B085C9AB24}">
+                <p16:designElem xmlns:p16="http://schemas.microsoft.com/office/powerpoint/2015/main" val="1"/>
+              </p:ext>
+            </p:extLst>
+          </p:nvPr>
+        </p:nvCxnSpPr>
+        <p:spPr>
+          <a:xfrm flipH="1">
+            <a:off x="596464" y="6354708"/>
+            <a:ext cx="11000232" cy="0"/>
+          </a:xfrm>
+          <a:prstGeom prst="line">
+            <a:avLst/>
+          </a:prstGeom>
+          <a:ln w="101600">
+            <a:solidFill>
+              <a:schemeClr val="accent4"/>
+            </a:solidFill>
+          </a:ln>
+        </p:spPr>
+        <p:style>
+          <a:lnRef idx="1">
+            <a:schemeClr val="accent1"/>
+          </a:lnRef>
+          <a:fillRef idx="0">
+            <a:schemeClr val="accent1"/>
+          </a:fillRef>
+          <a:effectRef idx="0">
+            <a:schemeClr val="accent1"/>
+          </a:effectRef>
+          <a:fontRef idx="minor">
+            <a:schemeClr val="tx1"/>
+          </a:fontRef>
+        </p:style>
+      </p:cxnSp>
+      <p:sp>
+        <p:nvSpPr>
+          <p:cNvPr id="4" name="TextBox 3">
+            <a:extLst>
+              <a:ext uri="{FF2B5EF4-FFF2-40B4-BE49-F238E27FC236}">
+                <a16:creationId xmlns:a16="http://schemas.microsoft.com/office/drawing/2014/main" id="{EC4085F2-62A1-F12C-96F1-D60030578151}"/>
+              </a:ext>
+            </a:extLst>
+          </p:cNvPr>
+          <p:cNvSpPr txBox="1"/>
+          <p:nvPr/>
         </p:nvSpPr>
         <p:spPr>
           <a:xfrm>
-            <a:off x="3938429" y="5572524"/>
-            <a:ext cx="3858950" cy="650311"/>
+            <a:off x="2944173" y="2480874"/>
+            <a:ext cx="6049574" cy="400110"/>
           </a:xfrm>
+          <a:prstGeom prst="rect">
+            <a:avLst/>
+          </a:prstGeom>
+          <a:noFill/>
         </p:spPr>
         <p:txBody>
-          <a:bodyPr>
-            <a:normAutofit fontScale="85000" lnSpcReduction="10000"/>
+          <a:bodyPr wrap="square" rtlCol="0">
+            <a:spAutoFit/>
           </a:bodyPr>
           <a:lstStyle/>
           <a:p>
             <a:pPr algn="ctr"/>
             <a:r>
-              <a:rPr lang="en-US" dirty="0">
-                <a:solidFill>
-                  <a:srgbClr val="FFFFFF"/>
-                </a:solidFill>
-              </a:rPr>
-              <a:t>Course: CMSC-4200-AI</a:t>
-            </a:r>
-          </a:p>
-          <a:p>
-            <a:pPr algn="ctr"/>
-            <a:r>
-              <a:rPr lang="en-US" dirty="0">
-                <a:solidFill>
-                  <a:srgbClr val="FFFFFF"/>
-                </a:solidFill>
-              </a:rPr>
-              <a:t>School: Pennsylvania Western University</a:t>
-            </a:r>
-            <a:endParaRPr lang="en-US" dirty="0"/>
-          </a:p>
-        </p:txBody>
-      </p:sp>
-      <p:sp>
-        <p:nvSpPr>
-          <p:cNvPr id="4" name="Subtitle 2">
-            <a:extLst>
-              <a:ext uri="{FF2B5EF4-FFF2-40B4-BE49-F238E27FC236}">
-                <a16:creationId xmlns:a16="http://schemas.microsoft.com/office/drawing/2014/main" id="{FA37160E-D768-0363-F78A-E96D16D8D2AC}"/>
+              <a:rPr lang="en-US" sz="2000" i="1" dirty="0"/>
+              <a:t>Evaluating AI in Time-Constrained Encryption</a:t>
+            </a:r>
+            <a:endParaRPr lang="en-US" sz="2000" dirty="0"/>
+          </a:p>
+        </p:txBody>
+      </p:sp>
+      <p:sp>
+        <p:nvSpPr>
+          <p:cNvPr id="5" name="Subtitle 2">
+            <a:extLst>
+              <a:ext uri="{FF2B5EF4-FFF2-40B4-BE49-F238E27FC236}">
+                <a16:creationId xmlns:a16="http://schemas.microsoft.com/office/drawing/2014/main" id="{156952BD-893C-199E-232A-50EA1C89FCC0}"/>
               </a:ext>
             </a:extLst>
           </p:cNvPr>
@@ -5720,7 +4087,7 @@
         </p:nvSpPr>
         <p:spPr>
           <a:xfrm>
-            <a:off x="4895976" y="3429000"/>
+            <a:off x="4997032" y="3396866"/>
             <a:ext cx="1943856" cy="1296944"/>
           </a:xfrm>
           <a:prstGeom prst="rect">
@@ -5942,45 +4309,1944 @@
       </p:sp>
       <p:sp>
         <p:nvSpPr>
-          <p:cNvPr id="5" name="TextBox 4">
-            <a:extLst>
-              <a:ext uri="{FF2B5EF4-FFF2-40B4-BE49-F238E27FC236}">
-                <a16:creationId xmlns:a16="http://schemas.microsoft.com/office/drawing/2014/main" id="{8BF439D6-F7CF-A350-5DF6-75966FE53A03}"/>
-              </a:ext>
-            </a:extLst>
-          </p:cNvPr>
-          <p:cNvSpPr txBox="1"/>
-          <p:nvPr/>
+          <p:cNvPr id="6" name="Subtitle 2">
+            <a:extLst>
+              <a:ext uri="{FF2B5EF4-FFF2-40B4-BE49-F238E27FC236}">
+                <a16:creationId xmlns:a16="http://schemas.microsoft.com/office/drawing/2014/main" id="{F1DF5240-130E-D309-6941-B5CD12887932}"/>
+              </a:ext>
+            </a:extLst>
+          </p:cNvPr>
+          <p:cNvSpPr>
+            <a:spLocks noGrp="1"/>
+          </p:cNvSpPr>
+          <p:nvPr>
+            <p:ph type="subTitle" idx="1"/>
+          </p:nvPr>
         </p:nvSpPr>
         <p:spPr>
           <a:xfrm>
-            <a:off x="3071213" y="2346587"/>
-            <a:ext cx="6049574" cy="400110"/>
+            <a:off x="1524000" y="5513388"/>
+            <a:ext cx="9144000" cy="652462"/>
+          </a:xfrm>
+        </p:spPr>
+        <p:txBody>
+          <a:bodyPr>
+            <a:normAutofit fontScale="77500" lnSpcReduction="20000"/>
+          </a:bodyPr>
+          <a:lstStyle/>
+          <a:p>
+            <a:pPr algn="ctr"/>
+            <a:r>
+              <a:rPr lang="en-US" dirty="0">
+                <a:solidFill>
+                  <a:srgbClr val="FFFFFF"/>
+                </a:solidFill>
+              </a:rPr>
+              <a:t>Course: CMSC-4200-AI</a:t>
+            </a:r>
+          </a:p>
+          <a:p>
+            <a:pPr algn="ctr"/>
+            <a:r>
+              <a:rPr lang="en-US" dirty="0"/>
+              <a:t> Pennsylvania Western University- Spring 2026</a:t>
+            </a:r>
+          </a:p>
+        </p:txBody>
+      </p:sp>
+    </p:spTree>
+    <p:extLst>
+      <p:ext uri="{BB962C8B-B14F-4D97-AF65-F5344CB8AC3E}">
+        <p14:creationId xmlns:p14="http://schemas.microsoft.com/office/powerpoint/2010/main" val="2144603681"/>
+      </p:ext>
+    </p:extLst>
+  </p:cSld>
+  <p:clrMapOvr>
+    <a:masterClrMapping/>
+  </p:clrMapOvr>
+</p:sld>
+</file>
+
+<file path=ppt/slides/slide10.xml><?xml version="1.0" encoding="utf-8"?>
+<p:sld xmlns:a="http://schemas.openxmlformats.org/drawingml/2006/main" xmlns:r="http://schemas.openxmlformats.org/officeDocument/2006/relationships" xmlns:p="http://schemas.openxmlformats.org/presentationml/2006/main">
+  <p:cSld>
+    <p:spTree>
+      <p:nvGrpSpPr>
+        <p:cNvPr id="1" name=""/>
+        <p:cNvGrpSpPr/>
+        <p:nvPr/>
+      </p:nvGrpSpPr>
+      <p:grpSpPr>
+        <a:xfrm>
+          <a:off x="0" y="0"/>
+          <a:ext cx="0" cy="0"/>
+          <a:chOff x="0" y="0"/>
+          <a:chExt cx="0" cy="0"/>
+        </a:xfrm>
+      </p:grpSpPr>
+      <p:sp>
+        <p:nvSpPr>
+          <p:cNvPr id="2" name="Title 1">
+            <a:extLst>
+              <a:ext uri="{FF2B5EF4-FFF2-40B4-BE49-F238E27FC236}">
+                <a16:creationId xmlns:a16="http://schemas.microsoft.com/office/drawing/2014/main" id="{45E01E8D-68C8-D6F0-81C8-63C5F69745F8}"/>
+              </a:ext>
+            </a:extLst>
+          </p:cNvPr>
+          <p:cNvSpPr>
+            <a:spLocks noGrp="1"/>
+          </p:cNvSpPr>
+          <p:nvPr>
+            <p:ph type="title"/>
+          </p:nvPr>
+        </p:nvSpPr>
+        <p:spPr/>
+        <p:txBody>
+          <a:bodyPr/>
+          <a:lstStyle/>
+          <a:p>
+            <a:r>
+              <a:rPr lang="en-US" dirty="0"/>
+              <a:t>Recommendations</a:t>
+            </a:r>
+          </a:p>
+        </p:txBody>
+      </p:sp>
+      <p:sp>
+        <p:nvSpPr>
+          <p:cNvPr id="3" name="Content Placeholder 2">
+            <a:extLst>
+              <a:ext uri="{FF2B5EF4-FFF2-40B4-BE49-F238E27FC236}">
+                <a16:creationId xmlns:a16="http://schemas.microsoft.com/office/drawing/2014/main" id="{1432174E-B03B-5BA6-1C84-A4132D40EE4A}"/>
+              </a:ext>
+            </a:extLst>
+          </p:cNvPr>
+          <p:cNvSpPr>
+            <a:spLocks noGrp="1"/>
+          </p:cNvSpPr>
+          <p:nvPr>
+            <p:ph idx="1"/>
+          </p:nvPr>
+        </p:nvSpPr>
+        <p:spPr/>
+        <p:txBody>
+          <a:bodyPr/>
+          <a:lstStyle/>
+          <a:p>
+            <a:endParaRPr lang="en-US"/>
+          </a:p>
+        </p:txBody>
+      </p:sp>
+    </p:spTree>
+    <p:extLst>
+      <p:ext uri="{BB962C8B-B14F-4D97-AF65-F5344CB8AC3E}">
+        <p14:creationId xmlns:p14="http://schemas.microsoft.com/office/powerpoint/2010/main" val="4119443303"/>
+      </p:ext>
+    </p:extLst>
+  </p:cSld>
+  <p:clrMapOvr>
+    <a:masterClrMapping/>
+  </p:clrMapOvr>
+</p:sld>
+</file>
+
+<file path=ppt/slides/slide11.xml><?xml version="1.0" encoding="utf-8"?>
+<p:sld xmlns:a="http://schemas.openxmlformats.org/drawingml/2006/main" xmlns:r="http://schemas.openxmlformats.org/officeDocument/2006/relationships" xmlns:p="http://schemas.openxmlformats.org/presentationml/2006/main">
+  <p:cSld>
+    <p:spTree>
+      <p:nvGrpSpPr>
+        <p:cNvPr id="1" name=""/>
+        <p:cNvGrpSpPr/>
+        <p:nvPr/>
+      </p:nvGrpSpPr>
+      <p:grpSpPr>
+        <a:xfrm>
+          <a:off x="0" y="0"/>
+          <a:ext cx="0" cy="0"/>
+          <a:chOff x="0" y="0"/>
+          <a:chExt cx="0" cy="0"/>
+        </a:xfrm>
+      </p:grpSpPr>
+      <p:sp>
+        <p:nvSpPr>
+          <p:cNvPr id="2" name="Title 1">
+            <a:extLst>
+              <a:ext uri="{FF2B5EF4-FFF2-40B4-BE49-F238E27FC236}">
+                <a16:creationId xmlns:a16="http://schemas.microsoft.com/office/drawing/2014/main" id="{8F6BC2BD-D5AB-40B6-2E42-FE395BB94CFD}"/>
+              </a:ext>
+            </a:extLst>
+          </p:cNvPr>
+          <p:cNvSpPr>
+            <a:spLocks noGrp="1"/>
+          </p:cNvSpPr>
+          <p:nvPr>
+            <p:ph type="title"/>
+          </p:nvPr>
+        </p:nvSpPr>
+        <p:spPr/>
+        <p:txBody>
+          <a:bodyPr/>
+          <a:lstStyle/>
+          <a:p>
+            <a:r>
+              <a:rPr lang="en-US" dirty="0"/>
+              <a:t>Conclusion</a:t>
+            </a:r>
+          </a:p>
+        </p:txBody>
+      </p:sp>
+      <p:sp>
+        <p:nvSpPr>
+          <p:cNvPr id="3" name="Content Placeholder 2">
+            <a:extLst>
+              <a:ext uri="{FF2B5EF4-FFF2-40B4-BE49-F238E27FC236}">
+                <a16:creationId xmlns:a16="http://schemas.microsoft.com/office/drawing/2014/main" id="{01753B54-4189-67D7-E701-C4A7EDD0EF6C}"/>
+              </a:ext>
+            </a:extLst>
+          </p:cNvPr>
+          <p:cNvSpPr>
+            <a:spLocks noGrp="1"/>
+          </p:cNvSpPr>
+          <p:nvPr>
+            <p:ph idx="1"/>
+          </p:nvPr>
+        </p:nvSpPr>
+        <p:spPr/>
+        <p:txBody>
+          <a:bodyPr/>
+          <a:lstStyle/>
+          <a:p>
+            <a:endParaRPr lang="en-US"/>
+          </a:p>
+        </p:txBody>
+      </p:sp>
+    </p:spTree>
+    <p:extLst>
+      <p:ext uri="{BB962C8B-B14F-4D97-AF65-F5344CB8AC3E}">
+        <p14:creationId xmlns:p14="http://schemas.microsoft.com/office/powerpoint/2010/main" val="472922610"/>
+      </p:ext>
+    </p:extLst>
+  </p:cSld>
+  <p:clrMapOvr>
+    <a:masterClrMapping/>
+  </p:clrMapOvr>
+</p:sld>
+</file>
+
+<file path=ppt/slides/slide2.xml><?xml version="1.0" encoding="utf-8"?>
+<p:sld xmlns:a="http://schemas.openxmlformats.org/drawingml/2006/main" xmlns:r="http://schemas.openxmlformats.org/officeDocument/2006/relationships" xmlns:p="http://schemas.openxmlformats.org/presentationml/2006/main">
+  <p:cSld>
+    <p:bg>
+      <p:bgPr>
+        <a:solidFill>
+          <a:schemeClr val="bg1"/>
+        </a:solidFill>
+        <a:effectLst/>
+      </p:bgPr>
+    </p:bg>
+    <p:spTree>
+      <p:nvGrpSpPr>
+        <p:cNvPr id="1" name=""/>
+        <p:cNvGrpSpPr/>
+        <p:nvPr/>
+      </p:nvGrpSpPr>
+      <p:grpSpPr>
+        <a:xfrm>
+          <a:off x="0" y="0"/>
+          <a:ext cx="0" cy="0"/>
+          <a:chOff x="0" y="0"/>
+          <a:chExt cx="0" cy="0"/>
+        </a:xfrm>
+      </p:grpSpPr>
+      <p:sp useBgFill="1">
+        <p:nvSpPr>
+          <p:cNvPr id="8" name="Rectangle 7">
+            <a:extLst>
+              <a:ext uri="{FF2B5EF4-FFF2-40B4-BE49-F238E27FC236}">
+                <a16:creationId xmlns:a16="http://schemas.microsoft.com/office/drawing/2014/main" id="{DBF61EA3-B236-439E-9C0B-340980D56BEE}"/>
+              </a:ext>
+              <a:ext uri="{C183D7F6-B498-43B3-948B-1728B52AA6E4}">
+                <adec:decorative xmlns:adec="http://schemas.microsoft.com/office/drawing/2017/decorative" val="1"/>
+              </a:ext>
+            </a:extLst>
+          </p:cNvPr>
+          <p:cNvSpPr>
+            <a:spLocks noGrp="1" noRot="1" noChangeAspect="1" noMove="1" noResize="1" noEditPoints="1" noAdjustHandles="1" noChangeArrowheads="1" noChangeShapeType="1" noTextEdit="1"/>
+          </p:cNvSpPr>
+          <p:nvPr>
+            <p:extLst>
+              <p:ext uri="{386F3935-93C4-4BCD-93E2-E3B085C9AB24}">
+                <p16:designElem xmlns:p16="http://schemas.microsoft.com/office/powerpoint/2015/main" val="1"/>
+              </p:ext>
+            </p:extLst>
+          </p:nvPr>
+        </p:nvSpPr>
+        <p:spPr>
+          <a:xfrm>
+            <a:off x="0" y="0"/>
+            <a:ext cx="12191999" cy="6857365"/>
           </a:xfrm>
           <a:prstGeom prst="rect">
             <a:avLst/>
           </a:prstGeom>
-          <a:noFill/>
+          <a:ln>
+            <a:noFill/>
+          </a:ln>
         </p:spPr>
-        <p:txBody>
-          <a:bodyPr wrap="square" rtlCol="0">
-            <a:spAutoFit/>
+        <p:style>
+          <a:lnRef idx="2">
+            <a:schemeClr val="accent1">
+              <a:shade val="50000"/>
+            </a:schemeClr>
+          </a:lnRef>
+          <a:fillRef idx="1">
+            <a:schemeClr val="accent1"/>
+          </a:fillRef>
+          <a:effectRef idx="0">
+            <a:schemeClr val="accent1"/>
+          </a:effectRef>
+          <a:fontRef idx="minor">
+            <a:schemeClr val="lt1"/>
+          </a:fontRef>
+        </p:style>
+        <p:txBody>
+          <a:bodyPr rtlCol="0" anchor="ctr"/>
+          <a:lstStyle/>
+          <a:p>
+            <a:pPr algn="ctr"/>
+            <a:endParaRPr lang="en-US"/>
+          </a:p>
+        </p:txBody>
+      </p:sp>
+      <p:sp>
+        <p:nvSpPr>
+          <p:cNvPr id="2" name="Title 1">
+            <a:extLst>
+              <a:ext uri="{FF2B5EF4-FFF2-40B4-BE49-F238E27FC236}">
+                <a16:creationId xmlns:a16="http://schemas.microsoft.com/office/drawing/2014/main" id="{00EA85E8-01FB-8E12-4E0B-4BEF5FD40E7E}"/>
+              </a:ext>
+            </a:extLst>
+          </p:cNvPr>
+          <p:cNvSpPr>
+            <a:spLocks noGrp="1"/>
+          </p:cNvSpPr>
+          <p:nvPr>
+            <p:ph type="title"/>
+          </p:nvPr>
+        </p:nvSpPr>
+        <p:spPr>
+          <a:xfrm>
+            <a:off x="808638" y="386930"/>
+            <a:ext cx="9236700" cy="1188950"/>
+          </a:xfrm>
+        </p:spPr>
+        <p:txBody>
+          <a:bodyPr anchor="b">
+            <a:normAutofit/>
           </a:bodyPr>
           <a:lstStyle/>
           <a:p>
+            <a:r>
+              <a:rPr lang="en-US" sz="5400"/>
+              <a:t>Project Description</a:t>
+            </a:r>
+          </a:p>
+        </p:txBody>
+      </p:sp>
+      <p:grpSp>
+        <p:nvGrpSpPr>
+          <p:cNvPr id="10" name="Group 9">
+            <a:extLst>
+              <a:ext uri="{FF2B5EF4-FFF2-40B4-BE49-F238E27FC236}">
+                <a16:creationId xmlns:a16="http://schemas.microsoft.com/office/drawing/2014/main" id="{28FAF094-D087-493F-8DF9-A486C2D6BBAA}"/>
+              </a:ext>
+              <a:ext uri="{C183D7F6-B498-43B3-948B-1728B52AA6E4}">
+                <adec:decorative xmlns:adec="http://schemas.microsoft.com/office/drawing/2017/decorative" val="1"/>
+              </a:ext>
+            </a:extLst>
+          </p:cNvPr>
+          <p:cNvGrpSpPr>
+            <a:grpSpLocks noGrp="1" noUngrp="1" noRot="1" noChangeAspect="1" noMove="1" noResize="1"/>
+          </p:cNvGrpSpPr>
+          <p:nvPr>
+            <p:extLst>
+              <p:ext uri="{386F3935-93C4-4BCD-93E2-E3B085C9AB24}">
+                <p16:designElem xmlns:p16="http://schemas.microsoft.com/office/powerpoint/2015/main" val="1"/>
+              </p:ext>
+            </p:extLst>
+          </p:nvPr>
+        </p:nvGrpSpPr>
+        <p:grpSpPr>
+          <a:xfrm>
+            <a:off x="-2" y="1998368"/>
+            <a:ext cx="11695083" cy="782176"/>
+            <a:chOff x="-2" y="1998368"/>
+            <a:chExt cx="11695083" cy="782176"/>
+          </a:xfrm>
+        </p:grpSpPr>
+        <p:sp>
+          <p:nvSpPr>
+            <p:cNvPr id="11" name="Rectangle 10">
+              <a:extLst>
+                <a:ext uri="{FF2B5EF4-FFF2-40B4-BE49-F238E27FC236}">
+                  <a16:creationId xmlns:a16="http://schemas.microsoft.com/office/drawing/2014/main" id="{8D7C88D8-5509-4514-925A-9CE148E5CBD6}"/>
+                </a:ext>
+                <a:ext uri="{C183D7F6-B498-43B3-948B-1728B52AA6E4}">
+                  <adec:decorative xmlns:adec="http://schemas.microsoft.com/office/drawing/2017/decorative" val="1"/>
+                </a:ext>
+              </a:extLst>
+            </p:cNvPr>
+            <p:cNvSpPr/>
+            <p:nvPr>
+              <p:extLst>
+                <p:ext uri="{386F3935-93C4-4BCD-93E2-E3B085C9AB24}">
+                  <p16:designElem xmlns:p16="http://schemas.microsoft.com/office/powerpoint/2015/main" val="1"/>
+                </p:ext>
+              </p:extLst>
+            </p:nvPr>
+          </p:nvSpPr>
+          <p:spPr>
+            <a:xfrm rot="5400000">
+              <a:off x="11228040" y="2313027"/>
+              <a:ext cx="781700" cy="152382"/>
+            </a:xfrm>
+            <a:prstGeom prst="rect">
+              <a:avLst/>
+            </a:prstGeom>
+            <a:solidFill>
+              <a:schemeClr val="accent4"/>
+            </a:solidFill>
+            <a:ln>
+              <a:noFill/>
+            </a:ln>
+          </p:spPr>
+          <p:style>
+            <a:lnRef idx="2">
+              <a:schemeClr val="accent1">
+                <a:shade val="50000"/>
+              </a:schemeClr>
+            </a:lnRef>
+            <a:fillRef idx="1">
+              <a:schemeClr val="accent1"/>
+            </a:fillRef>
+            <a:effectRef idx="0">
+              <a:schemeClr val="accent1"/>
+            </a:effectRef>
+            <a:fontRef idx="minor">
+              <a:schemeClr val="lt1"/>
+            </a:fontRef>
+          </p:style>
+          <p:txBody>
+            <a:bodyPr rtlCol="0" anchor="ctr"/>
+            <a:lstStyle/>
+            <a:p>
+              <a:pPr algn="ctr"/>
+              <a:endParaRPr lang="en-US"/>
+            </a:p>
+          </p:txBody>
+        </p:sp>
+        <p:sp>
+          <p:nvSpPr>
+            <p:cNvPr id="12" name="Rectangle 11">
+              <a:extLst>
+                <a:ext uri="{FF2B5EF4-FFF2-40B4-BE49-F238E27FC236}">
+                  <a16:creationId xmlns:a16="http://schemas.microsoft.com/office/drawing/2014/main" id="{7275593D-F75E-4426-AE3E-2CDEFD228D25}"/>
+                </a:ext>
+                <a:ext uri="{C183D7F6-B498-43B3-948B-1728B52AA6E4}">
+                  <adec:decorative xmlns:adec="http://schemas.microsoft.com/office/drawing/2017/decorative" val="1"/>
+                </a:ext>
+              </a:extLst>
+            </p:cNvPr>
+            <p:cNvSpPr/>
+            <p:nvPr>
+              <p:extLst>
+                <p:ext uri="{386F3935-93C4-4BCD-93E2-E3B085C9AB24}">
+                  <p16:designElem xmlns:p16="http://schemas.microsoft.com/office/powerpoint/2015/main" val="1"/>
+                </p:ext>
+              </p:extLst>
+            </p:nvPr>
+          </p:nvSpPr>
+          <p:spPr>
+            <a:xfrm flipH="1" flipV="1">
+              <a:off x="-2" y="1998845"/>
+              <a:ext cx="11454595" cy="781699"/>
+            </a:xfrm>
+            <a:prstGeom prst="rect">
+              <a:avLst/>
+            </a:prstGeom>
+            <a:solidFill>
+              <a:schemeClr val="accent4"/>
+            </a:solidFill>
+            <a:ln>
+              <a:noFill/>
+            </a:ln>
+          </p:spPr>
+          <p:style>
+            <a:lnRef idx="2">
+              <a:schemeClr val="accent1">
+                <a:shade val="50000"/>
+              </a:schemeClr>
+            </a:lnRef>
+            <a:fillRef idx="1">
+              <a:schemeClr val="accent1"/>
+            </a:fillRef>
+            <a:effectRef idx="0">
+              <a:schemeClr val="accent1"/>
+            </a:effectRef>
+            <a:fontRef idx="minor">
+              <a:schemeClr val="lt1"/>
+            </a:fontRef>
+          </p:style>
+          <p:txBody>
+            <a:bodyPr rtlCol="0" anchor="ctr"/>
+            <a:lstStyle/>
+            <a:p>
+              <a:pPr algn="ctr"/>
+              <a:endParaRPr lang="en-US"/>
+            </a:p>
+          </p:txBody>
+        </p:sp>
+      </p:grpSp>
+      <p:sp>
+        <p:nvSpPr>
+          <p:cNvPr id="14" name="Rectangle 13">
+            <a:extLst>
+              <a:ext uri="{FF2B5EF4-FFF2-40B4-BE49-F238E27FC236}">
+                <a16:creationId xmlns:a16="http://schemas.microsoft.com/office/drawing/2014/main" id="{E659831F-0D9A-4C63-9EBB-8435B85A440F}"/>
+              </a:ext>
+              <a:ext uri="{C183D7F6-B498-43B3-948B-1728B52AA6E4}">
+                <adec:decorative xmlns:adec="http://schemas.microsoft.com/office/drawing/2017/decorative" val="1"/>
+              </a:ext>
+            </a:extLst>
+          </p:cNvPr>
+          <p:cNvSpPr>
+            <a:spLocks noGrp="1" noRot="1" noChangeAspect="1" noMove="1" noResize="1" noEditPoints="1" noAdjustHandles="1" noChangeArrowheads="1" noChangeShapeType="1" noTextEdit="1"/>
+          </p:cNvSpPr>
+          <p:nvPr>
+            <p:extLst>
+              <p:ext uri="{386F3935-93C4-4BCD-93E2-E3B085C9AB24}">
+                <p16:designElem xmlns:p16="http://schemas.microsoft.com/office/powerpoint/2015/main" val="1"/>
+              </p:ext>
+            </p:extLst>
+          </p:nvPr>
+        </p:nvSpPr>
+        <p:spPr>
+          <a:xfrm>
+            <a:off x="0" y="2203079"/>
+            <a:ext cx="11383362" cy="4147845"/>
+          </a:xfrm>
+          <a:prstGeom prst="rect">
+            <a:avLst/>
+          </a:prstGeom>
+          <a:solidFill>
+            <a:schemeClr val="bg1"/>
+          </a:solidFill>
+          <a:ln>
+            <a:noFill/>
+          </a:ln>
+          <a:effectLst>
+            <a:outerShdw blurRad="139700" dist="127000" dir="5400000" algn="t" rotWithShape="0">
+              <a:prstClr val="black">
+                <a:alpha val="15000"/>
+              </a:prstClr>
+            </a:outerShdw>
+          </a:effectLst>
+        </p:spPr>
+        <p:style>
+          <a:lnRef idx="2">
+            <a:schemeClr val="accent1">
+              <a:shade val="50000"/>
+            </a:schemeClr>
+          </a:lnRef>
+          <a:fillRef idx="1">
+            <a:schemeClr val="accent1"/>
+          </a:fillRef>
+          <a:effectRef idx="0">
+            <a:schemeClr val="accent1"/>
+          </a:effectRef>
+          <a:fontRef idx="minor">
+            <a:schemeClr val="lt1"/>
+          </a:fontRef>
+        </p:style>
+        <p:txBody>
+          <a:bodyPr rtlCol="0" anchor="ctr"/>
+          <a:lstStyle/>
+          <a:p>
             <a:pPr algn="ctr"/>
-            <a:r>
-              <a:rPr lang="en-US" sz="2000" i="1" dirty="0"/>
-              <a:t>Evaluating AI in Time-Constrained Encryption</a:t>
-            </a:r>
-            <a:endParaRPr lang="en-US" sz="2000" dirty="0"/>
+            <a:endParaRPr lang="en-US"/>
+          </a:p>
+        </p:txBody>
+      </p:sp>
+      <p:sp>
+        <p:nvSpPr>
+          <p:cNvPr id="3" name="Content Placeholder 2">
+            <a:extLst>
+              <a:ext uri="{FF2B5EF4-FFF2-40B4-BE49-F238E27FC236}">
+                <a16:creationId xmlns:a16="http://schemas.microsoft.com/office/drawing/2014/main" id="{E2B4C7DE-8123-211E-1B65-93CCDA8F9A46}"/>
+              </a:ext>
+            </a:extLst>
+          </p:cNvPr>
+          <p:cNvSpPr>
+            <a:spLocks noGrp="1"/>
+          </p:cNvSpPr>
+          <p:nvPr>
+            <p:ph idx="1"/>
+          </p:nvPr>
+        </p:nvSpPr>
+        <p:spPr>
+          <a:xfrm>
+            <a:off x="793660" y="2599509"/>
+            <a:ext cx="10143668" cy="3435531"/>
+          </a:xfrm>
+        </p:spPr>
+        <p:txBody>
+          <a:bodyPr anchor="ctr">
+            <a:normAutofit/>
+          </a:bodyPr>
+          <a:lstStyle/>
+          <a:p>
+            <a:pPr marL="0" indent="0">
+              <a:buNone/>
+            </a:pPr>
+            <a:r>
+              <a:rPr lang="en-US" dirty="0"/>
+              <a:t>Is AI is capable of providing and designing encryption solutions when given a computational time constraint. </a:t>
+            </a:r>
+            <a:endParaRPr lang="en-US" sz="2400" dirty="0"/>
           </a:p>
         </p:txBody>
       </p:sp>
     </p:spTree>
     <p:extLst>
       <p:ext uri="{BB962C8B-B14F-4D97-AF65-F5344CB8AC3E}">
-        <p14:creationId xmlns:p14="http://schemas.microsoft.com/office/powerpoint/2010/main" val="798257210"/>
+        <p14:creationId xmlns:p14="http://schemas.microsoft.com/office/powerpoint/2010/main" val="2004418569"/>
+      </p:ext>
+    </p:extLst>
+  </p:cSld>
+  <p:clrMapOvr>
+    <a:masterClrMapping/>
+  </p:clrMapOvr>
+</p:sld>
+</file>
+
+<file path=ppt/slides/slide3.xml><?xml version="1.0" encoding="utf-8"?>
+<p:sld xmlns:a="http://schemas.openxmlformats.org/drawingml/2006/main" xmlns:r="http://schemas.openxmlformats.org/officeDocument/2006/relationships" xmlns:p="http://schemas.openxmlformats.org/presentationml/2006/main">
+  <p:cSld>
+    <p:bg>
+      <p:bgPr>
+        <a:solidFill>
+          <a:schemeClr val="bg1"/>
+        </a:solidFill>
+        <a:effectLst/>
+      </p:bgPr>
+    </p:bg>
+    <p:spTree>
+      <p:nvGrpSpPr>
+        <p:cNvPr id="1" name=""/>
+        <p:cNvGrpSpPr/>
+        <p:nvPr/>
+      </p:nvGrpSpPr>
+      <p:grpSpPr>
+        <a:xfrm>
+          <a:off x="0" y="0"/>
+          <a:ext cx="0" cy="0"/>
+          <a:chOff x="0" y="0"/>
+          <a:chExt cx="0" cy="0"/>
+        </a:xfrm>
+      </p:grpSpPr>
+      <p:sp useBgFill="1">
+        <p:nvSpPr>
+          <p:cNvPr id="8" name="Rectangle 7">
+            <a:extLst>
+              <a:ext uri="{FF2B5EF4-FFF2-40B4-BE49-F238E27FC236}">
+                <a16:creationId xmlns:a16="http://schemas.microsoft.com/office/drawing/2014/main" id="{B6CDA21F-E7AF-4C75-8395-33F58D5B0E45}"/>
+              </a:ext>
+              <a:ext uri="{C183D7F6-B498-43B3-948B-1728B52AA6E4}">
+                <adec:decorative xmlns:adec="http://schemas.microsoft.com/office/drawing/2017/decorative" val="1"/>
+              </a:ext>
+            </a:extLst>
+          </p:cNvPr>
+          <p:cNvSpPr>
+            <a:spLocks noGrp="1" noRot="1" noChangeAspect="1" noMove="1" noResize="1" noEditPoints="1" noAdjustHandles="1" noChangeArrowheads="1" noChangeShapeType="1" noTextEdit="1"/>
+          </p:cNvSpPr>
+          <p:nvPr>
+            <p:extLst>
+              <p:ext uri="{386F3935-93C4-4BCD-93E2-E3B085C9AB24}">
+                <p16:designElem xmlns:p16="http://schemas.microsoft.com/office/powerpoint/2015/main" val="1"/>
+              </p:ext>
+            </p:extLst>
+          </p:nvPr>
+        </p:nvSpPr>
+        <p:spPr>
+          <a:xfrm>
+            <a:off x="0" y="0"/>
+            <a:ext cx="12191999" cy="6857365"/>
+          </a:xfrm>
+          <a:prstGeom prst="rect">
+            <a:avLst/>
+          </a:prstGeom>
+          <a:ln>
+            <a:noFill/>
+          </a:ln>
+        </p:spPr>
+        <p:style>
+          <a:lnRef idx="2">
+            <a:schemeClr val="accent1">
+              <a:shade val="50000"/>
+            </a:schemeClr>
+          </a:lnRef>
+          <a:fillRef idx="1">
+            <a:schemeClr val="accent1"/>
+          </a:fillRef>
+          <a:effectRef idx="0">
+            <a:schemeClr val="accent1"/>
+          </a:effectRef>
+          <a:fontRef idx="minor">
+            <a:schemeClr val="lt1"/>
+          </a:fontRef>
+        </p:style>
+        <p:txBody>
+          <a:bodyPr rtlCol="0" anchor="ctr"/>
+          <a:lstStyle/>
+          <a:p>
+            <a:pPr algn="ctr"/>
+            <a:endParaRPr lang="en-US"/>
+          </a:p>
+        </p:txBody>
+      </p:sp>
+      <p:grpSp>
+        <p:nvGrpSpPr>
+          <p:cNvPr id="10" name="Group 9">
+            <a:extLst>
+              <a:ext uri="{FF2B5EF4-FFF2-40B4-BE49-F238E27FC236}">
+                <a16:creationId xmlns:a16="http://schemas.microsoft.com/office/drawing/2014/main" id="{AE1C45F0-260A-458C-96ED-C1F6D2151219}"/>
+              </a:ext>
+              <a:ext uri="{C183D7F6-B498-43B3-948B-1728B52AA6E4}">
+                <adec:decorative xmlns:adec="http://schemas.microsoft.com/office/drawing/2017/decorative" val="1"/>
+              </a:ext>
+            </a:extLst>
+          </p:cNvPr>
+          <p:cNvGrpSpPr>
+            <a:grpSpLocks noGrp="1" noUngrp="1" noRot="1" noChangeAspect="1" noMove="1" noResize="1"/>
+          </p:cNvGrpSpPr>
+          <p:nvPr>
+            <p:extLst>
+              <p:ext uri="{386F3935-93C4-4BCD-93E2-E3B085C9AB24}">
+                <p16:designElem xmlns:p16="http://schemas.microsoft.com/office/powerpoint/2015/main" val="1"/>
+              </p:ext>
+            </p:extLst>
+          </p:nvPr>
+        </p:nvGrpSpPr>
+        <p:grpSpPr>
+          <a:xfrm>
+            <a:off x="4" y="1216597"/>
+            <a:ext cx="731521" cy="673460"/>
+            <a:chOff x="3940602" y="308034"/>
+            <a:chExt cx="2116791" cy="3428999"/>
+          </a:xfrm>
+          <a:solidFill>
+            <a:schemeClr val="accent4"/>
+          </a:solidFill>
+        </p:grpSpPr>
+        <p:sp>
+          <p:nvSpPr>
+            <p:cNvPr id="11" name="Rectangle 10">
+              <a:extLst>
+                <a:ext uri="{FF2B5EF4-FFF2-40B4-BE49-F238E27FC236}">
+                  <a16:creationId xmlns:a16="http://schemas.microsoft.com/office/drawing/2014/main" id="{A6604B49-AD5C-4590-B051-06C8222ECD99}"/>
+                </a:ext>
+                <a:ext uri="{C183D7F6-B498-43B3-948B-1728B52AA6E4}">
+                  <adec:decorative xmlns:adec="http://schemas.microsoft.com/office/drawing/2017/decorative" val="1"/>
+                </a:ext>
+              </a:extLst>
+            </p:cNvPr>
+            <p:cNvSpPr/>
+            <p:nvPr>
+              <p:extLst>
+                <p:ext uri="{386F3935-93C4-4BCD-93E2-E3B085C9AB24}">
+                  <p16:designElem xmlns:p16="http://schemas.microsoft.com/office/powerpoint/2015/main" val="1"/>
+                </p:ext>
+              </p:extLst>
+            </p:nvPr>
+          </p:nvSpPr>
+          <p:spPr>
+            <a:xfrm>
+              <a:off x="3940602" y="308034"/>
+              <a:ext cx="566743" cy="3428999"/>
+            </a:xfrm>
+            <a:prstGeom prst="rect">
+              <a:avLst/>
+            </a:prstGeom>
+            <a:grpFill/>
+            <a:ln>
+              <a:noFill/>
+            </a:ln>
+          </p:spPr>
+          <p:style>
+            <a:lnRef idx="2">
+              <a:schemeClr val="accent1">
+                <a:shade val="50000"/>
+              </a:schemeClr>
+            </a:lnRef>
+            <a:fillRef idx="1">
+              <a:schemeClr val="accent1"/>
+            </a:fillRef>
+            <a:effectRef idx="0">
+              <a:schemeClr val="accent1"/>
+            </a:effectRef>
+            <a:fontRef idx="minor">
+              <a:schemeClr val="lt1"/>
+            </a:fontRef>
+          </p:style>
+          <p:txBody>
+            <a:bodyPr rtlCol="0" anchor="ctr"/>
+            <a:lstStyle/>
+            <a:p>
+              <a:pPr algn="ctr"/>
+              <a:endParaRPr lang="en-US"/>
+            </a:p>
+          </p:txBody>
+        </p:sp>
+        <p:sp>
+          <p:nvSpPr>
+            <p:cNvPr id="12" name="Rectangle 11">
+              <a:extLst>
+                <a:ext uri="{FF2B5EF4-FFF2-40B4-BE49-F238E27FC236}">
+                  <a16:creationId xmlns:a16="http://schemas.microsoft.com/office/drawing/2014/main" id="{743ECCAF-29C5-4537-947C-7EA1292463DB}"/>
+                </a:ext>
+                <a:ext uri="{C183D7F6-B498-43B3-948B-1728B52AA6E4}">
+                  <adec:decorative xmlns:adec="http://schemas.microsoft.com/office/drawing/2017/decorative" val="1"/>
+                </a:ext>
+              </a:extLst>
+            </p:cNvPr>
+            <p:cNvSpPr/>
+            <p:nvPr>
+              <p:extLst>
+                <p:ext uri="{386F3935-93C4-4BCD-93E2-E3B085C9AB24}">
+                  <p16:designElem xmlns:p16="http://schemas.microsoft.com/office/powerpoint/2015/main" val="1"/>
+                </p:ext>
+              </p:extLst>
+            </p:nvPr>
+          </p:nvSpPr>
+          <p:spPr>
+            <a:xfrm>
+              <a:off x="4715626" y="308034"/>
+              <a:ext cx="566743" cy="3428999"/>
+            </a:xfrm>
+            <a:prstGeom prst="rect">
+              <a:avLst/>
+            </a:prstGeom>
+            <a:grpFill/>
+            <a:ln>
+              <a:noFill/>
+            </a:ln>
+          </p:spPr>
+          <p:style>
+            <a:lnRef idx="2">
+              <a:schemeClr val="accent1">
+                <a:shade val="50000"/>
+              </a:schemeClr>
+            </a:lnRef>
+            <a:fillRef idx="1">
+              <a:schemeClr val="accent1"/>
+            </a:fillRef>
+            <a:effectRef idx="0">
+              <a:schemeClr val="accent1"/>
+            </a:effectRef>
+            <a:fontRef idx="minor">
+              <a:schemeClr val="lt1"/>
+            </a:fontRef>
+          </p:style>
+          <p:txBody>
+            <a:bodyPr rtlCol="0" anchor="ctr"/>
+            <a:lstStyle/>
+            <a:p>
+              <a:pPr algn="ctr"/>
+              <a:endParaRPr lang="en-US"/>
+            </a:p>
+          </p:txBody>
+        </p:sp>
+        <p:sp>
+          <p:nvSpPr>
+            <p:cNvPr id="13" name="Rectangle 12">
+              <a:extLst>
+                <a:ext uri="{FF2B5EF4-FFF2-40B4-BE49-F238E27FC236}">
+                  <a16:creationId xmlns:a16="http://schemas.microsoft.com/office/drawing/2014/main" id="{ED49787B-8DE6-4467-AD0A-8DECC6E0C2D6}"/>
+                </a:ext>
+                <a:ext uri="{C183D7F6-B498-43B3-948B-1728B52AA6E4}">
+                  <adec:decorative xmlns:adec="http://schemas.microsoft.com/office/drawing/2017/decorative" val="1"/>
+                </a:ext>
+              </a:extLst>
+            </p:cNvPr>
+            <p:cNvSpPr/>
+            <p:nvPr>
+              <p:extLst>
+                <p:ext uri="{386F3935-93C4-4BCD-93E2-E3B085C9AB24}">
+                  <p16:designElem xmlns:p16="http://schemas.microsoft.com/office/powerpoint/2015/main" val="1"/>
+                </p:ext>
+              </p:extLst>
+            </p:nvPr>
+          </p:nvSpPr>
+          <p:spPr>
+            <a:xfrm>
+              <a:off x="5490650" y="308034"/>
+              <a:ext cx="566743" cy="3428999"/>
+            </a:xfrm>
+            <a:prstGeom prst="rect">
+              <a:avLst/>
+            </a:prstGeom>
+            <a:grpFill/>
+            <a:ln>
+              <a:noFill/>
+            </a:ln>
+          </p:spPr>
+          <p:style>
+            <a:lnRef idx="2">
+              <a:schemeClr val="accent1">
+                <a:shade val="50000"/>
+              </a:schemeClr>
+            </a:lnRef>
+            <a:fillRef idx="1">
+              <a:schemeClr val="accent1"/>
+            </a:fillRef>
+            <a:effectRef idx="0">
+              <a:schemeClr val="accent1"/>
+            </a:effectRef>
+            <a:fontRef idx="minor">
+              <a:schemeClr val="lt1"/>
+            </a:fontRef>
+          </p:style>
+          <p:txBody>
+            <a:bodyPr rtlCol="0" anchor="ctr"/>
+            <a:lstStyle/>
+            <a:p>
+              <a:pPr algn="ctr"/>
+              <a:endParaRPr lang="en-US"/>
+            </a:p>
+          </p:txBody>
+        </p:sp>
+      </p:grpSp>
+      <p:sp>
+        <p:nvSpPr>
+          <p:cNvPr id="15" name="Rectangle 14">
+            <a:extLst>
+              <a:ext uri="{FF2B5EF4-FFF2-40B4-BE49-F238E27FC236}">
+                <a16:creationId xmlns:a16="http://schemas.microsoft.com/office/drawing/2014/main" id="{D5B0017B-2ECA-49AF-B397-DC140825DF8D}"/>
+              </a:ext>
+              <a:ext uri="{C183D7F6-B498-43B3-948B-1728B52AA6E4}">
+                <adec:decorative xmlns:adec="http://schemas.microsoft.com/office/drawing/2017/decorative" val="1"/>
+              </a:ext>
+            </a:extLst>
+          </p:cNvPr>
+          <p:cNvSpPr>
+            <a:spLocks noGrp="1" noRot="1" noChangeAspect="1" noMove="1" noResize="1" noEditPoints="1" noAdjustHandles="1" noChangeArrowheads="1" noChangeShapeType="1" noTextEdit="1"/>
+          </p:cNvSpPr>
+          <p:nvPr>
+            <p:extLst>
+              <p:ext uri="{386F3935-93C4-4BCD-93E2-E3B085C9AB24}">
+                <p16:designElem xmlns:p16="http://schemas.microsoft.com/office/powerpoint/2015/main" val="1"/>
+              </p:ext>
+            </p:extLst>
+          </p:nvPr>
+        </p:nvSpPr>
+        <p:spPr>
+          <a:xfrm>
+            <a:off x="640079" y="613954"/>
+            <a:ext cx="10907487" cy="1894116"/>
+          </a:xfrm>
+          <a:prstGeom prst="rect">
+            <a:avLst/>
+          </a:prstGeom>
+          <a:solidFill>
+            <a:schemeClr val="bg1"/>
+          </a:solidFill>
+          <a:ln>
+            <a:noFill/>
+          </a:ln>
+          <a:effectLst>
+            <a:outerShdw blurRad="139700" dist="127000" dir="5400000" algn="t" rotWithShape="0">
+              <a:prstClr val="black">
+                <a:alpha val="15000"/>
+              </a:prstClr>
+            </a:outerShdw>
+          </a:effectLst>
+        </p:spPr>
+        <p:style>
+          <a:lnRef idx="2">
+            <a:schemeClr val="accent1">
+              <a:shade val="50000"/>
+            </a:schemeClr>
+          </a:lnRef>
+          <a:fillRef idx="1">
+            <a:schemeClr val="accent1"/>
+          </a:fillRef>
+          <a:effectRef idx="0">
+            <a:schemeClr val="accent1"/>
+          </a:effectRef>
+          <a:fontRef idx="minor">
+            <a:schemeClr val="lt1"/>
+          </a:fontRef>
+        </p:style>
+        <p:txBody>
+          <a:bodyPr rtlCol="0" anchor="ctr"/>
+          <a:lstStyle/>
+          <a:p>
+            <a:pPr algn="ctr"/>
+            <a:endParaRPr lang="en-US"/>
+          </a:p>
+        </p:txBody>
+      </p:sp>
+      <p:sp>
+        <p:nvSpPr>
+          <p:cNvPr id="2" name="Title 1">
+            <a:extLst>
+              <a:ext uri="{FF2B5EF4-FFF2-40B4-BE49-F238E27FC236}">
+                <a16:creationId xmlns:a16="http://schemas.microsoft.com/office/drawing/2014/main" id="{3A852955-2551-12FF-6416-32BAB737FFD9}"/>
+              </a:ext>
+            </a:extLst>
+          </p:cNvPr>
+          <p:cNvSpPr>
+            <a:spLocks noGrp="1"/>
+          </p:cNvSpPr>
+          <p:nvPr>
+            <p:ph type="title"/>
+          </p:nvPr>
+        </p:nvSpPr>
+        <p:spPr>
+          <a:xfrm>
+            <a:off x="1043631" y="809898"/>
+            <a:ext cx="9942716" cy="1554480"/>
+          </a:xfrm>
+        </p:spPr>
+        <p:txBody>
+          <a:bodyPr anchor="ctr">
+            <a:normAutofit/>
+          </a:bodyPr>
+          <a:lstStyle/>
+          <a:p>
+            <a:r>
+              <a:rPr lang="en-US" sz="4800"/>
+              <a:t>Problem Types</a:t>
+            </a:r>
+          </a:p>
+        </p:txBody>
+      </p:sp>
+      <p:sp>
+        <p:nvSpPr>
+          <p:cNvPr id="3" name="Content Placeholder 2">
+            <a:extLst>
+              <a:ext uri="{FF2B5EF4-FFF2-40B4-BE49-F238E27FC236}">
+                <a16:creationId xmlns:a16="http://schemas.microsoft.com/office/drawing/2014/main" id="{5BC4AAB4-32DD-0202-4047-F9245BE2A8CD}"/>
+              </a:ext>
+            </a:extLst>
+          </p:cNvPr>
+          <p:cNvSpPr>
+            <a:spLocks noGrp="1"/>
+          </p:cNvSpPr>
+          <p:nvPr>
+            <p:ph idx="1"/>
+          </p:nvPr>
+        </p:nvSpPr>
+        <p:spPr>
+          <a:xfrm>
+            <a:off x="1045028" y="3017522"/>
+            <a:ext cx="9941319" cy="3124658"/>
+          </a:xfrm>
+        </p:spPr>
+        <p:txBody>
+          <a:bodyPr anchor="ctr">
+            <a:normAutofit/>
+          </a:bodyPr>
+          <a:lstStyle/>
+          <a:p>
+            <a:endParaRPr lang="en-US" sz="2400"/>
+          </a:p>
+        </p:txBody>
+      </p:sp>
+      <p:cxnSp>
+        <p:nvCxnSpPr>
+          <p:cNvPr id="17" name="Straight Connector 16">
+            <a:extLst>
+              <a:ext uri="{FF2B5EF4-FFF2-40B4-BE49-F238E27FC236}">
+                <a16:creationId xmlns:a16="http://schemas.microsoft.com/office/drawing/2014/main" id="{6CF1BAF6-AD41-4082-B212-8A1F9A2E8779}"/>
+              </a:ext>
+              <a:ext uri="{C183D7F6-B498-43B3-948B-1728B52AA6E4}">
+                <adec:decorative xmlns:adec="http://schemas.microsoft.com/office/drawing/2017/decorative" val="1"/>
+              </a:ext>
+            </a:extLst>
+          </p:cNvPr>
+          <p:cNvCxnSpPr>
+            <a:cxnSpLocks noGrp="1" noRot="1" noChangeAspect="1" noMove="1" noResize="1" noEditPoints="1" noAdjustHandles="1" noChangeArrowheads="1" noChangeShapeType="1"/>
+          </p:cNvCxnSpPr>
+          <p:nvPr>
+            <p:extLst>
+              <p:ext uri="{386F3935-93C4-4BCD-93E2-E3B085C9AB24}">
+                <p16:designElem xmlns:p16="http://schemas.microsoft.com/office/powerpoint/2015/main" val="1"/>
+              </p:ext>
+            </p:extLst>
+          </p:nvPr>
+        </p:nvCxnSpPr>
+        <p:spPr>
+          <a:xfrm flipH="1">
+            <a:off x="838200" y="6485313"/>
+            <a:ext cx="10515600" cy="0"/>
+          </a:xfrm>
+          <a:prstGeom prst="line">
+            <a:avLst/>
+          </a:prstGeom>
+          <a:ln w="57150">
+            <a:solidFill>
+              <a:schemeClr val="accent4"/>
+            </a:solidFill>
+          </a:ln>
+        </p:spPr>
+        <p:style>
+          <a:lnRef idx="1">
+            <a:schemeClr val="accent1"/>
+          </a:lnRef>
+          <a:fillRef idx="0">
+            <a:schemeClr val="accent1"/>
+          </a:fillRef>
+          <a:effectRef idx="0">
+            <a:schemeClr val="accent1"/>
+          </a:effectRef>
+          <a:fontRef idx="minor">
+            <a:schemeClr val="tx1"/>
+          </a:fontRef>
+        </p:style>
+      </p:cxnSp>
+    </p:spTree>
+    <p:extLst>
+      <p:ext uri="{BB962C8B-B14F-4D97-AF65-F5344CB8AC3E}">
+        <p14:creationId xmlns:p14="http://schemas.microsoft.com/office/powerpoint/2010/main" val="149795576"/>
+      </p:ext>
+    </p:extLst>
+  </p:cSld>
+  <p:clrMapOvr>
+    <a:masterClrMapping/>
+  </p:clrMapOvr>
+</p:sld>
+</file>
+
+<file path=ppt/slides/slide4.xml><?xml version="1.0" encoding="utf-8"?>
+<p:sld xmlns:a="http://schemas.openxmlformats.org/drawingml/2006/main" xmlns:r="http://schemas.openxmlformats.org/officeDocument/2006/relationships" xmlns:p="http://schemas.openxmlformats.org/presentationml/2006/main">
+  <p:cSld>
+    <p:bg>
+      <p:bgPr>
+        <a:solidFill>
+          <a:schemeClr val="bg1"/>
+        </a:solidFill>
+        <a:effectLst/>
+      </p:bgPr>
+    </p:bg>
+    <p:spTree>
+      <p:nvGrpSpPr>
+        <p:cNvPr id="1" name=""/>
+        <p:cNvGrpSpPr/>
+        <p:nvPr/>
+      </p:nvGrpSpPr>
+      <p:grpSpPr>
+        <a:xfrm>
+          <a:off x="0" y="0"/>
+          <a:ext cx="0" cy="0"/>
+          <a:chOff x="0" y="0"/>
+          <a:chExt cx="0" cy="0"/>
+        </a:xfrm>
+      </p:grpSpPr>
+      <p:sp useBgFill="1">
+        <p:nvSpPr>
+          <p:cNvPr id="8" name="Rectangle 7">
+            <a:extLst>
+              <a:ext uri="{FF2B5EF4-FFF2-40B4-BE49-F238E27FC236}">
+                <a16:creationId xmlns:a16="http://schemas.microsoft.com/office/drawing/2014/main" id="{4DA718D0-4865-4629-8134-44F68D41D574}"/>
+              </a:ext>
+              <a:ext uri="{C183D7F6-B498-43B3-948B-1728B52AA6E4}">
+                <adec:decorative xmlns:adec="http://schemas.microsoft.com/office/drawing/2017/decorative" val="1"/>
+              </a:ext>
+            </a:extLst>
+          </p:cNvPr>
+          <p:cNvSpPr>
+            <a:spLocks noGrp="1" noRot="1" noChangeAspect="1" noMove="1" noResize="1" noEditPoints="1" noAdjustHandles="1" noChangeArrowheads="1" noChangeShapeType="1" noTextEdit="1"/>
+          </p:cNvSpPr>
+          <p:nvPr>
+            <p:extLst>
+              <p:ext uri="{386F3935-93C4-4BCD-93E2-E3B085C9AB24}">
+                <p16:designElem xmlns:p16="http://schemas.microsoft.com/office/powerpoint/2015/main" val="1"/>
+              </p:ext>
+            </p:extLst>
+          </p:nvPr>
+        </p:nvSpPr>
+        <p:spPr>
+          <a:xfrm>
+            <a:off x="0" y="0"/>
+            <a:ext cx="12191999" cy="6857365"/>
+          </a:xfrm>
+          <a:prstGeom prst="rect">
+            <a:avLst/>
+          </a:prstGeom>
+          <a:ln>
+            <a:noFill/>
+          </a:ln>
+        </p:spPr>
+        <p:style>
+          <a:lnRef idx="2">
+            <a:schemeClr val="accent1">
+              <a:shade val="50000"/>
+            </a:schemeClr>
+          </a:lnRef>
+          <a:fillRef idx="1">
+            <a:schemeClr val="accent1"/>
+          </a:fillRef>
+          <a:effectRef idx="0">
+            <a:schemeClr val="accent1"/>
+          </a:effectRef>
+          <a:fontRef idx="minor">
+            <a:schemeClr val="lt1"/>
+          </a:fontRef>
+        </p:style>
+        <p:txBody>
+          <a:bodyPr rtlCol="0" anchor="ctr"/>
+          <a:lstStyle/>
+          <a:p>
+            <a:pPr algn="ctr"/>
+            <a:endParaRPr lang="en-US"/>
+          </a:p>
+        </p:txBody>
+      </p:sp>
+      <p:grpSp>
+        <p:nvGrpSpPr>
+          <p:cNvPr id="10" name="Group 9">
+            <a:extLst>
+              <a:ext uri="{FF2B5EF4-FFF2-40B4-BE49-F238E27FC236}">
+                <a16:creationId xmlns:a16="http://schemas.microsoft.com/office/drawing/2014/main" id="{65167ED7-6315-43AB-B1B6-C326D5FD8F84}"/>
+              </a:ext>
+              <a:ext uri="{C183D7F6-B498-43B3-948B-1728B52AA6E4}">
+                <adec:decorative xmlns:adec="http://schemas.microsoft.com/office/drawing/2017/decorative" val="1"/>
+              </a:ext>
+            </a:extLst>
+          </p:cNvPr>
+          <p:cNvGrpSpPr>
+            <a:grpSpLocks noGrp="1" noUngrp="1" noRot="1" noChangeAspect="1" noMove="1" noResize="1"/>
+          </p:cNvGrpSpPr>
+          <p:nvPr>
+            <p:extLst>
+              <p:ext uri="{386F3935-93C4-4BCD-93E2-E3B085C9AB24}">
+                <p16:designElem xmlns:p16="http://schemas.microsoft.com/office/powerpoint/2015/main" val="1"/>
+              </p:ext>
+            </p:extLst>
+          </p:nvPr>
+        </p:nvGrpSpPr>
+        <p:grpSpPr>
+          <a:xfrm rot="5400000">
+            <a:off x="-2340441" y="2666183"/>
+            <a:ext cx="5860051" cy="527712"/>
+            <a:chOff x="6081624" y="1998368"/>
+            <a:chExt cx="5613457" cy="782175"/>
+          </a:xfrm>
+          <a:solidFill>
+            <a:schemeClr val="accent4"/>
+          </a:solidFill>
+        </p:grpSpPr>
+        <p:sp>
+          <p:nvSpPr>
+            <p:cNvPr id="11" name="Rectangle 10">
+              <a:extLst>
+                <a:ext uri="{FF2B5EF4-FFF2-40B4-BE49-F238E27FC236}">
+                  <a16:creationId xmlns:a16="http://schemas.microsoft.com/office/drawing/2014/main" id="{EF4D8839-FB03-487D-ACC8-8BFEDD4FEBAE}"/>
+                </a:ext>
+                <a:ext uri="{C183D7F6-B498-43B3-948B-1728B52AA6E4}">
+                  <adec:decorative xmlns:adec="http://schemas.microsoft.com/office/drawing/2017/decorative" val="1"/>
+                </a:ext>
+              </a:extLst>
+            </p:cNvPr>
+            <p:cNvSpPr/>
+            <p:nvPr>
+              <p:extLst>
+                <p:ext uri="{386F3935-93C4-4BCD-93E2-E3B085C9AB24}">
+                  <p16:designElem xmlns:p16="http://schemas.microsoft.com/office/powerpoint/2015/main" val="1"/>
+                </p:ext>
+              </p:extLst>
+            </p:nvPr>
+          </p:nvSpPr>
+          <p:spPr>
+            <a:xfrm rot="5400000">
+              <a:off x="11228040" y="2313027"/>
+              <a:ext cx="781700" cy="152382"/>
+            </a:xfrm>
+            <a:prstGeom prst="rect">
+              <a:avLst/>
+            </a:prstGeom>
+            <a:grpFill/>
+            <a:ln>
+              <a:noFill/>
+            </a:ln>
+          </p:spPr>
+          <p:style>
+            <a:lnRef idx="2">
+              <a:schemeClr val="accent1">
+                <a:shade val="50000"/>
+              </a:schemeClr>
+            </a:lnRef>
+            <a:fillRef idx="1">
+              <a:schemeClr val="accent1"/>
+            </a:fillRef>
+            <a:effectRef idx="0">
+              <a:schemeClr val="accent1"/>
+            </a:effectRef>
+            <a:fontRef idx="minor">
+              <a:schemeClr val="lt1"/>
+            </a:fontRef>
+          </p:style>
+          <p:txBody>
+            <a:bodyPr rtlCol="0" anchor="ctr"/>
+            <a:lstStyle/>
+            <a:p>
+              <a:pPr algn="ctr"/>
+              <a:endParaRPr lang="en-US"/>
+            </a:p>
+          </p:txBody>
+        </p:sp>
+        <p:sp>
+          <p:nvSpPr>
+            <p:cNvPr id="12" name="Rectangle 11">
+              <a:extLst>
+                <a:ext uri="{FF2B5EF4-FFF2-40B4-BE49-F238E27FC236}">
+                  <a16:creationId xmlns:a16="http://schemas.microsoft.com/office/drawing/2014/main" id="{0EF75023-9A3B-42FC-B704-61A8F7BEF415}"/>
+                </a:ext>
+                <a:ext uri="{C183D7F6-B498-43B3-948B-1728B52AA6E4}">
+                  <adec:decorative xmlns:adec="http://schemas.microsoft.com/office/drawing/2017/decorative" val="1"/>
+                </a:ext>
+              </a:extLst>
+            </p:cNvPr>
+            <p:cNvSpPr/>
+            <p:nvPr>
+              <p:extLst>
+                <p:ext uri="{386F3935-93C4-4BCD-93E2-E3B085C9AB24}">
+                  <p16:designElem xmlns:p16="http://schemas.microsoft.com/office/powerpoint/2015/main" val="1"/>
+                </p:ext>
+              </p:extLst>
+            </p:nvPr>
+          </p:nvSpPr>
+          <p:spPr>
+            <a:xfrm flipH="1" flipV="1">
+              <a:off x="6081624" y="1998844"/>
+              <a:ext cx="5372968" cy="781699"/>
+            </a:xfrm>
+            <a:prstGeom prst="rect">
+              <a:avLst/>
+            </a:prstGeom>
+            <a:grpFill/>
+            <a:ln>
+              <a:noFill/>
+            </a:ln>
+          </p:spPr>
+          <p:style>
+            <a:lnRef idx="2">
+              <a:schemeClr val="accent1">
+                <a:shade val="50000"/>
+              </a:schemeClr>
+            </a:lnRef>
+            <a:fillRef idx="1">
+              <a:schemeClr val="accent1"/>
+            </a:fillRef>
+            <a:effectRef idx="0">
+              <a:schemeClr val="accent1"/>
+            </a:effectRef>
+            <a:fontRef idx="minor">
+              <a:schemeClr val="lt1"/>
+            </a:fontRef>
+          </p:style>
+          <p:txBody>
+            <a:bodyPr rtlCol="0" anchor="ctr"/>
+            <a:lstStyle/>
+            <a:p>
+              <a:pPr algn="ctr"/>
+              <a:endParaRPr lang="en-US"/>
+            </a:p>
+          </p:txBody>
+        </p:sp>
+      </p:grpSp>
+      <p:sp>
+        <p:nvSpPr>
+          <p:cNvPr id="14" name="Rectangle 13">
+            <a:extLst>
+              <a:ext uri="{FF2B5EF4-FFF2-40B4-BE49-F238E27FC236}">
+                <a16:creationId xmlns:a16="http://schemas.microsoft.com/office/drawing/2014/main" id="{CBC4F608-B4B8-48C3-9572-C0F061B1CD99}"/>
+              </a:ext>
+              <a:ext uri="{C183D7F6-B498-43B3-948B-1728B52AA6E4}">
+                <adec:decorative xmlns:adec="http://schemas.microsoft.com/office/drawing/2017/decorative" val="1"/>
+              </a:ext>
+            </a:extLst>
+          </p:cNvPr>
+          <p:cNvSpPr>
+            <a:spLocks noGrp="1" noRot="1" noChangeAspect="1" noMove="1" noResize="1" noEditPoints="1" noAdjustHandles="1" noChangeArrowheads="1" noChangeShapeType="1" noTextEdit="1"/>
+          </p:cNvSpPr>
+          <p:nvPr>
+            <p:extLst>
+              <p:ext uri="{386F3935-93C4-4BCD-93E2-E3B085C9AB24}">
+                <p16:designElem xmlns:p16="http://schemas.microsoft.com/office/powerpoint/2015/main" val="1"/>
+              </p:ext>
+            </p:extLst>
+          </p:nvPr>
+        </p:nvSpPr>
+        <p:spPr>
+          <a:xfrm>
+            <a:off x="579528" y="922919"/>
+            <a:ext cx="11111729" cy="5461252"/>
+          </a:xfrm>
+          <a:prstGeom prst="rect">
+            <a:avLst/>
+          </a:prstGeom>
+          <a:solidFill>
+            <a:schemeClr val="bg1"/>
+          </a:solidFill>
+          <a:ln>
+            <a:noFill/>
+          </a:ln>
+          <a:effectLst>
+            <a:outerShdw blurRad="139700" dist="127000" dir="5400000" algn="t" rotWithShape="0">
+              <a:prstClr val="black">
+                <a:alpha val="15000"/>
+              </a:prstClr>
+            </a:outerShdw>
+          </a:effectLst>
+        </p:spPr>
+        <p:style>
+          <a:lnRef idx="2">
+            <a:schemeClr val="accent1">
+              <a:shade val="50000"/>
+            </a:schemeClr>
+          </a:lnRef>
+          <a:fillRef idx="1">
+            <a:schemeClr val="accent1"/>
+          </a:fillRef>
+          <a:effectRef idx="0">
+            <a:schemeClr val="accent1"/>
+          </a:effectRef>
+          <a:fontRef idx="minor">
+            <a:schemeClr val="lt1"/>
+          </a:fontRef>
+        </p:style>
+        <p:txBody>
+          <a:bodyPr rtlCol="0" anchor="ctr"/>
+          <a:lstStyle/>
+          <a:p>
+            <a:pPr algn="ctr"/>
+            <a:endParaRPr lang="en-US"/>
+          </a:p>
+        </p:txBody>
+      </p:sp>
+      <p:sp>
+        <p:nvSpPr>
+          <p:cNvPr id="2" name="Title 1">
+            <a:extLst>
+              <a:ext uri="{FF2B5EF4-FFF2-40B4-BE49-F238E27FC236}">
+                <a16:creationId xmlns:a16="http://schemas.microsoft.com/office/drawing/2014/main" id="{F97CB9DD-52FB-113D-526B-B6459D63DDA8}"/>
+              </a:ext>
+            </a:extLst>
+          </p:cNvPr>
+          <p:cNvSpPr>
+            <a:spLocks noGrp="1"/>
+          </p:cNvSpPr>
+          <p:nvPr>
+            <p:ph type="title"/>
+          </p:nvPr>
+        </p:nvSpPr>
+        <p:spPr>
+          <a:xfrm>
+            <a:off x="1282963" y="1238080"/>
+            <a:ext cx="9849751" cy="1349671"/>
+          </a:xfrm>
+        </p:spPr>
+        <p:txBody>
+          <a:bodyPr anchor="b">
+            <a:normAutofit/>
+          </a:bodyPr>
+          <a:lstStyle/>
+          <a:p>
+            <a:r>
+              <a:rPr lang="en-US" sz="5400"/>
+              <a:t>Approach</a:t>
+            </a:r>
+          </a:p>
+        </p:txBody>
+      </p:sp>
+      <p:sp>
+        <p:nvSpPr>
+          <p:cNvPr id="3" name="Content Placeholder 2">
+            <a:extLst>
+              <a:ext uri="{FF2B5EF4-FFF2-40B4-BE49-F238E27FC236}">
+                <a16:creationId xmlns:a16="http://schemas.microsoft.com/office/drawing/2014/main" id="{C6A5AC6E-1FD2-A32F-E33D-B1050BE416BB}"/>
+              </a:ext>
+            </a:extLst>
+          </p:cNvPr>
+          <p:cNvSpPr>
+            <a:spLocks noGrp="1"/>
+          </p:cNvSpPr>
+          <p:nvPr>
+            <p:ph idx="1"/>
+          </p:nvPr>
+        </p:nvSpPr>
+        <p:spPr>
+          <a:xfrm>
+            <a:off x="1289304" y="2902913"/>
+            <a:ext cx="9849751" cy="3032168"/>
+          </a:xfrm>
+        </p:spPr>
+        <p:txBody>
+          <a:bodyPr anchor="ctr">
+            <a:normAutofit/>
+          </a:bodyPr>
+          <a:lstStyle/>
+          <a:p>
+            <a:endParaRPr lang="en-US" sz="2000"/>
+          </a:p>
+        </p:txBody>
+      </p:sp>
+    </p:spTree>
+    <p:extLst>
+      <p:ext uri="{BB962C8B-B14F-4D97-AF65-F5344CB8AC3E}">
+        <p14:creationId xmlns:p14="http://schemas.microsoft.com/office/powerpoint/2010/main" val="2155978422"/>
+      </p:ext>
+    </p:extLst>
+  </p:cSld>
+  <p:clrMapOvr>
+    <a:masterClrMapping/>
+  </p:clrMapOvr>
+</p:sld>
+</file>
+
+<file path=ppt/slides/slide5.xml><?xml version="1.0" encoding="utf-8"?>
+<p:sld xmlns:a="http://schemas.openxmlformats.org/drawingml/2006/main" xmlns:r="http://schemas.openxmlformats.org/officeDocument/2006/relationships" xmlns:p="http://schemas.openxmlformats.org/presentationml/2006/main">
+  <p:cSld>
+    <p:spTree>
+      <p:nvGrpSpPr>
+        <p:cNvPr id="1" name=""/>
+        <p:cNvGrpSpPr/>
+        <p:nvPr/>
+      </p:nvGrpSpPr>
+      <p:grpSpPr>
+        <a:xfrm>
+          <a:off x="0" y="0"/>
+          <a:ext cx="0" cy="0"/>
+          <a:chOff x="0" y="0"/>
+          <a:chExt cx="0" cy="0"/>
+        </a:xfrm>
+      </p:grpSpPr>
+      <p:sp>
+        <p:nvSpPr>
+          <p:cNvPr id="2" name="Title 1">
+            <a:extLst>
+              <a:ext uri="{FF2B5EF4-FFF2-40B4-BE49-F238E27FC236}">
+                <a16:creationId xmlns:a16="http://schemas.microsoft.com/office/drawing/2014/main" id="{E6F83656-AE5C-749F-AE82-3A991804C9DE}"/>
+              </a:ext>
+            </a:extLst>
+          </p:cNvPr>
+          <p:cNvSpPr>
+            <a:spLocks noGrp="1"/>
+          </p:cNvSpPr>
+          <p:nvPr>
+            <p:ph type="title"/>
+          </p:nvPr>
+        </p:nvSpPr>
+        <p:spPr/>
+        <p:txBody>
+          <a:bodyPr/>
+          <a:lstStyle/>
+          <a:p>
+            <a:r>
+              <a:rPr lang="en-US" dirty="0"/>
+              <a:t>AI Tools</a:t>
+            </a:r>
+          </a:p>
+        </p:txBody>
+      </p:sp>
+      <p:sp>
+        <p:nvSpPr>
+          <p:cNvPr id="3" name="Content Placeholder 2">
+            <a:extLst>
+              <a:ext uri="{FF2B5EF4-FFF2-40B4-BE49-F238E27FC236}">
+                <a16:creationId xmlns:a16="http://schemas.microsoft.com/office/drawing/2014/main" id="{D1B5BB2B-33D5-7DAB-4EE1-EC237C024694}"/>
+              </a:ext>
+            </a:extLst>
+          </p:cNvPr>
+          <p:cNvSpPr>
+            <a:spLocks noGrp="1"/>
+          </p:cNvSpPr>
+          <p:nvPr>
+            <p:ph idx="1"/>
+          </p:nvPr>
+        </p:nvSpPr>
+        <p:spPr/>
+        <p:txBody>
+          <a:bodyPr/>
+          <a:lstStyle/>
+          <a:p>
+            <a:endParaRPr lang="en-US"/>
+          </a:p>
+        </p:txBody>
+      </p:sp>
+    </p:spTree>
+    <p:extLst>
+      <p:ext uri="{BB962C8B-B14F-4D97-AF65-F5344CB8AC3E}">
+        <p14:creationId xmlns:p14="http://schemas.microsoft.com/office/powerpoint/2010/main" val="1674025237"/>
+      </p:ext>
+    </p:extLst>
+  </p:cSld>
+  <p:clrMapOvr>
+    <a:masterClrMapping/>
+  </p:clrMapOvr>
+</p:sld>
+</file>
+
+<file path=ppt/slides/slide6.xml><?xml version="1.0" encoding="utf-8"?>
+<p:sld xmlns:a="http://schemas.openxmlformats.org/drawingml/2006/main" xmlns:r="http://schemas.openxmlformats.org/officeDocument/2006/relationships" xmlns:p="http://schemas.openxmlformats.org/presentationml/2006/main">
+  <p:cSld>
+    <p:spTree>
+      <p:nvGrpSpPr>
+        <p:cNvPr id="1" name=""/>
+        <p:cNvGrpSpPr/>
+        <p:nvPr/>
+      </p:nvGrpSpPr>
+      <p:grpSpPr>
+        <a:xfrm>
+          <a:off x="0" y="0"/>
+          <a:ext cx="0" cy="0"/>
+          <a:chOff x="0" y="0"/>
+          <a:chExt cx="0" cy="0"/>
+        </a:xfrm>
+      </p:grpSpPr>
+      <p:sp>
+        <p:nvSpPr>
+          <p:cNvPr id="2" name="Title 1">
+            <a:extLst>
+              <a:ext uri="{FF2B5EF4-FFF2-40B4-BE49-F238E27FC236}">
+                <a16:creationId xmlns:a16="http://schemas.microsoft.com/office/drawing/2014/main" id="{817E5507-7BEB-1D01-5229-134196AE5F70}"/>
+              </a:ext>
+            </a:extLst>
+          </p:cNvPr>
+          <p:cNvSpPr>
+            <a:spLocks noGrp="1"/>
+          </p:cNvSpPr>
+          <p:nvPr>
+            <p:ph type="title"/>
+          </p:nvPr>
+        </p:nvSpPr>
+        <p:spPr/>
+        <p:txBody>
+          <a:bodyPr/>
+          <a:lstStyle/>
+          <a:p>
+            <a:r>
+              <a:rPr lang="en-US" dirty="0"/>
+              <a:t>ChatGPT</a:t>
+            </a:r>
+          </a:p>
+        </p:txBody>
+      </p:sp>
+      <p:sp>
+        <p:nvSpPr>
+          <p:cNvPr id="3" name="Content Placeholder 2">
+            <a:extLst>
+              <a:ext uri="{FF2B5EF4-FFF2-40B4-BE49-F238E27FC236}">
+                <a16:creationId xmlns:a16="http://schemas.microsoft.com/office/drawing/2014/main" id="{10ABEB13-E101-00CE-9CC4-735B136CA6F3}"/>
+              </a:ext>
+            </a:extLst>
+          </p:cNvPr>
+          <p:cNvSpPr>
+            <a:spLocks noGrp="1"/>
+          </p:cNvSpPr>
+          <p:nvPr>
+            <p:ph idx="1"/>
+          </p:nvPr>
+        </p:nvSpPr>
+        <p:spPr/>
+        <p:txBody>
+          <a:bodyPr/>
+          <a:lstStyle/>
+          <a:p>
+            <a:endParaRPr lang="en-US"/>
+          </a:p>
+        </p:txBody>
+      </p:sp>
+    </p:spTree>
+    <p:extLst>
+      <p:ext uri="{BB962C8B-B14F-4D97-AF65-F5344CB8AC3E}">
+        <p14:creationId xmlns:p14="http://schemas.microsoft.com/office/powerpoint/2010/main" val="1605171173"/>
+      </p:ext>
+    </p:extLst>
+  </p:cSld>
+  <p:clrMapOvr>
+    <a:masterClrMapping/>
+  </p:clrMapOvr>
+</p:sld>
+</file>
+
+<file path=ppt/slides/slide7.xml><?xml version="1.0" encoding="utf-8"?>
+<p:sld xmlns:a="http://schemas.openxmlformats.org/drawingml/2006/main" xmlns:r="http://schemas.openxmlformats.org/officeDocument/2006/relationships" xmlns:p="http://schemas.openxmlformats.org/presentationml/2006/main">
+  <p:cSld>
+    <p:spTree>
+      <p:nvGrpSpPr>
+        <p:cNvPr id="1" name=""/>
+        <p:cNvGrpSpPr/>
+        <p:nvPr/>
+      </p:nvGrpSpPr>
+      <p:grpSpPr>
+        <a:xfrm>
+          <a:off x="0" y="0"/>
+          <a:ext cx="0" cy="0"/>
+          <a:chOff x="0" y="0"/>
+          <a:chExt cx="0" cy="0"/>
+        </a:xfrm>
+      </p:grpSpPr>
+      <p:sp>
+        <p:nvSpPr>
+          <p:cNvPr id="2" name="Title 1">
+            <a:extLst>
+              <a:ext uri="{FF2B5EF4-FFF2-40B4-BE49-F238E27FC236}">
+                <a16:creationId xmlns:a16="http://schemas.microsoft.com/office/drawing/2014/main" id="{6F17A8E0-F0A6-5E5A-3E17-D07C1F19C5B3}"/>
+              </a:ext>
+            </a:extLst>
+          </p:cNvPr>
+          <p:cNvSpPr>
+            <a:spLocks noGrp="1"/>
+          </p:cNvSpPr>
+          <p:nvPr>
+            <p:ph type="title"/>
+          </p:nvPr>
+        </p:nvSpPr>
+        <p:spPr/>
+        <p:txBody>
+          <a:bodyPr/>
+          <a:lstStyle/>
+          <a:p>
+            <a:r>
+              <a:rPr lang="en-US" dirty="0"/>
+              <a:t>Gemini</a:t>
+            </a:r>
+          </a:p>
+        </p:txBody>
+      </p:sp>
+      <p:sp>
+        <p:nvSpPr>
+          <p:cNvPr id="3" name="Content Placeholder 2">
+            <a:extLst>
+              <a:ext uri="{FF2B5EF4-FFF2-40B4-BE49-F238E27FC236}">
+                <a16:creationId xmlns:a16="http://schemas.microsoft.com/office/drawing/2014/main" id="{7C791DBB-FB15-BF48-6EB7-466FA6DC6BF0}"/>
+              </a:ext>
+            </a:extLst>
+          </p:cNvPr>
+          <p:cNvSpPr>
+            <a:spLocks noGrp="1"/>
+          </p:cNvSpPr>
+          <p:nvPr>
+            <p:ph idx="1"/>
+          </p:nvPr>
+        </p:nvSpPr>
+        <p:spPr/>
+        <p:txBody>
+          <a:bodyPr/>
+          <a:lstStyle/>
+          <a:p>
+            <a:endParaRPr lang="en-US"/>
+          </a:p>
+        </p:txBody>
+      </p:sp>
+    </p:spTree>
+    <p:extLst>
+      <p:ext uri="{BB962C8B-B14F-4D97-AF65-F5344CB8AC3E}">
+        <p14:creationId xmlns:p14="http://schemas.microsoft.com/office/powerpoint/2010/main" val="1117246204"/>
+      </p:ext>
+    </p:extLst>
+  </p:cSld>
+  <p:clrMapOvr>
+    <a:masterClrMapping/>
+  </p:clrMapOvr>
+</p:sld>
+</file>
+
+<file path=ppt/slides/slide8.xml><?xml version="1.0" encoding="utf-8"?>
+<p:sld xmlns:a="http://schemas.openxmlformats.org/drawingml/2006/main" xmlns:r="http://schemas.openxmlformats.org/officeDocument/2006/relationships" xmlns:p="http://schemas.openxmlformats.org/presentationml/2006/main">
+  <p:cSld>
+    <p:spTree>
+      <p:nvGrpSpPr>
+        <p:cNvPr id="1" name=""/>
+        <p:cNvGrpSpPr/>
+        <p:nvPr/>
+      </p:nvGrpSpPr>
+      <p:grpSpPr>
+        <a:xfrm>
+          <a:off x="0" y="0"/>
+          <a:ext cx="0" cy="0"/>
+          <a:chOff x="0" y="0"/>
+          <a:chExt cx="0" cy="0"/>
+        </a:xfrm>
+      </p:grpSpPr>
+      <p:sp>
+        <p:nvSpPr>
+          <p:cNvPr id="2" name="Title 1">
+            <a:extLst>
+              <a:ext uri="{FF2B5EF4-FFF2-40B4-BE49-F238E27FC236}">
+                <a16:creationId xmlns:a16="http://schemas.microsoft.com/office/drawing/2014/main" id="{0E9721CE-7FDB-6F1E-862D-17EEEB49DF9B}"/>
+              </a:ext>
+            </a:extLst>
+          </p:cNvPr>
+          <p:cNvSpPr>
+            <a:spLocks noGrp="1"/>
+          </p:cNvSpPr>
+          <p:nvPr>
+            <p:ph type="title"/>
+          </p:nvPr>
+        </p:nvSpPr>
+        <p:spPr/>
+        <p:txBody>
+          <a:bodyPr/>
+          <a:lstStyle/>
+          <a:p>
+            <a:r>
+              <a:rPr lang="en-US" dirty="0"/>
+              <a:t>Copilot</a:t>
+            </a:r>
+          </a:p>
+        </p:txBody>
+      </p:sp>
+      <p:sp>
+        <p:nvSpPr>
+          <p:cNvPr id="3" name="Content Placeholder 2">
+            <a:extLst>
+              <a:ext uri="{FF2B5EF4-FFF2-40B4-BE49-F238E27FC236}">
+                <a16:creationId xmlns:a16="http://schemas.microsoft.com/office/drawing/2014/main" id="{355AB5C8-28F5-9043-0482-85B2C28C3504}"/>
+              </a:ext>
+            </a:extLst>
+          </p:cNvPr>
+          <p:cNvSpPr>
+            <a:spLocks noGrp="1"/>
+          </p:cNvSpPr>
+          <p:nvPr>
+            <p:ph idx="1"/>
+          </p:nvPr>
+        </p:nvSpPr>
+        <p:spPr/>
+        <p:txBody>
+          <a:bodyPr/>
+          <a:lstStyle/>
+          <a:p>
+            <a:endParaRPr lang="en-US"/>
+          </a:p>
+        </p:txBody>
+      </p:sp>
+    </p:spTree>
+    <p:extLst>
+      <p:ext uri="{BB962C8B-B14F-4D97-AF65-F5344CB8AC3E}">
+        <p14:creationId xmlns:p14="http://schemas.microsoft.com/office/powerpoint/2010/main" val="3330183413"/>
+      </p:ext>
+    </p:extLst>
+  </p:cSld>
+  <p:clrMapOvr>
+    <a:masterClrMapping/>
+  </p:clrMapOvr>
+</p:sld>
+</file>
+
+<file path=ppt/slides/slide9.xml><?xml version="1.0" encoding="utf-8"?>
+<p:sld xmlns:a="http://schemas.openxmlformats.org/drawingml/2006/main" xmlns:r="http://schemas.openxmlformats.org/officeDocument/2006/relationships" xmlns:p="http://schemas.openxmlformats.org/presentationml/2006/main">
+  <p:cSld>
+    <p:spTree>
+      <p:nvGrpSpPr>
+        <p:cNvPr id="1" name=""/>
+        <p:cNvGrpSpPr/>
+        <p:nvPr/>
+      </p:nvGrpSpPr>
+      <p:grpSpPr>
+        <a:xfrm>
+          <a:off x="0" y="0"/>
+          <a:ext cx="0" cy="0"/>
+          <a:chOff x="0" y="0"/>
+          <a:chExt cx="0" cy="0"/>
+        </a:xfrm>
+      </p:grpSpPr>
+      <p:sp>
+        <p:nvSpPr>
+          <p:cNvPr id="2" name="Title 1">
+            <a:extLst>
+              <a:ext uri="{FF2B5EF4-FFF2-40B4-BE49-F238E27FC236}">
+                <a16:creationId xmlns:a16="http://schemas.microsoft.com/office/drawing/2014/main" id="{8C0E0BBA-7667-2FF9-EF48-9DA6C79DDF2B}"/>
+              </a:ext>
+            </a:extLst>
+          </p:cNvPr>
+          <p:cNvSpPr>
+            <a:spLocks noGrp="1"/>
+          </p:cNvSpPr>
+          <p:nvPr>
+            <p:ph type="title"/>
+          </p:nvPr>
+        </p:nvSpPr>
+        <p:spPr/>
+        <p:txBody>
+          <a:bodyPr/>
+          <a:lstStyle/>
+          <a:p>
+            <a:r>
+              <a:rPr lang="en-US" dirty="0"/>
+              <a:t>observations</a:t>
+            </a:r>
+          </a:p>
+        </p:txBody>
+      </p:sp>
+      <p:sp>
+        <p:nvSpPr>
+          <p:cNvPr id="3" name="Content Placeholder 2">
+            <a:extLst>
+              <a:ext uri="{FF2B5EF4-FFF2-40B4-BE49-F238E27FC236}">
+                <a16:creationId xmlns:a16="http://schemas.microsoft.com/office/drawing/2014/main" id="{115E4EA9-D4C9-C153-9C80-F53A74AACE51}"/>
+              </a:ext>
+            </a:extLst>
+          </p:cNvPr>
+          <p:cNvSpPr>
+            <a:spLocks noGrp="1"/>
+          </p:cNvSpPr>
+          <p:nvPr>
+            <p:ph idx="1"/>
+          </p:nvPr>
+        </p:nvSpPr>
+        <p:spPr/>
+        <p:txBody>
+          <a:bodyPr/>
+          <a:lstStyle/>
+          <a:p>
+            <a:r>
+              <a:rPr lang="en-US" dirty="0"/>
+              <a:t>Limitations</a:t>
+            </a:r>
+          </a:p>
+          <a:p>
+            <a:pPr lvl="1"/>
+            <a:r>
+              <a:rPr lang="en-US" dirty="0"/>
+              <a:t>reasons</a:t>
+            </a:r>
+          </a:p>
+          <a:p>
+            <a:r>
+              <a:rPr lang="en-US" dirty="0"/>
+              <a:t>Success rates</a:t>
+            </a:r>
+          </a:p>
+          <a:p>
+            <a:r>
+              <a:rPr lang="en-US" dirty="0"/>
+              <a:t>Solve both basic and complex problems</a:t>
+            </a:r>
+          </a:p>
+          <a:p>
+            <a:endParaRPr lang="en-US" dirty="0"/>
+          </a:p>
+        </p:txBody>
+      </p:sp>
+    </p:spTree>
+    <p:extLst>
+      <p:ext uri="{BB962C8B-B14F-4D97-AF65-F5344CB8AC3E}">
+        <p14:creationId xmlns:p14="http://schemas.microsoft.com/office/powerpoint/2010/main" val="3814308155"/>
       </p:ext>
     </p:extLst>
   </p:cSld>
@@ -5991,9 +6257,9 @@
 </file>
 
 <file path=ppt/theme/theme1.xml><?xml version="1.0" encoding="utf-8"?>
-<a:theme xmlns:a="http://schemas.openxmlformats.org/drawingml/2006/main" name="RegattaVTI">
+<a:theme xmlns:a="http://schemas.openxmlformats.org/drawingml/2006/main" name="Office Theme">
   <a:themeElements>
-    <a:clrScheme name="Regatta Yellow">
+    <a:clrScheme name="Custom 5">
       <a:dk1>
         <a:sysClr val="windowText" lastClr="000000"/>
       </a:dk1>
@@ -6001,46 +6267,140 @@
         <a:sysClr val="window" lastClr="FFFFFF"/>
       </a:lt1>
       <a:dk2>
-        <a:srgbClr val="181C30"/>
+        <a:srgbClr val="242852"/>
       </a:dk2>
       <a:lt2>
-        <a:srgbClr val="C8E1F4"/>
+        <a:srgbClr val="ACCBF9"/>
       </a:lt2>
       <a:accent1>
-        <a:srgbClr val="217ED3"/>
+        <a:srgbClr val="4A66AC"/>
       </a:accent1>
       <a:accent2>
-        <a:srgbClr val="B92525"/>
+        <a:srgbClr val="629DD1"/>
       </a:accent2>
       <a:accent3>
-        <a:srgbClr val="18558C"/>
+        <a:srgbClr val="297FD5"/>
       </a:accent3>
       <a:accent4>
-        <a:srgbClr val="1D8B35"/>
+        <a:srgbClr val="072B62"/>
       </a:accent4>
       <a:accent5>
-        <a:srgbClr val="EA75AA"/>
+        <a:srgbClr val="5AA2AE"/>
       </a:accent5>
       <a:accent6>
-        <a:srgbClr val="F5A700"/>
+        <a:srgbClr val="9D90A0"/>
       </a:accent6>
       <a:hlink>
-        <a:srgbClr val="DB0000"/>
+        <a:srgbClr val="9454C3"/>
       </a:hlink>
       <a:folHlink>
-        <a:srgbClr val="066BB6"/>
+        <a:srgbClr val="3EBBF0"/>
       </a:folHlink>
     </a:clrScheme>
-    <a:fontScheme name="Walbaum Display">
+    <a:fontScheme name="Office">
       <a:majorFont>
-        <a:latin typeface="Walbaum Display"/>
+        <a:latin typeface="Aptos Display" panose="02110004020202020204"/>
         <a:ea typeface=""/>
         <a:cs typeface=""/>
+        <a:font script="Jpan" typeface="游ゴシック Light"/>
+        <a:font script="Hang" typeface="맑은 고딕"/>
+        <a:font script="Hans" typeface="等线 Light"/>
+        <a:font script="Hant" typeface="新細明體"/>
+        <a:font script="Arab" typeface="Times New Roman"/>
+        <a:font script="Hebr" typeface="Times New Roman"/>
+        <a:font script="Thai" typeface="Angsana New"/>
+        <a:font script="Ethi" typeface="Nyala"/>
+        <a:font script="Beng" typeface="Vrinda"/>
+        <a:font script="Gujr" typeface="Shruti"/>
+        <a:font script="Khmr" typeface="MoolBoran"/>
+        <a:font script="Knda" typeface="Tunga"/>
+        <a:font script="Guru" typeface="Raavi"/>
+        <a:font script="Cans" typeface="Euphemia"/>
+        <a:font script="Cher" typeface="Plantagenet Cherokee"/>
+        <a:font script="Yiii" typeface="Microsoft Yi Baiti"/>
+        <a:font script="Tibt" typeface="Microsoft Himalaya"/>
+        <a:font script="Thaa" typeface="MV Boli"/>
+        <a:font script="Deva" typeface="Mangal"/>
+        <a:font script="Telu" typeface="Gautami"/>
+        <a:font script="Taml" typeface="Latha"/>
+        <a:font script="Syrc" typeface="Estrangelo Edessa"/>
+        <a:font script="Orya" typeface="Kalinga"/>
+        <a:font script="Mlym" typeface="Kartika"/>
+        <a:font script="Laoo" typeface="DokChampa"/>
+        <a:font script="Sinh" typeface="Iskoola Pota"/>
+        <a:font script="Mong" typeface="Mongolian Baiti"/>
+        <a:font script="Viet" typeface="Times New Roman"/>
+        <a:font script="Uigh" typeface="Microsoft Uighur"/>
+        <a:font script="Geor" typeface="Sylfaen"/>
+        <a:font script="Armn" typeface="Arial"/>
+        <a:font script="Bugi" typeface="Leelawadee UI"/>
+        <a:font script="Bopo" typeface="Microsoft JhengHei"/>
+        <a:font script="Java" typeface="Javanese Text"/>
+        <a:font script="Lisu" typeface="Segoe UI"/>
+        <a:font script="Mymr" typeface="Myanmar Text"/>
+        <a:font script="Nkoo" typeface="Ebrima"/>
+        <a:font script="Olck" typeface="Nirmala UI"/>
+        <a:font script="Osma" typeface="Ebrima"/>
+        <a:font script="Phag" typeface="Phagspa"/>
+        <a:font script="Syrn" typeface="Estrangelo Edessa"/>
+        <a:font script="Syrj" typeface="Estrangelo Edessa"/>
+        <a:font script="Syre" typeface="Estrangelo Edessa"/>
+        <a:font script="Sora" typeface="Nirmala UI"/>
+        <a:font script="Tale" typeface="Microsoft Tai Le"/>
+        <a:font script="Talu" typeface="Microsoft New Tai Lue"/>
+        <a:font script="Tfng" typeface="Ebrima"/>
       </a:majorFont>
       <a:minorFont>
-        <a:latin typeface="Walbaum Display"/>
+        <a:latin typeface="Aptos" panose="02110004020202020204"/>
         <a:ea typeface=""/>
         <a:cs typeface=""/>
+        <a:font script="Jpan" typeface="游ゴシック"/>
+        <a:font script="Hang" typeface="맑은 고딕"/>
+        <a:font script="Hans" typeface="等线"/>
+        <a:font script="Hant" typeface="新細明體"/>
+        <a:font script="Arab" typeface="Arial"/>
+        <a:font script="Hebr" typeface="Arial"/>
+        <a:font script="Thai" typeface="Cordia New"/>
+        <a:font script="Ethi" typeface="Nyala"/>
+        <a:font script="Beng" typeface="Vrinda"/>
+        <a:font script="Gujr" typeface="Shruti"/>
+        <a:font script="Khmr" typeface="DaunPenh"/>
+        <a:font script="Knda" typeface="Tunga"/>
+        <a:font script="Guru" typeface="Raavi"/>
+        <a:font script="Cans" typeface="Euphemia"/>
+        <a:font script="Cher" typeface="Plantagenet Cherokee"/>
+        <a:font script="Yiii" typeface="Microsoft Yi Baiti"/>
+        <a:font script="Tibt" typeface="Microsoft Himalaya"/>
+        <a:font script="Thaa" typeface="MV Boli"/>
+        <a:font script="Deva" typeface="Mangal"/>
+        <a:font script="Telu" typeface="Gautami"/>
+        <a:font script="Taml" typeface="Latha"/>
+        <a:font script="Syrc" typeface="Estrangelo Edessa"/>
+        <a:font script="Orya" typeface="Kalinga"/>
+        <a:font script="Mlym" typeface="Kartika"/>
+        <a:font script="Laoo" typeface="DokChampa"/>
+        <a:font script="Sinh" typeface="Iskoola Pota"/>
+        <a:font script="Mong" typeface="Mongolian Baiti"/>
+        <a:font script="Viet" typeface="Arial"/>
+        <a:font script="Uigh" typeface="Microsoft Uighur"/>
+        <a:font script="Geor" typeface="Sylfaen"/>
+        <a:font script="Armn" typeface="Arial"/>
+        <a:font script="Bugi" typeface="Leelawadee UI"/>
+        <a:font script="Bopo" typeface="Microsoft JhengHei"/>
+        <a:font script="Java" typeface="Javanese Text"/>
+        <a:font script="Lisu" typeface="Segoe UI"/>
+        <a:font script="Mymr" typeface="Myanmar Text"/>
+        <a:font script="Nkoo" typeface="Ebrima"/>
+        <a:font script="Olck" typeface="Nirmala UI"/>
+        <a:font script="Osma" typeface="Ebrima"/>
+        <a:font script="Phag" typeface="Phagspa"/>
+        <a:font script="Syrn" typeface="Estrangelo Edessa"/>
+        <a:font script="Syrj" typeface="Estrangelo Edessa"/>
+        <a:font script="Syre" typeface="Estrangelo Edessa"/>
+        <a:font script="Sora" typeface="Nirmala UI"/>
+        <a:font script="Tale" typeface="Microsoft Tai Le"/>
+        <a:font script="Talu" typeface="Microsoft New Tai Lue"/>
+        <a:font script="Tfng" typeface="Ebrima"/>
       </a:minorFont>
     </a:fontScheme>
     <a:fmtScheme name="Office">
@@ -6102,13 +6462,6 @@
         </a:gradFill>
       </a:fillStyleLst>
       <a:lnStyleLst>
-        <a:ln w="6350" cap="flat" cmpd="sng" algn="ctr">
-          <a:solidFill>
-            <a:schemeClr val="phClr"/>
-          </a:solidFill>
-          <a:prstDash val="solid"/>
-          <a:miter lim="800000"/>
-        </a:ln>
         <a:ln w="12700" cap="flat" cmpd="sng" algn="ctr">
           <a:solidFill>
             <a:schemeClr val="phClr"/>
@@ -6117,6 +6470,13 @@
           <a:miter lim="800000"/>
         </a:ln>
         <a:ln w="19050" cap="flat" cmpd="sng" algn="ctr">
+          <a:solidFill>
+            <a:schemeClr val="phClr"/>
+          </a:solidFill>
+          <a:prstDash val="solid"/>
+          <a:miter lim="800000"/>
+        </a:ln>
+        <a:ln w="25400" cap="flat" cmpd="sng" algn="ctr">
           <a:solidFill>
             <a:schemeClr val="phClr"/>
           </a:solidFill>
@@ -6181,11 +6541,31 @@
       </a:bgFillStyleLst>
     </a:fmtScheme>
   </a:themeElements>
-  <a:objectDefaults/>
+  <a:objectDefaults>
+    <a:lnDef>
+      <a:spPr/>
+      <a:bodyPr/>
+      <a:lstStyle/>
+      <a:style>
+        <a:lnRef idx="2">
+          <a:schemeClr val="accent1"/>
+        </a:lnRef>
+        <a:fillRef idx="0">
+          <a:schemeClr val="accent1"/>
+        </a:fillRef>
+        <a:effectRef idx="1">
+          <a:schemeClr val="accent1"/>
+        </a:effectRef>
+        <a:fontRef idx="minor">
+          <a:schemeClr val="tx1"/>
+        </a:fontRef>
+      </a:style>
+    </a:lnDef>
+  </a:objectDefaults>
   <a:extraClrSchemeLst/>
   <a:extLst>
     <a:ext uri="{05A4C25C-085E-4340-85A3-A5531E510DB2}">
-      <thm15:themeFamily xmlns:thm15="http://schemas.microsoft.com/office/thememl/2012/main" name="RegattaVTI" id="{FFC3BCE5-6357-41D1-8E67-3F85B69D7E86}" vid="{893A6374-FE17-48E5-8B62-678C1B11AA1B}"/>
+      <thm15:themeFamily xmlns:thm15="http://schemas.microsoft.com/office/thememl/2012/main" name="Office Theme" id="{2E142A2C-CD16-42D6-873A-C26D2A0506FA}" vid="{1BDDFF52-6CD6-40A5-AB3C-68EB2F1E4D0A}"/>
     </a:ext>
   </a:extLst>
 </a:theme>

--- a/Project/slides/CMSC-4200-Group1-Project.pptx
+++ b/Project/slides/CMSC-4200-Group1-Project.pptx
@@ -123,6 +123,9 @@
     <p:ext uri="{EFAFB233-063F-42B5-8137-9DF3F51BA10A}">
       <p15:sldGuideLst xmlns:p15="http://schemas.microsoft.com/office/powerpoint/2012/main"/>
     </p:ext>
+    <p:ext uri="{2D200454-40CA-4A62-9FC3-DE9A4176ACB9}">
+      <p15:notesGuideLst xmlns:p15="http://schemas.microsoft.com/office/powerpoint/2012/main"/>
+    </p:ext>
   </p:extLst>
 </p:presentation>
 </file>
@@ -140,7 +143,7 @@
   <pc:docChgLst>
     <pc:chgData name="Margo Bonal" userId="18c9fa0f-b53d-478b-9dc0-6ad88786c19f" providerId="ADAL" clId="{93D479E5-F67F-4B8A-A78F-A0B574A116B6}"/>
     <pc:docChg chg="undo redo custSel addSld delSld modSld sldOrd addMainMaster delMainMaster">
-      <pc:chgData name="Margo Bonal" userId="18c9fa0f-b53d-478b-9dc0-6ad88786c19f" providerId="ADAL" clId="{93D479E5-F67F-4B8A-A78F-A0B574A116B6}" dt="2026-03-20T14:51:43.451" v="2570" actId="404"/>
+      <pc:chgData name="Margo Bonal" userId="18c9fa0f-b53d-478b-9dc0-6ad88786c19f" providerId="ADAL" clId="{93D479E5-F67F-4B8A-A78F-A0B574A116B6}" dt="2026-03-21T22:01:42.363" v="2588" actId="20577"/>
       <pc:docMkLst>
         <pc:docMk/>
       </pc:docMkLst>
@@ -1037,7 +1040,7 @@
         </pc:spChg>
       </pc:sldChg>
       <pc:sldChg chg="addSp modSp new mod setBg">
-        <pc:chgData name="Margo Bonal" userId="18c9fa0f-b53d-478b-9dc0-6ad88786c19f" providerId="ADAL" clId="{93D479E5-F67F-4B8A-A78F-A0B574A116B6}" dt="2026-03-20T14:44:15.114" v="2457" actId="14"/>
+        <pc:chgData name="Margo Bonal" userId="18c9fa0f-b53d-478b-9dc0-6ad88786c19f" providerId="ADAL" clId="{93D479E5-F67F-4B8A-A78F-A0B574A116B6}" dt="2026-03-21T22:01:42.363" v="2588" actId="20577"/>
         <pc:sldMkLst>
           <pc:docMk/>
           <pc:sldMk cId="1605171173" sldId="263"/>
@@ -1051,7 +1054,7 @@
           </ac:spMkLst>
         </pc:spChg>
         <pc:spChg chg="mod">
-          <ac:chgData name="Margo Bonal" userId="18c9fa0f-b53d-478b-9dc0-6ad88786c19f" providerId="ADAL" clId="{93D479E5-F67F-4B8A-A78F-A0B574A116B6}" dt="2026-03-20T14:44:15.114" v="2457" actId="14"/>
+          <ac:chgData name="Margo Bonal" userId="18c9fa0f-b53d-478b-9dc0-6ad88786c19f" providerId="ADAL" clId="{93D479E5-F67F-4B8A-A78F-A0B574A116B6}" dt="2026-03-21T22:01:42.363" v="2588" actId="20577"/>
           <ac:spMkLst>
             <pc:docMk/>
             <pc:sldMk cId="1605171173" sldId="263"/>
@@ -1864,7 +1867,7 @@
         </pc:sldMkLst>
       </pc:sldChg>
       <pc:sldChg chg="addSp delSp modSp new mod">
-        <pc:chgData name="Margo Bonal" userId="18c9fa0f-b53d-478b-9dc0-6ad88786c19f" providerId="ADAL" clId="{93D479E5-F67F-4B8A-A78F-A0B574A116B6}" dt="2026-03-20T14:51:43.451" v="2570" actId="404"/>
+        <pc:chgData name="Margo Bonal" userId="18c9fa0f-b53d-478b-9dc0-6ad88786c19f" providerId="ADAL" clId="{93D479E5-F67F-4B8A-A78F-A0B574A116B6}" dt="2026-03-21T22:00:22.652" v="2574" actId="20577"/>
         <pc:sldMkLst>
           <pc:docMk/>
           <pc:sldMk cId="894408273" sldId="277"/>
@@ -1886,7 +1889,7 @@
           </ac:spMkLst>
         </pc:spChg>
         <pc:spChg chg="mod">
-          <ac:chgData name="Margo Bonal" userId="18c9fa0f-b53d-478b-9dc0-6ad88786c19f" providerId="ADAL" clId="{93D479E5-F67F-4B8A-A78F-A0B574A116B6}" dt="2026-03-20T14:15:14.865" v="2227" actId="14100"/>
+          <ac:chgData name="Margo Bonal" userId="18c9fa0f-b53d-478b-9dc0-6ad88786c19f" providerId="ADAL" clId="{93D479E5-F67F-4B8A-A78F-A0B574A116B6}" dt="2026-03-21T22:00:22.652" v="2574" actId="20577"/>
           <ac:spMkLst>
             <pc:docMk/>
             <pc:sldMk cId="894408273" sldId="277"/>
@@ -8563,7 +8566,7 @@
           <a:p>
             <a:fld id="{156D597D-8B24-4838-871A-61B024263B13}" type="datetimeFigureOut">
               <a:rPr lang="en-US" smtClean="0"/>
-              <a:t>3/20/2026</a:t>
+              <a:t>3/21/2026</a:t>
             </a:fld>
             <a:endParaRPr lang="en-US" dirty="0"/>
           </a:p>
@@ -8977,7 +8980,7 @@
           <a:p>
             <a:fld id="{3CADBD16-5BFB-4D9F-9646-C75D1B53BBB6}" type="datetimeFigureOut">
               <a:rPr lang="en-US" smtClean="0"/>
-              <a:t>3/20/2026</a:t>
+              <a:t>3/21/2026</a:t>
             </a:fld>
             <a:endParaRPr lang="en-US" dirty="0"/>
           </a:p>
@@ -9175,7 +9178,7 @@
           <a:p>
             <a:fld id="{3CADBD16-5BFB-4D9F-9646-C75D1B53BBB6}" type="datetimeFigureOut">
               <a:rPr lang="en-US" smtClean="0"/>
-              <a:t>3/20/2026</a:t>
+              <a:t>3/21/2026</a:t>
             </a:fld>
             <a:endParaRPr lang="en-US" dirty="0"/>
           </a:p>
@@ -9383,7 +9386,7 @@
           <a:p>
             <a:fld id="{3CADBD16-5BFB-4D9F-9646-C75D1B53BBB6}" type="datetimeFigureOut">
               <a:rPr lang="en-US" smtClean="0"/>
-              <a:t>3/20/2026</a:t>
+              <a:t>3/21/2026</a:t>
             </a:fld>
             <a:endParaRPr lang="en-US" dirty="0"/>
           </a:p>
@@ -9581,7 +9584,7 @@
           <a:p>
             <a:fld id="{3CADBD16-5BFB-4D9F-9646-C75D1B53BBB6}" type="datetimeFigureOut">
               <a:rPr lang="en-US" smtClean="0"/>
-              <a:t>3/20/2026</a:t>
+              <a:t>3/21/2026</a:t>
             </a:fld>
             <a:endParaRPr lang="en-US" dirty="0"/>
           </a:p>
@@ -9856,7 +9859,7 @@
           <a:p>
             <a:fld id="{3CADBD16-5BFB-4D9F-9646-C75D1B53BBB6}" type="datetimeFigureOut">
               <a:rPr lang="en-US" smtClean="0"/>
-              <a:t>3/20/2026</a:t>
+              <a:t>3/21/2026</a:t>
             </a:fld>
             <a:endParaRPr lang="en-US" dirty="0"/>
           </a:p>
@@ -10121,7 +10124,7 @@
           <a:p>
             <a:fld id="{3CADBD16-5BFB-4D9F-9646-C75D1B53BBB6}" type="datetimeFigureOut">
               <a:rPr lang="en-US" smtClean="0"/>
-              <a:t>3/20/2026</a:t>
+              <a:t>3/21/2026</a:t>
             </a:fld>
             <a:endParaRPr lang="en-US" dirty="0"/>
           </a:p>
@@ -10533,7 +10536,7 @@
           <a:p>
             <a:fld id="{3CADBD16-5BFB-4D9F-9646-C75D1B53BBB6}" type="datetimeFigureOut">
               <a:rPr lang="en-US" smtClean="0"/>
-              <a:t>3/20/2026</a:t>
+              <a:t>3/21/2026</a:t>
             </a:fld>
             <a:endParaRPr lang="en-US" dirty="0"/>
           </a:p>
@@ -10674,7 +10677,7 @@
           <a:p>
             <a:fld id="{3CADBD16-5BFB-4D9F-9646-C75D1B53BBB6}" type="datetimeFigureOut">
               <a:rPr lang="en-US" smtClean="0"/>
-              <a:t>3/20/2026</a:t>
+              <a:t>3/21/2026</a:t>
             </a:fld>
             <a:endParaRPr lang="en-US" dirty="0"/>
           </a:p>
@@ -10787,7 +10790,7 @@
           <a:p>
             <a:fld id="{3CADBD16-5BFB-4D9F-9646-C75D1B53BBB6}" type="datetimeFigureOut">
               <a:rPr lang="en-US" smtClean="0"/>
-              <a:t>3/20/2026</a:t>
+              <a:t>3/21/2026</a:t>
             </a:fld>
             <a:endParaRPr lang="en-US" dirty="0"/>
           </a:p>
@@ -11098,7 +11101,7 @@
           <a:p>
             <a:fld id="{3CADBD16-5BFB-4D9F-9646-C75D1B53BBB6}" type="datetimeFigureOut">
               <a:rPr lang="en-US" smtClean="0"/>
-              <a:t>3/20/2026</a:t>
+              <a:t>3/21/2026</a:t>
             </a:fld>
             <a:endParaRPr lang="en-US" dirty="0"/>
           </a:p>
@@ -11386,7 +11389,7 @@
           <a:p>
             <a:fld id="{3CADBD16-5BFB-4D9F-9646-C75D1B53BBB6}" type="datetimeFigureOut">
               <a:rPr lang="en-US" smtClean="0"/>
-              <a:t>3/20/2026</a:t>
+              <a:t>3/21/2026</a:t>
             </a:fld>
             <a:endParaRPr lang="en-US" dirty="0"/>
           </a:p>
@@ -11628,7 +11631,7 @@
             <a:fld id="{3CADBD16-5BFB-4D9F-9646-C75D1B53BBB6}" type="datetimeFigureOut">
               <a:rPr lang="en-US" smtClean="0"/>
               <a:pPr/>
-              <a:t>3/20/2026</a:t>
+              <a:t>3/21/2026</a:t>
             </a:fld>
             <a:endParaRPr lang="en-US" dirty="0"/>
           </a:p>
@@ -15084,7 +15087,7 @@
           <a:p>
             <a:r>
               <a:rPr lang="en-US" dirty="0"/>
-              <a:t> model prompted, </a:t>
+              <a:t> Model prompted</a:t>
             </a:r>
           </a:p>
           <a:p>
@@ -16222,14 +16225,22 @@
             <a:pPr lvl="1"/>
             <a:r>
               <a:rPr lang="en-US" sz="1800" dirty="0"/>
-              <a:t>use secure salted password hashing with an algorithm such as Argon2 or bcrypt rather than encryption. </a:t>
+              <a:t>Use secure salted password hashing with an algorithm such as Argon2 or bcrypt rather than encryption. </a:t>
             </a:r>
           </a:p>
           <a:p>
             <a:pPr lvl="1"/>
             <a:r>
               <a:rPr lang="en-US" sz="1800" dirty="0"/>
-              <a:t>designed specifically for password storage, provide strong protection against brute force attacks, and are fast enough that hashing and verification</a:t>
+              <a:t>D</a:t>
+            </a:r>
+            <a:r>
+              <a:rPr lang="en-US" sz="1800"/>
+              <a:t>esigned </a:t>
+            </a:r>
+            <a:r>
+              <a:rPr lang="en-US" sz="1800" dirty="0"/>
+              <a:t>specifically for password storage, provide strong protection against brute force attacks, and are fast enough that hashing and verification</a:t>
             </a:r>
             <a:endParaRPr lang="en-US" sz="1050" dirty="0"/>
           </a:p>
@@ -16251,21 +16262,21 @@
             <a:pPr lvl="1"/>
             <a:r>
               <a:rPr lang="en-US" sz="1800" dirty="0"/>
-              <a:t>combination of asymmetric and symmetric encryption reduces slow and CPU intensive processing. </a:t>
+              <a:t>Combination of asymmetric and symmetric encryption reduces slow and CPU intensive processing. </a:t>
             </a:r>
           </a:p>
           <a:p>
             <a:pPr lvl="1"/>
             <a:r>
               <a:rPr lang="en-US" sz="1800" dirty="0"/>
-              <a:t>session key reuse within secure time window</a:t>
+              <a:t>Session key reuse within secure time window</a:t>
             </a:r>
           </a:p>
           <a:p>
             <a:pPr lvl="1"/>
             <a:r>
               <a:rPr lang="en-US" sz="1800" dirty="0"/>
-              <a:t>buffering of large data streams</a:t>
+              <a:t>Buffering of large data streams</a:t>
             </a:r>
             <a:endParaRPr lang="en-US" sz="1050" dirty="0"/>
           </a:p>
@@ -16286,7 +16297,7 @@
             <a:pPr lvl="2"/>
             <a:r>
               <a:rPr lang="en-US" sz="1700" dirty="0"/>
-              <a:t>apply XOR, and bit rotations to each character of the license number, constant time encryption can be achieved.</a:t>
+              <a:t>Apply XOR, and bit rotations to each character of the license number, constant time encryption can be achieved.</a:t>
             </a:r>
           </a:p>
           <a:p>
@@ -16300,7 +16311,7 @@
             <a:pPr lvl="2"/>
             <a:r>
               <a:rPr lang="en-US" sz="1700" dirty="0"/>
-              <a:t>encryption keys need to be stored by a balanced binary search tree. For further processing, they must be selected with a key based on a hash of the license number.</a:t>
+              <a:t>Encryption keys need to be stored by a balanced binary search tree. For further processing, they must be selected with a key based on a hash of the license number.</a:t>
             </a:r>
             <a:endParaRPr lang="en-US" sz="1000" dirty="0"/>
           </a:p>

--- a/Project/slides/CMSC-4200-Group1-Project.pptx
+++ b/Project/slides/CMSC-4200-Group1-Project.pptx
@@ -143,7 +143,7 @@
   <pc:docChgLst>
     <pc:chgData name="Margo Bonal" userId="18c9fa0f-b53d-478b-9dc0-6ad88786c19f" providerId="ADAL" clId="{93D479E5-F67F-4B8A-A78F-A0B574A116B6}"/>
     <pc:docChg chg="undo redo custSel addSld delSld modSld sldOrd addMainMaster delMainMaster">
-      <pc:chgData name="Margo Bonal" userId="18c9fa0f-b53d-478b-9dc0-6ad88786c19f" providerId="ADAL" clId="{93D479E5-F67F-4B8A-A78F-A0B574A116B6}" dt="2026-03-21T22:01:42.363" v="2588" actId="20577"/>
+      <pc:chgData name="Margo Bonal" userId="18c9fa0f-b53d-478b-9dc0-6ad88786c19f" providerId="ADAL" clId="{93D479E5-F67F-4B8A-A78F-A0B574A116B6}" dt="2026-03-23T15:43:49.810" v="2724" actId="26606"/>
       <pc:docMkLst>
         <pc:docMk/>
       </pc:docMkLst>
@@ -159,30 +159,6 @@
             <pc:docMk/>
             <pc:sldMk cId="2004418569" sldId="258"/>
             <ac:spMk id="2" creationId="{00EA85E8-01FB-8E12-4E0B-4BEF5FD40E7E}"/>
-          </ac:spMkLst>
-        </pc:spChg>
-        <pc:spChg chg="del mod">
-          <ac:chgData name="Margo Bonal" userId="18c9fa0f-b53d-478b-9dc0-6ad88786c19f" providerId="ADAL" clId="{93D479E5-F67F-4B8A-A78F-A0B574A116B6}" dt="2026-03-20T13:01:36.131" v="596" actId="26606"/>
-          <ac:spMkLst>
-            <pc:docMk/>
-            <pc:sldMk cId="2004418569" sldId="258"/>
-            <ac:spMk id="3" creationId="{E2B4C7DE-8123-211E-1B65-93CCDA8F9A46}"/>
-          </ac:spMkLst>
-        </pc:spChg>
-        <pc:spChg chg="add del">
-          <ac:chgData name="Margo Bonal" userId="18c9fa0f-b53d-478b-9dc0-6ad88786c19f" providerId="ADAL" clId="{93D479E5-F67F-4B8A-A78F-A0B574A116B6}" dt="2026-03-20T13:01:36.131" v="596" actId="26606"/>
-          <ac:spMkLst>
-            <pc:docMk/>
-            <pc:sldMk cId="2004418569" sldId="258"/>
-            <ac:spMk id="8" creationId="{DBF61EA3-B236-439E-9C0B-340980D56BEE}"/>
-          </ac:spMkLst>
-        </pc:spChg>
-        <pc:spChg chg="add del">
-          <ac:chgData name="Margo Bonal" userId="18c9fa0f-b53d-478b-9dc0-6ad88786c19f" providerId="ADAL" clId="{93D479E5-F67F-4B8A-A78F-A0B574A116B6}" dt="2026-03-20T13:01:36.131" v="596" actId="26606"/>
-          <ac:spMkLst>
-            <pc:docMk/>
-            <pc:sldMk cId="2004418569" sldId="258"/>
-            <ac:spMk id="14" creationId="{E659831F-0D9A-4C63-9EBB-8435B85A440F}"/>
           </ac:spMkLst>
         </pc:spChg>
         <pc:spChg chg="add">
@@ -217,14 +193,6 @@
             <ac:spMk id="26" creationId="{063BBA22-50EA-4C4D-BE05-F1CE4E63AA56}"/>
           </ac:spMkLst>
         </pc:spChg>
-        <pc:grpChg chg="add del">
-          <ac:chgData name="Margo Bonal" userId="18c9fa0f-b53d-478b-9dc0-6ad88786c19f" providerId="ADAL" clId="{93D479E5-F67F-4B8A-A78F-A0B574A116B6}" dt="2026-03-20T13:01:36.131" v="596" actId="26606"/>
-          <ac:grpSpMkLst>
-            <pc:docMk/>
-            <pc:sldMk cId="2004418569" sldId="258"/>
-            <ac:grpSpMk id="10" creationId="{28FAF094-D087-493F-8DF9-A486C2D6BBAA}"/>
-          </ac:grpSpMkLst>
-        </pc:grpChg>
         <pc:graphicFrameChg chg="add modGraphic">
           <ac:chgData name="Margo Bonal" userId="18c9fa0f-b53d-478b-9dc0-6ad88786c19f" providerId="ADAL" clId="{93D479E5-F67F-4B8A-A78F-A0B574A116B6}" dt="2026-03-20T13:05:04.385" v="716" actId="26606"/>
           <ac:graphicFrameMkLst>
@@ -233,811 +201,6 @@
             <ac:graphicFrameMk id="16" creationId="{726F1BD9-27E2-2783-22C4-708E5875FC4D}"/>
           </ac:graphicFrameMkLst>
         </pc:graphicFrameChg>
-      </pc:sldChg>
-      <pc:sldChg chg="addSp delSp modSp new del mod setBg">
-        <pc:chgData name="Margo Bonal" userId="18c9fa0f-b53d-478b-9dc0-6ad88786c19f" providerId="ADAL" clId="{93D479E5-F67F-4B8A-A78F-A0B574A116B6}" dt="2026-03-20T14:04:49.375" v="2080" actId="2696"/>
-        <pc:sldMkLst>
-          <pc:docMk/>
-          <pc:sldMk cId="149795576" sldId="260"/>
-        </pc:sldMkLst>
-        <pc:spChg chg="mod">
-          <ac:chgData name="Margo Bonal" userId="18c9fa0f-b53d-478b-9dc0-6ad88786c19f" providerId="ADAL" clId="{93D479E5-F67F-4B8A-A78F-A0B574A116B6}" dt="2026-03-20T14:00:56.484" v="2055" actId="14100"/>
-          <ac:spMkLst>
-            <pc:docMk/>
-            <pc:sldMk cId="149795576" sldId="260"/>
-            <ac:spMk id="2" creationId="{3A852955-2551-12FF-6416-32BAB737FFD9}"/>
-          </ac:spMkLst>
-        </pc:spChg>
-        <pc:spChg chg="add del mod">
-          <ac:chgData name="Margo Bonal" userId="18c9fa0f-b53d-478b-9dc0-6ad88786c19f" providerId="ADAL" clId="{93D479E5-F67F-4B8A-A78F-A0B574A116B6}" dt="2026-03-20T13:02:15.173" v="603" actId="26606"/>
-          <ac:spMkLst>
-            <pc:docMk/>
-            <pc:sldMk cId="149795576" sldId="260"/>
-            <ac:spMk id="3" creationId="{5BC4AAB4-32DD-0202-4047-F9245BE2A8CD}"/>
-          </ac:spMkLst>
-        </pc:spChg>
-        <pc:spChg chg="add del mod">
-          <ac:chgData name="Margo Bonal" userId="18c9fa0f-b53d-478b-9dc0-6ad88786c19f" providerId="ADAL" clId="{93D479E5-F67F-4B8A-A78F-A0B574A116B6}" dt="2026-03-20T13:46:25.708" v="1754" actId="478"/>
-          <ac:spMkLst>
-            <pc:docMk/>
-            <pc:sldMk cId="149795576" sldId="260"/>
-            <ac:spMk id="5" creationId="{364B1C2D-0F5D-67ED-CCFB-D80D3EAA8C2B}"/>
-          </ac:spMkLst>
-        </pc:spChg>
-        <pc:spChg chg="add del mod">
-          <ac:chgData name="Margo Bonal" userId="18c9fa0f-b53d-478b-9dc0-6ad88786c19f" providerId="ADAL" clId="{93D479E5-F67F-4B8A-A78F-A0B574A116B6}" dt="2026-03-20T13:35:09.199" v="1371" actId="478"/>
-          <ac:spMkLst>
-            <pc:docMk/>
-            <pc:sldMk cId="149795576" sldId="260"/>
-            <ac:spMk id="7" creationId="{ABFBEDA7-1556-68F1-6843-ED8DF8B62AEC}"/>
-          </ac:spMkLst>
-        </pc:spChg>
-        <pc:spChg chg="add del">
-          <ac:chgData name="Margo Bonal" userId="18c9fa0f-b53d-478b-9dc0-6ad88786c19f" providerId="ADAL" clId="{93D479E5-F67F-4B8A-A78F-A0B574A116B6}" dt="2026-03-20T13:02:15.173" v="603" actId="26606"/>
-          <ac:spMkLst>
-            <pc:docMk/>
-            <pc:sldMk cId="149795576" sldId="260"/>
-            <ac:spMk id="8" creationId="{B6CDA21F-E7AF-4C75-8395-33F58D5B0E45}"/>
-          </ac:spMkLst>
-        </pc:spChg>
-        <pc:spChg chg="add del mod">
-          <ac:chgData name="Margo Bonal" userId="18c9fa0f-b53d-478b-9dc0-6ad88786c19f" providerId="ADAL" clId="{93D479E5-F67F-4B8A-A78F-A0B574A116B6}" dt="2026-03-20T13:48:12.587" v="1795" actId="14100"/>
-          <ac:spMkLst>
-            <pc:docMk/>
-            <pc:sldMk cId="149795576" sldId="260"/>
-            <ac:spMk id="9" creationId="{F7622BCF-0D4A-298F-5187-F21605FF3611}"/>
-          </ac:spMkLst>
-        </pc:spChg>
-        <pc:spChg chg="add mod">
-          <ac:chgData name="Margo Bonal" userId="18c9fa0f-b53d-478b-9dc0-6ad88786c19f" providerId="ADAL" clId="{93D479E5-F67F-4B8A-A78F-A0B574A116B6}" dt="2026-03-20T13:46:40.978" v="1757" actId="1076"/>
-          <ac:spMkLst>
-            <pc:docMk/>
-            <pc:sldMk cId="149795576" sldId="260"/>
-            <ac:spMk id="14" creationId="{D536A8C2-B60A-B6F0-7A01-15675951A818}"/>
-          </ac:spMkLst>
-        </pc:spChg>
-        <pc:spChg chg="add del">
-          <ac:chgData name="Margo Bonal" userId="18c9fa0f-b53d-478b-9dc0-6ad88786c19f" providerId="ADAL" clId="{93D479E5-F67F-4B8A-A78F-A0B574A116B6}" dt="2026-03-20T13:02:15.173" v="603" actId="26606"/>
-          <ac:spMkLst>
-            <pc:docMk/>
-            <pc:sldMk cId="149795576" sldId="260"/>
-            <ac:spMk id="15" creationId="{D5B0017B-2ECA-49AF-B397-DC140825DF8D}"/>
-          </ac:spMkLst>
-        </pc:spChg>
-        <pc:spChg chg="add mod">
-          <ac:chgData name="Margo Bonal" userId="18c9fa0f-b53d-478b-9dc0-6ad88786c19f" providerId="ADAL" clId="{93D479E5-F67F-4B8A-A78F-A0B574A116B6}" dt="2026-03-20T13:48:12.587" v="1795" actId="14100"/>
-          <ac:spMkLst>
-            <pc:docMk/>
-            <pc:sldMk cId="149795576" sldId="260"/>
-            <ac:spMk id="16" creationId="{240BE89B-A3FC-3E1B-8C18-904BFA3EAA62}"/>
-          </ac:spMkLst>
-        </pc:spChg>
-        <pc:spChg chg="add del mod">
-          <ac:chgData name="Margo Bonal" userId="18c9fa0f-b53d-478b-9dc0-6ad88786c19f" providerId="ADAL" clId="{93D479E5-F67F-4B8A-A78F-A0B574A116B6}" dt="2026-03-20T13:49:39.320" v="1848" actId="478"/>
-          <ac:spMkLst>
-            <pc:docMk/>
-            <pc:sldMk cId="149795576" sldId="260"/>
-            <ac:spMk id="18" creationId="{ABD9A393-D609-BC18-55F5-9A6C22FD18F2}"/>
-          </ac:spMkLst>
-        </pc:spChg>
-        <pc:spChg chg="add del">
-          <ac:chgData name="Margo Bonal" userId="18c9fa0f-b53d-478b-9dc0-6ad88786c19f" providerId="ADAL" clId="{93D479E5-F67F-4B8A-A78F-A0B574A116B6}" dt="2026-03-20T13:02:04.645" v="598" actId="26606"/>
-          <ac:spMkLst>
-            <pc:docMk/>
-            <pc:sldMk cId="149795576" sldId="260"/>
-            <ac:spMk id="23" creationId="{BACC6370-2D7E-4714-9D71-7542949D7D5D}"/>
-          </ac:spMkLst>
-        </pc:spChg>
-        <pc:spChg chg="add del">
-          <ac:chgData name="Margo Bonal" userId="18c9fa0f-b53d-478b-9dc0-6ad88786c19f" providerId="ADAL" clId="{93D479E5-F67F-4B8A-A78F-A0B574A116B6}" dt="2026-03-20T13:02:04.645" v="598" actId="26606"/>
-          <ac:spMkLst>
-            <pc:docMk/>
-            <pc:sldMk cId="149795576" sldId="260"/>
-            <ac:spMk id="25" creationId="{F68B3F68-107C-434F-AA38-110D5EA91B85}"/>
-          </ac:spMkLst>
-        </pc:spChg>
-        <pc:spChg chg="add del">
-          <ac:chgData name="Margo Bonal" userId="18c9fa0f-b53d-478b-9dc0-6ad88786c19f" providerId="ADAL" clId="{93D479E5-F67F-4B8A-A78F-A0B574A116B6}" dt="2026-03-20T13:02:04.645" v="598" actId="26606"/>
-          <ac:spMkLst>
-            <pc:docMk/>
-            <pc:sldMk cId="149795576" sldId="260"/>
-            <ac:spMk id="27" creationId="{AAD0DBB9-1A4B-4391-81D4-CB19F9AB918A}"/>
-          </ac:spMkLst>
-        </pc:spChg>
-        <pc:spChg chg="add del">
-          <ac:chgData name="Margo Bonal" userId="18c9fa0f-b53d-478b-9dc0-6ad88786c19f" providerId="ADAL" clId="{93D479E5-F67F-4B8A-A78F-A0B574A116B6}" dt="2026-03-20T13:02:04.645" v="598" actId="26606"/>
-          <ac:spMkLst>
-            <pc:docMk/>
-            <pc:sldMk cId="149795576" sldId="260"/>
-            <ac:spMk id="29" creationId="{063BBA22-50EA-4C4D-BE05-F1CE4E63AA56}"/>
-          </ac:spMkLst>
-        </pc:spChg>
-        <pc:spChg chg="add del">
-          <ac:chgData name="Margo Bonal" userId="18c9fa0f-b53d-478b-9dc0-6ad88786c19f" providerId="ADAL" clId="{93D479E5-F67F-4B8A-A78F-A0B574A116B6}" dt="2026-03-20T13:02:12.653" v="600" actId="26606"/>
-          <ac:spMkLst>
-            <pc:docMk/>
-            <pc:sldMk cId="149795576" sldId="260"/>
-            <ac:spMk id="31" creationId="{BACC6370-2D7E-4714-9D71-7542949D7D5D}"/>
-          </ac:spMkLst>
-        </pc:spChg>
-        <pc:spChg chg="add del">
-          <ac:chgData name="Margo Bonal" userId="18c9fa0f-b53d-478b-9dc0-6ad88786c19f" providerId="ADAL" clId="{93D479E5-F67F-4B8A-A78F-A0B574A116B6}" dt="2026-03-20T13:02:12.653" v="600" actId="26606"/>
-          <ac:spMkLst>
-            <pc:docMk/>
-            <pc:sldMk cId="149795576" sldId="260"/>
-            <ac:spMk id="32" creationId="{F68B3F68-107C-434F-AA38-110D5EA91B85}"/>
-          </ac:spMkLst>
-        </pc:spChg>
-        <pc:spChg chg="add del">
-          <ac:chgData name="Margo Bonal" userId="18c9fa0f-b53d-478b-9dc0-6ad88786c19f" providerId="ADAL" clId="{93D479E5-F67F-4B8A-A78F-A0B574A116B6}" dt="2026-03-20T13:02:12.653" v="600" actId="26606"/>
-          <ac:spMkLst>
-            <pc:docMk/>
-            <pc:sldMk cId="149795576" sldId="260"/>
-            <ac:spMk id="33" creationId="{AAD0DBB9-1A4B-4391-81D4-CB19F9AB918A}"/>
-          </ac:spMkLst>
-        </pc:spChg>
-        <pc:spChg chg="add del">
-          <ac:chgData name="Margo Bonal" userId="18c9fa0f-b53d-478b-9dc0-6ad88786c19f" providerId="ADAL" clId="{93D479E5-F67F-4B8A-A78F-A0B574A116B6}" dt="2026-03-20T13:02:12.653" v="600" actId="26606"/>
-          <ac:spMkLst>
-            <pc:docMk/>
-            <pc:sldMk cId="149795576" sldId="260"/>
-            <ac:spMk id="34" creationId="{063BBA22-50EA-4C4D-BE05-F1CE4E63AA56}"/>
-          </ac:spMkLst>
-        </pc:spChg>
-        <pc:spChg chg="add del">
-          <ac:chgData name="Margo Bonal" userId="18c9fa0f-b53d-478b-9dc0-6ad88786c19f" providerId="ADAL" clId="{93D479E5-F67F-4B8A-A78F-A0B574A116B6}" dt="2026-03-20T13:02:15.130" v="602" actId="26606"/>
-          <ac:spMkLst>
-            <pc:docMk/>
-            <pc:sldMk cId="149795576" sldId="260"/>
-            <ac:spMk id="37" creationId="{B6CDA21F-E7AF-4C75-8395-33F58D5B0E45}"/>
-          </ac:spMkLst>
-        </pc:spChg>
-        <pc:spChg chg="add del">
-          <ac:chgData name="Margo Bonal" userId="18c9fa0f-b53d-478b-9dc0-6ad88786c19f" providerId="ADAL" clId="{93D479E5-F67F-4B8A-A78F-A0B574A116B6}" dt="2026-03-20T13:02:15.130" v="602" actId="26606"/>
-          <ac:spMkLst>
-            <pc:docMk/>
-            <pc:sldMk cId="149795576" sldId="260"/>
-            <ac:spMk id="42" creationId="{D5B0017B-2ECA-49AF-B397-DC140825DF8D}"/>
-          </ac:spMkLst>
-        </pc:spChg>
-        <pc:spChg chg="add del">
-          <ac:chgData name="Margo Bonal" userId="18c9fa0f-b53d-478b-9dc0-6ad88786c19f" providerId="ADAL" clId="{93D479E5-F67F-4B8A-A78F-A0B574A116B6}" dt="2026-03-20T13:02:24.620" v="605" actId="26606"/>
-          <ac:spMkLst>
-            <pc:docMk/>
-            <pc:sldMk cId="149795576" sldId="260"/>
-            <ac:spMk id="46" creationId="{BACC6370-2D7E-4714-9D71-7542949D7D5D}"/>
-          </ac:spMkLst>
-        </pc:spChg>
-        <pc:spChg chg="add del">
-          <ac:chgData name="Margo Bonal" userId="18c9fa0f-b53d-478b-9dc0-6ad88786c19f" providerId="ADAL" clId="{93D479E5-F67F-4B8A-A78F-A0B574A116B6}" dt="2026-03-20T13:02:24.620" v="605" actId="26606"/>
-          <ac:spMkLst>
-            <pc:docMk/>
-            <pc:sldMk cId="149795576" sldId="260"/>
-            <ac:spMk id="47" creationId="{F68B3F68-107C-434F-AA38-110D5EA91B85}"/>
-          </ac:spMkLst>
-        </pc:spChg>
-        <pc:spChg chg="add del">
-          <ac:chgData name="Margo Bonal" userId="18c9fa0f-b53d-478b-9dc0-6ad88786c19f" providerId="ADAL" clId="{93D479E5-F67F-4B8A-A78F-A0B574A116B6}" dt="2026-03-20T13:02:24.620" v="605" actId="26606"/>
-          <ac:spMkLst>
-            <pc:docMk/>
-            <pc:sldMk cId="149795576" sldId="260"/>
-            <ac:spMk id="48" creationId="{AAD0DBB9-1A4B-4391-81D4-CB19F9AB918A}"/>
-          </ac:spMkLst>
-        </pc:spChg>
-        <pc:spChg chg="add del">
-          <ac:chgData name="Margo Bonal" userId="18c9fa0f-b53d-478b-9dc0-6ad88786c19f" providerId="ADAL" clId="{93D479E5-F67F-4B8A-A78F-A0B574A116B6}" dt="2026-03-20T13:02:24.620" v="605" actId="26606"/>
-          <ac:spMkLst>
-            <pc:docMk/>
-            <pc:sldMk cId="149795576" sldId="260"/>
-            <ac:spMk id="49" creationId="{063BBA22-50EA-4C4D-BE05-F1CE4E63AA56}"/>
-          </ac:spMkLst>
-        </pc:spChg>
-        <pc:spChg chg="add del">
-          <ac:chgData name="Margo Bonal" userId="18c9fa0f-b53d-478b-9dc0-6ad88786c19f" providerId="ADAL" clId="{93D479E5-F67F-4B8A-A78F-A0B574A116B6}" dt="2026-03-20T13:04:39.720" v="712" actId="26606"/>
-          <ac:spMkLst>
-            <pc:docMk/>
-            <pc:sldMk cId="149795576" sldId="260"/>
-            <ac:spMk id="55" creationId="{BACC6370-2D7E-4714-9D71-7542949D7D5D}"/>
-          </ac:spMkLst>
-        </pc:spChg>
-        <pc:spChg chg="add del">
-          <ac:chgData name="Margo Bonal" userId="18c9fa0f-b53d-478b-9dc0-6ad88786c19f" providerId="ADAL" clId="{93D479E5-F67F-4B8A-A78F-A0B574A116B6}" dt="2026-03-20T13:04:39.720" v="712" actId="26606"/>
-          <ac:spMkLst>
-            <pc:docMk/>
-            <pc:sldMk cId="149795576" sldId="260"/>
-            <ac:spMk id="57" creationId="{F68B3F68-107C-434F-AA38-110D5EA91B85}"/>
-          </ac:spMkLst>
-        </pc:spChg>
-        <pc:spChg chg="add del">
-          <ac:chgData name="Margo Bonal" userId="18c9fa0f-b53d-478b-9dc0-6ad88786c19f" providerId="ADAL" clId="{93D479E5-F67F-4B8A-A78F-A0B574A116B6}" dt="2026-03-20T13:04:39.720" v="712" actId="26606"/>
-          <ac:spMkLst>
-            <pc:docMk/>
-            <pc:sldMk cId="149795576" sldId="260"/>
-            <ac:spMk id="59" creationId="{AAD0DBB9-1A4B-4391-81D4-CB19F9AB918A}"/>
-          </ac:spMkLst>
-        </pc:spChg>
-        <pc:spChg chg="add del">
-          <ac:chgData name="Margo Bonal" userId="18c9fa0f-b53d-478b-9dc0-6ad88786c19f" providerId="ADAL" clId="{93D479E5-F67F-4B8A-A78F-A0B574A116B6}" dt="2026-03-20T13:04:39.720" v="712" actId="26606"/>
-          <ac:spMkLst>
-            <pc:docMk/>
-            <pc:sldMk cId="149795576" sldId="260"/>
-            <ac:spMk id="61" creationId="{063BBA22-50EA-4C4D-BE05-F1CE4E63AA56}"/>
-          </ac:spMkLst>
-        </pc:spChg>
-        <pc:spChg chg="add del">
-          <ac:chgData name="Margo Bonal" userId="18c9fa0f-b53d-478b-9dc0-6ad88786c19f" providerId="ADAL" clId="{93D479E5-F67F-4B8A-A78F-A0B574A116B6}" dt="2026-03-20T13:04:26.816" v="703" actId="26606"/>
-          <ac:spMkLst>
-            <pc:docMk/>
-            <pc:sldMk cId="149795576" sldId="260"/>
-            <ac:spMk id="66" creationId="{2659FDB4-FCBE-4A89-B46D-43D4FA54464D}"/>
-          </ac:spMkLst>
-        </pc:spChg>
-        <pc:spChg chg="add del">
-          <ac:chgData name="Margo Bonal" userId="18c9fa0f-b53d-478b-9dc0-6ad88786c19f" providerId="ADAL" clId="{93D479E5-F67F-4B8A-A78F-A0B574A116B6}" dt="2026-03-20T13:04:29.792" v="705" actId="26606"/>
-          <ac:spMkLst>
-            <pc:docMk/>
-            <pc:sldMk cId="149795576" sldId="260"/>
-            <ac:spMk id="70" creationId="{BACC6370-2D7E-4714-9D71-7542949D7D5D}"/>
-          </ac:spMkLst>
-        </pc:spChg>
-        <pc:spChg chg="add del">
-          <ac:chgData name="Margo Bonal" userId="18c9fa0f-b53d-478b-9dc0-6ad88786c19f" providerId="ADAL" clId="{93D479E5-F67F-4B8A-A78F-A0B574A116B6}" dt="2026-03-20T13:04:29.792" v="705" actId="26606"/>
-          <ac:spMkLst>
-            <pc:docMk/>
-            <pc:sldMk cId="149795576" sldId="260"/>
-            <ac:spMk id="71" creationId="{F68B3F68-107C-434F-AA38-110D5EA91B85}"/>
-          </ac:spMkLst>
-        </pc:spChg>
-        <pc:spChg chg="add del">
-          <ac:chgData name="Margo Bonal" userId="18c9fa0f-b53d-478b-9dc0-6ad88786c19f" providerId="ADAL" clId="{93D479E5-F67F-4B8A-A78F-A0B574A116B6}" dt="2026-03-20T13:04:29.792" v="705" actId="26606"/>
-          <ac:spMkLst>
-            <pc:docMk/>
-            <pc:sldMk cId="149795576" sldId="260"/>
-            <ac:spMk id="72" creationId="{AAD0DBB9-1A4B-4391-81D4-CB19F9AB918A}"/>
-          </ac:spMkLst>
-        </pc:spChg>
-        <pc:spChg chg="add del">
-          <ac:chgData name="Margo Bonal" userId="18c9fa0f-b53d-478b-9dc0-6ad88786c19f" providerId="ADAL" clId="{93D479E5-F67F-4B8A-A78F-A0B574A116B6}" dt="2026-03-20T13:04:29.792" v="705" actId="26606"/>
-          <ac:spMkLst>
-            <pc:docMk/>
-            <pc:sldMk cId="149795576" sldId="260"/>
-            <ac:spMk id="73" creationId="{063BBA22-50EA-4C4D-BE05-F1CE4E63AA56}"/>
-          </ac:spMkLst>
-        </pc:spChg>
-        <pc:spChg chg="add del">
-          <ac:chgData name="Margo Bonal" userId="18c9fa0f-b53d-478b-9dc0-6ad88786c19f" providerId="ADAL" clId="{93D479E5-F67F-4B8A-A78F-A0B574A116B6}" dt="2026-03-20T13:04:35.380" v="707" actId="26606"/>
-          <ac:spMkLst>
-            <pc:docMk/>
-            <pc:sldMk cId="149795576" sldId="260"/>
-            <ac:spMk id="75" creationId="{BACC6370-2D7E-4714-9D71-7542949D7D5D}"/>
-          </ac:spMkLst>
-        </pc:spChg>
-        <pc:spChg chg="add del">
-          <ac:chgData name="Margo Bonal" userId="18c9fa0f-b53d-478b-9dc0-6ad88786c19f" providerId="ADAL" clId="{93D479E5-F67F-4B8A-A78F-A0B574A116B6}" dt="2026-03-20T13:04:35.380" v="707" actId="26606"/>
-          <ac:spMkLst>
-            <pc:docMk/>
-            <pc:sldMk cId="149795576" sldId="260"/>
-            <ac:spMk id="76" creationId="{F68B3F68-107C-434F-AA38-110D5EA91B85}"/>
-          </ac:spMkLst>
-        </pc:spChg>
-        <pc:spChg chg="add del">
-          <ac:chgData name="Margo Bonal" userId="18c9fa0f-b53d-478b-9dc0-6ad88786c19f" providerId="ADAL" clId="{93D479E5-F67F-4B8A-A78F-A0B574A116B6}" dt="2026-03-20T13:04:35.380" v="707" actId="26606"/>
-          <ac:spMkLst>
-            <pc:docMk/>
-            <pc:sldMk cId="149795576" sldId="260"/>
-            <ac:spMk id="77" creationId="{AAD0DBB9-1A4B-4391-81D4-CB19F9AB918A}"/>
-          </ac:spMkLst>
-        </pc:spChg>
-        <pc:spChg chg="add del">
-          <ac:chgData name="Margo Bonal" userId="18c9fa0f-b53d-478b-9dc0-6ad88786c19f" providerId="ADAL" clId="{93D479E5-F67F-4B8A-A78F-A0B574A116B6}" dt="2026-03-20T13:04:35.380" v="707" actId="26606"/>
-          <ac:spMkLst>
-            <pc:docMk/>
-            <pc:sldMk cId="149795576" sldId="260"/>
-            <ac:spMk id="78" creationId="{063BBA22-50EA-4C4D-BE05-F1CE4E63AA56}"/>
-          </ac:spMkLst>
-        </pc:spChg>
-        <pc:spChg chg="add del">
-          <ac:chgData name="Margo Bonal" userId="18c9fa0f-b53d-478b-9dc0-6ad88786c19f" providerId="ADAL" clId="{93D479E5-F67F-4B8A-A78F-A0B574A116B6}" dt="2026-03-20T13:04:37.645" v="709" actId="26606"/>
-          <ac:spMkLst>
-            <pc:docMk/>
-            <pc:sldMk cId="149795576" sldId="260"/>
-            <ac:spMk id="80" creationId="{BACC6370-2D7E-4714-9D71-7542949D7D5D}"/>
-          </ac:spMkLst>
-        </pc:spChg>
-        <pc:spChg chg="add del">
-          <ac:chgData name="Margo Bonal" userId="18c9fa0f-b53d-478b-9dc0-6ad88786c19f" providerId="ADAL" clId="{93D479E5-F67F-4B8A-A78F-A0B574A116B6}" dt="2026-03-20T13:04:37.645" v="709" actId="26606"/>
-          <ac:spMkLst>
-            <pc:docMk/>
-            <pc:sldMk cId="149795576" sldId="260"/>
-            <ac:spMk id="81" creationId="{F68B3F68-107C-434F-AA38-110D5EA91B85}"/>
-          </ac:spMkLst>
-        </pc:spChg>
-        <pc:spChg chg="add del">
-          <ac:chgData name="Margo Bonal" userId="18c9fa0f-b53d-478b-9dc0-6ad88786c19f" providerId="ADAL" clId="{93D479E5-F67F-4B8A-A78F-A0B574A116B6}" dt="2026-03-20T13:04:37.645" v="709" actId="26606"/>
-          <ac:spMkLst>
-            <pc:docMk/>
-            <pc:sldMk cId="149795576" sldId="260"/>
-            <ac:spMk id="82" creationId="{AAD0DBB9-1A4B-4391-81D4-CB19F9AB918A}"/>
-          </ac:spMkLst>
-        </pc:spChg>
-        <pc:spChg chg="add del">
-          <ac:chgData name="Margo Bonal" userId="18c9fa0f-b53d-478b-9dc0-6ad88786c19f" providerId="ADAL" clId="{93D479E5-F67F-4B8A-A78F-A0B574A116B6}" dt="2026-03-20T13:04:37.645" v="709" actId="26606"/>
-          <ac:spMkLst>
-            <pc:docMk/>
-            <pc:sldMk cId="149795576" sldId="260"/>
-            <ac:spMk id="83" creationId="{063BBA22-50EA-4C4D-BE05-F1CE4E63AA56}"/>
-          </ac:spMkLst>
-        </pc:spChg>
-        <pc:spChg chg="add del">
-          <ac:chgData name="Margo Bonal" userId="18c9fa0f-b53d-478b-9dc0-6ad88786c19f" providerId="ADAL" clId="{93D479E5-F67F-4B8A-A78F-A0B574A116B6}" dt="2026-03-20T13:04:39.686" v="711" actId="26606"/>
-          <ac:spMkLst>
-            <pc:docMk/>
-            <pc:sldMk cId="149795576" sldId="260"/>
-            <ac:spMk id="85" creationId="{BACC6370-2D7E-4714-9D71-7542949D7D5D}"/>
-          </ac:spMkLst>
-        </pc:spChg>
-        <pc:spChg chg="add del">
-          <ac:chgData name="Margo Bonal" userId="18c9fa0f-b53d-478b-9dc0-6ad88786c19f" providerId="ADAL" clId="{93D479E5-F67F-4B8A-A78F-A0B574A116B6}" dt="2026-03-20T13:04:39.686" v="711" actId="26606"/>
-          <ac:spMkLst>
-            <pc:docMk/>
-            <pc:sldMk cId="149795576" sldId="260"/>
-            <ac:spMk id="86" creationId="{F68B3F68-107C-434F-AA38-110D5EA91B85}"/>
-          </ac:spMkLst>
-        </pc:spChg>
-        <pc:spChg chg="add del">
-          <ac:chgData name="Margo Bonal" userId="18c9fa0f-b53d-478b-9dc0-6ad88786c19f" providerId="ADAL" clId="{93D479E5-F67F-4B8A-A78F-A0B574A116B6}" dt="2026-03-20T13:04:39.686" v="711" actId="26606"/>
-          <ac:spMkLst>
-            <pc:docMk/>
-            <pc:sldMk cId="149795576" sldId="260"/>
-            <ac:spMk id="87" creationId="{AAD0DBB9-1A4B-4391-81D4-CB19F9AB918A}"/>
-          </ac:spMkLst>
-        </pc:spChg>
-        <pc:spChg chg="add del">
-          <ac:chgData name="Margo Bonal" userId="18c9fa0f-b53d-478b-9dc0-6ad88786c19f" providerId="ADAL" clId="{93D479E5-F67F-4B8A-A78F-A0B574A116B6}" dt="2026-03-20T13:04:39.686" v="711" actId="26606"/>
-          <ac:spMkLst>
-            <pc:docMk/>
-            <pc:sldMk cId="149795576" sldId="260"/>
-            <ac:spMk id="88" creationId="{063BBA22-50EA-4C4D-BE05-F1CE4E63AA56}"/>
-          </ac:spMkLst>
-        </pc:spChg>
-        <pc:spChg chg="add del">
-          <ac:chgData name="Margo Bonal" userId="18c9fa0f-b53d-478b-9dc0-6ad88786c19f" providerId="ADAL" clId="{93D479E5-F67F-4B8A-A78F-A0B574A116B6}" dt="2026-03-20T13:05:30.766" v="723" actId="26606"/>
-          <ac:spMkLst>
-            <pc:docMk/>
-            <pc:sldMk cId="149795576" sldId="260"/>
-            <ac:spMk id="90" creationId="{2659FDB4-FCBE-4A89-B46D-43D4FA54464D}"/>
-          </ac:spMkLst>
-        </pc:spChg>
-        <pc:spChg chg="add del">
-          <ac:chgData name="Margo Bonal" userId="18c9fa0f-b53d-478b-9dc0-6ad88786c19f" providerId="ADAL" clId="{93D479E5-F67F-4B8A-A78F-A0B574A116B6}" dt="2026-03-20T13:05:24.295" v="720" actId="26606"/>
-          <ac:spMkLst>
-            <pc:docMk/>
-            <pc:sldMk cId="149795576" sldId="260"/>
-            <ac:spMk id="96" creationId="{BACC6370-2D7E-4714-9D71-7542949D7D5D}"/>
-          </ac:spMkLst>
-        </pc:spChg>
-        <pc:spChg chg="add del">
-          <ac:chgData name="Margo Bonal" userId="18c9fa0f-b53d-478b-9dc0-6ad88786c19f" providerId="ADAL" clId="{93D479E5-F67F-4B8A-A78F-A0B574A116B6}" dt="2026-03-20T13:05:20.738" v="718" actId="26606"/>
-          <ac:spMkLst>
-            <pc:docMk/>
-            <pc:sldMk cId="149795576" sldId="260"/>
-            <ac:spMk id="97" creationId="{B50AB553-2A96-4A92-96F2-93548E096954}"/>
-          </ac:spMkLst>
-        </pc:spChg>
-        <pc:spChg chg="add del">
-          <ac:chgData name="Margo Bonal" userId="18c9fa0f-b53d-478b-9dc0-6ad88786c19f" providerId="ADAL" clId="{93D479E5-F67F-4B8A-A78F-A0B574A116B6}" dt="2026-03-20T13:05:24.295" v="720" actId="26606"/>
-          <ac:spMkLst>
-            <pc:docMk/>
-            <pc:sldMk cId="149795576" sldId="260"/>
-            <ac:spMk id="98" creationId="{F68B3F68-107C-434F-AA38-110D5EA91B85}"/>
-          </ac:spMkLst>
-        </pc:spChg>
-        <pc:spChg chg="add del">
-          <ac:chgData name="Margo Bonal" userId="18c9fa0f-b53d-478b-9dc0-6ad88786c19f" providerId="ADAL" clId="{93D479E5-F67F-4B8A-A78F-A0B574A116B6}" dt="2026-03-20T13:05:24.295" v="720" actId="26606"/>
-          <ac:spMkLst>
-            <pc:docMk/>
-            <pc:sldMk cId="149795576" sldId="260"/>
-            <ac:spMk id="100" creationId="{AAD0DBB9-1A4B-4391-81D4-CB19F9AB918A}"/>
-          </ac:spMkLst>
-        </pc:spChg>
-        <pc:spChg chg="add del">
-          <ac:chgData name="Margo Bonal" userId="18c9fa0f-b53d-478b-9dc0-6ad88786c19f" providerId="ADAL" clId="{93D479E5-F67F-4B8A-A78F-A0B574A116B6}" dt="2026-03-20T13:05:24.295" v="720" actId="26606"/>
-          <ac:spMkLst>
-            <pc:docMk/>
-            <pc:sldMk cId="149795576" sldId="260"/>
-            <ac:spMk id="102" creationId="{063BBA22-50EA-4C4D-BE05-F1CE4E63AA56}"/>
-          </ac:spMkLst>
-        </pc:spChg>
-        <pc:spChg chg="add del">
-          <ac:chgData name="Margo Bonal" userId="18c9fa0f-b53d-478b-9dc0-6ad88786c19f" providerId="ADAL" clId="{93D479E5-F67F-4B8A-A78F-A0B574A116B6}" dt="2026-03-20T13:05:30.731" v="722" actId="26606"/>
-          <ac:spMkLst>
-            <pc:docMk/>
-            <pc:sldMk cId="149795576" sldId="260"/>
-            <ac:spMk id="104" creationId="{BACC6370-2D7E-4714-9D71-7542949D7D5D}"/>
-          </ac:spMkLst>
-        </pc:spChg>
-        <pc:spChg chg="add del">
-          <ac:chgData name="Margo Bonal" userId="18c9fa0f-b53d-478b-9dc0-6ad88786c19f" providerId="ADAL" clId="{93D479E5-F67F-4B8A-A78F-A0B574A116B6}" dt="2026-03-20T13:05:30.731" v="722" actId="26606"/>
-          <ac:spMkLst>
-            <pc:docMk/>
-            <pc:sldMk cId="149795576" sldId="260"/>
-            <ac:spMk id="105" creationId="{F68B3F68-107C-434F-AA38-110D5EA91B85}"/>
-          </ac:spMkLst>
-        </pc:spChg>
-        <pc:spChg chg="add del">
-          <ac:chgData name="Margo Bonal" userId="18c9fa0f-b53d-478b-9dc0-6ad88786c19f" providerId="ADAL" clId="{93D479E5-F67F-4B8A-A78F-A0B574A116B6}" dt="2026-03-20T13:05:30.731" v="722" actId="26606"/>
-          <ac:spMkLst>
-            <pc:docMk/>
-            <pc:sldMk cId="149795576" sldId="260"/>
-            <ac:spMk id="106" creationId="{AAD0DBB9-1A4B-4391-81D4-CB19F9AB918A}"/>
-          </ac:spMkLst>
-        </pc:spChg>
-        <pc:spChg chg="add del">
-          <ac:chgData name="Margo Bonal" userId="18c9fa0f-b53d-478b-9dc0-6ad88786c19f" providerId="ADAL" clId="{93D479E5-F67F-4B8A-A78F-A0B574A116B6}" dt="2026-03-20T13:05:30.731" v="722" actId="26606"/>
-          <ac:spMkLst>
-            <pc:docMk/>
-            <pc:sldMk cId="149795576" sldId="260"/>
-            <ac:spMk id="107" creationId="{063BBA22-50EA-4C4D-BE05-F1CE4E63AA56}"/>
-          </ac:spMkLst>
-        </pc:spChg>
-        <pc:spChg chg="add">
-          <ac:chgData name="Margo Bonal" userId="18c9fa0f-b53d-478b-9dc0-6ad88786c19f" providerId="ADAL" clId="{93D479E5-F67F-4B8A-A78F-A0B574A116B6}" dt="2026-03-20T13:05:30.766" v="723" actId="26606"/>
-          <ac:spMkLst>
-            <pc:docMk/>
-            <pc:sldMk cId="149795576" sldId="260"/>
-            <ac:spMk id="109" creationId="{BACC6370-2D7E-4714-9D71-7542949D7D5D}"/>
-          </ac:spMkLst>
-        </pc:spChg>
-        <pc:spChg chg="add">
-          <ac:chgData name="Margo Bonal" userId="18c9fa0f-b53d-478b-9dc0-6ad88786c19f" providerId="ADAL" clId="{93D479E5-F67F-4B8A-A78F-A0B574A116B6}" dt="2026-03-20T13:05:30.766" v="723" actId="26606"/>
-          <ac:spMkLst>
-            <pc:docMk/>
-            <pc:sldMk cId="149795576" sldId="260"/>
-            <ac:spMk id="110" creationId="{F68B3F68-107C-434F-AA38-110D5EA91B85}"/>
-          </ac:spMkLst>
-        </pc:spChg>
-        <pc:spChg chg="add">
-          <ac:chgData name="Margo Bonal" userId="18c9fa0f-b53d-478b-9dc0-6ad88786c19f" providerId="ADAL" clId="{93D479E5-F67F-4B8A-A78F-A0B574A116B6}" dt="2026-03-20T13:05:30.766" v="723" actId="26606"/>
-          <ac:spMkLst>
-            <pc:docMk/>
-            <pc:sldMk cId="149795576" sldId="260"/>
-            <ac:spMk id="111" creationId="{AAD0DBB9-1A4B-4391-81D4-CB19F9AB918A}"/>
-          </ac:spMkLst>
-        </pc:spChg>
-        <pc:spChg chg="add">
-          <ac:chgData name="Margo Bonal" userId="18c9fa0f-b53d-478b-9dc0-6ad88786c19f" providerId="ADAL" clId="{93D479E5-F67F-4B8A-A78F-A0B574A116B6}" dt="2026-03-20T13:05:30.766" v="723" actId="26606"/>
-          <ac:spMkLst>
-            <pc:docMk/>
-            <pc:sldMk cId="149795576" sldId="260"/>
-            <ac:spMk id="112" creationId="{063BBA22-50EA-4C4D-BE05-F1CE4E63AA56}"/>
-          </ac:spMkLst>
-        </pc:spChg>
-        <pc:grpChg chg="add del">
-          <ac:chgData name="Margo Bonal" userId="18c9fa0f-b53d-478b-9dc0-6ad88786c19f" providerId="ADAL" clId="{93D479E5-F67F-4B8A-A78F-A0B574A116B6}" dt="2026-03-20T13:02:15.173" v="603" actId="26606"/>
-          <ac:grpSpMkLst>
-            <pc:docMk/>
-            <pc:sldMk cId="149795576" sldId="260"/>
-            <ac:grpSpMk id="10" creationId="{AE1C45F0-260A-458C-96ED-C1F6D2151219}"/>
-          </ac:grpSpMkLst>
-        </pc:grpChg>
-        <pc:grpChg chg="add del">
-          <ac:chgData name="Margo Bonal" userId="18c9fa0f-b53d-478b-9dc0-6ad88786c19f" providerId="ADAL" clId="{93D479E5-F67F-4B8A-A78F-A0B574A116B6}" dt="2026-03-20T13:02:15.130" v="602" actId="26606"/>
-          <ac:grpSpMkLst>
-            <pc:docMk/>
-            <pc:sldMk cId="149795576" sldId="260"/>
-            <ac:grpSpMk id="38" creationId="{AE1C45F0-260A-458C-96ED-C1F6D2151219}"/>
-          </ac:grpSpMkLst>
-        </pc:grpChg>
-        <pc:graphicFrameChg chg="add del">
-          <ac:chgData name="Margo Bonal" userId="18c9fa0f-b53d-478b-9dc0-6ad88786c19f" providerId="ADAL" clId="{93D479E5-F67F-4B8A-A78F-A0B574A116B6}" dt="2026-03-20T13:02:04.645" v="598" actId="26606"/>
-          <ac:graphicFrameMkLst>
-            <pc:docMk/>
-            <pc:sldMk cId="149795576" sldId="260"/>
-            <ac:graphicFrameMk id="19" creationId="{6D63F3FA-6C01-E6FD-8CEB-480DFE78C63E}"/>
-          </ac:graphicFrameMkLst>
-        </pc:graphicFrameChg>
-        <pc:graphicFrameChg chg="add del">
-          <ac:chgData name="Margo Bonal" userId="18c9fa0f-b53d-478b-9dc0-6ad88786c19f" providerId="ADAL" clId="{93D479E5-F67F-4B8A-A78F-A0B574A116B6}" dt="2026-03-20T13:02:12.653" v="600" actId="26606"/>
-          <ac:graphicFrameMkLst>
-            <pc:docMk/>
-            <pc:sldMk cId="149795576" sldId="260"/>
-            <ac:graphicFrameMk id="35" creationId="{8CC348EB-7C5B-51B3-89AD-CCA11313CDFB}"/>
-          </ac:graphicFrameMkLst>
-        </pc:graphicFrameChg>
-        <pc:graphicFrameChg chg="add del">
-          <ac:chgData name="Margo Bonal" userId="18c9fa0f-b53d-478b-9dc0-6ad88786c19f" providerId="ADAL" clId="{93D479E5-F67F-4B8A-A78F-A0B574A116B6}" dt="2026-03-20T13:02:15.130" v="602" actId="26606"/>
-          <ac:graphicFrameMkLst>
-            <pc:docMk/>
-            <pc:sldMk cId="149795576" sldId="260"/>
-            <ac:graphicFrameMk id="43" creationId="{6F465BD1-011F-79F0-47FC-EB44CDF3DE9E}"/>
-          </ac:graphicFrameMkLst>
-        </pc:graphicFrameChg>
-        <pc:graphicFrameChg chg="add del mod modGraphic">
-          <ac:chgData name="Margo Bonal" userId="18c9fa0f-b53d-478b-9dc0-6ad88786c19f" providerId="ADAL" clId="{93D479E5-F67F-4B8A-A78F-A0B574A116B6}" dt="2026-03-20T13:35:04.313" v="1369" actId="478"/>
-          <ac:graphicFrameMkLst>
-            <pc:docMk/>
-            <pc:sldMk cId="149795576" sldId="260"/>
-            <ac:graphicFrameMk id="50" creationId="{6D63F3FA-6C01-E6FD-8CEB-480DFE78C63E}"/>
-          </ac:graphicFrameMkLst>
-        </pc:graphicFrameChg>
-        <pc:picChg chg="add del">
-          <ac:chgData name="Margo Bonal" userId="18c9fa0f-b53d-478b-9dc0-6ad88786c19f" providerId="ADAL" clId="{93D479E5-F67F-4B8A-A78F-A0B574A116B6}" dt="2026-03-20T13:05:20.738" v="718" actId="26606"/>
-          <ac:picMkLst>
-            <pc:docMk/>
-            <pc:sldMk cId="149795576" sldId="260"/>
-            <ac:picMk id="93" creationId="{8E05A1FD-8CAD-5BB7-B078-A103C186B6D9}"/>
-          </ac:picMkLst>
-        </pc:picChg>
-        <pc:cxnChg chg="add del">
-          <ac:chgData name="Margo Bonal" userId="18c9fa0f-b53d-478b-9dc0-6ad88786c19f" providerId="ADAL" clId="{93D479E5-F67F-4B8A-A78F-A0B574A116B6}" dt="2026-03-20T13:02:15.130" v="602" actId="26606"/>
-          <ac:cxnSpMkLst>
-            <pc:docMk/>
-            <pc:sldMk cId="149795576" sldId="260"/>
-            <ac:cxnSpMk id="17" creationId="{6CF1BAF6-AD41-4082-B212-8A1F9A2E8779}"/>
-          </ac:cxnSpMkLst>
-        </pc:cxnChg>
-        <pc:cxnChg chg="add del">
-          <ac:chgData name="Margo Bonal" userId="18c9fa0f-b53d-478b-9dc0-6ad88786c19f" providerId="ADAL" clId="{93D479E5-F67F-4B8A-A78F-A0B574A116B6}" dt="2026-03-20T13:02:15.130" v="602" actId="26606"/>
-          <ac:cxnSpMkLst>
-            <pc:docMk/>
-            <pc:sldMk cId="149795576" sldId="260"/>
-            <ac:cxnSpMk id="44" creationId="{6CF1BAF6-AD41-4082-B212-8A1F9A2E8779}"/>
-          </ac:cxnSpMkLst>
-        </pc:cxnChg>
-        <pc:cxnChg chg="add del">
-          <ac:chgData name="Margo Bonal" userId="18c9fa0f-b53d-478b-9dc0-6ad88786c19f" providerId="ADAL" clId="{93D479E5-F67F-4B8A-A78F-A0B574A116B6}" dt="2026-03-20T13:04:26.816" v="703" actId="26606"/>
-          <ac:cxnSpMkLst>
-            <pc:docMk/>
-            <pc:sldMk cId="149795576" sldId="260"/>
-            <ac:cxnSpMk id="68" creationId="{C8F51B3F-8331-4E4A-AE96-D47B1006EEAD}"/>
-          </ac:cxnSpMkLst>
-        </pc:cxnChg>
-        <pc:cxnChg chg="add del">
-          <ac:chgData name="Margo Bonal" userId="18c9fa0f-b53d-478b-9dc0-6ad88786c19f" providerId="ADAL" clId="{93D479E5-F67F-4B8A-A78F-A0B574A116B6}" dt="2026-03-20T13:05:30.766" v="723" actId="26606"/>
-          <ac:cxnSpMkLst>
-            <pc:docMk/>
-            <pc:sldMk cId="149795576" sldId="260"/>
-            <ac:cxnSpMk id="91" creationId="{C8F51B3F-8331-4E4A-AE96-D47B1006EEAD}"/>
-          </ac:cxnSpMkLst>
-        </pc:cxnChg>
-      </pc:sldChg>
-      <pc:sldChg chg="addSp delSp modSp new del mod setBg">
-        <pc:chgData name="Margo Bonal" userId="18c9fa0f-b53d-478b-9dc0-6ad88786c19f" providerId="ADAL" clId="{93D479E5-F67F-4B8A-A78F-A0B574A116B6}" dt="2026-03-20T14:14:16.617" v="2220" actId="2696"/>
-        <pc:sldMkLst>
-          <pc:docMk/>
-          <pc:sldMk cId="2155978422" sldId="261"/>
-        </pc:sldMkLst>
-        <pc:spChg chg="mod">
-          <ac:chgData name="Margo Bonal" userId="18c9fa0f-b53d-478b-9dc0-6ad88786c19f" providerId="ADAL" clId="{93D479E5-F67F-4B8A-A78F-A0B574A116B6}" dt="2026-03-20T13:26:42.843" v="1299" actId="26606"/>
-          <ac:spMkLst>
-            <pc:docMk/>
-            <pc:sldMk cId="2155978422" sldId="261"/>
-            <ac:spMk id="2" creationId="{F97CB9DD-52FB-113D-526B-B6459D63DDA8}"/>
-          </ac:spMkLst>
-        </pc:spChg>
-        <pc:spChg chg="del mod ord">
-          <ac:chgData name="Margo Bonal" userId="18c9fa0f-b53d-478b-9dc0-6ad88786c19f" providerId="ADAL" clId="{93D479E5-F67F-4B8A-A78F-A0B574A116B6}" dt="2026-03-20T13:21:07.150" v="1217" actId="478"/>
-          <ac:spMkLst>
-            <pc:docMk/>
-            <pc:sldMk cId="2155978422" sldId="261"/>
-            <ac:spMk id="3" creationId="{C6A5AC6E-1FD2-A32F-E33D-B1050BE416BB}"/>
-          </ac:spMkLst>
-        </pc:spChg>
-        <pc:spChg chg="add mod">
-          <ac:chgData name="Margo Bonal" userId="18c9fa0f-b53d-478b-9dc0-6ad88786c19f" providerId="ADAL" clId="{93D479E5-F67F-4B8A-A78F-A0B574A116B6}" dt="2026-03-20T13:19:31.039" v="1171"/>
-          <ac:spMkLst>
-            <pc:docMk/>
-            <pc:sldMk cId="2155978422" sldId="261"/>
-            <ac:spMk id="5" creationId="{3A11253B-79B4-380F-6216-624A93801EF1}"/>
-          </ac:spMkLst>
-        </pc:spChg>
-        <pc:spChg chg="add del mod">
-          <ac:chgData name="Margo Bonal" userId="18c9fa0f-b53d-478b-9dc0-6ad88786c19f" providerId="ADAL" clId="{93D479E5-F67F-4B8A-A78F-A0B574A116B6}" dt="2026-03-20T13:21:21.645" v="1222" actId="478"/>
-          <ac:spMkLst>
-            <pc:docMk/>
-            <pc:sldMk cId="2155978422" sldId="261"/>
-            <ac:spMk id="6" creationId="{ECA19D27-C8AB-033C-C57A-67948E4ABDC7}"/>
-          </ac:spMkLst>
-        </pc:spChg>
-        <pc:spChg chg="add mod ord">
-          <ac:chgData name="Margo Bonal" userId="18c9fa0f-b53d-478b-9dc0-6ad88786c19f" providerId="ADAL" clId="{93D479E5-F67F-4B8A-A78F-A0B574A116B6}" dt="2026-03-20T13:26:42.843" v="1299" actId="26606"/>
-          <ac:spMkLst>
-            <pc:docMk/>
-            <pc:sldMk cId="2155978422" sldId="261"/>
-            <ac:spMk id="7" creationId="{F25EBC8F-2E53-E431-5247-09FE4439288F}"/>
-          </ac:spMkLst>
-        </pc:spChg>
-        <pc:spChg chg="add del">
-          <ac:chgData name="Margo Bonal" userId="18c9fa0f-b53d-478b-9dc0-6ad88786c19f" providerId="ADAL" clId="{93D479E5-F67F-4B8A-A78F-A0B574A116B6}" dt="2026-03-20T13:12:07.736" v="1009" actId="26606"/>
-          <ac:spMkLst>
-            <pc:docMk/>
-            <pc:sldMk cId="2155978422" sldId="261"/>
-            <ac:spMk id="8" creationId="{4DA718D0-4865-4629-8134-44F68D41D574}"/>
-          </ac:spMkLst>
-        </pc:spChg>
-        <pc:spChg chg="add del mod">
-          <ac:chgData name="Margo Bonal" userId="18c9fa0f-b53d-478b-9dc0-6ad88786c19f" providerId="ADAL" clId="{93D479E5-F67F-4B8A-A78F-A0B574A116B6}" dt="2026-03-20T13:21:17.967" v="1221" actId="478"/>
-          <ac:spMkLst>
-            <pc:docMk/>
-            <pc:sldMk cId="2155978422" sldId="261"/>
-            <ac:spMk id="13" creationId="{2B85C0A1-279E-2BD8-90CD-44D667ABD220}"/>
-          </ac:spMkLst>
-        </pc:spChg>
-        <pc:spChg chg="add del">
-          <ac:chgData name="Margo Bonal" userId="18c9fa0f-b53d-478b-9dc0-6ad88786c19f" providerId="ADAL" clId="{93D479E5-F67F-4B8A-A78F-A0B574A116B6}" dt="2026-03-20T13:12:07.736" v="1009" actId="26606"/>
-          <ac:spMkLst>
-            <pc:docMk/>
-            <pc:sldMk cId="2155978422" sldId="261"/>
-            <ac:spMk id="14" creationId="{CBC4F608-B4B8-48C3-9572-C0F061B1CD99}"/>
-          </ac:spMkLst>
-        </pc:spChg>
-        <pc:spChg chg="add del">
-          <ac:chgData name="Margo Bonal" userId="18c9fa0f-b53d-478b-9dc0-6ad88786c19f" providerId="ADAL" clId="{93D479E5-F67F-4B8A-A78F-A0B574A116B6}" dt="2026-03-20T13:12:19.202" v="1010" actId="26606"/>
-          <ac:spMkLst>
-            <pc:docMk/>
-            <pc:sldMk cId="2155978422" sldId="261"/>
-            <ac:spMk id="21" creationId="{EDDBB197-D710-4A4F-A9CA-FD2177498BE8}"/>
-          </ac:spMkLst>
-        </pc:spChg>
-        <pc:spChg chg="add del">
-          <ac:chgData name="Margo Bonal" userId="18c9fa0f-b53d-478b-9dc0-6ad88786c19f" providerId="ADAL" clId="{93D479E5-F67F-4B8A-A78F-A0B574A116B6}" dt="2026-03-20T13:12:19.202" v="1010" actId="26606"/>
-          <ac:spMkLst>
-            <pc:docMk/>
-            <pc:sldMk cId="2155978422" sldId="261"/>
-            <ac:spMk id="23" creationId="{975D1CFA-2CDB-4B64-BD9F-85744E8DA12F}"/>
-          </ac:spMkLst>
-        </pc:spChg>
-        <pc:spChg chg="add del">
-          <ac:chgData name="Margo Bonal" userId="18c9fa0f-b53d-478b-9dc0-6ad88786c19f" providerId="ADAL" clId="{93D479E5-F67F-4B8A-A78F-A0B574A116B6}" dt="2026-03-20T13:26:42.843" v="1299" actId="26606"/>
-          <ac:spMkLst>
-            <pc:docMk/>
-            <pc:sldMk cId="2155978422" sldId="261"/>
-            <ac:spMk id="34" creationId="{12609869-9E80-471B-A487-A53288E0E791}"/>
-          </ac:spMkLst>
-        </pc:spChg>
-        <pc:spChg chg="add del">
-          <ac:chgData name="Margo Bonal" userId="18c9fa0f-b53d-478b-9dc0-6ad88786c19f" providerId="ADAL" clId="{93D479E5-F67F-4B8A-A78F-A0B574A116B6}" dt="2026-03-20T13:26:42.843" v="1299" actId="26606"/>
-          <ac:spMkLst>
-            <pc:docMk/>
-            <pc:sldMk cId="2155978422" sldId="261"/>
-            <ac:spMk id="36" creationId="{7004738A-9D34-43E8-97D2-CA0EED4F8BE0}"/>
-          </ac:spMkLst>
-        </pc:spChg>
-        <pc:spChg chg="add del">
-          <ac:chgData name="Margo Bonal" userId="18c9fa0f-b53d-478b-9dc0-6ad88786c19f" providerId="ADAL" clId="{93D479E5-F67F-4B8A-A78F-A0B574A116B6}" dt="2026-03-20T13:15:18.396" v="1123" actId="26606"/>
-          <ac:spMkLst>
-            <pc:docMk/>
-            <pc:sldMk cId="2155978422" sldId="261"/>
-            <ac:spMk id="38" creationId="{B8B8D07F-F13E-443E-BA68-2D26672D76B9}"/>
-          </ac:spMkLst>
-        </pc:spChg>
-        <pc:spChg chg="add del">
-          <ac:chgData name="Margo Bonal" userId="18c9fa0f-b53d-478b-9dc0-6ad88786c19f" providerId="ADAL" clId="{93D479E5-F67F-4B8A-A78F-A0B574A116B6}" dt="2026-03-20T13:26:42.843" v="1299" actId="26606"/>
-          <ac:spMkLst>
-            <pc:docMk/>
-            <pc:sldMk cId="2155978422" sldId="261"/>
-            <ac:spMk id="40" creationId="{2813A4FA-24A5-41ED-A534-3807D1B2F344}"/>
-          </ac:spMkLst>
-        </pc:spChg>
-        <pc:spChg chg="add del">
-          <ac:chgData name="Margo Bonal" userId="18c9fa0f-b53d-478b-9dc0-6ad88786c19f" providerId="ADAL" clId="{93D479E5-F67F-4B8A-A78F-A0B574A116B6}" dt="2026-03-20T13:26:42.843" v="1299" actId="26606"/>
-          <ac:spMkLst>
-            <pc:docMk/>
-            <pc:sldMk cId="2155978422" sldId="261"/>
-            <ac:spMk id="42" creationId="{C3944F27-CA70-4E84-A51A-E6BF89558979}"/>
-          </ac:spMkLst>
-        </pc:spChg>
-        <pc:spChg chg="add del">
-          <ac:chgData name="Margo Bonal" userId="18c9fa0f-b53d-478b-9dc0-6ad88786c19f" providerId="ADAL" clId="{93D479E5-F67F-4B8A-A78F-A0B574A116B6}" dt="2026-03-20T13:26:42.843" v="1299" actId="26606"/>
-          <ac:spMkLst>
-            <pc:docMk/>
-            <pc:sldMk cId="2155978422" sldId="261"/>
-            <ac:spMk id="44" creationId="{0D7B6173-1D58-48E2-83CF-37350F315F75}"/>
-          </ac:spMkLst>
-        </pc:spChg>
-        <pc:spChg chg="add del">
-          <ac:chgData name="Margo Bonal" userId="18c9fa0f-b53d-478b-9dc0-6ad88786c19f" providerId="ADAL" clId="{93D479E5-F67F-4B8A-A78F-A0B574A116B6}" dt="2026-03-20T13:26:42.843" v="1299" actId="26606"/>
-          <ac:spMkLst>
-            <pc:docMk/>
-            <pc:sldMk cId="2155978422" sldId="261"/>
-            <ac:spMk id="45" creationId="{35D813D1-BA6B-40B4-A101-04BB89445561}"/>
-          </ac:spMkLst>
-        </pc:spChg>
-        <pc:spChg chg="add del">
-          <ac:chgData name="Margo Bonal" userId="18c9fa0f-b53d-478b-9dc0-6ad88786c19f" providerId="ADAL" clId="{93D479E5-F67F-4B8A-A78F-A0B574A116B6}" dt="2026-03-20T13:15:18.396" v="1123" actId="26606"/>
-          <ac:spMkLst>
-            <pc:docMk/>
-            <pc:sldMk cId="2155978422" sldId="261"/>
-            <ac:spMk id="47" creationId="{A51A0227-072A-4F5F-928C-E2C3E5CCD10C}"/>
-          </ac:spMkLst>
-        </pc:spChg>
-        <pc:spChg chg="add del">
-          <ac:chgData name="Margo Bonal" userId="18c9fa0f-b53d-478b-9dc0-6ad88786c19f" providerId="ADAL" clId="{93D479E5-F67F-4B8A-A78F-A0B574A116B6}" dt="2026-03-20T13:15:18.396" v="1123" actId="26606"/>
-          <ac:spMkLst>
-            <pc:docMk/>
-            <pc:sldMk cId="2155978422" sldId="261"/>
-            <ac:spMk id="49" creationId="{35D99776-4B38-47DF-A302-11AD9AF87ACA}"/>
-          </ac:spMkLst>
-        </pc:spChg>
-        <pc:spChg chg="add del">
-          <ac:chgData name="Margo Bonal" userId="18c9fa0f-b53d-478b-9dc0-6ad88786c19f" providerId="ADAL" clId="{93D479E5-F67F-4B8A-A78F-A0B574A116B6}" dt="2026-03-20T13:26:42.843" v="1299" actId="26606"/>
-          <ac:spMkLst>
-            <pc:docMk/>
-            <pc:sldMk cId="2155978422" sldId="261"/>
-            <ac:spMk id="53" creationId="{21BDEC81-16A7-4451-B893-C15000083B77}"/>
-          </ac:spMkLst>
-        </pc:spChg>
-        <pc:spChg chg="add del">
-          <ac:chgData name="Margo Bonal" userId="18c9fa0f-b53d-478b-9dc0-6ad88786c19f" providerId="ADAL" clId="{93D479E5-F67F-4B8A-A78F-A0B574A116B6}" dt="2026-03-20T13:26:42.843" v="1299" actId="26606"/>
-          <ac:spMkLst>
-            <pc:docMk/>
-            <pc:sldMk cId="2155978422" sldId="261"/>
-            <ac:spMk id="55" creationId="{AEA3DFA5-2D7B-4989-8ED7-8321EC114CF1}"/>
-          </ac:spMkLst>
-        </pc:spChg>
-        <pc:grpChg chg="add del">
-          <ac:chgData name="Margo Bonal" userId="18c9fa0f-b53d-478b-9dc0-6ad88786c19f" providerId="ADAL" clId="{93D479E5-F67F-4B8A-A78F-A0B574A116B6}" dt="2026-03-20T13:12:07.736" v="1009" actId="26606"/>
-          <ac:grpSpMkLst>
-            <pc:docMk/>
-            <pc:sldMk cId="2155978422" sldId="261"/>
-            <ac:grpSpMk id="10" creationId="{65167ED7-6315-43AB-B1B6-C326D5FD8F84}"/>
-          </ac:grpSpMkLst>
-        </pc:grpChg>
-        <pc:grpChg chg="add">
-          <ac:chgData name="Margo Bonal" userId="18c9fa0f-b53d-478b-9dc0-6ad88786c19f" providerId="ADAL" clId="{93D479E5-F67F-4B8A-A78F-A0B574A116B6}" dt="2026-03-20T13:12:07.736" v="1009" actId="26606"/>
-          <ac:grpSpMkLst>
-            <pc:docMk/>
-            <pc:sldMk cId="2155978422" sldId="261"/>
-            <ac:grpSpMk id="25" creationId="{25EE5136-01F1-466C-962D-BA9B4C6757AA}"/>
-          </ac:grpSpMkLst>
-        </pc:grpChg>
-        <pc:graphicFrameChg chg="add mod modGraphic">
-          <ac:chgData name="Margo Bonal" userId="18c9fa0f-b53d-478b-9dc0-6ad88786c19f" providerId="ADAL" clId="{93D479E5-F67F-4B8A-A78F-A0B574A116B6}" dt="2026-03-20T14:06:27.096" v="2106" actId="1076"/>
-          <ac:graphicFrameMkLst>
-            <pc:docMk/>
-            <pc:sldMk cId="2155978422" sldId="261"/>
-            <ac:graphicFrameMk id="4" creationId="{3C49EAB7-558B-7941-8CAA-21E901CF4AD7}"/>
-          </ac:graphicFrameMkLst>
-        </pc:graphicFrameChg>
-        <pc:graphicFrameChg chg="add mod">
-          <ac:chgData name="Margo Bonal" userId="18c9fa0f-b53d-478b-9dc0-6ad88786c19f" providerId="ADAL" clId="{93D479E5-F67F-4B8A-A78F-A0B574A116B6}" dt="2026-03-20T14:06:29.396" v="2107"/>
-          <ac:graphicFrameMkLst>
-            <pc:docMk/>
-            <pc:sldMk cId="2155978422" sldId="261"/>
-            <ac:graphicFrameMk id="15" creationId="{B2844214-813E-C9D4-E1D0-C9C941F60E48}"/>
-          </ac:graphicFrameMkLst>
-        </pc:graphicFrameChg>
-        <pc:picChg chg="add mod">
-          <ac:chgData name="Margo Bonal" userId="18c9fa0f-b53d-478b-9dc0-6ad88786c19f" providerId="ADAL" clId="{93D479E5-F67F-4B8A-A78F-A0B574A116B6}" dt="2026-03-20T13:17:43.578" v="1153" actId="1076"/>
-          <ac:picMkLst>
-            <pc:docMk/>
-            <pc:sldMk cId="2155978422" sldId="261"/>
-            <ac:picMk id="18" creationId="{6AC1F208-A038-ABB5-D9F2-196154B8E7A5}"/>
-          </ac:picMkLst>
-        </pc:picChg>
-      </pc:sldChg>
-      <pc:sldChg chg="addSp delSp modSp new del mod ord">
-        <pc:chgData name="Margo Bonal" userId="18c9fa0f-b53d-478b-9dc0-6ad88786c19f" providerId="ADAL" clId="{93D479E5-F67F-4B8A-A78F-A0B574A116B6}" dt="2026-03-20T13:24:17.043" v="1275" actId="2696"/>
-        <pc:sldMkLst>
-          <pc:docMk/>
-          <pc:sldMk cId="1674025237" sldId="262"/>
-        </pc:sldMkLst>
-        <pc:spChg chg="del">
-          <ac:chgData name="Margo Bonal" userId="18c9fa0f-b53d-478b-9dc0-6ad88786c19f" providerId="ADAL" clId="{93D479E5-F67F-4B8A-A78F-A0B574A116B6}" dt="2026-03-20T13:21:09.603" v="1218"/>
-          <ac:spMkLst>
-            <pc:docMk/>
-            <pc:sldMk cId="1674025237" sldId="262"/>
-            <ac:spMk id="3" creationId="{D1B5BB2B-33D5-7DAB-4EE1-EC237C024694}"/>
-          </ac:spMkLst>
-        </pc:spChg>
-        <pc:spChg chg="add mod">
-          <ac:chgData name="Margo Bonal" userId="18c9fa0f-b53d-478b-9dc0-6ad88786c19f" providerId="ADAL" clId="{93D479E5-F67F-4B8A-A78F-A0B574A116B6}" dt="2026-03-20T13:23:37.897" v="1260" actId="27636"/>
-          <ac:spMkLst>
-            <pc:docMk/>
-            <pc:sldMk cId="1674025237" sldId="262"/>
-            <ac:spMk id="4" creationId="{23F73DE7-493F-6EA1-A57B-03649DA5AFE7}"/>
-          </ac:spMkLst>
-        </pc:spChg>
       </pc:sldChg>
       <pc:sldChg chg="addSp modSp new mod setBg">
         <pc:chgData name="Margo Bonal" userId="18c9fa0f-b53d-478b-9dc0-6ad88786c19f" providerId="ADAL" clId="{93D479E5-F67F-4B8A-A78F-A0B574A116B6}" dt="2026-03-21T22:01:42.363" v="2588" actId="20577"/>
@@ -1148,14 +311,14 @@
           </ac:spMkLst>
         </pc:spChg>
       </pc:sldChg>
-      <pc:sldChg chg="modSp new mod">
-        <pc:chgData name="Margo Bonal" userId="18c9fa0f-b53d-478b-9dc0-6ad88786c19f" providerId="ADAL" clId="{93D479E5-F67F-4B8A-A78F-A0B574A116B6}" dt="2026-03-20T14:46:10.843" v="2484" actId="15"/>
+      <pc:sldChg chg="addSp modSp new mod setBg">
+        <pc:chgData name="Margo Bonal" userId="18c9fa0f-b53d-478b-9dc0-6ad88786c19f" providerId="ADAL" clId="{93D479E5-F67F-4B8A-A78F-A0B574A116B6}" dt="2026-03-23T15:41:42.442" v="2589" actId="26606"/>
         <pc:sldMkLst>
           <pc:docMk/>
           <pc:sldMk cId="3814308155" sldId="266"/>
         </pc:sldMkLst>
         <pc:spChg chg="mod">
-          <ac:chgData name="Margo Bonal" userId="18c9fa0f-b53d-478b-9dc0-6ad88786c19f" providerId="ADAL" clId="{93D479E5-F67F-4B8A-A78F-A0B574A116B6}" dt="2026-03-20T13:30:12.618" v="1337" actId="20577"/>
+          <ac:chgData name="Margo Bonal" userId="18c9fa0f-b53d-478b-9dc0-6ad88786c19f" providerId="ADAL" clId="{93D479E5-F67F-4B8A-A78F-A0B574A116B6}" dt="2026-03-23T15:41:42.442" v="2589" actId="26606"/>
           <ac:spMkLst>
             <pc:docMk/>
             <pc:sldMk cId="3814308155" sldId="266"/>
@@ -1163,28 +326,100 @@
           </ac:spMkLst>
         </pc:spChg>
         <pc:spChg chg="mod">
-          <ac:chgData name="Margo Bonal" userId="18c9fa0f-b53d-478b-9dc0-6ad88786c19f" providerId="ADAL" clId="{93D479E5-F67F-4B8A-A78F-A0B574A116B6}" dt="2026-03-20T14:46:10.843" v="2484" actId="15"/>
+          <ac:chgData name="Margo Bonal" userId="18c9fa0f-b53d-478b-9dc0-6ad88786c19f" providerId="ADAL" clId="{93D479E5-F67F-4B8A-A78F-A0B574A116B6}" dt="2026-03-23T15:41:42.442" v="2589" actId="26606"/>
           <ac:spMkLst>
             <pc:docMk/>
             <pc:sldMk cId="3814308155" sldId="266"/>
             <ac:spMk id="3" creationId="{115E4EA9-D4C9-C153-9C80-F53A74AACE51}"/>
           </ac:spMkLst>
         </pc:spChg>
+        <pc:spChg chg="add">
+          <ac:chgData name="Margo Bonal" userId="18c9fa0f-b53d-478b-9dc0-6ad88786c19f" providerId="ADAL" clId="{93D479E5-F67F-4B8A-A78F-A0B574A116B6}" dt="2026-03-23T15:41:42.442" v="2589" actId="26606"/>
+          <ac:spMkLst>
+            <pc:docMk/>
+            <pc:sldMk cId="3814308155" sldId="266"/>
+            <ac:spMk id="8" creationId="{907EF6B7-1338-4443-8C46-6A318D952DFD}"/>
+          </ac:spMkLst>
+        </pc:spChg>
+        <pc:spChg chg="add">
+          <ac:chgData name="Margo Bonal" userId="18c9fa0f-b53d-478b-9dc0-6ad88786c19f" providerId="ADAL" clId="{93D479E5-F67F-4B8A-A78F-A0B574A116B6}" dt="2026-03-23T15:41:42.442" v="2589" actId="26606"/>
+          <ac:spMkLst>
+            <pc:docMk/>
+            <pc:sldMk cId="3814308155" sldId="266"/>
+            <ac:spMk id="10" creationId="{DAAE4CDD-124C-4DCF-9584-B6033B545DD5}"/>
+          </ac:spMkLst>
+        </pc:spChg>
+        <pc:spChg chg="add">
+          <ac:chgData name="Margo Bonal" userId="18c9fa0f-b53d-478b-9dc0-6ad88786c19f" providerId="ADAL" clId="{93D479E5-F67F-4B8A-A78F-A0B574A116B6}" dt="2026-03-23T15:41:42.442" v="2589" actId="26606"/>
+          <ac:spMkLst>
+            <pc:docMk/>
+            <pc:sldMk cId="3814308155" sldId="266"/>
+            <ac:spMk id="12" creationId="{081E4A58-353D-44AE-B2FC-2A74E2E400F7}"/>
+          </ac:spMkLst>
+        </pc:spChg>
       </pc:sldChg>
-      <pc:sldChg chg="modSp new mod">
-        <pc:chgData name="Margo Bonal" userId="18c9fa0f-b53d-478b-9dc0-6ad88786c19f" providerId="ADAL" clId="{93D479E5-F67F-4B8A-A78F-A0B574A116B6}" dt="2026-03-14T15:49:35.627" v="428" actId="20577"/>
+      <pc:sldChg chg="addSp delSp modSp new mod setBg">
+        <pc:chgData name="Margo Bonal" userId="18c9fa0f-b53d-478b-9dc0-6ad88786c19f" providerId="ADAL" clId="{93D479E5-F67F-4B8A-A78F-A0B574A116B6}" dt="2026-03-23T15:43:49.810" v="2724" actId="26606"/>
         <pc:sldMkLst>
           <pc:docMk/>
           <pc:sldMk cId="4119443303" sldId="267"/>
         </pc:sldMkLst>
         <pc:spChg chg="mod">
-          <ac:chgData name="Margo Bonal" userId="18c9fa0f-b53d-478b-9dc0-6ad88786c19f" providerId="ADAL" clId="{93D479E5-F67F-4B8A-A78F-A0B574A116B6}" dt="2026-03-14T15:49:35.627" v="428" actId="20577"/>
+          <ac:chgData name="Margo Bonal" userId="18c9fa0f-b53d-478b-9dc0-6ad88786c19f" providerId="ADAL" clId="{93D479E5-F67F-4B8A-A78F-A0B574A116B6}" dt="2026-03-23T15:43:49.810" v="2724" actId="26606"/>
           <ac:spMkLst>
             <pc:docMk/>
             <pc:sldMk cId="4119443303" sldId="267"/>
             <ac:spMk id="2" creationId="{45E01E8D-68C8-D6F0-81C8-63C5F69745F8}"/>
           </ac:spMkLst>
         </pc:spChg>
+        <pc:spChg chg="del mod">
+          <ac:chgData name="Margo Bonal" userId="18c9fa0f-b53d-478b-9dc0-6ad88786c19f" providerId="ADAL" clId="{93D479E5-F67F-4B8A-A78F-A0B574A116B6}" dt="2026-03-23T15:43:49.810" v="2724" actId="26606"/>
+          <ac:spMkLst>
+            <pc:docMk/>
+            <pc:sldMk cId="4119443303" sldId="267"/>
+            <ac:spMk id="3" creationId="{1432174E-B03B-5BA6-1C84-A4132D40EE4A}"/>
+          </ac:spMkLst>
+        </pc:spChg>
+        <pc:spChg chg="add">
+          <ac:chgData name="Margo Bonal" userId="18c9fa0f-b53d-478b-9dc0-6ad88786c19f" providerId="ADAL" clId="{93D479E5-F67F-4B8A-A78F-A0B574A116B6}" dt="2026-03-23T15:43:49.810" v="2724" actId="26606"/>
+          <ac:spMkLst>
+            <pc:docMk/>
+            <pc:sldMk cId="4119443303" sldId="267"/>
+            <ac:spMk id="9" creationId="{56E9B3E6-E277-4D68-BA48-9CB43FFBD6E2}"/>
+          </ac:spMkLst>
+        </pc:spChg>
+        <pc:spChg chg="add">
+          <ac:chgData name="Margo Bonal" userId="18c9fa0f-b53d-478b-9dc0-6ad88786c19f" providerId="ADAL" clId="{93D479E5-F67F-4B8A-A78F-A0B574A116B6}" dt="2026-03-23T15:43:49.810" v="2724" actId="26606"/>
+          <ac:spMkLst>
+            <pc:docMk/>
+            <pc:sldMk cId="4119443303" sldId="267"/>
+            <ac:spMk id="16" creationId="{D5B0017B-2ECA-49AF-B397-DC140825DF8D}"/>
+          </ac:spMkLst>
+        </pc:spChg>
+        <pc:grpChg chg="add">
+          <ac:chgData name="Margo Bonal" userId="18c9fa0f-b53d-478b-9dc0-6ad88786c19f" providerId="ADAL" clId="{93D479E5-F67F-4B8A-A78F-A0B574A116B6}" dt="2026-03-23T15:43:49.810" v="2724" actId="26606"/>
+          <ac:grpSpMkLst>
+            <pc:docMk/>
+            <pc:sldMk cId="4119443303" sldId="267"/>
+            <ac:grpSpMk id="11" creationId="{AE1C45F0-260A-458C-96ED-C1F6D2151219}"/>
+          </ac:grpSpMkLst>
+        </pc:grpChg>
+        <pc:graphicFrameChg chg="add">
+          <ac:chgData name="Margo Bonal" userId="18c9fa0f-b53d-478b-9dc0-6ad88786c19f" providerId="ADAL" clId="{93D479E5-F67F-4B8A-A78F-A0B574A116B6}" dt="2026-03-23T15:43:49.810" v="2724" actId="26606"/>
+          <ac:graphicFrameMkLst>
+            <pc:docMk/>
+            <pc:sldMk cId="4119443303" sldId="267"/>
+            <ac:graphicFrameMk id="5" creationId="{CF8D51C6-38B2-81C2-EB43-6EA0B62009E4}"/>
+          </ac:graphicFrameMkLst>
+        </pc:graphicFrameChg>
+        <pc:cxnChg chg="add">
+          <ac:chgData name="Margo Bonal" userId="18c9fa0f-b53d-478b-9dc0-6ad88786c19f" providerId="ADAL" clId="{93D479E5-F67F-4B8A-A78F-A0B574A116B6}" dt="2026-03-23T15:43:49.810" v="2724" actId="26606"/>
+          <ac:cxnSpMkLst>
+            <pc:docMk/>
+            <pc:sldMk cId="4119443303" sldId="267"/>
+            <ac:cxnSpMk id="18" creationId="{6CF1BAF6-AD41-4082-B212-8A1F9A2E8779}"/>
+          </ac:cxnSpMkLst>
+        </pc:cxnChg>
       </pc:sldChg>
       <pc:sldChg chg="addSp delSp modSp new mod setBg">
         <pc:chgData name="Margo Bonal" userId="18c9fa0f-b53d-478b-9dc0-6ad88786c19f" providerId="ADAL" clId="{93D479E5-F67F-4B8A-A78F-A0B574A116B6}" dt="2026-03-20T13:27:04.645" v="1300" actId="26606"/>
@@ -1198,14 +433,6 @@
             <pc:docMk/>
             <pc:sldMk cId="472922610" sldId="268"/>
             <ac:spMk id="2" creationId="{8F6BC2BD-D5AB-40B6-2E42-FE395BB94CFD}"/>
-          </ac:spMkLst>
-        </pc:spChg>
-        <pc:spChg chg="del">
-          <ac:chgData name="Margo Bonal" userId="18c9fa0f-b53d-478b-9dc0-6ad88786c19f" providerId="ADAL" clId="{93D479E5-F67F-4B8A-A78F-A0B574A116B6}" dt="2026-03-20T13:27:04.645" v="1300" actId="26606"/>
-          <ac:spMkLst>
-            <pc:docMk/>
-            <pc:sldMk cId="472922610" sldId="268"/>
-            <ac:spMk id="3" creationId="{01753B54-4189-67D7-E701-C4A7EDD0EF6C}"/>
           </ac:spMkLst>
         </pc:spChg>
         <pc:spChg chg="add">
@@ -1265,21 +492,6 @@
           </ac:spMkLst>
         </pc:spChg>
       </pc:sldChg>
-      <pc:sldChg chg="addSp delSp modSp new del mod setBg">
-        <pc:chgData name="Margo Bonal" userId="18c9fa0f-b53d-478b-9dc0-6ad88786c19f" providerId="ADAL" clId="{93D479E5-F67F-4B8A-A78F-A0B574A116B6}" dt="2026-03-20T13:09:21.485" v="814" actId="2696"/>
-        <pc:sldMkLst>
-          <pc:docMk/>
-          <pc:sldMk cId="2144603681" sldId="270"/>
-        </pc:sldMkLst>
-        <pc:spChg chg="add mod">
-          <ac:chgData name="Margo Bonal" userId="18c9fa0f-b53d-478b-9dc0-6ad88786c19f" providerId="ADAL" clId="{93D479E5-F67F-4B8A-A78F-A0B574A116B6}" dt="2026-03-20T13:06:37.056" v="758" actId="21"/>
-          <ac:spMkLst>
-            <pc:docMk/>
-            <pc:sldMk cId="2144603681" sldId="270"/>
-            <ac:spMk id="4" creationId="{EC4085F2-62A1-F12C-96F1-D60030578151}"/>
-          </ac:spMkLst>
-        </pc:spChg>
-      </pc:sldChg>
       <pc:sldChg chg="addSp delSp modSp new mod ord setBg">
         <pc:chgData name="Margo Bonal" userId="18c9fa0f-b53d-478b-9dc0-6ad88786c19f" providerId="ADAL" clId="{93D479E5-F67F-4B8A-A78F-A0B574A116B6}" dt="2026-03-20T13:09:01.760" v="813" actId="26606"/>
         <pc:sldMkLst>
@@ -1300,102 +512,6 @@
             <pc:docMk/>
             <pc:sldMk cId="2732488591" sldId="271"/>
             <ac:spMk id="3" creationId="{B41390D8-00E3-4E00-622B-469D67983D42}"/>
-          </ac:spMkLst>
-        </pc:spChg>
-        <pc:spChg chg="add mod">
-          <ac:chgData name="Margo Bonal" userId="18c9fa0f-b53d-478b-9dc0-6ad88786c19f" providerId="ADAL" clId="{93D479E5-F67F-4B8A-A78F-A0B574A116B6}" dt="2026-03-20T13:06:12.937" v="729"/>
-          <ac:spMkLst>
-            <pc:docMk/>
-            <pc:sldMk cId="2732488591" sldId="271"/>
-            <ac:spMk id="4" creationId="{9DBF99C9-F135-F692-CD55-8034D9D7BC7E}"/>
-          </ac:spMkLst>
-        </pc:spChg>
-        <pc:spChg chg="add del">
-          <ac:chgData name="Margo Bonal" userId="18c9fa0f-b53d-478b-9dc0-6ad88786c19f" providerId="ADAL" clId="{93D479E5-F67F-4B8A-A78F-A0B574A116B6}" dt="2026-03-20T13:09:01.760" v="813" actId="26606"/>
-          <ac:spMkLst>
-            <pc:docMk/>
-            <pc:sldMk cId="2732488591" sldId="271"/>
-            <ac:spMk id="8" creationId="{0E30439A-8A5B-46EC-8283-9B6B031D40D0}"/>
-          </ac:spMkLst>
-        </pc:spChg>
-        <pc:spChg chg="add del">
-          <ac:chgData name="Margo Bonal" userId="18c9fa0f-b53d-478b-9dc0-6ad88786c19f" providerId="ADAL" clId="{93D479E5-F67F-4B8A-A78F-A0B574A116B6}" dt="2026-03-20T13:09:01.745" v="812" actId="26606"/>
-          <ac:spMkLst>
-            <pc:docMk/>
-            <pc:sldMk cId="2732488591" sldId="271"/>
-            <ac:spMk id="10" creationId="{5CEAD642-85CF-4750-8432-7C80C901F001}"/>
-          </ac:spMkLst>
-        </pc:spChg>
-        <pc:spChg chg="add del">
-          <ac:chgData name="Margo Bonal" userId="18c9fa0f-b53d-478b-9dc0-6ad88786c19f" providerId="ADAL" clId="{93D479E5-F67F-4B8A-A78F-A0B574A116B6}" dt="2026-03-20T13:09:01.760" v="813" actId="26606"/>
-          <ac:spMkLst>
-            <pc:docMk/>
-            <pc:sldMk cId="2732488591" sldId="271"/>
-            <ac:spMk id="12" creationId="{FA33EEAE-15D5-4119-8C1E-89D943F911EF}"/>
-          </ac:spMkLst>
-        </pc:spChg>
-        <pc:spChg chg="add del">
-          <ac:chgData name="Margo Bonal" userId="18c9fa0f-b53d-478b-9dc0-6ad88786c19f" providerId="ADAL" clId="{93D479E5-F67F-4B8A-A78F-A0B574A116B6}" dt="2026-03-20T13:09:01.760" v="813" actId="26606"/>
-          <ac:spMkLst>
-            <pc:docMk/>
-            <pc:sldMk cId="2732488591" sldId="271"/>
-            <ac:spMk id="14" creationId="{730D8B3B-9B80-4025-B934-26DC7D7CD231}"/>
-          </ac:spMkLst>
-        </pc:spChg>
-        <pc:spChg chg="add del">
-          <ac:chgData name="Margo Bonal" userId="18c9fa0f-b53d-478b-9dc0-6ad88786c19f" providerId="ADAL" clId="{93D479E5-F67F-4B8A-A78F-A0B574A116B6}" dt="2026-03-20T13:09:01.760" v="813" actId="26606"/>
-          <ac:spMkLst>
-            <pc:docMk/>
-            <pc:sldMk cId="2732488591" sldId="271"/>
-            <ac:spMk id="16" creationId="{B5A1B09C-1565-46F8-B70F-621C5EB48A09}"/>
-          </ac:spMkLst>
-        </pc:spChg>
-        <pc:spChg chg="add del">
-          <ac:chgData name="Margo Bonal" userId="18c9fa0f-b53d-478b-9dc0-6ad88786c19f" providerId="ADAL" clId="{93D479E5-F67F-4B8A-A78F-A0B574A116B6}" dt="2026-03-20T13:09:01.760" v="813" actId="26606"/>
-          <ac:spMkLst>
-            <pc:docMk/>
-            <pc:sldMk cId="2732488591" sldId="271"/>
-            <ac:spMk id="18" creationId="{8C516CC8-80AC-446C-A56E-9F54B7210402}"/>
-          </ac:spMkLst>
-        </pc:spChg>
-        <pc:spChg chg="add del">
-          <ac:chgData name="Margo Bonal" userId="18c9fa0f-b53d-478b-9dc0-6ad88786c19f" providerId="ADAL" clId="{93D479E5-F67F-4B8A-A78F-A0B574A116B6}" dt="2026-03-20T13:09:01.745" v="812" actId="26606"/>
-          <ac:spMkLst>
-            <pc:docMk/>
-            <pc:sldMk cId="2732488591" sldId="271"/>
-            <ac:spMk id="20" creationId="{53947E58-F088-49F1-A3D1-DEA690192E84}"/>
-          </ac:spMkLst>
-        </pc:spChg>
-        <pc:spChg chg="add del">
-          <ac:chgData name="Margo Bonal" userId="18c9fa0f-b53d-478b-9dc0-6ad88786c19f" providerId="ADAL" clId="{93D479E5-F67F-4B8A-A78F-A0B574A116B6}" dt="2026-03-20T13:08:59.203" v="810" actId="26606"/>
-          <ac:spMkLst>
-            <pc:docMk/>
-            <pc:sldMk cId="2732488591" sldId="271"/>
-            <ac:spMk id="25" creationId="{6F5A5072-7B47-4D32-B52A-4EBBF590B8A5}"/>
-          </ac:spMkLst>
-        </pc:spChg>
-        <pc:spChg chg="add del">
-          <ac:chgData name="Margo Bonal" userId="18c9fa0f-b53d-478b-9dc0-6ad88786c19f" providerId="ADAL" clId="{93D479E5-F67F-4B8A-A78F-A0B574A116B6}" dt="2026-03-20T13:08:59.203" v="810" actId="26606"/>
-          <ac:spMkLst>
-            <pc:docMk/>
-            <pc:sldMk cId="2732488591" sldId="271"/>
-            <ac:spMk id="27" creationId="{9715DAF0-AE1B-46C9-8A6B-DB2AA05AB91D}"/>
-          </ac:spMkLst>
-        </pc:spChg>
-        <pc:spChg chg="add del">
-          <ac:chgData name="Margo Bonal" userId="18c9fa0f-b53d-478b-9dc0-6ad88786c19f" providerId="ADAL" clId="{93D479E5-F67F-4B8A-A78F-A0B574A116B6}" dt="2026-03-20T13:08:59.203" v="810" actId="26606"/>
-          <ac:spMkLst>
-            <pc:docMk/>
-            <pc:sldMk cId="2732488591" sldId="271"/>
-            <ac:spMk id="29" creationId="{6016219D-510E-4184-9090-6D5578A87BD1}"/>
-          </ac:spMkLst>
-        </pc:spChg>
-        <pc:spChg chg="add del">
-          <ac:chgData name="Margo Bonal" userId="18c9fa0f-b53d-478b-9dc0-6ad88786c19f" providerId="ADAL" clId="{93D479E5-F67F-4B8A-A78F-A0B574A116B6}" dt="2026-03-20T13:08:59.203" v="810" actId="26606"/>
-          <ac:spMkLst>
-            <pc:docMk/>
-            <pc:sldMk cId="2732488591" sldId="271"/>
-            <ac:spMk id="35" creationId="{C29501E6-A978-4A61-9689-9085AF97A53A}"/>
           </ac:spMkLst>
         </pc:spChg>
         <pc:spChg chg="add">
@@ -1430,243 +546,6 @@
             <ac:spMk id="46" creationId="{4734BADF-9461-4621-B112-2D7BABEA7DD0}"/>
           </ac:spMkLst>
         </pc:spChg>
-        <pc:picChg chg="add del">
-          <ac:chgData name="Margo Bonal" userId="18c9fa0f-b53d-478b-9dc0-6ad88786c19f" providerId="ADAL" clId="{93D479E5-F67F-4B8A-A78F-A0B574A116B6}" dt="2026-03-20T13:09:01.745" v="812" actId="26606"/>
-          <ac:picMkLst>
-            <pc:docMk/>
-            <pc:sldMk cId="2732488591" sldId="271"/>
-            <ac:picMk id="22" creationId="{D25F29D4-7367-7996-0ABE-990CD6FCC80F}"/>
-          </ac:picMkLst>
-        </pc:picChg>
-      </pc:sldChg>
-      <pc:sldChg chg="addSp delSp modSp add del mod ord">
-        <pc:chgData name="Margo Bonal" userId="18c9fa0f-b53d-478b-9dc0-6ad88786c19f" providerId="ADAL" clId="{93D479E5-F67F-4B8A-A78F-A0B574A116B6}" dt="2026-03-20T14:14:05.442" v="2219" actId="2696"/>
-        <pc:sldMkLst>
-          <pc:docMk/>
-          <pc:sldMk cId="3315532320" sldId="272"/>
-        </pc:sldMkLst>
-        <pc:spChg chg="mod">
-          <ac:chgData name="Margo Bonal" userId="18c9fa0f-b53d-478b-9dc0-6ad88786c19f" providerId="ADAL" clId="{93D479E5-F67F-4B8A-A78F-A0B574A116B6}" dt="2026-03-20T13:28:48.354" v="1329" actId="26606"/>
-          <ac:spMkLst>
-            <pc:docMk/>
-            <pc:sldMk cId="3315532320" sldId="272"/>
-            <ac:spMk id="2" creationId="{01710C0F-B8CE-2EA5-2F7C-3BF52800AD47}"/>
-          </ac:spMkLst>
-        </pc:spChg>
-        <pc:spChg chg="add del mod">
-          <ac:chgData name="Margo Bonal" userId="18c9fa0f-b53d-478b-9dc0-6ad88786c19f" providerId="ADAL" clId="{93D479E5-F67F-4B8A-A78F-A0B574A116B6}" dt="2026-03-20T13:24:09.413" v="1265" actId="478"/>
-          <ac:spMkLst>
-            <pc:docMk/>
-            <pc:sldMk cId="3315532320" sldId="272"/>
-            <ac:spMk id="4" creationId="{B5B415DD-DB14-D481-2487-6662804B463A}"/>
-          </ac:spMkLst>
-        </pc:spChg>
-        <pc:spChg chg="add del mod">
-          <ac:chgData name="Margo Bonal" userId="18c9fa0f-b53d-478b-9dc0-6ad88786c19f" providerId="ADAL" clId="{93D479E5-F67F-4B8A-A78F-A0B574A116B6}" dt="2026-03-20T13:28:48.404" v="1330" actId="26606"/>
-          <ac:spMkLst>
-            <pc:docMk/>
-            <pc:sldMk cId="3315532320" sldId="272"/>
-            <ac:spMk id="5" creationId="{3B8FDD2E-DDBD-DBEC-41C1-30363F6F0858}"/>
-          </ac:spMkLst>
-        </pc:spChg>
-        <pc:spChg chg="add del">
-          <ac:chgData name="Margo Bonal" userId="18c9fa0f-b53d-478b-9dc0-6ad88786c19f" providerId="ADAL" clId="{93D479E5-F67F-4B8A-A78F-A0B574A116B6}" dt="2026-03-20T13:28:48.404" v="1330" actId="26606"/>
-          <ac:spMkLst>
-            <pc:docMk/>
-            <pc:sldMk cId="3315532320" sldId="272"/>
-            <ac:spMk id="109" creationId="{8578F078-414A-FDDF-61B5-047464A6BA3A}"/>
-          </ac:spMkLst>
-        </pc:spChg>
-        <pc:spChg chg="add del">
-          <ac:chgData name="Margo Bonal" userId="18c9fa0f-b53d-478b-9dc0-6ad88786c19f" providerId="ADAL" clId="{93D479E5-F67F-4B8A-A78F-A0B574A116B6}" dt="2026-03-20T13:28:48.404" v="1330" actId="26606"/>
-          <ac:spMkLst>
-            <pc:docMk/>
-            <pc:sldMk cId="3315532320" sldId="272"/>
-            <ac:spMk id="110" creationId="{CE9831D2-A3ED-009B-BD31-4A58E2F9EFBB}"/>
-          </ac:spMkLst>
-        </pc:spChg>
-        <pc:spChg chg="add del">
-          <ac:chgData name="Margo Bonal" userId="18c9fa0f-b53d-478b-9dc0-6ad88786c19f" providerId="ADAL" clId="{93D479E5-F67F-4B8A-A78F-A0B574A116B6}" dt="2026-03-20T13:28:48.404" v="1330" actId="26606"/>
-          <ac:spMkLst>
-            <pc:docMk/>
-            <pc:sldMk cId="3315532320" sldId="272"/>
-            <ac:spMk id="111" creationId="{DE07DE59-AE45-0104-D127-8F065F58C993}"/>
-          </ac:spMkLst>
-        </pc:spChg>
-        <pc:spChg chg="del">
-          <ac:chgData name="Margo Bonal" userId="18c9fa0f-b53d-478b-9dc0-6ad88786c19f" providerId="ADAL" clId="{93D479E5-F67F-4B8A-A78F-A0B574A116B6}" dt="2026-03-20T13:28:48.404" v="1330" actId="26606"/>
-          <ac:spMkLst>
-            <pc:docMk/>
-            <pc:sldMk cId="3315532320" sldId="272"/>
-            <ac:spMk id="112" creationId="{50588F04-1D7F-B1B8-149A-B3247B60D8A2}"/>
-          </ac:spMkLst>
-        </pc:spChg>
-        <pc:spChg chg="add del">
-          <ac:chgData name="Margo Bonal" userId="18c9fa0f-b53d-478b-9dc0-6ad88786c19f" providerId="ADAL" clId="{93D479E5-F67F-4B8A-A78F-A0B574A116B6}" dt="2026-03-20T13:28:48.354" v="1329" actId="26606"/>
-          <ac:spMkLst>
-            <pc:docMk/>
-            <pc:sldMk cId="3315532320" sldId="272"/>
-            <ac:spMk id="117" creationId="{1B15ED52-F352-441B-82BF-E0EA34836D08}"/>
-          </ac:spMkLst>
-        </pc:spChg>
-        <pc:spChg chg="add del">
-          <ac:chgData name="Margo Bonal" userId="18c9fa0f-b53d-478b-9dc0-6ad88786c19f" providerId="ADAL" clId="{93D479E5-F67F-4B8A-A78F-A0B574A116B6}" dt="2026-03-20T13:28:48.354" v="1329" actId="26606"/>
-          <ac:spMkLst>
-            <pc:docMk/>
-            <pc:sldMk cId="3315532320" sldId="272"/>
-            <ac:spMk id="119" creationId="{3B2E3793-BFE6-45A2-9B7B-E18844431C99}"/>
-          </ac:spMkLst>
-        </pc:spChg>
-        <pc:spChg chg="add del">
-          <ac:chgData name="Margo Bonal" userId="18c9fa0f-b53d-478b-9dc0-6ad88786c19f" providerId="ADAL" clId="{93D479E5-F67F-4B8A-A78F-A0B574A116B6}" dt="2026-03-20T13:28:48.354" v="1329" actId="26606"/>
-          <ac:spMkLst>
-            <pc:docMk/>
-            <pc:sldMk cId="3315532320" sldId="272"/>
-            <ac:spMk id="121" creationId="{BC4C4868-CB8F-4AF9-9CDB-8108F2C19B67}"/>
-          </ac:spMkLst>
-        </pc:spChg>
-        <pc:spChg chg="add del">
-          <ac:chgData name="Margo Bonal" userId="18c9fa0f-b53d-478b-9dc0-6ad88786c19f" providerId="ADAL" clId="{93D479E5-F67F-4B8A-A78F-A0B574A116B6}" dt="2026-03-20T13:28:48.354" v="1329" actId="26606"/>
-          <ac:spMkLst>
-            <pc:docMk/>
-            <pc:sldMk cId="3315532320" sldId="272"/>
-            <ac:spMk id="123" creationId="{375E0459-6403-40CD-989D-56A4407CA12E}"/>
-          </ac:spMkLst>
-        </pc:spChg>
-        <pc:spChg chg="add del">
-          <ac:chgData name="Margo Bonal" userId="18c9fa0f-b53d-478b-9dc0-6ad88786c19f" providerId="ADAL" clId="{93D479E5-F67F-4B8A-A78F-A0B574A116B6}" dt="2026-03-20T13:28:48.354" v="1329" actId="26606"/>
-          <ac:spMkLst>
-            <pc:docMk/>
-            <pc:sldMk cId="3315532320" sldId="272"/>
-            <ac:spMk id="125" creationId="{53E5B1A8-3AC9-4BD1-9BBC-78CA94F2D1BA}"/>
-          </ac:spMkLst>
-        </pc:spChg>
-        <pc:spChg chg="add">
-          <ac:chgData name="Margo Bonal" userId="18c9fa0f-b53d-478b-9dc0-6ad88786c19f" providerId="ADAL" clId="{93D479E5-F67F-4B8A-A78F-A0B574A116B6}" dt="2026-03-20T13:28:48.404" v="1330" actId="26606"/>
-          <ac:spMkLst>
-            <pc:docMk/>
-            <pc:sldMk cId="3315532320" sldId="272"/>
-            <ac:spMk id="127" creationId="{8578F078-414A-FDDF-61B5-047464A6BA3A}"/>
-          </ac:spMkLst>
-        </pc:spChg>
-        <pc:spChg chg="add">
-          <ac:chgData name="Margo Bonal" userId="18c9fa0f-b53d-478b-9dc0-6ad88786c19f" providerId="ADAL" clId="{93D479E5-F67F-4B8A-A78F-A0B574A116B6}" dt="2026-03-20T13:28:48.404" v="1330" actId="26606"/>
-          <ac:spMkLst>
-            <pc:docMk/>
-            <pc:sldMk cId="3315532320" sldId="272"/>
-            <ac:spMk id="128" creationId="{CE9831D2-A3ED-009B-BD31-4A58E2F9EFBB}"/>
-          </ac:spMkLst>
-        </pc:spChg>
-        <pc:spChg chg="add">
-          <ac:chgData name="Margo Bonal" userId="18c9fa0f-b53d-478b-9dc0-6ad88786c19f" providerId="ADAL" clId="{93D479E5-F67F-4B8A-A78F-A0B574A116B6}" dt="2026-03-20T13:28:48.404" v="1330" actId="26606"/>
-          <ac:spMkLst>
-            <pc:docMk/>
-            <pc:sldMk cId="3315532320" sldId="272"/>
-            <ac:spMk id="129" creationId="{DE07DE59-AE45-0104-D127-8F065F58C993}"/>
-          </ac:spMkLst>
-        </pc:spChg>
-        <pc:spChg chg="add">
-          <ac:chgData name="Margo Bonal" userId="18c9fa0f-b53d-478b-9dc0-6ad88786c19f" providerId="ADAL" clId="{93D479E5-F67F-4B8A-A78F-A0B574A116B6}" dt="2026-03-20T13:28:48.404" v="1330" actId="26606"/>
-          <ac:spMkLst>
-            <pc:docMk/>
-            <pc:sldMk cId="3315532320" sldId="272"/>
-            <ac:spMk id="130" creationId="{50588F04-1D7F-B1B8-149A-B3247B60D8A2}"/>
-          </ac:spMkLst>
-        </pc:spChg>
-        <pc:graphicFrameChg chg="del">
-          <ac:chgData name="Margo Bonal" userId="18c9fa0f-b53d-478b-9dc0-6ad88786c19f" providerId="ADAL" clId="{93D479E5-F67F-4B8A-A78F-A0B574A116B6}" dt="2026-03-20T13:24:02.623" v="1264" actId="478"/>
-          <ac:graphicFrameMkLst>
-            <pc:docMk/>
-            <pc:sldMk cId="3315532320" sldId="272"/>
-            <ac:graphicFrameMk id="50" creationId="{227D2C18-4623-C548-9543-E724ECF52C11}"/>
-          </ac:graphicFrameMkLst>
-        </pc:graphicFrameChg>
-        <pc:graphicFrameChg chg="add mod modGraphic">
-          <ac:chgData name="Margo Bonal" userId="18c9fa0f-b53d-478b-9dc0-6ad88786c19f" providerId="ADAL" clId="{93D479E5-F67F-4B8A-A78F-A0B574A116B6}" dt="2026-03-20T13:29:52.514" v="1335" actId="12100"/>
-          <ac:graphicFrameMkLst>
-            <pc:docMk/>
-            <pc:sldMk cId="3315532320" sldId="272"/>
-            <ac:graphicFrameMk id="114" creationId="{4D1DD9F5-D5E3-F5F3-7E4D-8B7E0E6AEA7A}"/>
-          </ac:graphicFrameMkLst>
-        </pc:graphicFrameChg>
-      </pc:sldChg>
-      <pc:sldChg chg="new del">
-        <pc:chgData name="Margo Bonal" userId="18c9fa0f-b53d-478b-9dc0-6ad88786c19f" providerId="ADAL" clId="{93D479E5-F67F-4B8A-A78F-A0B574A116B6}" dt="2026-03-20T13:49:34.184" v="1847" actId="2696"/>
-        <pc:sldMkLst>
-          <pc:docMk/>
-          <pc:sldMk cId="2089625348" sldId="273"/>
-        </pc:sldMkLst>
-      </pc:sldChg>
-      <pc:sldChg chg="addSp delSp modSp add del mod">
-        <pc:chgData name="Margo Bonal" userId="18c9fa0f-b53d-478b-9dc0-6ad88786c19f" providerId="ADAL" clId="{93D479E5-F67F-4B8A-A78F-A0B574A116B6}" dt="2026-03-20T13:55:36.975" v="1987" actId="2696"/>
-        <pc:sldMkLst>
-          <pc:docMk/>
-          <pc:sldMk cId="2988100851" sldId="274"/>
-        </pc:sldMkLst>
-        <pc:spChg chg="mod">
-          <ac:chgData name="Margo Bonal" userId="18c9fa0f-b53d-478b-9dc0-6ad88786c19f" providerId="ADAL" clId="{93D479E5-F67F-4B8A-A78F-A0B574A116B6}" dt="2026-03-20T13:50:02.472" v="1863" actId="20577"/>
-          <ac:spMkLst>
-            <pc:docMk/>
-            <pc:sldMk cId="2988100851" sldId="274"/>
-            <ac:spMk id="2" creationId="{6CCEC8F2-E6DA-F4BD-15DE-7FE5ACA4444B}"/>
-          </ac:spMkLst>
-        </pc:spChg>
-        <pc:spChg chg="add mod">
-          <ac:chgData name="Margo Bonal" userId="18c9fa0f-b53d-478b-9dc0-6ad88786c19f" providerId="ADAL" clId="{93D479E5-F67F-4B8A-A78F-A0B574A116B6}" dt="2026-03-20T13:54:18.168" v="1971" actId="1076"/>
-          <ac:spMkLst>
-            <pc:docMk/>
-            <pc:sldMk cId="2988100851" sldId="274"/>
-            <ac:spMk id="3" creationId="{A87F8AF1-A890-8DE8-4FA2-C5B5CB8465FA}"/>
-          </ac:spMkLst>
-        </pc:spChg>
-        <pc:spChg chg="add mod">
-          <ac:chgData name="Margo Bonal" userId="18c9fa0f-b53d-478b-9dc0-6ad88786c19f" providerId="ADAL" clId="{93D479E5-F67F-4B8A-A78F-A0B574A116B6}" dt="2026-03-20T13:54:14.247" v="1970" actId="1076"/>
-          <ac:spMkLst>
-            <pc:docMk/>
-            <pc:sldMk cId="2988100851" sldId="274"/>
-            <ac:spMk id="4" creationId="{4FF8DD4D-EA1B-64B2-A80B-D8C3D0AFB689}"/>
-          </ac:spMkLst>
-        </pc:spChg>
-        <pc:spChg chg="add mod">
-          <ac:chgData name="Margo Bonal" userId="18c9fa0f-b53d-478b-9dc0-6ad88786c19f" providerId="ADAL" clId="{93D479E5-F67F-4B8A-A78F-A0B574A116B6}" dt="2026-03-20T13:54:21.993" v="1972" actId="1076"/>
-          <ac:spMkLst>
-            <pc:docMk/>
-            <pc:sldMk cId="2988100851" sldId="274"/>
-            <ac:spMk id="5" creationId="{AE3C1476-056F-0393-9A93-37F7D950A8AC}"/>
-          </ac:spMkLst>
-        </pc:spChg>
-        <pc:spChg chg="del">
-          <ac:chgData name="Margo Bonal" userId="18c9fa0f-b53d-478b-9dc0-6ad88786c19f" providerId="ADAL" clId="{93D479E5-F67F-4B8A-A78F-A0B574A116B6}" dt="2026-03-20T13:49:46.710" v="1849" actId="478"/>
-          <ac:spMkLst>
-            <pc:docMk/>
-            <pc:sldMk cId="2988100851" sldId="274"/>
-            <ac:spMk id="9" creationId="{8B1836B9-5C68-51F2-66C1-963B9EA68D08}"/>
-          </ac:spMkLst>
-        </pc:spChg>
-        <pc:spChg chg="del">
-          <ac:chgData name="Margo Bonal" userId="18c9fa0f-b53d-478b-9dc0-6ad88786c19f" providerId="ADAL" clId="{93D479E5-F67F-4B8A-A78F-A0B574A116B6}" dt="2026-03-20T13:49:53.557" v="1851" actId="478"/>
-          <ac:spMkLst>
-            <pc:docMk/>
-            <pc:sldMk cId="2988100851" sldId="274"/>
-            <ac:spMk id="14" creationId="{FA35482F-82AA-C6FB-3A6F-96F5B6C5E766}"/>
-          </ac:spMkLst>
-        </pc:spChg>
-        <pc:spChg chg="del">
-          <ac:chgData name="Margo Bonal" userId="18c9fa0f-b53d-478b-9dc0-6ad88786c19f" providerId="ADAL" clId="{93D479E5-F67F-4B8A-A78F-A0B574A116B6}" dt="2026-03-20T13:49:50.709" v="1850" actId="478"/>
-          <ac:spMkLst>
-            <pc:docMk/>
-            <pc:sldMk cId="2988100851" sldId="274"/>
-            <ac:spMk id="16" creationId="{B6ECB670-8129-9638-167A-91044219EF65}"/>
-          </ac:spMkLst>
-        </pc:spChg>
-        <pc:spChg chg="mod">
-          <ac:chgData name="Margo Bonal" userId="18c9fa0f-b53d-478b-9dc0-6ad88786c19f" providerId="ADAL" clId="{93D479E5-F67F-4B8A-A78F-A0B574A116B6}" dt="2026-03-20T13:51:07.326" v="1911" actId="1076"/>
-          <ac:spMkLst>
-            <pc:docMk/>
-            <pc:sldMk cId="2988100851" sldId="274"/>
-            <ac:spMk id="18" creationId="{23804C71-DB17-A5D7-14AA-23BDBC7BF3C8}"/>
-          </ac:spMkLst>
-        </pc:spChg>
       </pc:sldChg>
       <pc:sldChg chg="addSp delSp modSp new mod setBg">
         <pc:chgData name="Margo Bonal" userId="18c9fa0f-b53d-478b-9dc0-6ad88786c19f" providerId="ADAL" clId="{93D479E5-F67F-4B8A-A78F-A0B574A116B6}" dt="2026-03-20T14:14:45.748" v="2222" actId="1076"/>
@@ -1674,38 +553,6 @@
           <pc:docMk/>
           <pc:sldMk cId="1426557120" sldId="275"/>
         </pc:sldMkLst>
-        <pc:spChg chg="del">
-          <ac:chgData name="Margo Bonal" userId="18c9fa0f-b53d-478b-9dc0-6ad88786c19f" providerId="ADAL" clId="{93D479E5-F67F-4B8A-A78F-A0B574A116B6}" dt="2026-03-20T13:54:29.658" v="1973" actId="478"/>
-          <ac:spMkLst>
-            <pc:docMk/>
-            <pc:sldMk cId="1426557120" sldId="275"/>
-            <ac:spMk id="2" creationId="{903B929A-9E6C-B27E-0339-3E2D72B2355A}"/>
-          </ac:spMkLst>
-        </pc:spChg>
-        <pc:spChg chg="del">
-          <ac:chgData name="Margo Bonal" userId="18c9fa0f-b53d-478b-9dc0-6ad88786c19f" providerId="ADAL" clId="{93D479E5-F67F-4B8A-A78F-A0B574A116B6}" dt="2026-03-20T13:54:29.658" v="1973" actId="478"/>
-          <ac:spMkLst>
-            <pc:docMk/>
-            <pc:sldMk cId="1426557120" sldId="275"/>
-            <ac:spMk id="3" creationId="{C197D661-CC02-6BBF-673E-3F38CDF19311}"/>
-          </ac:spMkLst>
-        </pc:spChg>
-        <pc:spChg chg="add del mod">
-          <ac:chgData name="Margo Bonal" userId="18c9fa0f-b53d-478b-9dc0-6ad88786c19f" providerId="ADAL" clId="{93D479E5-F67F-4B8A-A78F-A0B574A116B6}" dt="2026-03-20T13:54:56.660" v="1976" actId="478"/>
-          <ac:spMkLst>
-            <pc:docMk/>
-            <pc:sldMk cId="1426557120" sldId="275"/>
-            <ac:spMk id="4" creationId="{923B3A2A-430B-5BDA-E7F3-275967F8150D}"/>
-          </ac:spMkLst>
-        </pc:spChg>
-        <pc:spChg chg="add del mod">
-          <ac:chgData name="Margo Bonal" userId="18c9fa0f-b53d-478b-9dc0-6ad88786c19f" providerId="ADAL" clId="{93D479E5-F67F-4B8A-A78F-A0B574A116B6}" dt="2026-03-20T14:02:40.731" v="2072" actId="26606"/>
-          <ac:spMkLst>
-            <pc:docMk/>
-            <pc:sldMk cId="1426557120" sldId="275"/>
-            <ac:spMk id="6" creationId="{5D34E684-F582-E4E3-63B2-42C84F9F9AD8}"/>
-          </ac:spMkLst>
-        </pc:spChg>
         <pc:spChg chg="add mod">
           <ac:chgData name="Margo Bonal" userId="18c9fa0f-b53d-478b-9dc0-6ad88786c19f" providerId="ADAL" clId="{93D479E5-F67F-4B8A-A78F-A0B574A116B6}" dt="2026-03-20T14:01:45.053" v="2067" actId="1076"/>
           <ac:spMkLst>
@@ -1738,28 +585,12 @@
             <ac:spMk id="10" creationId="{CD9FE4EF-C4D8-49A0-B2FF-81D8DB7D8A24}"/>
           </ac:spMkLst>
         </pc:spChg>
-        <pc:spChg chg="add del">
-          <ac:chgData name="Margo Bonal" userId="18c9fa0f-b53d-478b-9dc0-6ad88786c19f" providerId="ADAL" clId="{93D479E5-F67F-4B8A-A78F-A0B574A116B6}" dt="2026-03-20T13:56:54.834" v="2006" actId="26606"/>
-          <ac:spMkLst>
-            <pc:docMk/>
-            <pc:sldMk cId="1426557120" sldId="275"/>
-            <ac:spMk id="11" creationId="{1B15ED52-F352-441B-82BF-E0EA34836D08}"/>
-          </ac:spMkLst>
-        </pc:spChg>
         <pc:spChg chg="add">
           <ac:chgData name="Margo Bonal" userId="18c9fa0f-b53d-478b-9dc0-6ad88786c19f" providerId="ADAL" clId="{93D479E5-F67F-4B8A-A78F-A0B574A116B6}" dt="2026-03-20T13:57:27.490" v="2007" actId="26606"/>
           <ac:spMkLst>
             <pc:docMk/>
             <pc:sldMk cId="1426557120" sldId="275"/>
             <ac:spMk id="12" creationId="{4300840D-0A0B-4512-BACA-B439D5B9C57C}"/>
-          </ac:spMkLst>
-        </pc:spChg>
-        <pc:spChg chg="add del">
-          <ac:chgData name="Margo Bonal" userId="18c9fa0f-b53d-478b-9dc0-6ad88786c19f" providerId="ADAL" clId="{93D479E5-F67F-4B8A-A78F-A0B574A116B6}" dt="2026-03-20T13:56:54.834" v="2006" actId="26606"/>
-          <ac:spMkLst>
-            <pc:docMk/>
-            <pc:sldMk cId="1426557120" sldId="275"/>
-            <ac:spMk id="13" creationId="{3B2E3793-BFE6-45A2-9B7B-E18844431C99}"/>
           </ac:spMkLst>
         </pc:spChg>
         <pc:spChg chg="add">
@@ -1770,14 +601,6 @@
             <ac:spMk id="14" creationId="{D2B78728-A580-49A7-84F9-6EF6F583ADE0}"/>
           </ac:spMkLst>
         </pc:spChg>
-        <pc:spChg chg="add del">
-          <ac:chgData name="Margo Bonal" userId="18c9fa0f-b53d-478b-9dc0-6ad88786c19f" providerId="ADAL" clId="{93D479E5-F67F-4B8A-A78F-A0B574A116B6}" dt="2026-03-20T13:56:54.834" v="2006" actId="26606"/>
-          <ac:spMkLst>
-            <pc:docMk/>
-            <pc:sldMk cId="1426557120" sldId="275"/>
-            <ac:spMk id="15" creationId="{BC4C4868-CB8F-4AF9-9CDB-8108F2C19B67}"/>
-          </ac:spMkLst>
-        </pc:spChg>
         <pc:spChg chg="add mod">
           <ac:chgData name="Margo Bonal" userId="18c9fa0f-b53d-478b-9dc0-6ad88786c19f" providerId="ADAL" clId="{93D479E5-F67F-4B8A-A78F-A0B574A116B6}" dt="2026-03-20T14:01:39.194" v="2066" actId="1076"/>
           <ac:spMkLst>
@@ -1786,28 +609,12 @@
             <ac:spMk id="16" creationId="{81E0E150-2FC2-EEE3-7E38-1E788F6BA625}"/>
           </ac:spMkLst>
         </pc:spChg>
-        <pc:spChg chg="add del">
-          <ac:chgData name="Margo Bonal" userId="18c9fa0f-b53d-478b-9dc0-6ad88786c19f" providerId="ADAL" clId="{93D479E5-F67F-4B8A-A78F-A0B574A116B6}" dt="2026-03-20T13:56:54.834" v="2006" actId="26606"/>
-          <ac:spMkLst>
-            <pc:docMk/>
-            <pc:sldMk cId="1426557120" sldId="275"/>
-            <ac:spMk id="17" creationId="{375E0459-6403-40CD-989D-56A4407CA12E}"/>
-          </ac:spMkLst>
-        </pc:spChg>
         <pc:spChg chg="add mod">
           <ac:chgData name="Margo Bonal" userId="18c9fa0f-b53d-478b-9dc0-6ad88786c19f" providerId="ADAL" clId="{93D479E5-F67F-4B8A-A78F-A0B574A116B6}" dt="2026-03-20T14:01:32.675" v="2065" actId="12789"/>
           <ac:spMkLst>
             <pc:docMk/>
             <pc:sldMk cId="1426557120" sldId="275"/>
             <ac:spMk id="18" creationId="{074AF094-E72F-59C1-3EC9-6D652007D4E2}"/>
-          </ac:spMkLst>
-        </pc:spChg>
-        <pc:spChg chg="add del">
-          <ac:chgData name="Margo Bonal" userId="18c9fa0f-b53d-478b-9dc0-6ad88786c19f" providerId="ADAL" clId="{93D479E5-F67F-4B8A-A78F-A0B574A116B6}" dt="2026-03-20T13:56:54.834" v="2006" actId="26606"/>
-          <ac:spMkLst>
-            <pc:docMk/>
-            <pc:sldMk cId="1426557120" sldId="275"/>
-            <ac:spMk id="19" creationId="{53E5B1A8-3AC9-4BD1-9BBC-78CA94F2D1BA}"/>
           </ac:spMkLst>
         </pc:spChg>
         <pc:spChg chg="add mod">
@@ -1834,22 +641,6 @@
             <ac:spMk id="23" creationId="{8D71EDA1-87BF-4D5D-AB79-F346FD19278A}"/>
           </ac:spMkLst>
         </pc:spChg>
-        <pc:graphicFrameChg chg="add del">
-          <ac:chgData name="Margo Bonal" userId="18c9fa0f-b53d-478b-9dc0-6ad88786c19f" providerId="ADAL" clId="{93D479E5-F67F-4B8A-A78F-A0B574A116B6}" dt="2026-03-20T14:02:37.197" v="2069" actId="26606"/>
-          <ac:graphicFrameMkLst>
-            <pc:docMk/>
-            <pc:sldMk cId="1426557120" sldId="275"/>
-            <ac:graphicFrameMk id="25" creationId="{E9A07527-EDDD-6D6F-AB0A-A742135ACF3A}"/>
-          </ac:graphicFrameMkLst>
-        </pc:graphicFrameChg>
-        <pc:graphicFrameChg chg="add del">
-          <ac:chgData name="Margo Bonal" userId="18c9fa0f-b53d-478b-9dc0-6ad88786c19f" providerId="ADAL" clId="{93D479E5-F67F-4B8A-A78F-A0B574A116B6}" dt="2026-03-20T14:02:40.698" v="2071" actId="26606"/>
-          <ac:graphicFrameMkLst>
-            <pc:docMk/>
-            <pc:sldMk cId="1426557120" sldId="275"/>
-            <ac:graphicFrameMk id="27" creationId="{BEE0EB38-6B6D-1291-015B-FEAF27B8BB08}"/>
-          </ac:graphicFrameMkLst>
-        </pc:graphicFrameChg>
         <pc:graphicFrameChg chg="add mod modGraphic">
           <ac:chgData name="Margo Bonal" userId="18c9fa0f-b53d-478b-9dc0-6ad88786c19f" providerId="ADAL" clId="{93D479E5-F67F-4B8A-A78F-A0B574A116B6}" dt="2026-03-20T14:14:45.748" v="2222" actId="1076"/>
           <ac:graphicFrameMkLst>
@@ -1859,35 +650,12 @@
           </ac:graphicFrameMkLst>
         </pc:graphicFrameChg>
       </pc:sldChg>
-      <pc:sldChg chg="new del">
-        <pc:chgData name="Margo Bonal" userId="18c9fa0f-b53d-478b-9dc0-6ad88786c19f" providerId="ADAL" clId="{93D479E5-F67F-4B8A-A78F-A0B574A116B6}" dt="2026-03-20T14:05:18.706" v="2083" actId="2696"/>
-        <pc:sldMkLst>
-          <pc:docMk/>
-          <pc:sldMk cId="2218381514" sldId="276"/>
-        </pc:sldMkLst>
-      </pc:sldChg>
       <pc:sldChg chg="addSp delSp modSp new mod">
         <pc:chgData name="Margo Bonal" userId="18c9fa0f-b53d-478b-9dc0-6ad88786c19f" providerId="ADAL" clId="{93D479E5-F67F-4B8A-A78F-A0B574A116B6}" dt="2026-03-21T22:00:22.652" v="2574" actId="20577"/>
         <pc:sldMkLst>
           <pc:docMk/>
           <pc:sldMk cId="894408273" sldId="277"/>
         </pc:sldMkLst>
-        <pc:spChg chg="del">
-          <ac:chgData name="Margo Bonal" userId="18c9fa0f-b53d-478b-9dc0-6ad88786c19f" providerId="ADAL" clId="{93D479E5-F67F-4B8A-A78F-A0B574A116B6}" dt="2026-03-20T14:06:07.874" v="2093"/>
-          <ac:spMkLst>
-            <pc:docMk/>
-            <pc:sldMk cId="894408273" sldId="277"/>
-            <ac:spMk id="2" creationId="{B7A1FD90-A704-19C8-C5F4-00E55AECB988}"/>
-          </ac:spMkLst>
-        </pc:spChg>
-        <pc:spChg chg="add del mod">
-          <ac:chgData name="Margo Bonal" userId="18c9fa0f-b53d-478b-9dc0-6ad88786c19f" providerId="ADAL" clId="{93D479E5-F67F-4B8A-A78F-A0B574A116B6}" dt="2026-03-20T14:11:53.582" v="2203" actId="26606"/>
-          <ac:spMkLst>
-            <pc:docMk/>
-            <pc:sldMk cId="894408273" sldId="277"/>
-            <ac:spMk id="3" creationId="{FE835609-5755-E9E8-3AA1-681D0E86877B}"/>
-          </ac:spMkLst>
-        </pc:spChg>
         <pc:spChg chg="mod">
           <ac:chgData name="Margo Bonal" userId="18c9fa0f-b53d-478b-9dc0-6ad88786c19f" providerId="ADAL" clId="{93D479E5-F67F-4B8A-A78F-A0B574A116B6}" dt="2026-03-21T22:00:22.652" v="2574" actId="20577"/>
           <ac:spMkLst>
@@ -1920,14 +688,6 @@
             <ac:spMk id="8" creationId="{60EA2BF6-99E8-2D98-E940-ED19A6922E58}"/>
           </ac:spMkLst>
         </pc:spChg>
-        <pc:spChg chg="add del mod">
-          <ac:chgData name="Margo Bonal" userId="18c9fa0f-b53d-478b-9dc0-6ad88786c19f" providerId="ADAL" clId="{93D479E5-F67F-4B8A-A78F-A0B574A116B6}" dt="2026-03-20T14:50:47.319" v="2548" actId="478"/>
-          <ac:spMkLst>
-            <pc:docMk/>
-            <pc:sldMk cId="894408273" sldId="277"/>
-            <ac:spMk id="12" creationId="{26271885-1287-D07F-1F25-1C1DD4518E71}"/>
-          </ac:spMkLst>
-        </pc:spChg>
         <pc:graphicFrameChg chg="add mod modGraphic">
           <ac:chgData name="Margo Bonal" userId="18c9fa0f-b53d-478b-9dc0-6ad88786c19f" providerId="ADAL" clId="{93D479E5-F67F-4B8A-A78F-A0B574A116B6}" dt="2026-03-20T14:13:29.495" v="2218" actId="1076"/>
           <ac:graphicFrameMkLst>
@@ -1936,61 +696,6 @@
             <ac:graphicFrameMk id="7" creationId="{CC8A7EC2-18C5-CE9E-5EB7-BD96AEA308C7}"/>
           </ac:graphicFrameMkLst>
         </pc:graphicFrameChg>
-        <pc:graphicFrameChg chg="add del">
-          <ac:chgData name="Margo Bonal" userId="18c9fa0f-b53d-478b-9dc0-6ad88786c19f" providerId="ADAL" clId="{93D479E5-F67F-4B8A-A78F-A0B574A116B6}" dt="2026-03-20T14:11:53.564" v="2202" actId="26606"/>
-          <ac:graphicFrameMkLst>
-            <pc:docMk/>
-            <pc:sldMk cId="894408273" sldId="277"/>
-            <ac:graphicFrameMk id="9" creationId="{08C8BE06-25C5-FE80-005F-8C9E45D30C9E}"/>
-          </ac:graphicFrameMkLst>
-        </pc:graphicFrameChg>
-        <pc:graphicFrameChg chg="add del mod modGraphic">
-          <ac:chgData name="Margo Bonal" userId="18c9fa0f-b53d-478b-9dc0-6ad88786c19f" providerId="ADAL" clId="{93D479E5-F67F-4B8A-A78F-A0B574A116B6}" dt="2026-03-20T14:50:42.605" v="2546" actId="478"/>
-          <ac:graphicFrameMkLst>
-            <pc:docMk/>
-            <pc:sldMk cId="894408273" sldId="277"/>
-            <ac:graphicFrameMk id="11" creationId="{CFF8C6C4-A66E-8614-7D54-3005B5AE10F8}"/>
-          </ac:graphicFrameMkLst>
-        </pc:graphicFrameChg>
-      </pc:sldChg>
-      <pc:sldChg chg="addSp delSp modSp new del mod">
-        <pc:chgData name="Margo Bonal" userId="18c9fa0f-b53d-478b-9dc0-6ad88786c19f" providerId="ADAL" clId="{93D479E5-F67F-4B8A-A78F-A0B574A116B6}" dt="2026-03-20T14:26:58.691" v="2348" actId="2696"/>
-        <pc:sldMkLst>
-          <pc:docMk/>
-          <pc:sldMk cId="4140437822" sldId="278"/>
-        </pc:sldMkLst>
-        <pc:spChg chg="mod">
-          <ac:chgData name="Margo Bonal" userId="18c9fa0f-b53d-478b-9dc0-6ad88786c19f" providerId="ADAL" clId="{93D479E5-F67F-4B8A-A78F-A0B574A116B6}" dt="2026-03-20T14:24:50.053" v="2320" actId="20577"/>
-          <ac:spMkLst>
-            <pc:docMk/>
-            <pc:sldMk cId="4140437822" sldId="278"/>
-            <ac:spMk id="2" creationId="{664EDF6D-3736-634E-AE19-2AB85F320305}"/>
-          </ac:spMkLst>
-        </pc:spChg>
-        <pc:spChg chg="del">
-          <ac:chgData name="Margo Bonal" userId="18c9fa0f-b53d-478b-9dc0-6ad88786c19f" providerId="ADAL" clId="{93D479E5-F67F-4B8A-A78F-A0B574A116B6}" dt="2026-03-20T14:21:10.596" v="2282"/>
-          <ac:spMkLst>
-            <pc:docMk/>
-            <pc:sldMk cId="4140437822" sldId="278"/>
-            <ac:spMk id="3" creationId="{B05A658C-3D29-38EA-B41C-AFFCB14119F0}"/>
-          </ac:spMkLst>
-        </pc:spChg>
-        <pc:spChg chg="add mod">
-          <ac:chgData name="Margo Bonal" userId="18c9fa0f-b53d-478b-9dc0-6ad88786c19f" providerId="ADAL" clId="{93D479E5-F67F-4B8A-A78F-A0B574A116B6}" dt="2026-03-20T14:25:38.488" v="2334" actId="20577"/>
-          <ac:spMkLst>
-            <pc:docMk/>
-            <pc:sldMk cId="4140437822" sldId="278"/>
-            <ac:spMk id="6" creationId="{D37BBAF2-F2FA-171D-56E9-E792A7543C6E}"/>
-          </ac:spMkLst>
-        </pc:spChg>
-        <pc:picChg chg="add del mod">
-          <ac:chgData name="Margo Bonal" userId="18c9fa0f-b53d-478b-9dc0-6ad88786c19f" providerId="ADAL" clId="{93D479E5-F67F-4B8A-A78F-A0B574A116B6}" dt="2026-03-20T14:23:47.607" v="2287" actId="478"/>
-          <ac:picMkLst>
-            <pc:docMk/>
-            <pc:sldMk cId="4140437822" sldId="278"/>
-            <ac:picMk id="4" creationId="{E6FB3982-09BB-AFB2-3A67-4E8948FE3DA9}"/>
-          </ac:picMkLst>
-        </pc:picChg>
       </pc:sldChg>
       <pc:sldChg chg="modSp new mod">
         <pc:chgData name="Margo Bonal" userId="18c9fa0f-b53d-478b-9dc0-6ad88786c19f" providerId="ADAL" clId="{93D479E5-F67F-4B8A-A78F-A0B574A116B6}" dt="2026-03-20T14:48:30.516" v="2533" actId="20577"/>
@@ -2036,14 +741,6 @@
             <ac:spMk id="2" creationId="{1BD4C61D-1E86-2376-656A-827728C4A2C2}"/>
           </ac:spMkLst>
         </pc:spChg>
-        <pc:spChg chg="add del mod">
-          <ac:chgData name="Margo Bonal" userId="18c9fa0f-b53d-478b-9dc0-6ad88786c19f" providerId="ADAL" clId="{93D479E5-F67F-4B8A-A78F-A0B574A116B6}" dt="2026-03-20T14:26:35.564" v="2344" actId="478"/>
-          <ac:spMkLst>
-            <pc:docMk/>
-            <pc:sldMk cId="1364178525" sldId="281"/>
-            <ac:spMk id="4" creationId="{39E52CD9-9335-F6DE-F281-809E6DAAC81D}"/>
-          </ac:spMkLst>
-        </pc:spChg>
         <pc:spChg chg="add mod">
           <ac:chgData name="Margo Bonal" userId="18c9fa0f-b53d-478b-9dc0-6ad88786c19f" providerId="ADAL" clId="{93D479E5-F67F-4B8A-A78F-A0B574A116B6}" dt="2026-03-20T14:47:52.239" v="2496" actId="1076"/>
           <ac:spMkLst>
@@ -2052,14 +749,6 @@
             <ac:spMk id="5" creationId="{105BD97F-88FC-7D2D-6D0A-263599A3073E}"/>
           </ac:spMkLst>
         </pc:spChg>
-        <pc:graphicFrameChg chg="del mod">
-          <ac:chgData name="Margo Bonal" userId="18c9fa0f-b53d-478b-9dc0-6ad88786c19f" providerId="ADAL" clId="{93D479E5-F67F-4B8A-A78F-A0B574A116B6}" dt="2026-03-20T14:26:30.967" v="2343" actId="478"/>
-          <ac:graphicFrameMkLst>
-            <pc:docMk/>
-            <pc:sldMk cId="1364178525" sldId="281"/>
-            <ac:graphicFrameMk id="16" creationId="{721ED6B8-F445-CDEE-A654-4F755F8ABA75}"/>
-          </ac:graphicFrameMkLst>
-        </pc:graphicFrameChg>
       </pc:sldChg>
     </pc:docChg>
   </pc:docChgLst>
@@ -2986,6 +1675,757 @@
 </file>
 
 <file path=ppt/diagrams/colors2.xml><?xml version="1.0" encoding="utf-8"?>
+<dgm:colorsDef xmlns:dgm="http://schemas.openxmlformats.org/drawingml/2006/diagram" xmlns:a="http://schemas.openxmlformats.org/drawingml/2006/main" uniqueId="urn:microsoft.com/office/officeart/2005/8/colors/accent0_3">
+  <dgm:title val=""/>
+  <dgm:desc val=""/>
+  <dgm:catLst>
+    <dgm:cat type="mainScheme" pri="10300"/>
+  </dgm:catLst>
+  <dgm:styleLbl name="node0">
+    <dgm:fillClrLst meth="repeat">
+      <a:schemeClr val="dk2"/>
+    </dgm:fillClrLst>
+    <dgm:linClrLst meth="repeat">
+      <a:schemeClr val="lt2"/>
+    </dgm:linClrLst>
+    <dgm:effectClrLst/>
+    <dgm:txLinClrLst/>
+    <dgm:txFillClrLst/>
+    <dgm:txEffectClrLst/>
+  </dgm:styleLbl>
+  <dgm:styleLbl name="alignNode1">
+    <dgm:fillClrLst meth="repeat">
+      <a:schemeClr val="dk2"/>
+    </dgm:fillClrLst>
+    <dgm:linClrLst meth="repeat">
+      <a:schemeClr val="dk2"/>
+    </dgm:linClrLst>
+    <dgm:effectClrLst/>
+    <dgm:txLinClrLst/>
+    <dgm:txFillClrLst/>
+    <dgm:txEffectClrLst/>
+  </dgm:styleLbl>
+  <dgm:styleLbl name="node1">
+    <dgm:fillClrLst meth="repeat">
+      <a:schemeClr val="dk2"/>
+    </dgm:fillClrLst>
+    <dgm:linClrLst meth="repeat">
+      <a:schemeClr val="lt2"/>
+    </dgm:linClrLst>
+    <dgm:effectClrLst/>
+    <dgm:txLinClrLst/>
+    <dgm:txFillClrLst/>
+    <dgm:txEffectClrLst/>
+  </dgm:styleLbl>
+  <dgm:styleLbl name="lnNode1">
+    <dgm:fillClrLst meth="repeat">
+      <a:schemeClr val="dk2"/>
+    </dgm:fillClrLst>
+    <dgm:linClrLst meth="repeat">
+      <a:schemeClr val="lt2"/>
+    </dgm:linClrLst>
+    <dgm:effectClrLst/>
+    <dgm:txLinClrLst/>
+    <dgm:txFillClrLst/>
+    <dgm:txEffectClrLst/>
+  </dgm:styleLbl>
+  <dgm:styleLbl name="vennNode1">
+    <dgm:fillClrLst meth="repeat">
+      <a:schemeClr val="dk2">
+        <a:alpha val="50000"/>
+      </a:schemeClr>
+    </dgm:fillClrLst>
+    <dgm:linClrLst meth="repeat">
+      <a:schemeClr val="lt2"/>
+    </dgm:linClrLst>
+    <dgm:effectClrLst/>
+    <dgm:txLinClrLst/>
+    <dgm:txFillClrLst/>
+    <dgm:txEffectClrLst/>
+  </dgm:styleLbl>
+  <dgm:styleLbl name="node2">
+    <dgm:fillClrLst meth="repeat">
+      <a:schemeClr val="dk2"/>
+    </dgm:fillClrLst>
+    <dgm:linClrLst meth="repeat">
+      <a:schemeClr val="lt2"/>
+    </dgm:linClrLst>
+    <dgm:effectClrLst/>
+    <dgm:txLinClrLst/>
+    <dgm:txFillClrLst/>
+    <dgm:txEffectClrLst/>
+  </dgm:styleLbl>
+  <dgm:styleLbl name="node3">
+    <dgm:fillClrLst meth="repeat">
+      <a:schemeClr val="dk2"/>
+    </dgm:fillClrLst>
+    <dgm:linClrLst meth="repeat">
+      <a:schemeClr val="lt2"/>
+    </dgm:linClrLst>
+    <dgm:effectClrLst/>
+    <dgm:txLinClrLst/>
+    <dgm:txFillClrLst/>
+    <dgm:txEffectClrLst/>
+  </dgm:styleLbl>
+  <dgm:styleLbl name="node4">
+    <dgm:fillClrLst meth="repeat">
+      <a:schemeClr val="dk2"/>
+    </dgm:fillClrLst>
+    <dgm:linClrLst meth="repeat">
+      <a:schemeClr val="lt2"/>
+    </dgm:linClrLst>
+    <dgm:effectClrLst/>
+    <dgm:txLinClrLst/>
+    <dgm:txFillClrLst/>
+    <dgm:txEffectClrLst/>
+  </dgm:styleLbl>
+  <dgm:styleLbl name="fgImgPlace1">
+    <dgm:fillClrLst meth="repeat">
+      <a:schemeClr val="dk2">
+        <a:tint val="50000"/>
+      </a:schemeClr>
+    </dgm:fillClrLst>
+    <dgm:linClrLst meth="repeat">
+      <a:schemeClr val="lt2"/>
+    </dgm:linClrLst>
+    <dgm:effectClrLst/>
+    <dgm:txLinClrLst/>
+    <dgm:txFillClrLst meth="repeat">
+      <a:schemeClr val="lt2"/>
+    </dgm:txFillClrLst>
+    <dgm:txEffectClrLst/>
+  </dgm:styleLbl>
+  <dgm:styleLbl name="alignImgPlace1">
+    <dgm:fillClrLst meth="repeat">
+      <a:schemeClr val="dk2">
+        <a:tint val="50000"/>
+      </a:schemeClr>
+    </dgm:fillClrLst>
+    <dgm:linClrLst meth="repeat">
+      <a:schemeClr val="dk2">
+        <a:shade val="80000"/>
+      </a:schemeClr>
+    </dgm:linClrLst>
+    <dgm:effectClrLst/>
+    <dgm:txLinClrLst/>
+    <dgm:txFillClrLst meth="repeat">
+      <a:schemeClr val="lt2"/>
+    </dgm:txFillClrLst>
+    <dgm:txEffectClrLst/>
+  </dgm:styleLbl>
+  <dgm:styleLbl name="bgImgPlace1">
+    <dgm:fillClrLst meth="repeat">
+      <a:schemeClr val="dk2">
+        <a:tint val="50000"/>
+      </a:schemeClr>
+    </dgm:fillClrLst>
+    <dgm:linClrLst meth="repeat">
+      <a:schemeClr val="dk2">
+        <a:shade val="80000"/>
+      </a:schemeClr>
+    </dgm:linClrLst>
+    <dgm:effectClrLst/>
+    <dgm:txLinClrLst/>
+    <dgm:txFillClrLst meth="repeat">
+      <a:schemeClr val="lt2"/>
+    </dgm:txFillClrLst>
+    <dgm:txEffectClrLst/>
+  </dgm:styleLbl>
+  <dgm:styleLbl name="sibTrans2D1">
+    <dgm:fillClrLst meth="repeat">
+      <a:schemeClr val="dk2">
+        <a:tint val="60000"/>
+      </a:schemeClr>
+    </dgm:fillClrLst>
+    <dgm:linClrLst meth="repeat">
+      <a:schemeClr val="dk2">
+        <a:tint val="60000"/>
+      </a:schemeClr>
+    </dgm:linClrLst>
+    <dgm:effectClrLst/>
+    <dgm:txLinClrLst/>
+    <dgm:txFillClrLst/>
+    <dgm:txEffectClrLst/>
+  </dgm:styleLbl>
+  <dgm:styleLbl name="fgSibTrans2D1">
+    <dgm:fillClrLst meth="repeat">
+      <a:schemeClr val="dk2">
+        <a:tint val="60000"/>
+      </a:schemeClr>
+    </dgm:fillClrLst>
+    <dgm:linClrLst meth="repeat">
+      <a:schemeClr val="dk2">
+        <a:tint val="60000"/>
+      </a:schemeClr>
+    </dgm:linClrLst>
+    <dgm:effectClrLst/>
+    <dgm:txLinClrLst/>
+    <dgm:txFillClrLst/>
+    <dgm:txEffectClrLst/>
+  </dgm:styleLbl>
+  <dgm:styleLbl name="bgSibTrans2D1">
+    <dgm:fillClrLst meth="repeat">
+      <a:schemeClr val="dk2">
+        <a:tint val="60000"/>
+      </a:schemeClr>
+    </dgm:fillClrLst>
+    <dgm:linClrLst meth="repeat">
+      <a:schemeClr val="dk2">
+        <a:tint val="60000"/>
+      </a:schemeClr>
+    </dgm:linClrLst>
+    <dgm:effectClrLst/>
+    <dgm:txLinClrLst/>
+    <dgm:txFillClrLst/>
+    <dgm:txEffectClrLst/>
+  </dgm:styleLbl>
+  <dgm:styleLbl name="sibTrans1D1">
+    <dgm:fillClrLst meth="repeat">
+      <a:schemeClr val="dk2"/>
+    </dgm:fillClrLst>
+    <dgm:linClrLst meth="repeat">
+      <a:schemeClr val="dk2"/>
+    </dgm:linClrLst>
+    <dgm:effectClrLst/>
+    <dgm:txLinClrLst/>
+    <dgm:txFillClrLst meth="repeat">
+      <a:schemeClr val="lt2"/>
+    </dgm:txFillClrLst>
+    <dgm:txEffectClrLst/>
+  </dgm:styleLbl>
+  <dgm:styleLbl name="callout">
+    <dgm:fillClrLst meth="repeat">
+      <a:schemeClr val="dk2"/>
+    </dgm:fillClrLst>
+    <dgm:linClrLst meth="repeat">
+      <a:schemeClr val="dk2">
+        <a:tint val="50000"/>
+      </a:schemeClr>
+    </dgm:linClrLst>
+    <dgm:effectClrLst/>
+    <dgm:txLinClrLst/>
+    <dgm:txFillClrLst meth="repeat">
+      <a:schemeClr val="lt2"/>
+    </dgm:txFillClrLst>
+    <dgm:txEffectClrLst/>
+  </dgm:styleLbl>
+  <dgm:styleLbl name="asst0">
+    <dgm:fillClrLst meth="repeat">
+      <a:schemeClr val="dk2"/>
+    </dgm:fillClrLst>
+    <dgm:linClrLst meth="repeat">
+      <a:schemeClr val="lt2"/>
+    </dgm:linClrLst>
+    <dgm:effectClrLst/>
+    <dgm:txLinClrLst/>
+    <dgm:txFillClrLst/>
+    <dgm:txEffectClrLst/>
+  </dgm:styleLbl>
+  <dgm:styleLbl name="asst1">
+    <dgm:fillClrLst meth="repeat">
+      <a:schemeClr val="dk2"/>
+    </dgm:fillClrLst>
+    <dgm:linClrLst meth="repeat">
+      <a:schemeClr val="lt2"/>
+    </dgm:linClrLst>
+    <dgm:effectClrLst/>
+    <dgm:txLinClrLst/>
+    <dgm:txFillClrLst/>
+    <dgm:txEffectClrLst/>
+  </dgm:styleLbl>
+  <dgm:styleLbl name="asst2">
+    <dgm:fillClrLst meth="repeat">
+      <a:schemeClr val="dk2"/>
+    </dgm:fillClrLst>
+    <dgm:linClrLst meth="repeat">
+      <a:schemeClr val="lt2"/>
+    </dgm:linClrLst>
+    <dgm:effectClrLst/>
+    <dgm:txLinClrLst/>
+    <dgm:txFillClrLst/>
+    <dgm:txEffectClrLst/>
+  </dgm:styleLbl>
+  <dgm:styleLbl name="asst3">
+    <dgm:fillClrLst meth="repeat">
+      <a:schemeClr val="dk2"/>
+    </dgm:fillClrLst>
+    <dgm:linClrLst meth="repeat">
+      <a:schemeClr val="lt2"/>
+    </dgm:linClrLst>
+    <dgm:effectClrLst/>
+    <dgm:txLinClrLst/>
+    <dgm:txFillClrLst/>
+    <dgm:txEffectClrLst/>
+  </dgm:styleLbl>
+  <dgm:styleLbl name="asst4">
+    <dgm:fillClrLst meth="repeat">
+      <a:schemeClr val="dk2"/>
+    </dgm:fillClrLst>
+    <dgm:linClrLst meth="repeat">
+      <a:schemeClr val="lt2"/>
+    </dgm:linClrLst>
+    <dgm:effectClrLst/>
+    <dgm:txLinClrLst/>
+    <dgm:txFillClrLst/>
+    <dgm:txEffectClrLst/>
+  </dgm:styleLbl>
+  <dgm:styleLbl name="parChTrans2D1">
+    <dgm:fillClrLst meth="repeat">
+      <a:schemeClr val="dk2">
+        <a:tint val="60000"/>
+      </a:schemeClr>
+    </dgm:fillClrLst>
+    <dgm:linClrLst meth="repeat">
+      <a:schemeClr val="dk2">
+        <a:tint val="60000"/>
+      </a:schemeClr>
+    </dgm:linClrLst>
+    <dgm:effectClrLst/>
+    <dgm:txLinClrLst/>
+    <dgm:txFillClrLst meth="repeat">
+      <a:schemeClr val="lt2"/>
+    </dgm:txFillClrLst>
+    <dgm:txEffectClrLst/>
+  </dgm:styleLbl>
+  <dgm:styleLbl name="parChTrans2D2">
+    <dgm:fillClrLst meth="repeat">
+      <a:schemeClr val="dk2"/>
+    </dgm:fillClrLst>
+    <dgm:linClrLst meth="repeat">
+      <a:schemeClr val="dk2"/>
+    </dgm:linClrLst>
+    <dgm:effectClrLst/>
+    <dgm:txLinClrLst/>
+    <dgm:txFillClrLst meth="repeat">
+      <a:schemeClr val="lt2"/>
+    </dgm:txFillClrLst>
+    <dgm:txEffectClrLst/>
+  </dgm:styleLbl>
+  <dgm:styleLbl name="parChTrans2D3">
+    <dgm:fillClrLst meth="repeat">
+      <a:schemeClr val="dk2"/>
+    </dgm:fillClrLst>
+    <dgm:linClrLst meth="repeat">
+      <a:schemeClr val="dk2"/>
+    </dgm:linClrLst>
+    <dgm:effectClrLst/>
+    <dgm:txLinClrLst/>
+    <dgm:txFillClrLst meth="repeat">
+      <a:schemeClr val="lt2"/>
+    </dgm:txFillClrLst>
+    <dgm:txEffectClrLst/>
+  </dgm:styleLbl>
+  <dgm:styleLbl name="parChTrans2D4">
+    <dgm:fillClrLst meth="repeat">
+      <a:schemeClr val="dk2"/>
+    </dgm:fillClrLst>
+    <dgm:linClrLst meth="repeat">
+      <a:schemeClr val="dk2"/>
+    </dgm:linClrLst>
+    <dgm:effectClrLst/>
+    <dgm:txLinClrLst/>
+    <dgm:txFillClrLst meth="repeat">
+      <a:schemeClr val="lt2"/>
+    </dgm:txFillClrLst>
+    <dgm:txEffectClrLst/>
+  </dgm:styleLbl>
+  <dgm:styleLbl name="parChTrans1D1">
+    <dgm:fillClrLst meth="repeat">
+      <a:schemeClr val="dk2"/>
+    </dgm:fillClrLst>
+    <dgm:linClrLst meth="repeat">
+      <a:schemeClr val="dk2">
+        <a:shade val="60000"/>
+      </a:schemeClr>
+    </dgm:linClrLst>
+    <dgm:effectClrLst/>
+    <dgm:txLinClrLst/>
+    <dgm:txFillClrLst meth="repeat">
+      <a:schemeClr val="tx1"/>
+    </dgm:txFillClrLst>
+    <dgm:txEffectClrLst/>
+  </dgm:styleLbl>
+  <dgm:styleLbl name="parChTrans1D2">
+    <dgm:fillClrLst meth="repeat">
+      <a:schemeClr val="dk2"/>
+    </dgm:fillClrLst>
+    <dgm:linClrLst meth="repeat">
+      <a:schemeClr val="dk2">
+        <a:shade val="60000"/>
+      </a:schemeClr>
+    </dgm:linClrLst>
+    <dgm:effectClrLst/>
+    <dgm:txLinClrLst/>
+    <dgm:txFillClrLst meth="repeat">
+      <a:schemeClr val="tx1"/>
+    </dgm:txFillClrLst>
+    <dgm:txEffectClrLst/>
+  </dgm:styleLbl>
+  <dgm:styleLbl name="parChTrans1D3">
+    <dgm:fillClrLst meth="repeat">
+      <a:schemeClr val="dk2"/>
+    </dgm:fillClrLst>
+    <dgm:linClrLst meth="repeat">
+      <a:schemeClr val="dk2">
+        <a:shade val="80000"/>
+      </a:schemeClr>
+    </dgm:linClrLst>
+    <dgm:effectClrLst/>
+    <dgm:txLinClrLst/>
+    <dgm:txFillClrLst meth="repeat">
+      <a:schemeClr val="tx1"/>
+    </dgm:txFillClrLst>
+    <dgm:txEffectClrLst/>
+  </dgm:styleLbl>
+  <dgm:styleLbl name="parChTrans1D4">
+    <dgm:fillClrLst meth="repeat">
+      <a:schemeClr val="dk2"/>
+    </dgm:fillClrLst>
+    <dgm:linClrLst meth="repeat">
+      <a:schemeClr val="dk2">
+        <a:shade val="80000"/>
+      </a:schemeClr>
+    </dgm:linClrLst>
+    <dgm:effectClrLst/>
+    <dgm:txLinClrLst/>
+    <dgm:txFillClrLst meth="repeat">
+      <a:schemeClr val="tx1"/>
+    </dgm:txFillClrLst>
+    <dgm:txEffectClrLst/>
+  </dgm:styleLbl>
+  <dgm:styleLbl name="fgAcc1">
+    <dgm:fillClrLst meth="repeat">
+      <a:schemeClr val="lt2">
+        <a:alpha val="90000"/>
+      </a:schemeClr>
+    </dgm:fillClrLst>
+    <dgm:linClrLst meth="repeat">
+      <a:schemeClr val="dk2"/>
+    </dgm:linClrLst>
+    <dgm:effectClrLst/>
+    <dgm:txLinClrLst/>
+    <dgm:txFillClrLst meth="repeat">
+      <a:schemeClr val="dk1"/>
+    </dgm:txFillClrLst>
+    <dgm:txEffectClrLst/>
+  </dgm:styleLbl>
+  <dgm:styleLbl name="conFgAcc1">
+    <dgm:fillClrLst meth="repeat">
+      <a:schemeClr val="lt2">
+        <a:alpha val="90000"/>
+      </a:schemeClr>
+    </dgm:fillClrLst>
+    <dgm:linClrLst meth="repeat">
+      <a:schemeClr val="dk2"/>
+    </dgm:linClrLst>
+    <dgm:effectClrLst/>
+    <dgm:txLinClrLst/>
+    <dgm:txFillClrLst meth="repeat">
+      <a:schemeClr val="dk1"/>
+    </dgm:txFillClrLst>
+    <dgm:txEffectClrLst/>
+  </dgm:styleLbl>
+  <dgm:styleLbl name="alignAcc1">
+    <dgm:fillClrLst meth="repeat">
+      <a:schemeClr val="lt2">
+        <a:alpha val="90000"/>
+      </a:schemeClr>
+    </dgm:fillClrLst>
+    <dgm:linClrLst meth="repeat">
+      <a:schemeClr val="dk2"/>
+    </dgm:linClrLst>
+    <dgm:effectClrLst/>
+    <dgm:txLinClrLst/>
+    <dgm:txFillClrLst meth="repeat">
+      <a:schemeClr val="dk1"/>
+    </dgm:txFillClrLst>
+    <dgm:txEffectClrLst/>
+  </dgm:styleLbl>
+  <dgm:styleLbl name="trAlignAcc1">
+    <dgm:fillClrLst meth="repeat">
+      <a:schemeClr val="lt2">
+        <a:alpha val="40000"/>
+      </a:schemeClr>
+    </dgm:fillClrLst>
+    <dgm:linClrLst meth="repeat">
+      <a:schemeClr val="dk2"/>
+    </dgm:linClrLst>
+    <dgm:effectClrLst/>
+    <dgm:txLinClrLst/>
+    <dgm:txFillClrLst meth="repeat">
+      <a:schemeClr val="dk1"/>
+    </dgm:txFillClrLst>
+    <dgm:txEffectClrLst/>
+  </dgm:styleLbl>
+  <dgm:styleLbl name="bgAcc1">
+    <dgm:fillClrLst meth="repeat">
+      <a:schemeClr val="lt2">
+        <a:alpha val="90000"/>
+      </a:schemeClr>
+    </dgm:fillClrLst>
+    <dgm:linClrLst meth="repeat">
+      <a:schemeClr val="dk2"/>
+    </dgm:linClrLst>
+    <dgm:effectClrLst/>
+    <dgm:txLinClrLst/>
+    <dgm:txFillClrLst meth="repeat">
+      <a:schemeClr val="dk1"/>
+    </dgm:txFillClrLst>
+    <dgm:txEffectClrLst/>
+  </dgm:styleLbl>
+  <dgm:styleLbl name="solidFgAcc1">
+    <dgm:fillClrLst meth="repeat">
+      <a:schemeClr val="lt2"/>
+    </dgm:fillClrLst>
+    <dgm:linClrLst meth="repeat">
+      <a:schemeClr val="dk2"/>
+    </dgm:linClrLst>
+    <dgm:effectClrLst/>
+    <dgm:txLinClrLst/>
+    <dgm:txFillClrLst meth="repeat">
+      <a:schemeClr val="dk1"/>
+    </dgm:txFillClrLst>
+    <dgm:txEffectClrLst/>
+  </dgm:styleLbl>
+  <dgm:styleLbl name="solidAlignAcc1">
+    <dgm:fillClrLst meth="repeat">
+      <a:schemeClr val="lt2"/>
+    </dgm:fillClrLst>
+    <dgm:linClrLst meth="repeat">
+      <a:schemeClr val="dk2"/>
+    </dgm:linClrLst>
+    <dgm:effectClrLst/>
+    <dgm:txLinClrLst/>
+    <dgm:txFillClrLst meth="repeat">
+      <a:schemeClr val="dk1"/>
+    </dgm:txFillClrLst>
+    <dgm:txEffectClrLst/>
+  </dgm:styleLbl>
+  <dgm:styleLbl name="solidBgAcc1">
+    <dgm:fillClrLst meth="repeat">
+      <a:schemeClr val="lt2"/>
+    </dgm:fillClrLst>
+    <dgm:linClrLst meth="repeat">
+      <a:schemeClr val="dk2"/>
+    </dgm:linClrLst>
+    <dgm:effectClrLst/>
+    <dgm:txLinClrLst/>
+    <dgm:txFillClrLst meth="repeat">
+      <a:schemeClr val="dk1"/>
+    </dgm:txFillClrLst>
+    <dgm:txEffectClrLst/>
+  </dgm:styleLbl>
+  <dgm:styleLbl name="fgAccFollowNode1">
+    <dgm:fillClrLst meth="repeat">
+      <a:schemeClr val="dk2">
+        <a:alpha val="90000"/>
+        <a:tint val="40000"/>
+      </a:schemeClr>
+    </dgm:fillClrLst>
+    <dgm:linClrLst meth="repeat">
+      <a:schemeClr val="dk2">
+        <a:alpha val="90000"/>
+        <a:tint val="40000"/>
+      </a:schemeClr>
+    </dgm:linClrLst>
+    <dgm:effectClrLst/>
+    <dgm:txLinClrLst/>
+    <dgm:txFillClrLst meth="repeat">
+      <a:schemeClr val="dk1"/>
+    </dgm:txFillClrLst>
+    <dgm:txEffectClrLst/>
+  </dgm:styleLbl>
+  <dgm:styleLbl name="alignAccFollowNode1">
+    <dgm:fillClrLst meth="repeat">
+      <a:schemeClr val="dk2">
+        <a:alpha val="90000"/>
+        <a:tint val="40000"/>
+      </a:schemeClr>
+    </dgm:fillClrLst>
+    <dgm:linClrLst meth="repeat">
+      <a:schemeClr val="dk2">
+        <a:alpha val="90000"/>
+        <a:tint val="40000"/>
+      </a:schemeClr>
+    </dgm:linClrLst>
+    <dgm:effectClrLst/>
+    <dgm:txLinClrLst/>
+    <dgm:txFillClrLst meth="repeat">
+      <a:schemeClr val="dk1"/>
+    </dgm:txFillClrLst>
+    <dgm:txEffectClrLst/>
+  </dgm:styleLbl>
+  <dgm:styleLbl name="bgAccFollowNode1">
+    <dgm:fillClrLst meth="repeat">
+      <a:schemeClr val="dk2">
+        <a:alpha val="90000"/>
+        <a:tint val="40000"/>
+      </a:schemeClr>
+    </dgm:fillClrLst>
+    <dgm:linClrLst meth="repeat">
+      <a:schemeClr val="dk2">
+        <a:alpha val="90000"/>
+        <a:tint val="40000"/>
+      </a:schemeClr>
+    </dgm:linClrLst>
+    <dgm:effectClrLst/>
+    <dgm:txLinClrLst/>
+    <dgm:txFillClrLst meth="repeat">
+      <a:schemeClr val="dk1"/>
+    </dgm:txFillClrLst>
+    <dgm:txEffectClrLst/>
+  </dgm:styleLbl>
+  <dgm:styleLbl name="fgAcc0">
+    <dgm:fillClrLst meth="repeat">
+      <a:schemeClr val="lt2">
+        <a:alpha val="90000"/>
+      </a:schemeClr>
+    </dgm:fillClrLst>
+    <dgm:linClrLst meth="repeat">
+      <a:schemeClr val="dk2"/>
+    </dgm:linClrLst>
+    <dgm:effectClrLst/>
+    <dgm:txLinClrLst/>
+    <dgm:txFillClrLst meth="repeat">
+      <a:schemeClr val="dk1"/>
+    </dgm:txFillClrLst>
+    <dgm:txEffectClrLst/>
+  </dgm:styleLbl>
+  <dgm:styleLbl name="fgAcc2">
+    <dgm:fillClrLst meth="repeat">
+      <a:schemeClr val="lt2">
+        <a:alpha val="90000"/>
+      </a:schemeClr>
+    </dgm:fillClrLst>
+    <dgm:linClrLst meth="repeat">
+      <a:schemeClr val="dk2"/>
+    </dgm:linClrLst>
+    <dgm:effectClrLst/>
+    <dgm:txLinClrLst/>
+    <dgm:txFillClrLst meth="repeat">
+      <a:schemeClr val="dk1"/>
+    </dgm:txFillClrLst>
+    <dgm:txEffectClrLst/>
+  </dgm:styleLbl>
+  <dgm:styleLbl name="fgAcc3">
+    <dgm:fillClrLst meth="repeat">
+      <a:schemeClr val="lt2">
+        <a:alpha val="90000"/>
+      </a:schemeClr>
+    </dgm:fillClrLst>
+    <dgm:linClrLst meth="repeat">
+      <a:schemeClr val="dk2"/>
+    </dgm:linClrLst>
+    <dgm:effectClrLst/>
+    <dgm:txLinClrLst/>
+    <dgm:txFillClrLst meth="repeat">
+      <a:schemeClr val="dk1"/>
+    </dgm:txFillClrLst>
+    <dgm:txEffectClrLst/>
+  </dgm:styleLbl>
+  <dgm:styleLbl name="fgAcc4">
+    <dgm:fillClrLst meth="repeat">
+      <a:schemeClr val="lt2">
+        <a:alpha val="90000"/>
+      </a:schemeClr>
+    </dgm:fillClrLst>
+    <dgm:linClrLst meth="repeat">
+      <a:schemeClr val="dk2"/>
+    </dgm:linClrLst>
+    <dgm:effectClrLst/>
+    <dgm:txLinClrLst/>
+    <dgm:txFillClrLst meth="repeat">
+      <a:schemeClr val="dk1"/>
+    </dgm:txFillClrLst>
+    <dgm:txEffectClrLst/>
+  </dgm:styleLbl>
+  <dgm:styleLbl name="bgShp">
+    <dgm:fillClrLst meth="repeat">
+      <a:schemeClr val="dk2">
+        <a:tint val="40000"/>
+      </a:schemeClr>
+    </dgm:fillClrLst>
+    <dgm:linClrLst meth="repeat">
+      <a:schemeClr val="dk2"/>
+    </dgm:linClrLst>
+    <dgm:effectClrLst/>
+    <dgm:txLinClrLst/>
+    <dgm:txFillClrLst meth="repeat">
+      <a:schemeClr val="dk1"/>
+    </dgm:txFillClrLst>
+    <dgm:txEffectClrLst/>
+  </dgm:styleLbl>
+  <dgm:styleLbl name="dkBgShp">
+    <dgm:fillClrLst meth="repeat">
+      <a:schemeClr val="dk2">
+        <a:shade val="80000"/>
+      </a:schemeClr>
+    </dgm:fillClrLst>
+    <dgm:linClrLst meth="repeat">
+      <a:schemeClr val="dk2"/>
+    </dgm:linClrLst>
+    <dgm:effectClrLst/>
+    <dgm:txLinClrLst/>
+    <dgm:txFillClrLst meth="repeat">
+      <a:schemeClr val="lt1"/>
+    </dgm:txFillClrLst>
+    <dgm:txEffectClrLst/>
+  </dgm:styleLbl>
+  <dgm:styleLbl name="trBgShp">
+    <dgm:fillClrLst meth="repeat">
+      <a:schemeClr val="dk2">
+        <a:tint val="50000"/>
+        <a:alpha val="40000"/>
+      </a:schemeClr>
+    </dgm:fillClrLst>
+    <dgm:linClrLst meth="repeat">
+      <a:schemeClr val="dk2"/>
+    </dgm:linClrLst>
+    <dgm:effectClrLst/>
+    <dgm:txLinClrLst/>
+    <dgm:txFillClrLst meth="repeat">
+      <a:schemeClr val="lt1"/>
+    </dgm:txFillClrLst>
+    <dgm:txEffectClrLst/>
+  </dgm:styleLbl>
+  <dgm:styleLbl name="fgShp">
+    <dgm:fillClrLst meth="repeat">
+      <a:schemeClr val="dk2">
+        <a:tint val="60000"/>
+      </a:schemeClr>
+    </dgm:fillClrLst>
+    <dgm:linClrLst meth="repeat">
+      <a:schemeClr val="lt2"/>
+    </dgm:linClrLst>
+    <dgm:effectClrLst/>
+    <dgm:txLinClrLst/>
+    <dgm:txFillClrLst meth="repeat">
+      <a:schemeClr val="dk1"/>
+    </dgm:txFillClrLst>
+    <dgm:txEffectClrLst/>
+  </dgm:styleLbl>
+  <dgm:styleLbl name="revTx">
+    <dgm:fillClrLst meth="repeat">
+      <a:schemeClr val="lt2">
+        <a:alpha val="0"/>
+      </a:schemeClr>
+    </dgm:fillClrLst>
+    <dgm:linClrLst meth="repeat">
+      <a:schemeClr val="dk1">
+        <a:alpha val="0"/>
+      </a:schemeClr>
+    </dgm:linClrLst>
+    <dgm:effectClrLst/>
+    <dgm:txLinClrLst/>
+    <dgm:txFillClrLst meth="repeat">
+      <a:schemeClr val="tx1"/>
+    </dgm:txFillClrLst>
+    <dgm:txEffectClrLst/>
+  </dgm:styleLbl>
+</dgm:colorsDef>
+</file>
+
+<file path=ppt/diagrams/colors3.xml><?xml version="1.0" encoding="utf-8"?>
 <dgm:colorsDef xmlns:dgm="http://schemas.openxmlformats.org/drawingml/2006/diagram" xmlns:a="http://schemas.openxmlformats.org/drawingml/2006/main" uniqueId="urn:microsoft.com/office/officeart/2005/8/colors/accent0_3">
   <dgm:title val=""/>
   <dgm:desc val=""/>
@@ -4699,6 +4139,247 @@
     <dgm:cxn modelId="{997EB14D-E23E-4896-8386-4FBC16D1ADFA}" type="presParOf" srcId="{9BB90B76-3955-43A4-A6F6-9A346CA73AB7}" destId="{085293EE-F517-42D9-A193-51117CA0A769}" srcOrd="5" destOrd="0" presId="urn:microsoft.com/office/officeart/2005/8/layout/vList2"/>
     <dgm:cxn modelId="{C64F415A-A9A1-4187-B4F9-5C97E2819A34}" type="presParOf" srcId="{9BB90B76-3955-43A4-A6F6-9A346CA73AB7}" destId="{5AF7264F-099F-4429-81AD-3B9D13EAD7CD}" srcOrd="6" destOrd="0" presId="urn:microsoft.com/office/officeart/2005/8/layout/vList2"/>
     <dgm:cxn modelId="{A3760F87-A34F-4F0E-9921-DF47FEE900CF}" type="presParOf" srcId="{9BB90B76-3955-43A4-A6F6-9A346CA73AB7}" destId="{E8B2023B-B9F5-4A00-9832-4B141375B153}" srcOrd="7" destOrd="0" presId="urn:microsoft.com/office/officeart/2005/8/layout/vList2"/>
+  </dgm:cxnLst>
+  <dgm:bg/>
+  <dgm:whole/>
+  <dgm:extLst>
+    <a:ext uri="http://schemas.microsoft.com/office/drawing/2008/diagram">
+      <dsp:dataModelExt xmlns:dsp="http://schemas.microsoft.com/office/drawing/2008/diagram" relId="rId6" minVer="http://schemas.openxmlformats.org/drawingml/2006/diagram"/>
+    </a:ext>
+  </dgm:extLst>
+</dgm:dataModel>
+</file>
+
+<file path=ppt/diagrams/data3.xml><?xml version="1.0" encoding="utf-8"?>
+<dgm:dataModel xmlns:dgm="http://schemas.openxmlformats.org/drawingml/2006/diagram" xmlns:a="http://schemas.openxmlformats.org/drawingml/2006/main">
+  <dgm:ptLst>
+    <dgm:pt modelId="{9164230A-E4D9-472A-A2E9-0928093DE36C}" type="doc">
+      <dgm:prSet loTypeId="urn:microsoft.com/office/officeart/2005/8/layout/hierarchy1" loCatId="hierarchy" qsTypeId="urn:microsoft.com/office/officeart/2005/8/quickstyle/simple1" qsCatId="simple" csTypeId="urn:microsoft.com/office/officeart/2005/8/colors/accent0_3" csCatId="mainScheme"/>
+      <dgm:spPr/>
+      <dgm:t>
+        <a:bodyPr/>
+        <a:lstStyle/>
+        <a:p>
+          <a:endParaRPr lang="en-US"/>
+        </a:p>
+      </dgm:t>
+    </dgm:pt>
+    <dgm:pt modelId="{28139F1A-A6A7-432B-8781-7A4A3DED4A93}">
+      <dgm:prSet/>
+      <dgm:spPr/>
+      <dgm:t>
+        <a:bodyPr/>
+        <a:lstStyle/>
+        <a:p>
+          <a:r>
+            <a:rPr lang="en-US"/>
+            <a:t>Further testing</a:t>
+          </a:r>
+        </a:p>
+      </dgm:t>
+    </dgm:pt>
+    <dgm:pt modelId="{E914C820-F9DE-47EC-9F73-936C9F42AB5B}" type="parTrans" cxnId="{0040673C-1203-48E6-AC57-F1184954747E}">
+      <dgm:prSet/>
+      <dgm:spPr/>
+      <dgm:t>
+        <a:bodyPr/>
+        <a:lstStyle/>
+        <a:p>
+          <a:endParaRPr lang="en-US"/>
+        </a:p>
+      </dgm:t>
+    </dgm:pt>
+    <dgm:pt modelId="{A2646469-F1C6-47E6-BBFA-5DF18D058547}" type="sibTrans" cxnId="{0040673C-1203-48E6-AC57-F1184954747E}">
+      <dgm:prSet/>
+      <dgm:spPr/>
+      <dgm:t>
+        <a:bodyPr/>
+        <a:lstStyle/>
+        <a:p>
+          <a:endParaRPr lang="en-US"/>
+        </a:p>
+      </dgm:t>
+    </dgm:pt>
+    <dgm:pt modelId="{18088FB2-9739-4FD1-B605-8E749E114D27}">
+      <dgm:prSet/>
+      <dgm:spPr/>
+      <dgm:t>
+        <a:bodyPr/>
+        <a:lstStyle/>
+        <a:p>
+          <a:r>
+            <a:rPr lang="en-US"/>
+            <a:t>Prompts with varying information: vague/detailed</a:t>
+          </a:r>
+        </a:p>
+      </dgm:t>
+    </dgm:pt>
+    <dgm:pt modelId="{6727F9B5-275F-4C72-879E-3B1EF9CD4DAC}" type="parTrans" cxnId="{3E3A2A63-D5F9-45E4-A9F1-C7586559D632}">
+      <dgm:prSet/>
+      <dgm:spPr/>
+      <dgm:t>
+        <a:bodyPr/>
+        <a:lstStyle/>
+        <a:p>
+          <a:endParaRPr lang="en-US"/>
+        </a:p>
+      </dgm:t>
+    </dgm:pt>
+    <dgm:pt modelId="{7E6E6C79-13F4-445D-A6C2-642E2E73C0C1}" type="sibTrans" cxnId="{3E3A2A63-D5F9-45E4-A9F1-C7586559D632}">
+      <dgm:prSet/>
+      <dgm:spPr/>
+      <dgm:t>
+        <a:bodyPr/>
+        <a:lstStyle/>
+        <a:p>
+          <a:endParaRPr lang="en-US"/>
+        </a:p>
+      </dgm:t>
+    </dgm:pt>
+    <dgm:pt modelId="{8297205D-8C73-416F-9724-10DD90272DD8}">
+      <dgm:prSet/>
+      <dgm:spPr/>
+      <dgm:t>
+        <a:bodyPr/>
+        <a:lstStyle/>
+        <a:p>
+          <a:r>
+            <a:rPr lang="en-US"/>
+            <a:t>Test with additional time complexities</a:t>
+          </a:r>
+        </a:p>
+      </dgm:t>
+    </dgm:pt>
+    <dgm:pt modelId="{1A6556AD-6CF2-4598-9270-415BC1496414}" type="parTrans" cxnId="{4F5D4AF2-3259-4C83-85CB-825A05E68D1C}">
+      <dgm:prSet/>
+      <dgm:spPr/>
+      <dgm:t>
+        <a:bodyPr/>
+        <a:lstStyle/>
+        <a:p>
+          <a:endParaRPr lang="en-US"/>
+        </a:p>
+      </dgm:t>
+    </dgm:pt>
+    <dgm:pt modelId="{E8DA3550-6FCD-4CFD-BDAB-61ACC51FF0E0}" type="sibTrans" cxnId="{4F5D4AF2-3259-4C83-85CB-825A05E68D1C}">
+      <dgm:prSet/>
+      <dgm:spPr/>
+      <dgm:t>
+        <a:bodyPr/>
+        <a:lstStyle/>
+        <a:p>
+          <a:endParaRPr lang="en-US"/>
+        </a:p>
+      </dgm:t>
+    </dgm:pt>
+    <dgm:pt modelId="{673A6266-F5E7-475A-BAD4-5FEC6D422308}" type="pres">
+      <dgm:prSet presAssocID="{9164230A-E4D9-472A-A2E9-0928093DE36C}" presName="hierChild1" presStyleCnt="0">
+        <dgm:presLayoutVars>
+          <dgm:chPref val="1"/>
+          <dgm:dir/>
+          <dgm:animOne val="branch"/>
+          <dgm:animLvl val="lvl"/>
+          <dgm:resizeHandles/>
+        </dgm:presLayoutVars>
+      </dgm:prSet>
+      <dgm:spPr/>
+    </dgm:pt>
+    <dgm:pt modelId="{0E25B391-620F-45C1-B1BD-D3F6D18F9DD6}" type="pres">
+      <dgm:prSet presAssocID="{28139F1A-A6A7-432B-8781-7A4A3DED4A93}" presName="hierRoot1" presStyleCnt="0"/>
+      <dgm:spPr/>
+    </dgm:pt>
+    <dgm:pt modelId="{0A16ACE8-D594-402C-BB38-AAE0B5F0A913}" type="pres">
+      <dgm:prSet presAssocID="{28139F1A-A6A7-432B-8781-7A4A3DED4A93}" presName="composite" presStyleCnt="0"/>
+      <dgm:spPr/>
+    </dgm:pt>
+    <dgm:pt modelId="{2D49F226-E6C2-4F09-A420-764F1B365207}" type="pres">
+      <dgm:prSet presAssocID="{28139F1A-A6A7-432B-8781-7A4A3DED4A93}" presName="background" presStyleLbl="node0" presStyleIdx="0" presStyleCnt="3"/>
+      <dgm:spPr/>
+    </dgm:pt>
+    <dgm:pt modelId="{E266934E-4555-4070-A641-D3509603E090}" type="pres">
+      <dgm:prSet presAssocID="{28139F1A-A6A7-432B-8781-7A4A3DED4A93}" presName="text" presStyleLbl="fgAcc0" presStyleIdx="0" presStyleCnt="3">
+        <dgm:presLayoutVars>
+          <dgm:chPref val="3"/>
+        </dgm:presLayoutVars>
+      </dgm:prSet>
+      <dgm:spPr/>
+    </dgm:pt>
+    <dgm:pt modelId="{31921D2D-539A-45F9-907C-FED0D8AEA471}" type="pres">
+      <dgm:prSet presAssocID="{28139F1A-A6A7-432B-8781-7A4A3DED4A93}" presName="hierChild2" presStyleCnt="0"/>
+      <dgm:spPr/>
+    </dgm:pt>
+    <dgm:pt modelId="{D72F73AF-2306-4797-BEA3-BBA13E2D5E86}" type="pres">
+      <dgm:prSet presAssocID="{18088FB2-9739-4FD1-B605-8E749E114D27}" presName="hierRoot1" presStyleCnt="0"/>
+      <dgm:spPr/>
+    </dgm:pt>
+    <dgm:pt modelId="{30634853-6C24-4F4D-BD2B-2A6CEFA7A7CF}" type="pres">
+      <dgm:prSet presAssocID="{18088FB2-9739-4FD1-B605-8E749E114D27}" presName="composite" presStyleCnt="0"/>
+      <dgm:spPr/>
+    </dgm:pt>
+    <dgm:pt modelId="{15D8F532-A4D0-41D5-8FE0-288ECDF7A592}" type="pres">
+      <dgm:prSet presAssocID="{18088FB2-9739-4FD1-B605-8E749E114D27}" presName="background" presStyleLbl="node0" presStyleIdx="1" presStyleCnt="3"/>
+      <dgm:spPr/>
+    </dgm:pt>
+    <dgm:pt modelId="{FA8327B9-A9E2-49E2-BE2B-752921357B7A}" type="pres">
+      <dgm:prSet presAssocID="{18088FB2-9739-4FD1-B605-8E749E114D27}" presName="text" presStyleLbl="fgAcc0" presStyleIdx="1" presStyleCnt="3">
+        <dgm:presLayoutVars>
+          <dgm:chPref val="3"/>
+        </dgm:presLayoutVars>
+      </dgm:prSet>
+      <dgm:spPr/>
+    </dgm:pt>
+    <dgm:pt modelId="{DF6FB0AA-5747-45E7-9F19-1F18F1635D65}" type="pres">
+      <dgm:prSet presAssocID="{18088FB2-9739-4FD1-B605-8E749E114D27}" presName="hierChild2" presStyleCnt="0"/>
+      <dgm:spPr/>
+    </dgm:pt>
+    <dgm:pt modelId="{F0ECE918-47C7-4D4C-A35C-3CAEA4BEA868}" type="pres">
+      <dgm:prSet presAssocID="{8297205D-8C73-416F-9724-10DD90272DD8}" presName="hierRoot1" presStyleCnt="0"/>
+      <dgm:spPr/>
+    </dgm:pt>
+    <dgm:pt modelId="{81936F23-BCA4-4861-9765-47EDF2289A4B}" type="pres">
+      <dgm:prSet presAssocID="{8297205D-8C73-416F-9724-10DD90272DD8}" presName="composite" presStyleCnt="0"/>
+      <dgm:spPr/>
+    </dgm:pt>
+    <dgm:pt modelId="{D3F87735-27C1-4E7C-8D3E-73E61B42B0BD}" type="pres">
+      <dgm:prSet presAssocID="{8297205D-8C73-416F-9724-10DD90272DD8}" presName="background" presStyleLbl="node0" presStyleIdx="2" presStyleCnt="3"/>
+      <dgm:spPr/>
+    </dgm:pt>
+    <dgm:pt modelId="{672EC04D-39DD-4246-B303-CB1FFFCE6ED9}" type="pres">
+      <dgm:prSet presAssocID="{8297205D-8C73-416F-9724-10DD90272DD8}" presName="text" presStyleLbl="fgAcc0" presStyleIdx="2" presStyleCnt="3">
+        <dgm:presLayoutVars>
+          <dgm:chPref val="3"/>
+        </dgm:presLayoutVars>
+      </dgm:prSet>
+      <dgm:spPr/>
+    </dgm:pt>
+    <dgm:pt modelId="{B258505D-C9A3-48E4-A902-73E2C19761C5}" type="pres">
+      <dgm:prSet presAssocID="{8297205D-8C73-416F-9724-10DD90272DD8}" presName="hierChild2" presStyleCnt="0"/>
+      <dgm:spPr/>
+    </dgm:pt>
+  </dgm:ptLst>
+  <dgm:cxnLst>
+    <dgm:cxn modelId="{A69E2701-0350-4FCC-A6C3-7113CD17A109}" type="presOf" srcId="{28139F1A-A6A7-432B-8781-7A4A3DED4A93}" destId="{E266934E-4555-4070-A641-D3509603E090}" srcOrd="0" destOrd="0" presId="urn:microsoft.com/office/officeart/2005/8/layout/hierarchy1"/>
+    <dgm:cxn modelId="{0040673C-1203-48E6-AC57-F1184954747E}" srcId="{9164230A-E4D9-472A-A2E9-0928093DE36C}" destId="{28139F1A-A6A7-432B-8781-7A4A3DED4A93}" srcOrd="0" destOrd="0" parTransId="{E914C820-F9DE-47EC-9F73-936C9F42AB5B}" sibTransId="{A2646469-F1C6-47E6-BBFA-5DF18D058547}"/>
+    <dgm:cxn modelId="{3E3A2A63-D5F9-45E4-A9F1-C7586559D632}" srcId="{9164230A-E4D9-472A-A2E9-0928093DE36C}" destId="{18088FB2-9739-4FD1-B605-8E749E114D27}" srcOrd="1" destOrd="0" parTransId="{6727F9B5-275F-4C72-879E-3B1EF9CD4DAC}" sibTransId="{7E6E6C79-13F4-445D-A6C2-642E2E73C0C1}"/>
+    <dgm:cxn modelId="{4AC06D44-B213-4428-8251-7920486953C5}" type="presOf" srcId="{9164230A-E4D9-472A-A2E9-0928093DE36C}" destId="{673A6266-F5E7-475A-BAD4-5FEC6D422308}" srcOrd="0" destOrd="0" presId="urn:microsoft.com/office/officeart/2005/8/layout/hierarchy1"/>
+    <dgm:cxn modelId="{5C01427E-A769-4899-BFF5-CB3781E06871}" type="presOf" srcId="{18088FB2-9739-4FD1-B605-8E749E114D27}" destId="{FA8327B9-A9E2-49E2-BE2B-752921357B7A}" srcOrd="0" destOrd="0" presId="urn:microsoft.com/office/officeart/2005/8/layout/hierarchy1"/>
+    <dgm:cxn modelId="{0286A594-6ADA-4D8B-8D45-980C1F2B5EEF}" type="presOf" srcId="{8297205D-8C73-416F-9724-10DD90272DD8}" destId="{672EC04D-39DD-4246-B303-CB1FFFCE6ED9}" srcOrd="0" destOrd="0" presId="urn:microsoft.com/office/officeart/2005/8/layout/hierarchy1"/>
+    <dgm:cxn modelId="{4F5D4AF2-3259-4C83-85CB-825A05E68D1C}" srcId="{9164230A-E4D9-472A-A2E9-0928093DE36C}" destId="{8297205D-8C73-416F-9724-10DD90272DD8}" srcOrd="2" destOrd="0" parTransId="{1A6556AD-6CF2-4598-9270-415BC1496414}" sibTransId="{E8DA3550-6FCD-4CFD-BDAB-61ACC51FF0E0}"/>
+    <dgm:cxn modelId="{6CCBA554-0F37-4410-8F42-B9CD4043AFFC}" type="presParOf" srcId="{673A6266-F5E7-475A-BAD4-5FEC6D422308}" destId="{0E25B391-620F-45C1-B1BD-D3F6D18F9DD6}" srcOrd="0" destOrd="0" presId="urn:microsoft.com/office/officeart/2005/8/layout/hierarchy1"/>
+    <dgm:cxn modelId="{454102C7-E0D0-47AF-A9C1-2D3959E0BDA6}" type="presParOf" srcId="{0E25B391-620F-45C1-B1BD-D3F6D18F9DD6}" destId="{0A16ACE8-D594-402C-BB38-AAE0B5F0A913}" srcOrd="0" destOrd="0" presId="urn:microsoft.com/office/officeart/2005/8/layout/hierarchy1"/>
+    <dgm:cxn modelId="{4C1B171D-B049-46FB-B9E9-7E817C35C501}" type="presParOf" srcId="{0A16ACE8-D594-402C-BB38-AAE0B5F0A913}" destId="{2D49F226-E6C2-4F09-A420-764F1B365207}" srcOrd="0" destOrd="0" presId="urn:microsoft.com/office/officeart/2005/8/layout/hierarchy1"/>
+    <dgm:cxn modelId="{620EA56F-BCF0-4EEE-A55A-C9A0A25E7A67}" type="presParOf" srcId="{0A16ACE8-D594-402C-BB38-AAE0B5F0A913}" destId="{E266934E-4555-4070-A641-D3509603E090}" srcOrd="1" destOrd="0" presId="urn:microsoft.com/office/officeart/2005/8/layout/hierarchy1"/>
+    <dgm:cxn modelId="{AE37C59C-9764-423A-B612-3EF689809474}" type="presParOf" srcId="{0E25B391-620F-45C1-B1BD-D3F6D18F9DD6}" destId="{31921D2D-539A-45F9-907C-FED0D8AEA471}" srcOrd="1" destOrd="0" presId="urn:microsoft.com/office/officeart/2005/8/layout/hierarchy1"/>
+    <dgm:cxn modelId="{8B28A114-14A9-4D37-B8DF-727AE8A66362}" type="presParOf" srcId="{673A6266-F5E7-475A-BAD4-5FEC6D422308}" destId="{D72F73AF-2306-4797-BEA3-BBA13E2D5E86}" srcOrd="1" destOrd="0" presId="urn:microsoft.com/office/officeart/2005/8/layout/hierarchy1"/>
+    <dgm:cxn modelId="{6A276A3C-F662-4903-A6A9-A4BA4BEB305C}" type="presParOf" srcId="{D72F73AF-2306-4797-BEA3-BBA13E2D5E86}" destId="{30634853-6C24-4F4D-BD2B-2A6CEFA7A7CF}" srcOrd="0" destOrd="0" presId="urn:microsoft.com/office/officeart/2005/8/layout/hierarchy1"/>
+    <dgm:cxn modelId="{F201AC8C-4CAF-4EA0-B4C3-EF15AC59FE99}" type="presParOf" srcId="{30634853-6C24-4F4D-BD2B-2A6CEFA7A7CF}" destId="{15D8F532-A4D0-41D5-8FE0-288ECDF7A592}" srcOrd="0" destOrd="0" presId="urn:microsoft.com/office/officeart/2005/8/layout/hierarchy1"/>
+    <dgm:cxn modelId="{FE7DFD3F-666A-48AC-AC35-4B64BDF52015}" type="presParOf" srcId="{30634853-6C24-4F4D-BD2B-2A6CEFA7A7CF}" destId="{FA8327B9-A9E2-49E2-BE2B-752921357B7A}" srcOrd="1" destOrd="0" presId="urn:microsoft.com/office/officeart/2005/8/layout/hierarchy1"/>
+    <dgm:cxn modelId="{06C4D2DE-F8D0-4A5B-9393-380854704C82}" type="presParOf" srcId="{D72F73AF-2306-4797-BEA3-BBA13E2D5E86}" destId="{DF6FB0AA-5747-45E7-9F19-1F18F1635D65}" srcOrd="1" destOrd="0" presId="urn:microsoft.com/office/officeart/2005/8/layout/hierarchy1"/>
+    <dgm:cxn modelId="{624E132B-1C83-4D8F-AC06-9BDBB962FDBE}" type="presParOf" srcId="{673A6266-F5E7-475A-BAD4-5FEC6D422308}" destId="{F0ECE918-47C7-4D4C-A35C-3CAEA4BEA868}" srcOrd="2" destOrd="0" presId="urn:microsoft.com/office/officeart/2005/8/layout/hierarchy1"/>
+    <dgm:cxn modelId="{FDAB23E6-1653-4677-A32D-C968496BBD87}" type="presParOf" srcId="{F0ECE918-47C7-4D4C-A35C-3CAEA4BEA868}" destId="{81936F23-BCA4-4861-9765-47EDF2289A4B}" srcOrd="0" destOrd="0" presId="urn:microsoft.com/office/officeart/2005/8/layout/hierarchy1"/>
+    <dgm:cxn modelId="{E8F97369-9A87-4B49-AE2E-0F3C16352D9B}" type="presParOf" srcId="{81936F23-BCA4-4861-9765-47EDF2289A4B}" destId="{D3F87735-27C1-4E7C-8D3E-73E61B42B0BD}" srcOrd="0" destOrd="0" presId="urn:microsoft.com/office/officeart/2005/8/layout/hierarchy1"/>
+    <dgm:cxn modelId="{22E27ABD-55AD-4753-B6F9-A0D1372CC315}" type="presParOf" srcId="{81936F23-BCA4-4861-9765-47EDF2289A4B}" destId="{672EC04D-39DD-4246-B303-CB1FFFCE6ED9}" srcOrd="1" destOrd="0" presId="urn:microsoft.com/office/officeart/2005/8/layout/hierarchy1"/>
+    <dgm:cxn modelId="{99917650-4CC9-4032-A8E6-2A975FC71759}" type="presParOf" srcId="{F0ECE918-47C7-4D4C-A35C-3CAEA4BEA868}" destId="{B258505D-C9A3-48E4-A902-73E2C19761C5}" srcOrd="1" destOrd="0" presId="urn:microsoft.com/office/officeart/2005/8/layout/hierarchy1"/>
   </dgm:cxnLst>
   <dgm:bg/>
   <dgm:whole/>
@@ -5955,6 +5636,411 @@
 </dsp:drawing>
 </file>
 
+<file path=ppt/diagrams/drawing3.xml><?xml version="1.0" encoding="utf-8"?>
+<dsp:drawing xmlns:dgm="http://schemas.openxmlformats.org/drawingml/2006/diagram" xmlns:dsp="http://schemas.microsoft.com/office/drawing/2008/diagram" xmlns:a="http://schemas.openxmlformats.org/drawingml/2006/main">
+  <dsp:spTree>
+    <dsp:nvGrpSpPr>
+      <dsp:cNvPr id="0" name=""/>
+      <dsp:cNvGrpSpPr/>
+    </dsp:nvGrpSpPr>
+    <dsp:grpSpPr/>
+    <dsp:sp modelId="{2D49F226-E6C2-4F09-A420-764F1B365207}">
+      <dsp:nvSpPr>
+        <dsp:cNvPr id="0" name=""/>
+        <dsp:cNvSpPr/>
+      </dsp:nvSpPr>
+      <dsp:spPr>
+        <a:xfrm>
+          <a:off x="0" y="524133"/>
+          <a:ext cx="2918936" cy="1853524"/>
+        </a:xfrm>
+        <a:prstGeom prst="roundRect">
+          <a:avLst>
+            <a:gd name="adj" fmla="val 10000"/>
+          </a:avLst>
+        </a:prstGeom>
+        <a:solidFill>
+          <a:schemeClr val="dk2">
+            <a:hueOff val="0"/>
+            <a:satOff val="0"/>
+            <a:lumOff val="0"/>
+            <a:alphaOff val="0"/>
+          </a:schemeClr>
+        </a:solidFill>
+        <a:ln w="19050" cap="flat" cmpd="sng" algn="ctr">
+          <a:solidFill>
+            <a:schemeClr val="lt2">
+              <a:hueOff val="0"/>
+              <a:satOff val="0"/>
+              <a:lumOff val="0"/>
+              <a:alphaOff val="0"/>
+            </a:schemeClr>
+          </a:solidFill>
+          <a:prstDash val="solid"/>
+          <a:miter lim="800000"/>
+        </a:ln>
+        <a:effectLst/>
+      </dsp:spPr>
+      <dsp:style>
+        <a:lnRef idx="2">
+          <a:scrgbClr r="0" g="0" b="0"/>
+        </a:lnRef>
+        <a:fillRef idx="1">
+          <a:scrgbClr r="0" g="0" b="0"/>
+        </a:fillRef>
+        <a:effectRef idx="0">
+          <a:scrgbClr r="0" g="0" b="0"/>
+        </a:effectRef>
+        <a:fontRef idx="minor">
+          <a:schemeClr val="lt1"/>
+        </a:fontRef>
+      </dsp:style>
+    </dsp:sp>
+    <dsp:sp modelId="{E266934E-4555-4070-A641-D3509603E090}">
+      <dsp:nvSpPr>
+        <dsp:cNvPr id="0" name=""/>
+        <dsp:cNvSpPr/>
+      </dsp:nvSpPr>
+      <dsp:spPr>
+        <a:xfrm>
+          <a:off x="324326" y="832243"/>
+          <a:ext cx="2918936" cy="1853524"/>
+        </a:xfrm>
+        <a:prstGeom prst="roundRect">
+          <a:avLst>
+            <a:gd name="adj" fmla="val 10000"/>
+          </a:avLst>
+        </a:prstGeom>
+        <a:solidFill>
+          <a:schemeClr val="lt2">
+            <a:alpha val="90000"/>
+            <a:hueOff val="0"/>
+            <a:satOff val="0"/>
+            <a:lumOff val="0"/>
+            <a:alphaOff val="0"/>
+          </a:schemeClr>
+        </a:solidFill>
+        <a:ln w="19050" cap="flat" cmpd="sng" algn="ctr">
+          <a:solidFill>
+            <a:schemeClr val="dk2">
+              <a:hueOff val="0"/>
+              <a:satOff val="0"/>
+              <a:lumOff val="0"/>
+              <a:alphaOff val="0"/>
+            </a:schemeClr>
+          </a:solidFill>
+          <a:prstDash val="solid"/>
+          <a:miter lim="800000"/>
+        </a:ln>
+        <a:effectLst/>
+      </dsp:spPr>
+      <dsp:style>
+        <a:lnRef idx="2">
+          <a:scrgbClr r="0" g="0" b="0"/>
+        </a:lnRef>
+        <a:fillRef idx="1">
+          <a:scrgbClr r="0" g="0" b="0"/>
+        </a:fillRef>
+        <a:effectRef idx="0">
+          <a:scrgbClr r="0" g="0" b="0"/>
+        </a:effectRef>
+        <a:fontRef idx="minor"/>
+      </dsp:style>
+      <dsp:txBody>
+        <a:bodyPr spcFirstLastPara="0" vert="horz" wrap="square" lIns="102870" tIns="102870" rIns="102870" bIns="102870" numCol="1" spcCol="1270" anchor="ctr" anchorCtr="0">
+          <a:noAutofit/>
+        </a:bodyPr>
+        <a:lstStyle/>
+        <a:p>
+          <a:pPr marL="0" lvl="0" indent="0" algn="ctr" defTabSz="1200150">
+            <a:lnSpc>
+              <a:spcPct val="90000"/>
+            </a:lnSpc>
+            <a:spcBef>
+              <a:spcPct val="0"/>
+            </a:spcBef>
+            <a:spcAft>
+              <a:spcPct val="35000"/>
+            </a:spcAft>
+            <a:buNone/>
+          </a:pPr>
+          <a:r>
+            <a:rPr lang="en-US" sz="2700" kern="1200"/>
+            <a:t>Further testing</a:t>
+          </a:r>
+        </a:p>
+      </dsp:txBody>
+      <dsp:txXfrm>
+        <a:off x="378614" y="886531"/>
+        <a:ext cx="2810360" cy="1744948"/>
+      </dsp:txXfrm>
+    </dsp:sp>
+    <dsp:sp modelId="{15D8F532-A4D0-41D5-8FE0-288ECDF7A592}">
+      <dsp:nvSpPr>
+        <dsp:cNvPr id="0" name=""/>
+        <dsp:cNvSpPr/>
+      </dsp:nvSpPr>
+      <dsp:spPr>
+        <a:xfrm>
+          <a:off x="3567588" y="524133"/>
+          <a:ext cx="2918936" cy="1853524"/>
+        </a:xfrm>
+        <a:prstGeom prst="roundRect">
+          <a:avLst>
+            <a:gd name="adj" fmla="val 10000"/>
+          </a:avLst>
+        </a:prstGeom>
+        <a:solidFill>
+          <a:schemeClr val="dk2">
+            <a:hueOff val="0"/>
+            <a:satOff val="0"/>
+            <a:lumOff val="0"/>
+            <a:alphaOff val="0"/>
+          </a:schemeClr>
+        </a:solidFill>
+        <a:ln w="19050" cap="flat" cmpd="sng" algn="ctr">
+          <a:solidFill>
+            <a:schemeClr val="lt2">
+              <a:hueOff val="0"/>
+              <a:satOff val="0"/>
+              <a:lumOff val="0"/>
+              <a:alphaOff val="0"/>
+            </a:schemeClr>
+          </a:solidFill>
+          <a:prstDash val="solid"/>
+          <a:miter lim="800000"/>
+        </a:ln>
+        <a:effectLst/>
+      </dsp:spPr>
+      <dsp:style>
+        <a:lnRef idx="2">
+          <a:scrgbClr r="0" g="0" b="0"/>
+        </a:lnRef>
+        <a:fillRef idx="1">
+          <a:scrgbClr r="0" g="0" b="0"/>
+        </a:fillRef>
+        <a:effectRef idx="0">
+          <a:scrgbClr r="0" g="0" b="0"/>
+        </a:effectRef>
+        <a:fontRef idx="minor">
+          <a:schemeClr val="lt1"/>
+        </a:fontRef>
+      </dsp:style>
+    </dsp:sp>
+    <dsp:sp modelId="{FA8327B9-A9E2-49E2-BE2B-752921357B7A}">
+      <dsp:nvSpPr>
+        <dsp:cNvPr id="0" name=""/>
+        <dsp:cNvSpPr/>
+      </dsp:nvSpPr>
+      <dsp:spPr>
+        <a:xfrm>
+          <a:off x="3891915" y="832243"/>
+          <a:ext cx="2918936" cy="1853524"/>
+        </a:xfrm>
+        <a:prstGeom prst="roundRect">
+          <a:avLst>
+            <a:gd name="adj" fmla="val 10000"/>
+          </a:avLst>
+        </a:prstGeom>
+        <a:solidFill>
+          <a:schemeClr val="lt2">
+            <a:alpha val="90000"/>
+            <a:hueOff val="0"/>
+            <a:satOff val="0"/>
+            <a:lumOff val="0"/>
+            <a:alphaOff val="0"/>
+          </a:schemeClr>
+        </a:solidFill>
+        <a:ln w="19050" cap="flat" cmpd="sng" algn="ctr">
+          <a:solidFill>
+            <a:schemeClr val="dk2">
+              <a:hueOff val="0"/>
+              <a:satOff val="0"/>
+              <a:lumOff val="0"/>
+              <a:alphaOff val="0"/>
+            </a:schemeClr>
+          </a:solidFill>
+          <a:prstDash val="solid"/>
+          <a:miter lim="800000"/>
+        </a:ln>
+        <a:effectLst/>
+      </dsp:spPr>
+      <dsp:style>
+        <a:lnRef idx="2">
+          <a:scrgbClr r="0" g="0" b="0"/>
+        </a:lnRef>
+        <a:fillRef idx="1">
+          <a:scrgbClr r="0" g="0" b="0"/>
+        </a:fillRef>
+        <a:effectRef idx="0">
+          <a:scrgbClr r="0" g="0" b="0"/>
+        </a:effectRef>
+        <a:fontRef idx="minor"/>
+      </dsp:style>
+      <dsp:txBody>
+        <a:bodyPr spcFirstLastPara="0" vert="horz" wrap="square" lIns="102870" tIns="102870" rIns="102870" bIns="102870" numCol="1" spcCol="1270" anchor="ctr" anchorCtr="0">
+          <a:noAutofit/>
+        </a:bodyPr>
+        <a:lstStyle/>
+        <a:p>
+          <a:pPr marL="0" lvl="0" indent="0" algn="ctr" defTabSz="1200150">
+            <a:lnSpc>
+              <a:spcPct val="90000"/>
+            </a:lnSpc>
+            <a:spcBef>
+              <a:spcPct val="0"/>
+            </a:spcBef>
+            <a:spcAft>
+              <a:spcPct val="35000"/>
+            </a:spcAft>
+            <a:buNone/>
+          </a:pPr>
+          <a:r>
+            <a:rPr lang="en-US" sz="2700" kern="1200"/>
+            <a:t>Prompts with varying information: vague/detailed</a:t>
+          </a:r>
+        </a:p>
+      </dsp:txBody>
+      <dsp:txXfrm>
+        <a:off x="3946203" y="886531"/>
+        <a:ext cx="2810360" cy="1744948"/>
+      </dsp:txXfrm>
+    </dsp:sp>
+    <dsp:sp modelId="{D3F87735-27C1-4E7C-8D3E-73E61B42B0BD}">
+      <dsp:nvSpPr>
+        <dsp:cNvPr id="0" name=""/>
+        <dsp:cNvSpPr/>
+      </dsp:nvSpPr>
+      <dsp:spPr>
+        <a:xfrm>
+          <a:off x="7135177" y="524133"/>
+          <a:ext cx="2918936" cy="1853524"/>
+        </a:xfrm>
+        <a:prstGeom prst="roundRect">
+          <a:avLst>
+            <a:gd name="adj" fmla="val 10000"/>
+          </a:avLst>
+        </a:prstGeom>
+        <a:solidFill>
+          <a:schemeClr val="dk2">
+            <a:hueOff val="0"/>
+            <a:satOff val="0"/>
+            <a:lumOff val="0"/>
+            <a:alphaOff val="0"/>
+          </a:schemeClr>
+        </a:solidFill>
+        <a:ln w="19050" cap="flat" cmpd="sng" algn="ctr">
+          <a:solidFill>
+            <a:schemeClr val="lt2">
+              <a:hueOff val="0"/>
+              <a:satOff val="0"/>
+              <a:lumOff val="0"/>
+              <a:alphaOff val="0"/>
+            </a:schemeClr>
+          </a:solidFill>
+          <a:prstDash val="solid"/>
+          <a:miter lim="800000"/>
+        </a:ln>
+        <a:effectLst/>
+      </dsp:spPr>
+      <dsp:style>
+        <a:lnRef idx="2">
+          <a:scrgbClr r="0" g="0" b="0"/>
+        </a:lnRef>
+        <a:fillRef idx="1">
+          <a:scrgbClr r="0" g="0" b="0"/>
+        </a:fillRef>
+        <a:effectRef idx="0">
+          <a:scrgbClr r="0" g="0" b="0"/>
+        </a:effectRef>
+        <a:fontRef idx="minor">
+          <a:schemeClr val="lt1"/>
+        </a:fontRef>
+      </dsp:style>
+    </dsp:sp>
+    <dsp:sp modelId="{672EC04D-39DD-4246-B303-CB1FFFCE6ED9}">
+      <dsp:nvSpPr>
+        <dsp:cNvPr id="0" name=""/>
+        <dsp:cNvSpPr/>
+      </dsp:nvSpPr>
+      <dsp:spPr>
+        <a:xfrm>
+          <a:off x="7459503" y="832243"/>
+          <a:ext cx="2918936" cy="1853524"/>
+        </a:xfrm>
+        <a:prstGeom prst="roundRect">
+          <a:avLst>
+            <a:gd name="adj" fmla="val 10000"/>
+          </a:avLst>
+        </a:prstGeom>
+        <a:solidFill>
+          <a:schemeClr val="lt2">
+            <a:alpha val="90000"/>
+            <a:hueOff val="0"/>
+            <a:satOff val="0"/>
+            <a:lumOff val="0"/>
+            <a:alphaOff val="0"/>
+          </a:schemeClr>
+        </a:solidFill>
+        <a:ln w="19050" cap="flat" cmpd="sng" algn="ctr">
+          <a:solidFill>
+            <a:schemeClr val="dk2">
+              <a:hueOff val="0"/>
+              <a:satOff val="0"/>
+              <a:lumOff val="0"/>
+              <a:alphaOff val="0"/>
+            </a:schemeClr>
+          </a:solidFill>
+          <a:prstDash val="solid"/>
+          <a:miter lim="800000"/>
+        </a:ln>
+        <a:effectLst/>
+      </dsp:spPr>
+      <dsp:style>
+        <a:lnRef idx="2">
+          <a:scrgbClr r="0" g="0" b="0"/>
+        </a:lnRef>
+        <a:fillRef idx="1">
+          <a:scrgbClr r="0" g="0" b="0"/>
+        </a:fillRef>
+        <a:effectRef idx="0">
+          <a:scrgbClr r="0" g="0" b="0"/>
+        </a:effectRef>
+        <a:fontRef idx="minor"/>
+      </dsp:style>
+      <dsp:txBody>
+        <a:bodyPr spcFirstLastPara="0" vert="horz" wrap="square" lIns="102870" tIns="102870" rIns="102870" bIns="102870" numCol="1" spcCol="1270" anchor="ctr" anchorCtr="0">
+          <a:noAutofit/>
+        </a:bodyPr>
+        <a:lstStyle/>
+        <a:p>
+          <a:pPr marL="0" lvl="0" indent="0" algn="ctr" defTabSz="1200150">
+            <a:lnSpc>
+              <a:spcPct val="90000"/>
+            </a:lnSpc>
+            <a:spcBef>
+              <a:spcPct val="0"/>
+            </a:spcBef>
+            <a:spcAft>
+              <a:spcPct val="35000"/>
+            </a:spcAft>
+            <a:buNone/>
+          </a:pPr>
+          <a:r>
+            <a:rPr lang="en-US" sz="2700" kern="1200"/>
+            <a:t>Test with additional time complexities</a:t>
+          </a:r>
+        </a:p>
+      </dsp:txBody>
+      <dsp:txXfrm>
+        <a:off x="7513791" y="886531"/>
+        <a:ext cx="2810360" cy="1744948"/>
+      </dsp:txXfrm>
+    </dsp:sp>
+  </dsp:spTree>
+</dsp:drawing>
+</file>
+
 <file path=ppt/diagrams/layout1.xml><?xml version="1.0" encoding="utf-8"?>
 <dgm:layoutDef xmlns:dgm="http://schemas.openxmlformats.org/drawingml/2006/diagram" xmlns:a="http://schemas.openxmlformats.org/drawingml/2006/main" uniqueId="urn:microsoft.com/office/officeart/2018/2/layout/IconVerticalSolidList">
   <dgm:title val="Icon Vertical Solid List"/>
@@ -6416,6 +6502,569 @@
 </dgm:layoutDef>
 </file>
 
+<file path=ppt/diagrams/layout3.xml><?xml version="1.0" encoding="utf-8"?>
+<dgm:layoutDef xmlns:dgm="http://schemas.openxmlformats.org/drawingml/2006/diagram" xmlns:a="http://schemas.openxmlformats.org/drawingml/2006/main" uniqueId="urn:microsoft.com/office/officeart/2005/8/layout/hierarchy1">
+  <dgm:title val=""/>
+  <dgm:desc val=""/>
+  <dgm:catLst>
+    <dgm:cat type="hierarchy" pri="2000"/>
+  </dgm:catLst>
+  <dgm:sampData>
+    <dgm:dataModel>
+      <dgm:ptLst>
+        <dgm:pt modelId="0" type="doc"/>
+        <dgm:pt modelId="1">
+          <dgm:prSet phldr="1"/>
+        </dgm:pt>
+        <dgm:pt modelId="2">
+          <dgm:prSet phldr="1"/>
+        </dgm:pt>
+        <dgm:pt modelId="21">
+          <dgm:prSet phldr="1"/>
+        </dgm:pt>
+        <dgm:pt modelId="22">
+          <dgm:prSet phldr="1"/>
+        </dgm:pt>
+        <dgm:pt modelId="3">
+          <dgm:prSet phldr="1"/>
+        </dgm:pt>
+        <dgm:pt modelId="31">
+          <dgm:prSet phldr="1"/>
+        </dgm:pt>
+      </dgm:ptLst>
+      <dgm:cxnLst>
+        <dgm:cxn modelId="4" srcId="0" destId="1" srcOrd="0" destOrd="0"/>
+        <dgm:cxn modelId="5" srcId="1" destId="2" srcOrd="0" destOrd="0"/>
+        <dgm:cxn modelId="6" srcId="1" destId="3" srcOrd="1" destOrd="0"/>
+        <dgm:cxn modelId="23" srcId="2" destId="21" srcOrd="0" destOrd="0"/>
+        <dgm:cxn modelId="24" srcId="2" destId="22" srcOrd="1" destOrd="0"/>
+        <dgm:cxn modelId="33" srcId="3" destId="31" srcOrd="0" destOrd="0"/>
+      </dgm:cxnLst>
+      <dgm:bg/>
+      <dgm:whole/>
+    </dgm:dataModel>
+  </dgm:sampData>
+  <dgm:styleData>
+    <dgm:dataModel>
+      <dgm:ptLst>
+        <dgm:pt modelId="0" type="doc"/>
+        <dgm:pt modelId="1"/>
+        <dgm:pt modelId="11"/>
+        <dgm:pt modelId="12"/>
+      </dgm:ptLst>
+      <dgm:cxnLst>
+        <dgm:cxn modelId="2" srcId="0" destId="1" srcOrd="0" destOrd="0"/>
+        <dgm:cxn modelId="13" srcId="1" destId="11" srcOrd="0" destOrd="0"/>
+        <dgm:cxn modelId="14" srcId="1" destId="12" srcOrd="1" destOrd="0"/>
+      </dgm:cxnLst>
+      <dgm:bg/>
+      <dgm:whole/>
+    </dgm:dataModel>
+  </dgm:styleData>
+  <dgm:clrData>
+    <dgm:dataModel>
+      <dgm:ptLst>
+        <dgm:pt modelId="0" type="doc"/>
+        <dgm:pt modelId="1"/>
+        <dgm:pt modelId="2"/>
+        <dgm:pt modelId="21"/>
+        <dgm:pt modelId="211"/>
+        <dgm:pt modelId="3"/>
+        <dgm:pt modelId="31"/>
+        <dgm:pt modelId="311"/>
+      </dgm:ptLst>
+      <dgm:cxnLst>
+        <dgm:cxn modelId="4" srcId="0" destId="1" srcOrd="0" destOrd="0"/>
+        <dgm:cxn modelId="5" srcId="1" destId="2" srcOrd="0" destOrd="0"/>
+        <dgm:cxn modelId="6" srcId="1" destId="3" srcOrd="1" destOrd="0"/>
+        <dgm:cxn modelId="23" srcId="2" destId="21" srcOrd="0" destOrd="0"/>
+        <dgm:cxn modelId="24" srcId="21" destId="211" srcOrd="0" destOrd="0"/>
+        <dgm:cxn modelId="33" srcId="3" destId="31" srcOrd="0" destOrd="0"/>
+        <dgm:cxn modelId="34" srcId="31" destId="311" srcOrd="0" destOrd="0"/>
+      </dgm:cxnLst>
+      <dgm:bg/>
+      <dgm:whole/>
+    </dgm:dataModel>
+  </dgm:clrData>
+  <dgm:layoutNode name="hierChild1">
+    <dgm:varLst>
+      <dgm:chPref val="1"/>
+      <dgm:dir/>
+      <dgm:animOne val="branch"/>
+      <dgm:animLvl val="lvl"/>
+      <dgm:resizeHandles/>
+    </dgm:varLst>
+    <dgm:choose name="Name0">
+      <dgm:if name="Name1" func="var" arg="dir" op="equ" val="norm">
+        <dgm:alg type="hierChild">
+          <dgm:param type="linDir" val="fromL"/>
+        </dgm:alg>
+      </dgm:if>
+      <dgm:else name="Name2">
+        <dgm:alg type="hierChild">
+          <dgm:param type="linDir" val="fromR"/>
+        </dgm:alg>
+      </dgm:else>
+    </dgm:choose>
+    <dgm:shape xmlns:r="http://schemas.openxmlformats.org/officeDocument/2006/relationships" r:blip="">
+      <dgm:adjLst/>
+    </dgm:shape>
+    <dgm:presOf/>
+    <dgm:constrLst>
+      <dgm:constr type="primFontSz" for="des" ptType="node" op="equ" val="65"/>
+      <dgm:constr type="w" for="des" forName="composite" refType="w"/>
+      <dgm:constr type="h" for="des" forName="composite" refType="w" refFor="des" refForName="composite" fact="0.667"/>
+      <dgm:constr type="w" for="des" forName="composite2" refType="w" refFor="des" refForName="composite"/>
+      <dgm:constr type="h" for="des" forName="composite2" refType="h" refFor="des" refForName="composite"/>
+      <dgm:constr type="w" for="des" forName="composite3" refType="w" refFor="des" refForName="composite"/>
+      <dgm:constr type="h" for="des" forName="composite3" refType="h" refFor="des" refForName="composite"/>
+      <dgm:constr type="w" for="des" forName="composite4" refType="w" refFor="des" refForName="composite"/>
+      <dgm:constr type="h" for="des" forName="composite4" refType="h" refFor="des" refForName="composite"/>
+      <dgm:constr type="w" for="des" forName="composite5" refType="w" refFor="des" refForName="composite"/>
+      <dgm:constr type="h" for="des" forName="composite5" refType="h" refFor="des" refForName="composite"/>
+      <dgm:constr type="sibSp" refType="w" refFor="des" refForName="composite" fact="0.1"/>
+      <dgm:constr type="sibSp" for="des" forName="hierChild2" refType="sibSp"/>
+      <dgm:constr type="sibSp" for="des" forName="hierChild3" refType="sibSp"/>
+      <dgm:constr type="sibSp" for="des" forName="hierChild4" refType="sibSp"/>
+      <dgm:constr type="sibSp" for="des" forName="hierChild5" refType="sibSp"/>
+      <dgm:constr type="sibSp" for="des" forName="hierChild6" refType="sibSp"/>
+      <dgm:constr type="sp" for="des" forName="hierRoot1" refType="h" refFor="des" refForName="composite" fact="0.25"/>
+      <dgm:constr type="sp" for="des" forName="hierRoot2" refType="sp" refFor="des" refForName="hierRoot1"/>
+      <dgm:constr type="sp" for="des" forName="hierRoot3" refType="sp" refFor="des" refForName="hierRoot1"/>
+      <dgm:constr type="sp" for="des" forName="hierRoot4" refType="sp" refFor="des" refForName="hierRoot1"/>
+      <dgm:constr type="sp" for="des" forName="hierRoot5" refType="sp" refFor="des" refForName="hierRoot1"/>
+    </dgm:constrLst>
+    <dgm:ruleLst/>
+    <dgm:forEach name="Name3" axis="ch">
+      <dgm:forEach name="Name4" axis="self" ptType="node">
+        <dgm:layoutNode name="hierRoot1">
+          <dgm:alg type="hierRoot"/>
+          <dgm:shape xmlns:r="http://schemas.openxmlformats.org/officeDocument/2006/relationships" r:blip="">
+            <dgm:adjLst/>
+          </dgm:shape>
+          <dgm:presOf/>
+          <dgm:constrLst>
+            <dgm:constr type="bendDist" for="des" ptType="parTrans" refType="sp" fact="0.5"/>
+          </dgm:constrLst>
+          <dgm:ruleLst/>
+          <dgm:layoutNode name="composite">
+            <dgm:alg type="composite"/>
+            <dgm:shape xmlns:r="http://schemas.openxmlformats.org/officeDocument/2006/relationships" r:blip="">
+              <dgm:adjLst/>
+            </dgm:shape>
+            <dgm:presOf/>
+            <dgm:constrLst>
+              <dgm:constr type="w" for="ch" forName="background" refType="w" fact="0.9"/>
+              <dgm:constr type="h" for="ch" forName="background" refType="w" refFor="ch" refForName="background" fact="0.635"/>
+              <dgm:constr type="t" for="ch" forName="background"/>
+              <dgm:constr type="l" for="ch" forName="background"/>
+              <dgm:constr type="w" for="ch" forName="text" refType="w" fact="0.9"/>
+              <dgm:constr type="h" for="ch" forName="text" refType="w" refFor="ch" refForName="text" fact="0.635"/>
+              <dgm:constr type="t" for="ch" forName="text" refType="w" fact="0.095"/>
+              <dgm:constr type="l" for="ch" forName="text" refType="w" fact="0.1"/>
+            </dgm:constrLst>
+            <dgm:ruleLst/>
+            <dgm:layoutNode name="background" styleLbl="node0" moveWith="text">
+              <dgm:alg type="sp"/>
+              <dgm:shape xmlns:r="http://schemas.openxmlformats.org/officeDocument/2006/relationships" type="roundRect" r:blip="">
+                <dgm:adjLst>
+                  <dgm:adj idx="1" val="0.1"/>
+                </dgm:adjLst>
+              </dgm:shape>
+              <dgm:presOf/>
+              <dgm:constrLst/>
+              <dgm:ruleLst/>
+            </dgm:layoutNode>
+            <dgm:layoutNode name="text" styleLbl="fgAcc0">
+              <dgm:varLst>
+                <dgm:chPref val="3"/>
+              </dgm:varLst>
+              <dgm:alg type="tx"/>
+              <dgm:shape xmlns:r="http://schemas.openxmlformats.org/officeDocument/2006/relationships" type="roundRect" r:blip="">
+                <dgm:adjLst>
+                  <dgm:adj idx="1" val="0.1"/>
+                </dgm:adjLst>
+              </dgm:shape>
+              <dgm:presOf axis="self"/>
+              <dgm:constrLst>
+                <dgm:constr type="tMarg" refType="primFontSz" fact="0.3"/>
+                <dgm:constr type="bMarg" refType="primFontSz" fact="0.3"/>
+                <dgm:constr type="lMarg" refType="primFontSz" fact="0.3"/>
+                <dgm:constr type="rMarg" refType="primFontSz" fact="0.3"/>
+              </dgm:constrLst>
+              <dgm:ruleLst>
+                <dgm:rule type="primFontSz" val="5" fact="NaN" max="NaN"/>
+              </dgm:ruleLst>
+            </dgm:layoutNode>
+          </dgm:layoutNode>
+          <dgm:layoutNode name="hierChild2">
+            <dgm:choose name="Name5">
+              <dgm:if name="Name6" func="var" arg="dir" op="equ" val="norm">
+                <dgm:alg type="hierChild">
+                  <dgm:param type="linDir" val="fromL"/>
+                </dgm:alg>
+              </dgm:if>
+              <dgm:else name="Name7">
+                <dgm:alg type="hierChild">
+                  <dgm:param type="linDir" val="fromR"/>
+                </dgm:alg>
+              </dgm:else>
+            </dgm:choose>
+            <dgm:shape xmlns:r="http://schemas.openxmlformats.org/officeDocument/2006/relationships" r:blip="">
+              <dgm:adjLst/>
+            </dgm:shape>
+            <dgm:presOf/>
+            <dgm:constrLst/>
+            <dgm:ruleLst/>
+            <dgm:forEach name="Name8" axis="ch">
+              <dgm:forEach name="Name9" axis="self" ptType="parTrans" cnt="1">
+                <dgm:layoutNode name="Name10">
+                  <dgm:alg type="conn">
+                    <dgm:param type="dim" val="1D"/>
+                    <dgm:param type="endSty" val="noArr"/>
+                    <dgm:param type="connRout" val="bend"/>
+                    <dgm:param type="bendPt" val="end"/>
+                    <dgm:param type="begPts" val="bCtr"/>
+                    <dgm:param type="endPts" val="tCtr"/>
+                    <dgm:param type="srcNode" val="background"/>
+                    <dgm:param type="dstNode" val="background2"/>
+                  </dgm:alg>
+                  <dgm:shape xmlns:r="http://schemas.openxmlformats.org/officeDocument/2006/relationships" type="conn" r:blip="" zOrderOff="-999">
+                    <dgm:adjLst/>
+                  </dgm:shape>
+                  <dgm:presOf axis="self"/>
+                  <dgm:constrLst>
+                    <dgm:constr type="begPad"/>
+                    <dgm:constr type="endPad"/>
+                  </dgm:constrLst>
+                  <dgm:ruleLst/>
+                </dgm:layoutNode>
+              </dgm:forEach>
+              <dgm:forEach name="Name11" axis="self" ptType="node">
+                <dgm:layoutNode name="hierRoot2">
+                  <dgm:alg type="hierRoot"/>
+                  <dgm:shape xmlns:r="http://schemas.openxmlformats.org/officeDocument/2006/relationships" r:blip="">
+                    <dgm:adjLst/>
+                  </dgm:shape>
+                  <dgm:presOf/>
+                  <dgm:constrLst>
+                    <dgm:constr type="bendDist" for="des" ptType="parTrans" refType="sp" fact="0.5"/>
+                  </dgm:constrLst>
+                  <dgm:ruleLst/>
+                  <dgm:layoutNode name="composite2">
+                    <dgm:alg type="composite"/>
+                    <dgm:shape xmlns:r="http://schemas.openxmlformats.org/officeDocument/2006/relationships" r:blip="">
+                      <dgm:adjLst/>
+                    </dgm:shape>
+                    <dgm:presOf/>
+                    <dgm:constrLst>
+                      <dgm:constr type="w" for="ch" forName="background2" refType="w" fact="0.9"/>
+                      <dgm:constr type="h" for="ch" forName="background2" refType="w" refFor="ch" refForName="background2" fact="0.635"/>
+                      <dgm:constr type="t" for="ch" forName="background2"/>
+                      <dgm:constr type="l" for="ch" forName="background2"/>
+                      <dgm:constr type="w" for="ch" forName="text2" refType="w" fact="0.9"/>
+                      <dgm:constr type="h" for="ch" forName="text2" refType="w" refFor="ch" refForName="text2" fact="0.635"/>
+                      <dgm:constr type="t" for="ch" forName="text2" refType="w" fact="0.095"/>
+                      <dgm:constr type="l" for="ch" forName="text2" refType="w" fact="0.1"/>
+                    </dgm:constrLst>
+                    <dgm:ruleLst/>
+                    <dgm:layoutNode name="background2" moveWith="text2">
+                      <dgm:alg type="sp"/>
+                      <dgm:shape xmlns:r="http://schemas.openxmlformats.org/officeDocument/2006/relationships" type="roundRect" r:blip="">
+                        <dgm:adjLst>
+                          <dgm:adj idx="1" val="0.1"/>
+                        </dgm:adjLst>
+                      </dgm:shape>
+                      <dgm:presOf/>
+                      <dgm:constrLst/>
+                      <dgm:ruleLst/>
+                    </dgm:layoutNode>
+                    <dgm:layoutNode name="text2" styleLbl="fgAcc2">
+                      <dgm:varLst>
+                        <dgm:chPref val="3"/>
+                      </dgm:varLst>
+                      <dgm:alg type="tx"/>
+                      <dgm:shape xmlns:r="http://schemas.openxmlformats.org/officeDocument/2006/relationships" type="roundRect" r:blip="">
+                        <dgm:adjLst>
+                          <dgm:adj idx="1" val="0.1"/>
+                        </dgm:adjLst>
+                      </dgm:shape>
+                      <dgm:presOf axis="self"/>
+                      <dgm:constrLst>
+                        <dgm:constr type="tMarg" refType="primFontSz" fact="0.3"/>
+                        <dgm:constr type="bMarg" refType="primFontSz" fact="0.3"/>
+                        <dgm:constr type="lMarg" refType="primFontSz" fact="0.3"/>
+                        <dgm:constr type="rMarg" refType="primFontSz" fact="0.3"/>
+                      </dgm:constrLst>
+                      <dgm:ruleLst>
+                        <dgm:rule type="primFontSz" val="5" fact="NaN" max="NaN"/>
+                      </dgm:ruleLst>
+                    </dgm:layoutNode>
+                  </dgm:layoutNode>
+                  <dgm:layoutNode name="hierChild3">
+                    <dgm:choose name="Name12">
+                      <dgm:if name="Name13" func="var" arg="dir" op="equ" val="norm">
+                        <dgm:alg type="hierChild">
+                          <dgm:param type="linDir" val="fromL"/>
+                        </dgm:alg>
+                      </dgm:if>
+                      <dgm:else name="Name14">
+                        <dgm:alg type="hierChild">
+                          <dgm:param type="linDir" val="fromR"/>
+                        </dgm:alg>
+                      </dgm:else>
+                    </dgm:choose>
+                    <dgm:shape xmlns:r="http://schemas.openxmlformats.org/officeDocument/2006/relationships" r:blip="">
+                      <dgm:adjLst/>
+                    </dgm:shape>
+                    <dgm:presOf/>
+                    <dgm:constrLst/>
+                    <dgm:ruleLst/>
+                    <dgm:forEach name="Name15" axis="ch">
+                      <dgm:forEach name="Name16" axis="self" ptType="parTrans" cnt="1">
+                        <dgm:layoutNode name="Name17">
+                          <dgm:alg type="conn">
+                            <dgm:param type="dim" val="1D"/>
+                            <dgm:param type="endSty" val="noArr"/>
+                            <dgm:param type="connRout" val="bend"/>
+                            <dgm:param type="bendPt" val="end"/>
+                            <dgm:param type="begPts" val="bCtr"/>
+                            <dgm:param type="endPts" val="tCtr"/>
+                            <dgm:param type="srcNode" val="background2"/>
+                            <dgm:param type="dstNode" val="background3"/>
+                          </dgm:alg>
+                          <dgm:shape xmlns:r="http://schemas.openxmlformats.org/officeDocument/2006/relationships" type="conn" r:blip="" zOrderOff="-999">
+                            <dgm:adjLst/>
+                          </dgm:shape>
+                          <dgm:presOf axis="self"/>
+                          <dgm:constrLst>
+                            <dgm:constr type="begPad"/>
+                            <dgm:constr type="endPad"/>
+                          </dgm:constrLst>
+                          <dgm:ruleLst/>
+                        </dgm:layoutNode>
+                      </dgm:forEach>
+                      <dgm:forEach name="Name18" axis="self" ptType="node">
+                        <dgm:layoutNode name="hierRoot3">
+                          <dgm:alg type="hierRoot"/>
+                          <dgm:shape xmlns:r="http://schemas.openxmlformats.org/officeDocument/2006/relationships" r:blip="">
+                            <dgm:adjLst/>
+                          </dgm:shape>
+                          <dgm:presOf/>
+                          <dgm:constrLst>
+                            <dgm:constr type="bendDist" for="des" ptType="parTrans" refType="sp" fact="0.5"/>
+                          </dgm:constrLst>
+                          <dgm:ruleLst/>
+                          <dgm:layoutNode name="composite3">
+                            <dgm:alg type="composite"/>
+                            <dgm:shape xmlns:r="http://schemas.openxmlformats.org/officeDocument/2006/relationships" r:blip="">
+                              <dgm:adjLst/>
+                            </dgm:shape>
+                            <dgm:presOf/>
+                            <dgm:constrLst>
+                              <dgm:constr type="w" for="ch" forName="background3" refType="w" fact="0.9"/>
+                              <dgm:constr type="h" for="ch" forName="background3" refType="w" refFor="ch" refForName="background3" fact="0.635"/>
+                              <dgm:constr type="t" for="ch" forName="background3"/>
+                              <dgm:constr type="l" for="ch" forName="background3"/>
+                              <dgm:constr type="w" for="ch" forName="text3" refType="w" fact="0.9"/>
+                              <dgm:constr type="h" for="ch" forName="text3" refType="w" refFor="ch" refForName="text3" fact="0.635"/>
+                              <dgm:constr type="t" for="ch" forName="text3" refType="w" fact="0.095"/>
+                              <dgm:constr type="l" for="ch" forName="text3" refType="w" fact="0.1"/>
+                            </dgm:constrLst>
+                            <dgm:ruleLst/>
+                            <dgm:layoutNode name="background3" moveWith="text3">
+                              <dgm:alg type="sp"/>
+                              <dgm:shape xmlns:r="http://schemas.openxmlformats.org/officeDocument/2006/relationships" type="roundRect" r:blip="">
+                                <dgm:adjLst>
+                                  <dgm:adj idx="1" val="0.1"/>
+                                </dgm:adjLst>
+                              </dgm:shape>
+                              <dgm:presOf/>
+                              <dgm:constrLst/>
+                              <dgm:ruleLst/>
+                            </dgm:layoutNode>
+                            <dgm:layoutNode name="text3" styleLbl="fgAcc3">
+                              <dgm:varLst>
+                                <dgm:chPref val="3"/>
+                              </dgm:varLst>
+                              <dgm:alg type="tx"/>
+                              <dgm:shape xmlns:r="http://schemas.openxmlformats.org/officeDocument/2006/relationships" type="roundRect" r:blip="">
+                                <dgm:adjLst>
+                                  <dgm:adj idx="1" val="0.1"/>
+                                </dgm:adjLst>
+                              </dgm:shape>
+                              <dgm:presOf axis="self"/>
+                              <dgm:constrLst>
+                                <dgm:constr type="tMarg" refType="primFontSz" fact="0.3"/>
+                                <dgm:constr type="bMarg" refType="primFontSz" fact="0.3"/>
+                                <dgm:constr type="lMarg" refType="primFontSz" fact="0.3"/>
+                                <dgm:constr type="rMarg" refType="primFontSz" fact="0.3"/>
+                              </dgm:constrLst>
+                              <dgm:ruleLst>
+                                <dgm:rule type="primFontSz" val="5" fact="NaN" max="NaN"/>
+                              </dgm:ruleLst>
+                            </dgm:layoutNode>
+                          </dgm:layoutNode>
+                          <dgm:layoutNode name="hierChild4">
+                            <dgm:choose name="Name19">
+                              <dgm:if name="Name20" func="var" arg="dir" op="equ" val="norm">
+                                <dgm:alg type="hierChild">
+                                  <dgm:param type="linDir" val="fromL"/>
+                                </dgm:alg>
+                              </dgm:if>
+                              <dgm:else name="Name21">
+                                <dgm:alg type="hierChild">
+                                  <dgm:param type="linDir" val="fromR"/>
+                                </dgm:alg>
+                              </dgm:else>
+                            </dgm:choose>
+                            <dgm:shape xmlns:r="http://schemas.openxmlformats.org/officeDocument/2006/relationships" r:blip="">
+                              <dgm:adjLst/>
+                            </dgm:shape>
+                            <dgm:presOf/>
+                            <dgm:constrLst/>
+                            <dgm:ruleLst/>
+                            <dgm:forEach name="repeat" axis="ch">
+                              <dgm:forEach name="Name22" axis="self" ptType="parTrans" cnt="1">
+                                <dgm:layoutNode name="Name23">
+                                  <dgm:choose name="Name24">
+                                    <dgm:if name="Name25" axis="self" func="depth" op="lte" val="4">
+                                      <dgm:alg type="conn">
+                                        <dgm:param type="dim" val="1D"/>
+                                        <dgm:param type="endSty" val="noArr"/>
+                                        <dgm:param type="connRout" val="bend"/>
+                                        <dgm:param type="bendPt" val="end"/>
+                                        <dgm:param type="begPts" val="bCtr"/>
+                                        <dgm:param type="endPts" val="tCtr"/>
+                                        <dgm:param type="srcNode" val="background3"/>
+                                        <dgm:param type="dstNode" val="background4"/>
+                                      </dgm:alg>
+                                    </dgm:if>
+                                    <dgm:else name="Name26">
+                                      <dgm:alg type="conn">
+                                        <dgm:param type="dim" val="1D"/>
+                                        <dgm:param type="endSty" val="noArr"/>
+                                        <dgm:param type="connRout" val="bend"/>
+                                        <dgm:param type="bendPt" val="end"/>
+                                        <dgm:param type="begPts" val="bCtr"/>
+                                        <dgm:param type="endPts" val="tCtr"/>
+                                        <dgm:param type="srcNode" val="background4"/>
+                                        <dgm:param type="dstNode" val="background4"/>
+                                      </dgm:alg>
+                                    </dgm:else>
+                                  </dgm:choose>
+                                  <dgm:shape xmlns:r="http://schemas.openxmlformats.org/officeDocument/2006/relationships" type="conn" r:blip="" zOrderOff="-999">
+                                    <dgm:adjLst/>
+                                  </dgm:shape>
+                                  <dgm:presOf axis="self"/>
+                                  <dgm:constrLst>
+                                    <dgm:constr type="begPad"/>
+                                    <dgm:constr type="endPad"/>
+                                  </dgm:constrLst>
+                                  <dgm:ruleLst/>
+                                </dgm:layoutNode>
+                              </dgm:forEach>
+                              <dgm:forEach name="Name27" axis="self" ptType="node">
+                                <dgm:layoutNode name="hierRoot4">
+                                  <dgm:alg type="hierRoot"/>
+                                  <dgm:shape xmlns:r="http://schemas.openxmlformats.org/officeDocument/2006/relationships" r:blip="">
+                                    <dgm:adjLst/>
+                                  </dgm:shape>
+                                  <dgm:presOf/>
+                                  <dgm:constrLst>
+                                    <dgm:constr type="bendDist" for="des" ptType="parTrans" refType="sp" fact="0.5"/>
+                                  </dgm:constrLst>
+                                  <dgm:ruleLst/>
+                                  <dgm:layoutNode name="composite4">
+                                    <dgm:alg type="composite"/>
+                                    <dgm:shape xmlns:r="http://schemas.openxmlformats.org/officeDocument/2006/relationships" r:blip="">
+                                      <dgm:adjLst/>
+                                    </dgm:shape>
+                                    <dgm:presOf/>
+                                    <dgm:constrLst>
+                                      <dgm:constr type="w" for="ch" forName="background4" refType="w" fact="0.9"/>
+                                      <dgm:constr type="h" for="ch" forName="background4" refType="w" refFor="ch" refForName="background4" fact="0.635"/>
+                                      <dgm:constr type="t" for="ch" forName="background4"/>
+                                      <dgm:constr type="l" for="ch" forName="background4"/>
+                                      <dgm:constr type="w" for="ch" forName="text4" refType="w" fact="0.9"/>
+                                      <dgm:constr type="h" for="ch" forName="text4" refType="w" refFor="ch" refForName="text4" fact="0.635"/>
+                                      <dgm:constr type="t" for="ch" forName="text4" refType="w" fact="0.095"/>
+                                      <dgm:constr type="l" for="ch" forName="text4" refType="w" fact="0.1"/>
+                                    </dgm:constrLst>
+                                    <dgm:ruleLst/>
+                                    <dgm:layoutNode name="background4" moveWith="text4">
+                                      <dgm:alg type="sp"/>
+                                      <dgm:shape xmlns:r="http://schemas.openxmlformats.org/officeDocument/2006/relationships" type="roundRect" r:blip="">
+                                        <dgm:adjLst>
+                                          <dgm:adj idx="1" val="0.1"/>
+                                        </dgm:adjLst>
+                                      </dgm:shape>
+                                      <dgm:presOf/>
+                                      <dgm:constrLst/>
+                                      <dgm:ruleLst/>
+                                    </dgm:layoutNode>
+                                    <dgm:layoutNode name="text4" styleLbl="fgAcc4">
+                                      <dgm:varLst>
+                                        <dgm:chPref val="3"/>
+                                      </dgm:varLst>
+                                      <dgm:alg type="tx"/>
+                                      <dgm:shape xmlns:r="http://schemas.openxmlformats.org/officeDocument/2006/relationships" type="roundRect" r:blip="">
+                                        <dgm:adjLst>
+                                          <dgm:adj idx="1" val="0.1"/>
+                                        </dgm:adjLst>
+                                      </dgm:shape>
+                                      <dgm:presOf axis="self"/>
+                                      <dgm:constrLst>
+                                        <dgm:constr type="tMarg" refType="primFontSz" fact="0.3"/>
+                                        <dgm:constr type="bMarg" refType="primFontSz" fact="0.3"/>
+                                        <dgm:constr type="lMarg" refType="primFontSz" fact="0.3"/>
+                                        <dgm:constr type="rMarg" refType="primFontSz" fact="0.3"/>
+                                      </dgm:constrLst>
+                                      <dgm:ruleLst>
+                                        <dgm:rule type="primFontSz" val="5" fact="NaN" max="NaN"/>
+                                      </dgm:ruleLst>
+                                    </dgm:layoutNode>
+                                  </dgm:layoutNode>
+                                  <dgm:layoutNode name="hierChild5">
+                                    <dgm:choose name="Name28">
+                                      <dgm:if name="Name29" func="var" arg="dir" op="equ" val="norm">
+                                        <dgm:alg type="hierChild">
+                                          <dgm:param type="linDir" val="fromL"/>
+                                        </dgm:alg>
+                                      </dgm:if>
+                                      <dgm:else name="Name30">
+                                        <dgm:alg type="hierChild">
+                                          <dgm:param type="linDir" val="fromR"/>
+                                        </dgm:alg>
+                                      </dgm:else>
+                                    </dgm:choose>
+                                    <dgm:shape xmlns:r="http://schemas.openxmlformats.org/officeDocument/2006/relationships" r:blip="">
+                                      <dgm:adjLst/>
+                                    </dgm:shape>
+                                    <dgm:presOf/>
+                                    <dgm:constrLst/>
+                                    <dgm:ruleLst/>
+                                    <dgm:forEach name="Name31" ref="repeat"/>
+                                  </dgm:layoutNode>
+                                </dgm:layoutNode>
+                              </dgm:forEach>
+                            </dgm:forEach>
+                          </dgm:layoutNode>
+                        </dgm:layoutNode>
+                      </dgm:forEach>
+                    </dgm:forEach>
+                  </dgm:layoutNode>
+                </dgm:layoutNode>
+              </dgm:forEach>
+            </dgm:forEach>
+          </dgm:layoutNode>
+        </dgm:layoutNode>
+      </dgm:forEach>
+    </dgm:forEach>
+  </dgm:layoutNode>
+</dgm:layoutDef>
+</file>
+
 <file path=ppt/diagrams/quickStyle1.xml><?xml version="1.0" encoding="utf-8"?>
 <dgm:styleDef xmlns:dgm="http://schemas.openxmlformats.org/drawingml/2006/diagram" xmlns:a="http://schemas.openxmlformats.org/drawingml/2006/main" uniqueId="urn:microsoft.com/office/officeart/2005/8/quickstyle/simple1">
   <dgm:title val=""/>
@@ -8456,6 +9105,1040 @@
         <a:scrgbClr r="0" g="0" b="0"/>
       </a:fillRef>
       <a:effectRef idx="2">
+        <a:scrgbClr r="0" g="0" b="0"/>
+      </a:effectRef>
+      <a:fontRef idx="minor"/>
+    </dgm:style>
+  </dgm:styleLbl>
+  <dgm:styleLbl name="revTx">
+    <dgm:scene3d>
+      <a:camera prst="orthographicFront"/>
+      <a:lightRig rig="threePt" dir="t"/>
+    </dgm:scene3d>
+    <dgm:sp3d/>
+    <dgm:txPr/>
+    <dgm:style>
+      <a:lnRef idx="0">
+        <a:scrgbClr r="0" g="0" b="0"/>
+      </a:lnRef>
+      <a:fillRef idx="0">
+        <a:scrgbClr r="0" g="0" b="0"/>
+      </a:fillRef>
+      <a:effectRef idx="0">
+        <a:scrgbClr r="0" g="0" b="0"/>
+      </a:effectRef>
+      <a:fontRef idx="minor"/>
+    </dgm:style>
+  </dgm:styleLbl>
+</dgm:styleDef>
+</file>
+
+<file path=ppt/diagrams/quickStyle3.xml><?xml version="1.0" encoding="utf-8"?>
+<dgm:styleDef xmlns:dgm="http://schemas.openxmlformats.org/drawingml/2006/diagram" xmlns:a="http://schemas.openxmlformats.org/drawingml/2006/main" uniqueId="urn:microsoft.com/office/officeart/2005/8/quickstyle/simple1">
+  <dgm:title val=""/>
+  <dgm:desc val=""/>
+  <dgm:catLst>
+    <dgm:cat type="simple" pri="10100"/>
+  </dgm:catLst>
+  <dgm:scene3d>
+    <a:camera prst="orthographicFront"/>
+    <a:lightRig rig="threePt" dir="t"/>
+  </dgm:scene3d>
+  <dgm:styleLbl name="node0">
+    <dgm:scene3d>
+      <a:camera prst="orthographicFront"/>
+      <a:lightRig rig="threePt" dir="t"/>
+    </dgm:scene3d>
+    <dgm:sp3d/>
+    <dgm:txPr/>
+    <dgm:style>
+      <a:lnRef idx="2">
+        <a:scrgbClr r="0" g="0" b="0"/>
+      </a:lnRef>
+      <a:fillRef idx="1">
+        <a:scrgbClr r="0" g="0" b="0"/>
+      </a:fillRef>
+      <a:effectRef idx="0">
+        <a:scrgbClr r="0" g="0" b="0"/>
+      </a:effectRef>
+      <a:fontRef idx="minor">
+        <a:schemeClr val="lt1"/>
+      </a:fontRef>
+    </dgm:style>
+  </dgm:styleLbl>
+  <dgm:styleLbl name="lnNode1">
+    <dgm:scene3d>
+      <a:camera prst="orthographicFront"/>
+      <a:lightRig rig="threePt" dir="t"/>
+    </dgm:scene3d>
+    <dgm:sp3d/>
+    <dgm:txPr/>
+    <dgm:style>
+      <a:lnRef idx="2">
+        <a:scrgbClr r="0" g="0" b="0"/>
+      </a:lnRef>
+      <a:fillRef idx="1">
+        <a:scrgbClr r="0" g="0" b="0"/>
+      </a:fillRef>
+      <a:effectRef idx="0">
+        <a:scrgbClr r="0" g="0" b="0"/>
+      </a:effectRef>
+      <a:fontRef idx="minor">
+        <a:schemeClr val="lt1"/>
+      </a:fontRef>
+    </dgm:style>
+  </dgm:styleLbl>
+  <dgm:styleLbl name="vennNode1">
+    <dgm:scene3d>
+      <a:camera prst="orthographicFront"/>
+      <a:lightRig rig="threePt" dir="t"/>
+    </dgm:scene3d>
+    <dgm:sp3d/>
+    <dgm:txPr/>
+    <dgm:style>
+      <a:lnRef idx="2">
+        <a:scrgbClr r="0" g="0" b="0"/>
+      </a:lnRef>
+      <a:fillRef idx="1">
+        <a:scrgbClr r="0" g="0" b="0"/>
+      </a:fillRef>
+      <a:effectRef idx="0">
+        <a:scrgbClr r="0" g="0" b="0"/>
+      </a:effectRef>
+      <a:fontRef idx="minor">
+        <a:schemeClr val="tx1"/>
+      </a:fontRef>
+    </dgm:style>
+  </dgm:styleLbl>
+  <dgm:styleLbl name="alignNode1">
+    <dgm:scene3d>
+      <a:camera prst="orthographicFront"/>
+      <a:lightRig rig="threePt" dir="t"/>
+    </dgm:scene3d>
+    <dgm:sp3d/>
+    <dgm:txPr/>
+    <dgm:style>
+      <a:lnRef idx="2">
+        <a:scrgbClr r="0" g="0" b="0"/>
+      </a:lnRef>
+      <a:fillRef idx="1">
+        <a:scrgbClr r="0" g="0" b="0"/>
+      </a:fillRef>
+      <a:effectRef idx="0">
+        <a:scrgbClr r="0" g="0" b="0"/>
+      </a:effectRef>
+      <a:fontRef idx="minor">
+        <a:schemeClr val="lt1"/>
+      </a:fontRef>
+    </dgm:style>
+  </dgm:styleLbl>
+  <dgm:styleLbl name="node1">
+    <dgm:scene3d>
+      <a:camera prst="orthographicFront"/>
+      <a:lightRig rig="threePt" dir="t"/>
+    </dgm:scene3d>
+    <dgm:sp3d/>
+    <dgm:txPr/>
+    <dgm:style>
+      <a:lnRef idx="2">
+        <a:scrgbClr r="0" g="0" b="0"/>
+      </a:lnRef>
+      <a:fillRef idx="1">
+        <a:scrgbClr r="0" g="0" b="0"/>
+      </a:fillRef>
+      <a:effectRef idx="0">
+        <a:scrgbClr r="0" g="0" b="0"/>
+      </a:effectRef>
+      <a:fontRef idx="minor">
+        <a:schemeClr val="lt1"/>
+      </a:fontRef>
+    </dgm:style>
+  </dgm:styleLbl>
+  <dgm:styleLbl name="node2">
+    <dgm:scene3d>
+      <a:camera prst="orthographicFront"/>
+      <a:lightRig rig="threePt" dir="t"/>
+    </dgm:scene3d>
+    <dgm:sp3d/>
+    <dgm:txPr/>
+    <dgm:style>
+      <a:lnRef idx="2">
+        <a:scrgbClr r="0" g="0" b="0"/>
+      </a:lnRef>
+      <a:fillRef idx="1">
+        <a:scrgbClr r="0" g="0" b="0"/>
+      </a:fillRef>
+      <a:effectRef idx="0">
+        <a:scrgbClr r="0" g="0" b="0"/>
+      </a:effectRef>
+      <a:fontRef idx="minor">
+        <a:schemeClr val="lt1"/>
+      </a:fontRef>
+    </dgm:style>
+  </dgm:styleLbl>
+  <dgm:styleLbl name="node3">
+    <dgm:scene3d>
+      <a:camera prst="orthographicFront"/>
+      <a:lightRig rig="threePt" dir="t"/>
+    </dgm:scene3d>
+    <dgm:sp3d/>
+    <dgm:txPr/>
+    <dgm:style>
+      <a:lnRef idx="2">
+        <a:scrgbClr r="0" g="0" b="0"/>
+      </a:lnRef>
+      <a:fillRef idx="1">
+        <a:scrgbClr r="0" g="0" b="0"/>
+      </a:fillRef>
+      <a:effectRef idx="0">
+        <a:scrgbClr r="0" g="0" b="0"/>
+      </a:effectRef>
+      <a:fontRef idx="minor">
+        <a:schemeClr val="lt1"/>
+      </a:fontRef>
+    </dgm:style>
+  </dgm:styleLbl>
+  <dgm:styleLbl name="node4">
+    <dgm:scene3d>
+      <a:camera prst="orthographicFront"/>
+      <a:lightRig rig="threePt" dir="t"/>
+    </dgm:scene3d>
+    <dgm:sp3d/>
+    <dgm:txPr/>
+    <dgm:style>
+      <a:lnRef idx="2">
+        <a:scrgbClr r="0" g="0" b="0"/>
+      </a:lnRef>
+      <a:fillRef idx="1">
+        <a:scrgbClr r="0" g="0" b="0"/>
+      </a:fillRef>
+      <a:effectRef idx="0">
+        <a:scrgbClr r="0" g="0" b="0"/>
+      </a:effectRef>
+      <a:fontRef idx="minor">
+        <a:schemeClr val="lt1"/>
+      </a:fontRef>
+    </dgm:style>
+  </dgm:styleLbl>
+  <dgm:styleLbl name="fgImgPlace1">
+    <dgm:scene3d>
+      <a:camera prst="orthographicFront"/>
+      <a:lightRig rig="threePt" dir="t"/>
+    </dgm:scene3d>
+    <dgm:sp3d/>
+    <dgm:txPr/>
+    <dgm:style>
+      <a:lnRef idx="2">
+        <a:scrgbClr r="0" g="0" b="0"/>
+      </a:lnRef>
+      <a:fillRef idx="1">
+        <a:scrgbClr r="0" g="0" b="0"/>
+      </a:fillRef>
+      <a:effectRef idx="0">
+        <a:scrgbClr r="0" g="0" b="0"/>
+      </a:effectRef>
+      <a:fontRef idx="minor"/>
+    </dgm:style>
+  </dgm:styleLbl>
+  <dgm:styleLbl name="alignImgPlace1">
+    <dgm:scene3d>
+      <a:camera prst="orthographicFront"/>
+      <a:lightRig rig="threePt" dir="t"/>
+    </dgm:scene3d>
+    <dgm:sp3d/>
+    <dgm:txPr/>
+    <dgm:style>
+      <a:lnRef idx="2">
+        <a:scrgbClr r="0" g="0" b="0"/>
+      </a:lnRef>
+      <a:fillRef idx="1">
+        <a:scrgbClr r="0" g="0" b="0"/>
+      </a:fillRef>
+      <a:effectRef idx="0">
+        <a:scrgbClr r="0" g="0" b="0"/>
+      </a:effectRef>
+      <a:fontRef idx="minor"/>
+    </dgm:style>
+  </dgm:styleLbl>
+  <dgm:styleLbl name="bgImgPlace1">
+    <dgm:scene3d>
+      <a:camera prst="orthographicFront"/>
+      <a:lightRig rig="threePt" dir="t"/>
+    </dgm:scene3d>
+    <dgm:sp3d/>
+    <dgm:txPr/>
+    <dgm:style>
+      <a:lnRef idx="2">
+        <a:scrgbClr r="0" g="0" b="0"/>
+      </a:lnRef>
+      <a:fillRef idx="1">
+        <a:scrgbClr r="0" g="0" b="0"/>
+      </a:fillRef>
+      <a:effectRef idx="0">
+        <a:scrgbClr r="0" g="0" b="0"/>
+      </a:effectRef>
+      <a:fontRef idx="minor"/>
+    </dgm:style>
+  </dgm:styleLbl>
+  <dgm:styleLbl name="sibTrans2D1">
+    <dgm:scene3d>
+      <a:camera prst="orthographicFront"/>
+      <a:lightRig rig="threePt" dir="t"/>
+    </dgm:scene3d>
+    <dgm:sp3d/>
+    <dgm:txPr/>
+    <dgm:style>
+      <a:lnRef idx="0">
+        <a:scrgbClr r="0" g="0" b="0"/>
+      </a:lnRef>
+      <a:fillRef idx="1">
+        <a:scrgbClr r="0" g="0" b="0"/>
+      </a:fillRef>
+      <a:effectRef idx="0">
+        <a:scrgbClr r="0" g="0" b="0"/>
+      </a:effectRef>
+      <a:fontRef idx="minor">
+        <a:schemeClr val="lt1"/>
+      </a:fontRef>
+    </dgm:style>
+  </dgm:styleLbl>
+  <dgm:styleLbl name="fgSibTrans2D1">
+    <dgm:scene3d>
+      <a:camera prst="orthographicFront"/>
+      <a:lightRig rig="threePt" dir="t"/>
+    </dgm:scene3d>
+    <dgm:sp3d/>
+    <dgm:txPr/>
+    <dgm:style>
+      <a:lnRef idx="0">
+        <a:scrgbClr r="0" g="0" b="0"/>
+      </a:lnRef>
+      <a:fillRef idx="1">
+        <a:scrgbClr r="0" g="0" b="0"/>
+      </a:fillRef>
+      <a:effectRef idx="0">
+        <a:scrgbClr r="0" g="0" b="0"/>
+      </a:effectRef>
+      <a:fontRef idx="minor">
+        <a:schemeClr val="lt1"/>
+      </a:fontRef>
+    </dgm:style>
+  </dgm:styleLbl>
+  <dgm:styleLbl name="bgSibTrans2D1">
+    <dgm:scene3d>
+      <a:camera prst="orthographicFront"/>
+      <a:lightRig rig="threePt" dir="t"/>
+    </dgm:scene3d>
+    <dgm:sp3d/>
+    <dgm:txPr/>
+    <dgm:style>
+      <a:lnRef idx="0">
+        <a:scrgbClr r="0" g="0" b="0"/>
+      </a:lnRef>
+      <a:fillRef idx="1">
+        <a:scrgbClr r="0" g="0" b="0"/>
+      </a:fillRef>
+      <a:effectRef idx="0">
+        <a:scrgbClr r="0" g="0" b="0"/>
+      </a:effectRef>
+      <a:fontRef idx="minor">
+        <a:schemeClr val="lt1"/>
+      </a:fontRef>
+    </dgm:style>
+  </dgm:styleLbl>
+  <dgm:styleLbl name="sibTrans1D1">
+    <dgm:scene3d>
+      <a:camera prst="orthographicFront"/>
+      <a:lightRig rig="threePt" dir="t"/>
+    </dgm:scene3d>
+    <dgm:sp3d/>
+    <dgm:txPr/>
+    <dgm:style>
+      <a:lnRef idx="1">
+        <a:scrgbClr r="0" g="0" b="0"/>
+      </a:lnRef>
+      <a:fillRef idx="0">
+        <a:scrgbClr r="0" g="0" b="0"/>
+      </a:fillRef>
+      <a:effectRef idx="0">
+        <a:scrgbClr r="0" g="0" b="0"/>
+      </a:effectRef>
+      <a:fontRef idx="minor"/>
+    </dgm:style>
+  </dgm:styleLbl>
+  <dgm:styleLbl name="callout">
+    <dgm:scene3d>
+      <a:camera prst="orthographicFront"/>
+      <a:lightRig rig="threePt" dir="t"/>
+    </dgm:scene3d>
+    <dgm:sp3d/>
+    <dgm:txPr/>
+    <dgm:style>
+      <a:lnRef idx="2">
+        <a:scrgbClr r="0" g="0" b="0"/>
+      </a:lnRef>
+      <a:fillRef idx="1">
+        <a:scrgbClr r="0" g="0" b="0"/>
+      </a:fillRef>
+      <a:effectRef idx="0">
+        <a:scrgbClr r="0" g="0" b="0"/>
+      </a:effectRef>
+      <a:fontRef idx="minor"/>
+    </dgm:style>
+  </dgm:styleLbl>
+  <dgm:styleLbl name="asst0">
+    <dgm:scene3d>
+      <a:camera prst="orthographicFront"/>
+      <a:lightRig rig="threePt" dir="t"/>
+    </dgm:scene3d>
+    <dgm:sp3d/>
+    <dgm:txPr/>
+    <dgm:style>
+      <a:lnRef idx="2">
+        <a:scrgbClr r="0" g="0" b="0"/>
+      </a:lnRef>
+      <a:fillRef idx="1">
+        <a:scrgbClr r="0" g="0" b="0"/>
+      </a:fillRef>
+      <a:effectRef idx="0">
+        <a:scrgbClr r="0" g="0" b="0"/>
+      </a:effectRef>
+      <a:fontRef idx="minor">
+        <a:schemeClr val="lt1"/>
+      </a:fontRef>
+    </dgm:style>
+  </dgm:styleLbl>
+  <dgm:styleLbl name="asst1">
+    <dgm:scene3d>
+      <a:camera prst="orthographicFront"/>
+      <a:lightRig rig="threePt" dir="t"/>
+    </dgm:scene3d>
+    <dgm:sp3d/>
+    <dgm:txPr/>
+    <dgm:style>
+      <a:lnRef idx="2">
+        <a:scrgbClr r="0" g="0" b="0"/>
+      </a:lnRef>
+      <a:fillRef idx="1">
+        <a:scrgbClr r="0" g="0" b="0"/>
+      </a:fillRef>
+      <a:effectRef idx="0">
+        <a:scrgbClr r="0" g="0" b="0"/>
+      </a:effectRef>
+      <a:fontRef idx="minor">
+        <a:schemeClr val="lt1"/>
+      </a:fontRef>
+    </dgm:style>
+  </dgm:styleLbl>
+  <dgm:styleLbl name="asst2">
+    <dgm:scene3d>
+      <a:camera prst="orthographicFront"/>
+      <a:lightRig rig="threePt" dir="t"/>
+    </dgm:scene3d>
+    <dgm:sp3d/>
+    <dgm:txPr/>
+    <dgm:style>
+      <a:lnRef idx="2">
+        <a:scrgbClr r="0" g="0" b="0"/>
+      </a:lnRef>
+      <a:fillRef idx="1">
+        <a:scrgbClr r="0" g="0" b="0"/>
+      </a:fillRef>
+      <a:effectRef idx="0">
+        <a:scrgbClr r="0" g="0" b="0"/>
+      </a:effectRef>
+      <a:fontRef idx="minor">
+        <a:schemeClr val="lt1"/>
+      </a:fontRef>
+    </dgm:style>
+  </dgm:styleLbl>
+  <dgm:styleLbl name="asst3">
+    <dgm:scene3d>
+      <a:camera prst="orthographicFront"/>
+      <a:lightRig rig="threePt" dir="t"/>
+    </dgm:scene3d>
+    <dgm:sp3d/>
+    <dgm:txPr/>
+    <dgm:style>
+      <a:lnRef idx="2">
+        <a:scrgbClr r="0" g="0" b="0"/>
+      </a:lnRef>
+      <a:fillRef idx="1">
+        <a:scrgbClr r="0" g="0" b="0"/>
+      </a:fillRef>
+      <a:effectRef idx="0">
+        <a:scrgbClr r="0" g="0" b="0"/>
+      </a:effectRef>
+      <a:fontRef idx="minor">
+        <a:schemeClr val="lt1"/>
+      </a:fontRef>
+    </dgm:style>
+  </dgm:styleLbl>
+  <dgm:styleLbl name="asst4">
+    <dgm:scene3d>
+      <a:camera prst="orthographicFront"/>
+      <a:lightRig rig="threePt" dir="t"/>
+    </dgm:scene3d>
+    <dgm:sp3d/>
+    <dgm:txPr/>
+    <dgm:style>
+      <a:lnRef idx="2">
+        <a:scrgbClr r="0" g="0" b="0"/>
+      </a:lnRef>
+      <a:fillRef idx="1">
+        <a:scrgbClr r="0" g="0" b="0"/>
+      </a:fillRef>
+      <a:effectRef idx="0">
+        <a:scrgbClr r="0" g="0" b="0"/>
+      </a:effectRef>
+      <a:fontRef idx="minor">
+        <a:schemeClr val="lt1"/>
+      </a:fontRef>
+    </dgm:style>
+  </dgm:styleLbl>
+  <dgm:styleLbl name="parChTrans2D1">
+    <dgm:scene3d>
+      <a:camera prst="orthographicFront"/>
+      <a:lightRig rig="threePt" dir="t"/>
+    </dgm:scene3d>
+    <dgm:sp3d/>
+    <dgm:txPr/>
+    <dgm:style>
+      <a:lnRef idx="2">
+        <a:scrgbClr r="0" g="0" b="0"/>
+      </a:lnRef>
+      <a:fillRef idx="1">
+        <a:scrgbClr r="0" g="0" b="0"/>
+      </a:fillRef>
+      <a:effectRef idx="0">
+        <a:scrgbClr r="0" g="0" b="0"/>
+      </a:effectRef>
+      <a:fontRef idx="minor">
+        <a:schemeClr val="lt1"/>
+      </a:fontRef>
+    </dgm:style>
+  </dgm:styleLbl>
+  <dgm:styleLbl name="parChTrans2D2">
+    <dgm:scene3d>
+      <a:camera prst="orthographicFront"/>
+      <a:lightRig rig="threePt" dir="t"/>
+    </dgm:scene3d>
+    <dgm:sp3d/>
+    <dgm:txPr/>
+    <dgm:style>
+      <a:lnRef idx="2">
+        <a:scrgbClr r="0" g="0" b="0"/>
+      </a:lnRef>
+      <a:fillRef idx="1">
+        <a:scrgbClr r="0" g="0" b="0"/>
+      </a:fillRef>
+      <a:effectRef idx="0">
+        <a:scrgbClr r="0" g="0" b="0"/>
+      </a:effectRef>
+      <a:fontRef idx="minor">
+        <a:schemeClr val="lt1"/>
+      </a:fontRef>
+    </dgm:style>
+  </dgm:styleLbl>
+  <dgm:styleLbl name="parChTrans2D3">
+    <dgm:scene3d>
+      <a:camera prst="orthographicFront"/>
+      <a:lightRig rig="threePt" dir="t"/>
+    </dgm:scene3d>
+    <dgm:sp3d/>
+    <dgm:txPr/>
+    <dgm:style>
+      <a:lnRef idx="2">
+        <a:scrgbClr r="0" g="0" b="0"/>
+      </a:lnRef>
+      <a:fillRef idx="1">
+        <a:scrgbClr r="0" g="0" b="0"/>
+      </a:fillRef>
+      <a:effectRef idx="0">
+        <a:scrgbClr r="0" g="0" b="0"/>
+      </a:effectRef>
+      <a:fontRef idx="minor">
+        <a:schemeClr val="lt1"/>
+      </a:fontRef>
+    </dgm:style>
+  </dgm:styleLbl>
+  <dgm:styleLbl name="parChTrans2D4">
+    <dgm:scene3d>
+      <a:camera prst="orthographicFront"/>
+      <a:lightRig rig="threePt" dir="t"/>
+    </dgm:scene3d>
+    <dgm:sp3d/>
+    <dgm:txPr/>
+    <dgm:style>
+      <a:lnRef idx="2">
+        <a:scrgbClr r="0" g="0" b="0"/>
+      </a:lnRef>
+      <a:fillRef idx="1">
+        <a:scrgbClr r="0" g="0" b="0"/>
+      </a:fillRef>
+      <a:effectRef idx="0">
+        <a:scrgbClr r="0" g="0" b="0"/>
+      </a:effectRef>
+      <a:fontRef idx="minor">
+        <a:schemeClr val="lt1"/>
+      </a:fontRef>
+    </dgm:style>
+  </dgm:styleLbl>
+  <dgm:styleLbl name="parChTrans1D1">
+    <dgm:scene3d>
+      <a:camera prst="orthographicFront"/>
+      <a:lightRig rig="threePt" dir="t"/>
+    </dgm:scene3d>
+    <dgm:sp3d/>
+    <dgm:txPr/>
+    <dgm:style>
+      <a:lnRef idx="2">
+        <a:scrgbClr r="0" g="0" b="0"/>
+      </a:lnRef>
+      <a:fillRef idx="0">
+        <a:scrgbClr r="0" g="0" b="0"/>
+      </a:fillRef>
+      <a:effectRef idx="0">
+        <a:scrgbClr r="0" g="0" b="0"/>
+      </a:effectRef>
+      <a:fontRef idx="minor"/>
+    </dgm:style>
+  </dgm:styleLbl>
+  <dgm:styleLbl name="parChTrans1D2">
+    <dgm:scene3d>
+      <a:camera prst="orthographicFront"/>
+      <a:lightRig rig="threePt" dir="t"/>
+    </dgm:scene3d>
+    <dgm:sp3d/>
+    <dgm:txPr/>
+    <dgm:style>
+      <a:lnRef idx="2">
+        <a:scrgbClr r="0" g="0" b="0"/>
+      </a:lnRef>
+      <a:fillRef idx="0">
+        <a:scrgbClr r="0" g="0" b="0"/>
+      </a:fillRef>
+      <a:effectRef idx="0">
+        <a:scrgbClr r="0" g="0" b="0"/>
+      </a:effectRef>
+      <a:fontRef idx="minor"/>
+    </dgm:style>
+  </dgm:styleLbl>
+  <dgm:styleLbl name="parChTrans1D3">
+    <dgm:scene3d>
+      <a:camera prst="orthographicFront"/>
+      <a:lightRig rig="threePt" dir="t"/>
+    </dgm:scene3d>
+    <dgm:sp3d/>
+    <dgm:txPr/>
+    <dgm:style>
+      <a:lnRef idx="2">
+        <a:scrgbClr r="0" g="0" b="0"/>
+      </a:lnRef>
+      <a:fillRef idx="0">
+        <a:scrgbClr r="0" g="0" b="0"/>
+      </a:fillRef>
+      <a:effectRef idx="0">
+        <a:scrgbClr r="0" g="0" b="0"/>
+      </a:effectRef>
+      <a:fontRef idx="minor"/>
+    </dgm:style>
+  </dgm:styleLbl>
+  <dgm:styleLbl name="parChTrans1D4">
+    <dgm:scene3d>
+      <a:camera prst="orthographicFront"/>
+      <a:lightRig rig="threePt" dir="t"/>
+    </dgm:scene3d>
+    <dgm:sp3d/>
+    <dgm:txPr/>
+    <dgm:style>
+      <a:lnRef idx="2">
+        <a:scrgbClr r="0" g="0" b="0"/>
+      </a:lnRef>
+      <a:fillRef idx="0">
+        <a:scrgbClr r="0" g="0" b="0"/>
+      </a:fillRef>
+      <a:effectRef idx="0">
+        <a:scrgbClr r="0" g="0" b="0"/>
+      </a:effectRef>
+      <a:fontRef idx="minor"/>
+    </dgm:style>
+  </dgm:styleLbl>
+  <dgm:styleLbl name="fgAcc1">
+    <dgm:scene3d>
+      <a:camera prst="orthographicFront"/>
+      <a:lightRig rig="threePt" dir="t"/>
+    </dgm:scene3d>
+    <dgm:sp3d/>
+    <dgm:txPr/>
+    <dgm:style>
+      <a:lnRef idx="2">
+        <a:scrgbClr r="0" g="0" b="0"/>
+      </a:lnRef>
+      <a:fillRef idx="1">
+        <a:scrgbClr r="0" g="0" b="0"/>
+      </a:fillRef>
+      <a:effectRef idx="0">
+        <a:scrgbClr r="0" g="0" b="0"/>
+      </a:effectRef>
+      <a:fontRef idx="minor"/>
+    </dgm:style>
+  </dgm:styleLbl>
+  <dgm:styleLbl name="conFgAcc1">
+    <dgm:scene3d>
+      <a:camera prst="orthographicFront"/>
+      <a:lightRig rig="threePt" dir="t"/>
+    </dgm:scene3d>
+    <dgm:sp3d/>
+    <dgm:txPr/>
+    <dgm:style>
+      <a:lnRef idx="2">
+        <a:scrgbClr r="0" g="0" b="0"/>
+      </a:lnRef>
+      <a:fillRef idx="1">
+        <a:scrgbClr r="0" g="0" b="0"/>
+      </a:fillRef>
+      <a:effectRef idx="0">
+        <a:scrgbClr r="0" g="0" b="0"/>
+      </a:effectRef>
+      <a:fontRef idx="minor"/>
+    </dgm:style>
+  </dgm:styleLbl>
+  <dgm:styleLbl name="alignAcc1">
+    <dgm:scene3d>
+      <a:camera prst="orthographicFront"/>
+      <a:lightRig rig="threePt" dir="t"/>
+    </dgm:scene3d>
+    <dgm:sp3d/>
+    <dgm:txPr/>
+    <dgm:style>
+      <a:lnRef idx="2">
+        <a:scrgbClr r="0" g="0" b="0"/>
+      </a:lnRef>
+      <a:fillRef idx="1">
+        <a:scrgbClr r="0" g="0" b="0"/>
+      </a:fillRef>
+      <a:effectRef idx="0">
+        <a:scrgbClr r="0" g="0" b="0"/>
+      </a:effectRef>
+      <a:fontRef idx="minor"/>
+    </dgm:style>
+  </dgm:styleLbl>
+  <dgm:styleLbl name="trAlignAcc1">
+    <dgm:scene3d>
+      <a:camera prst="orthographicFront"/>
+      <a:lightRig rig="threePt" dir="t"/>
+    </dgm:scene3d>
+    <dgm:sp3d/>
+    <dgm:txPr/>
+    <dgm:style>
+      <a:lnRef idx="1">
+        <a:scrgbClr r="0" g="0" b="0"/>
+      </a:lnRef>
+      <a:fillRef idx="1">
+        <a:scrgbClr r="0" g="0" b="0"/>
+      </a:fillRef>
+      <a:effectRef idx="0">
+        <a:scrgbClr r="0" g="0" b="0"/>
+      </a:effectRef>
+      <a:fontRef idx="minor"/>
+    </dgm:style>
+  </dgm:styleLbl>
+  <dgm:styleLbl name="bgAcc1">
+    <dgm:scene3d>
+      <a:camera prst="orthographicFront"/>
+      <a:lightRig rig="threePt" dir="t"/>
+    </dgm:scene3d>
+    <dgm:sp3d/>
+    <dgm:txPr/>
+    <dgm:style>
+      <a:lnRef idx="2">
+        <a:scrgbClr r="0" g="0" b="0"/>
+      </a:lnRef>
+      <a:fillRef idx="1">
+        <a:scrgbClr r="0" g="0" b="0"/>
+      </a:fillRef>
+      <a:effectRef idx="0">
+        <a:scrgbClr r="0" g="0" b="0"/>
+      </a:effectRef>
+      <a:fontRef idx="minor"/>
+    </dgm:style>
+  </dgm:styleLbl>
+  <dgm:styleLbl name="solidFgAcc1">
+    <dgm:scene3d>
+      <a:camera prst="orthographicFront"/>
+      <a:lightRig rig="threePt" dir="t"/>
+    </dgm:scene3d>
+    <dgm:sp3d/>
+    <dgm:txPr/>
+    <dgm:style>
+      <a:lnRef idx="2">
+        <a:scrgbClr r="0" g="0" b="0"/>
+      </a:lnRef>
+      <a:fillRef idx="1">
+        <a:scrgbClr r="0" g="0" b="0"/>
+      </a:fillRef>
+      <a:effectRef idx="0">
+        <a:scrgbClr r="0" g="0" b="0"/>
+      </a:effectRef>
+      <a:fontRef idx="minor"/>
+    </dgm:style>
+  </dgm:styleLbl>
+  <dgm:styleLbl name="solidAlignAcc1">
+    <dgm:scene3d>
+      <a:camera prst="orthographicFront"/>
+      <a:lightRig rig="threePt" dir="t"/>
+    </dgm:scene3d>
+    <dgm:sp3d/>
+    <dgm:txPr/>
+    <dgm:style>
+      <a:lnRef idx="2">
+        <a:scrgbClr r="0" g="0" b="0"/>
+      </a:lnRef>
+      <a:fillRef idx="1">
+        <a:scrgbClr r="0" g="0" b="0"/>
+      </a:fillRef>
+      <a:effectRef idx="0">
+        <a:scrgbClr r="0" g="0" b="0"/>
+      </a:effectRef>
+      <a:fontRef idx="minor"/>
+    </dgm:style>
+  </dgm:styleLbl>
+  <dgm:styleLbl name="solidBgAcc1">
+    <dgm:scene3d>
+      <a:camera prst="orthographicFront"/>
+      <a:lightRig rig="threePt" dir="t"/>
+    </dgm:scene3d>
+    <dgm:sp3d/>
+    <dgm:txPr/>
+    <dgm:style>
+      <a:lnRef idx="2">
+        <a:scrgbClr r="0" g="0" b="0"/>
+      </a:lnRef>
+      <a:fillRef idx="1">
+        <a:scrgbClr r="0" g="0" b="0"/>
+      </a:fillRef>
+      <a:effectRef idx="0">
+        <a:scrgbClr r="0" g="0" b="0"/>
+      </a:effectRef>
+      <a:fontRef idx="minor"/>
+    </dgm:style>
+  </dgm:styleLbl>
+  <dgm:styleLbl name="fgAccFollowNode1">
+    <dgm:scene3d>
+      <a:camera prst="orthographicFront"/>
+      <a:lightRig rig="threePt" dir="t"/>
+    </dgm:scene3d>
+    <dgm:sp3d/>
+    <dgm:txPr/>
+    <dgm:style>
+      <a:lnRef idx="2">
+        <a:scrgbClr r="0" g="0" b="0"/>
+      </a:lnRef>
+      <a:fillRef idx="1">
+        <a:scrgbClr r="0" g="0" b="0"/>
+      </a:fillRef>
+      <a:effectRef idx="0">
+        <a:scrgbClr r="0" g="0" b="0"/>
+      </a:effectRef>
+      <a:fontRef idx="minor"/>
+    </dgm:style>
+  </dgm:styleLbl>
+  <dgm:styleLbl name="alignAccFollowNode1">
+    <dgm:scene3d>
+      <a:camera prst="orthographicFront"/>
+      <a:lightRig rig="threePt" dir="t"/>
+    </dgm:scene3d>
+    <dgm:sp3d/>
+    <dgm:txPr/>
+    <dgm:style>
+      <a:lnRef idx="2">
+        <a:scrgbClr r="0" g="0" b="0"/>
+      </a:lnRef>
+      <a:fillRef idx="1">
+        <a:scrgbClr r="0" g="0" b="0"/>
+      </a:fillRef>
+      <a:effectRef idx="0">
+        <a:scrgbClr r="0" g="0" b="0"/>
+      </a:effectRef>
+      <a:fontRef idx="minor"/>
+    </dgm:style>
+  </dgm:styleLbl>
+  <dgm:styleLbl name="bgAccFollowNode1">
+    <dgm:scene3d>
+      <a:camera prst="orthographicFront"/>
+      <a:lightRig rig="threePt" dir="t"/>
+    </dgm:scene3d>
+    <dgm:sp3d/>
+    <dgm:txPr/>
+    <dgm:style>
+      <a:lnRef idx="2">
+        <a:scrgbClr r="0" g="0" b="0"/>
+      </a:lnRef>
+      <a:fillRef idx="1">
+        <a:scrgbClr r="0" g="0" b="0"/>
+      </a:fillRef>
+      <a:effectRef idx="0">
+        <a:scrgbClr r="0" g="0" b="0"/>
+      </a:effectRef>
+      <a:fontRef idx="minor"/>
+    </dgm:style>
+  </dgm:styleLbl>
+  <dgm:styleLbl name="fgAcc0">
+    <dgm:scene3d>
+      <a:camera prst="orthographicFront"/>
+      <a:lightRig rig="threePt" dir="t"/>
+    </dgm:scene3d>
+    <dgm:sp3d/>
+    <dgm:txPr/>
+    <dgm:style>
+      <a:lnRef idx="2">
+        <a:scrgbClr r="0" g="0" b="0"/>
+      </a:lnRef>
+      <a:fillRef idx="1">
+        <a:scrgbClr r="0" g="0" b="0"/>
+      </a:fillRef>
+      <a:effectRef idx="0">
+        <a:scrgbClr r="0" g="0" b="0"/>
+      </a:effectRef>
+      <a:fontRef idx="minor"/>
+    </dgm:style>
+  </dgm:styleLbl>
+  <dgm:styleLbl name="fgAcc2">
+    <dgm:scene3d>
+      <a:camera prst="orthographicFront"/>
+      <a:lightRig rig="threePt" dir="t"/>
+    </dgm:scene3d>
+    <dgm:sp3d/>
+    <dgm:txPr/>
+    <dgm:style>
+      <a:lnRef idx="2">
+        <a:scrgbClr r="0" g="0" b="0"/>
+      </a:lnRef>
+      <a:fillRef idx="1">
+        <a:scrgbClr r="0" g="0" b="0"/>
+      </a:fillRef>
+      <a:effectRef idx="0">
+        <a:scrgbClr r="0" g="0" b="0"/>
+      </a:effectRef>
+      <a:fontRef idx="minor"/>
+    </dgm:style>
+  </dgm:styleLbl>
+  <dgm:styleLbl name="fgAcc3">
+    <dgm:scene3d>
+      <a:camera prst="orthographicFront"/>
+      <a:lightRig rig="threePt" dir="t"/>
+    </dgm:scene3d>
+    <dgm:sp3d/>
+    <dgm:txPr/>
+    <dgm:style>
+      <a:lnRef idx="2">
+        <a:scrgbClr r="0" g="0" b="0"/>
+      </a:lnRef>
+      <a:fillRef idx="1">
+        <a:scrgbClr r="0" g="0" b="0"/>
+      </a:fillRef>
+      <a:effectRef idx="0">
+        <a:scrgbClr r="0" g="0" b="0"/>
+      </a:effectRef>
+      <a:fontRef idx="minor"/>
+    </dgm:style>
+  </dgm:styleLbl>
+  <dgm:styleLbl name="fgAcc4">
+    <dgm:scene3d>
+      <a:camera prst="orthographicFront"/>
+      <a:lightRig rig="threePt" dir="t"/>
+    </dgm:scene3d>
+    <dgm:sp3d/>
+    <dgm:txPr/>
+    <dgm:style>
+      <a:lnRef idx="2">
+        <a:scrgbClr r="0" g="0" b="0"/>
+      </a:lnRef>
+      <a:fillRef idx="1">
+        <a:scrgbClr r="0" g="0" b="0"/>
+      </a:fillRef>
+      <a:effectRef idx="0">
+        <a:scrgbClr r="0" g="0" b="0"/>
+      </a:effectRef>
+      <a:fontRef idx="minor"/>
+    </dgm:style>
+  </dgm:styleLbl>
+  <dgm:styleLbl name="bgShp">
+    <dgm:scene3d>
+      <a:camera prst="orthographicFront"/>
+      <a:lightRig rig="threePt" dir="t"/>
+    </dgm:scene3d>
+    <dgm:sp3d/>
+    <dgm:txPr/>
+    <dgm:style>
+      <a:lnRef idx="0">
+        <a:scrgbClr r="0" g="0" b="0"/>
+      </a:lnRef>
+      <a:fillRef idx="1">
+        <a:scrgbClr r="0" g="0" b="0"/>
+      </a:fillRef>
+      <a:effectRef idx="0">
+        <a:scrgbClr r="0" g="0" b="0"/>
+      </a:effectRef>
+      <a:fontRef idx="minor"/>
+    </dgm:style>
+  </dgm:styleLbl>
+  <dgm:styleLbl name="dkBgShp">
+    <dgm:scene3d>
+      <a:camera prst="orthographicFront"/>
+      <a:lightRig rig="threePt" dir="t"/>
+    </dgm:scene3d>
+    <dgm:sp3d/>
+    <dgm:txPr/>
+    <dgm:style>
+      <a:lnRef idx="0">
+        <a:scrgbClr r="0" g="0" b="0"/>
+      </a:lnRef>
+      <a:fillRef idx="1">
+        <a:scrgbClr r="0" g="0" b="0"/>
+      </a:fillRef>
+      <a:effectRef idx="0">
+        <a:scrgbClr r="0" g="0" b="0"/>
+      </a:effectRef>
+      <a:fontRef idx="minor"/>
+    </dgm:style>
+  </dgm:styleLbl>
+  <dgm:styleLbl name="trBgShp">
+    <dgm:scene3d>
+      <a:camera prst="orthographicFront"/>
+      <a:lightRig rig="threePt" dir="t"/>
+    </dgm:scene3d>
+    <dgm:sp3d/>
+    <dgm:txPr/>
+    <dgm:style>
+      <a:lnRef idx="0">
+        <a:scrgbClr r="0" g="0" b="0"/>
+      </a:lnRef>
+      <a:fillRef idx="1">
+        <a:scrgbClr r="0" g="0" b="0"/>
+      </a:fillRef>
+      <a:effectRef idx="0">
+        <a:scrgbClr r="0" g="0" b="0"/>
+      </a:effectRef>
+      <a:fontRef idx="minor"/>
+    </dgm:style>
+  </dgm:styleLbl>
+  <dgm:styleLbl name="fgShp">
+    <dgm:scene3d>
+      <a:camera prst="orthographicFront"/>
+      <a:lightRig rig="threePt" dir="t"/>
+    </dgm:scene3d>
+    <dgm:sp3d/>
+    <dgm:txPr/>
+    <dgm:style>
+      <a:lnRef idx="2">
+        <a:scrgbClr r="0" g="0" b="0"/>
+      </a:lnRef>
+      <a:fillRef idx="1">
+        <a:scrgbClr r="0" g="0" b="0"/>
+      </a:fillRef>
+      <a:effectRef idx="0">
         <a:scrgbClr r="0" g="0" b="0"/>
       </a:effectRef>
       <a:fontRef idx="minor"/>
@@ -8566,7 +10249,7 @@
           <a:p>
             <a:fld id="{156D597D-8B24-4838-871A-61B024263B13}" type="datetimeFigureOut">
               <a:rPr lang="en-US" smtClean="0"/>
-              <a:t>3/21/2026</a:t>
+              <a:t>3/23/2026</a:t>
             </a:fld>
             <a:endParaRPr lang="en-US" dirty="0"/>
           </a:p>
@@ -8980,7 +10663,7 @@
           <a:p>
             <a:fld id="{3CADBD16-5BFB-4D9F-9646-C75D1B53BBB6}" type="datetimeFigureOut">
               <a:rPr lang="en-US" smtClean="0"/>
-              <a:t>3/21/2026</a:t>
+              <a:t>3/23/2026</a:t>
             </a:fld>
             <a:endParaRPr lang="en-US" dirty="0"/>
           </a:p>
@@ -9178,7 +10861,7 @@
           <a:p>
             <a:fld id="{3CADBD16-5BFB-4D9F-9646-C75D1B53BBB6}" type="datetimeFigureOut">
               <a:rPr lang="en-US" smtClean="0"/>
-              <a:t>3/21/2026</a:t>
+              <a:t>3/23/2026</a:t>
             </a:fld>
             <a:endParaRPr lang="en-US" dirty="0"/>
           </a:p>
@@ -9386,7 +11069,7 @@
           <a:p>
             <a:fld id="{3CADBD16-5BFB-4D9F-9646-C75D1B53BBB6}" type="datetimeFigureOut">
               <a:rPr lang="en-US" smtClean="0"/>
-              <a:t>3/21/2026</a:t>
+              <a:t>3/23/2026</a:t>
             </a:fld>
             <a:endParaRPr lang="en-US" dirty="0"/>
           </a:p>
@@ -9584,7 +11267,7 @@
           <a:p>
             <a:fld id="{3CADBD16-5BFB-4D9F-9646-C75D1B53BBB6}" type="datetimeFigureOut">
               <a:rPr lang="en-US" smtClean="0"/>
-              <a:t>3/21/2026</a:t>
+              <a:t>3/23/2026</a:t>
             </a:fld>
             <a:endParaRPr lang="en-US" dirty="0"/>
           </a:p>
@@ -9859,7 +11542,7 @@
           <a:p>
             <a:fld id="{3CADBD16-5BFB-4D9F-9646-C75D1B53BBB6}" type="datetimeFigureOut">
               <a:rPr lang="en-US" smtClean="0"/>
-              <a:t>3/21/2026</a:t>
+              <a:t>3/23/2026</a:t>
             </a:fld>
             <a:endParaRPr lang="en-US" dirty="0"/>
           </a:p>
@@ -10124,7 +11807,7 @@
           <a:p>
             <a:fld id="{3CADBD16-5BFB-4D9F-9646-C75D1B53BBB6}" type="datetimeFigureOut">
               <a:rPr lang="en-US" smtClean="0"/>
-              <a:t>3/21/2026</a:t>
+              <a:t>3/23/2026</a:t>
             </a:fld>
             <a:endParaRPr lang="en-US" dirty="0"/>
           </a:p>
@@ -10536,7 +12219,7 @@
           <a:p>
             <a:fld id="{3CADBD16-5BFB-4D9F-9646-C75D1B53BBB6}" type="datetimeFigureOut">
               <a:rPr lang="en-US" smtClean="0"/>
-              <a:t>3/21/2026</a:t>
+              <a:t>3/23/2026</a:t>
             </a:fld>
             <a:endParaRPr lang="en-US" dirty="0"/>
           </a:p>
@@ -10677,7 +12360,7 @@
           <a:p>
             <a:fld id="{3CADBD16-5BFB-4D9F-9646-C75D1B53BBB6}" type="datetimeFigureOut">
               <a:rPr lang="en-US" smtClean="0"/>
-              <a:t>3/21/2026</a:t>
+              <a:t>3/23/2026</a:t>
             </a:fld>
             <a:endParaRPr lang="en-US" dirty="0"/>
           </a:p>
@@ -10790,7 +12473,7 @@
           <a:p>
             <a:fld id="{3CADBD16-5BFB-4D9F-9646-C75D1B53BBB6}" type="datetimeFigureOut">
               <a:rPr lang="en-US" smtClean="0"/>
-              <a:t>3/21/2026</a:t>
+              <a:t>3/23/2026</a:t>
             </a:fld>
             <a:endParaRPr lang="en-US" dirty="0"/>
           </a:p>
@@ -11101,7 +12784,7 @@
           <a:p>
             <a:fld id="{3CADBD16-5BFB-4D9F-9646-C75D1B53BBB6}" type="datetimeFigureOut">
               <a:rPr lang="en-US" smtClean="0"/>
-              <a:t>3/21/2026</a:t>
+              <a:t>3/23/2026</a:t>
             </a:fld>
             <a:endParaRPr lang="en-US" dirty="0"/>
           </a:p>
@@ -11389,7 +13072,7 @@
           <a:p>
             <a:fld id="{3CADBD16-5BFB-4D9F-9646-C75D1B53BBB6}" type="datetimeFigureOut">
               <a:rPr lang="en-US" smtClean="0"/>
-              <a:t>3/21/2026</a:t>
+              <a:t>3/23/2026</a:t>
             </a:fld>
             <a:endParaRPr lang="en-US" dirty="0"/>
           </a:p>
@@ -11631,7 +13314,7 @@
             <a:fld id="{3CADBD16-5BFB-4D9F-9646-C75D1B53BBB6}" type="datetimeFigureOut">
               <a:rPr lang="en-US" smtClean="0"/>
               <a:pPr/>
-              <a:t>3/21/2026</a:t>
+              <a:t>3/23/2026</a:t>
             </a:fld>
             <a:endParaRPr lang="en-US" dirty="0"/>
           </a:p>
@@ -12863,6 +14546,14 @@
 <file path=ppt/slides/slide11.xml><?xml version="1.0" encoding="utf-8"?>
 <p:sld xmlns:a="http://schemas.openxmlformats.org/drawingml/2006/main" xmlns:r="http://schemas.openxmlformats.org/officeDocument/2006/relationships" xmlns:p="http://schemas.openxmlformats.org/presentationml/2006/main">
   <p:cSld>
+    <p:bg>
+      <p:bgPr>
+        <a:solidFill>
+          <a:schemeClr val="bg1"/>
+        </a:solidFill>
+        <a:effectLst/>
+      </p:bgPr>
+    </p:bg>
     <p:spTree>
       <p:nvGrpSpPr>
         <p:cNvPr id="1" name=""/>
@@ -12877,6 +14568,200 @@
           <a:chExt cx="0" cy="0"/>
         </a:xfrm>
       </p:grpSpPr>
+      <p:sp useBgFill="1">
+        <p:nvSpPr>
+          <p:cNvPr id="8" name="Rectangle 7">
+            <a:extLst>
+              <a:ext uri="{FF2B5EF4-FFF2-40B4-BE49-F238E27FC236}">
+                <a16:creationId xmlns:a16="http://schemas.microsoft.com/office/drawing/2014/main" id="{907EF6B7-1338-4443-8C46-6A318D952DFD}"/>
+              </a:ext>
+              <a:ext uri="{C183D7F6-B498-43B3-948B-1728B52AA6E4}">
+                <adec:decorative xmlns:adec="http://schemas.microsoft.com/office/drawing/2017/decorative" val="1"/>
+              </a:ext>
+            </a:extLst>
+          </p:cNvPr>
+          <p:cNvSpPr>
+            <a:spLocks noGrp="1" noRot="1" noChangeAspect="1" noMove="1" noResize="1" noEditPoints="1" noAdjustHandles="1" noChangeArrowheads="1" noChangeShapeType="1" noTextEdit="1"/>
+          </p:cNvSpPr>
+          <p:nvPr>
+            <p:extLst>
+              <p:ext uri="{386F3935-93C4-4BCD-93E2-E3B085C9AB24}">
+                <p16:designElem xmlns:p16="http://schemas.microsoft.com/office/powerpoint/2015/main" val="1"/>
+              </p:ext>
+            </p:extLst>
+          </p:nvPr>
+        </p:nvSpPr>
+        <p:spPr>
+          <a:xfrm>
+            <a:off x="3048" y="0"/>
+            <a:ext cx="12188952" cy="6858000"/>
+          </a:xfrm>
+          <a:prstGeom prst="rect">
+            <a:avLst/>
+          </a:prstGeom>
+          <a:ln>
+            <a:noFill/>
+          </a:ln>
+        </p:spPr>
+        <p:style>
+          <a:lnRef idx="2">
+            <a:schemeClr val="accent1">
+              <a:shade val="50000"/>
+            </a:schemeClr>
+          </a:lnRef>
+          <a:fillRef idx="1">
+            <a:schemeClr val="accent1"/>
+          </a:fillRef>
+          <a:effectRef idx="0">
+            <a:schemeClr val="accent1"/>
+          </a:effectRef>
+          <a:fontRef idx="minor">
+            <a:schemeClr val="lt1"/>
+          </a:fontRef>
+        </p:style>
+        <p:txBody>
+          <a:bodyPr rtlCol="0" anchor="ctr"/>
+          <a:lstStyle/>
+          <a:p>
+            <a:pPr algn="ctr"/>
+            <a:endParaRPr lang="en-US"/>
+          </a:p>
+        </p:txBody>
+      </p:sp>
+      <p:sp>
+        <p:nvSpPr>
+          <p:cNvPr id="10" name="Freeform: Shape 9">
+            <a:extLst>
+              <a:ext uri="{FF2B5EF4-FFF2-40B4-BE49-F238E27FC236}">
+                <a16:creationId xmlns:a16="http://schemas.microsoft.com/office/drawing/2014/main" id="{DAAE4CDD-124C-4DCF-9584-B6033B545DD5}"/>
+              </a:ext>
+              <a:ext uri="{C183D7F6-B498-43B3-948B-1728B52AA6E4}">
+                <adec:decorative xmlns:adec="http://schemas.microsoft.com/office/drawing/2017/decorative" val="1"/>
+              </a:ext>
+            </a:extLst>
+          </p:cNvPr>
+          <p:cNvSpPr>
+            <a:spLocks noGrp="1" noRot="1" noChangeAspect="1" noMove="1" noResize="1" noEditPoints="1" noAdjustHandles="1" noChangeArrowheads="1" noChangeShapeType="1" noTextEdit="1"/>
+          </p:cNvSpPr>
+          <p:nvPr>
+            <p:extLst>
+              <p:ext uri="{386F3935-93C4-4BCD-93E2-E3B085C9AB24}">
+                <p16:designElem xmlns:p16="http://schemas.microsoft.com/office/powerpoint/2015/main" val="1"/>
+              </p:ext>
+            </p:extLst>
+          </p:nvPr>
+        </p:nvSpPr>
+        <p:spPr>
+          <a:xfrm>
+            <a:off x="1" y="0"/>
+            <a:ext cx="4167271" cy="6858000"/>
+          </a:xfrm>
+          <a:custGeom>
+            <a:avLst/>
+            <a:gdLst>
+              <a:gd name="connsiteX0" fmla="*/ 0 w 4167271"/>
+              <a:gd name="connsiteY0" fmla="*/ 0 h 6858000"/>
+              <a:gd name="connsiteX1" fmla="*/ 2259550 w 4167271"/>
+              <a:gd name="connsiteY1" fmla="*/ 0 h 6858000"/>
+              <a:gd name="connsiteX2" fmla="*/ 2387803 w 4167271"/>
+              <a:gd name="connsiteY2" fmla="*/ 82222 h 6858000"/>
+              <a:gd name="connsiteX3" fmla="*/ 4167271 w 4167271"/>
+              <a:gd name="connsiteY3" fmla="*/ 3429000 h 6858000"/>
+              <a:gd name="connsiteX4" fmla="*/ 2387803 w 4167271"/>
+              <a:gd name="connsiteY4" fmla="*/ 6775779 h 6858000"/>
+              <a:gd name="connsiteX5" fmla="*/ 2259550 w 4167271"/>
+              <a:gd name="connsiteY5" fmla="*/ 6858000 h 6858000"/>
+              <a:gd name="connsiteX6" fmla="*/ 0 w 4167271"/>
+              <a:gd name="connsiteY6" fmla="*/ 6858000 h 6858000"/>
+            </a:gdLst>
+            <a:ahLst/>
+            <a:cxnLst>
+              <a:cxn ang="0">
+                <a:pos x="connsiteX0" y="connsiteY0"/>
+              </a:cxn>
+              <a:cxn ang="0">
+                <a:pos x="connsiteX1" y="connsiteY1"/>
+              </a:cxn>
+              <a:cxn ang="0">
+                <a:pos x="connsiteX2" y="connsiteY2"/>
+              </a:cxn>
+              <a:cxn ang="0">
+                <a:pos x="connsiteX3" y="connsiteY3"/>
+              </a:cxn>
+              <a:cxn ang="0">
+                <a:pos x="connsiteX4" y="connsiteY4"/>
+              </a:cxn>
+              <a:cxn ang="0">
+                <a:pos x="connsiteX5" y="connsiteY5"/>
+              </a:cxn>
+              <a:cxn ang="0">
+                <a:pos x="connsiteX6" y="connsiteY6"/>
+              </a:cxn>
+            </a:cxnLst>
+            <a:rect l="l" t="t" r="r" b="b"/>
+            <a:pathLst>
+              <a:path w="4167271" h="6858000">
+                <a:moveTo>
+                  <a:pt x="0" y="0"/>
+                </a:moveTo>
+                <a:lnTo>
+                  <a:pt x="2259550" y="0"/>
+                </a:lnTo>
+                <a:lnTo>
+                  <a:pt x="2387803" y="82222"/>
+                </a:lnTo>
+                <a:cubicBezTo>
+                  <a:pt x="3461407" y="807534"/>
+                  <a:pt x="4167271" y="2035835"/>
+                  <a:pt x="4167271" y="3429000"/>
+                </a:cubicBezTo>
+                <a:cubicBezTo>
+                  <a:pt x="4167271" y="4822165"/>
+                  <a:pt x="3461407" y="6050467"/>
+                  <a:pt x="2387803" y="6775779"/>
+                </a:cubicBezTo>
+                <a:lnTo>
+                  <a:pt x="2259550" y="6858000"/>
+                </a:lnTo>
+                <a:lnTo>
+                  <a:pt x="0" y="6858000"/>
+                </a:lnTo>
+                <a:close/>
+              </a:path>
+            </a:pathLst>
+          </a:custGeom>
+          <a:solidFill>
+            <a:schemeClr val="accent2"/>
+          </a:solidFill>
+          <a:ln>
+            <a:noFill/>
+          </a:ln>
+        </p:spPr>
+        <p:style>
+          <a:lnRef idx="2">
+            <a:schemeClr val="accent1">
+              <a:shade val="50000"/>
+            </a:schemeClr>
+          </a:lnRef>
+          <a:fillRef idx="1">
+            <a:schemeClr val="accent1"/>
+          </a:fillRef>
+          <a:effectRef idx="0">
+            <a:schemeClr val="accent1"/>
+          </a:effectRef>
+          <a:fontRef idx="minor">
+            <a:schemeClr val="lt1"/>
+          </a:fontRef>
+        </p:style>
+        <p:txBody>
+          <a:bodyPr rtlCol="0" anchor="ctr"/>
+          <a:lstStyle/>
+          <a:p>
+            <a:pPr algn="ctr"/>
+            <a:endParaRPr lang="en-US"/>
+          </a:p>
+        </p:txBody>
+      </p:sp>
       <p:sp>
         <p:nvSpPr>
           <p:cNvPr id="2" name="Title 1">
@@ -12893,15 +14778,87 @@
             <p:ph type="title"/>
           </p:nvPr>
         </p:nvSpPr>
-        <p:spPr/>
+        <p:spPr>
+          <a:xfrm>
+            <a:off x="686834" y="1153572"/>
+            <a:ext cx="3200400" cy="4461163"/>
+          </a:xfrm>
+        </p:spPr>
         <p:txBody>
-          <a:bodyPr/>
+          <a:bodyPr>
+            <a:normAutofit/>
+          </a:bodyPr>
           <a:lstStyle/>
           <a:p>
             <a:r>
-              <a:rPr lang="en-US" dirty="0"/>
+              <a:rPr lang="en-US" sz="4100">
+                <a:solidFill>
+                  <a:srgbClr val="FFFFFF"/>
+                </a:solidFill>
+              </a:rPr>
               <a:t>Observations</a:t>
             </a:r>
+          </a:p>
+        </p:txBody>
+      </p:sp>
+      <p:sp>
+        <p:nvSpPr>
+          <p:cNvPr id="12" name="Arc 11">
+            <a:extLst>
+              <a:ext uri="{FF2B5EF4-FFF2-40B4-BE49-F238E27FC236}">
+                <a16:creationId xmlns:a16="http://schemas.microsoft.com/office/drawing/2014/main" id="{081E4A58-353D-44AE-B2FC-2A74E2E400F7}"/>
+              </a:ext>
+              <a:ext uri="{C183D7F6-B498-43B3-948B-1728B52AA6E4}">
+                <adec:decorative xmlns:adec="http://schemas.microsoft.com/office/drawing/2017/decorative" val="1"/>
+              </a:ext>
+            </a:extLst>
+          </p:cNvPr>
+          <p:cNvSpPr>
+            <a:spLocks noGrp="1" noRot="1" noChangeAspect="1" noMove="1" noResize="1" noEditPoints="1" noAdjustHandles="1" noChangeArrowheads="1" noChangeShapeType="1" noTextEdit="1"/>
+          </p:cNvSpPr>
+          <p:nvPr>
+            <p:extLst>
+              <p:ext uri="{386F3935-93C4-4BCD-93E2-E3B085C9AB24}">
+                <p16:designElem xmlns:p16="http://schemas.microsoft.com/office/powerpoint/2015/main" val="1"/>
+              </p:ext>
+            </p:extLst>
+          </p:nvPr>
+        </p:nvSpPr>
+        <p:spPr>
+          <a:xfrm flipV="1">
+            <a:off x="7550402" y="2455479"/>
+            <a:ext cx="4083433" cy="4083433"/>
+          </a:xfrm>
+          <a:prstGeom prst="arc">
+            <a:avLst/>
+          </a:prstGeom>
+          <a:ln w="127000" cap="rnd">
+            <a:solidFill>
+              <a:schemeClr val="accent4"/>
+            </a:solidFill>
+            <a:prstDash val="dash"/>
+          </a:ln>
+        </p:spPr>
+        <p:style>
+          <a:lnRef idx="1">
+            <a:schemeClr val="accent1"/>
+          </a:lnRef>
+          <a:fillRef idx="0">
+            <a:schemeClr val="accent1"/>
+          </a:fillRef>
+          <a:effectRef idx="0">
+            <a:schemeClr val="accent1"/>
+          </a:effectRef>
+          <a:fontRef idx="minor">
+            <a:schemeClr val="tx1"/>
+          </a:fontRef>
+        </p:style>
+        <p:txBody>
+          <a:bodyPr rtlCol="0" anchor="ctr"/>
+          <a:lstStyle/>
+          <a:p>
+            <a:pPr algn="ctr"/>
+            <a:endParaRPr lang="en-US" dirty="0"/>
           </a:p>
         </p:txBody>
       </p:sp>
@@ -12921,9 +14878,14 @@
             <p:ph idx="1"/>
           </p:nvPr>
         </p:nvSpPr>
-        <p:spPr/>
+        <p:spPr>
+          <a:xfrm>
+            <a:off x="4447308" y="591344"/>
+            <a:ext cx="6906491" cy="5585619"/>
+          </a:xfrm>
+        </p:spPr>
         <p:txBody>
-          <a:bodyPr>
+          <a:bodyPr anchor="ctr">
             <a:normAutofit/>
           </a:bodyPr>
           <a:lstStyle/>
@@ -13004,6 +14966,14 @@
 <file path=ppt/slides/slide12.xml><?xml version="1.0" encoding="utf-8"?>
 <p:sld xmlns:a="http://schemas.openxmlformats.org/drawingml/2006/main" xmlns:r="http://schemas.openxmlformats.org/officeDocument/2006/relationships" xmlns:p="http://schemas.openxmlformats.org/presentationml/2006/main">
   <p:cSld>
+    <p:bg>
+      <p:bgPr>
+        <a:solidFill>
+          <a:schemeClr val="bg1"/>
+        </a:solidFill>
+        <a:effectLst/>
+      </p:bgPr>
+    </p:bg>
     <p:spTree>
       <p:nvGrpSpPr>
         <p:cNvPr id="1" name=""/>
@@ -13018,6 +14988,348 @@
           <a:chExt cx="0" cy="0"/>
         </a:xfrm>
       </p:grpSpPr>
+      <p:sp useBgFill="1">
+        <p:nvSpPr>
+          <p:cNvPr id="9" name="Rectangle 8">
+            <a:extLst>
+              <a:ext uri="{FF2B5EF4-FFF2-40B4-BE49-F238E27FC236}">
+                <a16:creationId xmlns:a16="http://schemas.microsoft.com/office/drawing/2014/main" id="{56E9B3E6-E277-4D68-BA48-9CB43FFBD6E2}"/>
+              </a:ext>
+              <a:ext uri="{C183D7F6-B498-43B3-948B-1728B52AA6E4}">
+                <adec:decorative xmlns:adec="http://schemas.microsoft.com/office/drawing/2017/decorative" val="1"/>
+              </a:ext>
+            </a:extLst>
+          </p:cNvPr>
+          <p:cNvSpPr>
+            <a:spLocks noGrp="1" noRot="1" noChangeAspect="1" noMove="1" noResize="1" noEditPoints="1" noAdjustHandles="1" noChangeArrowheads="1" noChangeShapeType="1" noTextEdit="1"/>
+          </p:cNvSpPr>
+          <p:nvPr>
+            <p:extLst>
+              <p:ext uri="{386F3935-93C4-4BCD-93E2-E3B085C9AB24}">
+                <p16:designElem xmlns:p16="http://schemas.microsoft.com/office/powerpoint/2015/main" val="1"/>
+              </p:ext>
+            </p:extLst>
+          </p:nvPr>
+        </p:nvSpPr>
+        <p:spPr>
+          <a:xfrm>
+            <a:off x="0" y="0"/>
+            <a:ext cx="12191999" cy="6857365"/>
+          </a:xfrm>
+          <a:prstGeom prst="rect">
+            <a:avLst/>
+          </a:prstGeom>
+          <a:ln>
+            <a:noFill/>
+          </a:ln>
+        </p:spPr>
+        <p:style>
+          <a:lnRef idx="2">
+            <a:schemeClr val="accent1">
+              <a:shade val="50000"/>
+            </a:schemeClr>
+          </a:lnRef>
+          <a:fillRef idx="1">
+            <a:schemeClr val="accent1"/>
+          </a:fillRef>
+          <a:effectRef idx="0">
+            <a:schemeClr val="accent1"/>
+          </a:effectRef>
+          <a:fontRef idx="minor">
+            <a:schemeClr val="lt1"/>
+          </a:fontRef>
+        </p:style>
+        <p:txBody>
+          <a:bodyPr rtlCol="0" anchor="ctr"/>
+          <a:lstStyle/>
+          <a:p>
+            <a:pPr algn="ctr"/>
+            <a:endParaRPr lang="en-US"/>
+          </a:p>
+        </p:txBody>
+      </p:sp>
+      <p:grpSp>
+        <p:nvGrpSpPr>
+          <p:cNvPr id="11" name="Group 10">
+            <a:extLst>
+              <a:ext uri="{FF2B5EF4-FFF2-40B4-BE49-F238E27FC236}">
+                <a16:creationId xmlns:a16="http://schemas.microsoft.com/office/drawing/2014/main" id="{AE1C45F0-260A-458C-96ED-C1F6D2151219}"/>
+              </a:ext>
+              <a:ext uri="{C183D7F6-B498-43B3-948B-1728B52AA6E4}">
+                <adec:decorative xmlns:adec="http://schemas.microsoft.com/office/drawing/2017/decorative" val="1"/>
+              </a:ext>
+            </a:extLst>
+          </p:cNvPr>
+          <p:cNvGrpSpPr>
+            <a:grpSpLocks noGrp="1" noUngrp="1" noRot="1" noChangeAspect="1" noMove="1" noResize="1"/>
+          </p:cNvGrpSpPr>
+          <p:nvPr>
+            <p:extLst>
+              <p:ext uri="{386F3935-93C4-4BCD-93E2-E3B085C9AB24}">
+                <p16:designElem xmlns:p16="http://schemas.microsoft.com/office/powerpoint/2015/main" val="1"/>
+              </p:ext>
+            </p:extLst>
+          </p:nvPr>
+        </p:nvGrpSpPr>
+        <p:grpSpPr>
+          <a:xfrm>
+            <a:off x="4" y="1216597"/>
+            <a:ext cx="731521" cy="673460"/>
+            <a:chOff x="3940602" y="308034"/>
+            <a:chExt cx="2116791" cy="3428999"/>
+          </a:xfrm>
+          <a:solidFill>
+            <a:schemeClr val="accent4"/>
+          </a:solidFill>
+        </p:grpSpPr>
+        <p:sp>
+          <p:nvSpPr>
+            <p:cNvPr id="12" name="Rectangle 11">
+              <a:extLst>
+                <a:ext uri="{FF2B5EF4-FFF2-40B4-BE49-F238E27FC236}">
+                  <a16:creationId xmlns:a16="http://schemas.microsoft.com/office/drawing/2014/main" id="{A6604B49-AD5C-4590-B051-06C8222ECD99}"/>
+                </a:ext>
+                <a:ext uri="{C183D7F6-B498-43B3-948B-1728B52AA6E4}">
+                  <adec:decorative xmlns:adec="http://schemas.microsoft.com/office/drawing/2017/decorative" val="1"/>
+                </a:ext>
+              </a:extLst>
+            </p:cNvPr>
+            <p:cNvSpPr/>
+            <p:nvPr>
+              <p:extLst>
+                <p:ext uri="{386F3935-93C4-4BCD-93E2-E3B085C9AB24}">
+                  <p16:designElem xmlns:p16="http://schemas.microsoft.com/office/powerpoint/2015/main" val="1"/>
+                </p:ext>
+              </p:extLst>
+            </p:nvPr>
+          </p:nvSpPr>
+          <p:spPr>
+            <a:xfrm>
+              <a:off x="3940602" y="308034"/>
+              <a:ext cx="566743" cy="3428999"/>
+            </a:xfrm>
+            <a:prstGeom prst="rect">
+              <a:avLst/>
+            </a:prstGeom>
+            <a:grpFill/>
+            <a:ln>
+              <a:noFill/>
+            </a:ln>
+          </p:spPr>
+          <p:style>
+            <a:lnRef idx="2">
+              <a:schemeClr val="accent1">
+                <a:shade val="50000"/>
+              </a:schemeClr>
+            </a:lnRef>
+            <a:fillRef idx="1">
+              <a:schemeClr val="accent1"/>
+            </a:fillRef>
+            <a:effectRef idx="0">
+              <a:schemeClr val="accent1"/>
+            </a:effectRef>
+            <a:fontRef idx="minor">
+              <a:schemeClr val="lt1"/>
+            </a:fontRef>
+          </p:style>
+          <p:txBody>
+            <a:bodyPr rtlCol="0" anchor="ctr"/>
+            <a:lstStyle/>
+            <a:p>
+              <a:pPr algn="ctr"/>
+              <a:endParaRPr lang="en-US"/>
+            </a:p>
+          </p:txBody>
+        </p:sp>
+        <p:sp>
+          <p:nvSpPr>
+            <p:cNvPr id="13" name="Rectangle 12">
+              <a:extLst>
+                <a:ext uri="{FF2B5EF4-FFF2-40B4-BE49-F238E27FC236}">
+                  <a16:creationId xmlns:a16="http://schemas.microsoft.com/office/drawing/2014/main" id="{743ECCAF-29C5-4537-947C-7EA1292463DB}"/>
+                </a:ext>
+                <a:ext uri="{C183D7F6-B498-43B3-948B-1728B52AA6E4}">
+                  <adec:decorative xmlns:adec="http://schemas.microsoft.com/office/drawing/2017/decorative" val="1"/>
+                </a:ext>
+              </a:extLst>
+            </p:cNvPr>
+            <p:cNvSpPr/>
+            <p:nvPr>
+              <p:extLst>
+                <p:ext uri="{386F3935-93C4-4BCD-93E2-E3B085C9AB24}">
+                  <p16:designElem xmlns:p16="http://schemas.microsoft.com/office/powerpoint/2015/main" val="1"/>
+                </p:ext>
+              </p:extLst>
+            </p:nvPr>
+          </p:nvSpPr>
+          <p:spPr>
+            <a:xfrm>
+              <a:off x="4715626" y="308034"/>
+              <a:ext cx="566743" cy="3428999"/>
+            </a:xfrm>
+            <a:prstGeom prst="rect">
+              <a:avLst/>
+            </a:prstGeom>
+            <a:grpFill/>
+            <a:ln>
+              <a:noFill/>
+            </a:ln>
+          </p:spPr>
+          <p:style>
+            <a:lnRef idx="2">
+              <a:schemeClr val="accent1">
+                <a:shade val="50000"/>
+              </a:schemeClr>
+            </a:lnRef>
+            <a:fillRef idx="1">
+              <a:schemeClr val="accent1"/>
+            </a:fillRef>
+            <a:effectRef idx="0">
+              <a:schemeClr val="accent1"/>
+            </a:effectRef>
+            <a:fontRef idx="minor">
+              <a:schemeClr val="lt1"/>
+            </a:fontRef>
+          </p:style>
+          <p:txBody>
+            <a:bodyPr rtlCol="0" anchor="ctr"/>
+            <a:lstStyle/>
+            <a:p>
+              <a:pPr algn="ctr"/>
+              <a:endParaRPr lang="en-US"/>
+            </a:p>
+          </p:txBody>
+        </p:sp>
+        <p:sp>
+          <p:nvSpPr>
+            <p:cNvPr id="14" name="Rectangle 13">
+              <a:extLst>
+                <a:ext uri="{FF2B5EF4-FFF2-40B4-BE49-F238E27FC236}">
+                  <a16:creationId xmlns:a16="http://schemas.microsoft.com/office/drawing/2014/main" id="{ED49787B-8DE6-4467-AD0A-8DECC6E0C2D6}"/>
+                </a:ext>
+                <a:ext uri="{C183D7F6-B498-43B3-948B-1728B52AA6E4}">
+                  <adec:decorative xmlns:adec="http://schemas.microsoft.com/office/drawing/2017/decorative" val="1"/>
+                </a:ext>
+              </a:extLst>
+            </p:cNvPr>
+            <p:cNvSpPr/>
+            <p:nvPr>
+              <p:extLst>
+                <p:ext uri="{386F3935-93C4-4BCD-93E2-E3B085C9AB24}">
+                  <p16:designElem xmlns:p16="http://schemas.microsoft.com/office/powerpoint/2015/main" val="1"/>
+                </p:ext>
+              </p:extLst>
+            </p:nvPr>
+          </p:nvSpPr>
+          <p:spPr>
+            <a:xfrm>
+              <a:off x="5490650" y="308034"/>
+              <a:ext cx="566743" cy="3428999"/>
+            </a:xfrm>
+            <a:prstGeom prst="rect">
+              <a:avLst/>
+            </a:prstGeom>
+            <a:grpFill/>
+            <a:ln>
+              <a:noFill/>
+            </a:ln>
+          </p:spPr>
+          <p:style>
+            <a:lnRef idx="2">
+              <a:schemeClr val="accent1">
+                <a:shade val="50000"/>
+              </a:schemeClr>
+            </a:lnRef>
+            <a:fillRef idx="1">
+              <a:schemeClr val="accent1"/>
+            </a:fillRef>
+            <a:effectRef idx="0">
+              <a:schemeClr val="accent1"/>
+            </a:effectRef>
+            <a:fontRef idx="minor">
+              <a:schemeClr val="lt1"/>
+            </a:fontRef>
+          </p:style>
+          <p:txBody>
+            <a:bodyPr rtlCol="0" anchor="ctr"/>
+            <a:lstStyle/>
+            <a:p>
+              <a:pPr algn="ctr"/>
+              <a:endParaRPr lang="en-US"/>
+            </a:p>
+          </p:txBody>
+        </p:sp>
+      </p:grpSp>
+      <p:sp>
+        <p:nvSpPr>
+          <p:cNvPr id="16" name="Rectangle 15">
+            <a:extLst>
+              <a:ext uri="{FF2B5EF4-FFF2-40B4-BE49-F238E27FC236}">
+                <a16:creationId xmlns:a16="http://schemas.microsoft.com/office/drawing/2014/main" id="{D5B0017B-2ECA-49AF-B397-DC140825DF8D}"/>
+              </a:ext>
+              <a:ext uri="{C183D7F6-B498-43B3-948B-1728B52AA6E4}">
+                <adec:decorative xmlns:adec="http://schemas.microsoft.com/office/drawing/2017/decorative" val="1"/>
+              </a:ext>
+            </a:extLst>
+          </p:cNvPr>
+          <p:cNvSpPr>
+            <a:spLocks noGrp="1" noRot="1" noChangeAspect="1" noMove="1" noResize="1" noEditPoints="1" noAdjustHandles="1" noChangeArrowheads="1" noChangeShapeType="1" noTextEdit="1"/>
+          </p:cNvSpPr>
+          <p:nvPr>
+            <p:extLst>
+              <p:ext uri="{386F3935-93C4-4BCD-93E2-E3B085C9AB24}">
+                <p16:designElem xmlns:p16="http://schemas.microsoft.com/office/powerpoint/2015/main" val="1"/>
+              </p:ext>
+            </p:extLst>
+          </p:nvPr>
+        </p:nvSpPr>
+        <p:spPr>
+          <a:xfrm>
+            <a:off x="640079" y="613954"/>
+            <a:ext cx="10907487" cy="1894116"/>
+          </a:xfrm>
+          <a:prstGeom prst="rect">
+            <a:avLst/>
+          </a:prstGeom>
+          <a:solidFill>
+            <a:schemeClr val="bg1"/>
+          </a:solidFill>
+          <a:ln>
+            <a:noFill/>
+          </a:ln>
+          <a:effectLst>
+            <a:outerShdw blurRad="139700" dist="127000" dir="5400000" algn="t" rotWithShape="0">
+              <a:prstClr val="black">
+                <a:alpha val="15000"/>
+              </a:prstClr>
+            </a:outerShdw>
+          </a:effectLst>
+        </p:spPr>
+        <p:style>
+          <a:lnRef idx="2">
+            <a:schemeClr val="accent1">
+              <a:shade val="50000"/>
+            </a:schemeClr>
+          </a:lnRef>
+          <a:fillRef idx="1">
+            <a:schemeClr val="accent1"/>
+          </a:fillRef>
+          <a:effectRef idx="0">
+            <a:schemeClr val="accent1"/>
+          </a:effectRef>
+          <a:fontRef idx="minor">
+            <a:schemeClr val="lt1"/>
+          </a:fontRef>
+        </p:style>
+        <p:txBody>
+          <a:bodyPr rtlCol="0" anchor="ctr"/>
+          <a:lstStyle/>
+          <a:p>
+            <a:pPr algn="ctr"/>
+            <a:endParaRPr lang="en-US"/>
+          </a:p>
+        </p:txBody>
+      </p:sp>
       <p:sp>
         <p:nvSpPr>
           <p:cNvPr id="2" name="Title 1">
@@ -13034,43 +15346,108 @@
             <p:ph type="title"/>
           </p:nvPr>
         </p:nvSpPr>
-        <p:spPr/>
+        <p:spPr>
+          <a:xfrm>
+            <a:off x="1043631" y="809898"/>
+            <a:ext cx="10173010" cy="1554480"/>
+          </a:xfrm>
+        </p:spPr>
         <p:txBody>
-          <a:bodyPr/>
+          <a:bodyPr anchor="ctr">
+            <a:normAutofit/>
+          </a:bodyPr>
           <a:lstStyle/>
           <a:p>
             <a:r>
-              <a:rPr lang="en-US" dirty="0"/>
+              <a:rPr lang="en-US" sz="4800"/>
               <a:t>Recommendations</a:t>
             </a:r>
           </a:p>
         </p:txBody>
       </p:sp>
-      <p:sp>
-        <p:nvSpPr>
-          <p:cNvPr id="3" name="Content Placeholder 2">
+      <p:cxnSp>
+        <p:nvCxnSpPr>
+          <p:cNvPr id="18" name="Straight Connector 17">
             <a:extLst>
               <a:ext uri="{FF2B5EF4-FFF2-40B4-BE49-F238E27FC236}">
-                <a16:creationId xmlns:a16="http://schemas.microsoft.com/office/drawing/2014/main" id="{1432174E-B03B-5BA6-1C84-A4132D40EE4A}"/>
+                <a16:creationId xmlns:a16="http://schemas.microsoft.com/office/drawing/2014/main" id="{6CF1BAF6-AD41-4082-B212-8A1F9A2E8779}"/>
+              </a:ext>
+              <a:ext uri="{C183D7F6-B498-43B3-948B-1728B52AA6E4}">
+                <adec:decorative xmlns:adec="http://schemas.microsoft.com/office/drawing/2017/decorative" val="1"/>
               </a:ext>
             </a:extLst>
           </p:cNvPr>
-          <p:cNvSpPr>
-            <a:spLocks noGrp="1"/>
-          </p:cNvSpPr>
+          <p:cNvCxnSpPr>
+            <a:cxnSpLocks noGrp="1" noRot="1" noChangeAspect="1" noMove="1" noResize="1" noEditPoints="1" noAdjustHandles="1" noChangeArrowheads="1" noChangeShapeType="1"/>
+          </p:cNvCxnSpPr>
+          <p:nvPr>
+            <p:extLst>
+              <p:ext uri="{386F3935-93C4-4BCD-93E2-E3B085C9AB24}">
+                <p16:designElem xmlns:p16="http://schemas.microsoft.com/office/powerpoint/2015/main" val="1"/>
+              </p:ext>
+            </p:extLst>
+          </p:nvPr>
+        </p:nvCxnSpPr>
+        <p:spPr>
+          <a:xfrm flipH="1">
+            <a:off x="838200" y="6485313"/>
+            <a:ext cx="10515600" cy="0"/>
+          </a:xfrm>
+          <a:prstGeom prst="line">
+            <a:avLst/>
+          </a:prstGeom>
+          <a:ln w="57150">
+            <a:solidFill>
+              <a:schemeClr val="accent4"/>
+            </a:solidFill>
+          </a:ln>
+        </p:spPr>
+        <p:style>
+          <a:lnRef idx="1">
+            <a:schemeClr val="accent1"/>
+          </a:lnRef>
+          <a:fillRef idx="0">
+            <a:schemeClr val="accent1"/>
+          </a:fillRef>
+          <a:effectRef idx="0">
+            <a:schemeClr val="accent1"/>
+          </a:effectRef>
+          <a:fontRef idx="minor">
+            <a:schemeClr val="tx1"/>
+          </a:fontRef>
+        </p:style>
+      </p:cxnSp>
+      <p:graphicFrame>
+        <p:nvGraphicFramePr>
+          <p:cNvPr id="5" name="Content Placeholder 2">
+            <a:extLst>
+              <a:ext uri="{FF2B5EF4-FFF2-40B4-BE49-F238E27FC236}">
+                <a16:creationId xmlns:a16="http://schemas.microsoft.com/office/drawing/2014/main" id="{CF8D51C6-38B2-81C2-EB43-6EA0B62009E4}"/>
+              </a:ext>
+            </a:extLst>
+          </p:cNvPr>
+          <p:cNvGraphicFramePr>
+            <a:graphicFrameLocks noGrp="1"/>
+          </p:cNvGraphicFramePr>
           <p:nvPr>
             <p:ph idx="1"/>
+            <p:extLst>
+              <p:ext uri="{D42A27DB-BD31-4B8C-83A1-F6EECF244321}">
+                <p14:modId xmlns:p14="http://schemas.microsoft.com/office/powerpoint/2010/main" val="2574726882"/>
+              </p:ext>
+            </p:extLst>
           </p:nvPr>
-        </p:nvSpPr>
-        <p:spPr/>
-        <p:txBody>
-          <a:bodyPr/>
-          <a:lstStyle/>
-          <a:p>
-            <a:endParaRPr lang="en-US" dirty="0"/>
-          </a:p>
-        </p:txBody>
-      </p:sp>
+        </p:nvGraphicFramePr>
+        <p:xfrm>
+          <a:off x="904602" y="3017519"/>
+          <a:ext cx="10378440" cy="3209902"/>
+        </p:xfrm>
+        <a:graphic>
+          <a:graphicData uri="http://schemas.openxmlformats.org/drawingml/2006/diagram">
+            <dgm:relIds xmlns:dgm="http://schemas.openxmlformats.org/drawingml/2006/diagram" xmlns:r="http://schemas.openxmlformats.org/officeDocument/2006/relationships" r:dm="rId2" r:lo="rId3" r:qs="rId4" r:cs="rId5"/>
+          </a:graphicData>
+        </a:graphic>
+      </p:graphicFrame>
     </p:spTree>
     <p:extLst>
       <p:ext uri="{BB962C8B-B14F-4D97-AF65-F5344CB8AC3E}">

--- a/Project/slides/CMSC-4200-Group1-Project.pptx
+++ b/Project/slides/CMSC-4200-Group1-Project.pptx
@@ -16,8 +16,8 @@
     <p:sldId id="281" r:id="rId7"/>
     <p:sldId id="264" r:id="rId8"/>
     <p:sldId id="279" r:id="rId9"/>
-    <p:sldId id="265" r:id="rId10"/>
-    <p:sldId id="280" r:id="rId11"/>
+    <p:sldId id="282" r:id="rId10"/>
+    <p:sldId id="283" r:id="rId11"/>
     <p:sldId id="266" r:id="rId12"/>
     <p:sldId id="267" r:id="rId13"/>
     <p:sldId id="268" r:id="rId14"/>
@@ -133,7 +133,7 @@
 <file path=ppt/revisionInfo.xml><?xml version="1.0" encoding="utf-8"?>
 <p1510:revInfo xmlns:a="http://schemas.openxmlformats.org/drawingml/2006/main" xmlns:r="http://schemas.openxmlformats.org/officeDocument/2006/relationships" xmlns:p1510="http://schemas.microsoft.com/office/powerpoint/2015/10/main">
   <p1510:revLst>
-    <p1510:client id="{CC643A21-DF86-4903-A0E1-16499DD88D78}" v="226" dt="2026-03-20T14:50:39.191"/>
+    <p1510:client id="{DFE91101-9C0C-495D-AC60-35A8310EF3A0}" v="4" dt="2026-03-28T19:04:34.220"/>
   </p1510:revLst>
 </p1510:revInfo>
 </file>
@@ -296,21 +296,6 @@
           </ac:spMkLst>
         </pc:spChg>
       </pc:sldChg>
-      <pc:sldChg chg="modSp new mod ord">
-        <pc:chgData name="Margo Bonal" userId="18c9fa0f-b53d-478b-9dc0-6ad88786c19f" providerId="ADAL" clId="{93D479E5-F67F-4B8A-A78F-A0B574A116B6}" dt="2026-03-20T14:22:28.380" v="2284"/>
-        <pc:sldMkLst>
-          <pc:docMk/>
-          <pc:sldMk cId="3330183413" sldId="265"/>
-        </pc:sldMkLst>
-        <pc:spChg chg="mod">
-          <ac:chgData name="Margo Bonal" userId="18c9fa0f-b53d-478b-9dc0-6ad88786c19f" providerId="ADAL" clId="{93D479E5-F67F-4B8A-A78F-A0B574A116B6}" dt="2026-03-14T15:47:30.346" v="345" actId="20577"/>
-          <ac:spMkLst>
-            <pc:docMk/>
-            <pc:sldMk cId="3330183413" sldId="265"/>
-            <ac:spMk id="2" creationId="{0E9721CE-7FDB-6F1E-862D-17EEEB49DF9B}"/>
-          </ac:spMkLst>
-        </pc:spChg>
-      </pc:sldChg>
       <pc:sldChg chg="addSp modSp new mod setBg">
         <pc:chgData name="Margo Bonal" userId="18c9fa0f-b53d-478b-9dc0-6ad88786c19f" providerId="ADAL" clId="{93D479E5-F67F-4B8A-A78F-A0B574A116B6}" dt="2026-03-23T15:41:42.442" v="2589" actId="26606"/>
         <pc:sldMkLst>
@@ -370,14 +355,6 @@
             <pc:docMk/>
             <pc:sldMk cId="4119443303" sldId="267"/>
             <ac:spMk id="2" creationId="{45E01E8D-68C8-D6F0-81C8-63C5F69745F8}"/>
-          </ac:spMkLst>
-        </pc:spChg>
-        <pc:spChg chg="del mod">
-          <ac:chgData name="Margo Bonal" userId="18c9fa0f-b53d-478b-9dc0-6ad88786c19f" providerId="ADAL" clId="{93D479E5-F67F-4B8A-A78F-A0B574A116B6}" dt="2026-03-23T15:43:49.810" v="2724" actId="26606"/>
-          <ac:spMkLst>
-            <pc:docMk/>
-            <pc:sldMk cId="4119443303" sldId="267"/>
-            <ac:spMk id="3" creationId="{1432174E-B03B-5BA6-1C84-A4132D40EE4A}"/>
           </ac:spMkLst>
         </pc:spChg>
         <pc:spChg chg="add">
@@ -712,21 +689,6 @@
           </ac:spMkLst>
         </pc:spChg>
       </pc:sldChg>
-      <pc:sldChg chg="modSp new mod">
-        <pc:chgData name="Margo Bonal" userId="18c9fa0f-b53d-478b-9dc0-6ad88786c19f" providerId="ADAL" clId="{93D479E5-F67F-4B8A-A78F-A0B574A116B6}" dt="2026-03-20T14:48:22.777" v="2516" actId="20577"/>
-        <pc:sldMkLst>
-          <pc:docMk/>
-          <pc:sldMk cId="1241832078" sldId="280"/>
-        </pc:sldMkLst>
-        <pc:spChg chg="mod">
-          <ac:chgData name="Margo Bonal" userId="18c9fa0f-b53d-478b-9dc0-6ad88786c19f" providerId="ADAL" clId="{93D479E5-F67F-4B8A-A78F-A0B574A116B6}" dt="2026-03-20T14:48:22.777" v="2516" actId="20577"/>
-          <ac:spMkLst>
-            <pc:docMk/>
-            <pc:sldMk cId="1241832078" sldId="280"/>
-            <ac:spMk id="2" creationId="{0323EFBA-DE92-D377-1D39-284CAE8AD33D}"/>
-          </ac:spMkLst>
-        </pc:spChg>
-      </pc:sldChg>
       <pc:sldChg chg="addSp delSp modSp add mod ord">
         <pc:chgData name="Margo Bonal" userId="18c9fa0f-b53d-478b-9dc0-6ad88786c19f" providerId="ADAL" clId="{93D479E5-F67F-4B8A-A78F-A0B574A116B6}" dt="2026-03-20T14:47:52.239" v="2496" actId="1076"/>
         <pc:sldMkLst>
@@ -749,6 +711,97 @@
             <ac:spMk id="5" creationId="{105BD97F-88FC-7D2D-6D0A-263599A3073E}"/>
           </ac:spMkLst>
         </pc:spChg>
+      </pc:sldChg>
+    </pc:docChg>
+  </pc:docChgLst>
+  <pc:docChgLst>
+    <pc:chgData name="Luke ruffing" userId="c83d55373a9d0f60" providerId="LiveId" clId="{6963CA54-E4A7-4828-84AB-93F82157D440}"/>
+    <pc:docChg chg="undo custSel addSld delSld modSld sldOrd">
+      <pc:chgData name="Luke ruffing" userId="c83d55373a9d0f60" providerId="LiveId" clId="{6963CA54-E4A7-4828-84AB-93F82157D440}" dt="2026-03-28T19:04:34.219" v="1492" actId="20578"/>
+      <pc:docMkLst>
+        <pc:docMk/>
+      </pc:docMkLst>
+      <pc:sldChg chg="modSp mod">
+        <pc:chgData name="Luke ruffing" userId="c83d55373a9d0f60" providerId="LiveId" clId="{6963CA54-E4A7-4828-84AB-93F82157D440}" dt="2026-03-28T18:21:58.414" v="1" actId="1076"/>
+        <pc:sldMkLst>
+          <pc:docMk/>
+          <pc:sldMk cId="1605171173" sldId="263"/>
+        </pc:sldMkLst>
+        <pc:spChg chg="mod">
+          <ac:chgData name="Luke ruffing" userId="c83d55373a9d0f60" providerId="LiveId" clId="{6963CA54-E4A7-4828-84AB-93F82157D440}" dt="2026-03-28T18:21:58.414" v="1" actId="1076"/>
+          <ac:spMkLst>
+            <pc:docMk/>
+            <pc:sldMk cId="1605171173" sldId="263"/>
+            <ac:spMk id="3" creationId="{10ABEB13-E101-00CE-9CC4-735B136CA6F3}"/>
+          </ac:spMkLst>
+        </pc:spChg>
+      </pc:sldChg>
+      <pc:sldChg chg="del">
+        <pc:chgData name="Luke ruffing" userId="c83d55373a9d0f60" providerId="LiveId" clId="{6963CA54-E4A7-4828-84AB-93F82157D440}" dt="2026-03-28T18:22:23.935" v="5" actId="2696"/>
+        <pc:sldMkLst>
+          <pc:docMk/>
+          <pc:sldMk cId="3330183413" sldId="265"/>
+        </pc:sldMkLst>
+      </pc:sldChg>
+      <pc:sldChg chg="del">
+        <pc:chgData name="Luke ruffing" userId="c83d55373a9d0f60" providerId="LiveId" clId="{6963CA54-E4A7-4828-84AB-93F82157D440}" dt="2026-03-28T18:59:08.471" v="1349" actId="2696"/>
+        <pc:sldMkLst>
+          <pc:docMk/>
+          <pc:sldMk cId="1241832078" sldId="280"/>
+        </pc:sldMkLst>
+      </pc:sldChg>
+      <pc:sldChg chg="modSp add mod ord">
+        <pc:chgData name="Luke ruffing" userId="c83d55373a9d0f60" providerId="LiveId" clId="{6963CA54-E4A7-4828-84AB-93F82157D440}" dt="2026-03-28T19:00:19.382" v="1385" actId="20577"/>
+        <pc:sldMkLst>
+          <pc:docMk/>
+          <pc:sldMk cId="3932995078" sldId="282"/>
+        </pc:sldMkLst>
+        <pc:spChg chg="mod">
+          <ac:chgData name="Luke ruffing" userId="c83d55373a9d0f60" providerId="LiveId" clId="{6963CA54-E4A7-4828-84AB-93F82157D440}" dt="2026-03-28T18:22:39.099" v="13" actId="1076"/>
+          <ac:spMkLst>
+            <pc:docMk/>
+            <pc:sldMk cId="3932995078" sldId="282"/>
+            <ac:spMk id="2" creationId="{A8B4F316-66AE-96F3-5B49-868141F72C72}"/>
+          </ac:spMkLst>
+        </pc:spChg>
+        <pc:spChg chg="mod">
+          <ac:chgData name="Luke ruffing" userId="c83d55373a9d0f60" providerId="LiveId" clId="{6963CA54-E4A7-4828-84AB-93F82157D440}" dt="2026-03-28T19:00:19.382" v="1385" actId="20577"/>
+          <ac:spMkLst>
+            <pc:docMk/>
+            <pc:sldMk cId="3932995078" sldId="282"/>
+            <ac:spMk id="3" creationId="{27033F78-12A5-C599-2958-D2A9138E70D2}"/>
+          </ac:spMkLst>
+        </pc:spChg>
+      </pc:sldChg>
+      <pc:sldChg chg="modSp add mod ord">
+        <pc:chgData name="Luke ruffing" userId="c83d55373a9d0f60" providerId="LiveId" clId="{6963CA54-E4A7-4828-84AB-93F82157D440}" dt="2026-03-28T19:04:34.219" v="1492" actId="20578"/>
+        <pc:sldMkLst>
+          <pc:docMk/>
+          <pc:sldMk cId="1221874192" sldId="283"/>
+        </pc:sldMkLst>
+        <pc:spChg chg="mod">
+          <ac:chgData name="Luke ruffing" userId="c83d55373a9d0f60" providerId="LiveId" clId="{6963CA54-E4A7-4828-84AB-93F82157D440}" dt="2026-03-28T18:59:17.128" v="1361" actId="20577"/>
+          <ac:spMkLst>
+            <pc:docMk/>
+            <pc:sldMk cId="1221874192" sldId="283"/>
+            <ac:spMk id="2" creationId="{94C4550D-B994-49F2-6107-33DC5C4EC652}"/>
+          </ac:spMkLst>
+        </pc:spChg>
+        <pc:spChg chg="mod">
+          <ac:chgData name="Luke ruffing" userId="c83d55373a9d0f60" providerId="LiveId" clId="{6963CA54-E4A7-4828-84AB-93F82157D440}" dt="2026-03-28T19:04:34.219" v="1492" actId="20578"/>
+          <ac:spMkLst>
+            <pc:docMk/>
+            <pc:sldMk cId="1221874192" sldId="283"/>
+            <ac:spMk id="5" creationId="{1896BEE3-697D-90C4-333C-6ABB24067F5D}"/>
+          </ac:spMkLst>
+        </pc:spChg>
+      </pc:sldChg>
+      <pc:sldChg chg="add del ord">
+        <pc:chgData name="Luke ruffing" userId="c83d55373a9d0f60" providerId="LiveId" clId="{6963CA54-E4A7-4828-84AB-93F82157D440}" dt="2026-03-28T18:58:53.766" v="1345" actId="2696"/>
+        <pc:sldMkLst>
+          <pc:docMk/>
+          <pc:sldMk cId="1525693167" sldId="283"/>
+        </pc:sldMkLst>
       </pc:sldChg>
     </pc:docChg>
   </pc:docChgLst>
@@ -10249,7 +10302,7 @@
           <a:p>
             <a:fld id="{156D597D-8B24-4838-871A-61B024263B13}" type="datetimeFigureOut">
               <a:rPr lang="en-US" smtClean="0"/>
-              <a:t>3/23/2026</a:t>
+              <a:t>3/28/2026</a:t>
             </a:fld>
             <a:endParaRPr lang="en-US" dirty="0"/>
           </a:p>
@@ -10663,7 +10716,7 @@
           <a:p>
             <a:fld id="{3CADBD16-5BFB-4D9F-9646-C75D1B53BBB6}" type="datetimeFigureOut">
               <a:rPr lang="en-US" smtClean="0"/>
-              <a:t>3/23/2026</a:t>
+              <a:t>3/28/2026</a:t>
             </a:fld>
             <a:endParaRPr lang="en-US" dirty="0"/>
           </a:p>
@@ -10861,7 +10914,7 @@
           <a:p>
             <a:fld id="{3CADBD16-5BFB-4D9F-9646-C75D1B53BBB6}" type="datetimeFigureOut">
               <a:rPr lang="en-US" smtClean="0"/>
-              <a:t>3/23/2026</a:t>
+              <a:t>3/28/2026</a:t>
             </a:fld>
             <a:endParaRPr lang="en-US" dirty="0"/>
           </a:p>
@@ -11069,7 +11122,7 @@
           <a:p>
             <a:fld id="{3CADBD16-5BFB-4D9F-9646-C75D1B53BBB6}" type="datetimeFigureOut">
               <a:rPr lang="en-US" smtClean="0"/>
-              <a:t>3/23/2026</a:t>
+              <a:t>3/28/2026</a:t>
             </a:fld>
             <a:endParaRPr lang="en-US" dirty="0"/>
           </a:p>
@@ -11267,7 +11320,7 @@
           <a:p>
             <a:fld id="{3CADBD16-5BFB-4D9F-9646-C75D1B53BBB6}" type="datetimeFigureOut">
               <a:rPr lang="en-US" smtClean="0"/>
-              <a:t>3/23/2026</a:t>
+              <a:t>3/28/2026</a:t>
             </a:fld>
             <a:endParaRPr lang="en-US" dirty="0"/>
           </a:p>
@@ -11542,7 +11595,7 @@
           <a:p>
             <a:fld id="{3CADBD16-5BFB-4D9F-9646-C75D1B53BBB6}" type="datetimeFigureOut">
               <a:rPr lang="en-US" smtClean="0"/>
-              <a:t>3/23/2026</a:t>
+              <a:t>3/28/2026</a:t>
             </a:fld>
             <a:endParaRPr lang="en-US" dirty="0"/>
           </a:p>
@@ -11807,7 +11860,7 @@
           <a:p>
             <a:fld id="{3CADBD16-5BFB-4D9F-9646-C75D1B53BBB6}" type="datetimeFigureOut">
               <a:rPr lang="en-US" smtClean="0"/>
-              <a:t>3/23/2026</a:t>
+              <a:t>3/28/2026</a:t>
             </a:fld>
             <a:endParaRPr lang="en-US" dirty="0"/>
           </a:p>
@@ -12219,7 +12272,7 @@
           <a:p>
             <a:fld id="{3CADBD16-5BFB-4D9F-9646-C75D1B53BBB6}" type="datetimeFigureOut">
               <a:rPr lang="en-US" smtClean="0"/>
-              <a:t>3/23/2026</a:t>
+              <a:t>3/28/2026</a:t>
             </a:fld>
             <a:endParaRPr lang="en-US" dirty="0"/>
           </a:p>
@@ -12360,7 +12413,7 @@
           <a:p>
             <a:fld id="{3CADBD16-5BFB-4D9F-9646-C75D1B53BBB6}" type="datetimeFigureOut">
               <a:rPr lang="en-US" smtClean="0"/>
-              <a:t>3/23/2026</a:t>
+              <a:t>3/28/2026</a:t>
             </a:fld>
             <a:endParaRPr lang="en-US" dirty="0"/>
           </a:p>
@@ -12473,7 +12526,7 @@
           <a:p>
             <a:fld id="{3CADBD16-5BFB-4D9F-9646-C75D1B53BBB6}" type="datetimeFigureOut">
               <a:rPr lang="en-US" smtClean="0"/>
-              <a:t>3/23/2026</a:t>
+              <a:t>3/28/2026</a:t>
             </a:fld>
             <a:endParaRPr lang="en-US" dirty="0"/>
           </a:p>
@@ -12784,7 +12837,7 @@
           <a:p>
             <a:fld id="{3CADBD16-5BFB-4D9F-9646-C75D1B53BBB6}" type="datetimeFigureOut">
               <a:rPr lang="en-US" smtClean="0"/>
-              <a:t>3/23/2026</a:t>
+              <a:t>3/28/2026</a:t>
             </a:fld>
             <a:endParaRPr lang="en-US" dirty="0"/>
           </a:p>
@@ -13072,7 +13125,7 @@
           <a:p>
             <a:fld id="{3CADBD16-5BFB-4D9F-9646-C75D1B53BBB6}" type="datetimeFigureOut">
               <a:rPr lang="en-US" smtClean="0"/>
-              <a:t>3/23/2026</a:t>
+              <a:t>3/28/2026</a:t>
             </a:fld>
             <a:endParaRPr lang="en-US" dirty="0"/>
           </a:p>
@@ -13314,7 +13367,7 @@
             <a:fld id="{3CADBD16-5BFB-4D9F-9646-C75D1B53BBB6}" type="datetimeFigureOut">
               <a:rPr lang="en-US" smtClean="0"/>
               <a:pPr/>
-              <a:t>3/23/2026</a:t>
+              <a:t>3/28/2026</a:t>
             </a:fld>
             <a:endParaRPr lang="en-US" dirty="0"/>
           </a:p>
@@ -14463,9 +14516,23 @@
 <file path=ppt/slides/slide10.xml><?xml version="1.0" encoding="utf-8"?>
 <p:sld xmlns:a="http://schemas.openxmlformats.org/drawingml/2006/main" xmlns:r="http://schemas.openxmlformats.org/officeDocument/2006/relationships" xmlns:p="http://schemas.openxmlformats.org/presentationml/2006/main">
   <p:cSld>
+    <p:bg>
+      <p:bgPr>
+        <a:solidFill>
+          <a:schemeClr val="bg1"/>
+        </a:solidFill>
+        <a:effectLst/>
+      </p:bgPr>
+    </p:bg>
     <p:spTree>
       <p:nvGrpSpPr>
-        <p:cNvPr id="1" name=""/>
+        <p:cNvPr id="1" name="">
+          <a:extLst>
+            <a:ext uri="{FF2B5EF4-FFF2-40B4-BE49-F238E27FC236}">
+              <a16:creationId xmlns:a16="http://schemas.microsoft.com/office/drawing/2014/main" id="{3CFACA77-6FEC-C151-677F-F0ACAD003D12}"/>
+            </a:ext>
+          </a:extLst>
+        </p:cNvPr>
         <p:cNvGrpSpPr/>
         <p:nvPr/>
       </p:nvGrpSpPr>
@@ -14477,12 +14544,314 @@
           <a:chExt cx="0" cy="0"/>
         </a:xfrm>
       </p:grpSpPr>
+      <p:sp useBgFill="1">
+        <p:nvSpPr>
+          <p:cNvPr id="20" name="Rectangle 19">
+            <a:extLst>
+              <a:ext uri="{FF2B5EF4-FFF2-40B4-BE49-F238E27FC236}">
+                <a16:creationId xmlns:a16="http://schemas.microsoft.com/office/drawing/2014/main" id="{C4AA0ADD-80A5-761A-221C-411AA183EA68}"/>
+              </a:ext>
+              <a:ext uri="{C183D7F6-B498-43B3-948B-1728B52AA6E4}">
+                <adec:decorative xmlns:adec="http://schemas.microsoft.com/office/drawing/2017/decorative" val="1"/>
+              </a:ext>
+            </a:extLst>
+          </p:cNvPr>
+          <p:cNvSpPr>
+            <a:spLocks noGrp="1" noRot="1" noChangeAspect="1" noMove="1" noResize="1" noEditPoints="1" noAdjustHandles="1" noChangeArrowheads="1" noChangeShapeType="1" noTextEdit="1"/>
+          </p:cNvSpPr>
+          <p:nvPr>
+            <p:extLst>
+              <p:ext uri="{386F3935-93C4-4BCD-93E2-E3B085C9AB24}">
+                <p16:designElem xmlns:p16="http://schemas.microsoft.com/office/powerpoint/2015/main" val="1"/>
+              </p:ext>
+            </p:extLst>
+          </p:nvPr>
+        </p:nvSpPr>
+        <p:spPr>
+          <a:xfrm>
+            <a:off x="0" y="0"/>
+            <a:ext cx="12192000" cy="6858000"/>
+          </a:xfrm>
+          <a:prstGeom prst="rect">
+            <a:avLst/>
+          </a:prstGeom>
+          <a:ln w="12700" cap="flat" cmpd="sng" algn="ctr">
+            <a:noFill/>
+            <a:prstDash val="solid"/>
+            <a:miter lim="800000"/>
+          </a:ln>
+          <a:effectLst/>
+          <a:extLst>
+            <a:ext uri="{91240B29-F687-4F45-9708-019B960494DF}">
+              <a14:hiddenLine xmlns:a14="http://schemas.microsoft.com/office/drawing/2010/main" w="12700" cap="flat" cmpd="sng" algn="ctr">
+                <a:solidFill>
+                  <a:schemeClr val="accent1">
+                    <a:shade val="50000"/>
+                  </a:schemeClr>
+                </a:solidFill>
+                <a:prstDash val="solid"/>
+                <a:miter lim="800000"/>
+              </a14:hiddenLine>
+            </a:ext>
+          </a:extLst>
+        </p:spPr>
+        <p:style>
+          <a:lnRef idx="2">
+            <a:schemeClr val="accent1">
+              <a:shade val="50000"/>
+            </a:schemeClr>
+          </a:lnRef>
+          <a:fillRef idx="1">
+            <a:schemeClr val="accent1"/>
+          </a:fillRef>
+          <a:effectRef idx="0">
+            <a:schemeClr val="accent1"/>
+          </a:effectRef>
+          <a:fontRef idx="minor">
+            <a:schemeClr val="lt1"/>
+          </a:fontRef>
+        </p:style>
+        <p:txBody>
+          <a:bodyPr rtlCol="0" anchor="ctr"/>
+          <a:lstStyle/>
+          <a:p>
+            <a:pPr algn="ctr"/>
+            <a:endParaRPr lang="en-US" dirty="0"/>
+          </a:p>
+        </p:txBody>
+      </p:sp>
+      <p:sp>
+        <p:nvSpPr>
+          <p:cNvPr id="22" name="Rectangle 21">
+            <a:extLst>
+              <a:ext uri="{FF2B5EF4-FFF2-40B4-BE49-F238E27FC236}">
+                <a16:creationId xmlns:a16="http://schemas.microsoft.com/office/drawing/2014/main" id="{DB7BB62F-B221-8ADF-FB85-68660B92112C}"/>
+              </a:ext>
+              <a:ext uri="{C183D7F6-B498-43B3-948B-1728B52AA6E4}">
+                <adec:decorative xmlns:adec="http://schemas.microsoft.com/office/drawing/2017/decorative" val="1"/>
+              </a:ext>
+            </a:extLst>
+          </p:cNvPr>
+          <p:cNvSpPr>
+            <a:spLocks noGrp="1" noRot="1" noChangeAspect="1" noMove="1" noResize="1" noEditPoints="1" noAdjustHandles="1" noChangeArrowheads="1" noChangeShapeType="1" noTextEdit="1"/>
+          </p:cNvSpPr>
+          <p:nvPr>
+            <p:extLst>
+              <p:ext uri="{386F3935-93C4-4BCD-93E2-E3B085C9AB24}">
+                <p16:designElem xmlns:p16="http://schemas.microsoft.com/office/powerpoint/2015/main" val="1"/>
+              </p:ext>
+            </p:extLst>
+          </p:nvPr>
+        </p:nvSpPr>
+        <p:spPr>
+          <a:xfrm flipH="1">
+            <a:off x="2" y="0"/>
+            <a:ext cx="12191998" cy="1575955"/>
+          </a:xfrm>
+          <a:prstGeom prst="rect">
+            <a:avLst/>
+          </a:prstGeom>
+          <a:gradFill>
+            <a:gsLst>
+              <a:gs pos="0">
+                <a:srgbClr val="000000">
+                  <a:alpha val="96000"/>
+                </a:srgbClr>
+              </a:gs>
+              <a:gs pos="100000">
+                <a:schemeClr val="accent1">
+                  <a:lumMod val="75000"/>
+                </a:schemeClr>
+              </a:gs>
+            </a:gsLst>
+            <a:lin ang="8400000" scaled="0"/>
+          </a:gradFill>
+          <a:ln>
+            <a:noFill/>
+          </a:ln>
+        </p:spPr>
+        <p:style>
+          <a:lnRef idx="2">
+            <a:schemeClr val="accent1">
+              <a:shade val="50000"/>
+            </a:schemeClr>
+          </a:lnRef>
+          <a:fillRef idx="1">
+            <a:schemeClr val="accent1"/>
+          </a:fillRef>
+          <a:effectRef idx="0">
+            <a:schemeClr val="accent1"/>
+          </a:effectRef>
+          <a:fontRef idx="minor">
+            <a:schemeClr val="lt1"/>
+          </a:fontRef>
+        </p:style>
+        <p:txBody>
+          <a:bodyPr rtlCol="0" anchor="ctr"/>
+          <a:lstStyle/>
+          <a:p>
+            <a:pPr algn="ctr"/>
+            <a:endParaRPr lang="en-US" dirty="0"/>
+          </a:p>
+        </p:txBody>
+      </p:sp>
+      <p:sp>
+        <p:nvSpPr>
+          <p:cNvPr id="24" name="Rectangle 23">
+            <a:extLst>
+              <a:ext uri="{FF2B5EF4-FFF2-40B4-BE49-F238E27FC236}">
+                <a16:creationId xmlns:a16="http://schemas.microsoft.com/office/drawing/2014/main" id="{23822C2B-B6DD-F7FF-492D-BF6B55D6FF2C}"/>
+              </a:ext>
+              <a:ext uri="{C183D7F6-B498-43B3-948B-1728B52AA6E4}">
+                <adec:decorative xmlns:adec="http://schemas.microsoft.com/office/drawing/2017/decorative" val="1"/>
+              </a:ext>
+            </a:extLst>
+          </p:cNvPr>
+          <p:cNvSpPr>
+            <a:spLocks noGrp="1" noRot="1" noChangeAspect="1" noMove="1" noResize="1" noEditPoints="1" noAdjustHandles="1" noChangeArrowheads="1" noChangeShapeType="1" noTextEdit="1"/>
+          </p:cNvSpPr>
+          <p:nvPr>
+            <p:extLst>
+              <p:ext uri="{386F3935-93C4-4BCD-93E2-E3B085C9AB24}">
+                <p16:designElem xmlns:p16="http://schemas.microsoft.com/office/powerpoint/2015/main" val="1"/>
+              </p:ext>
+            </p:extLst>
+          </p:nvPr>
+        </p:nvSpPr>
+        <p:spPr>
+          <a:xfrm rot="10800000" flipH="1">
+            <a:off x="8128857" y="0"/>
+            <a:ext cx="4063143" cy="1576412"/>
+          </a:xfrm>
+          <a:prstGeom prst="rect">
+            <a:avLst/>
+          </a:prstGeom>
+          <a:gradFill>
+            <a:gsLst>
+              <a:gs pos="19000">
+                <a:schemeClr val="accent1">
+                  <a:lumMod val="50000"/>
+                  <a:alpha val="68000"/>
+                </a:schemeClr>
+              </a:gs>
+              <a:gs pos="100000">
+                <a:schemeClr val="accent1">
+                  <a:alpha val="79000"/>
+                </a:schemeClr>
+              </a:gs>
+            </a:gsLst>
+            <a:lin ang="19200000" scaled="0"/>
+          </a:gradFill>
+          <a:ln>
+            <a:noFill/>
+          </a:ln>
+        </p:spPr>
+        <p:style>
+          <a:lnRef idx="2">
+            <a:schemeClr val="accent1">
+              <a:shade val="50000"/>
+            </a:schemeClr>
+          </a:lnRef>
+          <a:fillRef idx="1">
+            <a:schemeClr val="accent1"/>
+          </a:fillRef>
+          <a:effectRef idx="0">
+            <a:schemeClr val="accent1"/>
+          </a:effectRef>
+          <a:fontRef idx="minor">
+            <a:schemeClr val="lt1"/>
+          </a:fontRef>
+        </p:style>
+        <p:txBody>
+          <a:bodyPr rtlCol="0" anchor="ctr"/>
+          <a:lstStyle/>
+          <a:p>
+            <a:pPr algn="ctr"/>
+            <a:endParaRPr lang="en-US" dirty="0"/>
+          </a:p>
+        </p:txBody>
+      </p:sp>
+      <p:sp>
+        <p:nvSpPr>
+          <p:cNvPr id="26" name="Rectangle 25">
+            <a:extLst>
+              <a:ext uri="{FF2B5EF4-FFF2-40B4-BE49-F238E27FC236}">
+                <a16:creationId xmlns:a16="http://schemas.microsoft.com/office/drawing/2014/main" id="{4B9ED5CA-89E4-9FB0-8096-6CAFE5D85E57}"/>
+              </a:ext>
+              <a:ext uri="{C183D7F6-B498-43B3-948B-1728B52AA6E4}">
+                <adec:decorative xmlns:adec="http://schemas.microsoft.com/office/drawing/2017/decorative" val="1"/>
+              </a:ext>
+            </a:extLst>
+          </p:cNvPr>
+          <p:cNvSpPr>
+            <a:spLocks noGrp="1" noRot="1" noChangeAspect="1" noMove="1" noResize="1" noEditPoints="1" noAdjustHandles="1" noChangeArrowheads="1" noChangeShapeType="1" noTextEdit="1"/>
+          </p:cNvSpPr>
+          <p:nvPr>
+            <p:extLst>
+              <p:ext uri="{386F3935-93C4-4BCD-93E2-E3B085C9AB24}">
+                <p16:designElem xmlns:p16="http://schemas.microsoft.com/office/powerpoint/2015/main" val="1"/>
+              </p:ext>
+            </p:extLst>
+          </p:nvPr>
+        </p:nvSpPr>
+        <p:spPr>
+          <a:xfrm rot="5400000">
+            <a:off x="5307777" y="-5307778"/>
+            <a:ext cx="1576446" cy="12192002"/>
+          </a:xfrm>
+          <a:prstGeom prst="rect">
+            <a:avLst/>
+          </a:prstGeom>
+          <a:gradFill>
+            <a:gsLst>
+              <a:gs pos="23000">
+                <a:schemeClr val="accent1">
+                  <a:alpha val="0"/>
+                </a:schemeClr>
+              </a:gs>
+              <a:gs pos="99000">
+                <a:srgbClr val="000000">
+                  <a:alpha val="74000"/>
+                </a:srgbClr>
+              </a:gs>
+            </a:gsLst>
+            <a:lin ang="20400000" scaled="0"/>
+          </a:gradFill>
+          <a:ln>
+            <a:noFill/>
+          </a:ln>
+        </p:spPr>
+        <p:style>
+          <a:lnRef idx="2">
+            <a:schemeClr val="accent1">
+              <a:shade val="50000"/>
+            </a:schemeClr>
+          </a:lnRef>
+          <a:fillRef idx="1">
+            <a:schemeClr val="accent1"/>
+          </a:fillRef>
+          <a:effectRef idx="0">
+            <a:schemeClr val="accent1"/>
+          </a:effectRef>
+          <a:fontRef idx="minor">
+            <a:schemeClr val="lt1"/>
+          </a:fontRef>
+        </p:style>
+        <p:txBody>
+          <a:bodyPr rtlCol="0" anchor="ctr"/>
+          <a:lstStyle/>
+          <a:p>
+            <a:pPr algn="ctr"/>
+            <a:endParaRPr lang="en-US" dirty="0"/>
+          </a:p>
+        </p:txBody>
+      </p:sp>
       <p:sp>
         <p:nvSpPr>
           <p:cNvPr id="2" name="Title 1">
             <a:extLst>
               <a:ext uri="{FF2B5EF4-FFF2-40B4-BE49-F238E27FC236}">
-                <a16:creationId xmlns:a16="http://schemas.microsoft.com/office/drawing/2014/main" id="{0323EFBA-DE92-D377-1D39-284CAE8AD33D}"/>
+                <a16:creationId xmlns:a16="http://schemas.microsoft.com/office/drawing/2014/main" id="{94C4550D-B994-49F2-6107-33DC5C4EC652}"/>
               </a:ext>
             </a:extLst>
           </p:cNvPr>
@@ -14493,24 +14862,36 @@
             <p:ph type="title"/>
           </p:nvPr>
         </p:nvSpPr>
-        <p:spPr/>
+        <p:spPr>
+          <a:xfrm>
+            <a:off x="3724941" y="349112"/>
+            <a:ext cx="4403915" cy="877729"/>
+          </a:xfrm>
+        </p:spPr>
         <p:txBody>
-          <a:bodyPr/>
+          <a:bodyPr anchor="ctr">
+            <a:normAutofit/>
+          </a:bodyPr>
           <a:lstStyle/>
           <a:p>
+            <a:pPr algn="ctr"/>
             <a:r>
-              <a:rPr lang="en-US" dirty="0"/>
-              <a:t>Copilot Evaluation</a:t>
+              <a:rPr lang="en-US" sz="4000" dirty="0">
+                <a:solidFill>
+                  <a:schemeClr val="bg1"/>
+                </a:solidFill>
+              </a:rPr>
+              <a:t>CoPilot Evaluation</a:t>
             </a:r>
           </a:p>
         </p:txBody>
       </p:sp>
       <p:sp>
         <p:nvSpPr>
-          <p:cNvPr id="3" name="Content Placeholder 2">
+          <p:cNvPr id="5" name="Content Placeholder 5">
             <a:extLst>
               <a:ext uri="{FF2B5EF4-FFF2-40B4-BE49-F238E27FC236}">
-                <a16:creationId xmlns:a16="http://schemas.microsoft.com/office/drawing/2014/main" id="{E0EEFB2B-C76E-42C5-DEB1-1EA4A70251B6}"/>
+                <a16:creationId xmlns:a16="http://schemas.microsoft.com/office/drawing/2014/main" id="{1896BEE3-697D-90C4-333C-6ABB24067F5D}"/>
               </a:ext>
             </a:extLst>
           </p:cNvPr>
@@ -14521,19 +14902,50 @@
             <p:ph idx="1"/>
           </p:nvPr>
         </p:nvSpPr>
-        <p:spPr/>
+        <p:spPr>
+          <a:xfrm>
+            <a:off x="1019735" y="2255931"/>
+            <a:ext cx="10515600" cy="2887569"/>
+          </a:xfrm>
+        </p:spPr>
         <p:txBody>
-          <a:bodyPr/>
+          <a:bodyPr>
+            <a:normAutofit/>
+          </a:bodyPr>
           <a:lstStyle/>
           <a:p>
-            <a:endParaRPr lang="en-US"/>
+            <a:r>
+              <a:rPr lang="en-US" dirty="0"/>
+              <a:t>Successfully interpreted prompts and generated logical solutions</a:t>
+            </a:r>
+          </a:p>
+          <a:p>
+            <a:r>
+              <a:rPr lang="en-US" dirty="0"/>
+              <a:t>Breaking prompts into sections improved logic and readability</a:t>
+            </a:r>
+          </a:p>
+          <a:p>
+            <a:r>
+              <a:rPr lang="en-US" dirty="0"/>
+              <a:t>Generated sample code for some prompts</a:t>
+            </a:r>
+          </a:p>
+          <a:p>
+            <a:r>
+              <a:rPr lang="en-US" dirty="0"/>
+              <a:t>Gave mostly clear concise answers</a:t>
+            </a:r>
+          </a:p>
+          <a:p>
+            <a:endParaRPr lang="en-US" dirty="0"/>
           </a:p>
         </p:txBody>
       </p:sp>
     </p:spTree>
     <p:extLst>
       <p:ext uri="{BB962C8B-B14F-4D97-AF65-F5344CB8AC3E}">
-        <p14:creationId xmlns:p14="http://schemas.microsoft.com/office/powerpoint/2010/main" val="1241832078"/>
+        <p14:creationId xmlns:p14="http://schemas.microsoft.com/office/powerpoint/2010/main" val="1221874192"/>
       </p:ext>
     </p:extLst>
   </p:cSld>
@@ -18609,15 +19021,7 @@
             <a:pPr lvl="1"/>
             <a:r>
               <a:rPr lang="en-US" sz="1800" dirty="0"/>
-              <a:t>D</a:t>
-            </a:r>
-            <a:r>
-              <a:rPr lang="en-US" sz="1800"/>
-              <a:t>esigned </a:t>
-            </a:r>
-            <a:r>
-              <a:rPr lang="en-US" sz="1800" dirty="0"/>
-              <a:t>specifically for password storage, provide strong protection against brute force attacks, and are fast enough that hashing and verification</a:t>
+              <a:t>Designed specifically for password storage, provide strong protection against brute force attacks, and are fast enough that hashing and verification</a:t>
             </a:r>
             <a:endParaRPr lang="en-US" sz="1050" dirty="0"/>
           </a:p>
@@ -19352,9 +19756,23 @@
 <file path=ppt/slides/slide9.xml><?xml version="1.0" encoding="utf-8"?>
 <p:sld xmlns:a="http://schemas.openxmlformats.org/drawingml/2006/main" xmlns:r="http://schemas.openxmlformats.org/officeDocument/2006/relationships" xmlns:p="http://schemas.openxmlformats.org/presentationml/2006/main">
   <p:cSld>
+    <p:bg>
+      <p:bgPr>
+        <a:solidFill>
+          <a:schemeClr val="bg1"/>
+        </a:solidFill>
+        <a:effectLst/>
+      </p:bgPr>
+    </p:bg>
     <p:spTree>
       <p:nvGrpSpPr>
-        <p:cNvPr id="1" name=""/>
+        <p:cNvPr id="1" name="">
+          <a:extLst>
+            <a:ext uri="{FF2B5EF4-FFF2-40B4-BE49-F238E27FC236}">
+              <a16:creationId xmlns:a16="http://schemas.microsoft.com/office/drawing/2014/main" id="{BDB1D6C8-4F02-8724-1596-0C4A5BE0EAC0}"/>
+            </a:ext>
+          </a:extLst>
+        </p:cNvPr>
         <p:cNvGrpSpPr/>
         <p:nvPr/>
       </p:nvGrpSpPr>
@@ -19366,12 +19784,634 @@
           <a:chExt cx="0" cy="0"/>
         </a:xfrm>
       </p:grpSpPr>
+      <p:sp useBgFill="1">
+        <p:nvSpPr>
+          <p:cNvPr id="8" name="Rectangle 7">
+            <a:extLst>
+              <a:ext uri="{FF2B5EF4-FFF2-40B4-BE49-F238E27FC236}">
+                <a16:creationId xmlns:a16="http://schemas.microsoft.com/office/drawing/2014/main" id="{E413A3D1-5251-0573-87C8-17478FCC8A95}"/>
+              </a:ext>
+              <a:ext uri="{C183D7F6-B498-43B3-948B-1728B52AA6E4}">
+                <adec:decorative xmlns:adec="http://schemas.microsoft.com/office/drawing/2017/decorative" val="1"/>
+              </a:ext>
+            </a:extLst>
+          </p:cNvPr>
+          <p:cNvSpPr>
+            <a:spLocks noGrp="1" noRot="1" noChangeAspect="1" noMove="1" noResize="1" noEditPoints="1" noAdjustHandles="1" noChangeArrowheads="1" noChangeShapeType="1" noTextEdit="1"/>
+          </p:cNvSpPr>
+          <p:nvPr>
+            <p:extLst>
+              <p:ext uri="{386F3935-93C4-4BCD-93E2-E3B085C9AB24}">
+                <p16:designElem xmlns:p16="http://schemas.microsoft.com/office/powerpoint/2015/main" val="1"/>
+              </p:ext>
+            </p:extLst>
+          </p:nvPr>
+        </p:nvSpPr>
+        <p:spPr>
+          <a:xfrm>
+            <a:off x="0" y="0"/>
+            <a:ext cx="12192000" cy="6858000"/>
+          </a:xfrm>
+          <a:prstGeom prst="rect">
+            <a:avLst/>
+          </a:prstGeom>
+          <a:ln w="12700" cap="flat" cmpd="sng" algn="ctr">
+            <a:noFill/>
+            <a:prstDash val="solid"/>
+            <a:miter lim="800000"/>
+          </a:ln>
+          <a:effectLst/>
+          <a:extLst>
+            <a:ext uri="{91240B29-F687-4F45-9708-019B960494DF}">
+              <a14:hiddenLine xmlns:a14="http://schemas.microsoft.com/office/drawing/2010/main" w="12700" cap="flat" cmpd="sng" algn="ctr">
+                <a:solidFill>
+                  <a:schemeClr val="accent1">
+                    <a:shade val="50000"/>
+                  </a:schemeClr>
+                </a:solidFill>
+                <a:prstDash val="solid"/>
+                <a:miter lim="800000"/>
+              </a14:hiddenLine>
+            </a:ext>
+          </a:extLst>
+        </p:spPr>
+        <p:style>
+          <a:lnRef idx="2">
+            <a:schemeClr val="accent1">
+              <a:shade val="50000"/>
+            </a:schemeClr>
+          </a:lnRef>
+          <a:fillRef idx="1">
+            <a:schemeClr val="accent1"/>
+          </a:fillRef>
+          <a:effectRef idx="0">
+            <a:schemeClr val="accent1"/>
+          </a:effectRef>
+          <a:fontRef idx="minor">
+            <a:schemeClr val="lt1"/>
+          </a:fontRef>
+        </p:style>
+        <p:txBody>
+          <a:bodyPr rtlCol="0" anchor="ctr"/>
+          <a:lstStyle/>
+          <a:p>
+            <a:pPr algn="ctr"/>
+            <a:endParaRPr lang="en-US" dirty="0"/>
+          </a:p>
+        </p:txBody>
+      </p:sp>
+      <p:sp useBgFill="1">
+        <p:nvSpPr>
+          <p:cNvPr id="10" name="Rectangle 9">
+            <a:extLst>
+              <a:ext uri="{FF2B5EF4-FFF2-40B4-BE49-F238E27FC236}">
+                <a16:creationId xmlns:a16="http://schemas.microsoft.com/office/drawing/2014/main" id="{1C6B8CE5-AD46-8ADE-E082-E6CA886AE370}"/>
+              </a:ext>
+              <a:ext uri="{C183D7F6-B498-43B3-948B-1728B52AA6E4}">
+                <adec:decorative xmlns:adec="http://schemas.microsoft.com/office/drawing/2017/decorative" val="1"/>
+              </a:ext>
+            </a:extLst>
+          </p:cNvPr>
+          <p:cNvSpPr>
+            <a:spLocks noGrp="1" noRot="1" noChangeAspect="1" noMove="1" noResize="1" noEditPoints="1" noAdjustHandles="1" noChangeArrowheads="1" noChangeShapeType="1" noTextEdit="1"/>
+          </p:cNvSpPr>
+          <p:nvPr>
+            <p:extLst>
+              <p:ext uri="{386F3935-93C4-4BCD-93E2-E3B085C9AB24}">
+                <p16:designElem xmlns:p16="http://schemas.microsoft.com/office/powerpoint/2015/main" val="1"/>
+              </p:ext>
+            </p:extLst>
+          </p:nvPr>
+        </p:nvSpPr>
+        <p:spPr>
+          <a:xfrm>
+            <a:off x="0" y="0"/>
+            <a:ext cx="12188952" cy="6858000"/>
+          </a:xfrm>
+          <a:prstGeom prst="rect">
+            <a:avLst/>
+          </a:prstGeom>
+          <a:ln w="12700" cap="flat" cmpd="sng" algn="ctr">
+            <a:noFill/>
+            <a:prstDash val="solid"/>
+            <a:miter lim="800000"/>
+          </a:ln>
+          <a:effectLst/>
+          <a:extLst>
+            <a:ext uri="{91240B29-F687-4F45-9708-019B960494DF}">
+              <a14:hiddenLine xmlns:a14="http://schemas.microsoft.com/office/drawing/2010/main" w="12700" cap="flat" cmpd="sng" algn="ctr">
+                <a:solidFill>
+                  <a:schemeClr val="accent1">
+                    <a:shade val="50000"/>
+                  </a:schemeClr>
+                </a:solidFill>
+                <a:prstDash val="solid"/>
+                <a:miter lim="800000"/>
+              </a14:hiddenLine>
+            </a:ext>
+          </a:extLst>
+        </p:spPr>
+        <p:style>
+          <a:lnRef idx="2">
+            <a:schemeClr val="accent1">
+              <a:shade val="50000"/>
+            </a:schemeClr>
+          </a:lnRef>
+          <a:fillRef idx="1">
+            <a:schemeClr val="accent1"/>
+          </a:fillRef>
+          <a:effectRef idx="0">
+            <a:schemeClr val="accent1"/>
+          </a:effectRef>
+          <a:fontRef idx="minor">
+            <a:schemeClr val="lt1"/>
+          </a:fontRef>
+        </p:style>
+        <p:txBody>
+          <a:bodyPr rtlCol="0" anchor="ctr"/>
+          <a:lstStyle/>
+          <a:p>
+            <a:pPr algn="ctr"/>
+            <a:endParaRPr lang="en-US" dirty="0"/>
+          </a:p>
+        </p:txBody>
+      </p:sp>
+      <p:sp>
+        <p:nvSpPr>
+          <p:cNvPr id="12" name="Rectangle 11">
+            <a:extLst>
+              <a:ext uri="{FF2B5EF4-FFF2-40B4-BE49-F238E27FC236}">
+                <a16:creationId xmlns:a16="http://schemas.microsoft.com/office/drawing/2014/main" id="{DC27483D-C8FB-34A1-A021-2481637C6016}"/>
+              </a:ext>
+              <a:ext uri="{C183D7F6-B498-43B3-948B-1728B52AA6E4}">
+                <adec:decorative xmlns:adec="http://schemas.microsoft.com/office/drawing/2017/decorative" val="1"/>
+              </a:ext>
+            </a:extLst>
+          </p:cNvPr>
+          <p:cNvSpPr>
+            <a:spLocks noGrp="1" noRot="1" noChangeAspect="1" noMove="1" noResize="1" noEditPoints="1" noAdjustHandles="1" noChangeArrowheads="1" noChangeShapeType="1" noTextEdit="1"/>
+          </p:cNvSpPr>
+          <p:nvPr>
+            <p:extLst>
+              <p:ext uri="{386F3935-93C4-4BCD-93E2-E3B085C9AB24}">
+                <p16:designElem xmlns:p16="http://schemas.microsoft.com/office/powerpoint/2015/main" val="1"/>
+              </p:ext>
+            </p:extLst>
+          </p:nvPr>
+        </p:nvSpPr>
+        <p:spPr>
+          <a:xfrm rot="5400000" flipH="1">
+            <a:off x="-1410084" y="1410082"/>
+            <a:ext cx="6858000" cy="4037836"/>
+          </a:xfrm>
+          <a:prstGeom prst="rect">
+            <a:avLst/>
+          </a:prstGeom>
+          <a:gradFill>
+            <a:gsLst>
+              <a:gs pos="8000">
+                <a:srgbClr val="000000"/>
+              </a:gs>
+              <a:gs pos="100000">
+                <a:schemeClr val="accent1">
+                  <a:lumMod val="75000"/>
+                </a:schemeClr>
+              </a:gs>
+            </a:gsLst>
+            <a:lin ang="3000000" scaled="0"/>
+          </a:gradFill>
+          <a:ln>
+            <a:noFill/>
+          </a:ln>
+        </p:spPr>
+        <p:style>
+          <a:lnRef idx="2">
+            <a:schemeClr val="accent1">
+              <a:shade val="50000"/>
+            </a:schemeClr>
+          </a:lnRef>
+          <a:fillRef idx="1">
+            <a:schemeClr val="accent1"/>
+          </a:fillRef>
+          <a:effectRef idx="0">
+            <a:schemeClr val="accent1"/>
+          </a:effectRef>
+          <a:fontRef idx="minor">
+            <a:schemeClr val="lt1"/>
+          </a:fontRef>
+        </p:style>
+        <p:txBody>
+          <a:bodyPr rtlCol="0" anchor="ctr"/>
+          <a:lstStyle/>
+          <a:p>
+            <a:pPr algn="ctr"/>
+            <a:endParaRPr lang="en-US" dirty="0"/>
+          </a:p>
+        </p:txBody>
+      </p:sp>
+      <p:sp>
+        <p:nvSpPr>
+          <p:cNvPr id="14" name="Rectangle 13">
+            <a:extLst>
+              <a:ext uri="{FF2B5EF4-FFF2-40B4-BE49-F238E27FC236}">
+                <a16:creationId xmlns:a16="http://schemas.microsoft.com/office/drawing/2014/main" id="{8356F12B-B05F-6F3B-8F6E-ABE154AD27AD}"/>
+              </a:ext>
+              <a:ext uri="{C183D7F6-B498-43B3-948B-1728B52AA6E4}">
+                <adec:decorative xmlns:adec="http://schemas.microsoft.com/office/drawing/2017/decorative" val="1"/>
+              </a:ext>
+            </a:extLst>
+          </p:cNvPr>
+          <p:cNvSpPr>
+            <a:spLocks noGrp="1" noRot="1" noChangeAspect="1" noMove="1" noResize="1" noEditPoints="1" noAdjustHandles="1" noChangeArrowheads="1" noChangeShapeType="1" noTextEdit="1"/>
+          </p:cNvSpPr>
+          <p:nvPr>
+            <p:extLst>
+              <p:ext uri="{386F3935-93C4-4BCD-93E2-E3B085C9AB24}">
+                <p16:designElem xmlns:p16="http://schemas.microsoft.com/office/powerpoint/2015/main" val="1"/>
+              </p:ext>
+            </p:extLst>
+          </p:nvPr>
+        </p:nvSpPr>
+        <p:spPr>
+          <a:xfrm rot="5400000" flipH="1">
+            <a:off x="-1410085" y="1420219"/>
+            <a:ext cx="6857999" cy="4037839"/>
+          </a:xfrm>
+          <a:prstGeom prst="rect">
+            <a:avLst/>
+          </a:prstGeom>
+          <a:gradFill>
+            <a:gsLst>
+              <a:gs pos="0">
+                <a:srgbClr val="000000">
+                  <a:alpha val="0"/>
+                </a:srgbClr>
+              </a:gs>
+              <a:gs pos="99000">
+                <a:schemeClr val="accent1">
+                  <a:alpha val="46000"/>
+                </a:schemeClr>
+              </a:gs>
+            </a:gsLst>
+            <a:lin ang="1800000" scaled="0"/>
+          </a:gradFill>
+          <a:ln>
+            <a:noFill/>
+          </a:ln>
+        </p:spPr>
+        <p:style>
+          <a:lnRef idx="2">
+            <a:schemeClr val="accent1">
+              <a:shade val="50000"/>
+            </a:schemeClr>
+          </a:lnRef>
+          <a:fillRef idx="1">
+            <a:schemeClr val="accent1"/>
+          </a:fillRef>
+          <a:effectRef idx="0">
+            <a:schemeClr val="accent1"/>
+          </a:effectRef>
+          <a:fontRef idx="minor">
+            <a:schemeClr val="lt1"/>
+          </a:fontRef>
+        </p:style>
+        <p:txBody>
+          <a:bodyPr rtlCol="0" anchor="ctr"/>
+          <a:lstStyle/>
+          <a:p>
+            <a:pPr algn="ctr"/>
+            <a:endParaRPr lang="en-US" dirty="0"/>
+          </a:p>
+        </p:txBody>
+      </p:sp>
+      <p:sp>
+        <p:nvSpPr>
+          <p:cNvPr id="16" name="Rectangle 15">
+            <a:extLst>
+              <a:ext uri="{FF2B5EF4-FFF2-40B4-BE49-F238E27FC236}">
+                <a16:creationId xmlns:a16="http://schemas.microsoft.com/office/drawing/2014/main" id="{DDFF7ADA-4E82-9612-4783-2821CC2EB086}"/>
+              </a:ext>
+              <a:ext uri="{C183D7F6-B498-43B3-948B-1728B52AA6E4}">
+                <adec:decorative xmlns:adec="http://schemas.microsoft.com/office/drawing/2017/decorative" val="1"/>
+              </a:ext>
+            </a:extLst>
+          </p:cNvPr>
+          <p:cNvSpPr>
+            <a:spLocks noGrp="1" noRot="1" noChangeAspect="1" noMove="1" noResize="1" noEditPoints="1" noAdjustHandles="1" noChangeArrowheads="1" noChangeShapeType="1" noTextEdit="1"/>
+          </p:cNvSpPr>
+          <p:nvPr>
+            <p:extLst>
+              <p:ext uri="{386F3935-93C4-4BCD-93E2-E3B085C9AB24}">
+                <p16:designElem xmlns:p16="http://schemas.microsoft.com/office/powerpoint/2015/main" val="1"/>
+              </p:ext>
+            </p:extLst>
+          </p:nvPr>
+        </p:nvSpPr>
+        <p:spPr>
+          <a:xfrm rot="5400000" flipH="1">
+            <a:off x="767923" y="3588085"/>
+            <a:ext cx="2501979" cy="4037841"/>
+          </a:xfrm>
+          <a:prstGeom prst="rect">
+            <a:avLst/>
+          </a:prstGeom>
+          <a:gradFill>
+            <a:gsLst>
+              <a:gs pos="2000">
+                <a:schemeClr val="accent1">
+                  <a:alpha val="29000"/>
+                </a:schemeClr>
+              </a:gs>
+              <a:gs pos="100000">
+                <a:srgbClr val="000000">
+                  <a:alpha val="30000"/>
+                </a:srgbClr>
+              </a:gs>
+            </a:gsLst>
+            <a:lin ang="7800000" scaled="0"/>
+          </a:gradFill>
+          <a:ln>
+            <a:noFill/>
+          </a:ln>
+        </p:spPr>
+        <p:style>
+          <a:lnRef idx="2">
+            <a:schemeClr val="accent1">
+              <a:shade val="50000"/>
+            </a:schemeClr>
+          </a:lnRef>
+          <a:fillRef idx="1">
+            <a:schemeClr val="accent1"/>
+          </a:fillRef>
+          <a:effectRef idx="0">
+            <a:schemeClr val="accent1"/>
+          </a:effectRef>
+          <a:fontRef idx="minor">
+            <a:schemeClr val="lt1"/>
+          </a:fontRef>
+        </p:style>
+        <p:txBody>
+          <a:bodyPr rtlCol="0" anchor="ctr"/>
+          <a:lstStyle/>
+          <a:p>
+            <a:pPr algn="ctr"/>
+            <a:endParaRPr lang="en-US" dirty="0"/>
+          </a:p>
+        </p:txBody>
+      </p:sp>
+      <p:sp>
+        <p:nvSpPr>
+          <p:cNvPr id="18" name="Freeform: Shape 17">
+            <a:extLst>
+              <a:ext uri="{FF2B5EF4-FFF2-40B4-BE49-F238E27FC236}">
+                <a16:creationId xmlns:a16="http://schemas.microsoft.com/office/drawing/2014/main" id="{9B8E3684-C082-4A54-A45A-435EE5380F3B}"/>
+              </a:ext>
+              <a:ext uri="{C183D7F6-B498-43B3-948B-1728B52AA6E4}">
+                <adec:decorative xmlns:adec="http://schemas.microsoft.com/office/drawing/2017/decorative" val="1"/>
+              </a:ext>
+            </a:extLst>
+          </p:cNvPr>
+          <p:cNvSpPr>
+            <a:spLocks noGrp="1" noRot="1" noChangeAspect="1" noMove="1" noResize="1" noEditPoints="1" noAdjustHandles="1" noChangeArrowheads="1" noChangeShapeType="1" noTextEdit="1"/>
+          </p:cNvSpPr>
+          <p:nvPr>
+            <p:extLst>
+              <p:ext uri="{386F3935-93C4-4BCD-93E2-E3B085C9AB24}">
+                <p16:designElem xmlns:p16="http://schemas.microsoft.com/office/powerpoint/2015/main" val="1"/>
+              </p:ext>
+            </p:extLst>
+          </p:nvPr>
+        </p:nvSpPr>
+        <p:spPr>
+          <a:xfrm rot="20635413">
+            <a:off x="-501737" y="969718"/>
+            <a:ext cx="3900357" cy="4178958"/>
+          </a:xfrm>
+          <a:custGeom>
+            <a:avLst/>
+            <a:gdLst>
+              <a:gd name="connsiteX0" fmla="*/ 2432225 w 3900357"/>
+              <a:gd name="connsiteY0" fmla="*/ 93939 h 4178958"/>
+              <a:gd name="connsiteX1" fmla="*/ 3900357 w 3900357"/>
+              <a:gd name="connsiteY1" fmla="*/ 2089479 h 4178958"/>
+              <a:gd name="connsiteX2" fmla="*/ 1810878 w 3900357"/>
+              <a:gd name="connsiteY2" fmla="*/ 4178958 h 4178958"/>
+              <a:gd name="connsiteX3" fmla="*/ 78249 w 3900357"/>
+              <a:gd name="connsiteY3" fmla="*/ 3257727 h 4178958"/>
+              <a:gd name="connsiteX4" fmla="*/ 0 w 3900357"/>
+              <a:gd name="connsiteY4" fmla="*/ 3128923 h 4178958"/>
+              <a:gd name="connsiteX5" fmla="*/ 831324 w 3900357"/>
+              <a:gd name="connsiteY5" fmla="*/ 244281 h 4178958"/>
+              <a:gd name="connsiteX6" fmla="*/ 997559 w 3900357"/>
+              <a:gd name="connsiteY6" fmla="*/ 164202 h 4178958"/>
+              <a:gd name="connsiteX7" fmla="*/ 1810878 w 3900357"/>
+              <a:gd name="connsiteY7" fmla="*/ 0 h 4178958"/>
+              <a:gd name="connsiteX8" fmla="*/ 2432225 w 3900357"/>
+              <a:gd name="connsiteY8" fmla="*/ 93939 h 4178958"/>
+            </a:gdLst>
+            <a:ahLst/>
+            <a:cxnLst>
+              <a:cxn ang="0">
+                <a:pos x="connsiteX0" y="connsiteY0"/>
+              </a:cxn>
+              <a:cxn ang="0">
+                <a:pos x="connsiteX1" y="connsiteY1"/>
+              </a:cxn>
+              <a:cxn ang="0">
+                <a:pos x="connsiteX2" y="connsiteY2"/>
+              </a:cxn>
+              <a:cxn ang="0">
+                <a:pos x="connsiteX3" y="connsiteY3"/>
+              </a:cxn>
+              <a:cxn ang="0">
+                <a:pos x="connsiteX4" y="connsiteY4"/>
+              </a:cxn>
+              <a:cxn ang="0">
+                <a:pos x="connsiteX5" y="connsiteY5"/>
+              </a:cxn>
+              <a:cxn ang="0">
+                <a:pos x="connsiteX6" y="connsiteY6"/>
+              </a:cxn>
+              <a:cxn ang="0">
+                <a:pos x="connsiteX7" y="connsiteY7"/>
+              </a:cxn>
+              <a:cxn ang="0">
+                <a:pos x="connsiteX8" y="connsiteY8"/>
+              </a:cxn>
+            </a:cxnLst>
+            <a:rect l="l" t="t" r="r" b="b"/>
+            <a:pathLst>
+              <a:path w="3900357" h="4178958">
+                <a:moveTo>
+                  <a:pt x="2432225" y="93939"/>
+                </a:moveTo>
+                <a:cubicBezTo>
+                  <a:pt x="3282786" y="358491"/>
+                  <a:pt x="3900357" y="1151865"/>
+                  <a:pt x="3900357" y="2089479"/>
+                </a:cubicBezTo>
+                <a:cubicBezTo>
+                  <a:pt x="3900357" y="3243466"/>
+                  <a:pt x="2964865" y="4178958"/>
+                  <a:pt x="1810878" y="4178958"/>
+                </a:cubicBezTo>
+                <a:cubicBezTo>
+                  <a:pt x="1089636" y="4178958"/>
+                  <a:pt x="453744" y="3813531"/>
+                  <a:pt x="78249" y="3257727"/>
+                </a:cubicBezTo>
+                <a:lnTo>
+                  <a:pt x="0" y="3128923"/>
+                </a:lnTo>
+                <a:lnTo>
+                  <a:pt x="831324" y="244281"/>
+                </a:lnTo>
+                <a:lnTo>
+                  <a:pt x="997559" y="164202"/>
+                </a:lnTo>
+                <a:cubicBezTo>
+                  <a:pt x="1247540" y="58468"/>
+                  <a:pt x="1522381" y="0"/>
+                  <a:pt x="1810878" y="0"/>
+                </a:cubicBezTo>
+                <a:cubicBezTo>
+                  <a:pt x="2027251" y="0"/>
+                  <a:pt x="2235942" y="32888"/>
+                  <a:pt x="2432225" y="93939"/>
+                </a:cubicBezTo>
+                <a:close/>
+              </a:path>
+            </a:pathLst>
+          </a:custGeom>
+          <a:gradFill>
+            <a:gsLst>
+              <a:gs pos="29000">
+                <a:srgbClr val="000000">
+                  <a:alpha val="0"/>
+                </a:srgbClr>
+              </a:gs>
+              <a:gs pos="100000">
+                <a:schemeClr val="accent1">
+                  <a:alpha val="43000"/>
+                </a:schemeClr>
+              </a:gs>
+            </a:gsLst>
+            <a:lin ang="1800000" scaled="0"/>
+          </a:gradFill>
+          <a:ln>
+            <a:noFill/>
+          </a:ln>
+        </p:spPr>
+        <p:style>
+          <a:lnRef idx="2">
+            <a:schemeClr val="accent1">
+              <a:shade val="50000"/>
+            </a:schemeClr>
+          </a:lnRef>
+          <a:fillRef idx="1">
+            <a:schemeClr val="accent1"/>
+          </a:fillRef>
+          <a:effectRef idx="0">
+            <a:schemeClr val="accent1"/>
+          </a:effectRef>
+          <a:fontRef idx="minor">
+            <a:schemeClr val="lt1"/>
+          </a:fontRef>
+        </p:style>
+        <p:txBody>
+          <a:bodyPr wrap="square" rtlCol="0" anchor="ctr">
+            <a:noAutofit/>
+          </a:bodyPr>
+          <a:lstStyle/>
+          <a:p>
+            <a:pPr algn="ctr"/>
+            <a:endParaRPr lang="en-US" dirty="0"/>
+          </a:p>
+        </p:txBody>
+      </p:sp>
+      <p:sp>
+        <p:nvSpPr>
+          <p:cNvPr id="20" name="Rectangle 19">
+            <a:extLst>
+              <a:ext uri="{FF2B5EF4-FFF2-40B4-BE49-F238E27FC236}">
+                <a16:creationId xmlns:a16="http://schemas.microsoft.com/office/drawing/2014/main" id="{27FCB3E1-5046-0D6D-E9DB-85D3A20161CD}"/>
+              </a:ext>
+              <a:ext uri="{C183D7F6-B498-43B3-948B-1728B52AA6E4}">
+                <adec:decorative xmlns:adec="http://schemas.microsoft.com/office/drawing/2017/decorative" val="1"/>
+              </a:ext>
+            </a:extLst>
+          </p:cNvPr>
+          <p:cNvSpPr>
+            <a:spLocks noGrp="1" noRot="1" noChangeAspect="1" noMove="1" noResize="1" noEditPoints="1" noAdjustHandles="1" noChangeArrowheads="1" noChangeShapeType="1" noTextEdit="1"/>
+          </p:cNvSpPr>
+          <p:nvPr>
+            <p:extLst>
+              <p:ext uri="{386F3935-93C4-4BCD-93E2-E3B085C9AB24}">
+                <p16:designElem xmlns:p16="http://schemas.microsoft.com/office/powerpoint/2015/main" val="1"/>
+              </p:ext>
+            </p:extLst>
+          </p:nvPr>
+        </p:nvSpPr>
+        <p:spPr>
+          <a:xfrm rot="5400000" flipH="1">
+            <a:off x="-1410093" y="1399943"/>
+            <a:ext cx="6858003" cy="4037835"/>
+          </a:xfrm>
+          <a:prstGeom prst="rect">
+            <a:avLst/>
+          </a:prstGeom>
+          <a:gradFill>
+            <a:gsLst>
+              <a:gs pos="0">
+                <a:srgbClr val="000000">
+                  <a:alpha val="0"/>
+                </a:srgbClr>
+              </a:gs>
+              <a:gs pos="99000">
+                <a:schemeClr val="accent1">
+                  <a:lumMod val="60000"/>
+                  <a:lumOff val="40000"/>
+                  <a:alpha val="11000"/>
+                </a:schemeClr>
+              </a:gs>
+            </a:gsLst>
+            <a:lin ang="7200000" scaled="0"/>
+          </a:gradFill>
+          <a:ln>
+            <a:noFill/>
+          </a:ln>
+        </p:spPr>
+        <p:style>
+          <a:lnRef idx="2">
+            <a:schemeClr val="accent1">
+              <a:shade val="50000"/>
+            </a:schemeClr>
+          </a:lnRef>
+          <a:fillRef idx="1">
+            <a:schemeClr val="accent1"/>
+          </a:fillRef>
+          <a:effectRef idx="0">
+            <a:schemeClr val="accent1"/>
+          </a:effectRef>
+          <a:fontRef idx="minor">
+            <a:schemeClr val="lt1"/>
+          </a:fontRef>
+        </p:style>
+        <p:txBody>
+          <a:bodyPr rtlCol="0" anchor="ctr"/>
+          <a:lstStyle/>
+          <a:p>
+            <a:pPr algn="ctr"/>
+            <a:endParaRPr lang="en-US" dirty="0"/>
+          </a:p>
+        </p:txBody>
+      </p:sp>
       <p:sp>
         <p:nvSpPr>
           <p:cNvPr id="2" name="Title 1">
             <a:extLst>
               <a:ext uri="{FF2B5EF4-FFF2-40B4-BE49-F238E27FC236}">
-                <a16:creationId xmlns:a16="http://schemas.microsoft.com/office/drawing/2014/main" id="{0E9721CE-7FDB-6F1E-862D-17EEEB49DF9B}"/>
+                <a16:creationId xmlns:a16="http://schemas.microsoft.com/office/drawing/2014/main" id="{A8B4F316-66AE-96F3-5B49-868141F72C72}"/>
               </a:ext>
             </a:extLst>
           </p:cNvPr>
@@ -19382,14 +20422,26 @@
             <p:ph type="title"/>
           </p:nvPr>
         </p:nvSpPr>
-        <p:spPr/>
+        <p:spPr>
+          <a:xfrm>
+            <a:off x="748475" y="2655150"/>
+            <a:ext cx="2101666" cy="879468"/>
+          </a:xfrm>
+        </p:spPr>
         <p:txBody>
-          <a:bodyPr/>
+          <a:bodyPr anchor="b">
+            <a:normAutofit/>
+          </a:bodyPr>
           <a:lstStyle/>
           <a:p>
+            <a:pPr algn="r"/>
             <a:r>
-              <a:rPr lang="en-US" dirty="0"/>
-              <a:t>Copilot</a:t>
+              <a:rPr lang="en-US" sz="4000" dirty="0">
+                <a:solidFill>
+                  <a:srgbClr val="FFFFFF"/>
+                </a:solidFill>
+              </a:rPr>
+              <a:t>CoPilot</a:t>
             </a:r>
           </a:p>
         </p:txBody>
@@ -19399,7 +20451,7 @@
           <p:cNvPr id="3" name="Content Placeholder 2">
             <a:extLst>
               <a:ext uri="{FF2B5EF4-FFF2-40B4-BE49-F238E27FC236}">
-                <a16:creationId xmlns:a16="http://schemas.microsoft.com/office/drawing/2014/main" id="{355AB5C8-28F5-9043-0482-85B2C28C3504}"/>
+                <a16:creationId xmlns:a16="http://schemas.microsoft.com/office/drawing/2014/main" id="{27033F78-12A5-C599-2958-D2A9138E70D2}"/>
               </a:ext>
             </a:extLst>
           </p:cNvPr>
@@ -19410,19 +20462,142 @@
             <p:ph idx="1"/>
           </p:nvPr>
         </p:nvSpPr>
-        <p:spPr/>
+        <p:spPr>
+          <a:xfrm>
+            <a:off x="4377019" y="10138"/>
+            <a:ext cx="7490010" cy="6726838"/>
+          </a:xfrm>
+        </p:spPr>
         <p:txBody>
-          <a:bodyPr/>
+          <a:bodyPr anchor="ctr">
+            <a:normAutofit fontScale="92500" lnSpcReduction="20000"/>
+          </a:bodyPr>
           <a:lstStyle/>
           <a:p>
-            <a:endParaRPr lang="en-US" dirty="0"/>
+            <a:r>
+              <a:rPr lang="en-US" sz="2000" dirty="0"/>
+              <a:t>Algorithm Selection</a:t>
+            </a:r>
+          </a:p>
+          <a:p>
+            <a:pPr lvl="1"/>
+            <a:r>
+              <a:rPr lang="en-US" sz="1800" dirty="0"/>
+              <a:t>Use a one way hashing algorithm such as Argon2id, with a unique random salt is the best way to store the passwords rather then a reversible encryption. </a:t>
+            </a:r>
+          </a:p>
+          <a:p>
+            <a:pPr lvl="1"/>
+            <a:r>
+              <a:rPr lang="en-US" sz="1800" dirty="0"/>
+              <a:t>This is the best choice of algorithm for the prompt, it is both very fast and highly secure.</a:t>
+            </a:r>
+            <a:endParaRPr lang="en-US" sz="1050" dirty="0"/>
+          </a:p>
+          <a:p>
+            <a:r>
+              <a:rPr lang="en-US" sz="2000" dirty="0"/>
+              <a:t>Optimization </a:t>
+            </a:r>
+          </a:p>
+          <a:p>
+            <a:pPr lvl="1"/>
+            <a:r>
+              <a:rPr lang="en-US" sz="1800" dirty="0"/>
+              <a:t>AES-256-GCM is the primary choice for encryption of large streams of data.</a:t>
+            </a:r>
+            <a:endParaRPr lang="en-US" sz="1200" dirty="0"/>
+          </a:p>
+          <a:p>
+            <a:pPr lvl="1"/>
+            <a:r>
+              <a:rPr lang="en-US" sz="1800" dirty="0"/>
+              <a:t>If the limited hardware does not include AES acceleration, the fallback algorithm of choice is ChaCha20-Poly1305 which is significantly faster then AES when it doesn’t have ideal hardware. </a:t>
+            </a:r>
+          </a:p>
+          <a:p>
+            <a:pPr lvl="1"/>
+            <a:r>
+              <a:rPr lang="en-US" sz="1800" dirty="0"/>
+              <a:t>Either of these encryption algorithms will be able to meet the requirements outlined by the prompt.</a:t>
+            </a:r>
+          </a:p>
+          <a:p>
+            <a:r>
+              <a:rPr lang="en-US" sz="2000" dirty="0"/>
+              <a:t>Complexity</a:t>
+            </a:r>
+          </a:p>
+          <a:p>
+            <a:pPr lvl="1"/>
+            <a:r>
+              <a:rPr lang="en-US" sz="1600" dirty="0"/>
+              <a:t>Constant time:</a:t>
+            </a:r>
+          </a:p>
+          <a:p>
+            <a:pPr lvl="2"/>
+            <a:r>
+              <a:rPr lang="en-US" sz="1700" dirty="0"/>
+              <a:t>SHA-256 Hashing was the recommended encryption to use for a constant time algorithm.</a:t>
+            </a:r>
+          </a:p>
+          <a:p>
+            <a:pPr lvl="1"/>
+            <a:r>
+              <a:rPr lang="en-US" sz="1600" dirty="0"/>
+              <a:t>Logarithmic time:</a:t>
+            </a:r>
+          </a:p>
+          <a:p>
+            <a:pPr lvl="2"/>
+            <a:r>
+              <a:rPr lang="en-US" sz="1700" dirty="0"/>
+              <a:t>The license plate must first be converted into a base-36 integer and then used in modular exponentiation to best encrypt it in logarithmic time.</a:t>
+            </a:r>
+            <a:endParaRPr lang="en-US" sz="1000" dirty="0"/>
+          </a:p>
+          <a:p>
+            <a:r>
+              <a:rPr lang="en-US" sz="2000" dirty="0"/>
+              <a:t>Security Analysis</a:t>
+            </a:r>
+          </a:p>
+          <a:p>
+            <a:pPr lvl="1"/>
+            <a:r>
+              <a:rPr lang="en-US" sz="1600" dirty="0"/>
+              <a:t>Collision resistance → use a strong hash like SHA-3-512</a:t>
+            </a:r>
+          </a:p>
+          <a:p>
+            <a:pPr lvl="1"/>
+            <a:r>
+              <a:rPr lang="en-US" sz="1600" dirty="0"/>
+              <a:t>Slow computation → use a memory-hard KDF like Argon2id</a:t>
+            </a:r>
+          </a:p>
+          <a:p>
+            <a:pPr lvl="1"/>
+            <a:r>
+              <a:rPr lang="en-US" sz="1600" dirty="0"/>
+              <a:t>Tamper detection → chain hashes like a blockchain and use of a merkle tree</a:t>
+            </a:r>
+          </a:p>
+          <a:p>
+            <a:pPr lvl="1"/>
+            <a:r>
+              <a:rPr lang="en-US" sz="1600" dirty="0"/>
+              <a:t>Use a layered Argon2id + SHA-3-512 + Hash Chain + Merkle tree to best ensure security</a:t>
+            </a:r>
+            <a:endParaRPr lang="en-US" sz="2100" dirty="0"/>
           </a:p>
         </p:txBody>
       </p:sp>
     </p:spTree>
     <p:extLst>
       <p:ext uri="{BB962C8B-B14F-4D97-AF65-F5344CB8AC3E}">
-        <p14:creationId xmlns:p14="http://schemas.microsoft.com/office/powerpoint/2010/main" val="3330183413"/>
+        <p14:creationId xmlns:p14="http://schemas.microsoft.com/office/powerpoint/2010/main" val="3932995078"/>
       </p:ext>
     </p:extLst>
   </p:cSld>
